--- a/plugins/gradient-cio/assets/examples/gradient-portfolio-attribution.pptx
+++ b/plugins/gradient-cio/assets/examples/gradient-portfolio-attribution.pptx
@@ -424,6 +424,15 @@
       <c:legendPos val="b"/>
       <c:layout/>
       <c:overlay val="0"/>
+      <c:txPr>
+        <a:bodyPr/>
+        <a:lstStyle/>
+        <a:p>
+          <a:pPr>
+            <a:defRPr sz="700"/>
+          </a:pPr>
+        </a:p>
+      </c:txPr>
     </c:legend>
     <c:plotVisOnly val="1"/>
     <c:dispBlanksAs val="gap"/>
@@ -698,6 +707,147 @@
               </a:solidFill>
             </c:spPr>
           </c:dPt>
+          <c:dLbls>
+            <c:dLbl>
+              <c:idx val="0"/>
+              <c:tx>
+                <c:rich>
+                  <a:bodyPr/>
+                  <a:lstStyle/>
+                  <a:p>
+                    <a:r>
+                      <a:rPr lang="en-US" sz="800"/>
+                      <a:t>7.8%</a:t>
+                    </a:r>
+                  </a:p>
+                </c:rich>
+              </c:tx>
+              <c:dLblPos val="outEnd"/>
+              <c:showLegendKey val="0"/>
+              <c:showVal val="0"/>
+              <c:showCatName val="0"/>
+              <c:showSerName val="0"/>
+              <c:showPercent val="0"/>
+              <c:showBubbleSize val="0"/>
+            </c:dLbl>
+            <c:dLbl>
+              <c:idx val="1"/>
+              <c:tx>
+                <c:rich>
+                  <a:bodyPr/>
+                  <a:lstStyle/>
+                  <a:p>
+                    <a:r>
+                      <a:rPr lang="en-US" sz="800"/>
+                      <a:t>7.5%</a:t>
+                    </a:r>
+                  </a:p>
+                </c:rich>
+              </c:tx>
+              <c:dLblPos val="outEnd"/>
+              <c:showLegendKey val="0"/>
+              <c:showVal val="0"/>
+              <c:showCatName val="0"/>
+              <c:showSerName val="0"/>
+              <c:showPercent val="0"/>
+              <c:showBubbleSize val="0"/>
+            </c:dLbl>
+            <c:dLbl>
+              <c:idx val="2"/>
+              <c:tx>
+                <c:rich>
+                  <a:bodyPr/>
+                  <a:lstStyle/>
+                  <a:p>
+                    <a:r>
+                      <a:rPr lang="en-US" sz="800"/>
+                      <a:t>4.8%</a:t>
+                    </a:r>
+                  </a:p>
+                </c:rich>
+              </c:tx>
+              <c:dLblPos val="outEnd"/>
+              <c:showLegendKey val="0"/>
+              <c:showVal val="0"/>
+              <c:showCatName val="0"/>
+              <c:showSerName val="0"/>
+              <c:showPercent val="0"/>
+              <c:showBubbleSize val="0"/>
+            </c:dLbl>
+            <c:dLbl>
+              <c:idx val="3"/>
+              <c:tx>
+                <c:rich>
+                  <a:bodyPr/>
+                  <a:lstStyle/>
+                  <a:p>
+                    <a:r>
+                      <a:rPr lang="en-US" sz="800"/>
+                      <a:t>4.1%</a:t>
+                    </a:r>
+                  </a:p>
+                </c:rich>
+              </c:tx>
+              <c:dLblPos val="outEnd"/>
+              <c:showLegendKey val="0"/>
+              <c:showVal val="0"/>
+              <c:showCatName val="0"/>
+              <c:showSerName val="0"/>
+              <c:showPercent val="0"/>
+              <c:showBubbleSize val="0"/>
+            </c:dLbl>
+            <c:dLbl>
+              <c:idx val="4"/>
+              <c:tx>
+                <c:rich>
+                  <a:bodyPr/>
+                  <a:lstStyle/>
+                  <a:p>
+                    <a:r>
+                      <a:rPr lang="en-US" sz="800"/>
+                      <a:t>8.0%</a:t>
+                    </a:r>
+                  </a:p>
+                </c:rich>
+              </c:tx>
+              <c:dLblPos val="outEnd"/>
+              <c:showLegendKey val="0"/>
+              <c:showVal val="0"/>
+              <c:showCatName val="0"/>
+              <c:showSerName val="0"/>
+              <c:showPercent val="0"/>
+              <c:showBubbleSize val="0"/>
+            </c:dLbl>
+            <c:dLbl>
+              <c:idx val="5"/>
+              <c:tx>
+                <c:rich>
+                  <a:bodyPr/>
+                  <a:lstStyle/>
+                  <a:p>
+                    <a:r>
+                      <a:rPr lang="en-US" sz="800"/>
+                      <a:t>9.3%</a:t>
+                    </a:r>
+                  </a:p>
+                </c:rich>
+              </c:tx>
+              <c:dLblPos val="outEnd"/>
+              <c:showLegendKey val="0"/>
+              <c:showVal val="0"/>
+              <c:showCatName val="0"/>
+              <c:showSerName val="0"/>
+              <c:showPercent val="0"/>
+              <c:showBubbleSize val="0"/>
+            </c:dLbl>
+            <c:dLblPos val="outEnd"/>
+            <c:showLegendKey val="0"/>
+            <c:showVal val="0"/>
+            <c:showCatName val="0"/>
+            <c:showSerName val="0"/>
+            <c:showPercent val="0"/>
+            <c:showBubbleSize val="0"/>
+          </c:dLbls>
           <c:cat>
             <c:strRef>
               <c:f>Sheet1!$A$2:$A$7</c:f>
@@ -917,6 +1067,147 @@
               </a:solidFill>
             </c:spPr>
           </c:dPt>
+          <c:dLbls>
+            <c:dLbl>
+              <c:idx val="0"/>
+              <c:tx>
+                <c:rich>
+                  <a:bodyPr/>
+                  <a:lstStyle/>
+                  <a:p>
+                    <a:r>
+                      <a:rPr lang="en-US" sz="800"/>
+                      <a:t>-0.6pp</a:t>
+                    </a:r>
+                  </a:p>
+                </c:rich>
+              </c:tx>
+              <c:dLblPos val="outEnd"/>
+              <c:showLegendKey val="0"/>
+              <c:showVal val="0"/>
+              <c:showCatName val="0"/>
+              <c:showSerName val="0"/>
+              <c:showPercent val="0"/>
+              <c:showBubbleSize val="0"/>
+            </c:dLbl>
+            <c:dLbl>
+              <c:idx val="1"/>
+              <c:tx>
+                <c:rich>
+                  <a:bodyPr/>
+                  <a:lstStyle/>
+                  <a:p>
+                    <a:r>
+                      <a:rPr lang="en-US" sz="800"/>
+                      <a:t>+0.3pp</a:t>
+                    </a:r>
+                  </a:p>
+                </c:rich>
+              </c:tx>
+              <c:dLblPos val="outEnd"/>
+              <c:showLegendKey val="0"/>
+              <c:showVal val="0"/>
+              <c:showCatName val="0"/>
+              <c:showSerName val="0"/>
+              <c:showPercent val="0"/>
+              <c:showBubbleSize val="0"/>
+            </c:dLbl>
+            <c:dLbl>
+              <c:idx val="2"/>
+              <c:tx>
+                <c:rich>
+                  <a:bodyPr/>
+                  <a:lstStyle/>
+                  <a:p>
+                    <a:r>
+                      <a:rPr lang="en-US" sz="800"/>
+                      <a:t>+0.3pp</a:t>
+                    </a:r>
+                  </a:p>
+                </c:rich>
+              </c:tx>
+              <c:dLblPos val="outEnd"/>
+              <c:showLegendKey val="0"/>
+              <c:showVal val="0"/>
+              <c:showCatName val="0"/>
+              <c:showSerName val="0"/>
+              <c:showPercent val="0"/>
+              <c:showBubbleSize val="0"/>
+            </c:dLbl>
+            <c:dLbl>
+              <c:idx val="3"/>
+              <c:tx>
+                <c:rich>
+                  <a:bodyPr/>
+                  <a:lstStyle/>
+                  <a:p>
+                    <a:r>
+                      <a:rPr lang="en-US" sz="800"/>
+                      <a:t>+0.3pp</a:t>
+                    </a:r>
+                  </a:p>
+                </c:rich>
+              </c:tx>
+              <c:dLblPos val="outEnd"/>
+              <c:showLegendKey val="0"/>
+              <c:showVal val="0"/>
+              <c:showCatName val="0"/>
+              <c:showSerName val="0"/>
+              <c:showPercent val="0"/>
+              <c:showBubbleSize val="0"/>
+            </c:dLbl>
+            <c:dLbl>
+              <c:idx val="4"/>
+              <c:tx>
+                <c:rich>
+                  <a:bodyPr/>
+                  <a:lstStyle/>
+                  <a:p>
+                    <a:r>
+                      <a:rPr lang="en-US" sz="800"/>
+                      <a:t>-0.3pp</a:t>
+                    </a:r>
+                  </a:p>
+                </c:rich>
+              </c:tx>
+              <c:dLblPos val="outEnd"/>
+              <c:showLegendKey val="0"/>
+              <c:showVal val="0"/>
+              <c:showCatName val="0"/>
+              <c:showSerName val="0"/>
+              <c:showPercent val="0"/>
+              <c:showBubbleSize val="0"/>
+            </c:dLbl>
+            <c:dLbl>
+              <c:idx val="5"/>
+              <c:tx>
+                <c:rich>
+                  <a:bodyPr/>
+                  <a:lstStyle/>
+                  <a:p>
+                    <a:r>
+                      <a:rPr lang="en-US" sz="800"/>
+                      <a:t>-0.2pp</a:t>
+                    </a:r>
+                  </a:p>
+                </c:rich>
+              </c:tx>
+              <c:dLblPos val="outEnd"/>
+              <c:showLegendKey val="0"/>
+              <c:showVal val="0"/>
+              <c:showCatName val="0"/>
+              <c:showSerName val="0"/>
+              <c:showPercent val="0"/>
+              <c:showBubbleSize val="0"/>
+            </c:dLbl>
+            <c:dLblPos val="outEnd"/>
+            <c:showLegendKey val="0"/>
+            <c:showVal val="0"/>
+            <c:showCatName val="0"/>
+            <c:showSerName val="0"/>
+            <c:showPercent val="0"/>
+            <c:showBubbleSize val="0"/>
+          </c:dLbls>
           <c:cat>
             <c:strRef>
               <c:f>Sheet1!$A$2:$A$7</c:f>
@@ -1178,7 +1469,10 @@
       </c:catAx>
       <c:valAx>
         <c:axId val="2140495176"/>
-        <c:scaling/>
+        <c:scaling>
+          <c:max val="-0.2"/>
+          <c:min val="-0.6000000000000001"/>
+        </c:scaling>
         <c:delete val="0"/>
         <c:axPos val="l"/>
         <c:majorGridlines/>
@@ -1197,6 +1491,7 @@
         </c:txPr>
         <c:crossAx val="2118791784"/>
         <c:crosses val="autoZero"/>
+        <c:majorUnit val="0.1"/>
       </c:valAx>
     </c:plotArea>
     <c:plotVisOnly val="1"/>
@@ -1401,7 +1696,10 @@
       </c:catAx>
       <c:valAx>
         <c:axId val="2140495176"/>
-        <c:scaling/>
+        <c:scaling>
+          <c:max val="0.0"/>
+          <c:min val="-1.5"/>
+        </c:scaling>
         <c:delete val="0"/>
         <c:axPos val="l"/>
         <c:majorGridlines/>
@@ -1420,12 +1718,22 @@
         </c:txPr>
         <c:crossAx val="2118791784"/>
         <c:crosses val="autoZero"/>
+        <c:majorUnit val="0.5"/>
       </c:valAx>
     </c:plotArea>
     <c:legend>
       <c:legendPos val="b"/>
       <c:layout/>
       <c:overlay val="0"/>
+      <c:txPr>
+        <a:bodyPr/>
+        <a:lstStyle/>
+        <a:p>
+          <a:pPr>
+            <a:defRPr sz="700"/>
+          </a:pPr>
+        </a:p>
+      </c:txPr>
     </c:legend>
     <c:plotVisOnly val="1"/>
     <c:dispBlanksAs val="gap"/>
@@ -2174,6 +2482,15 @@
       <c:legendPos val="b"/>
       <c:layout/>
       <c:overlay val="0"/>
+      <c:txPr>
+        <a:bodyPr/>
+        <a:lstStyle/>
+        <a:p>
+          <a:pPr>
+            <a:defRPr sz="700"/>
+          </a:pPr>
+        </a:p>
+      </c:txPr>
     </c:legend>
     <c:plotVisOnly val="1"/>
     <c:dispBlanksAs val="gap"/>
@@ -2247,6 +2564,81 @@
               </a:solidFill>
             </c:spPr>
           </c:dPt>
+          <c:dLbls>
+            <c:dLbl>
+              <c:idx val="0"/>
+              <c:tx>
+                <c:rich>
+                  <a:bodyPr/>
+                  <a:lstStyle/>
+                  <a:p>
+                    <a:r>
+                      <a:rPr lang="en-US" sz="800"/>
+                      <a:t>26%</a:t>
+                    </a:r>
+                  </a:p>
+                </c:rich>
+              </c:tx>
+              <c:dLblPos val="outEnd"/>
+              <c:showLegendKey val="0"/>
+              <c:showVal val="0"/>
+              <c:showCatName val="0"/>
+              <c:showSerName val="0"/>
+              <c:showPercent val="0"/>
+              <c:showBubbleSize val="0"/>
+            </c:dLbl>
+            <c:dLbl>
+              <c:idx val="1"/>
+              <c:tx>
+                <c:rich>
+                  <a:bodyPr/>
+                  <a:lstStyle/>
+                  <a:p>
+                    <a:r>
+                      <a:rPr lang="en-US" sz="800"/>
+                      <a:t>30%</a:t>
+                    </a:r>
+                  </a:p>
+                </c:rich>
+              </c:tx>
+              <c:dLblPos val="outEnd"/>
+              <c:showLegendKey val="0"/>
+              <c:showVal val="0"/>
+              <c:showCatName val="0"/>
+              <c:showSerName val="0"/>
+              <c:showPercent val="0"/>
+              <c:showBubbleSize val="0"/>
+            </c:dLbl>
+            <c:dLbl>
+              <c:idx val="2"/>
+              <c:tx>
+                <c:rich>
+                  <a:bodyPr/>
+                  <a:lstStyle/>
+                  <a:p>
+                    <a:r>
+                      <a:rPr lang="en-US" sz="800"/>
+                      <a:t>44%</a:t>
+                    </a:r>
+                  </a:p>
+                </c:rich>
+              </c:tx>
+              <c:dLblPos val="outEnd"/>
+              <c:showLegendKey val="0"/>
+              <c:showVal val="0"/>
+              <c:showCatName val="0"/>
+              <c:showSerName val="0"/>
+              <c:showPercent val="0"/>
+              <c:showBubbleSize val="0"/>
+            </c:dLbl>
+            <c:dLblPos val="outEnd"/>
+            <c:showLegendKey val="0"/>
+            <c:showVal val="0"/>
+            <c:showCatName val="0"/>
+            <c:showSerName val="0"/>
+            <c:showPercent val="0"/>
+            <c:showBubbleSize val="0"/>
+          </c:dLbls>
           <c:cat>
             <c:strRef>
               <c:f>Sheet1!$A$2:$A$4</c:f>
@@ -2424,6 +2816,81 @@
               </a:solidFill>
             </c:spPr>
           </c:dPt>
+          <c:dLbls>
+            <c:dLbl>
+              <c:idx val="0"/>
+              <c:tx>
+                <c:rich>
+                  <a:bodyPr/>
+                  <a:lstStyle/>
+                  <a:p>
+                    <a:r>
+                      <a:rPr lang="en-US" sz="800"/>
+                      <a:t>-50%</a:t>
+                    </a:r>
+                  </a:p>
+                </c:rich>
+              </c:tx>
+              <c:dLblPos val="outEnd"/>
+              <c:showLegendKey val="0"/>
+              <c:showVal val="0"/>
+              <c:showCatName val="0"/>
+              <c:showSerName val="0"/>
+              <c:showPercent val="0"/>
+              <c:showBubbleSize val="0"/>
+            </c:dLbl>
+            <c:dLbl>
+              <c:idx val="1"/>
+              <c:tx>
+                <c:rich>
+                  <a:bodyPr/>
+                  <a:lstStyle/>
+                  <a:p>
+                    <a:r>
+                      <a:rPr lang="en-US" sz="800"/>
+                      <a:t>+25%</a:t>
+                    </a:r>
+                  </a:p>
+                </c:rich>
+              </c:tx>
+              <c:dLblPos val="outEnd"/>
+              <c:showLegendKey val="0"/>
+              <c:showVal val="0"/>
+              <c:showCatName val="0"/>
+              <c:showSerName val="0"/>
+              <c:showPercent val="0"/>
+              <c:showBubbleSize val="0"/>
+            </c:dLbl>
+            <c:dLbl>
+              <c:idx val="2"/>
+              <c:tx>
+                <c:rich>
+                  <a:bodyPr/>
+                  <a:lstStyle/>
+                  <a:p>
+                    <a:r>
+                      <a:rPr lang="en-US" sz="800"/>
+                      <a:t>-25%</a:t>
+                    </a:r>
+                  </a:p>
+                </c:rich>
+              </c:tx>
+              <c:dLblPos val="outEnd"/>
+              <c:showLegendKey val="0"/>
+              <c:showVal val="0"/>
+              <c:showCatName val="0"/>
+              <c:showSerName val="0"/>
+              <c:showPercent val="0"/>
+              <c:showBubbleSize val="0"/>
+            </c:dLbl>
+            <c:dLblPos val="outEnd"/>
+            <c:showLegendKey val="0"/>
+            <c:showVal val="0"/>
+            <c:showCatName val="0"/>
+            <c:showSerName val="0"/>
+            <c:showPercent val="0"/>
+            <c:showBubbleSize val="0"/>
+          </c:dLbls>
           <c:cat>
             <c:strRef>
               <c:f>Sheet1!$A$2:$A$4</c:f>
@@ -2593,6 +3060,59 @@
               </a:solidFill>
             </c:spPr>
           </c:dPt>
+          <c:dLbls>
+            <c:dLbl>
+              <c:idx val="0"/>
+              <c:tx>
+                <c:rich>
+                  <a:bodyPr/>
+                  <a:lstStyle/>
+                  <a:p>
+                    <a:r>
+                      <a:rPr lang="en-US" sz="800"/>
+                      <a:t>-0.4pp</a:t>
+                    </a:r>
+                  </a:p>
+                </c:rich>
+              </c:tx>
+              <c:dLblPos val="outEnd"/>
+              <c:showLegendKey val="0"/>
+              <c:showVal val="0"/>
+              <c:showCatName val="0"/>
+              <c:showSerName val="0"/>
+              <c:showPercent val="0"/>
+              <c:showBubbleSize val="0"/>
+            </c:dLbl>
+            <c:dLbl>
+              <c:idx val="1"/>
+              <c:tx>
+                <c:rich>
+                  <a:bodyPr/>
+                  <a:lstStyle/>
+                  <a:p>
+                    <a:r>
+                      <a:rPr lang="en-US" sz="800"/>
+                      <a:t>-0.2pp</a:t>
+                    </a:r>
+                  </a:p>
+                </c:rich>
+              </c:tx>
+              <c:dLblPos val="outEnd"/>
+              <c:showLegendKey val="0"/>
+              <c:showVal val="0"/>
+              <c:showCatName val="0"/>
+              <c:showSerName val="0"/>
+              <c:showPercent val="0"/>
+              <c:showBubbleSize val="0"/>
+            </c:dLbl>
+            <c:dLblPos val="outEnd"/>
+            <c:showLegendKey val="0"/>
+            <c:showVal val="0"/>
+            <c:showCatName val="0"/>
+            <c:showSerName val="0"/>
+            <c:showPercent val="0"/>
+            <c:showBubbleSize val="0"/>
+          </c:dLbls>
           <c:cat>
             <c:strRef>
               <c:f>Sheet1!$A$2:$A$3</c:f>
@@ -5607,7 +6127,7 @@
         </p:nvSpPr>
         <p:spPr>
           <a:xfrm>
-            <a:off x="685800" y="1828800"/>
+            <a:off x="685800" y="1664208"/>
             <a:ext cx="9966960" cy="274320"/>
           </a:xfrm>
           <a:prstGeom prst="rect">
@@ -5625,7 +6145,7 @@
               <a:spcAft>
                 <a:spcPts val="0"/>
               </a:spcAft>
-              <a:defRPr sz="900" b="1">
+              <a:defRPr sz="850" b="1">
                 <a:solidFill>
                   <a:srgbClr val="C6F432"/>
                 </a:solidFill>
@@ -5649,7 +6169,7 @@
         </p:nvSpPr>
         <p:spPr>
           <a:xfrm>
-            <a:off x="685800" y="2176272"/>
+            <a:off x="685800" y="2011680"/>
             <a:ext cx="9966960" cy="1234440"/>
           </a:xfrm>
           <a:prstGeom prst="rect">
@@ -5667,7 +6187,7 @@
               <a:spcAft>
                 <a:spcPts val="0"/>
               </a:spcAft>
-              <a:defRPr sz="3400" b="1">
+              <a:defRPr sz="3300" b="1">
                 <a:solidFill>
                   <a:srgbClr val="FFFFFF"/>
                 </a:solidFill>
@@ -5678,7 +6198,7 @@
               <a:rPr>
                 <a:latin typeface="Inter"/>
               </a:rPr>
-              <a:t>Example Attribution Portfolio (TEST)</a:t>
+              <a:t>Northstar Total Fund</a:t>
             </a:r>
           </a:p>
         </p:txBody>
@@ -5691,8 +6211,8 @@
         </p:nvSpPr>
         <p:spPr>
           <a:xfrm>
-            <a:off x="685800" y="3456432"/>
-            <a:ext cx="9692640" cy="640080"/>
+            <a:off x="685800" y="3273552"/>
+            <a:ext cx="9692640" cy="594360"/>
           </a:xfrm>
           <a:prstGeom prst="rect">
             <a:avLst/>
@@ -5709,7 +6229,7 @@
               <a:spcAft>
                 <a:spcPts val="0"/>
               </a:spcAft>
-              <a:defRPr sz="1500" b="0">
+              <a:defRPr sz="1400" b="0">
                 <a:solidFill>
                   <a:srgbClr val="9AA5B1"/>
                 </a:solidFill>
@@ -5720,7 +6240,7 @@
               <a:rPr>
                 <a:latin typeface="Inter"/>
               </a:rPr>
-              <a:t>Historical and governed ex ante attribution · period to 2026-06-30 · prepared for the Investment Committee (TEST)</a:t>
+              <a:t>Historical and governed ex ante attribution · prepared for the Investment Committee</a:t>
             </a:r>
           </a:p>
         </p:txBody>
@@ -5733,8 +6253,8 @@
         </p:nvSpPr>
         <p:spPr>
           <a:xfrm>
-            <a:off x="685800" y="4251960"/>
-            <a:ext cx="1005840" cy="54864"/>
+            <a:off x="685800" y="4005072"/>
+            <a:ext cx="822960" cy="45720"/>
           </a:xfrm>
           <a:prstGeom prst="rect">
             <a:avLst/>
@@ -5782,8 +6302,8 @@
         </p:nvSpPr>
         <p:spPr>
           <a:xfrm>
-            <a:off x="685800" y="4572000"/>
-            <a:ext cx="3063240" cy="182880"/>
+            <a:off x="685800" y="4315968"/>
+            <a:ext cx="4709160" cy="182880"/>
           </a:xfrm>
           <a:prstGeom prst="rect">
             <a:avLst/>
@@ -5824,8 +6344,8 @@
         </p:nvSpPr>
         <p:spPr>
           <a:xfrm>
-            <a:off x="685800" y="4773168"/>
-            <a:ext cx="3063240" cy="320040"/>
+            <a:off x="685800" y="4507992"/>
+            <a:ext cx="4709160" cy="310896"/>
           </a:xfrm>
           <a:prstGeom prst="rect">
             <a:avLst/>
@@ -5866,8 +6386,8 @@
         </p:nvSpPr>
         <p:spPr>
           <a:xfrm>
-            <a:off x="4160520" y="4572000"/>
-            <a:ext cx="3063240" cy="182880"/>
+            <a:off x="5852160" y="4315968"/>
+            <a:ext cx="4709160" cy="182880"/>
           </a:xfrm>
           <a:prstGeom prst="rect">
             <a:avLst/>
@@ -5895,7 +6415,7 @@
               <a:rPr>
                 <a:latin typeface="Inter"/>
               </a:rPr>
-              <a:t>EX ANTE AS OF</a:t>
+              <a:t>FORWARD VIEW AS OF</a:t>
             </a:r>
           </a:p>
         </p:txBody>
@@ -5908,8 +6428,8 @@
         </p:nvSpPr>
         <p:spPr>
           <a:xfrm>
-            <a:off x="4160520" y="4773168"/>
-            <a:ext cx="3063240" cy="320040"/>
+            <a:off x="5852160" y="4507992"/>
+            <a:ext cx="4709160" cy="310896"/>
           </a:xfrm>
           <a:prstGeom prst="rect">
             <a:avLst/>
@@ -5950,8 +6470,8 @@
         </p:nvSpPr>
         <p:spPr>
           <a:xfrm>
-            <a:off x="7635240" y="4572000"/>
-            <a:ext cx="3063240" cy="182880"/>
+            <a:off x="685800" y="4937759"/>
+            <a:ext cx="4709160" cy="182880"/>
           </a:xfrm>
           <a:prstGeom prst="rect">
             <a:avLst/>
@@ -5992,8 +6512,8 @@
         </p:nvSpPr>
         <p:spPr>
           <a:xfrm>
-            <a:off x="7635240" y="4773168"/>
-            <a:ext cx="3063240" cy="320040"/>
+            <a:off x="685800" y="5129783"/>
+            <a:ext cx="4709160" cy="310896"/>
           </a:xfrm>
           <a:prstGeom prst="rect">
             <a:avLst/>
@@ -6034,8 +6554,8 @@
         </p:nvSpPr>
         <p:spPr>
           <a:xfrm>
-            <a:off x="685800" y="5230368"/>
-            <a:ext cx="3063240" cy="182880"/>
+            <a:off x="5852160" y="4937759"/>
+            <a:ext cx="4709160" cy="182880"/>
           </a:xfrm>
           <a:prstGeom prst="rect">
             <a:avLst/>
@@ -6076,8 +6596,8 @@
         </p:nvSpPr>
         <p:spPr>
           <a:xfrm>
-            <a:off x="685800" y="5431536"/>
-            <a:ext cx="3063240" cy="320040"/>
+            <a:off x="5852160" y="5129783"/>
+            <a:ext cx="4709160" cy="310896"/>
           </a:xfrm>
           <a:prstGeom prst="rect">
             <a:avLst/>
@@ -6112,182 +6632,14 @@
       </p:sp>
       <p:sp>
         <p:nvSpPr>
-          <p:cNvPr id="17" name="TextBox 16"/>
-          <p:cNvSpPr txBox="1"/>
-          <p:nvPr/>
-        </p:nvSpPr>
-        <p:spPr>
-          <a:xfrm>
-            <a:off x="4160520" y="5230368"/>
-            <a:ext cx="3063240" cy="182880"/>
-          </a:xfrm>
-          <a:prstGeom prst="rect">
-            <a:avLst/>
-          </a:prstGeom>
-          <a:noFill/>
-        </p:spPr>
-        <p:txBody>
-          <a:bodyPr wrap="none" lIns="9144" rIns="9144" tIns="9144" bIns="9144" anchor="t">
-            <a:spAutoFit/>
-          </a:bodyPr>
-          <a:lstStyle/>
-          <a:p>
-            <a:pPr algn="l">
-              <a:spcAft>
-                <a:spcPts val="0"/>
-              </a:spcAft>
-              <a:defRPr sz="700" b="1">
-                <a:solidFill>
-                  <a:srgbClr val="8A94A1"/>
-                </a:solidFill>
-                <a:latin typeface="Inter"/>
-              </a:defRPr>
-            </a:pPr>
-            <a:r>
-              <a:rPr>
-                <a:latin typeface="Inter"/>
-              </a:rPr>
-              <a:t>PARENT COHORT</a:t>
-            </a:r>
-          </a:p>
-        </p:txBody>
-      </p:sp>
-      <p:sp>
-        <p:nvSpPr>
-          <p:cNvPr id="18" name="TextBox 17"/>
-          <p:cNvSpPr txBox="1"/>
-          <p:nvPr/>
-        </p:nvSpPr>
-        <p:spPr>
-          <a:xfrm>
-            <a:off x="4160520" y="5431536"/>
-            <a:ext cx="3063240" cy="320040"/>
-          </a:xfrm>
-          <a:prstGeom prst="rect">
-            <a:avLst/>
-          </a:prstGeom>
-          <a:noFill/>
-        </p:spPr>
-        <p:txBody>
-          <a:bodyPr wrap="none" lIns="9144" rIns="9144" tIns="9144" bIns="9144" anchor="t">
-            <a:spAutoFit/>
-          </a:bodyPr>
-          <a:lstStyle/>
-          <a:p>
-            <a:pPr algn="l">
-              <a:spcAft>
-                <a:spcPts val="0"/>
-              </a:spcAft>
-              <a:defRPr sz="1000" b="1">
-                <a:solidFill>
-                  <a:srgbClr val="FFFFFF"/>
-                </a:solidFill>
-                <a:latin typeface="Inter"/>
-              </a:defRPr>
-            </a:pPr>
-            <a:r>
-              <a:rPr>
-                <a:latin typeface="Inter"/>
-              </a:rPr>
-              <a:t>Root</a:t>
-            </a:r>
-          </a:p>
-        </p:txBody>
-      </p:sp>
-      <p:sp>
-        <p:nvSpPr>
-          <p:cNvPr id="19" name="TextBox 18"/>
-          <p:cNvSpPr txBox="1"/>
-          <p:nvPr/>
-        </p:nvSpPr>
-        <p:spPr>
-          <a:xfrm>
-            <a:off x="7635240" y="5230368"/>
-            <a:ext cx="3063240" cy="182880"/>
-          </a:xfrm>
-          <a:prstGeom prst="rect">
-            <a:avLst/>
-          </a:prstGeom>
-          <a:noFill/>
-        </p:spPr>
-        <p:txBody>
-          <a:bodyPr wrap="none" lIns="9144" rIns="9144" tIns="9144" bIns="9144" anchor="t">
-            <a:spAutoFit/>
-          </a:bodyPr>
-          <a:lstStyle/>
-          <a:p>
-            <a:pPr algn="l">
-              <a:spcAft>
-                <a:spcPts val="0"/>
-              </a:spcAft>
-              <a:defRPr sz="700" b="1">
-                <a:solidFill>
-                  <a:srgbClr val="8A94A1"/>
-                </a:solidFill>
-                <a:latin typeface="Inter"/>
-              </a:defRPr>
-            </a:pPr>
-            <a:r>
-              <a:rPr>
-                <a:latin typeface="Inter"/>
-              </a:rPr>
-              <a:t>DATA SCOPE</a:t>
-            </a:r>
-          </a:p>
-        </p:txBody>
-      </p:sp>
-      <p:sp>
-        <p:nvSpPr>
-          <p:cNvPr id="20" name="TextBox 19"/>
-          <p:cNvSpPr txBox="1"/>
-          <p:nvPr/>
-        </p:nvSpPr>
-        <p:spPr>
-          <a:xfrm>
-            <a:off x="7635240" y="5431536"/>
-            <a:ext cx="3063240" cy="320040"/>
-          </a:xfrm>
-          <a:prstGeom prst="rect">
-            <a:avLst/>
-          </a:prstGeom>
-          <a:noFill/>
-        </p:spPr>
-        <p:txBody>
-          <a:bodyPr wrap="none" lIns="9144" rIns="9144" tIns="9144" bIns="9144" anchor="t">
-            <a:spAutoFit/>
-          </a:bodyPr>
-          <a:lstStyle/>
-          <a:p>
-            <a:pPr algn="l">
-              <a:spcAft>
-                <a:spcPts val="0"/>
-              </a:spcAft>
-              <a:defRPr sz="1000" b="1">
-                <a:solidFill>
-                  <a:srgbClr val="FFFFFF"/>
-                </a:solidFill>
-                <a:latin typeface="Inter"/>
-              </a:defRPr>
-            </a:pPr>
-            <a:r>
-              <a:rPr>
-                <a:latin typeface="Inter"/>
-              </a:rPr>
-              <a:t>Fictional TEST data</a:t>
-            </a:r>
-          </a:p>
-        </p:txBody>
-      </p:sp>
-      <p:sp>
-        <p:nvSpPr>
-          <p:cNvPr id="21" name="Rectangle 20"/>
+          <p:cNvPr id="17" name="Rectangle 16"/>
           <p:cNvSpPr/>
           <p:nvPr/>
         </p:nvSpPr>
         <p:spPr>
           <a:xfrm>
-            <a:off x="685800" y="5833872"/>
-            <a:ext cx="3063240" cy="384048"/>
+            <a:off x="685800" y="5687568"/>
+            <a:ext cx="3337560" cy="530352"/>
           </a:xfrm>
           <a:prstGeom prst="rect">
             <a:avLst/>
@@ -6329,14 +6681,14 @@
       </p:sp>
       <p:sp>
         <p:nvSpPr>
-          <p:cNvPr id="22" name="TextBox 21"/>
+          <p:cNvPr id="18" name="TextBox 17"/>
           <p:cNvSpPr txBox="1"/>
           <p:nvPr/>
         </p:nvSpPr>
         <p:spPr>
           <a:xfrm>
-            <a:off x="822960" y="5934456"/>
-            <a:ext cx="2788920" cy="164592"/>
+            <a:off x="822960" y="5760720"/>
+            <a:ext cx="3063240" cy="128016"/>
           </a:xfrm>
           <a:prstGeom prst="rect">
             <a:avLst/>
@@ -6353,7 +6705,7 @@
               <a:spcAft>
                 <a:spcPts val="0"/>
               </a:spcAft>
-              <a:defRPr sz="800" b="1">
+              <a:defRPr sz="620" b="1">
                 <a:solidFill>
                   <a:srgbClr val="0D1117"/>
                 </a:solidFill>
@@ -6364,6 +6716,48 @@
               <a:rPr>
                 <a:latin typeface="Inter"/>
               </a:rPr>
+              <a:t>OVERALL VIEW</a:t>
+            </a:r>
+          </a:p>
+        </p:txBody>
+      </p:sp>
+      <p:sp>
+        <p:nvSpPr>
+          <p:cNvPr id="19" name="TextBox 18"/>
+          <p:cNvSpPr txBox="1"/>
+          <p:nvPr/>
+        </p:nvSpPr>
+        <p:spPr>
+          <a:xfrm>
+            <a:off x="822960" y="5916168"/>
+            <a:ext cx="3063240" cy="182880"/>
+          </a:xfrm>
+          <a:prstGeom prst="rect">
+            <a:avLst/>
+          </a:prstGeom>
+          <a:noFill/>
+        </p:spPr>
+        <p:txBody>
+          <a:bodyPr wrap="none" lIns="9144" rIns="9144" tIns="9144" bIns="9144" anchor="t">
+            <a:spAutoFit/>
+          </a:bodyPr>
+          <a:lstStyle/>
+          <a:p>
+            <a:pPr algn="l">
+              <a:spcAft>
+                <a:spcPts val="0"/>
+              </a:spcAft>
+              <a:defRPr sz="900" b="1">
+                <a:solidFill>
+                  <a:srgbClr val="0D1117"/>
+                </a:solidFill>
+                <a:latin typeface="Inter"/>
+              </a:defRPr>
+            </a:pPr>
+            <a:r>
+              <a:rPr>
+                <a:latin typeface="Inter"/>
+              </a:rPr>
               <a:t>Both lanes reconcile</a:t>
             </a:r>
           </a:p>
@@ -6371,13 +6765,13 @@
       </p:sp>
       <p:sp>
         <p:nvSpPr>
-          <p:cNvPr id="23" name="TextBox 22"/>
+          <p:cNvPr id="20" name="TextBox 19"/>
           <p:cNvSpPr txBox="1"/>
           <p:nvPr/>
         </p:nvSpPr>
         <p:spPr>
           <a:xfrm>
-            <a:off x="3977639" y="5824728"/>
+            <a:off x="4297680" y="5733288"/>
             <a:ext cx="3108960" cy="164592"/>
           </a:xfrm>
           <a:prstGeom prst="rect">
@@ -6406,20 +6800,20 @@
               <a:rPr>
                 <a:latin typeface="Inter"/>
               </a:rPr>
-              <a:t>EVIDENCE COMPLETENESS</a:t>
+              <a:t>SCOPE REVIEWED</a:t>
             </a:r>
           </a:p>
         </p:txBody>
       </p:sp>
       <p:sp>
         <p:nvSpPr>
-          <p:cNvPr id="24" name="TextBox 23"/>
+          <p:cNvPr id="21" name="TextBox 20"/>
           <p:cNvSpPr txBox="1"/>
           <p:nvPr/>
         </p:nvSpPr>
         <p:spPr>
           <a:xfrm>
-            <a:off x="3977639" y="5998464"/>
+            <a:off x="4297680" y="5934456"/>
             <a:ext cx="3108960" cy="201168"/>
           </a:xfrm>
           <a:prstGeom prst="rect">
@@ -6455,14 +6849,14 @@
       </p:sp>
       <p:sp>
         <p:nvSpPr>
-          <p:cNvPr id="25" name="TextBox 24"/>
+          <p:cNvPr id="22" name="TextBox 21"/>
           <p:cNvSpPr txBox="1"/>
           <p:nvPr/>
         </p:nvSpPr>
         <p:spPr>
           <a:xfrm>
-            <a:off x="685800" y="6473952"/>
-            <a:ext cx="8046720" cy="182880"/>
+            <a:off x="685800" y="6400800"/>
+            <a:ext cx="8046720" cy="146304"/>
           </a:xfrm>
           <a:prstGeom prst="rect">
             <a:avLst/>
@@ -6490,14 +6884,56 @@
               <a:rPr>
                 <a:latin typeface="Inter"/>
               </a:rPr>
-              <a:t>TEST DATA — fictional portfolio for rendering tests only</a:t>
+              <a:t>Confidential — Investment Committee</a:t>
             </a:r>
           </a:p>
         </p:txBody>
       </p:sp>
       <p:sp>
         <p:nvSpPr>
-          <p:cNvPr id="26" name="TextBox 25"/>
+          <p:cNvPr id="23" name="TextBox 22"/>
+          <p:cNvSpPr txBox="1"/>
+          <p:nvPr/>
+        </p:nvSpPr>
+        <p:spPr>
+          <a:xfrm>
+            <a:off x="685800" y="6556248"/>
+            <a:ext cx="8046720" cy="128016"/>
+          </a:xfrm>
+          <a:prstGeom prst="rect">
+            <a:avLst/>
+          </a:prstGeom>
+          <a:noFill/>
+        </p:spPr>
+        <p:txBody>
+          <a:bodyPr wrap="none" lIns="9144" rIns="9144" tIns="9144" bIns="9144" anchor="t">
+            <a:spAutoFit/>
+          </a:bodyPr>
+          <a:lstStyle/>
+          <a:p>
+            <a:pPr algn="l">
+              <a:spcAft>
+                <a:spcPts val="0"/>
+              </a:spcAft>
+              <a:defRPr sz="650" b="0">
+                <a:solidFill>
+                  <a:srgbClr val="8A94A1"/>
+                </a:solidFill>
+                <a:latin typeface="Inter"/>
+              </a:defRPr>
+            </a:pPr>
+            <a:r>
+              <a:rPr>
+                <a:latin typeface="Inter"/>
+              </a:rPr>
+              <a:t>Illustrative sample · not client data</a:t>
+            </a:r>
+          </a:p>
+        </p:txBody>
+      </p:sp>
+      <p:sp>
+        <p:nvSpPr>
+          <p:cNvPr id="24" name="TextBox 23"/>
           <p:cNvSpPr txBox="1"/>
           <p:nvPr/>
         </p:nvSpPr>
@@ -6613,7 +7049,7 @@
         <p:spPr>
           <a:xfrm>
             <a:off x="640080" y="329184"/>
-            <a:ext cx="9875520" cy="182880"/>
+            <a:ext cx="5303520" cy="182880"/>
           </a:xfrm>
           <a:prstGeom prst="rect">
             <a:avLst/>
@@ -6654,6 +7090,48 @@
         </p:nvSpPr>
         <p:spPr>
           <a:xfrm>
+            <a:off x="5897880" y="310896"/>
+            <a:ext cx="4800600" cy="256032"/>
+          </a:xfrm>
+          <a:prstGeom prst="rect">
+            <a:avLst/>
+          </a:prstGeom>
+          <a:noFill/>
+        </p:spPr>
+        <p:txBody>
+          <a:bodyPr wrap="none" lIns="9144" rIns="9144" tIns="9144" bIns="9144" anchor="t">
+            <a:spAutoFit/>
+          </a:bodyPr>
+          <a:lstStyle/>
+          <a:p>
+            <a:pPr algn="r">
+              <a:spcAft>
+                <a:spcPts val="0"/>
+              </a:spcAft>
+              <a:defRPr sz="680" b="1">
+                <a:solidFill>
+                  <a:srgbClr val="4F6B00"/>
+                </a:solidFill>
+                <a:latin typeface="Inter"/>
+              </a:defRPr>
+            </a:pPr>
+            <a:r>
+              <a:rPr>
+                <a:latin typeface="Inter"/>
+              </a:rPr>
+              <a:t>Illustrative, Gradient Maintained — demo data, not the client's holdings or managers</a:t>
+            </a:r>
+          </a:p>
+        </p:txBody>
+      </p:sp>
+      <p:sp>
+        <p:nvSpPr>
+          <p:cNvPr id="5" name="TextBox 4"/>
+          <p:cNvSpPr txBox="1"/>
+          <p:nvPr/>
+        </p:nvSpPr>
+        <p:spPr>
+          <a:xfrm>
             <a:off x="640080" y="566928"/>
             <a:ext cx="10058400" cy="530352"/>
           </a:xfrm>
@@ -6690,7 +7168,7 @@
       </p:sp>
       <p:sp>
         <p:nvSpPr>
-          <p:cNvPr id="5" name="Rectangle 4"/>
+          <p:cNvPr id="6" name="Rectangle 5"/>
           <p:cNvSpPr/>
           <p:nvPr/>
         </p:nvSpPr>
@@ -6739,7 +7217,7 @@
       </p:sp>
       <p:sp>
         <p:nvSpPr>
-          <p:cNvPr id="6" name="Rectangle 5"/>
+          <p:cNvPr id="7" name="Rectangle 6"/>
           <p:cNvSpPr/>
           <p:nvPr/>
         </p:nvSpPr>
@@ -6788,7 +7266,7 @@
       </p:sp>
       <p:sp>
         <p:nvSpPr>
-          <p:cNvPr id="7" name="TextBox 6"/>
+          <p:cNvPr id="8" name="TextBox 7"/>
           <p:cNvSpPr txBox="1"/>
           <p:nvPr/>
         </p:nvSpPr>
@@ -6830,7 +7308,7 @@
       </p:sp>
       <p:sp>
         <p:nvSpPr>
-          <p:cNvPr id="8" name="TextBox 7"/>
+          <p:cNvPr id="9" name="TextBox 8"/>
           <p:cNvSpPr txBox="1"/>
           <p:nvPr/>
         </p:nvSpPr>
@@ -6865,14 +7343,14 @@
               <a:rPr>
                 <a:latin typeface="Inter"/>
               </a:rPr>
-              <a:t>HISTORICAL SEGMENT TOTAL EFFECTS (TEST)</a:t>
+              <a:t>HISTORICAL SEGMENT TOTAL EFFECTS</a:t>
             </a:r>
           </a:p>
         </p:txBody>
       </p:sp>
       <p:graphicFrame>
         <p:nvGraphicFramePr>
-          <p:cNvPr id="9" name="Chart 8"/>
+          <p:cNvPr id="10" name="Chart 9"/>
           <p:cNvGraphicFramePr>
             <a:graphicFrameLocks noGrp="1"/>
           </p:cNvGraphicFramePr>
@@ -6890,7 +7368,7 @@
       </p:graphicFrame>
       <p:sp>
         <p:nvSpPr>
-          <p:cNvPr id="10" name="Rectangle 9"/>
+          <p:cNvPr id="11" name="Rectangle 10"/>
           <p:cNvSpPr/>
           <p:nvPr/>
         </p:nvSpPr>
@@ -6939,7 +7417,7 @@
       </p:sp>
       <p:sp>
         <p:nvSpPr>
-          <p:cNvPr id="11" name="TextBox 10"/>
+          <p:cNvPr id="12" name="TextBox 11"/>
           <p:cNvSpPr txBox="1"/>
           <p:nvPr/>
         </p:nvSpPr>
@@ -6981,7 +7459,7 @@
       </p:sp>
       <p:sp>
         <p:nvSpPr>
-          <p:cNvPr id="12" name="TextBox 11"/>
+          <p:cNvPr id="13" name="TextBox 12"/>
           <p:cNvSpPr txBox="1"/>
           <p:nvPr/>
         </p:nvSpPr>
@@ -7016,14 +7494,14 @@
               <a:rPr>
                 <a:latin typeface="Inter"/>
               </a:rPr>
-              <a:t>TEST DATA — fictional portfolio for rendering tests only · Data as of 2026-06-30 historical; 2026-10-08 ex ante</a:t>
+              <a:t>Confidential — Investment Committee · Data as of 2026-06-30 historical; 2026-10-08 ex ante</a:t>
             </a:r>
           </a:p>
         </p:txBody>
       </p:sp>
       <p:sp>
         <p:nvSpPr>
-          <p:cNvPr id="13" name="TextBox 12"/>
+          <p:cNvPr id="14" name="TextBox 13"/>
           <p:cNvSpPr txBox="1"/>
           <p:nvPr/>
         </p:nvSpPr>
@@ -7139,7 +7617,7 @@
         <p:spPr>
           <a:xfrm>
             <a:off x="640080" y="329184"/>
-            <a:ext cx="9875520" cy="182880"/>
+            <a:ext cx="5303520" cy="182880"/>
           </a:xfrm>
           <a:prstGeom prst="rect">
             <a:avLst/>
@@ -7180,6 +7658,48 @@
         </p:nvSpPr>
         <p:spPr>
           <a:xfrm>
+            <a:off x="5897880" y="310896"/>
+            <a:ext cx="4800600" cy="256032"/>
+          </a:xfrm>
+          <a:prstGeom prst="rect">
+            <a:avLst/>
+          </a:prstGeom>
+          <a:noFill/>
+        </p:spPr>
+        <p:txBody>
+          <a:bodyPr wrap="none" lIns="9144" rIns="9144" tIns="9144" bIns="9144" anchor="t">
+            <a:spAutoFit/>
+          </a:bodyPr>
+          <a:lstStyle/>
+          <a:p>
+            <a:pPr algn="r">
+              <a:spcAft>
+                <a:spcPts val="0"/>
+              </a:spcAft>
+              <a:defRPr sz="680" b="1">
+                <a:solidFill>
+                  <a:srgbClr val="4F6B00"/>
+                </a:solidFill>
+                <a:latin typeface="Inter"/>
+              </a:defRPr>
+            </a:pPr>
+            <a:r>
+              <a:rPr>
+                <a:latin typeface="Inter"/>
+              </a:rPr>
+              <a:t>Illustrative, Gradient Maintained — demo data, not the client's holdings or managers</a:t>
+            </a:r>
+          </a:p>
+        </p:txBody>
+      </p:sp>
+      <p:sp>
+        <p:nvSpPr>
+          <p:cNvPr id="5" name="TextBox 4"/>
+          <p:cNvSpPr txBox="1"/>
+          <p:nvPr/>
+        </p:nvSpPr>
+        <p:spPr>
+          <a:xfrm>
             <a:off x="640080" y="566928"/>
             <a:ext cx="10058400" cy="530352"/>
           </a:xfrm>
@@ -7216,7 +7736,7 @@
       </p:sp>
       <p:sp>
         <p:nvSpPr>
-          <p:cNvPr id="5" name="Rectangle 4"/>
+          <p:cNvPr id="6" name="Rectangle 5"/>
           <p:cNvSpPr/>
           <p:nvPr/>
         </p:nvSpPr>
@@ -7265,7 +7785,7 @@
       </p:sp>
       <p:sp>
         <p:nvSpPr>
-          <p:cNvPr id="6" name="Rectangle 5"/>
+          <p:cNvPr id="7" name="Rectangle 6"/>
           <p:cNvSpPr/>
           <p:nvPr/>
         </p:nvSpPr>
@@ -7314,7 +7834,7 @@
       </p:sp>
       <p:sp>
         <p:nvSpPr>
-          <p:cNvPr id="7" name="TextBox 6"/>
+          <p:cNvPr id="8" name="TextBox 7"/>
           <p:cNvSpPr txBox="1"/>
           <p:nvPr/>
         </p:nvSpPr>
@@ -7356,7 +7876,7 @@
       </p:sp>
       <p:sp>
         <p:nvSpPr>
-          <p:cNvPr id="8" name="TextBox 7"/>
+          <p:cNvPr id="9" name="TextBox 8"/>
           <p:cNvSpPr txBox="1"/>
           <p:nvPr/>
         </p:nvSpPr>
@@ -7398,7 +7918,7 @@
       </p:sp>
       <p:graphicFrame>
         <p:nvGraphicFramePr>
-          <p:cNvPr id="9" name="Chart 8"/>
+          <p:cNvPr id="10" name="Chart 9"/>
           <p:cNvGraphicFramePr>
             <a:graphicFrameLocks noGrp="1"/>
           </p:cNvGraphicFramePr>
@@ -7416,7 +7936,7 @@
       </p:graphicFrame>
       <p:sp>
         <p:nvSpPr>
-          <p:cNvPr id="10" name="Rectangle 9"/>
+          <p:cNvPr id="11" name="Rectangle 10"/>
           <p:cNvSpPr/>
           <p:nvPr/>
         </p:nvSpPr>
@@ -7465,7 +7985,7 @@
       </p:sp>
       <p:sp>
         <p:nvSpPr>
-          <p:cNvPr id="11" name="TextBox 10"/>
+          <p:cNvPr id="12" name="TextBox 11"/>
           <p:cNvSpPr txBox="1"/>
           <p:nvPr/>
         </p:nvSpPr>
@@ -7507,7 +8027,7 @@
       </p:sp>
       <p:sp>
         <p:nvSpPr>
-          <p:cNvPr id="12" name="TextBox 11"/>
+          <p:cNvPr id="13" name="TextBox 12"/>
           <p:cNvSpPr txBox="1"/>
           <p:nvPr/>
         </p:nvSpPr>
@@ -7542,14 +8062,14 @@
               <a:rPr>
                 <a:latin typeface="Inter"/>
               </a:rPr>
-              <a:t>TEST DATA — fictional portfolio for rendering tests only · Data as of 2026-06-30 historical; 2026-10-08 ex ante</a:t>
+              <a:t>Confidential — Investment Committee · Data as of 2026-06-30 historical; 2026-10-08 ex ante</a:t>
             </a:r>
           </a:p>
         </p:txBody>
       </p:sp>
       <p:sp>
         <p:nvSpPr>
-          <p:cNvPr id="13" name="TextBox 12"/>
+          <p:cNvPr id="14" name="TextBox 13"/>
           <p:cNvSpPr txBox="1"/>
           <p:nvPr/>
         </p:nvSpPr>
@@ -7665,7 +8185,7 @@
         <p:spPr>
           <a:xfrm>
             <a:off x="640080" y="329184"/>
-            <a:ext cx="9875520" cy="182880"/>
+            <a:ext cx="5303520" cy="182880"/>
           </a:xfrm>
           <a:prstGeom prst="rect">
             <a:avLst/>
@@ -7706,6 +8226,48 @@
         </p:nvSpPr>
         <p:spPr>
           <a:xfrm>
+            <a:off x="5897880" y="310896"/>
+            <a:ext cx="4800600" cy="256032"/>
+          </a:xfrm>
+          <a:prstGeom prst="rect">
+            <a:avLst/>
+          </a:prstGeom>
+          <a:noFill/>
+        </p:spPr>
+        <p:txBody>
+          <a:bodyPr wrap="none" lIns="9144" rIns="9144" tIns="9144" bIns="9144" anchor="t">
+            <a:spAutoFit/>
+          </a:bodyPr>
+          <a:lstStyle/>
+          <a:p>
+            <a:pPr algn="r">
+              <a:spcAft>
+                <a:spcPts val="0"/>
+              </a:spcAft>
+              <a:defRPr sz="680" b="1">
+                <a:solidFill>
+                  <a:srgbClr val="4F6B00"/>
+                </a:solidFill>
+                <a:latin typeface="Inter"/>
+              </a:defRPr>
+            </a:pPr>
+            <a:r>
+              <a:rPr>
+                <a:latin typeface="Inter"/>
+              </a:rPr>
+              <a:t>Illustrative, Gradient Maintained — demo data, not the client's holdings or managers</a:t>
+            </a:r>
+          </a:p>
+        </p:txBody>
+      </p:sp>
+      <p:sp>
+        <p:nvSpPr>
+          <p:cNvPr id="5" name="TextBox 4"/>
+          <p:cNvSpPr txBox="1"/>
+          <p:nvPr/>
+        </p:nvSpPr>
+        <p:spPr>
+          <a:xfrm>
             <a:off x="640080" y="566928"/>
             <a:ext cx="10058400" cy="530352"/>
           </a:xfrm>
@@ -7742,7 +8304,7 @@
       </p:sp>
       <p:sp>
         <p:nvSpPr>
-          <p:cNvPr id="5" name="Rectangle 4"/>
+          <p:cNvPr id="6" name="Rectangle 5"/>
           <p:cNvSpPr/>
           <p:nvPr/>
         </p:nvSpPr>
@@ -7791,7 +8353,7 @@
       </p:sp>
       <p:sp>
         <p:nvSpPr>
-          <p:cNvPr id="6" name="Rectangle 5"/>
+          <p:cNvPr id="7" name="Rectangle 6"/>
           <p:cNvSpPr/>
           <p:nvPr/>
         </p:nvSpPr>
@@ -7840,7 +8402,7 @@
       </p:sp>
       <p:sp>
         <p:nvSpPr>
-          <p:cNvPr id="7" name="TextBox 6"/>
+          <p:cNvPr id="8" name="TextBox 7"/>
           <p:cNvSpPr txBox="1"/>
           <p:nvPr/>
         </p:nvSpPr>
@@ -7882,7 +8444,7 @@
       </p:sp>
       <p:sp>
         <p:nvSpPr>
-          <p:cNvPr id="8" name="TextBox 7"/>
+          <p:cNvPr id="9" name="TextBox 8"/>
           <p:cNvSpPr txBox="1"/>
           <p:nvPr/>
         </p:nvSpPr>
@@ -7924,7 +8486,7 @@
       </p:sp>
       <p:graphicFrame>
         <p:nvGraphicFramePr>
-          <p:cNvPr id="9" name="Table 8"/>
+          <p:cNvPr id="10" name="Table 9"/>
           <p:cNvGraphicFramePr>
             <a:graphicFrameLocks noGrp="1"/>
           </p:cNvGraphicFramePr>
@@ -8495,7 +9057,7 @@
       </p:graphicFrame>
       <p:sp>
         <p:nvSpPr>
-          <p:cNvPr id="10" name="Rectangle 9"/>
+          <p:cNvPr id="11" name="Rectangle 10"/>
           <p:cNvSpPr/>
           <p:nvPr/>
         </p:nvSpPr>
@@ -8544,7 +9106,7 @@
       </p:sp>
       <p:sp>
         <p:nvSpPr>
-          <p:cNvPr id="11" name="TextBox 10"/>
+          <p:cNvPr id="12" name="TextBox 11"/>
           <p:cNvSpPr txBox="1"/>
           <p:nvPr/>
         </p:nvSpPr>
@@ -8586,7 +9148,7 @@
       </p:sp>
       <p:sp>
         <p:nvSpPr>
-          <p:cNvPr id="12" name="TextBox 11"/>
+          <p:cNvPr id="13" name="TextBox 12"/>
           <p:cNvSpPr txBox="1"/>
           <p:nvPr/>
         </p:nvSpPr>
@@ -8621,14 +9183,14 @@
               <a:rPr>
                 <a:latin typeface="Inter"/>
               </a:rPr>
-              <a:t>TEST DATA — fictional portfolio for rendering tests only · Data as of 2026-06-30 historical; 2026-10-08 ex ante</a:t>
+              <a:t>Confidential — Investment Committee · Data as of 2026-06-30 historical; 2026-10-08 ex ante</a:t>
             </a:r>
           </a:p>
         </p:txBody>
       </p:sp>
       <p:sp>
         <p:nvSpPr>
-          <p:cNvPr id="13" name="TextBox 12"/>
+          <p:cNvPr id="14" name="TextBox 13"/>
           <p:cNvSpPr txBox="1"/>
           <p:nvPr/>
         </p:nvSpPr>
@@ -8744,7 +9306,7 @@
         <p:spPr>
           <a:xfrm>
             <a:off x="640080" y="329184"/>
-            <a:ext cx="9875520" cy="182880"/>
+            <a:ext cx="5303520" cy="182880"/>
           </a:xfrm>
           <a:prstGeom prst="rect">
             <a:avLst/>
@@ -8785,6 +9347,48 @@
         </p:nvSpPr>
         <p:spPr>
           <a:xfrm>
+            <a:off x="5897880" y="310896"/>
+            <a:ext cx="4800600" cy="256032"/>
+          </a:xfrm>
+          <a:prstGeom prst="rect">
+            <a:avLst/>
+          </a:prstGeom>
+          <a:noFill/>
+        </p:spPr>
+        <p:txBody>
+          <a:bodyPr wrap="none" lIns="9144" rIns="9144" tIns="9144" bIns="9144" anchor="t">
+            <a:spAutoFit/>
+          </a:bodyPr>
+          <a:lstStyle/>
+          <a:p>
+            <a:pPr algn="r">
+              <a:spcAft>
+                <a:spcPts val="0"/>
+              </a:spcAft>
+              <a:defRPr sz="680" b="1">
+                <a:solidFill>
+                  <a:srgbClr val="4F6B00"/>
+                </a:solidFill>
+                <a:latin typeface="Inter"/>
+              </a:defRPr>
+            </a:pPr>
+            <a:r>
+              <a:rPr>
+                <a:latin typeface="Inter"/>
+              </a:rPr>
+              <a:t>Illustrative, Gradient Maintained — demo data, not the client's holdings or managers</a:t>
+            </a:r>
+          </a:p>
+        </p:txBody>
+      </p:sp>
+      <p:sp>
+        <p:nvSpPr>
+          <p:cNvPr id="5" name="TextBox 4"/>
+          <p:cNvSpPr txBox="1"/>
+          <p:nvPr/>
+        </p:nvSpPr>
+        <p:spPr>
+          <a:xfrm>
             <a:off x="640080" y="566928"/>
             <a:ext cx="10058400" cy="530352"/>
           </a:xfrm>
@@ -8821,7 +9425,7 @@
       </p:sp>
       <p:sp>
         <p:nvSpPr>
-          <p:cNvPr id="5" name="Rectangle 4"/>
+          <p:cNvPr id="6" name="Rectangle 5"/>
           <p:cNvSpPr/>
           <p:nvPr/>
         </p:nvSpPr>
@@ -8870,7 +9474,7 @@
       </p:sp>
       <p:sp>
         <p:nvSpPr>
-          <p:cNvPr id="6" name="Rectangle 5"/>
+          <p:cNvPr id="7" name="Rectangle 6"/>
           <p:cNvSpPr/>
           <p:nvPr/>
         </p:nvSpPr>
@@ -8919,7 +9523,7 @@
       </p:sp>
       <p:sp>
         <p:nvSpPr>
-          <p:cNvPr id="7" name="TextBox 6"/>
+          <p:cNvPr id="8" name="TextBox 7"/>
           <p:cNvSpPr txBox="1"/>
           <p:nvPr/>
         </p:nvSpPr>
@@ -8961,7 +9565,7 @@
       </p:sp>
       <p:sp>
         <p:nvSpPr>
-          <p:cNvPr id="8" name="TextBox 7"/>
+          <p:cNvPr id="9" name="TextBox 8"/>
           <p:cNvSpPr txBox="1"/>
           <p:nvPr/>
         </p:nvSpPr>
@@ -9003,7 +9607,7 @@
       </p:sp>
       <p:graphicFrame>
         <p:nvGraphicFramePr>
-          <p:cNvPr id="9" name="Chart 8"/>
+          <p:cNvPr id="10" name="Chart 9"/>
           <p:cNvGraphicFramePr>
             <a:graphicFrameLocks noGrp="1"/>
           </p:cNvGraphicFramePr>
@@ -9021,7 +9625,7 @@
       </p:graphicFrame>
       <p:sp>
         <p:nvSpPr>
-          <p:cNvPr id="10" name="Rectangle 9"/>
+          <p:cNvPr id="11" name="Rectangle 10"/>
           <p:cNvSpPr/>
           <p:nvPr/>
         </p:nvSpPr>
@@ -9070,7 +9674,7 @@
       </p:sp>
       <p:sp>
         <p:nvSpPr>
-          <p:cNvPr id="11" name="TextBox 10"/>
+          <p:cNvPr id="12" name="TextBox 11"/>
           <p:cNvSpPr txBox="1"/>
           <p:nvPr/>
         </p:nvSpPr>
@@ -9112,7 +9716,7 @@
       </p:sp>
       <p:graphicFrame>
         <p:nvGraphicFramePr>
-          <p:cNvPr id="12" name="Chart 11"/>
+          <p:cNvPr id="13" name="Chart 12"/>
           <p:cNvGraphicFramePr>
             <a:graphicFrameLocks noGrp="1"/>
           </p:cNvGraphicFramePr>
@@ -9130,7 +9734,7 @@
       </p:graphicFrame>
       <p:sp>
         <p:nvSpPr>
-          <p:cNvPr id="13" name="Rectangle 12"/>
+          <p:cNvPr id="14" name="Rectangle 13"/>
           <p:cNvSpPr/>
           <p:nvPr/>
         </p:nvSpPr>
@@ -9179,7 +9783,7 @@
       </p:sp>
       <p:sp>
         <p:nvSpPr>
-          <p:cNvPr id="14" name="TextBox 13"/>
+          <p:cNvPr id="15" name="TextBox 14"/>
           <p:cNvSpPr txBox="1"/>
           <p:nvPr/>
         </p:nvSpPr>
@@ -9221,7 +9825,7 @@
       </p:sp>
       <p:sp>
         <p:nvSpPr>
-          <p:cNvPr id="15" name="TextBox 14"/>
+          <p:cNvPr id="16" name="TextBox 15"/>
           <p:cNvSpPr txBox="1"/>
           <p:nvPr/>
         </p:nvSpPr>
@@ -9256,14 +9860,14 @@
               <a:rPr>
                 <a:latin typeface="Inter"/>
               </a:rPr>
-              <a:t>TEST DATA — fictional portfolio for rendering tests only · Data as of 2026-06-30 historical; 2026-10-08 ex ante</a:t>
+              <a:t>Confidential — Investment Committee · Data as of 2026-06-30 historical; 2026-10-08 ex ante</a:t>
             </a:r>
           </a:p>
         </p:txBody>
       </p:sp>
       <p:sp>
         <p:nvSpPr>
-          <p:cNvPr id="16" name="TextBox 15"/>
+          <p:cNvPr id="17" name="TextBox 16"/>
           <p:cNvSpPr txBox="1"/>
           <p:nvPr/>
         </p:nvSpPr>
@@ -9379,7 +9983,7 @@
         <p:spPr>
           <a:xfrm>
             <a:off x="640080" y="329184"/>
-            <a:ext cx="9875520" cy="182880"/>
+            <a:ext cx="5303520" cy="182880"/>
           </a:xfrm>
           <a:prstGeom prst="rect">
             <a:avLst/>
@@ -9420,6 +10024,48 @@
         </p:nvSpPr>
         <p:spPr>
           <a:xfrm>
+            <a:off x="5897880" y="310896"/>
+            <a:ext cx="4800600" cy="256032"/>
+          </a:xfrm>
+          <a:prstGeom prst="rect">
+            <a:avLst/>
+          </a:prstGeom>
+          <a:noFill/>
+        </p:spPr>
+        <p:txBody>
+          <a:bodyPr wrap="none" lIns="9144" rIns="9144" tIns="9144" bIns="9144" anchor="t">
+            <a:spAutoFit/>
+          </a:bodyPr>
+          <a:lstStyle/>
+          <a:p>
+            <a:pPr algn="r">
+              <a:spcAft>
+                <a:spcPts val="0"/>
+              </a:spcAft>
+              <a:defRPr sz="680" b="1">
+                <a:solidFill>
+                  <a:srgbClr val="4F6B00"/>
+                </a:solidFill>
+                <a:latin typeface="Inter"/>
+              </a:defRPr>
+            </a:pPr>
+            <a:r>
+              <a:rPr>
+                <a:latin typeface="Inter"/>
+              </a:rPr>
+              <a:t>Illustrative, Gradient Maintained — demo data, not the client's holdings or managers</a:t>
+            </a:r>
+          </a:p>
+        </p:txBody>
+      </p:sp>
+      <p:sp>
+        <p:nvSpPr>
+          <p:cNvPr id="5" name="TextBox 4"/>
+          <p:cNvSpPr txBox="1"/>
+          <p:nvPr/>
+        </p:nvSpPr>
+        <p:spPr>
+          <a:xfrm>
             <a:off x="640080" y="566928"/>
             <a:ext cx="10058400" cy="530352"/>
           </a:xfrm>
@@ -9456,7 +10102,7 @@
       </p:sp>
       <p:sp>
         <p:nvSpPr>
-          <p:cNvPr id="5" name="Rectangle 4"/>
+          <p:cNvPr id="6" name="Rectangle 5"/>
           <p:cNvSpPr/>
           <p:nvPr/>
         </p:nvSpPr>
@@ -9505,7 +10151,7 @@
       </p:sp>
       <p:sp>
         <p:nvSpPr>
-          <p:cNvPr id="6" name="Rectangle 5"/>
+          <p:cNvPr id="7" name="Rectangle 6"/>
           <p:cNvSpPr/>
           <p:nvPr/>
         </p:nvSpPr>
@@ -9554,7 +10200,7 @@
       </p:sp>
       <p:sp>
         <p:nvSpPr>
-          <p:cNvPr id="7" name="TextBox 6"/>
+          <p:cNvPr id="8" name="TextBox 7"/>
           <p:cNvSpPr txBox="1"/>
           <p:nvPr/>
         </p:nvSpPr>
@@ -9596,7 +10242,7 @@
       </p:sp>
       <p:sp>
         <p:nvSpPr>
-          <p:cNvPr id="8" name="TextBox 7"/>
+          <p:cNvPr id="9" name="TextBox 8"/>
           <p:cNvSpPr txBox="1"/>
           <p:nvPr/>
         </p:nvSpPr>
@@ -9638,7 +10284,7 @@
       </p:sp>
       <p:graphicFrame>
         <p:nvGraphicFramePr>
-          <p:cNvPr id="9" name="Chart 8"/>
+          <p:cNvPr id="10" name="Chart 9"/>
           <p:cNvGraphicFramePr>
             <a:graphicFrameLocks noGrp="1"/>
           </p:cNvGraphicFramePr>
@@ -9656,7 +10302,7 @@
       </p:graphicFrame>
       <p:sp>
         <p:nvSpPr>
-          <p:cNvPr id="10" name="Rectangle 9"/>
+          <p:cNvPr id="11" name="Rectangle 10"/>
           <p:cNvSpPr/>
           <p:nvPr/>
         </p:nvSpPr>
@@ -9705,7 +10351,7 @@
       </p:sp>
       <p:sp>
         <p:nvSpPr>
-          <p:cNvPr id="11" name="TextBox 10"/>
+          <p:cNvPr id="12" name="TextBox 11"/>
           <p:cNvSpPr txBox="1"/>
           <p:nvPr/>
         </p:nvSpPr>
@@ -9747,7 +10393,7 @@
       </p:sp>
       <p:sp>
         <p:nvSpPr>
-          <p:cNvPr id="12" name="TextBox 11"/>
+          <p:cNvPr id="13" name="TextBox 12"/>
           <p:cNvSpPr txBox="1"/>
           <p:nvPr/>
         </p:nvSpPr>
@@ -9782,14 +10428,14 @@
               <a:rPr>
                 <a:latin typeface="Inter"/>
               </a:rPr>
-              <a:t>TEST DATA — fictional portfolio for rendering tests only · Data as of 2026-06-30 historical; 2026-10-08 ex ante</a:t>
+              <a:t>Confidential — Investment Committee · Data as of 2026-06-30 historical; 2026-10-08 ex ante</a:t>
             </a:r>
           </a:p>
         </p:txBody>
       </p:sp>
       <p:sp>
         <p:nvSpPr>
-          <p:cNvPr id="13" name="TextBox 12"/>
+          <p:cNvPr id="14" name="TextBox 13"/>
           <p:cNvSpPr txBox="1"/>
           <p:nvPr/>
         </p:nvSpPr>
@@ -9905,7 +10551,7 @@
         <p:spPr>
           <a:xfrm>
             <a:off x="640080" y="329184"/>
-            <a:ext cx="9875520" cy="182880"/>
+            <a:ext cx="5303520" cy="182880"/>
           </a:xfrm>
           <a:prstGeom prst="rect">
             <a:avLst/>
@@ -9946,6 +10592,48 @@
         </p:nvSpPr>
         <p:spPr>
           <a:xfrm>
+            <a:off x="5897880" y="310896"/>
+            <a:ext cx="4800600" cy="256032"/>
+          </a:xfrm>
+          <a:prstGeom prst="rect">
+            <a:avLst/>
+          </a:prstGeom>
+          <a:noFill/>
+        </p:spPr>
+        <p:txBody>
+          <a:bodyPr wrap="none" lIns="9144" rIns="9144" tIns="9144" bIns="9144" anchor="t">
+            <a:spAutoFit/>
+          </a:bodyPr>
+          <a:lstStyle/>
+          <a:p>
+            <a:pPr algn="r">
+              <a:spcAft>
+                <a:spcPts val="0"/>
+              </a:spcAft>
+              <a:defRPr sz="680" b="1">
+                <a:solidFill>
+                  <a:srgbClr val="4F6B00"/>
+                </a:solidFill>
+                <a:latin typeface="Inter"/>
+              </a:defRPr>
+            </a:pPr>
+            <a:r>
+              <a:rPr>
+                <a:latin typeface="Inter"/>
+              </a:rPr>
+              <a:t>Illustrative, Gradient Maintained — demo data, not the client's holdings or managers</a:t>
+            </a:r>
+          </a:p>
+        </p:txBody>
+      </p:sp>
+      <p:sp>
+        <p:nvSpPr>
+          <p:cNvPr id="5" name="TextBox 4"/>
+          <p:cNvSpPr txBox="1"/>
+          <p:nvPr/>
+        </p:nvSpPr>
+        <p:spPr>
+          <a:xfrm>
             <a:off x="640080" y="566928"/>
             <a:ext cx="10058400" cy="530352"/>
           </a:xfrm>
@@ -9982,7 +10670,7 @@
       </p:sp>
       <p:sp>
         <p:nvSpPr>
-          <p:cNvPr id="5" name="Rectangle 4"/>
+          <p:cNvPr id="6" name="Rectangle 5"/>
           <p:cNvSpPr/>
           <p:nvPr/>
         </p:nvSpPr>
@@ -10031,7 +10719,7 @@
       </p:sp>
       <p:sp>
         <p:nvSpPr>
-          <p:cNvPr id="6" name="Rectangle 5"/>
+          <p:cNvPr id="7" name="Rectangle 6"/>
           <p:cNvSpPr/>
           <p:nvPr/>
         </p:nvSpPr>
@@ -10080,7 +10768,7 @@
       </p:sp>
       <p:sp>
         <p:nvSpPr>
-          <p:cNvPr id="7" name="TextBox 6"/>
+          <p:cNvPr id="8" name="TextBox 7"/>
           <p:cNvSpPr txBox="1"/>
           <p:nvPr/>
         </p:nvSpPr>
@@ -10122,7 +10810,7 @@
       </p:sp>
       <p:sp>
         <p:nvSpPr>
-          <p:cNvPr id="8" name="TextBox 7"/>
+          <p:cNvPr id="9" name="TextBox 8"/>
           <p:cNvSpPr txBox="1"/>
           <p:nvPr/>
         </p:nvSpPr>
@@ -10164,7 +10852,7 @@
       </p:sp>
       <p:graphicFrame>
         <p:nvGraphicFramePr>
-          <p:cNvPr id="9" name="Table 8"/>
+          <p:cNvPr id="10" name="Table 9"/>
           <p:cNvGraphicFramePr>
             <a:graphicFrameLocks noGrp="1"/>
           </p:cNvGraphicFramePr>
@@ -10606,7 +11294,7 @@
       </p:graphicFrame>
       <p:sp>
         <p:nvSpPr>
-          <p:cNvPr id="10" name="TextBox 9"/>
+          <p:cNvPr id="11" name="TextBox 10"/>
           <p:cNvSpPr txBox="1"/>
           <p:nvPr/>
         </p:nvSpPr>
@@ -10648,7 +11336,7 @@
       </p:sp>
       <p:graphicFrame>
         <p:nvGraphicFramePr>
-          <p:cNvPr id="11" name="Table 10"/>
+          <p:cNvPr id="12" name="Table 11"/>
           <p:cNvGraphicFramePr>
             <a:graphicFrameLocks noGrp="1"/>
           </p:cNvGraphicFramePr>
@@ -11225,7 +11913,7 @@
       </p:graphicFrame>
       <p:sp>
         <p:nvSpPr>
-          <p:cNvPr id="12" name="TextBox 11"/>
+          <p:cNvPr id="13" name="TextBox 12"/>
           <p:cNvSpPr txBox="1"/>
           <p:nvPr/>
         </p:nvSpPr>
@@ -11267,7 +11955,7 @@
       </p:sp>
       <p:sp>
         <p:nvSpPr>
-          <p:cNvPr id="13" name="Rectangle 12"/>
+          <p:cNvPr id="14" name="Rectangle 13"/>
           <p:cNvSpPr/>
           <p:nvPr/>
         </p:nvSpPr>
@@ -11316,7 +12004,7 @@
       </p:sp>
       <p:sp>
         <p:nvSpPr>
-          <p:cNvPr id="14" name="Rectangle 13"/>
+          <p:cNvPr id="15" name="Rectangle 14"/>
           <p:cNvSpPr/>
           <p:nvPr/>
         </p:nvSpPr>
@@ -11365,7 +12053,7 @@
       </p:sp>
       <p:sp>
         <p:nvSpPr>
-          <p:cNvPr id="15" name="TextBox 14"/>
+          <p:cNvPr id="16" name="TextBox 15"/>
           <p:cNvSpPr txBox="1"/>
           <p:nvPr/>
         </p:nvSpPr>
@@ -11407,7 +12095,7 @@
       </p:sp>
       <p:sp>
         <p:nvSpPr>
-          <p:cNvPr id="16" name="TextBox 15"/>
+          <p:cNvPr id="17" name="TextBox 16"/>
           <p:cNvSpPr txBox="1"/>
           <p:nvPr/>
         </p:nvSpPr>
@@ -11449,7 +12137,7 @@
       </p:sp>
       <p:sp>
         <p:nvSpPr>
-          <p:cNvPr id="17" name="Rectangle 16"/>
+          <p:cNvPr id="18" name="Rectangle 17"/>
           <p:cNvSpPr/>
           <p:nvPr/>
         </p:nvSpPr>
@@ -11498,7 +12186,7 @@
       </p:sp>
       <p:sp>
         <p:nvSpPr>
-          <p:cNvPr id="18" name="TextBox 17"/>
+          <p:cNvPr id="19" name="TextBox 18"/>
           <p:cNvSpPr txBox="1"/>
           <p:nvPr/>
         </p:nvSpPr>
@@ -11540,7 +12228,7 @@
       </p:sp>
       <p:sp>
         <p:nvSpPr>
-          <p:cNvPr id="19" name="TextBox 18"/>
+          <p:cNvPr id="20" name="TextBox 19"/>
           <p:cNvSpPr txBox="1"/>
           <p:nvPr/>
         </p:nvSpPr>
@@ -11575,14 +12263,14 @@
               <a:rPr>
                 <a:latin typeface="Inter"/>
               </a:rPr>
-              <a:t>TEST DATA — fictional portfolio for rendering tests only · Data as of 2026-06-30 historical; 2026-10-08 ex ante</a:t>
+              <a:t>Confidential — Investment Committee · Data as of 2026-06-30 historical; 2026-10-08 ex ante</a:t>
             </a:r>
           </a:p>
         </p:txBody>
       </p:sp>
       <p:sp>
         <p:nvSpPr>
-          <p:cNvPr id="20" name="TextBox 19"/>
+          <p:cNvPr id="21" name="TextBox 20"/>
           <p:cNvSpPr txBox="1"/>
           <p:nvPr/>
         </p:nvSpPr>
@@ -11698,7 +12386,7 @@
         <p:spPr>
           <a:xfrm>
             <a:off x="640080" y="329184"/>
-            <a:ext cx="9875520" cy="182880"/>
+            <a:ext cx="5303520" cy="182880"/>
           </a:xfrm>
           <a:prstGeom prst="rect">
             <a:avLst/>
@@ -11739,6 +12427,48 @@
         </p:nvSpPr>
         <p:spPr>
           <a:xfrm>
+            <a:off x="5897880" y="310896"/>
+            <a:ext cx="4800600" cy="256032"/>
+          </a:xfrm>
+          <a:prstGeom prst="rect">
+            <a:avLst/>
+          </a:prstGeom>
+          <a:noFill/>
+        </p:spPr>
+        <p:txBody>
+          <a:bodyPr wrap="none" lIns="9144" rIns="9144" tIns="9144" bIns="9144" anchor="t">
+            <a:spAutoFit/>
+          </a:bodyPr>
+          <a:lstStyle/>
+          <a:p>
+            <a:pPr algn="r">
+              <a:spcAft>
+                <a:spcPts val="0"/>
+              </a:spcAft>
+              <a:defRPr sz="680" b="1">
+                <a:solidFill>
+                  <a:srgbClr val="4F6B00"/>
+                </a:solidFill>
+                <a:latin typeface="Inter"/>
+              </a:defRPr>
+            </a:pPr>
+            <a:r>
+              <a:rPr>
+                <a:latin typeface="Inter"/>
+              </a:rPr>
+              <a:t>Illustrative, Gradient Maintained — demo data, not the client's holdings or managers</a:t>
+            </a:r>
+          </a:p>
+        </p:txBody>
+      </p:sp>
+      <p:sp>
+        <p:nvSpPr>
+          <p:cNvPr id="5" name="TextBox 4"/>
+          <p:cNvSpPr txBox="1"/>
+          <p:nvPr/>
+        </p:nvSpPr>
+        <p:spPr>
+          <a:xfrm>
             <a:off x="640080" y="566928"/>
             <a:ext cx="10058400" cy="530352"/>
           </a:xfrm>
@@ -11775,7 +12505,7 @@
       </p:sp>
       <p:sp>
         <p:nvSpPr>
-          <p:cNvPr id="5" name="Rectangle 4"/>
+          <p:cNvPr id="6" name="Rectangle 5"/>
           <p:cNvSpPr/>
           <p:nvPr/>
         </p:nvSpPr>
@@ -11824,7 +12554,7 @@
       </p:sp>
       <p:sp>
         <p:nvSpPr>
-          <p:cNvPr id="6" name="Rectangle 5"/>
+          <p:cNvPr id="7" name="Rectangle 6"/>
           <p:cNvSpPr/>
           <p:nvPr/>
         </p:nvSpPr>
@@ -11873,7 +12603,7 @@
       </p:sp>
       <p:sp>
         <p:nvSpPr>
-          <p:cNvPr id="7" name="TextBox 6"/>
+          <p:cNvPr id="8" name="TextBox 7"/>
           <p:cNvSpPr txBox="1"/>
           <p:nvPr/>
         </p:nvSpPr>
@@ -11915,7 +12645,7 @@
       </p:sp>
       <p:sp>
         <p:nvSpPr>
-          <p:cNvPr id="8" name="TextBox 7"/>
+          <p:cNvPr id="9" name="TextBox 8"/>
           <p:cNvSpPr txBox="1"/>
           <p:nvPr/>
         </p:nvSpPr>
@@ -11950,14 +12680,14 @@
               <a:rPr>
                 <a:latin typeface="Inter"/>
               </a:rPr>
-              <a:t>GOVERNED EX ANTE SEGMENT TOTAL EFFECTS (TEST)</a:t>
+              <a:t>GOVERNED EX ANTE SEGMENT TOTAL EFFECTS</a:t>
             </a:r>
           </a:p>
         </p:txBody>
       </p:sp>
       <p:graphicFrame>
         <p:nvGraphicFramePr>
-          <p:cNvPr id="9" name="Chart 8"/>
+          <p:cNvPr id="10" name="Chart 9"/>
           <p:cNvGraphicFramePr>
             <a:graphicFrameLocks noGrp="1"/>
           </p:cNvGraphicFramePr>
@@ -11975,7 +12705,7 @@
       </p:graphicFrame>
       <p:sp>
         <p:nvSpPr>
-          <p:cNvPr id="10" name="Rectangle 9"/>
+          <p:cNvPr id="11" name="Rectangle 10"/>
           <p:cNvSpPr/>
           <p:nvPr/>
         </p:nvSpPr>
@@ -12024,7 +12754,7 @@
       </p:sp>
       <p:sp>
         <p:nvSpPr>
-          <p:cNvPr id="11" name="TextBox 10"/>
+          <p:cNvPr id="12" name="TextBox 11"/>
           <p:cNvSpPr txBox="1"/>
           <p:nvPr/>
         </p:nvSpPr>
@@ -12066,7 +12796,7 @@
       </p:sp>
       <p:sp>
         <p:nvSpPr>
-          <p:cNvPr id="12" name="TextBox 11"/>
+          <p:cNvPr id="13" name="TextBox 12"/>
           <p:cNvSpPr txBox="1"/>
           <p:nvPr/>
         </p:nvSpPr>
@@ -12101,14 +12831,14 @@
               <a:rPr>
                 <a:latin typeface="Inter"/>
               </a:rPr>
-              <a:t>TEST DATA — fictional portfolio for rendering tests only · Data as of 2026-06-30 historical; 2026-10-08 ex ante</a:t>
+              <a:t>Confidential — Investment Committee · Data as of 2026-06-30 historical; 2026-10-08 ex ante</a:t>
             </a:r>
           </a:p>
         </p:txBody>
       </p:sp>
       <p:sp>
         <p:nvSpPr>
-          <p:cNvPr id="13" name="TextBox 12"/>
+          <p:cNvPr id="14" name="TextBox 13"/>
           <p:cNvSpPr txBox="1"/>
           <p:nvPr/>
         </p:nvSpPr>
@@ -12224,7 +12954,7 @@
         <p:spPr>
           <a:xfrm>
             <a:off x="640080" y="329184"/>
-            <a:ext cx="9875520" cy="182880"/>
+            <a:ext cx="5303520" cy="182880"/>
           </a:xfrm>
           <a:prstGeom prst="rect">
             <a:avLst/>
@@ -12265,6 +12995,48 @@
         </p:nvSpPr>
         <p:spPr>
           <a:xfrm>
+            <a:off x="5897880" y="310896"/>
+            <a:ext cx="4800600" cy="256032"/>
+          </a:xfrm>
+          <a:prstGeom prst="rect">
+            <a:avLst/>
+          </a:prstGeom>
+          <a:noFill/>
+        </p:spPr>
+        <p:txBody>
+          <a:bodyPr wrap="none" lIns="9144" rIns="9144" tIns="9144" bIns="9144" anchor="t">
+            <a:spAutoFit/>
+          </a:bodyPr>
+          <a:lstStyle/>
+          <a:p>
+            <a:pPr algn="r">
+              <a:spcAft>
+                <a:spcPts val="0"/>
+              </a:spcAft>
+              <a:defRPr sz="680" b="1">
+                <a:solidFill>
+                  <a:srgbClr val="4F6B00"/>
+                </a:solidFill>
+                <a:latin typeface="Inter"/>
+              </a:defRPr>
+            </a:pPr>
+            <a:r>
+              <a:rPr>
+                <a:latin typeface="Inter"/>
+              </a:rPr>
+              <a:t>Illustrative, Gradient Maintained — demo data, not the client's holdings or managers</a:t>
+            </a:r>
+          </a:p>
+        </p:txBody>
+      </p:sp>
+      <p:sp>
+        <p:nvSpPr>
+          <p:cNvPr id="5" name="TextBox 4"/>
+          <p:cNvSpPr txBox="1"/>
+          <p:nvPr/>
+        </p:nvSpPr>
+        <p:spPr>
+          <a:xfrm>
             <a:off x="640080" y="566928"/>
             <a:ext cx="10058400" cy="530352"/>
           </a:xfrm>
@@ -12301,7 +13073,7 @@
       </p:sp>
       <p:sp>
         <p:nvSpPr>
-          <p:cNvPr id="5" name="Rectangle 4"/>
+          <p:cNvPr id="6" name="Rectangle 5"/>
           <p:cNvSpPr/>
           <p:nvPr/>
         </p:nvSpPr>
@@ -12350,7 +13122,7 @@
       </p:sp>
       <p:sp>
         <p:nvSpPr>
-          <p:cNvPr id="6" name="Rectangle 5"/>
+          <p:cNvPr id="7" name="Rectangle 6"/>
           <p:cNvSpPr/>
           <p:nvPr/>
         </p:nvSpPr>
@@ -12399,7 +13171,7 @@
       </p:sp>
       <p:sp>
         <p:nvSpPr>
-          <p:cNvPr id="7" name="TextBox 6"/>
+          <p:cNvPr id="8" name="TextBox 7"/>
           <p:cNvSpPr txBox="1"/>
           <p:nvPr/>
         </p:nvSpPr>
@@ -12441,7 +13213,7 @@
       </p:sp>
       <p:sp>
         <p:nvSpPr>
-          <p:cNvPr id="8" name="TextBox 7"/>
+          <p:cNvPr id="9" name="TextBox 8"/>
           <p:cNvSpPr txBox="1"/>
           <p:nvPr/>
         </p:nvSpPr>
@@ -12483,7 +13255,7 @@
       </p:sp>
       <p:graphicFrame>
         <p:nvGraphicFramePr>
-          <p:cNvPr id="9" name="Chart 8"/>
+          <p:cNvPr id="10" name="Chart 9"/>
           <p:cNvGraphicFramePr>
             <a:graphicFrameLocks noGrp="1"/>
           </p:cNvGraphicFramePr>
@@ -12501,7 +13273,7 @@
       </p:graphicFrame>
       <p:sp>
         <p:nvSpPr>
-          <p:cNvPr id="10" name="Rectangle 9"/>
+          <p:cNvPr id="11" name="Rectangle 10"/>
           <p:cNvSpPr/>
           <p:nvPr/>
         </p:nvSpPr>
@@ -12550,7 +13322,7 @@
       </p:sp>
       <p:sp>
         <p:nvSpPr>
-          <p:cNvPr id="11" name="TextBox 10"/>
+          <p:cNvPr id="12" name="TextBox 11"/>
           <p:cNvSpPr txBox="1"/>
           <p:nvPr/>
         </p:nvSpPr>
@@ -12592,7 +13364,7 @@
       </p:sp>
       <p:sp>
         <p:nvSpPr>
-          <p:cNvPr id="12" name="TextBox 11"/>
+          <p:cNvPr id="13" name="TextBox 12"/>
           <p:cNvSpPr txBox="1"/>
           <p:nvPr/>
         </p:nvSpPr>
@@ -12627,14 +13399,14 @@
               <a:rPr>
                 <a:latin typeface="Inter"/>
               </a:rPr>
-              <a:t>TEST DATA — fictional portfolio for rendering tests only · Data as of 2026-06-30 historical; 2026-10-08 ex ante</a:t>
+              <a:t>Confidential — Investment Committee · Data as of 2026-06-30 historical; 2026-10-08 ex ante</a:t>
             </a:r>
           </a:p>
         </p:txBody>
       </p:sp>
       <p:sp>
         <p:nvSpPr>
-          <p:cNvPr id="13" name="TextBox 12"/>
+          <p:cNvPr id="14" name="TextBox 13"/>
           <p:cNvSpPr txBox="1"/>
           <p:nvPr/>
         </p:nvSpPr>
@@ -12750,7 +13522,7 @@
         <p:spPr>
           <a:xfrm>
             <a:off x="640080" y="329184"/>
-            <a:ext cx="9875520" cy="182880"/>
+            <a:ext cx="5303520" cy="182880"/>
           </a:xfrm>
           <a:prstGeom prst="rect">
             <a:avLst/>
@@ -12791,6 +13563,48 @@
         </p:nvSpPr>
         <p:spPr>
           <a:xfrm>
+            <a:off x="5897880" y="310896"/>
+            <a:ext cx="4800600" cy="256032"/>
+          </a:xfrm>
+          <a:prstGeom prst="rect">
+            <a:avLst/>
+          </a:prstGeom>
+          <a:noFill/>
+        </p:spPr>
+        <p:txBody>
+          <a:bodyPr wrap="none" lIns="9144" rIns="9144" tIns="9144" bIns="9144" anchor="t">
+            <a:spAutoFit/>
+          </a:bodyPr>
+          <a:lstStyle/>
+          <a:p>
+            <a:pPr algn="r">
+              <a:spcAft>
+                <a:spcPts val="0"/>
+              </a:spcAft>
+              <a:defRPr sz="680" b="1">
+                <a:solidFill>
+                  <a:srgbClr val="4F6B00"/>
+                </a:solidFill>
+                <a:latin typeface="Inter"/>
+              </a:defRPr>
+            </a:pPr>
+            <a:r>
+              <a:rPr>
+                <a:latin typeface="Inter"/>
+              </a:rPr>
+              <a:t>Illustrative, Gradient Maintained — demo data, not the client's holdings or managers</a:t>
+            </a:r>
+          </a:p>
+        </p:txBody>
+      </p:sp>
+      <p:sp>
+        <p:nvSpPr>
+          <p:cNvPr id="5" name="TextBox 4"/>
+          <p:cNvSpPr txBox="1"/>
+          <p:nvPr/>
+        </p:nvSpPr>
+        <p:spPr>
+          <a:xfrm>
             <a:off x="640080" y="566928"/>
             <a:ext cx="10058400" cy="530352"/>
           </a:xfrm>
@@ -12827,7 +13641,7 @@
       </p:sp>
       <p:sp>
         <p:nvSpPr>
-          <p:cNvPr id="5" name="Rectangle 4"/>
+          <p:cNvPr id="6" name="Rectangle 5"/>
           <p:cNvSpPr/>
           <p:nvPr/>
         </p:nvSpPr>
@@ -12876,7 +13690,7 @@
       </p:sp>
       <p:sp>
         <p:nvSpPr>
-          <p:cNvPr id="6" name="Rectangle 5"/>
+          <p:cNvPr id="7" name="Rectangle 6"/>
           <p:cNvSpPr/>
           <p:nvPr/>
         </p:nvSpPr>
@@ -12925,7 +13739,7 @@
       </p:sp>
       <p:sp>
         <p:nvSpPr>
-          <p:cNvPr id="7" name="TextBox 6"/>
+          <p:cNvPr id="8" name="TextBox 7"/>
           <p:cNvSpPr txBox="1"/>
           <p:nvPr/>
         </p:nvSpPr>
@@ -12967,7 +13781,7 @@
       </p:sp>
       <p:sp>
         <p:nvSpPr>
-          <p:cNvPr id="8" name="Rectangle 7"/>
+          <p:cNvPr id="9" name="Rectangle 8"/>
           <p:cNvSpPr/>
           <p:nvPr/>
         </p:nvSpPr>
@@ -13016,7 +13830,7 @@
       </p:sp>
       <p:sp>
         <p:nvSpPr>
-          <p:cNvPr id="9" name="Rectangle 8"/>
+          <p:cNvPr id="10" name="Rectangle 9"/>
           <p:cNvSpPr/>
           <p:nvPr/>
         </p:nvSpPr>
@@ -13065,7 +13879,7 @@
       </p:sp>
       <p:sp>
         <p:nvSpPr>
-          <p:cNvPr id="10" name="TextBox 9"/>
+          <p:cNvPr id="11" name="TextBox 10"/>
           <p:cNvSpPr txBox="1"/>
           <p:nvPr/>
         </p:nvSpPr>
@@ -13107,7 +13921,7 @@
       </p:sp>
       <p:sp>
         <p:nvSpPr>
-          <p:cNvPr id="11" name="TextBox 10"/>
+          <p:cNvPr id="12" name="TextBox 11"/>
           <p:cNvSpPr txBox="1"/>
           <p:nvPr/>
         </p:nvSpPr>
@@ -13149,7 +13963,7 @@
       </p:sp>
       <p:sp>
         <p:nvSpPr>
-          <p:cNvPr id="12" name="Rectangle 11"/>
+          <p:cNvPr id="13" name="Rectangle 12"/>
           <p:cNvSpPr/>
           <p:nvPr/>
         </p:nvSpPr>
@@ -13198,7 +14012,7 @@
       </p:sp>
       <p:sp>
         <p:nvSpPr>
-          <p:cNvPr id="13" name="TextBox 12"/>
+          <p:cNvPr id="14" name="TextBox 13"/>
           <p:cNvSpPr txBox="1"/>
           <p:nvPr/>
         </p:nvSpPr>
@@ -13240,7 +14054,7 @@
       </p:sp>
       <p:sp>
         <p:nvSpPr>
-          <p:cNvPr id="14" name="TextBox 13"/>
+          <p:cNvPr id="15" name="TextBox 14"/>
           <p:cNvSpPr txBox="1"/>
           <p:nvPr/>
         </p:nvSpPr>
@@ -13275,14 +14089,14 @@
               <a:rPr>
                 <a:latin typeface="Inter"/>
               </a:rPr>
-              <a:t>TEST DATA — fictional portfolio for rendering tests only · Data as of 2026-06-30 historical; 2026-10-08 ex ante</a:t>
+              <a:t>Confidential — Investment Committee · Data as of 2026-06-30 historical; 2026-10-08 ex ante</a:t>
             </a:r>
           </a:p>
         </p:txBody>
       </p:sp>
       <p:sp>
         <p:nvSpPr>
-          <p:cNvPr id="15" name="TextBox 14"/>
+          <p:cNvPr id="16" name="TextBox 15"/>
           <p:cNvSpPr txBox="1"/>
           <p:nvPr/>
         </p:nvSpPr>
@@ -13398,7 +14212,7 @@
         <p:spPr>
           <a:xfrm>
             <a:off x="640080" y="329184"/>
-            <a:ext cx="9875520" cy="182880"/>
+            <a:ext cx="5303520" cy="182880"/>
           </a:xfrm>
           <a:prstGeom prst="rect">
             <a:avLst/>
@@ -13439,6 +14253,48 @@
         </p:nvSpPr>
         <p:spPr>
           <a:xfrm>
+            <a:off x="5897880" y="310896"/>
+            <a:ext cx="4800600" cy="256032"/>
+          </a:xfrm>
+          <a:prstGeom prst="rect">
+            <a:avLst/>
+          </a:prstGeom>
+          <a:noFill/>
+        </p:spPr>
+        <p:txBody>
+          <a:bodyPr wrap="none" lIns="9144" rIns="9144" tIns="9144" bIns="9144" anchor="t">
+            <a:spAutoFit/>
+          </a:bodyPr>
+          <a:lstStyle/>
+          <a:p>
+            <a:pPr algn="r">
+              <a:spcAft>
+                <a:spcPts val="0"/>
+              </a:spcAft>
+              <a:defRPr sz="680" b="1">
+                <a:solidFill>
+                  <a:srgbClr val="4F6B00"/>
+                </a:solidFill>
+                <a:latin typeface="Inter"/>
+              </a:defRPr>
+            </a:pPr>
+            <a:r>
+              <a:rPr>
+                <a:latin typeface="Inter"/>
+              </a:rPr>
+              <a:t>Illustrative, Gradient Maintained — demo data, not the client's holdings or managers</a:t>
+            </a:r>
+          </a:p>
+        </p:txBody>
+      </p:sp>
+      <p:sp>
+        <p:nvSpPr>
+          <p:cNvPr id="5" name="TextBox 4"/>
+          <p:cNvSpPr txBox="1"/>
+          <p:nvPr/>
+        </p:nvSpPr>
+        <p:spPr>
+          <a:xfrm>
             <a:off x="640080" y="566928"/>
             <a:ext cx="10058400" cy="530352"/>
           </a:xfrm>
@@ -13475,7 +14331,7 @@
       </p:sp>
       <p:sp>
         <p:nvSpPr>
-          <p:cNvPr id="5" name="Rectangle 4"/>
+          <p:cNvPr id="6" name="Rectangle 5"/>
           <p:cNvSpPr/>
           <p:nvPr/>
         </p:nvSpPr>
@@ -13524,7 +14380,7 @@
       </p:sp>
       <p:sp>
         <p:nvSpPr>
-          <p:cNvPr id="6" name="Rectangle 5"/>
+          <p:cNvPr id="7" name="Rectangle 6"/>
           <p:cNvSpPr/>
           <p:nvPr/>
         </p:nvSpPr>
@@ -13573,7 +14429,7 @@
       </p:sp>
       <p:sp>
         <p:nvSpPr>
-          <p:cNvPr id="7" name="TextBox 6"/>
+          <p:cNvPr id="8" name="TextBox 7"/>
           <p:cNvSpPr txBox="1"/>
           <p:nvPr/>
         </p:nvSpPr>
@@ -13615,7 +14471,7 @@
       </p:sp>
       <p:sp>
         <p:nvSpPr>
-          <p:cNvPr id="8" name="TextBox 7"/>
+          <p:cNvPr id="9" name="TextBox 8"/>
           <p:cNvSpPr txBox="1"/>
           <p:nvPr/>
         </p:nvSpPr>
@@ -13657,7 +14513,7 @@
       </p:sp>
       <p:graphicFrame>
         <p:nvGraphicFramePr>
-          <p:cNvPr id="9" name="Table 8"/>
+          <p:cNvPr id="10" name="Table 9"/>
           <p:cNvGraphicFramePr>
             <a:graphicFrameLocks noGrp="1"/>
           </p:cNvGraphicFramePr>
@@ -14099,7 +14955,7 @@
       </p:graphicFrame>
       <p:sp>
         <p:nvSpPr>
-          <p:cNvPr id="10" name="Rectangle 9"/>
+          <p:cNvPr id="11" name="Rectangle 10"/>
           <p:cNvSpPr/>
           <p:nvPr/>
         </p:nvSpPr>
@@ -14148,7 +15004,7 @@
       </p:sp>
       <p:sp>
         <p:nvSpPr>
-          <p:cNvPr id="11" name="TextBox 10"/>
+          <p:cNvPr id="12" name="TextBox 11"/>
           <p:cNvSpPr txBox="1"/>
           <p:nvPr/>
         </p:nvSpPr>
@@ -14190,7 +15046,7 @@
       </p:sp>
       <p:graphicFrame>
         <p:nvGraphicFramePr>
-          <p:cNvPr id="12" name="Table 11"/>
+          <p:cNvPr id="13" name="Table 12"/>
           <p:cNvGraphicFramePr>
             <a:graphicFrameLocks noGrp="1"/>
           </p:cNvGraphicFramePr>
@@ -14664,7 +15520,7 @@
       </p:graphicFrame>
       <p:sp>
         <p:nvSpPr>
-          <p:cNvPr id="13" name="Rectangle 12"/>
+          <p:cNvPr id="14" name="Rectangle 13"/>
           <p:cNvSpPr/>
           <p:nvPr/>
         </p:nvSpPr>
@@ -14713,7 +15569,7 @@
       </p:sp>
       <p:sp>
         <p:nvSpPr>
-          <p:cNvPr id="14" name="TextBox 13"/>
+          <p:cNvPr id="15" name="TextBox 14"/>
           <p:cNvSpPr txBox="1"/>
           <p:nvPr/>
         </p:nvSpPr>
@@ -14755,7 +15611,7 @@
       </p:sp>
       <p:sp>
         <p:nvSpPr>
-          <p:cNvPr id="15" name="TextBox 14"/>
+          <p:cNvPr id="16" name="TextBox 15"/>
           <p:cNvSpPr txBox="1"/>
           <p:nvPr/>
         </p:nvSpPr>
@@ -14790,14 +15646,14 @@
               <a:rPr>
                 <a:latin typeface="Inter"/>
               </a:rPr>
-              <a:t>TEST DATA — fictional portfolio for rendering tests only · Data as of 2026-06-30 historical; 2026-10-08 ex ante</a:t>
+              <a:t>Confidential — Investment Committee · Data as of 2026-06-30 historical; 2026-10-08 ex ante</a:t>
             </a:r>
           </a:p>
         </p:txBody>
       </p:sp>
       <p:sp>
         <p:nvSpPr>
-          <p:cNvPr id="16" name="TextBox 15"/>
+          <p:cNvPr id="17" name="TextBox 16"/>
           <p:cNvSpPr txBox="1"/>
           <p:nvPr/>
         </p:nvSpPr>
@@ -14913,7 +15769,7 @@
         <p:spPr>
           <a:xfrm>
             <a:off x="640080" y="329184"/>
-            <a:ext cx="9875520" cy="182880"/>
+            <a:ext cx="5303520" cy="182880"/>
           </a:xfrm>
           <a:prstGeom prst="rect">
             <a:avLst/>
@@ -14954,6 +15810,48 @@
         </p:nvSpPr>
         <p:spPr>
           <a:xfrm>
+            <a:off x="5897880" y="310896"/>
+            <a:ext cx="4800600" cy="256032"/>
+          </a:xfrm>
+          <a:prstGeom prst="rect">
+            <a:avLst/>
+          </a:prstGeom>
+          <a:noFill/>
+        </p:spPr>
+        <p:txBody>
+          <a:bodyPr wrap="none" lIns="9144" rIns="9144" tIns="9144" bIns="9144" anchor="t">
+            <a:spAutoFit/>
+          </a:bodyPr>
+          <a:lstStyle/>
+          <a:p>
+            <a:pPr algn="r">
+              <a:spcAft>
+                <a:spcPts val="0"/>
+              </a:spcAft>
+              <a:defRPr sz="680" b="1">
+                <a:solidFill>
+                  <a:srgbClr val="4F6B00"/>
+                </a:solidFill>
+                <a:latin typeface="Inter"/>
+              </a:defRPr>
+            </a:pPr>
+            <a:r>
+              <a:rPr>
+                <a:latin typeface="Inter"/>
+              </a:rPr>
+              <a:t>Illustrative, Gradient Maintained — demo data, not the client's holdings or managers</a:t>
+            </a:r>
+          </a:p>
+        </p:txBody>
+      </p:sp>
+      <p:sp>
+        <p:nvSpPr>
+          <p:cNvPr id="5" name="TextBox 4"/>
+          <p:cNvSpPr txBox="1"/>
+          <p:nvPr/>
+        </p:nvSpPr>
+        <p:spPr>
+          <a:xfrm>
             <a:off x="640080" y="566928"/>
             <a:ext cx="10058400" cy="530352"/>
           </a:xfrm>
@@ -14990,7 +15888,7 @@
       </p:sp>
       <p:sp>
         <p:nvSpPr>
-          <p:cNvPr id="5" name="Rectangle 4"/>
+          <p:cNvPr id="6" name="Rectangle 5"/>
           <p:cNvSpPr/>
           <p:nvPr/>
         </p:nvSpPr>
@@ -15039,7 +15937,7 @@
       </p:sp>
       <p:sp>
         <p:nvSpPr>
-          <p:cNvPr id="6" name="Rectangle 5"/>
+          <p:cNvPr id="7" name="Rectangle 6"/>
           <p:cNvSpPr/>
           <p:nvPr/>
         </p:nvSpPr>
@@ -15088,7 +15986,7 @@
       </p:sp>
       <p:sp>
         <p:nvSpPr>
-          <p:cNvPr id="7" name="TextBox 6"/>
+          <p:cNvPr id="8" name="TextBox 7"/>
           <p:cNvSpPr txBox="1"/>
           <p:nvPr/>
         </p:nvSpPr>
@@ -15130,7 +16028,7 @@
       </p:sp>
       <p:sp>
         <p:nvSpPr>
-          <p:cNvPr id="8" name="Rectangle 7"/>
+          <p:cNvPr id="9" name="Rectangle 8"/>
           <p:cNvSpPr/>
           <p:nvPr/>
         </p:nvSpPr>
@@ -15179,7 +16077,7 @@
       </p:sp>
       <p:sp>
         <p:nvSpPr>
-          <p:cNvPr id="9" name="Rectangle 8"/>
+          <p:cNvPr id="10" name="Rectangle 9"/>
           <p:cNvSpPr/>
           <p:nvPr/>
         </p:nvSpPr>
@@ -15228,7 +16126,7 @@
       </p:sp>
       <p:sp>
         <p:nvSpPr>
-          <p:cNvPr id="10" name="TextBox 9"/>
+          <p:cNvPr id="11" name="TextBox 10"/>
           <p:cNvSpPr txBox="1"/>
           <p:nvPr/>
         </p:nvSpPr>
@@ -15270,7 +16168,7 @@
       </p:sp>
       <p:sp>
         <p:nvSpPr>
-          <p:cNvPr id="11" name="TextBox 10"/>
+          <p:cNvPr id="12" name="TextBox 11"/>
           <p:cNvSpPr txBox="1"/>
           <p:nvPr/>
         </p:nvSpPr>
@@ -15312,7 +16210,7 @@
       </p:sp>
       <p:sp>
         <p:nvSpPr>
-          <p:cNvPr id="12" name="Rectangle 11"/>
+          <p:cNvPr id="13" name="Rectangle 12"/>
           <p:cNvSpPr/>
           <p:nvPr/>
         </p:nvSpPr>
@@ -15361,7 +16259,7 @@
       </p:sp>
       <p:sp>
         <p:nvSpPr>
-          <p:cNvPr id="13" name="Rectangle 12"/>
+          <p:cNvPr id="14" name="Rectangle 13"/>
           <p:cNvSpPr/>
           <p:nvPr/>
         </p:nvSpPr>
@@ -15410,7 +16308,7 @@
       </p:sp>
       <p:sp>
         <p:nvSpPr>
-          <p:cNvPr id="14" name="TextBox 13"/>
+          <p:cNvPr id="15" name="TextBox 14"/>
           <p:cNvSpPr txBox="1"/>
           <p:nvPr/>
         </p:nvSpPr>
@@ -15452,7 +16350,7 @@
       </p:sp>
       <p:sp>
         <p:nvSpPr>
-          <p:cNvPr id="15" name="TextBox 14"/>
+          <p:cNvPr id="16" name="TextBox 15"/>
           <p:cNvSpPr txBox="1"/>
           <p:nvPr/>
         </p:nvSpPr>
@@ -15494,7 +16392,7 @@
       </p:sp>
       <p:sp>
         <p:nvSpPr>
-          <p:cNvPr id="16" name="TextBox 15"/>
+          <p:cNvPr id="17" name="TextBox 16"/>
           <p:cNvSpPr txBox="1"/>
           <p:nvPr/>
         </p:nvSpPr>
@@ -15536,7 +16434,7 @@
       </p:sp>
       <p:sp>
         <p:nvSpPr>
-          <p:cNvPr id="17" name="Rectangle 16"/>
+          <p:cNvPr id="18" name="Rectangle 17"/>
           <p:cNvSpPr/>
           <p:nvPr/>
         </p:nvSpPr>
@@ -15585,7 +16483,7 @@
       </p:sp>
       <p:sp>
         <p:nvSpPr>
-          <p:cNvPr id="18" name="Rectangle 17"/>
+          <p:cNvPr id="19" name="Rectangle 18"/>
           <p:cNvSpPr/>
           <p:nvPr/>
         </p:nvSpPr>
@@ -15634,7 +16532,7 @@
       </p:sp>
       <p:sp>
         <p:nvSpPr>
-          <p:cNvPr id="19" name="TextBox 18"/>
+          <p:cNvPr id="20" name="TextBox 19"/>
           <p:cNvSpPr txBox="1"/>
           <p:nvPr/>
         </p:nvSpPr>
@@ -15676,7 +16574,7 @@
       </p:sp>
       <p:sp>
         <p:nvSpPr>
-          <p:cNvPr id="20" name="TextBox 19"/>
+          <p:cNvPr id="21" name="TextBox 20"/>
           <p:cNvSpPr txBox="1"/>
           <p:nvPr/>
         </p:nvSpPr>
@@ -15718,7 +16616,7 @@
       </p:sp>
       <p:sp>
         <p:nvSpPr>
-          <p:cNvPr id="21" name="TextBox 20"/>
+          <p:cNvPr id="22" name="TextBox 21"/>
           <p:cNvSpPr txBox="1"/>
           <p:nvPr/>
         </p:nvSpPr>
@@ -15760,7 +16658,7 @@
       </p:sp>
       <p:sp>
         <p:nvSpPr>
-          <p:cNvPr id="22" name="Rectangle 21"/>
+          <p:cNvPr id="23" name="Rectangle 22"/>
           <p:cNvSpPr/>
           <p:nvPr/>
         </p:nvSpPr>
@@ -15809,7 +16707,7 @@
       </p:sp>
       <p:sp>
         <p:nvSpPr>
-          <p:cNvPr id="23" name="Rectangle 22"/>
+          <p:cNvPr id="24" name="Rectangle 23"/>
           <p:cNvSpPr/>
           <p:nvPr/>
         </p:nvSpPr>
@@ -15858,7 +16756,7 @@
       </p:sp>
       <p:sp>
         <p:nvSpPr>
-          <p:cNvPr id="24" name="TextBox 23"/>
+          <p:cNvPr id="25" name="TextBox 24"/>
           <p:cNvSpPr txBox="1"/>
           <p:nvPr/>
         </p:nvSpPr>
@@ -15900,7 +16798,7 @@
       </p:sp>
       <p:sp>
         <p:nvSpPr>
-          <p:cNvPr id="25" name="TextBox 24"/>
+          <p:cNvPr id="26" name="TextBox 25"/>
           <p:cNvSpPr txBox="1"/>
           <p:nvPr/>
         </p:nvSpPr>
@@ -15942,7 +16840,7 @@
       </p:sp>
       <p:sp>
         <p:nvSpPr>
-          <p:cNvPr id="26" name="TextBox 25"/>
+          <p:cNvPr id="27" name="TextBox 26"/>
           <p:cNvSpPr txBox="1"/>
           <p:nvPr/>
         </p:nvSpPr>
@@ -15984,7 +16882,7 @@
       </p:sp>
       <p:sp>
         <p:nvSpPr>
-          <p:cNvPr id="27" name="Rectangle 26"/>
+          <p:cNvPr id="28" name="Rectangle 27"/>
           <p:cNvSpPr/>
           <p:nvPr/>
         </p:nvSpPr>
@@ -16033,7 +16931,7 @@
       </p:sp>
       <p:sp>
         <p:nvSpPr>
-          <p:cNvPr id="28" name="Rectangle 27"/>
+          <p:cNvPr id="29" name="Rectangle 28"/>
           <p:cNvSpPr/>
           <p:nvPr/>
         </p:nvSpPr>
@@ -16082,7 +16980,7 @@
       </p:sp>
       <p:sp>
         <p:nvSpPr>
-          <p:cNvPr id="29" name="TextBox 28"/>
+          <p:cNvPr id="30" name="TextBox 29"/>
           <p:cNvSpPr txBox="1"/>
           <p:nvPr/>
         </p:nvSpPr>
@@ -16124,7 +17022,7 @@
       </p:sp>
       <p:sp>
         <p:nvSpPr>
-          <p:cNvPr id="30" name="TextBox 29"/>
+          <p:cNvPr id="31" name="TextBox 30"/>
           <p:cNvSpPr txBox="1"/>
           <p:nvPr/>
         </p:nvSpPr>
@@ -16166,7 +17064,7 @@
       </p:sp>
       <p:sp>
         <p:nvSpPr>
-          <p:cNvPr id="31" name="TextBox 30"/>
+          <p:cNvPr id="32" name="TextBox 31"/>
           <p:cNvSpPr txBox="1"/>
           <p:nvPr/>
         </p:nvSpPr>
@@ -16208,7 +17106,7 @@
       </p:sp>
       <p:sp>
         <p:nvSpPr>
-          <p:cNvPr id="32" name="Rectangle 31"/>
+          <p:cNvPr id="33" name="Rectangle 32"/>
           <p:cNvSpPr/>
           <p:nvPr/>
         </p:nvSpPr>
@@ -16257,7 +17155,7 @@
       </p:sp>
       <p:sp>
         <p:nvSpPr>
-          <p:cNvPr id="33" name="TextBox 32"/>
+          <p:cNvPr id="34" name="TextBox 33"/>
           <p:cNvSpPr txBox="1"/>
           <p:nvPr/>
         </p:nvSpPr>
@@ -16299,7 +17197,7 @@
       </p:sp>
       <p:sp>
         <p:nvSpPr>
-          <p:cNvPr id="34" name="TextBox 33"/>
+          <p:cNvPr id="35" name="TextBox 34"/>
           <p:cNvSpPr txBox="1"/>
           <p:nvPr/>
         </p:nvSpPr>
@@ -16334,14 +17232,14 @@
               <a:rPr>
                 <a:latin typeface="Inter"/>
               </a:rPr>
-              <a:t>TEST DATA — fictional portfolio for rendering tests only · Data as of 2026-06-30 historical; 2026-10-08 ex ante</a:t>
+              <a:t>Confidential — Investment Committee · Data as of 2026-06-30 historical; 2026-10-08 ex ante</a:t>
             </a:r>
           </a:p>
         </p:txBody>
       </p:sp>
       <p:sp>
         <p:nvSpPr>
-          <p:cNvPr id="35" name="TextBox 34"/>
+          <p:cNvPr id="36" name="TextBox 35"/>
           <p:cNvSpPr txBox="1"/>
           <p:nvPr/>
         </p:nvSpPr>
@@ -16457,7 +17355,7 @@
         <p:spPr>
           <a:xfrm>
             <a:off x="640080" y="329184"/>
-            <a:ext cx="9875520" cy="182880"/>
+            <a:ext cx="5303520" cy="182880"/>
           </a:xfrm>
           <a:prstGeom prst="rect">
             <a:avLst/>
@@ -16498,6 +17396,48 @@
         </p:nvSpPr>
         <p:spPr>
           <a:xfrm>
+            <a:off x="5897880" y="310896"/>
+            <a:ext cx="4800600" cy="256032"/>
+          </a:xfrm>
+          <a:prstGeom prst="rect">
+            <a:avLst/>
+          </a:prstGeom>
+          <a:noFill/>
+        </p:spPr>
+        <p:txBody>
+          <a:bodyPr wrap="none" lIns="9144" rIns="9144" tIns="9144" bIns="9144" anchor="t">
+            <a:spAutoFit/>
+          </a:bodyPr>
+          <a:lstStyle/>
+          <a:p>
+            <a:pPr algn="r">
+              <a:spcAft>
+                <a:spcPts val="0"/>
+              </a:spcAft>
+              <a:defRPr sz="680" b="1">
+                <a:solidFill>
+                  <a:srgbClr val="4F6B00"/>
+                </a:solidFill>
+                <a:latin typeface="Inter"/>
+              </a:defRPr>
+            </a:pPr>
+            <a:r>
+              <a:rPr>
+                <a:latin typeface="Inter"/>
+              </a:rPr>
+              <a:t>Illustrative, Gradient Maintained — demo data, not the client's holdings or managers</a:t>
+            </a:r>
+          </a:p>
+        </p:txBody>
+      </p:sp>
+      <p:sp>
+        <p:nvSpPr>
+          <p:cNvPr id="5" name="TextBox 4"/>
+          <p:cNvSpPr txBox="1"/>
+          <p:nvPr/>
+        </p:nvSpPr>
+        <p:spPr>
+          <a:xfrm>
             <a:off x="640080" y="566928"/>
             <a:ext cx="10058400" cy="530352"/>
           </a:xfrm>
@@ -16534,7 +17474,7 @@
       </p:sp>
       <p:sp>
         <p:nvSpPr>
-          <p:cNvPr id="5" name="Rectangle 4"/>
+          <p:cNvPr id="6" name="Rectangle 5"/>
           <p:cNvSpPr/>
           <p:nvPr/>
         </p:nvSpPr>
@@ -16583,7 +17523,7 @@
       </p:sp>
       <p:sp>
         <p:nvSpPr>
-          <p:cNvPr id="6" name="Rectangle 5"/>
+          <p:cNvPr id="7" name="Rectangle 6"/>
           <p:cNvSpPr/>
           <p:nvPr/>
         </p:nvSpPr>
@@ -16632,7 +17572,7 @@
       </p:sp>
       <p:sp>
         <p:nvSpPr>
-          <p:cNvPr id="7" name="TextBox 6"/>
+          <p:cNvPr id="8" name="TextBox 7"/>
           <p:cNvSpPr txBox="1"/>
           <p:nvPr/>
         </p:nvSpPr>
@@ -16674,7 +17614,7 @@
       </p:sp>
       <p:sp>
         <p:nvSpPr>
-          <p:cNvPr id="8" name="TextBox 7"/>
+          <p:cNvPr id="9" name="TextBox 8"/>
           <p:cNvSpPr txBox="1"/>
           <p:nvPr/>
         </p:nvSpPr>
@@ -16716,7 +17656,7 @@
       </p:sp>
       <p:graphicFrame>
         <p:nvGraphicFramePr>
-          <p:cNvPr id="9" name="Table 8"/>
+          <p:cNvPr id="10" name="Table 9"/>
           <p:cNvGraphicFramePr>
             <a:graphicFrameLocks noGrp="1"/>
           </p:cNvGraphicFramePr>
@@ -17729,7 +18669,7 @@
       </p:graphicFrame>
       <p:sp>
         <p:nvSpPr>
-          <p:cNvPr id="10" name="TextBox 9"/>
+          <p:cNvPr id="11" name="TextBox 10"/>
           <p:cNvSpPr txBox="1"/>
           <p:nvPr/>
         </p:nvSpPr>
@@ -17771,7 +18711,7 @@
       </p:sp>
       <p:sp>
         <p:nvSpPr>
-          <p:cNvPr id="11" name="Rectangle 10"/>
+          <p:cNvPr id="12" name="Rectangle 11"/>
           <p:cNvSpPr/>
           <p:nvPr/>
         </p:nvSpPr>
@@ -17820,7 +18760,7 @@
       </p:sp>
       <p:sp>
         <p:nvSpPr>
-          <p:cNvPr id="12" name="Rectangle 11"/>
+          <p:cNvPr id="13" name="Rectangle 12"/>
           <p:cNvSpPr/>
           <p:nvPr/>
         </p:nvSpPr>
@@ -17869,7 +18809,7 @@
       </p:sp>
       <p:sp>
         <p:nvSpPr>
-          <p:cNvPr id="13" name="TextBox 12"/>
+          <p:cNvPr id="14" name="TextBox 13"/>
           <p:cNvSpPr txBox="1"/>
           <p:nvPr/>
         </p:nvSpPr>
@@ -17911,7 +18851,7 @@
       </p:sp>
       <p:sp>
         <p:nvSpPr>
-          <p:cNvPr id="14" name="TextBox 13"/>
+          <p:cNvPr id="15" name="TextBox 14"/>
           <p:cNvSpPr txBox="1"/>
           <p:nvPr/>
         </p:nvSpPr>
@@ -17953,7 +18893,7 @@
       </p:sp>
       <p:sp>
         <p:nvSpPr>
-          <p:cNvPr id="15" name="Rectangle 14"/>
+          <p:cNvPr id="16" name="Rectangle 15"/>
           <p:cNvSpPr/>
           <p:nvPr/>
         </p:nvSpPr>
@@ -18002,7 +18942,7 @@
       </p:sp>
       <p:sp>
         <p:nvSpPr>
-          <p:cNvPr id="16" name="TextBox 15"/>
+          <p:cNvPr id="17" name="TextBox 16"/>
           <p:cNvSpPr txBox="1"/>
           <p:nvPr/>
         </p:nvSpPr>
@@ -18044,7 +18984,7 @@
       </p:sp>
       <p:sp>
         <p:nvSpPr>
-          <p:cNvPr id="17" name="TextBox 16"/>
+          <p:cNvPr id="18" name="TextBox 17"/>
           <p:cNvSpPr txBox="1"/>
           <p:nvPr/>
         </p:nvSpPr>
@@ -18079,14 +19019,14 @@
               <a:rPr>
                 <a:latin typeface="Inter"/>
               </a:rPr>
-              <a:t>TEST DATA — fictional portfolio for rendering tests only · Data as of 2026-06-30 historical; 2026-10-08 ex ante</a:t>
+              <a:t>Confidential — Investment Committee · Data as of 2026-06-30 historical; 2026-10-08 ex ante</a:t>
             </a:r>
           </a:p>
         </p:txBody>
       </p:sp>
       <p:sp>
         <p:nvSpPr>
-          <p:cNvPr id="18" name="TextBox 17"/>
+          <p:cNvPr id="19" name="TextBox 18"/>
           <p:cNvSpPr txBox="1"/>
           <p:nvPr/>
         </p:nvSpPr>
@@ -18202,7 +19142,7 @@
         <p:spPr>
           <a:xfrm>
             <a:off x="640080" y="329184"/>
-            <a:ext cx="9875520" cy="182880"/>
+            <a:ext cx="5303520" cy="182880"/>
           </a:xfrm>
           <a:prstGeom prst="rect">
             <a:avLst/>
@@ -18243,6 +19183,48 @@
         </p:nvSpPr>
         <p:spPr>
           <a:xfrm>
+            <a:off x="5897880" y="310896"/>
+            <a:ext cx="4800600" cy="256032"/>
+          </a:xfrm>
+          <a:prstGeom prst="rect">
+            <a:avLst/>
+          </a:prstGeom>
+          <a:noFill/>
+        </p:spPr>
+        <p:txBody>
+          <a:bodyPr wrap="none" lIns="9144" rIns="9144" tIns="9144" bIns="9144" anchor="t">
+            <a:spAutoFit/>
+          </a:bodyPr>
+          <a:lstStyle/>
+          <a:p>
+            <a:pPr algn="r">
+              <a:spcAft>
+                <a:spcPts val="0"/>
+              </a:spcAft>
+              <a:defRPr sz="680" b="1">
+                <a:solidFill>
+                  <a:srgbClr val="4F6B00"/>
+                </a:solidFill>
+                <a:latin typeface="Inter"/>
+              </a:defRPr>
+            </a:pPr>
+            <a:r>
+              <a:rPr>
+                <a:latin typeface="Inter"/>
+              </a:rPr>
+              <a:t>Illustrative, Gradient Maintained — demo data, not the client's holdings or managers</a:t>
+            </a:r>
+          </a:p>
+        </p:txBody>
+      </p:sp>
+      <p:sp>
+        <p:nvSpPr>
+          <p:cNvPr id="5" name="TextBox 4"/>
+          <p:cNvSpPr txBox="1"/>
+          <p:nvPr/>
+        </p:nvSpPr>
+        <p:spPr>
+          <a:xfrm>
             <a:off x="640080" y="566928"/>
             <a:ext cx="10058400" cy="530352"/>
           </a:xfrm>
@@ -18279,7 +19261,7 @@
       </p:sp>
       <p:sp>
         <p:nvSpPr>
-          <p:cNvPr id="5" name="Rectangle 4"/>
+          <p:cNvPr id="6" name="Rectangle 5"/>
           <p:cNvSpPr/>
           <p:nvPr/>
         </p:nvSpPr>
@@ -18328,7 +19310,7 @@
       </p:sp>
       <p:sp>
         <p:nvSpPr>
-          <p:cNvPr id="6" name="Rectangle 5"/>
+          <p:cNvPr id="7" name="Rectangle 6"/>
           <p:cNvSpPr/>
           <p:nvPr/>
         </p:nvSpPr>
@@ -18377,7 +19359,7 @@
       </p:sp>
       <p:sp>
         <p:nvSpPr>
-          <p:cNvPr id="7" name="TextBox 6"/>
+          <p:cNvPr id="8" name="TextBox 7"/>
           <p:cNvSpPr txBox="1"/>
           <p:nvPr/>
         </p:nvSpPr>
@@ -18419,7 +19401,7 @@
       </p:sp>
       <p:sp>
         <p:nvSpPr>
-          <p:cNvPr id="8" name="TextBox 7"/>
+          <p:cNvPr id="9" name="TextBox 8"/>
           <p:cNvSpPr txBox="1"/>
           <p:nvPr/>
         </p:nvSpPr>
@@ -18461,7 +19443,7 @@
       </p:sp>
       <p:graphicFrame>
         <p:nvGraphicFramePr>
-          <p:cNvPr id="9" name="Chart 8"/>
+          <p:cNvPr id="10" name="Chart 9"/>
           <p:cNvGraphicFramePr>
             <a:graphicFrameLocks noGrp="1"/>
           </p:cNvGraphicFramePr>
@@ -18479,7 +19461,7 @@
       </p:graphicFrame>
       <p:sp>
         <p:nvSpPr>
-          <p:cNvPr id="10" name="Rectangle 9"/>
+          <p:cNvPr id="11" name="Rectangle 10"/>
           <p:cNvSpPr/>
           <p:nvPr/>
         </p:nvSpPr>
@@ -18528,7 +19510,7 @@
       </p:sp>
       <p:sp>
         <p:nvSpPr>
-          <p:cNvPr id="11" name="TextBox 10"/>
+          <p:cNvPr id="12" name="TextBox 11"/>
           <p:cNvSpPr txBox="1"/>
           <p:nvPr/>
         </p:nvSpPr>
@@ -18570,7 +19552,7 @@
       </p:sp>
       <p:sp>
         <p:nvSpPr>
-          <p:cNvPr id="12" name="TextBox 11"/>
+          <p:cNvPr id="13" name="TextBox 12"/>
           <p:cNvSpPr txBox="1"/>
           <p:nvPr/>
         </p:nvSpPr>
@@ -18605,14 +19587,14 @@
               <a:rPr>
                 <a:latin typeface="Inter"/>
               </a:rPr>
-              <a:t>TEST DATA — fictional portfolio for rendering tests only · Data as of 2026-06-30 historical; 2026-10-08 ex ante</a:t>
+              <a:t>Confidential — Investment Committee · Data as of 2026-06-30 historical; 2026-10-08 ex ante</a:t>
             </a:r>
           </a:p>
         </p:txBody>
       </p:sp>
       <p:sp>
         <p:nvSpPr>
-          <p:cNvPr id="13" name="TextBox 12"/>
+          <p:cNvPr id="14" name="TextBox 13"/>
           <p:cNvSpPr txBox="1"/>
           <p:nvPr/>
         </p:nvSpPr>
@@ -18728,7 +19710,7 @@
         <p:spPr>
           <a:xfrm>
             <a:off x="640080" y="329184"/>
-            <a:ext cx="9875520" cy="182880"/>
+            <a:ext cx="5303520" cy="182880"/>
           </a:xfrm>
           <a:prstGeom prst="rect">
             <a:avLst/>
@@ -18769,6 +19751,48 @@
         </p:nvSpPr>
         <p:spPr>
           <a:xfrm>
+            <a:off x="5897880" y="310896"/>
+            <a:ext cx="4800600" cy="256032"/>
+          </a:xfrm>
+          <a:prstGeom prst="rect">
+            <a:avLst/>
+          </a:prstGeom>
+          <a:noFill/>
+        </p:spPr>
+        <p:txBody>
+          <a:bodyPr wrap="none" lIns="9144" rIns="9144" tIns="9144" bIns="9144" anchor="t">
+            <a:spAutoFit/>
+          </a:bodyPr>
+          <a:lstStyle/>
+          <a:p>
+            <a:pPr algn="r">
+              <a:spcAft>
+                <a:spcPts val="0"/>
+              </a:spcAft>
+              <a:defRPr sz="680" b="1">
+                <a:solidFill>
+                  <a:srgbClr val="4F6B00"/>
+                </a:solidFill>
+                <a:latin typeface="Inter"/>
+              </a:defRPr>
+            </a:pPr>
+            <a:r>
+              <a:rPr>
+                <a:latin typeface="Inter"/>
+              </a:rPr>
+              <a:t>Illustrative, Gradient Maintained — demo data, not the client's holdings or managers</a:t>
+            </a:r>
+          </a:p>
+        </p:txBody>
+      </p:sp>
+      <p:sp>
+        <p:nvSpPr>
+          <p:cNvPr id="5" name="TextBox 4"/>
+          <p:cNvSpPr txBox="1"/>
+          <p:nvPr/>
+        </p:nvSpPr>
+        <p:spPr>
+          <a:xfrm>
             <a:off x="640080" y="566928"/>
             <a:ext cx="10058400" cy="530352"/>
           </a:xfrm>
@@ -18805,7 +19829,7 @@
       </p:sp>
       <p:sp>
         <p:nvSpPr>
-          <p:cNvPr id="5" name="Rectangle 4"/>
+          <p:cNvPr id="6" name="Rectangle 5"/>
           <p:cNvSpPr/>
           <p:nvPr/>
         </p:nvSpPr>
@@ -18854,7 +19878,7 @@
       </p:sp>
       <p:sp>
         <p:nvSpPr>
-          <p:cNvPr id="6" name="Rectangle 5"/>
+          <p:cNvPr id="7" name="Rectangle 6"/>
           <p:cNvSpPr/>
           <p:nvPr/>
         </p:nvSpPr>
@@ -18903,7 +19927,7 @@
       </p:sp>
       <p:sp>
         <p:nvSpPr>
-          <p:cNvPr id="7" name="TextBox 6"/>
+          <p:cNvPr id="8" name="TextBox 7"/>
           <p:cNvSpPr txBox="1"/>
           <p:nvPr/>
         </p:nvSpPr>
@@ -18945,7 +19969,7 @@
       </p:sp>
       <p:sp>
         <p:nvSpPr>
-          <p:cNvPr id="8" name="TextBox 7"/>
+          <p:cNvPr id="9" name="TextBox 8"/>
           <p:cNvSpPr txBox="1"/>
           <p:nvPr/>
         </p:nvSpPr>
@@ -18987,7 +20011,7 @@
       </p:sp>
       <p:sp>
         <p:nvSpPr>
-          <p:cNvPr id="9" name="Rectangle 8"/>
+          <p:cNvPr id="10" name="Rectangle 9"/>
           <p:cNvSpPr/>
           <p:nvPr/>
         </p:nvSpPr>
@@ -19036,7 +20060,7 @@
       </p:sp>
       <p:sp>
         <p:nvSpPr>
-          <p:cNvPr id="10" name="Rectangle 9"/>
+          <p:cNvPr id="11" name="Rectangle 10"/>
           <p:cNvSpPr/>
           <p:nvPr/>
         </p:nvSpPr>
@@ -19085,7 +20109,7 @@
       </p:sp>
       <p:sp>
         <p:nvSpPr>
-          <p:cNvPr id="11" name="TextBox 10"/>
+          <p:cNvPr id="12" name="TextBox 11"/>
           <p:cNvSpPr txBox="1"/>
           <p:nvPr/>
         </p:nvSpPr>
@@ -19127,7 +20151,7 @@
       </p:sp>
       <p:sp>
         <p:nvSpPr>
-          <p:cNvPr id="12" name="TextBox 11"/>
+          <p:cNvPr id="13" name="TextBox 12"/>
           <p:cNvSpPr txBox="1"/>
           <p:nvPr/>
         </p:nvSpPr>
@@ -19169,7 +20193,7 @@
       </p:sp>
       <p:sp>
         <p:nvSpPr>
-          <p:cNvPr id="13" name="TextBox 12"/>
+          <p:cNvPr id="14" name="TextBox 13"/>
           <p:cNvSpPr txBox="1"/>
           <p:nvPr/>
         </p:nvSpPr>
@@ -19211,7 +20235,7 @@
       </p:sp>
       <p:sp>
         <p:nvSpPr>
-          <p:cNvPr id="14" name="Rectangle 13"/>
+          <p:cNvPr id="15" name="Rectangle 14"/>
           <p:cNvSpPr/>
           <p:nvPr/>
         </p:nvSpPr>
@@ -19260,7 +20284,7 @@
       </p:sp>
       <p:sp>
         <p:nvSpPr>
-          <p:cNvPr id="15" name="Rectangle 14"/>
+          <p:cNvPr id="16" name="Rectangle 15"/>
           <p:cNvSpPr/>
           <p:nvPr/>
         </p:nvSpPr>
@@ -19309,7 +20333,7 @@
       </p:sp>
       <p:sp>
         <p:nvSpPr>
-          <p:cNvPr id="16" name="TextBox 15"/>
+          <p:cNvPr id="17" name="TextBox 16"/>
           <p:cNvSpPr txBox="1"/>
           <p:nvPr/>
         </p:nvSpPr>
@@ -19351,7 +20375,7 @@
       </p:sp>
       <p:sp>
         <p:nvSpPr>
-          <p:cNvPr id="17" name="TextBox 16"/>
+          <p:cNvPr id="18" name="TextBox 17"/>
           <p:cNvSpPr txBox="1"/>
           <p:nvPr/>
         </p:nvSpPr>
@@ -19393,7 +20417,7 @@
       </p:sp>
       <p:sp>
         <p:nvSpPr>
-          <p:cNvPr id="18" name="TextBox 17"/>
+          <p:cNvPr id="19" name="TextBox 18"/>
           <p:cNvSpPr txBox="1"/>
           <p:nvPr/>
         </p:nvSpPr>
@@ -19435,7 +20459,7 @@
       </p:sp>
       <p:sp>
         <p:nvSpPr>
-          <p:cNvPr id="19" name="Rectangle 18"/>
+          <p:cNvPr id="20" name="Rectangle 19"/>
           <p:cNvSpPr/>
           <p:nvPr/>
         </p:nvSpPr>
@@ -19484,7 +20508,7 @@
       </p:sp>
       <p:sp>
         <p:nvSpPr>
-          <p:cNvPr id="20" name="Rectangle 19"/>
+          <p:cNvPr id="21" name="Rectangle 20"/>
           <p:cNvSpPr/>
           <p:nvPr/>
         </p:nvSpPr>
@@ -19533,7 +20557,7 @@
       </p:sp>
       <p:sp>
         <p:nvSpPr>
-          <p:cNvPr id="21" name="TextBox 20"/>
+          <p:cNvPr id="22" name="TextBox 21"/>
           <p:cNvSpPr txBox="1"/>
           <p:nvPr/>
         </p:nvSpPr>
@@ -19575,7 +20599,7 @@
       </p:sp>
       <p:sp>
         <p:nvSpPr>
-          <p:cNvPr id="22" name="TextBox 21"/>
+          <p:cNvPr id="23" name="TextBox 22"/>
           <p:cNvSpPr txBox="1"/>
           <p:nvPr/>
         </p:nvSpPr>
@@ -19617,7 +20641,7 @@
       </p:sp>
       <p:sp>
         <p:nvSpPr>
-          <p:cNvPr id="23" name="TextBox 22"/>
+          <p:cNvPr id="24" name="TextBox 23"/>
           <p:cNvSpPr txBox="1"/>
           <p:nvPr/>
         </p:nvSpPr>
@@ -19659,7 +20683,7 @@
       </p:sp>
       <p:sp>
         <p:nvSpPr>
-          <p:cNvPr id="24" name="Rectangle 23"/>
+          <p:cNvPr id="25" name="Rectangle 24"/>
           <p:cNvSpPr/>
           <p:nvPr/>
         </p:nvSpPr>
@@ -19708,7 +20732,7 @@
       </p:sp>
       <p:sp>
         <p:nvSpPr>
-          <p:cNvPr id="25" name="Rectangle 24"/>
+          <p:cNvPr id="26" name="Rectangle 25"/>
           <p:cNvSpPr/>
           <p:nvPr/>
         </p:nvSpPr>
@@ -19757,7 +20781,7 @@
       </p:sp>
       <p:sp>
         <p:nvSpPr>
-          <p:cNvPr id="26" name="TextBox 25"/>
+          <p:cNvPr id="27" name="TextBox 26"/>
           <p:cNvSpPr txBox="1"/>
           <p:nvPr/>
         </p:nvSpPr>
@@ -19799,7 +20823,7 @@
       </p:sp>
       <p:sp>
         <p:nvSpPr>
-          <p:cNvPr id="27" name="TextBox 26"/>
+          <p:cNvPr id="28" name="TextBox 27"/>
           <p:cNvSpPr txBox="1"/>
           <p:nvPr/>
         </p:nvSpPr>
@@ -19841,7 +20865,7 @@
       </p:sp>
       <p:sp>
         <p:nvSpPr>
-          <p:cNvPr id="28" name="TextBox 27"/>
+          <p:cNvPr id="29" name="TextBox 28"/>
           <p:cNvSpPr txBox="1"/>
           <p:nvPr/>
         </p:nvSpPr>
@@ -19883,7 +20907,7 @@
       </p:sp>
       <p:graphicFrame>
         <p:nvGraphicFramePr>
-          <p:cNvPr id="29" name="Table 28"/>
+          <p:cNvPr id="30" name="Table 29"/>
           <p:cNvGraphicFramePr>
             <a:graphicFrameLocks noGrp="1"/>
           </p:cNvGraphicFramePr>
@@ -20460,7 +21484,7 @@
       </p:graphicFrame>
       <p:sp>
         <p:nvSpPr>
-          <p:cNvPr id="30" name="Rectangle 29"/>
+          <p:cNvPr id="31" name="Rectangle 30"/>
           <p:cNvSpPr/>
           <p:nvPr/>
         </p:nvSpPr>
@@ -20509,7 +21533,7 @@
       </p:sp>
       <p:sp>
         <p:nvSpPr>
-          <p:cNvPr id="31" name="Rectangle 30"/>
+          <p:cNvPr id="32" name="Rectangle 31"/>
           <p:cNvSpPr/>
           <p:nvPr/>
         </p:nvSpPr>
@@ -20558,7 +21582,7 @@
       </p:sp>
       <p:sp>
         <p:nvSpPr>
-          <p:cNvPr id="32" name="TextBox 31"/>
+          <p:cNvPr id="33" name="TextBox 32"/>
           <p:cNvSpPr txBox="1"/>
           <p:nvPr/>
         </p:nvSpPr>
@@ -20600,7 +21624,7 @@
       </p:sp>
       <p:sp>
         <p:nvSpPr>
-          <p:cNvPr id="33" name="TextBox 32"/>
+          <p:cNvPr id="34" name="TextBox 33"/>
           <p:cNvSpPr txBox="1"/>
           <p:nvPr/>
         </p:nvSpPr>
@@ -20642,7 +21666,7 @@
       </p:sp>
       <p:sp>
         <p:nvSpPr>
-          <p:cNvPr id="34" name="Rectangle 33"/>
+          <p:cNvPr id="35" name="Rectangle 34"/>
           <p:cNvSpPr/>
           <p:nvPr/>
         </p:nvSpPr>
@@ -20691,7 +21715,7 @@
       </p:sp>
       <p:sp>
         <p:nvSpPr>
-          <p:cNvPr id="35" name="TextBox 34"/>
+          <p:cNvPr id="36" name="TextBox 35"/>
           <p:cNvSpPr txBox="1"/>
           <p:nvPr/>
         </p:nvSpPr>
@@ -20733,7 +21757,7 @@
       </p:sp>
       <p:sp>
         <p:nvSpPr>
-          <p:cNvPr id="36" name="TextBox 35"/>
+          <p:cNvPr id="37" name="TextBox 36"/>
           <p:cNvSpPr txBox="1"/>
           <p:nvPr/>
         </p:nvSpPr>
@@ -20768,14 +21792,14 @@
               <a:rPr>
                 <a:latin typeface="Inter"/>
               </a:rPr>
-              <a:t>TEST DATA — fictional portfolio for rendering tests only · Data as of 2026-06-30 historical; 2026-10-08 ex ante</a:t>
+              <a:t>Confidential — Investment Committee · Data as of 2026-06-30 historical; 2026-10-08 ex ante</a:t>
             </a:r>
           </a:p>
         </p:txBody>
       </p:sp>
       <p:sp>
         <p:nvSpPr>
-          <p:cNvPr id="37" name="TextBox 36"/>
+          <p:cNvPr id="38" name="TextBox 37"/>
           <p:cNvSpPr txBox="1"/>
           <p:nvPr/>
         </p:nvSpPr>
@@ -20891,7 +21915,7 @@
         <p:spPr>
           <a:xfrm>
             <a:off x="640080" y="329184"/>
-            <a:ext cx="9875520" cy="182880"/>
+            <a:ext cx="5303520" cy="182880"/>
           </a:xfrm>
           <a:prstGeom prst="rect">
             <a:avLst/>
@@ -20932,6 +21956,48 @@
         </p:nvSpPr>
         <p:spPr>
           <a:xfrm>
+            <a:off x="5897880" y="310896"/>
+            <a:ext cx="4800600" cy="256032"/>
+          </a:xfrm>
+          <a:prstGeom prst="rect">
+            <a:avLst/>
+          </a:prstGeom>
+          <a:noFill/>
+        </p:spPr>
+        <p:txBody>
+          <a:bodyPr wrap="none" lIns="9144" rIns="9144" tIns="9144" bIns="9144" anchor="t">
+            <a:spAutoFit/>
+          </a:bodyPr>
+          <a:lstStyle/>
+          <a:p>
+            <a:pPr algn="r">
+              <a:spcAft>
+                <a:spcPts val="0"/>
+              </a:spcAft>
+              <a:defRPr sz="680" b="1">
+                <a:solidFill>
+                  <a:srgbClr val="4F6B00"/>
+                </a:solidFill>
+                <a:latin typeface="Inter"/>
+              </a:defRPr>
+            </a:pPr>
+            <a:r>
+              <a:rPr>
+                <a:latin typeface="Inter"/>
+              </a:rPr>
+              <a:t>Illustrative, Gradient Maintained — demo data, not the client's holdings or managers</a:t>
+            </a:r>
+          </a:p>
+        </p:txBody>
+      </p:sp>
+      <p:sp>
+        <p:nvSpPr>
+          <p:cNvPr id="5" name="TextBox 4"/>
+          <p:cNvSpPr txBox="1"/>
+          <p:nvPr/>
+        </p:nvSpPr>
+        <p:spPr>
+          <a:xfrm>
             <a:off x="640080" y="566928"/>
             <a:ext cx="10058400" cy="530352"/>
           </a:xfrm>
@@ -20968,7 +22034,7 @@
       </p:sp>
       <p:sp>
         <p:nvSpPr>
-          <p:cNvPr id="5" name="Rectangle 4"/>
+          <p:cNvPr id="6" name="Rectangle 5"/>
           <p:cNvSpPr/>
           <p:nvPr/>
         </p:nvSpPr>
@@ -21017,7 +22083,7 @@
       </p:sp>
       <p:sp>
         <p:nvSpPr>
-          <p:cNvPr id="6" name="Rectangle 5"/>
+          <p:cNvPr id="7" name="Rectangle 6"/>
           <p:cNvSpPr/>
           <p:nvPr/>
         </p:nvSpPr>
@@ -21066,7 +22132,7 @@
       </p:sp>
       <p:sp>
         <p:nvSpPr>
-          <p:cNvPr id="7" name="TextBox 6"/>
+          <p:cNvPr id="8" name="TextBox 7"/>
           <p:cNvSpPr txBox="1"/>
           <p:nvPr/>
         </p:nvSpPr>
@@ -21108,7 +22174,7 @@
       </p:sp>
       <p:sp>
         <p:nvSpPr>
-          <p:cNvPr id="8" name="TextBox 7"/>
+          <p:cNvPr id="9" name="TextBox 8"/>
           <p:cNvSpPr txBox="1"/>
           <p:nvPr/>
         </p:nvSpPr>
@@ -21150,7 +22216,7 @@
       </p:sp>
       <p:sp>
         <p:nvSpPr>
-          <p:cNvPr id="9" name="Rectangle 8"/>
+          <p:cNvPr id="10" name="Rectangle 9"/>
           <p:cNvSpPr/>
           <p:nvPr/>
         </p:nvSpPr>
@@ -21199,7 +22265,7 @@
       </p:sp>
       <p:sp>
         <p:nvSpPr>
-          <p:cNvPr id="10" name="Rectangle 9"/>
+          <p:cNvPr id="11" name="Rectangle 10"/>
           <p:cNvSpPr/>
           <p:nvPr/>
         </p:nvSpPr>
@@ -21248,7 +22314,7 @@
       </p:sp>
       <p:sp>
         <p:nvSpPr>
-          <p:cNvPr id="11" name="TextBox 10"/>
+          <p:cNvPr id="12" name="TextBox 11"/>
           <p:cNvSpPr txBox="1"/>
           <p:nvPr/>
         </p:nvSpPr>
@@ -21290,7 +22356,7 @@
       </p:sp>
       <p:sp>
         <p:nvSpPr>
-          <p:cNvPr id="12" name="TextBox 11"/>
+          <p:cNvPr id="13" name="TextBox 12"/>
           <p:cNvSpPr txBox="1"/>
           <p:nvPr/>
         </p:nvSpPr>
@@ -21332,7 +22398,7 @@
       </p:sp>
       <p:sp>
         <p:nvSpPr>
-          <p:cNvPr id="13" name="TextBox 12"/>
+          <p:cNvPr id="14" name="TextBox 13"/>
           <p:cNvSpPr txBox="1"/>
           <p:nvPr/>
         </p:nvSpPr>
@@ -21374,7 +22440,7 @@
       </p:sp>
       <p:sp>
         <p:nvSpPr>
-          <p:cNvPr id="14" name="Rectangle 13"/>
+          <p:cNvPr id="15" name="Rectangle 14"/>
           <p:cNvSpPr/>
           <p:nvPr/>
         </p:nvSpPr>
@@ -21423,7 +22489,7 @@
       </p:sp>
       <p:sp>
         <p:nvSpPr>
-          <p:cNvPr id="15" name="Rectangle 14"/>
+          <p:cNvPr id="16" name="Rectangle 15"/>
           <p:cNvSpPr/>
           <p:nvPr/>
         </p:nvSpPr>
@@ -21472,7 +22538,7 @@
       </p:sp>
       <p:sp>
         <p:nvSpPr>
-          <p:cNvPr id="16" name="TextBox 15"/>
+          <p:cNvPr id="17" name="TextBox 16"/>
           <p:cNvSpPr txBox="1"/>
           <p:nvPr/>
         </p:nvSpPr>
@@ -21514,7 +22580,7 @@
       </p:sp>
       <p:sp>
         <p:nvSpPr>
-          <p:cNvPr id="17" name="TextBox 16"/>
+          <p:cNvPr id="18" name="TextBox 17"/>
           <p:cNvSpPr txBox="1"/>
           <p:nvPr/>
         </p:nvSpPr>
@@ -21556,7 +22622,7 @@
       </p:sp>
       <p:sp>
         <p:nvSpPr>
-          <p:cNvPr id="18" name="TextBox 17"/>
+          <p:cNvPr id="19" name="TextBox 18"/>
           <p:cNvSpPr txBox="1"/>
           <p:nvPr/>
         </p:nvSpPr>
@@ -21598,7 +22664,7 @@
       </p:sp>
       <p:sp>
         <p:nvSpPr>
-          <p:cNvPr id="19" name="TextBox 18"/>
+          <p:cNvPr id="20" name="TextBox 19"/>
           <p:cNvSpPr txBox="1"/>
           <p:nvPr/>
         </p:nvSpPr>
@@ -21640,7 +22706,7 @@
       </p:sp>
       <p:graphicFrame>
         <p:nvGraphicFramePr>
-          <p:cNvPr id="20" name="Table 19"/>
+          <p:cNvPr id="21" name="Table 20"/>
           <p:cNvGraphicFramePr>
             <a:graphicFrameLocks noGrp="1"/>
           </p:cNvGraphicFramePr>
@@ -22162,7 +23228,7 @@
       </p:graphicFrame>
       <p:sp>
         <p:nvSpPr>
-          <p:cNvPr id="21" name="TextBox 20"/>
+          <p:cNvPr id="22" name="TextBox 21"/>
           <p:cNvSpPr txBox="1"/>
           <p:nvPr/>
         </p:nvSpPr>
@@ -22280,7 +23346,7 @@
       </p:sp>
       <p:sp>
         <p:nvSpPr>
-          <p:cNvPr id="22" name="Rectangle 21"/>
+          <p:cNvPr id="23" name="Rectangle 22"/>
           <p:cNvSpPr/>
           <p:nvPr/>
         </p:nvSpPr>
@@ -22329,7 +23395,7 @@
       </p:sp>
       <p:sp>
         <p:nvSpPr>
-          <p:cNvPr id="23" name="TextBox 22"/>
+          <p:cNvPr id="24" name="TextBox 23"/>
           <p:cNvSpPr txBox="1"/>
           <p:nvPr/>
         </p:nvSpPr>
@@ -22371,7 +23437,7 @@
       </p:sp>
       <p:sp>
         <p:nvSpPr>
-          <p:cNvPr id="24" name="TextBox 23"/>
+          <p:cNvPr id="25" name="TextBox 24"/>
           <p:cNvSpPr txBox="1"/>
           <p:nvPr/>
         </p:nvSpPr>
@@ -22406,14 +23472,14 @@
               <a:rPr>
                 <a:latin typeface="Inter"/>
               </a:rPr>
-              <a:t>TEST DATA — fictional portfolio for rendering tests only · Data as of 2026-06-30 historical; 2026-10-08 ex ante</a:t>
+              <a:t>Confidential — Investment Committee · Data as of 2026-06-30 historical; 2026-10-08 ex ante</a:t>
             </a:r>
           </a:p>
         </p:txBody>
       </p:sp>
       <p:sp>
         <p:nvSpPr>
-          <p:cNvPr id="25" name="TextBox 24"/>
+          <p:cNvPr id="26" name="TextBox 25"/>
           <p:cNvSpPr txBox="1"/>
           <p:nvPr/>
         </p:nvSpPr>
@@ -22529,7 +23595,7 @@
         <p:spPr>
           <a:xfrm>
             <a:off x="640080" y="329184"/>
-            <a:ext cx="9875520" cy="182880"/>
+            <a:ext cx="5303520" cy="182880"/>
           </a:xfrm>
           <a:prstGeom prst="rect">
             <a:avLst/>
@@ -22570,6 +23636,48 @@
         </p:nvSpPr>
         <p:spPr>
           <a:xfrm>
+            <a:off x="5897880" y="310896"/>
+            <a:ext cx="4800600" cy="256032"/>
+          </a:xfrm>
+          <a:prstGeom prst="rect">
+            <a:avLst/>
+          </a:prstGeom>
+          <a:noFill/>
+        </p:spPr>
+        <p:txBody>
+          <a:bodyPr wrap="none" lIns="9144" rIns="9144" tIns="9144" bIns="9144" anchor="t">
+            <a:spAutoFit/>
+          </a:bodyPr>
+          <a:lstStyle/>
+          <a:p>
+            <a:pPr algn="r">
+              <a:spcAft>
+                <a:spcPts val="0"/>
+              </a:spcAft>
+              <a:defRPr sz="680" b="1">
+                <a:solidFill>
+                  <a:srgbClr val="4F6B00"/>
+                </a:solidFill>
+                <a:latin typeface="Inter"/>
+              </a:defRPr>
+            </a:pPr>
+            <a:r>
+              <a:rPr>
+                <a:latin typeface="Inter"/>
+              </a:rPr>
+              <a:t>Illustrative, Gradient Maintained — demo data, not the client's holdings or managers</a:t>
+            </a:r>
+          </a:p>
+        </p:txBody>
+      </p:sp>
+      <p:sp>
+        <p:nvSpPr>
+          <p:cNvPr id="5" name="TextBox 4"/>
+          <p:cNvSpPr txBox="1"/>
+          <p:nvPr/>
+        </p:nvSpPr>
+        <p:spPr>
+          <a:xfrm>
             <a:off x="640080" y="566928"/>
             <a:ext cx="10058400" cy="530352"/>
           </a:xfrm>
@@ -22606,7 +23714,7 @@
       </p:sp>
       <p:sp>
         <p:nvSpPr>
-          <p:cNvPr id="5" name="Rectangle 4"/>
+          <p:cNvPr id="6" name="Rectangle 5"/>
           <p:cNvSpPr/>
           <p:nvPr/>
         </p:nvSpPr>
@@ -22655,7 +23763,7 @@
       </p:sp>
       <p:sp>
         <p:nvSpPr>
-          <p:cNvPr id="6" name="Rectangle 5"/>
+          <p:cNvPr id="7" name="Rectangle 6"/>
           <p:cNvSpPr/>
           <p:nvPr/>
         </p:nvSpPr>
@@ -22704,7 +23812,7 @@
       </p:sp>
       <p:sp>
         <p:nvSpPr>
-          <p:cNvPr id="7" name="TextBox 6"/>
+          <p:cNvPr id="8" name="TextBox 7"/>
           <p:cNvSpPr txBox="1"/>
           <p:nvPr/>
         </p:nvSpPr>
@@ -22746,7 +23854,7 @@
       </p:sp>
       <p:graphicFrame>
         <p:nvGraphicFramePr>
-          <p:cNvPr id="8" name="Table 7"/>
+          <p:cNvPr id="9" name="Table 8"/>
           <p:cNvGraphicFramePr>
             <a:graphicFrameLocks noGrp="1"/>
           </p:cNvGraphicFramePr>
@@ -22922,7 +24030,7 @@
                         <a:rPr>
                           <a:latin typeface="Inter"/>
                         </a:rPr>
-                        <a:t>Portfolio Analytics live fictional TEST access [S1]</a:t>
+                        <a:t>Portfolio Analytics live sample access [S1]</a:t>
                       </a:r>
                     </a:p>
                   </a:txBody>
@@ -23437,7 +24545,7 @@
       </p:graphicFrame>
       <p:sp>
         <p:nvSpPr>
-          <p:cNvPr id="9" name="Rectangle 8"/>
+          <p:cNvPr id="10" name="Rectangle 9"/>
           <p:cNvSpPr/>
           <p:nvPr/>
         </p:nvSpPr>
@@ -23486,7 +24594,7 @@
       </p:sp>
       <p:sp>
         <p:nvSpPr>
-          <p:cNvPr id="10" name="TextBox 9"/>
+          <p:cNvPr id="11" name="TextBox 10"/>
           <p:cNvSpPr txBox="1"/>
           <p:nvPr/>
         </p:nvSpPr>
@@ -23528,7 +24636,7 @@
       </p:sp>
       <p:sp>
         <p:nvSpPr>
-          <p:cNvPr id="11" name="TextBox 10"/>
+          <p:cNvPr id="12" name="TextBox 11"/>
           <p:cNvSpPr txBox="1"/>
           <p:nvPr/>
         </p:nvSpPr>
@@ -23563,14 +24671,14 @@
               <a:rPr>
                 <a:latin typeface="Inter"/>
               </a:rPr>
-              <a:t>TEST DATA — fictional portfolio for rendering tests only · Data as of 2026-06-30 historical; 2026-10-08 ex ante</a:t>
+              <a:t>Confidential — Investment Committee · Data as of 2026-06-30 historical; 2026-10-08 ex ante</a:t>
             </a:r>
           </a:p>
         </p:txBody>
       </p:sp>
       <p:sp>
         <p:nvSpPr>
-          <p:cNvPr id="12" name="TextBox 11"/>
+          <p:cNvPr id="13" name="TextBox 12"/>
           <p:cNvSpPr txBox="1"/>
           <p:nvPr/>
         </p:nvSpPr>
@@ -23685,6 +24793,48 @@
         </p:nvSpPr>
         <p:spPr>
           <a:xfrm>
+            <a:off x="5897880" y="310896"/>
+            <a:ext cx="4800600" cy="256032"/>
+          </a:xfrm>
+          <a:prstGeom prst="rect">
+            <a:avLst/>
+          </a:prstGeom>
+          <a:noFill/>
+        </p:spPr>
+        <p:txBody>
+          <a:bodyPr wrap="none" lIns="9144" rIns="9144" tIns="9144" bIns="9144" anchor="t">
+            <a:spAutoFit/>
+          </a:bodyPr>
+          <a:lstStyle/>
+          <a:p>
+            <a:pPr algn="r">
+              <a:spcAft>
+                <a:spcPts val="0"/>
+              </a:spcAft>
+              <a:defRPr sz="680" b="1">
+                <a:solidFill>
+                  <a:srgbClr val="4F6B00"/>
+                </a:solidFill>
+                <a:latin typeface="Inter"/>
+              </a:defRPr>
+            </a:pPr>
+            <a:r>
+              <a:rPr>
+                <a:latin typeface="Inter"/>
+              </a:rPr>
+              <a:t>Illustrative, Gradient Maintained — demo data, not the client's holdings or managers</a:t>
+            </a:r>
+          </a:p>
+        </p:txBody>
+      </p:sp>
+      <p:sp>
+        <p:nvSpPr>
+          <p:cNvPr id="4" name="TextBox 3"/>
+          <p:cNvSpPr txBox="1"/>
+          <p:nvPr/>
+        </p:nvSpPr>
+        <p:spPr>
+          <a:xfrm>
             <a:off x="640080" y="566928"/>
             <a:ext cx="10058400" cy="530352"/>
           </a:xfrm>
@@ -23721,7 +24871,7 @@
       </p:sp>
       <p:sp>
         <p:nvSpPr>
-          <p:cNvPr id="4" name="Rectangle 3"/>
+          <p:cNvPr id="5" name="Rectangle 4"/>
           <p:cNvSpPr/>
           <p:nvPr/>
         </p:nvSpPr>
@@ -23770,7 +24920,7 @@
       </p:sp>
       <p:sp>
         <p:nvSpPr>
-          <p:cNvPr id="5" name="Rectangle 4"/>
+          <p:cNvPr id="6" name="Rectangle 5"/>
           <p:cNvSpPr/>
           <p:nvPr/>
         </p:nvSpPr>
@@ -23819,7 +24969,7 @@
       </p:sp>
       <p:sp>
         <p:nvSpPr>
-          <p:cNvPr id="6" name="TextBox 5"/>
+          <p:cNvPr id="7" name="TextBox 6"/>
           <p:cNvSpPr txBox="1"/>
           <p:nvPr/>
         </p:nvSpPr>
@@ -23861,7 +25011,7 @@
       </p:sp>
       <p:graphicFrame>
         <p:nvGraphicFramePr>
-          <p:cNvPr id="7" name="Table 6"/>
+          <p:cNvPr id="8" name="Table 7"/>
           <p:cNvGraphicFramePr>
             <a:graphicFrameLocks noGrp="1"/>
           </p:cNvGraphicFramePr>
@@ -23869,7 +25019,7 @@
         </p:nvGraphicFramePr>
         <p:xfrm>
           <a:off x="640080" y="1325880"/>
-          <a:ext cx="10908792" cy="4892040"/>
+          <a:ext cx="10908792" cy="4690872"/>
         </p:xfrm>
         <a:graphic>
           <a:graphicData uri="http://schemas.openxmlformats.org/drawingml/2006/table">
@@ -23888,7 +25038,7 @@
                 <a:gridCol w="1112139"/>
                 <a:gridCol w="1112139"/>
               </a:tblGrid>
-              <a:tr h="611505">
+              <a:tr h="586359">
                 <a:tc>
                   <a:txBody>
                     <a:bodyPr/>
@@ -24133,7 +25283,7 @@
                   </a:tcPr>
                 </a:tc>
               </a:tr>
-              <a:tr h="611505">
+              <a:tr h="586359">
                 <a:tc>
                   <a:txBody>
                     <a:bodyPr/>
@@ -24313,7 +25463,7 @@
                         <a:rPr>
                           <a:latin typeface="Inter"/>
                         </a:rPr>
-                        <a:t>Fictional TEST data</a:t>
+                        <a:t>Illustrative sample data</a:t>
                       </a:r>
                     </a:p>
                   </a:txBody>
@@ -24378,7 +25528,7 @@
                   </a:tcPr>
                 </a:tc>
               </a:tr>
-              <a:tr h="611505">
+              <a:tr h="586359">
                 <a:tc>
                   <a:txBody>
                     <a:bodyPr/>
@@ -24558,7 +25708,7 @@
                         <a:rPr>
                           <a:latin typeface="Inter"/>
                         </a:rPr>
-                        <a:t>Fictional TEST data</a:t>
+                        <a:t>Illustrative sample data</a:t>
                       </a:r>
                     </a:p>
                   </a:txBody>
@@ -24623,7 +25773,7 @@
                   </a:tcPr>
                 </a:tc>
               </a:tr>
-              <a:tr h="611505">
+              <a:tr h="586359">
                 <a:tc>
                   <a:txBody>
                     <a:bodyPr/>
@@ -24803,7 +25953,7 @@
                         <a:rPr>
                           <a:latin typeface="Inter"/>
                         </a:rPr>
-                        <a:t>Fictional TEST data</a:t>
+                        <a:t>Illustrative sample data</a:t>
                       </a:r>
                     </a:p>
                   </a:txBody>
@@ -24868,7 +26018,7 @@
                   </a:tcPr>
                 </a:tc>
               </a:tr>
-              <a:tr h="611505">
+              <a:tr h="586359">
                 <a:tc>
                   <a:txBody>
                     <a:bodyPr/>
@@ -25048,7 +26198,7 @@
                         <a:rPr>
                           <a:latin typeface="Inter"/>
                         </a:rPr>
-                        <a:t>Fictional TEST data</a:t>
+                        <a:t>Illustrative sample data</a:t>
                       </a:r>
                     </a:p>
                   </a:txBody>
@@ -25113,7 +26263,7 @@
                   </a:tcPr>
                 </a:tc>
               </a:tr>
-              <a:tr h="611505">
+              <a:tr h="586359">
                 <a:tc>
                   <a:txBody>
                     <a:bodyPr/>
@@ -25293,7 +26443,7 @@
                         <a:rPr>
                           <a:latin typeface="Inter"/>
                         </a:rPr>
-                        <a:t>Fictional TEST data</a:t>
+                        <a:t>Illustrative sample data</a:t>
                       </a:r>
                     </a:p>
                   </a:txBody>
@@ -25358,7 +26508,7 @@
                   </a:tcPr>
                 </a:tc>
               </a:tr>
-              <a:tr h="611505">
+              <a:tr h="586359">
                 <a:tc>
                   <a:txBody>
                     <a:bodyPr/>
@@ -25538,7 +26688,7 @@
                         <a:rPr>
                           <a:latin typeface="Inter"/>
                         </a:rPr>
-                        <a:t>Fictional TEST data</a:t>
+                        <a:t>Illustrative sample data</a:t>
                       </a:r>
                     </a:p>
                   </a:txBody>
@@ -25603,7 +26753,7 @@
                   </a:tcPr>
                 </a:tc>
               </a:tr>
-              <a:tr h="611505">
+              <a:tr h="586359">
                 <a:tc>
                   <a:txBody>
                     <a:bodyPr/>
@@ -25783,7 +26933,7 @@
                         <a:rPr>
                           <a:latin typeface="Inter"/>
                         </a:rPr>
-                        <a:t>Fictional TEST data</a:t>
+                        <a:t>Illustrative sample data</a:t>
                       </a:r>
                     </a:p>
                   </a:txBody>
@@ -25854,7 +27004,49 @@
       </p:graphicFrame>
       <p:sp>
         <p:nvSpPr>
-          <p:cNvPr id="8" name="Rectangle 7"/>
+          <p:cNvPr id="9" name="TextBox 8"/>
+          <p:cNvSpPr txBox="1"/>
+          <p:nvPr/>
+        </p:nvSpPr>
+        <p:spPr>
+          <a:xfrm>
+            <a:off x="640080" y="6035040"/>
+            <a:ext cx="10908792" cy="164592"/>
+          </a:xfrm>
+          <a:prstGeom prst="rect">
+            <a:avLst/>
+          </a:prstGeom>
+          <a:noFill/>
+        </p:spPr>
+        <p:txBody>
+          <a:bodyPr wrap="none" lIns="9144" rIns="9144" tIns="9144" bIns="9144" anchor="t">
+            <a:spAutoFit/>
+          </a:bodyPr>
+          <a:lstStyle/>
+          <a:p>
+            <a:pPr algn="l">
+              <a:spcAft>
+                <a:spcPts val="0"/>
+              </a:spcAft>
+              <a:defRPr sz="680" b="0">
+                <a:solidFill>
+                  <a:srgbClr val="8A94A1"/>
+                </a:solidFill>
+                <a:latin typeface="Inter"/>
+              </a:defRPr>
+            </a:pPr>
+            <a:r>
+              <a:rPr>
+                <a:latin typeface="Inter"/>
+              </a:rPr>
+              <a:t>Illustrative, Gradient Maintained — demo data, not the client's holdings or managers. All organizations, portfolios, managers and results in this public example are illustrative.</a:t>
+            </a:r>
+          </a:p>
+        </p:txBody>
+      </p:sp>
+      <p:sp>
+        <p:nvSpPr>
+          <p:cNvPr id="10" name="Rectangle 9"/>
           <p:cNvSpPr/>
           <p:nvPr/>
         </p:nvSpPr>
@@ -25903,7 +27095,7 @@
       </p:sp>
       <p:sp>
         <p:nvSpPr>
-          <p:cNvPr id="9" name="TextBox 8"/>
+          <p:cNvPr id="11" name="TextBox 10"/>
           <p:cNvSpPr txBox="1"/>
           <p:nvPr/>
         </p:nvSpPr>
@@ -25945,7 +27137,7 @@
       </p:sp>
       <p:sp>
         <p:nvSpPr>
-          <p:cNvPr id="10" name="TextBox 9"/>
+          <p:cNvPr id="12" name="TextBox 11"/>
           <p:cNvSpPr txBox="1"/>
           <p:nvPr/>
         </p:nvSpPr>
@@ -25980,14 +27172,14 @@
               <a:rPr>
                 <a:latin typeface="Inter"/>
               </a:rPr>
-              <a:t>TEST DATA — fictional portfolio for rendering tests only · Data as of 2026-06-30 historical; 2026-10-08 ex ante</a:t>
+              <a:t>Confidential — Investment Committee · Data as of 2026-06-30 historical; 2026-10-08 ex ante</a:t>
             </a:r>
           </a:p>
         </p:txBody>
       </p:sp>
       <p:sp>
         <p:nvSpPr>
-          <p:cNvPr id="11" name="TextBox 10"/>
+          <p:cNvPr id="13" name="TextBox 12"/>
           <p:cNvSpPr txBox="1"/>
           <p:nvPr/>
         </p:nvSpPr>
@@ -26102,6 +27294,48 @@
         </p:nvSpPr>
         <p:spPr>
           <a:xfrm>
+            <a:off x="5897880" y="310896"/>
+            <a:ext cx="4800600" cy="256032"/>
+          </a:xfrm>
+          <a:prstGeom prst="rect">
+            <a:avLst/>
+          </a:prstGeom>
+          <a:noFill/>
+        </p:spPr>
+        <p:txBody>
+          <a:bodyPr wrap="none" lIns="9144" rIns="9144" tIns="9144" bIns="9144" anchor="t">
+            <a:spAutoFit/>
+          </a:bodyPr>
+          <a:lstStyle/>
+          <a:p>
+            <a:pPr algn="r">
+              <a:spcAft>
+                <a:spcPts val="0"/>
+              </a:spcAft>
+              <a:defRPr sz="680" b="1">
+                <a:solidFill>
+                  <a:srgbClr val="4F6B00"/>
+                </a:solidFill>
+                <a:latin typeface="Inter"/>
+              </a:defRPr>
+            </a:pPr>
+            <a:r>
+              <a:rPr>
+                <a:latin typeface="Inter"/>
+              </a:rPr>
+              <a:t>Illustrative, Gradient Maintained — demo data, not the client's holdings or managers</a:t>
+            </a:r>
+          </a:p>
+        </p:txBody>
+      </p:sp>
+      <p:sp>
+        <p:nvSpPr>
+          <p:cNvPr id="4" name="TextBox 3"/>
+          <p:cNvSpPr txBox="1"/>
+          <p:nvPr/>
+        </p:nvSpPr>
+        <p:spPr>
+          <a:xfrm>
             <a:off x="640080" y="566928"/>
             <a:ext cx="10058400" cy="530352"/>
           </a:xfrm>
@@ -26138,7 +27372,7 @@
       </p:sp>
       <p:sp>
         <p:nvSpPr>
-          <p:cNvPr id="4" name="Rectangle 3"/>
+          <p:cNvPr id="5" name="Rectangle 4"/>
           <p:cNvSpPr/>
           <p:nvPr/>
         </p:nvSpPr>
@@ -26187,7 +27421,7 @@
       </p:sp>
       <p:sp>
         <p:nvSpPr>
-          <p:cNvPr id="5" name="Rectangle 4"/>
+          <p:cNvPr id="6" name="Rectangle 5"/>
           <p:cNvSpPr/>
           <p:nvPr/>
         </p:nvSpPr>
@@ -26236,7 +27470,7 @@
       </p:sp>
       <p:sp>
         <p:nvSpPr>
-          <p:cNvPr id="6" name="TextBox 5"/>
+          <p:cNvPr id="7" name="TextBox 6"/>
           <p:cNvSpPr txBox="1"/>
           <p:nvPr/>
         </p:nvSpPr>
@@ -26278,7 +27512,7 @@
       </p:sp>
       <p:sp>
         <p:nvSpPr>
-          <p:cNvPr id="7" name="TextBox 6"/>
+          <p:cNvPr id="8" name="TextBox 7"/>
           <p:cNvSpPr txBox="1"/>
           <p:nvPr/>
         </p:nvSpPr>
@@ -26320,7 +27554,7 @@
       </p:sp>
       <p:graphicFrame>
         <p:nvGraphicFramePr>
-          <p:cNvPr id="8" name="Table 7"/>
+          <p:cNvPr id="9" name="Table 8"/>
           <p:cNvGraphicFramePr>
             <a:graphicFrameLocks noGrp="1"/>
           </p:cNvGraphicFramePr>
@@ -27445,7 +28679,7 @@
       </p:graphicFrame>
       <p:sp>
         <p:nvSpPr>
-          <p:cNvPr id="9" name="Rectangle 8"/>
+          <p:cNvPr id="10" name="Rectangle 9"/>
           <p:cNvSpPr/>
           <p:nvPr/>
         </p:nvSpPr>
@@ -27494,7 +28728,7 @@
       </p:sp>
       <p:sp>
         <p:nvSpPr>
-          <p:cNvPr id="10" name="TextBox 9"/>
+          <p:cNvPr id="11" name="TextBox 10"/>
           <p:cNvSpPr txBox="1"/>
           <p:nvPr/>
         </p:nvSpPr>
@@ -27536,7 +28770,7 @@
       </p:sp>
       <p:sp>
         <p:nvSpPr>
-          <p:cNvPr id="11" name="TextBox 10"/>
+          <p:cNvPr id="12" name="TextBox 11"/>
           <p:cNvSpPr txBox="1"/>
           <p:nvPr/>
         </p:nvSpPr>
@@ -27571,14 +28805,14 @@
               <a:rPr>
                 <a:latin typeface="Inter"/>
               </a:rPr>
-              <a:t>TEST DATA — fictional portfolio for rendering tests only · Data as of 2026-06-30 historical; 2026-10-08 ex ante</a:t>
+              <a:t>Confidential — Investment Committee · Data as of 2026-06-30 historical; 2026-10-08 ex ante</a:t>
             </a:r>
           </a:p>
         </p:txBody>
       </p:sp>
       <p:sp>
         <p:nvSpPr>
-          <p:cNvPr id="12" name="TextBox 11"/>
+          <p:cNvPr id="13" name="TextBox 12"/>
           <p:cNvSpPr txBox="1"/>
           <p:nvPr/>
         </p:nvSpPr>
@@ -27693,6 +28927,48 @@
         </p:nvSpPr>
         <p:spPr>
           <a:xfrm>
+            <a:off x="5897880" y="310896"/>
+            <a:ext cx="4800600" cy="256032"/>
+          </a:xfrm>
+          <a:prstGeom prst="rect">
+            <a:avLst/>
+          </a:prstGeom>
+          <a:noFill/>
+        </p:spPr>
+        <p:txBody>
+          <a:bodyPr wrap="none" lIns="9144" rIns="9144" tIns="9144" bIns="9144" anchor="t">
+            <a:spAutoFit/>
+          </a:bodyPr>
+          <a:lstStyle/>
+          <a:p>
+            <a:pPr algn="r">
+              <a:spcAft>
+                <a:spcPts val="0"/>
+              </a:spcAft>
+              <a:defRPr sz="680" b="1">
+                <a:solidFill>
+                  <a:srgbClr val="4F6B00"/>
+                </a:solidFill>
+                <a:latin typeface="Inter"/>
+              </a:defRPr>
+            </a:pPr>
+            <a:r>
+              <a:rPr>
+                <a:latin typeface="Inter"/>
+              </a:rPr>
+              <a:t>Illustrative, Gradient Maintained — demo data, not the client's holdings or managers</a:t>
+            </a:r>
+          </a:p>
+        </p:txBody>
+      </p:sp>
+      <p:sp>
+        <p:nvSpPr>
+          <p:cNvPr id="4" name="TextBox 3"/>
+          <p:cNvSpPr txBox="1"/>
+          <p:nvPr/>
+        </p:nvSpPr>
+        <p:spPr>
+          <a:xfrm>
             <a:off x="640080" y="566928"/>
             <a:ext cx="10058400" cy="530352"/>
           </a:xfrm>
@@ -27729,7 +29005,7 @@
       </p:sp>
       <p:sp>
         <p:nvSpPr>
-          <p:cNvPr id="4" name="Rectangle 3"/>
+          <p:cNvPr id="5" name="Rectangle 4"/>
           <p:cNvSpPr/>
           <p:nvPr/>
         </p:nvSpPr>
@@ -27778,7 +29054,7 @@
       </p:sp>
       <p:sp>
         <p:nvSpPr>
-          <p:cNvPr id="5" name="Rectangle 4"/>
+          <p:cNvPr id="6" name="Rectangle 5"/>
           <p:cNvSpPr/>
           <p:nvPr/>
         </p:nvSpPr>
@@ -27827,7 +29103,7 @@
       </p:sp>
       <p:sp>
         <p:nvSpPr>
-          <p:cNvPr id="6" name="TextBox 5"/>
+          <p:cNvPr id="7" name="TextBox 6"/>
           <p:cNvSpPr txBox="1"/>
           <p:nvPr/>
         </p:nvSpPr>
@@ -27869,7 +29145,7 @@
       </p:sp>
       <p:sp>
         <p:nvSpPr>
-          <p:cNvPr id="7" name="TextBox 6"/>
+          <p:cNvPr id="8" name="TextBox 7"/>
           <p:cNvSpPr txBox="1"/>
           <p:nvPr/>
         </p:nvSpPr>
@@ -27987,7 +29263,7 @@
       </p:sp>
       <p:sp>
         <p:nvSpPr>
-          <p:cNvPr id="8" name="Rectangle 7"/>
+          <p:cNvPr id="9" name="Rectangle 8"/>
           <p:cNvSpPr/>
           <p:nvPr/>
         </p:nvSpPr>
@@ -28036,7 +29312,7 @@
       </p:sp>
       <p:sp>
         <p:nvSpPr>
-          <p:cNvPr id="9" name="TextBox 8"/>
+          <p:cNvPr id="10" name="TextBox 9"/>
           <p:cNvSpPr txBox="1"/>
           <p:nvPr/>
         </p:nvSpPr>
@@ -28078,7 +29354,7 @@
       </p:sp>
       <p:sp>
         <p:nvSpPr>
-          <p:cNvPr id="10" name="TextBox 9"/>
+          <p:cNvPr id="11" name="TextBox 10"/>
           <p:cNvSpPr txBox="1"/>
           <p:nvPr/>
         </p:nvSpPr>
@@ -28113,14 +29389,14 @@
               <a:rPr>
                 <a:latin typeface="Inter"/>
               </a:rPr>
-              <a:t>TEST DATA — fictional portfolio for rendering tests only · Data as of 2026-06-30 historical; 2026-10-08 ex ante</a:t>
+              <a:t>Confidential — Investment Committee · Data as of 2026-06-30 historical; 2026-10-08 ex ante</a:t>
             </a:r>
           </a:p>
         </p:txBody>
       </p:sp>
       <p:sp>
         <p:nvSpPr>
-          <p:cNvPr id="11" name="TextBox 10"/>
+          <p:cNvPr id="12" name="TextBox 11"/>
           <p:cNvSpPr txBox="1"/>
           <p:nvPr/>
         </p:nvSpPr>
@@ -28236,7 +29512,7 @@
         <p:spPr>
           <a:xfrm>
             <a:off x="640080" y="329184"/>
-            <a:ext cx="9875520" cy="182880"/>
+            <a:ext cx="5303520" cy="182880"/>
           </a:xfrm>
           <a:prstGeom prst="rect">
             <a:avLst/>
@@ -28277,6 +29553,48 @@
         </p:nvSpPr>
         <p:spPr>
           <a:xfrm>
+            <a:off x="5897880" y="310896"/>
+            <a:ext cx="4800600" cy="256032"/>
+          </a:xfrm>
+          <a:prstGeom prst="rect">
+            <a:avLst/>
+          </a:prstGeom>
+          <a:noFill/>
+        </p:spPr>
+        <p:txBody>
+          <a:bodyPr wrap="none" lIns="9144" rIns="9144" tIns="9144" bIns="9144" anchor="t">
+            <a:spAutoFit/>
+          </a:bodyPr>
+          <a:lstStyle/>
+          <a:p>
+            <a:pPr algn="r">
+              <a:spcAft>
+                <a:spcPts val="0"/>
+              </a:spcAft>
+              <a:defRPr sz="680" b="1">
+                <a:solidFill>
+                  <a:srgbClr val="4F6B00"/>
+                </a:solidFill>
+                <a:latin typeface="Inter"/>
+              </a:defRPr>
+            </a:pPr>
+            <a:r>
+              <a:rPr>
+                <a:latin typeface="Inter"/>
+              </a:rPr>
+              <a:t>Illustrative, Gradient Maintained — demo data, not the client's holdings or managers</a:t>
+            </a:r>
+          </a:p>
+        </p:txBody>
+      </p:sp>
+      <p:sp>
+        <p:nvSpPr>
+          <p:cNvPr id="5" name="TextBox 4"/>
+          <p:cNvSpPr txBox="1"/>
+          <p:nvPr/>
+        </p:nvSpPr>
+        <p:spPr>
+          <a:xfrm>
             <a:off x="640080" y="566928"/>
             <a:ext cx="10058400" cy="530352"/>
           </a:xfrm>
@@ -28313,7 +29631,7 @@
       </p:sp>
       <p:sp>
         <p:nvSpPr>
-          <p:cNvPr id="5" name="Rectangle 4"/>
+          <p:cNvPr id="6" name="Rectangle 5"/>
           <p:cNvSpPr/>
           <p:nvPr/>
         </p:nvSpPr>
@@ -28362,7 +29680,7 @@
       </p:sp>
       <p:sp>
         <p:nvSpPr>
-          <p:cNvPr id="6" name="Rectangle 5"/>
+          <p:cNvPr id="7" name="Rectangle 6"/>
           <p:cNvSpPr/>
           <p:nvPr/>
         </p:nvSpPr>
@@ -28411,7 +29729,7 @@
       </p:sp>
       <p:sp>
         <p:nvSpPr>
-          <p:cNvPr id="7" name="TextBox 6"/>
+          <p:cNvPr id="8" name="TextBox 7"/>
           <p:cNvSpPr txBox="1"/>
           <p:nvPr/>
         </p:nvSpPr>
@@ -28453,7 +29771,7 @@
       </p:sp>
       <p:sp>
         <p:nvSpPr>
-          <p:cNvPr id="8" name="TextBox 7"/>
+          <p:cNvPr id="9" name="TextBox 8"/>
           <p:cNvSpPr txBox="1"/>
           <p:nvPr/>
         </p:nvSpPr>
@@ -28495,7 +29813,7 @@
       </p:sp>
       <p:graphicFrame>
         <p:nvGraphicFramePr>
-          <p:cNvPr id="9" name="Table 8"/>
+          <p:cNvPr id="10" name="Table 9"/>
           <p:cNvGraphicFramePr>
             <a:graphicFrameLocks noGrp="1"/>
           </p:cNvGraphicFramePr>
@@ -28503,7 +29821,7 @@
         </p:nvGraphicFramePr>
         <p:xfrm>
           <a:off x="640080" y="1600200"/>
-          <a:ext cx="10908792" cy="2044137"/>
+          <a:ext cx="10908792" cy="2059976"/>
         </p:xfrm>
         <a:graphic>
           <a:graphicData uri="http://schemas.openxmlformats.org/drawingml/2006/table">
@@ -28516,7 +29834,7 @@
                 <a:gridCol w="4448556"/>
                 <a:gridCol w="4448556"/>
               </a:tblGrid>
-              <a:tr h="340689">
+              <a:tr h="343329">
                 <a:tc>
                   <a:txBody>
                     <a:bodyPr/>
@@ -28599,7 +29917,7 @@
                   </a:tcPr>
                 </a:tc>
               </a:tr>
-              <a:tr h="340689">
+              <a:tr h="343329">
                 <a:tc>
                   <a:txBody>
                     <a:bodyPr/>
@@ -28682,7 +30000,7 @@
                   </a:tcPr>
                 </a:tc>
               </a:tr>
-              <a:tr h="340689">
+              <a:tr h="343329">
                 <a:tc>
                   <a:txBody>
                     <a:bodyPr/>
@@ -28765,7 +30083,7 @@
                   </a:tcPr>
                 </a:tc>
               </a:tr>
-              <a:tr h="340689">
+              <a:tr h="343329">
                 <a:tc>
                   <a:txBody>
                     <a:bodyPr/>
@@ -28848,7 +30166,7 @@
                   </a:tcPr>
                 </a:tc>
               </a:tr>
-              <a:tr h="340689">
+              <a:tr h="343329">
                 <a:tc>
                   <a:txBody>
                     <a:bodyPr/>
@@ -28931,7 +30249,7 @@
                   </a:tcPr>
                 </a:tc>
               </a:tr>
-              <a:tr h="340692">
+              <a:tr h="343331">
                 <a:tc>
                   <a:txBody>
                     <a:bodyPr/>
@@ -28976,7 +30294,7 @@
                         <a:rPr>
                           <a:latin typeface="Inter"/>
                         </a:rPr>
-                        <a:t>All required fictional TEST sources are available [S1][S2][S3][S4][S5].</a:t>
+                        <a:t>All required sample sources are available [S1][S2][S3][S4][S5].</a:t>
                       </a:r>
                     </a:p>
                   </a:txBody>
@@ -29020,14 +30338,14 @@
       </p:graphicFrame>
       <p:sp>
         <p:nvSpPr>
-          <p:cNvPr id="10" name="Rectangle 9"/>
+          <p:cNvPr id="11" name="Rectangle 10"/>
           <p:cNvSpPr/>
           <p:nvPr/>
         </p:nvSpPr>
         <p:spPr>
           <a:xfrm>
-            <a:off x="640080" y="3754065"/>
-            <a:ext cx="10908792" cy="824340"/>
+            <a:off x="640080" y="3769904"/>
+            <a:ext cx="10908792" cy="829972"/>
           </a:xfrm>
           <a:prstGeom prst="rect">
             <a:avLst/>
@@ -29069,14 +30387,14 @@
       </p:sp>
       <p:sp>
         <p:nvSpPr>
-          <p:cNvPr id="11" name="Rectangle 10"/>
+          <p:cNvPr id="12" name="Rectangle 11"/>
           <p:cNvSpPr/>
           <p:nvPr/>
         </p:nvSpPr>
         <p:spPr>
           <a:xfrm>
-            <a:off x="640080" y="3754065"/>
-            <a:ext cx="54864" cy="824340"/>
+            <a:off x="640080" y="3769904"/>
+            <a:ext cx="54864" cy="829972"/>
           </a:xfrm>
           <a:prstGeom prst="rect">
             <a:avLst/>
@@ -29118,13 +30436,13 @@
       </p:sp>
       <p:sp>
         <p:nvSpPr>
-          <p:cNvPr id="12" name="TextBox 11"/>
+          <p:cNvPr id="13" name="TextBox 12"/>
           <p:cNvSpPr txBox="1"/>
           <p:nvPr/>
         </p:nvSpPr>
         <p:spPr>
           <a:xfrm>
-            <a:off x="804671" y="3863793"/>
+            <a:off x="804671" y="3879632"/>
             <a:ext cx="10616184" cy="228600"/>
           </a:xfrm>
           <a:prstGeom prst="rect">
@@ -29160,14 +30478,14 @@
       </p:sp>
       <p:sp>
         <p:nvSpPr>
-          <p:cNvPr id="13" name="TextBox 12"/>
+          <p:cNvPr id="14" name="TextBox 13"/>
           <p:cNvSpPr txBox="1"/>
           <p:nvPr/>
         </p:nvSpPr>
         <p:spPr>
           <a:xfrm>
-            <a:off x="804671" y="4147257"/>
-            <a:ext cx="10616184" cy="339708"/>
+            <a:off x="804671" y="4163096"/>
+            <a:ext cx="10616184" cy="345340"/>
           </a:xfrm>
           <a:prstGeom prst="rect">
             <a:avLst/>
@@ -29202,14 +30520,14 @@
       </p:sp>
       <p:sp>
         <p:nvSpPr>
-          <p:cNvPr id="14" name="Rectangle 13"/>
+          <p:cNvPr id="15" name="Rectangle 14"/>
           <p:cNvSpPr/>
           <p:nvPr/>
         </p:nvSpPr>
         <p:spPr>
           <a:xfrm>
-            <a:off x="640080" y="4688134"/>
-            <a:ext cx="10908792" cy="1529785"/>
+            <a:off x="640080" y="4709605"/>
+            <a:ext cx="10908792" cy="1508314"/>
           </a:xfrm>
           <a:prstGeom prst="rect">
             <a:avLst/>
@@ -29251,14 +30569,14 @@
       </p:sp>
       <p:sp>
         <p:nvSpPr>
-          <p:cNvPr id="15" name="Rectangle 14"/>
+          <p:cNvPr id="16" name="Rectangle 15"/>
           <p:cNvSpPr/>
           <p:nvPr/>
         </p:nvSpPr>
         <p:spPr>
           <a:xfrm>
-            <a:off x="640080" y="4688134"/>
-            <a:ext cx="54864" cy="1529785"/>
+            <a:off x="640080" y="4709605"/>
+            <a:ext cx="54864" cy="1508314"/>
           </a:xfrm>
           <a:prstGeom prst="rect">
             <a:avLst/>
@@ -29300,13 +30618,13 @@
       </p:sp>
       <p:sp>
         <p:nvSpPr>
-          <p:cNvPr id="16" name="TextBox 15"/>
+          <p:cNvPr id="17" name="TextBox 16"/>
           <p:cNvSpPr txBox="1"/>
           <p:nvPr/>
         </p:nvSpPr>
         <p:spPr>
           <a:xfrm>
-            <a:off x="804671" y="4797862"/>
+            <a:off x="804671" y="4819333"/>
             <a:ext cx="10616184" cy="228600"/>
           </a:xfrm>
           <a:prstGeom prst="rect">
@@ -29342,14 +30660,14 @@
       </p:sp>
       <p:sp>
         <p:nvSpPr>
-          <p:cNvPr id="17" name="TextBox 16"/>
+          <p:cNvPr id="18" name="TextBox 17"/>
           <p:cNvSpPr txBox="1"/>
           <p:nvPr/>
         </p:nvSpPr>
         <p:spPr>
           <a:xfrm>
-            <a:off x="804671" y="5081326"/>
-            <a:ext cx="10616184" cy="1045153"/>
+            <a:off x="804671" y="5102797"/>
+            <a:ext cx="10616184" cy="1023682"/>
           </a:xfrm>
           <a:prstGeom prst="rect">
             <a:avLst/>
@@ -29377,14 +30695,14 @@
               <a:rPr>
                 <a:latin typeface="Inter"/>
               </a:rPr>
-              <a:t>Observation: The fictional TEST report carries a reconciled-lanes signal versus the prior unresolved status [S1]. Why it matters: This signal focuses oversight on the report's most decision-relevant condition. Uncertainty: Evidence coverage may exclude newer or more detailed observations. What would change the view: A governed refresh showing a different signal or breached threshold.</a:t>
+              <a:t>Observation: The sample report carries a reconciled-lanes signal versus the prior unresolved status [S1]. Why it matters: This signal focuses oversight on the report's most decision-relevant condition. Uncertainty: Evidence coverage may exclude newer or more detailed observations. What would change the view: A governed refresh showing a different signal or breached threshold.</a:t>
             </a:r>
           </a:p>
         </p:txBody>
       </p:sp>
       <p:sp>
         <p:nvSpPr>
-          <p:cNvPr id="18" name="Rectangle 17"/>
+          <p:cNvPr id="19" name="Rectangle 18"/>
           <p:cNvSpPr/>
           <p:nvPr/>
         </p:nvSpPr>
@@ -29433,7 +30751,7 @@
       </p:sp>
       <p:sp>
         <p:nvSpPr>
-          <p:cNvPr id="19" name="TextBox 18"/>
+          <p:cNvPr id="20" name="TextBox 19"/>
           <p:cNvSpPr txBox="1"/>
           <p:nvPr/>
         </p:nvSpPr>
@@ -29475,7 +30793,7 @@
       </p:sp>
       <p:sp>
         <p:nvSpPr>
-          <p:cNvPr id="20" name="TextBox 19"/>
+          <p:cNvPr id="21" name="TextBox 20"/>
           <p:cNvSpPr txBox="1"/>
           <p:nvPr/>
         </p:nvSpPr>
@@ -29510,14 +30828,14 @@
               <a:rPr>
                 <a:latin typeface="Inter"/>
               </a:rPr>
-              <a:t>TEST DATA — fictional portfolio for rendering tests only · Data as of 2026-06-30 historical; 2026-10-08 ex ante</a:t>
+              <a:t>Confidential — Investment Committee · Data as of 2026-06-30 historical; 2026-10-08 ex ante</a:t>
             </a:r>
           </a:p>
         </p:txBody>
       </p:sp>
       <p:sp>
         <p:nvSpPr>
-          <p:cNvPr id="21" name="TextBox 20"/>
+          <p:cNvPr id="22" name="TextBox 21"/>
           <p:cNvSpPr txBox="1"/>
           <p:nvPr/>
         </p:nvSpPr>
@@ -29633,7 +30951,7 @@
         <p:spPr>
           <a:xfrm>
             <a:off x="640080" y="329184"/>
-            <a:ext cx="9875520" cy="182880"/>
+            <a:ext cx="5303520" cy="182880"/>
           </a:xfrm>
           <a:prstGeom prst="rect">
             <a:avLst/>
@@ -29674,6 +30992,48 @@
         </p:nvSpPr>
         <p:spPr>
           <a:xfrm>
+            <a:off x="5897880" y="310896"/>
+            <a:ext cx="4800600" cy="256032"/>
+          </a:xfrm>
+          <a:prstGeom prst="rect">
+            <a:avLst/>
+          </a:prstGeom>
+          <a:noFill/>
+        </p:spPr>
+        <p:txBody>
+          <a:bodyPr wrap="none" lIns="9144" rIns="9144" tIns="9144" bIns="9144" anchor="t">
+            <a:spAutoFit/>
+          </a:bodyPr>
+          <a:lstStyle/>
+          <a:p>
+            <a:pPr algn="r">
+              <a:spcAft>
+                <a:spcPts val="0"/>
+              </a:spcAft>
+              <a:defRPr sz="680" b="1">
+                <a:solidFill>
+                  <a:srgbClr val="4F6B00"/>
+                </a:solidFill>
+                <a:latin typeface="Inter"/>
+              </a:defRPr>
+            </a:pPr>
+            <a:r>
+              <a:rPr>
+                <a:latin typeface="Inter"/>
+              </a:rPr>
+              <a:t>Illustrative, Gradient Maintained — demo data, not the client's holdings or managers</a:t>
+            </a:r>
+          </a:p>
+        </p:txBody>
+      </p:sp>
+      <p:sp>
+        <p:nvSpPr>
+          <p:cNvPr id="5" name="TextBox 4"/>
+          <p:cNvSpPr txBox="1"/>
+          <p:nvPr/>
+        </p:nvSpPr>
+        <p:spPr>
+          <a:xfrm>
             <a:off x="640080" y="566928"/>
             <a:ext cx="10058400" cy="530352"/>
           </a:xfrm>
@@ -29710,7 +31070,7 @@
       </p:sp>
       <p:sp>
         <p:nvSpPr>
-          <p:cNvPr id="5" name="Rectangle 4"/>
+          <p:cNvPr id="6" name="Rectangle 5"/>
           <p:cNvSpPr/>
           <p:nvPr/>
         </p:nvSpPr>
@@ -29759,7 +31119,7 @@
       </p:sp>
       <p:sp>
         <p:nvSpPr>
-          <p:cNvPr id="6" name="Rectangle 5"/>
+          <p:cNvPr id="7" name="Rectangle 6"/>
           <p:cNvSpPr/>
           <p:nvPr/>
         </p:nvSpPr>
@@ -29808,7 +31168,7 @@
       </p:sp>
       <p:sp>
         <p:nvSpPr>
-          <p:cNvPr id="7" name="TextBox 6"/>
+          <p:cNvPr id="8" name="TextBox 7"/>
           <p:cNvSpPr txBox="1"/>
           <p:nvPr/>
         </p:nvSpPr>
@@ -29850,14 +31210,14 @@
       </p:sp>
       <p:sp>
         <p:nvSpPr>
-          <p:cNvPr id="8" name="Rectangle 7"/>
+          <p:cNvPr id="9" name="Rectangle 8"/>
           <p:cNvSpPr/>
           <p:nvPr/>
         </p:nvSpPr>
         <p:spPr>
           <a:xfrm>
             <a:off x="640080" y="1325880"/>
-            <a:ext cx="10908792" cy="2348072"/>
+            <a:ext cx="10908792" cy="2380591"/>
           </a:xfrm>
           <a:prstGeom prst="rect">
             <a:avLst/>
@@ -29899,14 +31259,14 @@
       </p:sp>
       <p:sp>
         <p:nvSpPr>
-          <p:cNvPr id="9" name="Rectangle 8"/>
+          <p:cNvPr id="10" name="Rectangle 9"/>
           <p:cNvSpPr/>
           <p:nvPr/>
         </p:nvSpPr>
         <p:spPr>
           <a:xfrm>
             <a:off x="640080" y="1325880"/>
-            <a:ext cx="54864" cy="2348072"/>
+            <a:ext cx="54864" cy="2380591"/>
           </a:xfrm>
           <a:prstGeom prst="rect">
             <a:avLst/>
@@ -29948,7 +31308,7 @@
       </p:sp>
       <p:sp>
         <p:nvSpPr>
-          <p:cNvPr id="10" name="TextBox 9"/>
+          <p:cNvPr id="11" name="TextBox 10"/>
           <p:cNvSpPr txBox="1"/>
           <p:nvPr/>
         </p:nvSpPr>
@@ -29990,14 +31350,14 @@
       </p:sp>
       <p:sp>
         <p:nvSpPr>
-          <p:cNvPr id="11" name="TextBox 10"/>
+          <p:cNvPr id="12" name="TextBox 11"/>
           <p:cNvSpPr txBox="1"/>
           <p:nvPr/>
         </p:nvSpPr>
         <p:spPr>
           <a:xfrm>
             <a:off x="804671" y="1719072"/>
-            <a:ext cx="10616184" cy="1863440"/>
+            <a:ext cx="10616184" cy="1895959"/>
           </a:xfrm>
           <a:prstGeom prst="rect">
             <a:avLst/>
@@ -30025,21 +31385,21 @@
               <a:rPr>
                 <a:latin typeface="Inter"/>
               </a:rPr>
-              <a:t>Observation: Historical active return is -0.6pp in the TEST evidence [S2]. Why it matters: This measure establishes the baseline for comparing later governed results. Uncertainty: The source basis may omit newer observations outside this fixture. What would change the view: A refreshed source report showing a change above 1%.</a:t>
+              <a:t>Observation: Historical active return is -0.6pp in the review evidence [S2]. Why it matters: This measure establishes the baseline for comparing later governed results. Uncertainty: The source basis may omit newer observations outside the reviewed evidence. What would change the view: A refreshed source report showing a change above 1%.</a:t>
             </a:r>
           </a:p>
         </p:txBody>
       </p:sp>
       <p:sp>
         <p:nvSpPr>
-          <p:cNvPr id="12" name="Rectangle 11"/>
+          <p:cNvPr id="13" name="Rectangle 12"/>
           <p:cNvSpPr/>
           <p:nvPr/>
         </p:nvSpPr>
         <p:spPr>
           <a:xfrm>
-            <a:off x="640080" y="3783680"/>
-            <a:ext cx="10908792" cy="2434239"/>
+            <a:off x="640080" y="3816199"/>
+            <a:ext cx="10908792" cy="2401720"/>
           </a:xfrm>
           <a:prstGeom prst="rect">
             <a:avLst/>
@@ -30081,14 +31441,14 @@
       </p:sp>
       <p:sp>
         <p:nvSpPr>
-          <p:cNvPr id="13" name="Rectangle 12"/>
+          <p:cNvPr id="14" name="Rectangle 13"/>
           <p:cNvSpPr/>
           <p:nvPr/>
         </p:nvSpPr>
         <p:spPr>
           <a:xfrm>
-            <a:off x="640080" y="3783680"/>
-            <a:ext cx="54864" cy="2434239"/>
+            <a:off x="640080" y="3816199"/>
+            <a:ext cx="54864" cy="2401720"/>
           </a:xfrm>
           <a:prstGeom prst="rect">
             <a:avLst/>
@@ -30130,13 +31490,13 @@
       </p:sp>
       <p:sp>
         <p:nvSpPr>
-          <p:cNvPr id="14" name="TextBox 13"/>
+          <p:cNvPr id="15" name="TextBox 14"/>
           <p:cNvSpPr txBox="1"/>
           <p:nvPr/>
         </p:nvSpPr>
         <p:spPr>
           <a:xfrm>
-            <a:off x="804671" y="3893408"/>
+            <a:off x="804671" y="3925927"/>
             <a:ext cx="10616184" cy="228600"/>
           </a:xfrm>
           <a:prstGeom prst="rect">
@@ -30172,14 +31532,14 @@
       </p:sp>
       <p:sp>
         <p:nvSpPr>
-          <p:cNvPr id="15" name="TextBox 14"/>
+          <p:cNvPr id="16" name="TextBox 15"/>
           <p:cNvSpPr txBox="1"/>
           <p:nvPr/>
         </p:nvSpPr>
         <p:spPr>
           <a:xfrm>
-            <a:off x="804671" y="4176872"/>
-            <a:ext cx="10616184" cy="1949607"/>
+            <a:off x="804671" y="4209391"/>
+            <a:ext cx="10616184" cy="1917088"/>
           </a:xfrm>
           <a:prstGeom prst="rect">
             <a:avLst/>
@@ -30207,14 +31567,14 @@
               <a:rPr>
                 <a:latin typeface="Inter"/>
               </a:rPr>
-              <a:t>Observation: Ex ante residual is 0.0bp in the TEST evidence [S3]. Why it matters: This result determines which item receives priority in the next monitoring cycle. Uncertainty: Supporting coverage may omit later filings or corroborating detail. What would change the view: A new filing or report that resolves the item or changes it by 1%.</a:t>
+              <a:t>Observation: Ex ante residual is 0.0bp in the review evidence [S3]. Why it matters: This result determines which item receives priority in the next monitoring cycle. Uncertainty: Supporting coverage may omit later filings or corroborating detail. What would change the view: A new filing or report that resolves the item or changes it by 1%.</a:t>
             </a:r>
           </a:p>
         </p:txBody>
       </p:sp>
       <p:sp>
         <p:nvSpPr>
-          <p:cNvPr id="16" name="Rectangle 15"/>
+          <p:cNvPr id="17" name="Rectangle 16"/>
           <p:cNvSpPr/>
           <p:nvPr/>
         </p:nvSpPr>
@@ -30263,7 +31623,7 @@
       </p:sp>
       <p:sp>
         <p:nvSpPr>
-          <p:cNvPr id="17" name="TextBox 16"/>
+          <p:cNvPr id="18" name="TextBox 17"/>
           <p:cNvSpPr txBox="1"/>
           <p:nvPr/>
         </p:nvSpPr>
@@ -30305,7 +31665,7 @@
       </p:sp>
       <p:sp>
         <p:nvSpPr>
-          <p:cNvPr id="18" name="TextBox 17"/>
+          <p:cNvPr id="19" name="TextBox 18"/>
           <p:cNvSpPr txBox="1"/>
           <p:nvPr/>
         </p:nvSpPr>
@@ -30340,14 +31700,14 @@
               <a:rPr>
                 <a:latin typeface="Inter"/>
               </a:rPr>
-              <a:t>TEST DATA — fictional portfolio for rendering tests only · Data as of 2026-06-30 historical; 2026-10-08 ex ante</a:t>
+              <a:t>Confidential — Investment Committee · Data as of 2026-06-30 historical; 2026-10-08 ex ante</a:t>
             </a:r>
           </a:p>
         </p:txBody>
       </p:sp>
       <p:sp>
         <p:nvSpPr>
-          <p:cNvPr id="19" name="TextBox 18"/>
+          <p:cNvPr id="20" name="TextBox 19"/>
           <p:cNvSpPr txBox="1"/>
           <p:nvPr/>
         </p:nvSpPr>
@@ -30463,7 +31823,7 @@
         <p:spPr>
           <a:xfrm>
             <a:off x="640080" y="329184"/>
-            <a:ext cx="9875520" cy="182880"/>
+            <a:ext cx="5303520" cy="182880"/>
           </a:xfrm>
           <a:prstGeom prst="rect">
             <a:avLst/>
@@ -30504,6 +31864,48 @@
         </p:nvSpPr>
         <p:spPr>
           <a:xfrm>
+            <a:off x="5897880" y="310896"/>
+            <a:ext cx="4800600" cy="256032"/>
+          </a:xfrm>
+          <a:prstGeom prst="rect">
+            <a:avLst/>
+          </a:prstGeom>
+          <a:noFill/>
+        </p:spPr>
+        <p:txBody>
+          <a:bodyPr wrap="none" lIns="9144" rIns="9144" tIns="9144" bIns="9144" anchor="t">
+            <a:spAutoFit/>
+          </a:bodyPr>
+          <a:lstStyle/>
+          <a:p>
+            <a:pPr algn="r">
+              <a:spcAft>
+                <a:spcPts val="0"/>
+              </a:spcAft>
+              <a:defRPr sz="680" b="1">
+                <a:solidFill>
+                  <a:srgbClr val="4F6B00"/>
+                </a:solidFill>
+                <a:latin typeface="Inter"/>
+              </a:defRPr>
+            </a:pPr>
+            <a:r>
+              <a:rPr>
+                <a:latin typeface="Inter"/>
+              </a:rPr>
+              <a:t>Illustrative, Gradient Maintained — demo data, not the client's holdings or managers</a:t>
+            </a:r>
+          </a:p>
+        </p:txBody>
+      </p:sp>
+      <p:sp>
+        <p:nvSpPr>
+          <p:cNvPr id="5" name="TextBox 4"/>
+          <p:cNvSpPr txBox="1"/>
+          <p:nvPr/>
+        </p:nvSpPr>
+        <p:spPr>
+          <a:xfrm>
             <a:off x="640080" y="566928"/>
             <a:ext cx="10058400" cy="530352"/>
           </a:xfrm>
@@ -30540,7 +31942,7 @@
       </p:sp>
       <p:sp>
         <p:nvSpPr>
-          <p:cNvPr id="5" name="Rectangle 4"/>
+          <p:cNvPr id="6" name="Rectangle 5"/>
           <p:cNvSpPr/>
           <p:nvPr/>
         </p:nvSpPr>
@@ -30589,7 +31991,7 @@
       </p:sp>
       <p:sp>
         <p:nvSpPr>
-          <p:cNvPr id="6" name="Rectangle 5"/>
+          <p:cNvPr id="7" name="Rectangle 6"/>
           <p:cNvSpPr/>
           <p:nvPr/>
         </p:nvSpPr>
@@ -30638,7 +32040,7 @@
       </p:sp>
       <p:sp>
         <p:nvSpPr>
-          <p:cNvPr id="7" name="TextBox 6"/>
+          <p:cNvPr id="8" name="TextBox 7"/>
           <p:cNvSpPr txBox="1"/>
           <p:nvPr/>
         </p:nvSpPr>
@@ -30680,7 +32082,7 @@
       </p:sp>
       <p:graphicFrame>
         <p:nvGraphicFramePr>
-          <p:cNvPr id="8" name="Table 7"/>
+          <p:cNvPr id="9" name="Table 8"/>
           <p:cNvGraphicFramePr>
             <a:graphicFrameLocks noGrp="1"/>
           </p:cNvGraphicFramePr>
@@ -30745,7 +32147,7 @@
                         <a:rPr>
                           <a:latin typeface="Inter"/>
                         </a:rPr>
-                        <a:t>Example Attribution Portfolio (TEST) [S2]</a:t>
+                        <a:t>Northstar Total Fund [S2]</a:t>
                       </a:r>
                     </a:p>
                   </a:txBody>
@@ -31137,7 +32539,7 @@
                         <a:rPr>
                           <a:latin typeface="Inter"/>
                         </a:rPr>
-                        <a:t>Fictional TEST data [S1]</a:t>
+                        <a:t>Illustrative sample data [S1]</a:t>
                       </a:r>
                     </a:p>
                   </a:txBody>
@@ -31154,7 +32556,7 @@
       </p:graphicFrame>
       <p:sp>
         <p:nvSpPr>
-          <p:cNvPr id="9" name="TextBox 8"/>
+          <p:cNvPr id="10" name="TextBox 9"/>
           <p:cNvSpPr txBox="1"/>
           <p:nvPr/>
         </p:nvSpPr>
@@ -31196,7 +32598,7 @@
       </p:sp>
       <p:graphicFrame>
         <p:nvGraphicFramePr>
-          <p:cNvPr id="10" name="Table 9"/>
+          <p:cNvPr id="11" name="Table 10"/>
           <p:cNvGraphicFramePr>
             <a:graphicFrameLocks noGrp="1"/>
           </p:cNvGraphicFramePr>
@@ -31718,7 +33120,7 @@
       </p:graphicFrame>
       <p:sp>
         <p:nvSpPr>
-          <p:cNvPr id="11" name="Rectangle 10"/>
+          <p:cNvPr id="12" name="Rectangle 11"/>
           <p:cNvSpPr/>
           <p:nvPr/>
         </p:nvSpPr>
@@ -31767,7 +33169,7 @@
       </p:sp>
       <p:sp>
         <p:nvSpPr>
-          <p:cNvPr id="12" name="TextBox 11"/>
+          <p:cNvPr id="13" name="TextBox 12"/>
           <p:cNvSpPr txBox="1"/>
           <p:nvPr/>
         </p:nvSpPr>
@@ -31809,7 +33211,7 @@
       </p:sp>
       <p:sp>
         <p:nvSpPr>
-          <p:cNvPr id="13" name="TextBox 12"/>
+          <p:cNvPr id="14" name="TextBox 13"/>
           <p:cNvSpPr txBox="1"/>
           <p:nvPr/>
         </p:nvSpPr>
@@ -31844,14 +33246,14 @@
               <a:rPr>
                 <a:latin typeface="Inter"/>
               </a:rPr>
-              <a:t>TEST DATA — fictional portfolio for rendering tests only · Data as of 2026-06-30 historical; 2026-10-08 ex ante</a:t>
+              <a:t>Confidential — Investment Committee · Data as of 2026-06-30 historical; 2026-10-08 ex ante</a:t>
             </a:r>
           </a:p>
         </p:txBody>
       </p:sp>
       <p:sp>
         <p:nvSpPr>
-          <p:cNvPr id="14" name="TextBox 13"/>
+          <p:cNvPr id="15" name="TextBox 14"/>
           <p:cNvSpPr txBox="1"/>
           <p:nvPr/>
         </p:nvSpPr>
@@ -31967,7 +33369,7 @@
         <p:spPr>
           <a:xfrm>
             <a:off x="640080" y="329184"/>
-            <a:ext cx="9875520" cy="182880"/>
+            <a:ext cx="5303520" cy="182880"/>
           </a:xfrm>
           <a:prstGeom prst="rect">
             <a:avLst/>
@@ -32008,6 +33410,48 @@
         </p:nvSpPr>
         <p:spPr>
           <a:xfrm>
+            <a:off x="5897880" y="310896"/>
+            <a:ext cx="4800600" cy="256032"/>
+          </a:xfrm>
+          <a:prstGeom prst="rect">
+            <a:avLst/>
+          </a:prstGeom>
+          <a:noFill/>
+        </p:spPr>
+        <p:txBody>
+          <a:bodyPr wrap="none" lIns="9144" rIns="9144" tIns="9144" bIns="9144" anchor="t">
+            <a:spAutoFit/>
+          </a:bodyPr>
+          <a:lstStyle/>
+          <a:p>
+            <a:pPr algn="r">
+              <a:spcAft>
+                <a:spcPts val="0"/>
+              </a:spcAft>
+              <a:defRPr sz="680" b="1">
+                <a:solidFill>
+                  <a:srgbClr val="4F6B00"/>
+                </a:solidFill>
+                <a:latin typeface="Inter"/>
+              </a:defRPr>
+            </a:pPr>
+            <a:r>
+              <a:rPr>
+                <a:latin typeface="Inter"/>
+              </a:rPr>
+              <a:t>Illustrative, Gradient Maintained — demo data, not the client's holdings or managers</a:t>
+            </a:r>
+          </a:p>
+        </p:txBody>
+      </p:sp>
+      <p:sp>
+        <p:nvSpPr>
+          <p:cNvPr id="5" name="TextBox 4"/>
+          <p:cNvSpPr txBox="1"/>
+          <p:nvPr/>
+        </p:nvSpPr>
+        <p:spPr>
+          <a:xfrm>
             <a:off x="640080" y="566928"/>
             <a:ext cx="10058400" cy="530352"/>
           </a:xfrm>
@@ -32044,7 +33488,7 @@
       </p:sp>
       <p:sp>
         <p:nvSpPr>
-          <p:cNvPr id="5" name="Rectangle 4"/>
+          <p:cNvPr id="6" name="Rectangle 5"/>
           <p:cNvSpPr/>
           <p:nvPr/>
         </p:nvSpPr>
@@ -32093,7 +33537,7 @@
       </p:sp>
       <p:sp>
         <p:nvSpPr>
-          <p:cNvPr id="6" name="Rectangle 5"/>
+          <p:cNvPr id="7" name="Rectangle 6"/>
           <p:cNvSpPr/>
           <p:nvPr/>
         </p:nvSpPr>
@@ -32142,7 +33586,7 @@
       </p:sp>
       <p:sp>
         <p:nvSpPr>
-          <p:cNvPr id="7" name="TextBox 6"/>
+          <p:cNvPr id="8" name="TextBox 7"/>
           <p:cNvSpPr txBox="1"/>
           <p:nvPr/>
         </p:nvSpPr>
@@ -32184,7 +33628,7 @@
       </p:sp>
       <p:sp>
         <p:nvSpPr>
-          <p:cNvPr id="8" name="TextBox 7"/>
+          <p:cNvPr id="9" name="TextBox 8"/>
           <p:cNvSpPr txBox="1"/>
           <p:nvPr/>
         </p:nvSpPr>
@@ -32226,7 +33670,7 @@
       </p:sp>
       <p:graphicFrame>
         <p:nvGraphicFramePr>
-          <p:cNvPr id="9" name="Chart 8"/>
+          <p:cNvPr id="10" name="Chart 9"/>
           <p:cNvGraphicFramePr>
             <a:graphicFrameLocks noGrp="1"/>
           </p:cNvGraphicFramePr>
@@ -32244,7 +33688,7 @@
       </p:graphicFrame>
       <p:sp>
         <p:nvSpPr>
-          <p:cNvPr id="10" name="Rectangle 9"/>
+          <p:cNvPr id="11" name="Rectangle 10"/>
           <p:cNvSpPr/>
           <p:nvPr/>
         </p:nvSpPr>
@@ -32293,7 +33737,7 @@
       </p:sp>
       <p:sp>
         <p:nvSpPr>
-          <p:cNvPr id="11" name="TextBox 10"/>
+          <p:cNvPr id="12" name="TextBox 11"/>
           <p:cNvSpPr txBox="1"/>
           <p:nvPr/>
         </p:nvSpPr>
@@ -32335,7 +33779,7 @@
       </p:sp>
       <p:sp>
         <p:nvSpPr>
-          <p:cNvPr id="12" name="TextBox 11"/>
+          <p:cNvPr id="13" name="TextBox 12"/>
           <p:cNvSpPr txBox="1"/>
           <p:nvPr/>
         </p:nvSpPr>
@@ -32370,14 +33814,14 @@
               <a:rPr>
                 <a:latin typeface="Inter"/>
               </a:rPr>
-              <a:t>TEST DATA — fictional portfolio for rendering tests only · Data as of 2026-06-30 historical; 2026-10-08 ex ante</a:t>
+              <a:t>Confidential — Investment Committee · Data as of 2026-06-30 historical; 2026-10-08 ex ante</a:t>
             </a:r>
           </a:p>
         </p:txBody>
       </p:sp>
       <p:sp>
         <p:nvSpPr>
-          <p:cNvPr id="13" name="TextBox 12"/>
+          <p:cNvPr id="14" name="TextBox 13"/>
           <p:cNvSpPr txBox="1"/>
           <p:nvPr/>
         </p:nvSpPr>
@@ -32493,7 +33937,7 @@
         <p:spPr>
           <a:xfrm>
             <a:off x="640080" y="329184"/>
-            <a:ext cx="9875520" cy="182880"/>
+            <a:ext cx="5303520" cy="182880"/>
           </a:xfrm>
           <a:prstGeom prst="rect">
             <a:avLst/>
@@ -32534,6 +33978,48 @@
         </p:nvSpPr>
         <p:spPr>
           <a:xfrm>
+            <a:off x="5897880" y="310896"/>
+            <a:ext cx="4800600" cy="256032"/>
+          </a:xfrm>
+          <a:prstGeom prst="rect">
+            <a:avLst/>
+          </a:prstGeom>
+          <a:noFill/>
+        </p:spPr>
+        <p:txBody>
+          <a:bodyPr wrap="none" lIns="9144" rIns="9144" tIns="9144" bIns="9144" anchor="t">
+            <a:spAutoFit/>
+          </a:bodyPr>
+          <a:lstStyle/>
+          <a:p>
+            <a:pPr algn="r">
+              <a:spcAft>
+                <a:spcPts val="0"/>
+              </a:spcAft>
+              <a:defRPr sz="680" b="1">
+                <a:solidFill>
+                  <a:srgbClr val="4F6B00"/>
+                </a:solidFill>
+                <a:latin typeface="Inter"/>
+              </a:defRPr>
+            </a:pPr>
+            <a:r>
+              <a:rPr>
+                <a:latin typeface="Inter"/>
+              </a:rPr>
+              <a:t>Illustrative, Gradient Maintained — demo data, not the client's holdings or managers</a:t>
+            </a:r>
+          </a:p>
+        </p:txBody>
+      </p:sp>
+      <p:sp>
+        <p:nvSpPr>
+          <p:cNvPr id="5" name="TextBox 4"/>
+          <p:cNvSpPr txBox="1"/>
+          <p:nvPr/>
+        </p:nvSpPr>
+        <p:spPr>
+          <a:xfrm>
             <a:off x="640080" y="566928"/>
             <a:ext cx="10058400" cy="530352"/>
           </a:xfrm>
@@ -32570,7 +34056,7 @@
       </p:sp>
       <p:sp>
         <p:nvSpPr>
-          <p:cNvPr id="5" name="Rectangle 4"/>
+          <p:cNvPr id="6" name="Rectangle 5"/>
           <p:cNvSpPr/>
           <p:nvPr/>
         </p:nvSpPr>
@@ -32619,7 +34105,7 @@
       </p:sp>
       <p:sp>
         <p:nvSpPr>
-          <p:cNvPr id="6" name="Rectangle 5"/>
+          <p:cNvPr id="7" name="Rectangle 6"/>
           <p:cNvSpPr/>
           <p:nvPr/>
         </p:nvSpPr>
@@ -32668,7 +34154,7 @@
       </p:sp>
       <p:sp>
         <p:nvSpPr>
-          <p:cNvPr id="7" name="TextBox 6"/>
+          <p:cNvPr id="8" name="TextBox 7"/>
           <p:cNvSpPr txBox="1"/>
           <p:nvPr/>
         </p:nvSpPr>
@@ -32710,7 +34196,7 @@
       </p:sp>
       <p:sp>
         <p:nvSpPr>
-          <p:cNvPr id="8" name="TextBox 7"/>
+          <p:cNvPr id="9" name="TextBox 8"/>
           <p:cNvSpPr txBox="1"/>
           <p:nvPr/>
         </p:nvSpPr>
@@ -32752,7 +34238,7 @@
       </p:sp>
       <p:graphicFrame>
         <p:nvGraphicFramePr>
-          <p:cNvPr id="9" name="Chart 8"/>
+          <p:cNvPr id="10" name="Chart 9"/>
           <p:cNvGraphicFramePr>
             <a:graphicFrameLocks noGrp="1"/>
           </p:cNvGraphicFramePr>
@@ -32770,7 +34256,7 @@
       </p:graphicFrame>
       <p:sp>
         <p:nvSpPr>
-          <p:cNvPr id="10" name="Rectangle 9"/>
+          <p:cNvPr id="11" name="Rectangle 10"/>
           <p:cNvSpPr/>
           <p:nvPr/>
         </p:nvSpPr>
@@ -32819,7 +34305,7 @@
       </p:sp>
       <p:sp>
         <p:nvSpPr>
-          <p:cNvPr id="11" name="TextBox 10"/>
+          <p:cNvPr id="12" name="TextBox 11"/>
           <p:cNvSpPr txBox="1"/>
           <p:nvPr/>
         </p:nvSpPr>
@@ -32861,7 +34347,7 @@
       </p:sp>
       <p:graphicFrame>
         <p:nvGraphicFramePr>
-          <p:cNvPr id="12" name="Chart 11"/>
+          <p:cNvPr id="13" name="Chart 12"/>
           <p:cNvGraphicFramePr>
             <a:graphicFrameLocks noGrp="1"/>
           </p:cNvGraphicFramePr>
@@ -32879,7 +34365,7 @@
       </p:graphicFrame>
       <p:sp>
         <p:nvSpPr>
-          <p:cNvPr id="13" name="Rectangle 12"/>
+          <p:cNvPr id="14" name="Rectangle 13"/>
           <p:cNvSpPr/>
           <p:nvPr/>
         </p:nvSpPr>
@@ -32928,7 +34414,7 @@
       </p:sp>
       <p:sp>
         <p:nvSpPr>
-          <p:cNvPr id="14" name="TextBox 13"/>
+          <p:cNvPr id="15" name="TextBox 14"/>
           <p:cNvSpPr txBox="1"/>
           <p:nvPr/>
         </p:nvSpPr>
@@ -32970,7 +34456,7 @@
       </p:sp>
       <p:sp>
         <p:nvSpPr>
-          <p:cNvPr id="15" name="TextBox 14"/>
+          <p:cNvPr id="16" name="TextBox 15"/>
           <p:cNvSpPr txBox="1"/>
           <p:nvPr/>
         </p:nvSpPr>
@@ -33005,14 +34491,14 @@
               <a:rPr>
                 <a:latin typeface="Inter"/>
               </a:rPr>
-              <a:t>TEST DATA — fictional portfolio for rendering tests only · Data as of 2026-06-30 historical; 2026-10-08 ex ante</a:t>
+              <a:t>Confidential — Investment Committee · Data as of 2026-06-30 historical; 2026-10-08 ex ante</a:t>
             </a:r>
           </a:p>
         </p:txBody>
       </p:sp>
       <p:sp>
         <p:nvSpPr>
-          <p:cNvPr id="16" name="TextBox 15"/>
+          <p:cNvPr id="17" name="TextBox 16"/>
           <p:cNvSpPr txBox="1"/>
           <p:nvPr/>
         </p:nvSpPr>
@@ -33128,7 +34614,7 @@
         <p:spPr>
           <a:xfrm>
             <a:off x="640080" y="329184"/>
-            <a:ext cx="9875520" cy="182880"/>
+            <a:ext cx="5303520" cy="182880"/>
           </a:xfrm>
           <a:prstGeom prst="rect">
             <a:avLst/>
@@ -33169,6 +34655,48 @@
         </p:nvSpPr>
         <p:spPr>
           <a:xfrm>
+            <a:off x="5897880" y="310896"/>
+            <a:ext cx="4800600" cy="256032"/>
+          </a:xfrm>
+          <a:prstGeom prst="rect">
+            <a:avLst/>
+          </a:prstGeom>
+          <a:noFill/>
+        </p:spPr>
+        <p:txBody>
+          <a:bodyPr wrap="none" lIns="9144" rIns="9144" tIns="9144" bIns="9144" anchor="t">
+            <a:spAutoFit/>
+          </a:bodyPr>
+          <a:lstStyle/>
+          <a:p>
+            <a:pPr algn="r">
+              <a:spcAft>
+                <a:spcPts val="0"/>
+              </a:spcAft>
+              <a:defRPr sz="680" b="1">
+                <a:solidFill>
+                  <a:srgbClr val="4F6B00"/>
+                </a:solidFill>
+                <a:latin typeface="Inter"/>
+              </a:defRPr>
+            </a:pPr>
+            <a:r>
+              <a:rPr>
+                <a:latin typeface="Inter"/>
+              </a:rPr>
+              <a:t>Illustrative, Gradient Maintained — demo data, not the client's holdings or managers</a:t>
+            </a:r>
+          </a:p>
+        </p:txBody>
+      </p:sp>
+      <p:sp>
+        <p:nvSpPr>
+          <p:cNvPr id="5" name="TextBox 4"/>
+          <p:cNvSpPr txBox="1"/>
+          <p:nvPr/>
+        </p:nvSpPr>
+        <p:spPr>
+          <a:xfrm>
             <a:off x="640080" y="566928"/>
             <a:ext cx="10058400" cy="530352"/>
           </a:xfrm>
@@ -33205,7 +34733,7 @@
       </p:sp>
       <p:sp>
         <p:nvSpPr>
-          <p:cNvPr id="5" name="Rectangle 4"/>
+          <p:cNvPr id="6" name="Rectangle 5"/>
           <p:cNvSpPr/>
           <p:nvPr/>
         </p:nvSpPr>
@@ -33254,7 +34782,7 @@
       </p:sp>
       <p:sp>
         <p:nvSpPr>
-          <p:cNvPr id="6" name="Rectangle 5"/>
+          <p:cNvPr id="7" name="Rectangle 6"/>
           <p:cNvSpPr/>
           <p:nvPr/>
         </p:nvSpPr>
@@ -33303,7 +34831,7 @@
       </p:sp>
       <p:sp>
         <p:nvSpPr>
-          <p:cNvPr id="7" name="TextBox 6"/>
+          <p:cNvPr id="8" name="TextBox 7"/>
           <p:cNvSpPr txBox="1"/>
           <p:nvPr/>
         </p:nvSpPr>
@@ -33345,7 +34873,7 @@
       </p:sp>
       <p:sp>
         <p:nvSpPr>
-          <p:cNvPr id="8" name="TextBox 7"/>
+          <p:cNvPr id="9" name="TextBox 8"/>
           <p:cNvSpPr txBox="1"/>
           <p:nvPr/>
         </p:nvSpPr>
@@ -33387,7 +34915,7 @@
       </p:sp>
       <p:graphicFrame>
         <p:nvGraphicFramePr>
-          <p:cNvPr id="9" name="Table 8"/>
+          <p:cNvPr id="10" name="Table 9"/>
           <p:cNvGraphicFramePr>
             <a:graphicFrameLocks noGrp="1"/>
           </p:cNvGraphicFramePr>
@@ -34101,7 +35629,7 @@
       </p:graphicFrame>
       <p:sp>
         <p:nvSpPr>
-          <p:cNvPr id="10" name="TextBox 9"/>
+          <p:cNvPr id="11" name="TextBox 10"/>
           <p:cNvSpPr txBox="1"/>
           <p:nvPr/>
         </p:nvSpPr>
@@ -34143,7 +35671,7 @@
       </p:sp>
       <p:sp>
         <p:nvSpPr>
-          <p:cNvPr id="11" name="Rectangle 10"/>
+          <p:cNvPr id="12" name="Rectangle 11"/>
           <p:cNvSpPr/>
           <p:nvPr/>
         </p:nvSpPr>
@@ -34192,7 +35720,7 @@
       </p:sp>
       <p:sp>
         <p:nvSpPr>
-          <p:cNvPr id="12" name="Rectangle 11"/>
+          <p:cNvPr id="13" name="Rectangle 12"/>
           <p:cNvSpPr/>
           <p:nvPr/>
         </p:nvSpPr>
@@ -34241,7 +35769,7 @@
       </p:sp>
       <p:sp>
         <p:nvSpPr>
-          <p:cNvPr id="13" name="TextBox 12"/>
+          <p:cNvPr id="14" name="TextBox 13"/>
           <p:cNvSpPr txBox="1"/>
           <p:nvPr/>
         </p:nvSpPr>
@@ -34283,7 +35811,7 @@
       </p:sp>
       <p:sp>
         <p:nvSpPr>
-          <p:cNvPr id="14" name="TextBox 13"/>
+          <p:cNvPr id="15" name="TextBox 14"/>
           <p:cNvSpPr txBox="1"/>
           <p:nvPr/>
         </p:nvSpPr>
@@ -34325,7 +35853,7 @@
       </p:sp>
       <p:sp>
         <p:nvSpPr>
-          <p:cNvPr id="15" name="Rectangle 14"/>
+          <p:cNvPr id="16" name="Rectangle 15"/>
           <p:cNvSpPr/>
           <p:nvPr/>
         </p:nvSpPr>
@@ -34374,7 +35902,7 @@
       </p:sp>
       <p:sp>
         <p:nvSpPr>
-          <p:cNvPr id="16" name="TextBox 15"/>
+          <p:cNvPr id="17" name="TextBox 16"/>
           <p:cNvSpPr txBox="1"/>
           <p:nvPr/>
         </p:nvSpPr>
@@ -34416,7 +35944,7 @@
       </p:sp>
       <p:sp>
         <p:nvSpPr>
-          <p:cNvPr id="17" name="TextBox 16"/>
+          <p:cNvPr id="18" name="TextBox 17"/>
           <p:cNvSpPr txBox="1"/>
           <p:nvPr/>
         </p:nvSpPr>
@@ -34451,14 +35979,14 @@
               <a:rPr>
                 <a:latin typeface="Inter"/>
               </a:rPr>
-              <a:t>TEST DATA — fictional portfolio for rendering tests only · Data as of 2026-06-30 historical; 2026-10-08 ex ante</a:t>
+              <a:t>Confidential — Investment Committee · Data as of 2026-06-30 historical; 2026-10-08 ex ante</a:t>
             </a:r>
           </a:p>
         </p:txBody>
       </p:sp>
       <p:sp>
         <p:nvSpPr>
-          <p:cNvPr id="18" name="TextBox 17"/>
+          <p:cNvPr id="19" name="TextBox 18"/>
           <p:cNvSpPr txBox="1"/>
           <p:nvPr/>
         </p:nvSpPr>
@@ -34574,7 +36102,7 @@
         <p:spPr>
           <a:xfrm>
             <a:off x="640080" y="329184"/>
-            <a:ext cx="9875520" cy="182880"/>
+            <a:ext cx="5303520" cy="182880"/>
           </a:xfrm>
           <a:prstGeom prst="rect">
             <a:avLst/>
@@ -34615,6 +36143,48 @@
         </p:nvSpPr>
         <p:spPr>
           <a:xfrm>
+            <a:off x="5897880" y="310896"/>
+            <a:ext cx="4800600" cy="256032"/>
+          </a:xfrm>
+          <a:prstGeom prst="rect">
+            <a:avLst/>
+          </a:prstGeom>
+          <a:noFill/>
+        </p:spPr>
+        <p:txBody>
+          <a:bodyPr wrap="none" lIns="9144" rIns="9144" tIns="9144" bIns="9144" anchor="t">
+            <a:spAutoFit/>
+          </a:bodyPr>
+          <a:lstStyle/>
+          <a:p>
+            <a:pPr algn="r">
+              <a:spcAft>
+                <a:spcPts val="0"/>
+              </a:spcAft>
+              <a:defRPr sz="680" b="1">
+                <a:solidFill>
+                  <a:srgbClr val="4F6B00"/>
+                </a:solidFill>
+                <a:latin typeface="Inter"/>
+              </a:defRPr>
+            </a:pPr>
+            <a:r>
+              <a:rPr>
+                <a:latin typeface="Inter"/>
+              </a:rPr>
+              <a:t>Illustrative, Gradient Maintained — demo data, not the client's holdings or managers</a:t>
+            </a:r>
+          </a:p>
+        </p:txBody>
+      </p:sp>
+      <p:sp>
+        <p:nvSpPr>
+          <p:cNvPr id="5" name="TextBox 4"/>
+          <p:cNvSpPr txBox="1"/>
+          <p:nvPr/>
+        </p:nvSpPr>
+        <p:spPr>
+          <a:xfrm>
             <a:off x="640080" y="566928"/>
             <a:ext cx="10058400" cy="530352"/>
           </a:xfrm>
@@ -34651,7 +36221,7 @@
       </p:sp>
       <p:sp>
         <p:nvSpPr>
-          <p:cNvPr id="5" name="Rectangle 4"/>
+          <p:cNvPr id="6" name="Rectangle 5"/>
           <p:cNvSpPr/>
           <p:nvPr/>
         </p:nvSpPr>
@@ -34700,7 +36270,7 @@
       </p:sp>
       <p:sp>
         <p:nvSpPr>
-          <p:cNvPr id="6" name="Rectangle 5"/>
+          <p:cNvPr id="7" name="Rectangle 6"/>
           <p:cNvSpPr/>
           <p:nvPr/>
         </p:nvSpPr>
@@ -34749,7 +36319,7 @@
       </p:sp>
       <p:sp>
         <p:nvSpPr>
-          <p:cNvPr id="7" name="TextBox 6"/>
+          <p:cNvPr id="8" name="TextBox 7"/>
           <p:cNvSpPr txBox="1"/>
           <p:nvPr/>
         </p:nvSpPr>
@@ -34791,7 +36361,7 @@
       </p:sp>
       <p:sp>
         <p:nvSpPr>
-          <p:cNvPr id="8" name="TextBox 7"/>
+          <p:cNvPr id="9" name="TextBox 8"/>
           <p:cNvSpPr txBox="1"/>
           <p:nvPr/>
         </p:nvSpPr>
@@ -34833,7 +36403,7 @@
       </p:sp>
       <p:graphicFrame>
         <p:nvGraphicFramePr>
-          <p:cNvPr id="9" name="Chart 8"/>
+          <p:cNvPr id="10" name="Chart 9"/>
           <p:cNvGraphicFramePr>
             <a:graphicFrameLocks noGrp="1"/>
           </p:cNvGraphicFramePr>
@@ -34851,7 +36421,7 @@
       </p:graphicFrame>
       <p:sp>
         <p:nvSpPr>
-          <p:cNvPr id="10" name="Rectangle 9"/>
+          <p:cNvPr id="11" name="Rectangle 10"/>
           <p:cNvSpPr/>
           <p:nvPr/>
         </p:nvSpPr>
@@ -34900,7 +36470,7 @@
       </p:sp>
       <p:sp>
         <p:nvSpPr>
-          <p:cNvPr id="11" name="TextBox 10"/>
+          <p:cNvPr id="12" name="TextBox 11"/>
           <p:cNvSpPr txBox="1"/>
           <p:nvPr/>
         </p:nvSpPr>
@@ -34942,7 +36512,7 @@
       </p:sp>
       <p:graphicFrame>
         <p:nvGraphicFramePr>
-          <p:cNvPr id="12" name="Table 11"/>
+          <p:cNvPr id="13" name="Table 12"/>
           <p:cNvGraphicFramePr>
             <a:graphicFrameLocks noGrp="1"/>
           </p:cNvGraphicFramePr>
@@ -35360,7 +36930,7 @@
       </p:graphicFrame>
       <p:sp>
         <p:nvSpPr>
-          <p:cNvPr id="13" name="Rectangle 12"/>
+          <p:cNvPr id="14" name="Rectangle 13"/>
           <p:cNvSpPr/>
           <p:nvPr/>
         </p:nvSpPr>
@@ -35409,7 +36979,7 @@
       </p:sp>
       <p:sp>
         <p:nvSpPr>
-          <p:cNvPr id="14" name="TextBox 13"/>
+          <p:cNvPr id="15" name="TextBox 14"/>
           <p:cNvSpPr txBox="1"/>
           <p:nvPr/>
         </p:nvSpPr>
@@ -35451,7 +37021,7 @@
       </p:sp>
       <p:sp>
         <p:nvSpPr>
-          <p:cNvPr id="15" name="TextBox 14"/>
+          <p:cNvPr id="16" name="TextBox 15"/>
           <p:cNvSpPr txBox="1"/>
           <p:nvPr/>
         </p:nvSpPr>
@@ -35486,14 +37056,14 @@
               <a:rPr>
                 <a:latin typeface="Inter"/>
               </a:rPr>
-              <a:t>TEST DATA — fictional portfolio for rendering tests only · Data as of 2026-06-30 historical; 2026-10-08 ex ante</a:t>
+              <a:t>Confidential — Investment Committee · Data as of 2026-06-30 historical; 2026-10-08 ex ante</a:t>
             </a:r>
           </a:p>
         </p:txBody>
       </p:sp>
       <p:sp>
         <p:nvSpPr>
-          <p:cNvPr id="16" name="TextBox 15"/>
+          <p:cNvPr id="17" name="TextBox 16"/>
           <p:cNvSpPr txBox="1"/>
           <p:nvPr/>
         </p:nvSpPr>

--- a/plugins/gradient-cio/assets/examples/gradient-portfolio-attribution.pptx
+++ b/plugins/gradient-cio/assets/examples/gradient-portfolio-attribution.pptx
@@ -34,6 +34,7 @@
     <ns0:sldId id="282" ns1:id="rId33"/>
     <ns0:sldId id="283" ns1:id="rId34"/>
     <ns0:sldId id="284" ns1:id="rId35"/>
+    <ns0:sldId id="285" ns1:id="rId36"/>
   </ns0:sldIdLst>
   <ns0:sldSz cx="12191695" cy="6858000" type="screen16x9"/>
   <ns0:notesSz cx="6858000" cy="9144000"/>
@@ -5805,7 +5806,7 @@
               <a:rPr>
                 <a:latin typeface="Inter"/>
               </a:rPr>
-              <a:t>Historical and governed ex ante attribution · prepared for the Investment Committee</a:t>
+              <a:t>Historical and forward-looking attribution · prepared for the Investment Committee</a:t>
             </a:r>
           </a:p>
         </p:txBody>
@@ -6197,224 +6198,7 @@
       </p:sp>
       <p:sp>
         <p:nvSpPr>
-          <p:cNvPr id="17" name="Rectangle 16"/>
-          <p:cNvSpPr/>
-          <p:nvPr/>
-        </p:nvSpPr>
-        <p:spPr>
-          <a:xfrm>
-            <a:off x="685800" y="5687568"/>
-            <a:ext cx="3337560" cy="530352"/>
-          </a:xfrm>
-          <a:prstGeom prst="rect">
-            <a:avLst/>
-          </a:prstGeom>
-          <a:solidFill>
-            <a:srgbClr val="C6F432"/>
-          </a:solidFill>
-          <a:ln>
-            <a:solidFill>
-              <a:srgbClr val="C6F432"/>
-            </a:solidFill>
-          </a:ln>
-        </p:spPr>
-        <p:style>
-          <a:lnRef idx="1">
-            <a:schemeClr val="accent1"/>
-          </a:lnRef>
-          <a:fillRef idx="3">
-            <a:schemeClr val="accent1"/>
-          </a:fillRef>
-          <a:effectRef idx="2">
-            <a:schemeClr val="accent1"/>
-          </a:effectRef>
-          <a:fontRef idx="minor">
-            <a:schemeClr val="lt1"/>
-          </a:fontRef>
-        </p:style>
-        <p:txBody>
-          <a:bodyPr rtlCol="0" anchor="ctr"/>
-          <a:lstStyle/>
-          <a:p>
-            <a:pPr algn="ctr">
-              <a:defRPr>
-                <a:latin typeface="Inter"/>
-              </a:defRPr>
-            </a:pPr>
-          </a:p>
-        </p:txBody>
-      </p:sp>
-      <p:sp>
-        <p:nvSpPr>
-          <p:cNvPr id="18" name="TextBox 17"/>
-          <p:cNvSpPr txBox="1"/>
-          <p:nvPr/>
-        </p:nvSpPr>
-        <p:spPr>
-          <a:xfrm>
-            <a:off x="822960" y="5760720"/>
-            <a:ext cx="3063240" cy="128016"/>
-          </a:xfrm>
-          <a:prstGeom prst="rect">
-            <a:avLst/>
-          </a:prstGeom>
-          <a:noFill/>
-        </p:spPr>
-        <p:txBody>
-          <a:bodyPr wrap="none" lIns="9144" rIns="9144" tIns="9144" bIns="9144" anchor="t">
-            <a:spAutoFit/>
-          </a:bodyPr>
-          <a:lstStyle/>
-          <a:p>
-            <a:pPr algn="l">
-              <a:spcAft>
-                <a:spcPts val="0"/>
-              </a:spcAft>
-              <a:defRPr sz="620" b="1">
-                <a:solidFill>
-                  <a:srgbClr val="0D1117"/>
-                </a:solidFill>
-                <a:latin typeface="Inter"/>
-              </a:defRPr>
-            </a:pPr>
-            <a:r>
-              <a:rPr>
-                <a:latin typeface="Inter"/>
-              </a:rPr>
-              <a:t>OVERALL VIEW</a:t>
-            </a:r>
-          </a:p>
-        </p:txBody>
-      </p:sp>
-      <p:sp>
-        <p:nvSpPr>
-          <p:cNvPr id="19" name="TextBox 18"/>
-          <p:cNvSpPr txBox="1"/>
-          <p:nvPr/>
-        </p:nvSpPr>
-        <p:spPr>
-          <a:xfrm>
-            <a:off x="822960" y="5916168"/>
-            <a:ext cx="3063240" cy="182880"/>
-          </a:xfrm>
-          <a:prstGeom prst="rect">
-            <a:avLst/>
-          </a:prstGeom>
-          <a:noFill/>
-        </p:spPr>
-        <p:txBody>
-          <a:bodyPr wrap="none" lIns="9144" rIns="9144" tIns="9144" bIns="9144" anchor="t">
-            <a:spAutoFit/>
-          </a:bodyPr>
-          <a:lstStyle/>
-          <a:p>
-            <a:pPr algn="l">
-              <a:spcAft>
-                <a:spcPts val="0"/>
-              </a:spcAft>
-              <a:defRPr sz="900" b="1">
-                <a:solidFill>
-                  <a:srgbClr val="0D1117"/>
-                </a:solidFill>
-                <a:latin typeface="Inter"/>
-              </a:defRPr>
-            </a:pPr>
-            <a:r>
-              <a:rPr>
-                <a:latin typeface="Inter"/>
-              </a:rPr>
-              <a:t>Both lanes reconcile</a:t>
-            </a:r>
-          </a:p>
-        </p:txBody>
-      </p:sp>
-      <p:sp>
-        <p:nvSpPr>
-          <p:cNvPr id="20" name="TextBox 19"/>
-          <p:cNvSpPr txBox="1"/>
-          <p:nvPr/>
-        </p:nvSpPr>
-        <p:spPr>
-          <a:xfrm>
-            <a:off x="4297680" y="5733288"/>
-            <a:ext cx="3108960" cy="164592"/>
-          </a:xfrm>
-          <a:prstGeom prst="rect">
-            <a:avLst/>
-          </a:prstGeom>
-          <a:noFill/>
-        </p:spPr>
-        <p:txBody>
-          <a:bodyPr wrap="none" lIns="9144" rIns="9144" tIns="9144" bIns="9144" anchor="t">
-            <a:spAutoFit/>
-          </a:bodyPr>
-          <a:lstStyle/>
-          <a:p>
-            <a:pPr algn="l">
-              <a:spcAft>
-                <a:spcPts val="0"/>
-              </a:spcAft>
-              <a:defRPr sz="650" b="1">
-                <a:solidFill>
-                  <a:srgbClr val="8A94A1"/>
-                </a:solidFill>
-                <a:latin typeface="Inter"/>
-              </a:defRPr>
-            </a:pPr>
-            <a:r>
-              <a:rPr>
-                <a:latin typeface="Inter"/>
-              </a:rPr>
-              <a:t>SCOPE REVIEWED</a:t>
-            </a:r>
-          </a:p>
-        </p:txBody>
-      </p:sp>
-      <p:sp>
-        <p:nvSpPr>
-          <p:cNvPr id="21" name="TextBox 20"/>
-          <p:cNvSpPr txBox="1"/>
-          <p:nvPr/>
-        </p:nvSpPr>
-        <p:spPr>
-          <a:xfrm>
-            <a:off x="4297680" y="5934456"/>
-            <a:ext cx="3108960" cy="201168"/>
-          </a:xfrm>
-          <a:prstGeom prst="rect">
-            <a:avLst/>
-          </a:prstGeom>
-          <a:noFill/>
-        </p:spPr>
-        <p:txBody>
-          <a:bodyPr wrap="none" lIns="9144" rIns="9144" tIns="9144" bIns="9144" anchor="t">
-            <a:spAutoFit/>
-          </a:bodyPr>
-          <a:lstStyle/>
-          <a:p>
-            <a:pPr algn="l">
-              <a:spcAft>
-                <a:spcPts val="0"/>
-              </a:spcAft>
-              <a:defRPr sz="800" b="1">
-                <a:solidFill>
-                  <a:srgbClr val="FFFFFF"/>
-                </a:solidFill>
-                <a:latin typeface="Inter"/>
-              </a:defRPr>
-            </a:pPr>
-            <a:r>
-              <a:rPr>
-                <a:latin typeface="Inter"/>
-              </a:rPr>
-              <a:t>5 of 5 · Complete</a:t>
-            </a:r>
-          </a:p>
-        </p:txBody>
-      </p:sp>
-      <p:sp>
-        <p:nvSpPr>
-          <p:cNvPr id="22" name="TextBox 21"/>
+          <p:cNvPr id="17" name="TextBox 16"/>
           <p:cNvSpPr txBox="1"/>
           <p:nvPr/>
         </p:nvSpPr>
@@ -6456,7 +6240,7 @@
       </p:sp>
       <p:sp>
         <p:nvSpPr>
-          <p:cNvPr id="23" name="TextBox 22"/>
+          <p:cNvPr id="18" name="TextBox 17"/>
           <p:cNvSpPr txBox="1"/>
           <p:nvPr/>
         </p:nvSpPr>
@@ -6498,7 +6282,7 @@
       </p:sp>
       <p:sp>
         <p:nvSpPr>
-          <p:cNvPr id="24" name="TextBox 23"/>
+          <p:cNvPr id="19" name="TextBox 18"/>
           <p:cNvSpPr txBox="1"/>
           <p:nvPr/>
         </p:nvSpPr>
@@ -6614,7 +6398,7 @@
         <p:spPr>
           <a:xfrm>
             <a:off x="640080" y="329184"/>
-            <a:ext cx="5303520" cy="182880"/>
+            <a:ext cx="9875520" cy="182880"/>
           </a:xfrm>
           <a:prstGeom prst="rect">
             <a:avLst/>
@@ -6655,48 +6439,6 @@
         </p:nvSpPr>
         <p:spPr>
           <a:xfrm>
-            <a:off x="5897880" y="310896"/>
-            <a:ext cx="4800600" cy="256032"/>
-          </a:xfrm>
-          <a:prstGeom prst="rect">
-            <a:avLst/>
-          </a:prstGeom>
-          <a:noFill/>
-        </p:spPr>
-        <p:txBody>
-          <a:bodyPr wrap="none" lIns="9144" rIns="9144" tIns="9144" bIns="9144" anchor="t">
-            <a:spAutoFit/>
-          </a:bodyPr>
-          <a:lstStyle/>
-          <a:p>
-            <a:pPr algn="r">
-              <a:spcAft>
-                <a:spcPts val="0"/>
-              </a:spcAft>
-              <a:defRPr sz="680" b="1">
-                <a:solidFill>
-                  <a:srgbClr val="4F6B00"/>
-                </a:solidFill>
-                <a:latin typeface="Inter"/>
-              </a:defRPr>
-            </a:pPr>
-            <a:r>
-              <a:rPr>
-                <a:latin typeface="Inter"/>
-              </a:rPr>
-              <a:t>Illustrative, Gradient Maintained — demo data, not the client's holdings or managers</a:t>
-            </a:r>
-          </a:p>
-        </p:txBody>
-      </p:sp>
-      <p:sp>
-        <p:nvSpPr>
-          <p:cNvPr id="5" name="TextBox 4"/>
-          <p:cNvSpPr txBox="1"/>
-          <p:nvPr/>
-        </p:nvSpPr>
-        <p:spPr>
-          <a:xfrm>
             <a:off x="640080" y="566928"/>
             <a:ext cx="10058400" cy="530352"/>
           </a:xfrm>
@@ -6733,7 +6475,7 @@
       </p:sp>
       <p:sp>
         <p:nvSpPr>
-          <p:cNvPr id="6" name="Rectangle 5"/>
+          <p:cNvPr id="5" name="Rectangle 4"/>
           <p:cNvSpPr/>
           <p:nvPr/>
         </p:nvSpPr>
@@ -6782,7 +6524,7 @@
       </p:sp>
       <p:sp>
         <p:nvSpPr>
-          <p:cNvPr id="7" name="Rectangle 6"/>
+          <p:cNvPr id="6" name="Rectangle 5"/>
           <p:cNvSpPr/>
           <p:nvPr/>
         </p:nvSpPr>
@@ -6831,7 +6573,7 @@
       </p:sp>
       <p:sp>
         <p:nvSpPr>
-          <p:cNvPr id="8" name="TextBox 7"/>
+          <p:cNvPr id="7" name="TextBox 6"/>
           <p:cNvSpPr txBox="1"/>
           <p:nvPr/>
         </p:nvSpPr>
@@ -6873,7 +6615,7 @@
       </p:sp>
       <p:sp>
         <p:nvSpPr>
-          <p:cNvPr id="9" name="TextBox 8"/>
+          <p:cNvPr id="8" name="TextBox 7"/>
           <p:cNvSpPr txBox="1"/>
           <p:nvPr/>
         </p:nvSpPr>
@@ -6915,7 +6657,7 @@
       </p:sp>
       <p:graphicFrame>
         <p:nvGraphicFramePr>
-          <p:cNvPr id="10" name="Chart 9"/>
+          <p:cNvPr id="9" name="Chart 8"/>
           <p:cNvGraphicFramePr>
             <a:graphicFrameLocks noGrp="1"/>
           </p:cNvGraphicFramePr>
@@ -6933,7 +6675,7 @@
       </p:graphicFrame>
       <p:sp>
         <p:nvSpPr>
-          <p:cNvPr id="11" name="Rectangle 10"/>
+          <p:cNvPr id="10" name="Rectangle 9"/>
           <p:cNvSpPr/>
           <p:nvPr/>
         </p:nvSpPr>
@@ -6982,7 +6724,7 @@
       </p:sp>
       <p:sp>
         <p:nvSpPr>
-          <p:cNvPr id="12" name="TextBox 11"/>
+          <p:cNvPr id="11" name="TextBox 10"/>
           <p:cNvSpPr txBox="1"/>
           <p:nvPr/>
         </p:nvSpPr>
@@ -7024,7 +6766,7 @@
       </p:sp>
       <p:graphicFrame>
         <p:nvGraphicFramePr>
-          <p:cNvPr id="13" name="Table 12"/>
+          <p:cNvPr id="12" name="Table 11"/>
           <p:cNvGraphicFramePr>
             <a:graphicFrameLocks noGrp="1"/>
           </p:cNvGraphicFramePr>
@@ -7330,7 +7072,7 @@
       </p:graphicFrame>
       <p:sp>
         <p:nvSpPr>
-          <p:cNvPr id="14" name="Rectangle 13"/>
+          <p:cNvPr id="13" name="Rectangle 12"/>
           <p:cNvSpPr/>
           <p:nvPr/>
         </p:nvSpPr>
@@ -7379,7 +7121,7 @@
       </p:sp>
       <p:sp>
         <p:nvSpPr>
-          <p:cNvPr id="15" name="TextBox 14"/>
+          <p:cNvPr id="14" name="TextBox 13"/>
           <p:cNvSpPr txBox="1"/>
           <p:nvPr/>
         </p:nvSpPr>
@@ -7421,7 +7163,7 @@
       </p:sp>
       <p:sp>
         <p:nvSpPr>
-          <p:cNvPr id="16" name="TextBox 15"/>
+          <p:cNvPr id="15" name="TextBox 14"/>
           <p:cNvSpPr txBox="1"/>
           <p:nvPr/>
         </p:nvSpPr>
@@ -7463,7 +7205,7 @@
       </p:sp>
       <p:sp>
         <p:nvSpPr>
-          <p:cNvPr id="17" name="TextBox 16"/>
+          <p:cNvPr id="16" name="TextBox 15"/>
           <p:cNvSpPr txBox="1"/>
           <p:nvPr/>
         </p:nvSpPr>
@@ -7579,7 +7321,7 @@
         <p:spPr>
           <a:xfrm>
             <a:off x="640080" y="329184"/>
-            <a:ext cx="5303520" cy="182880"/>
+            <a:ext cx="9875520" cy="182880"/>
           </a:xfrm>
           <a:prstGeom prst="rect">
             <a:avLst/>
@@ -7620,48 +7362,6 @@
         </p:nvSpPr>
         <p:spPr>
           <a:xfrm>
-            <a:off x="5897880" y="310896"/>
-            <a:ext cx="4800600" cy="256032"/>
-          </a:xfrm>
-          <a:prstGeom prst="rect">
-            <a:avLst/>
-          </a:prstGeom>
-          <a:noFill/>
-        </p:spPr>
-        <p:txBody>
-          <a:bodyPr wrap="none" lIns="9144" rIns="9144" tIns="9144" bIns="9144" anchor="t">
-            <a:spAutoFit/>
-          </a:bodyPr>
-          <a:lstStyle/>
-          <a:p>
-            <a:pPr algn="r">
-              <a:spcAft>
-                <a:spcPts val="0"/>
-              </a:spcAft>
-              <a:defRPr sz="680" b="1">
-                <a:solidFill>
-                  <a:srgbClr val="4F6B00"/>
-                </a:solidFill>
-                <a:latin typeface="Inter"/>
-              </a:defRPr>
-            </a:pPr>
-            <a:r>
-              <a:rPr>
-                <a:latin typeface="Inter"/>
-              </a:rPr>
-              <a:t>Illustrative, Gradient Maintained — demo data, not the client's holdings or managers</a:t>
-            </a:r>
-          </a:p>
-        </p:txBody>
-      </p:sp>
-      <p:sp>
-        <p:nvSpPr>
-          <p:cNvPr id="5" name="TextBox 4"/>
-          <p:cNvSpPr txBox="1"/>
-          <p:nvPr/>
-        </p:nvSpPr>
-        <p:spPr>
-          <a:xfrm>
             <a:off x="640080" y="566928"/>
             <a:ext cx="10058400" cy="530352"/>
           </a:xfrm>
@@ -7698,7 +7398,7 @@
       </p:sp>
       <p:sp>
         <p:nvSpPr>
-          <p:cNvPr id="6" name="Rectangle 5"/>
+          <p:cNvPr id="5" name="Rectangle 4"/>
           <p:cNvSpPr/>
           <p:nvPr/>
         </p:nvSpPr>
@@ -7747,7 +7447,7 @@
       </p:sp>
       <p:sp>
         <p:nvSpPr>
-          <p:cNvPr id="7" name="Rectangle 6"/>
+          <p:cNvPr id="6" name="Rectangle 5"/>
           <p:cNvSpPr/>
           <p:nvPr/>
         </p:nvSpPr>
@@ -7796,7 +7496,7 @@
       </p:sp>
       <p:sp>
         <p:nvSpPr>
-          <p:cNvPr id="8" name="TextBox 7"/>
+          <p:cNvPr id="7" name="TextBox 6"/>
           <p:cNvSpPr txBox="1"/>
           <p:nvPr/>
         </p:nvSpPr>
@@ -7838,7 +7538,7 @@
       </p:sp>
       <p:sp>
         <p:nvSpPr>
-          <p:cNvPr id="9" name="TextBox 8"/>
+          <p:cNvPr id="8" name="TextBox 7"/>
           <p:cNvSpPr txBox="1"/>
           <p:nvPr/>
         </p:nvSpPr>
@@ -7880,7 +7580,7 @@
       </p:sp>
       <p:graphicFrame>
         <p:nvGraphicFramePr>
-          <p:cNvPr id="10" name="Chart 9"/>
+          <p:cNvPr id="9" name="Chart 8"/>
           <p:cNvGraphicFramePr>
             <a:graphicFrameLocks noGrp="1"/>
           </p:cNvGraphicFramePr>
@@ -7898,7 +7598,7 @@
       </p:graphicFrame>
       <p:sp>
         <p:nvSpPr>
-          <p:cNvPr id="11" name="Rectangle 10"/>
+          <p:cNvPr id="10" name="Rectangle 9"/>
           <p:cNvSpPr/>
           <p:nvPr/>
         </p:nvSpPr>
@@ -7947,7 +7647,7 @@
       </p:sp>
       <p:sp>
         <p:nvSpPr>
-          <p:cNvPr id="12" name="TextBox 11"/>
+          <p:cNvPr id="11" name="TextBox 10"/>
           <p:cNvSpPr txBox="1"/>
           <p:nvPr/>
         </p:nvSpPr>
@@ -7989,7 +7689,7 @@
       </p:sp>
       <p:sp>
         <p:nvSpPr>
-          <p:cNvPr id="13" name="TextBox 12"/>
+          <p:cNvPr id="12" name="TextBox 11"/>
           <p:cNvSpPr txBox="1"/>
           <p:nvPr/>
         </p:nvSpPr>
@@ -8031,7 +7731,7 @@
       </p:sp>
       <p:sp>
         <p:nvSpPr>
-          <p:cNvPr id="14" name="TextBox 13"/>
+          <p:cNvPr id="13" name="TextBox 12"/>
           <p:cNvSpPr txBox="1"/>
           <p:nvPr/>
         </p:nvSpPr>
@@ -8147,7 +7847,7 @@
         <p:spPr>
           <a:xfrm>
             <a:off x="640080" y="329184"/>
-            <a:ext cx="5303520" cy="182880"/>
+            <a:ext cx="9875520" cy="182880"/>
           </a:xfrm>
           <a:prstGeom prst="rect">
             <a:avLst/>
@@ -8188,48 +7888,6 @@
         </p:nvSpPr>
         <p:spPr>
           <a:xfrm>
-            <a:off x="5897880" y="310896"/>
-            <a:ext cx="4800600" cy="256032"/>
-          </a:xfrm>
-          <a:prstGeom prst="rect">
-            <a:avLst/>
-          </a:prstGeom>
-          <a:noFill/>
-        </p:spPr>
-        <p:txBody>
-          <a:bodyPr wrap="none" lIns="9144" rIns="9144" tIns="9144" bIns="9144" anchor="t">
-            <a:spAutoFit/>
-          </a:bodyPr>
-          <a:lstStyle/>
-          <a:p>
-            <a:pPr algn="r">
-              <a:spcAft>
-                <a:spcPts val="0"/>
-              </a:spcAft>
-              <a:defRPr sz="680" b="1">
-                <a:solidFill>
-                  <a:srgbClr val="4F6B00"/>
-                </a:solidFill>
-                <a:latin typeface="Inter"/>
-              </a:defRPr>
-            </a:pPr>
-            <a:r>
-              <a:rPr>
-                <a:latin typeface="Inter"/>
-              </a:rPr>
-              <a:t>Illustrative, Gradient Maintained — demo data, not the client's holdings or managers</a:t>
-            </a:r>
-          </a:p>
-        </p:txBody>
-      </p:sp>
-      <p:sp>
-        <p:nvSpPr>
-          <p:cNvPr id="5" name="TextBox 4"/>
-          <p:cNvSpPr txBox="1"/>
-          <p:nvPr/>
-        </p:nvSpPr>
-        <p:spPr>
-          <a:xfrm>
             <a:off x="640080" y="566928"/>
             <a:ext cx="10058400" cy="530352"/>
           </a:xfrm>
@@ -8266,7 +7924,7 @@
       </p:sp>
       <p:sp>
         <p:nvSpPr>
-          <p:cNvPr id="6" name="Rectangle 5"/>
+          <p:cNvPr id="5" name="Rectangle 4"/>
           <p:cNvSpPr/>
           <p:nvPr/>
         </p:nvSpPr>
@@ -8315,7 +7973,7 @@
       </p:sp>
       <p:sp>
         <p:nvSpPr>
-          <p:cNvPr id="7" name="Rectangle 6"/>
+          <p:cNvPr id="6" name="Rectangle 5"/>
           <p:cNvSpPr/>
           <p:nvPr/>
         </p:nvSpPr>
@@ -8364,7 +8022,7 @@
       </p:sp>
       <p:sp>
         <p:nvSpPr>
-          <p:cNvPr id="8" name="TextBox 7"/>
+          <p:cNvPr id="7" name="TextBox 6"/>
           <p:cNvSpPr txBox="1"/>
           <p:nvPr/>
         </p:nvSpPr>
@@ -8406,7 +8064,7 @@
       </p:sp>
       <p:sp>
         <p:nvSpPr>
-          <p:cNvPr id="9" name="TextBox 8"/>
+          <p:cNvPr id="8" name="TextBox 7"/>
           <p:cNvSpPr txBox="1"/>
           <p:nvPr/>
         </p:nvSpPr>
@@ -8448,7 +8106,7 @@
       </p:sp>
       <p:graphicFrame>
         <p:nvGraphicFramePr>
-          <p:cNvPr id="10" name="Chart 9"/>
+          <p:cNvPr id="9" name="Chart 8"/>
           <p:cNvGraphicFramePr>
             <a:graphicFrameLocks noGrp="1"/>
           </p:cNvGraphicFramePr>
@@ -8466,7 +8124,7 @@
       </p:graphicFrame>
       <p:sp>
         <p:nvSpPr>
-          <p:cNvPr id="11" name="Rectangle 10"/>
+          <p:cNvPr id="10" name="Rectangle 9"/>
           <p:cNvSpPr/>
           <p:nvPr/>
         </p:nvSpPr>
@@ -8515,7 +8173,7 @@
       </p:sp>
       <p:sp>
         <p:nvSpPr>
-          <p:cNvPr id="12" name="TextBox 11"/>
+          <p:cNvPr id="11" name="TextBox 10"/>
           <p:cNvSpPr txBox="1"/>
           <p:nvPr/>
         </p:nvSpPr>
@@ -8557,7 +8215,7 @@
       </p:sp>
       <p:sp>
         <p:nvSpPr>
-          <p:cNvPr id="13" name="TextBox 12"/>
+          <p:cNvPr id="12" name="TextBox 11"/>
           <p:cNvSpPr txBox="1"/>
           <p:nvPr/>
         </p:nvSpPr>
@@ -8599,7 +8257,7 @@
       </p:sp>
       <p:sp>
         <p:nvSpPr>
-          <p:cNvPr id="14" name="TextBox 13"/>
+          <p:cNvPr id="13" name="TextBox 12"/>
           <p:cNvSpPr txBox="1"/>
           <p:nvPr/>
         </p:nvSpPr>
@@ -8715,7 +8373,7 @@
         <p:spPr>
           <a:xfrm>
             <a:off x="640080" y="329184"/>
-            <a:ext cx="5303520" cy="182880"/>
+            <a:ext cx="9875520" cy="182880"/>
           </a:xfrm>
           <a:prstGeom prst="rect">
             <a:avLst/>
@@ -8756,48 +8414,6 @@
         </p:nvSpPr>
         <p:spPr>
           <a:xfrm>
-            <a:off x="5897880" y="310896"/>
-            <a:ext cx="4800600" cy="256032"/>
-          </a:xfrm>
-          <a:prstGeom prst="rect">
-            <a:avLst/>
-          </a:prstGeom>
-          <a:noFill/>
-        </p:spPr>
-        <p:txBody>
-          <a:bodyPr wrap="none" lIns="9144" rIns="9144" tIns="9144" bIns="9144" anchor="t">
-            <a:spAutoFit/>
-          </a:bodyPr>
-          <a:lstStyle/>
-          <a:p>
-            <a:pPr algn="r">
-              <a:spcAft>
-                <a:spcPts val="0"/>
-              </a:spcAft>
-              <a:defRPr sz="680" b="1">
-                <a:solidFill>
-                  <a:srgbClr val="4F6B00"/>
-                </a:solidFill>
-                <a:latin typeface="Inter"/>
-              </a:defRPr>
-            </a:pPr>
-            <a:r>
-              <a:rPr>
-                <a:latin typeface="Inter"/>
-              </a:rPr>
-              <a:t>Illustrative, Gradient Maintained — demo data, not the client's holdings or managers</a:t>
-            </a:r>
-          </a:p>
-        </p:txBody>
-      </p:sp>
-      <p:sp>
-        <p:nvSpPr>
-          <p:cNvPr id="5" name="TextBox 4"/>
-          <p:cNvSpPr txBox="1"/>
-          <p:nvPr/>
-        </p:nvSpPr>
-        <p:spPr>
-          <a:xfrm>
             <a:off x="640080" y="566928"/>
             <a:ext cx="10058400" cy="530352"/>
           </a:xfrm>
@@ -8834,7 +8450,7 @@
       </p:sp>
       <p:sp>
         <p:nvSpPr>
-          <p:cNvPr id="6" name="Rectangle 5"/>
+          <p:cNvPr id="5" name="Rectangle 4"/>
           <p:cNvSpPr/>
           <p:nvPr/>
         </p:nvSpPr>
@@ -8883,7 +8499,7 @@
       </p:sp>
       <p:sp>
         <p:nvSpPr>
-          <p:cNvPr id="7" name="Rectangle 6"/>
+          <p:cNvPr id="6" name="Rectangle 5"/>
           <p:cNvSpPr/>
           <p:nvPr/>
         </p:nvSpPr>
@@ -8932,7 +8548,7 @@
       </p:sp>
       <p:sp>
         <p:nvSpPr>
-          <p:cNvPr id="8" name="TextBox 7"/>
+          <p:cNvPr id="7" name="TextBox 6"/>
           <p:cNvSpPr txBox="1"/>
           <p:nvPr/>
         </p:nvSpPr>
@@ -8974,7 +8590,7 @@
       </p:sp>
       <p:sp>
         <p:nvSpPr>
-          <p:cNvPr id="9" name="TextBox 8"/>
+          <p:cNvPr id="8" name="TextBox 7"/>
           <p:cNvSpPr txBox="1"/>
           <p:nvPr/>
         </p:nvSpPr>
@@ -9016,7 +8632,7 @@
       </p:sp>
       <p:graphicFrame>
         <p:nvGraphicFramePr>
-          <p:cNvPr id="10" name="Table 9"/>
+          <p:cNvPr id="9" name="Table 8"/>
           <p:cNvGraphicFramePr>
             <a:graphicFrameLocks noGrp="1"/>
           </p:cNvGraphicFramePr>
@@ -9587,7 +9203,7 @@
       </p:graphicFrame>
       <p:sp>
         <p:nvSpPr>
-          <p:cNvPr id="11" name="Rectangle 10"/>
+          <p:cNvPr id="10" name="Rectangle 9"/>
           <p:cNvSpPr/>
           <p:nvPr/>
         </p:nvSpPr>
@@ -9636,7 +9252,7 @@
       </p:sp>
       <p:sp>
         <p:nvSpPr>
-          <p:cNvPr id="12" name="TextBox 11"/>
+          <p:cNvPr id="11" name="TextBox 10"/>
           <p:cNvSpPr txBox="1"/>
           <p:nvPr/>
         </p:nvSpPr>
@@ -9678,7 +9294,7 @@
       </p:sp>
       <p:sp>
         <p:nvSpPr>
-          <p:cNvPr id="13" name="TextBox 12"/>
+          <p:cNvPr id="12" name="TextBox 11"/>
           <p:cNvSpPr txBox="1"/>
           <p:nvPr/>
         </p:nvSpPr>
@@ -9720,7 +9336,7 @@
       </p:sp>
       <p:sp>
         <p:nvSpPr>
-          <p:cNvPr id="14" name="TextBox 13"/>
+          <p:cNvPr id="13" name="TextBox 12"/>
           <p:cNvSpPr txBox="1"/>
           <p:nvPr/>
         </p:nvSpPr>
@@ -9836,7 +9452,7 @@
         <p:spPr>
           <a:xfrm>
             <a:off x="640080" y="329184"/>
-            <a:ext cx="5303520" cy="182880"/>
+            <a:ext cx="9875520" cy="182880"/>
           </a:xfrm>
           <a:prstGeom prst="rect">
             <a:avLst/>
@@ -9877,48 +9493,6 @@
         </p:nvSpPr>
         <p:spPr>
           <a:xfrm>
-            <a:off x="5897880" y="310896"/>
-            <a:ext cx="4800600" cy="256032"/>
-          </a:xfrm>
-          <a:prstGeom prst="rect">
-            <a:avLst/>
-          </a:prstGeom>
-          <a:noFill/>
-        </p:spPr>
-        <p:txBody>
-          <a:bodyPr wrap="none" lIns="9144" rIns="9144" tIns="9144" bIns="9144" anchor="t">
-            <a:spAutoFit/>
-          </a:bodyPr>
-          <a:lstStyle/>
-          <a:p>
-            <a:pPr algn="r">
-              <a:spcAft>
-                <a:spcPts val="0"/>
-              </a:spcAft>
-              <a:defRPr sz="680" b="1">
-                <a:solidFill>
-                  <a:srgbClr val="4F6B00"/>
-                </a:solidFill>
-                <a:latin typeface="Inter"/>
-              </a:defRPr>
-            </a:pPr>
-            <a:r>
-              <a:rPr>
-                <a:latin typeface="Inter"/>
-              </a:rPr>
-              <a:t>Illustrative, Gradient Maintained — demo data, not the client's holdings or managers</a:t>
-            </a:r>
-          </a:p>
-        </p:txBody>
-      </p:sp>
-      <p:sp>
-        <p:nvSpPr>
-          <p:cNvPr id="5" name="TextBox 4"/>
-          <p:cNvSpPr txBox="1"/>
-          <p:nvPr/>
-        </p:nvSpPr>
-        <p:spPr>
-          <a:xfrm>
             <a:off x="640080" y="566928"/>
             <a:ext cx="10058400" cy="530352"/>
           </a:xfrm>
@@ -9955,7 +9529,7 @@
       </p:sp>
       <p:sp>
         <p:nvSpPr>
-          <p:cNvPr id="6" name="Rectangle 5"/>
+          <p:cNvPr id="5" name="Rectangle 4"/>
           <p:cNvSpPr/>
           <p:nvPr/>
         </p:nvSpPr>
@@ -10004,7 +9578,7 @@
       </p:sp>
       <p:sp>
         <p:nvSpPr>
-          <p:cNvPr id="7" name="Rectangle 6"/>
+          <p:cNvPr id="6" name="Rectangle 5"/>
           <p:cNvSpPr/>
           <p:nvPr/>
         </p:nvSpPr>
@@ -10053,7 +9627,7 @@
       </p:sp>
       <p:sp>
         <p:nvSpPr>
-          <p:cNvPr id="8" name="TextBox 7"/>
+          <p:cNvPr id="7" name="TextBox 6"/>
           <p:cNvSpPr txBox="1"/>
           <p:nvPr/>
         </p:nvSpPr>
@@ -10095,7 +9669,7 @@
       </p:sp>
       <p:sp>
         <p:nvSpPr>
-          <p:cNvPr id="9" name="TextBox 8"/>
+          <p:cNvPr id="8" name="TextBox 7"/>
           <p:cNvSpPr txBox="1"/>
           <p:nvPr/>
         </p:nvSpPr>
@@ -10137,7 +9711,7 @@
       </p:sp>
       <p:graphicFrame>
         <p:nvGraphicFramePr>
-          <p:cNvPr id="10" name="Chart 9"/>
+          <p:cNvPr id="9" name="Chart 8"/>
           <p:cNvGraphicFramePr>
             <a:graphicFrameLocks noGrp="1"/>
           </p:cNvGraphicFramePr>
@@ -10155,7 +9729,7 @@
       </p:graphicFrame>
       <p:sp>
         <p:nvSpPr>
-          <p:cNvPr id="11" name="Rectangle 10"/>
+          <p:cNvPr id="10" name="Rectangle 9"/>
           <p:cNvSpPr/>
           <p:nvPr/>
         </p:nvSpPr>
@@ -10204,7 +9778,7 @@
       </p:sp>
       <p:sp>
         <p:nvSpPr>
-          <p:cNvPr id="12" name="TextBox 11"/>
+          <p:cNvPr id="11" name="TextBox 10"/>
           <p:cNvSpPr txBox="1"/>
           <p:nvPr/>
         </p:nvSpPr>
@@ -10246,7 +9820,7 @@
       </p:sp>
       <p:graphicFrame>
         <p:nvGraphicFramePr>
-          <p:cNvPr id="13" name="Chart 12"/>
+          <p:cNvPr id="12" name="Chart 11"/>
           <p:cNvGraphicFramePr>
             <a:graphicFrameLocks noGrp="1"/>
           </p:cNvGraphicFramePr>
@@ -10264,7 +9838,7 @@
       </p:graphicFrame>
       <p:sp>
         <p:nvSpPr>
-          <p:cNvPr id="14" name="Rectangle 13"/>
+          <p:cNvPr id="13" name="Rectangle 12"/>
           <p:cNvSpPr/>
           <p:nvPr/>
         </p:nvSpPr>
@@ -10313,7 +9887,7 @@
       </p:sp>
       <p:sp>
         <p:nvSpPr>
-          <p:cNvPr id="15" name="TextBox 14"/>
+          <p:cNvPr id="14" name="TextBox 13"/>
           <p:cNvSpPr txBox="1"/>
           <p:nvPr/>
         </p:nvSpPr>
@@ -10355,7 +9929,7 @@
       </p:sp>
       <p:sp>
         <p:nvSpPr>
-          <p:cNvPr id="16" name="TextBox 15"/>
+          <p:cNvPr id="15" name="TextBox 14"/>
           <p:cNvSpPr txBox="1"/>
           <p:nvPr/>
         </p:nvSpPr>
@@ -10397,7 +9971,7 @@
       </p:sp>
       <p:sp>
         <p:nvSpPr>
-          <p:cNvPr id="17" name="TextBox 16"/>
+          <p:cNvPr id="16" name="TextBox 15"/>
           <p:cNvSpPr txBox="1"/>
           <p:nvPr/>
         </p:nvSpPr>
@@ -10513,7 +10087,7 @@
         <p:spPr>
           <a:xfrm>
             <a:off x="640080" y="329184"/>
-            <a:ext cx="5303520" cy="182880"/>
+            <a:ext cx="9875520" cy="182880"/>
           </a:xfrm>
           <a:prstGeom prst="rect">
             <a:avLst/>
@@ -10554,48 +10128,6 @@
         </p:nvSpPr>
         <p:spPr>
           <a:xfrm>
-            <a:off x="5897880" y="310896"/>
-            <a:ext cx="4800600" cy="256032"/>
-          </a:xfrm>
-          <a:prstGeom prst="rect">
-            <a:avLst/>
-          </a:prstGeom>
-          <a:noFill/>
-        </p:spPr>
-        <p:txBody>
-          <a:bodyPr wrap="none" lIns="9144" rIns="9144" tIns="9144" bIns="9144" anchor="t">
-            <a:spAutoFit/>
-          </a:bodyPr>
-          <a:lstStyle/>
-          <a:p>
-            <a:pPr algn="r">
-              <a:spcAft>
-                <a:spcPts val="0"/>
-              </a:spcAft>
-              <a:defRPr sz="680" b="1">
-                <a:solidFill>
-                  <a:srgbClr val="4F6B00"/>
-                </a:solidFill>
-                <a:latin typeface="Inter"/>
-              </a:defRPr>
-            </a:pPr>
-            <a:r>
-              <a:rPr>
-                <a:latin typeface="Inter"/>
-              </a:rPr>
-              <a:t>Illustrative, Gradient Maintained — demo data, not the client's holdings or managers</a:t>
-            </a:r>
-          </a:p>
-        </p:txBody>
-      </p:sp>
-      <p:sp>
-        <p:nvSpPr>
-          <p:cNvPr id="5" name="TextBox 4"/>
-          <p:cNvSpPr txBox="1"/>
-          <p:nvPr/>
-        </p:nvSpPr>
-        <p:spPr>
-          <a:xfrm>
             <a:off x="640080" y="566928"/>
             <a:ext cx="10058400" cy="530352"/>
           </a:xfrm>
@@ -10632,7 +10164,7 @@
       </p:sp>
       <p:sp>
         <p:nvSpPr>
-          <p:cNvPr id="6" name="Rectangle 5"/>
+          <p:cNvPr id="5" name="Rectangle 4"/>
           <p:cNvSpPr/>
           <p:nvPr/>
         </p:nvSpPr>
@@ -10681,7 +10213,7 @@
       </p:sp>
       <p:sp>
         <p:nvSpPr>
-          <p:cNvPr id="7" name="Rectangle 6"/>
+          <p:cNvPr id="6" name="Rectangle 5"/>
           <p:cNvSpPr/>
           <p:nvPr/>
         </p:nvSpPr>
@@ -10730,7 +10262,7 @@
       </p:sp>
       <p:sp>
         <p:nvSpPr>
-          <p:cNvPr id="8" name="TextBox 7"/>
+          <p:cNvPr id="7" name="TextBox 6"/>
           <p:cNvSpPr txBox="1"/>
           <p:nvPr/>
         </p:nvSpPr>
@@ -10772,7 +10304,7 @@
       </p:sp>
       <p:sp>
         <p:nvSpPr>
-          <p:cNvPr id="9" name="TextBox 8"/>
+          <p:cNvPr id="8" name="TextBox 7"/>
           <p:cNvSpPr txBox="1"/>
           <p:nvPr/>
         </p:nvSpPr>
@@ -10814,7 +10346,7 @@
       </p:sp>
       <p:graphicFrame>
         <p:nvGraphicFramePr>
-          <p:cNvPr id="10" name="Chart 9"/>
+          <p:cNvPr id="9" name="Chart 8"/>
           <p:cNvGraphicFramePr>
             <a:graphicFrameLocks noGrp="1"/>
           </p:cNvGraphicFramePr>
@@ -10832,7 +10364,7 @@
       </p:graphicFrame>
       <p:sp>
         <p:nvSpPr>
-          <p:cNvPr id="11" name="Rectangle 10"/>
+          <p:cNvPr id="10" name="Rectangle 9"/>
           <p:cNvSpPr/>
           <p:nvPr/>
         </p:nvSpPr>
@@ -10881,7 +10413,7 @@
       </p:sp>
       <p:sp>
         <p:nvSpPr>
-          <p:cNvPr id="12" name="TextBox 11"/>
+          <p:cNvPr id="11" name="TextBox 10"/>
           <p:cNvSpPr txBox="1"/>
           <p:nvPr/>
         </p:nvSpPr>
@@ -10923,7 +10455,7 @@
       </p:sp>
       <p:sp>
         <p:nvSpPr>
-          <p:cNvPr id="13" name="TextBox 12"/>
+          <p:cNvPr id="12" name="TextBox 11"/>
           <p:cNvSpPr txBox="1"/>
           <p:nvPr/>
         </p:nvSpPr>
@@ -10965,7 +10497,7 @@
       </p:sp>
       <p:sp>
         <p:nvSpPr>
-          <p:cNvPr id="14" name="TextBox 13"/>
+          <p:cNvPr id="13" name="TextBox 12"/>
           <p:cNvSpPr txBox="1"/>
           <p:nvPr/>
         </p:nvSpPr>
@@ -11081,7 +10613,7 @@
         <p:spPr>
           <a:xfrm>
             <a:off x="640080" y="329184"/>
-            <a:ext cx="5303520" cy="182880"/>
+            <a:ext cx="9875520" cy="182880"/>
           </a:xfrm>
           <a:prstGeom prst="rect">
             <a:avLst/>
@@ -11122,48 +10654,6 @@
         </p:nvSpPr>
         <p:spPr>
           <a:xfrm>
-            <a:off x="5897880" y="310896"/>
-            <a:ext cx="4800600" cy="256032"/>
-          </a:xfrm>
-          <a:prstGeom prst="rect">
-            <a:avLst/>
-          </a:prstGeom>
-          <a:noFill/>
-        </p:spPr>
-        <p:txBody>
-          <a:bodyPr wrap="none" lIns="9144" rIns="9144" tIns="9144" bIns="9144" anchor="t">
-            <a:spAutoFit/>
-          </a:bodyPr>
-          <a:lstStyle/>
-          <a:p>
-            <a:pPr algn="r">
-              <a:spcAft>
-                <a:spcPts val="0"/>
-              </a:spcAft>
-              <a:defRPr sz="680" b="1">
-                <a:solidFill>
-                  <a:srgbClr val="4F6B00"/>
-                </a:solidFill>
-                <a:latin typeface="Inter"/>
-              </a:defRPr>
-            </a:pPr>
-            <a:r>
-              <a:rPr>
-                <a:latin typeface="Inter"/>
-              </a:rPr>
-              <a:t>Illustrative, Gradient Maintained — demo data, not the client's holdings or managers</a:t>
-            </a:r>
-          </a:p>
-        </p:txBody>
-      </p:sp>
-      <p:sp>
-        <p:nvSpPr>
-          <p:cNvPr id="5" name="TextBox 4"/>
-          <p:cNvSpPr txBox="1"/>
-          <p:nvPr/>
-        </p:nvSpPr>
-        <p:spPr>
-          <a:xfrm>
             <a:off x="640080" y="566928"/>
             <a:ext cx="10058400" cy="530352"/>
           </a:xfrm>
@@ -11200,7 +10690,7 @@
       </p:sp>
       <p:sp>
         <p:nvSpPr>
-          <p:cNvPr id="6" name="Rectangle 5"/>
+          <p:cNvPr id="5" name="Rectangle 4"/>
           <p:cNvSpPr/>
           <p:nvPr/>
         </p:nvSpPr>
@@ -11249,7 +10739,7 @@
       </p:sp>
       <p:sp>
         <p:nvSpPr>
-          <p:cNvPr id="7" name="Rectangle 6"/>
+          <p:cNvPr id="6" name="Rectangle 5"/>
           <p:cNvSpPr/>
           <p:nvPr/>
         </p:nvSpPr>
@@ -11298,7 +10788,7 @@
       </p:sp>
       <p:sp>
         <p:nvSpPr>
-          <p:cNvPr id="8" name="TextBox 7"/>
+          <p:cNvPr id="7" name="TextBox 6"/>
           <p:cNvSpPr txBox="1"/>
           <p:nvPr/>
         </p:nvSpPr>
@@ -11340,7 +10830,7 @@
       </p:sp>
       <p:sp>
         <p:nvSpPr>
-          <p:cNvPr id="9" name="TextBox 8"/>
+          <p:cNvPr id="8" name="TextBox 7"/>
           <p:cNvSpPr txBox="1"/>
           <p:nvPr/>
         </p:nvSpPr>
@@ -11382,7 +10872,7 @@
       </p:sp>
       <p:graphicFrame>
         <p:nvGraphicFramePr>
-          <p:cNvPr id="10" name="Table 9"/>
+          <p:cNvPr id="9" name="Table 8"/>
           <p:cNvGraphicFramePr>
             <a:graphicFrameLocks noGrp="1"/>
           </p:cNvGraphicFramePr>
@@ -11824,7 +11314,7 @@
       </p:graphicFrame>
       <p:sp>
         <p:nvSpPr>
-          <p:cNvPr id="11" name="TextBox 10"/>
+          <p:cNvPr id="10" name="TextBox 9"/>
           <p:cNvSpPr txBox="1"/>
           <p:nvPr/>
         </p:nvSpPr>
@@ -11866,7 +11356,7 @@
       </p:sp>
       <p:graphicFrame>
         <p:nvGraphicFramePr>
-          <p:cNvPr id="12" name="Table 11"/>
+          <p:cNvPr id="11" name="Table 10"/>
           <p:cNvGraphicFramePr>
             <a:graphicFrameLocks noGrp="1"/>
           </p:cNvGraphicFramePr>
@@ -12443,7 +11933,7 @@
       </p:graphicFrame>
       <p:sp>
         <p:nvSpPr>
-          <p:cNvPr id="13" name="TextBox 12"/>
+          <p:cNvPr id="12" name="TextBox 11"/>
           <p:cNvSpPr txBox="1"/>
           <p:nvPr/>
         </p:nvSpPr>
@@ -12485,7 +11975,7 @@
       </p:sp>
       <p:sp>
         <p:nvSpPr>
-          <p:cNvPr id="14" name="Rectangle 13"/>
+          <p:cNvPr id="13" name="Rectangle 12"/>
           <p:cNvSpPr/>
           <p:nvPr/>
         </p:nvSpPr>
@@ -12534,7 +12024,7 @@
       </p:sp>
       <p:sp>
         <p:nvSpPr>
-          <p:cNvPr id="15" name="Rectangle 14"/>
+          <p:cNvPr id="14" name="Rectangle 13"/>
           <p:cNvSpPr/>
           <p:nvPr/>
         </p:nvSpPr>
@@ -12583,7 +12073,7 @@
       </p:sp>
       <p:sp>
         <p:nvSpPr>
-          <p:cNvPr id="16" name="TextBox 15"/>
+          <p:cNvPr id="15" name="TextBox 14"/>
           <p:cNvSpPr txBox="1"/>
           <p:nvPr/>
         </p:nvSpPr>
@@ -12625,7 +12115,7 @@
       </p:sp>
       <p:sp>
         <p:nvSpPr>
-          <p:cNvPr id="17" name="TextBox 16"/>
+          <p:cNvPr id="16" name="TextBox 15"/>
           <p:cNvSpPr txBox="1"/>
           <p:nvPr/>
         </p:nvSpPr>
@@ -12667,7 +12157,7 @@
       </p:sp>
       <p:sp>
         <p:nvSpPr>
-          <p:cNvPr id="18" name="Rectangle 17"/>
+          <p:cNvPr id="17" name="Rectangle 16"/>
           <p:cNvSpPr/>
           <p:nvPr/>
         </p:nvSpPr>
@@ -12716,7 +12206,7 @@
       </p:sp>
       <p:sp>
         <p:nvSpPr>
-          <p:cNvPr id="19" name="TextBox 18"/>
+          <p:cNvPr id="18" name="TextBox 17"/>
           <p:cNvSpPr txBox="1"/>
           <p:nvPr/>
         </p:nvSpPr>
@@ -12758,7 +12248,7 @@
       </p:sp>
       <p:sp>
         <p:nvSpPr>
-          <p:cNvPr id="20" name="TextBox 19"/>
+          <p:cNvPr id="19" name="TextBox 18"/>
           <p:cNvSpPr txBox="1"/>
           <p:nvPr/>
         </p:nvSpPr>
@@ -12800,7 +12290,7 @@
       </p:sp>
       <p:sp>
         <p:nvSpPr>
-          <p:cNvPr id="21" name="TextBox 20"/>
+          <p:cNvPr id="20" name="TextBox 19"/>
           <p:cNvSpPr txBox="1"/>
           <p:nvPr/>
         </p:nvSpPr>
@@ -12916,7 +12406,7 @@
         <p:spPr>
           <a:xfrm>
             <a:off x="640080" y="329184"/>
-            <a:ext cx="5303520" cy="182880"/>
+            <a:ext cx="9875520" cy="182880"/>
           </a:xfrm>
           <a:prstGeom prst="rect">
             <a:avLst/>
@@ -12957,48 +12447,6 @@
         </p:nvSpPr>
         <p:spPr>
           <a:xfrm>
-            <a:off x="5897880" y="310896"/>
-            <a:ext cx="4800600" cy="256032"/>
-          </a:xfrm>
-          <a:prstGeom prst="rect">
-            <a:avLst/>
-          </a:prstGeom>
-          <a:noFill/>
-        </p:spPr>
-        <p:txBody>
-          <a:bodyPr wrap="none" lIns="9144" rIns="9144" tIns="9144" bIns="9144" anchor="t">
-            <a:spAutoFit/>
-          </a:bodyPr>
-          <a:lstStyle/>
-          <a:p>
-            <a:pPr algn="r">
-              <a:spcAft>
-                <a:spcPts val="0"/>
-              </a:spcAft>
-              <a:defRPr sz="680" b="1">
-                <a:solidFill>
-                  <a:srgbClr val="4F6B00"/>
-                </a:solidFill>
-                <a:latin typeface="Inter"/>
-              </a:defRPr>
-            </a:pPr>
-            <a:r>
-              <a:rPr>
-                <a:latin typeface="Inter"/>
-              </a:rPr>
-              <a:t>Illustrative, Gradient Maintained — demo data, not the client's holdings or managers</a:t>
-            </a:r>
-          </a:p>
-        </p:txBody>
-      </p:sp>
-      <p:sp>
-        <p:nvSpPr>
-          <p:cNvPr id="5" name="TextBox 4"/>
-          <p:cNvSpPr txBox="1"/>
-          <p:nvPr/>
-        </p:nvSpPr>
-        <p:spPr>
-          <a:xfrm>
             <a:off x="640080" y="566928"/>
             <a:ext cx="10058400" cy="530352"/>
           </a:xfrm>
@@ -13035,7 +12483,7 @@
       </p:sp>
       <p:sp>
         <p:nvSpPr>
-          <p:cNvPr id="6" name="Rectangle 5"/>
+          <p:cNvPr id="5" name="Rectangle 4"/>
           <p:cNvSpPr/>
           <p:nvPr/>
         </p:nvSpPr>
@@ -13084,7 +12532,7 @@
       </p:sp>
       <p:sp>
         <p:nvSpPr>
-          <p:cNvPr id="7" name="Rectangle 6"/>
+          <p:cNvPr id="6" name="Rectangle 5"/>
           <p:cNvSpPr/>
           <p:nvPr/>
         </p:nvSpPr>
@@ -13133,7 +12581,7 @@
       </p:sp>
       <p:sp>
         <p:nvSpPr>
-          <p:cNvPr id="8" name="TextBox 7"/>
+          <p:cNvPr id="7" name="TextBox 6"/>
           <p:cNvSpPr txBox="1"/>
           <p:nvPr/>
         </p:nvSpPr>
@@ -13175,7 +12623,7 @@
       </p:sp>
       <p:sp>
         <p:nvSpPr>
-          <p:cNvPr id="9" name="TextBox 8"/>
+          <p:cNvPr id="8" name="TextBox 7"/>
           <p:cNvSpPr txBox="1"/>
           <p:nvPr/>
         </p:nvSpPr>
@@ -13217,7 +12665,7 @@
       </p:sp>
       <p:graphicFrame>
         <p:nvGraphicFramePr>
-          <p:cNvPr id="10" name="Chart 9"/>
+          <p:cNvPr id="9" name="Chart 8"/>
           <p:cNvGraphicFramePr>
             <a:graphicFrameLocks noGrp="1"/>
           </p:cNvGraphicFramePr>
@@ -13235,7 +12683,7 @@
       </p:graphicFrame>
       <p:sp>
         <p:nvSpPr>
-          <p:cNvPr id="11" name="Rectangle 10"/>
+          <p:cNvPr id="10" name="Rectangle 9"/>
           <p:cNvSpPr/>
           <p:nvPr/>
         </p:nvSpPr>
@@ -13284,7 +12732,7 @@
       </p:sp>
       <p:sp>
         <p:nvSpPr>
-          <p:cNvPr id="12" name="TextBox 11"/>
+          <p:cNvPr id="11" name="TextBox 10"/>
           <p:cNvSpPr txBox="1"/>
           <p:nvPr/>
         </p:nvSpPr>
@@ -13326,7 +12774,7 @@
       </p:sp>
       <p:sp>
         <p:nvSpPr>
-          <p:cNvPr id="13" name="TextBox 12"/>
+          <p:cNvPr id="12" name="TextBox 11"/>
           <p:cNvSpPr txBox="1"/>
           <p:nvPr/>
         </p:nvSpPr>
@@ -13368,7 +12816,7 @@
       </p:sp>
       <p:sp>
         <p:nvSpPr>
-          <p:cNvPr id="14" name="TextBox 13"/>
+          <p:cNvPr id="13" name="TextBox 12"/>
           <p:cNvSpPr txBox="1"/>
           <p:nvPr/>
         </p:nvSpPr>
@@ -13484,7 +12932,7 @@
         <p:spPr>
           <a:xfrm>
             <a:off x="640080" y="329184"/>
-            <a:ext cx="5303520" cy="182880"/>
+            <a:ext cx="9875520" cy="182880"/>
           </a:xfrm>
           <a:prstGeom prst="rect">
             <a:avLst/>
@@ -13525,48 +12973,6 @@
         </p:nvSpPr>
         <p:spPr>
           <a:xfrm>
-            <a:off x="5897880" y="310896"/>
-            <a:ext cx="4800600" cy="256032"/>
-          </a:xfrm>
-          <a:prstGeom prst="rect">
-            <a:avLst/>
-          </a:prstGeom>
-          <a:noFill/>
-        </p:spPr>
-        <p:txBody>
-          <a:bodyPr wrap="none" lIns="9144" rIns="9144" tIns="9144" bIns="9144" anchor="t">
-            <a:spAutoFit/>
-          </a:bodyPr>
-          <a:lstStyle/>
-          <a:p>
-            <a:pPr algn="r">
-              <a:spcAft>
-                <a:spcPts val="0"/>
-              </a:spcAft>
-              <a:defRPr sz="680" b="1">
-                <a:solidFill>
-                  <a:srgbClr val="4F6B00"/>
-                </a:solidFill>
-                <a:latin typeface="Inter"/>
-              </a:defRPr>
-            </a:pPr>
-            <a:r>
-              <a:rPr>
-                <a:latin typeface="Inter"/>
-              </a:rPr>
-              <a:t>Illustrative, Gradient Maintained — demo data, not the client's holdings or managers</a:t>
-            </a:r>
-          </a:p>
-        </p:txBody>
-      </p:sp>
-      <p:sp>
-        <p:nvSpPr>
-          <p:cNvPr id="5" name="TextBox 4"/>
-          <p:cNvSpPr txBox="1"/>
-          <p:nvPr/>
-        </p:nvSpPr>
-        <p:spPr>
-          <a:xfrm>
             <a:off x="640080" y="566928"/>
             <a:ext cx="10058400" cy="530352"/>
           </a:xfrm>
@@ -13603,7 +13009,7 @@
       </p:sp>
       <p:sp>
         <p:nvSpPr>
-          <p:cNvPr id="6" name="Rectangle 5"/>
+          <p:cNvPr id="5" name="Rectangle 4"/>
           <p:cNvSpPr/>
           <p:nvPr/>
         </p:nvSpPr>
@@ -13652,7 +13058,7 @@
       </p:sp>
       <p:sp>
         <p:nvSpPr>
-          <p:cNvPr id="7" name="Rectangle 6"/>
+          <p:cNvPr id="6" name="Rectangle 5"/>
           <p:cNvSpPr/>
           <p:nvPr/>
         </p:nvSpPr>
@@ -13701,7 +13107,7 @@
       </p:sp>
       <p:sp>
         <p:nvSpPr>
-          <p:cNvPr id="8" name="TextBox 7"/>
+          <p:cNvPr id="7" name="TextBox 6"/>
           <p:cNvSpPr txBox="1"/>
           <p:nvPr/>
         </p:nvSpPr>
@@ -13743,7 +13149,7 @@
       </p:sp>
       <p:sp>
         <p:nvSpPr>
-          <p:cNvPr id="9" name="TextBox 8"/>
+          <p:cNvPr id="8" name="TextBox 7"/>
           <p:cNvSpPr txBox="1"/>
           <p:nvPr/>
         </p:nvSpPr>
@@ -13785,7 +13191,7 @@
       </p:sp>
       <p:sp>
         <p:nvSpPr>
-          <p:cNvPr id="10" name="Oval 9"/>
+          <p:cNvPr id="9" name="Oval 8"/>
           <p:cNvSpPr/>
           <p:nvPr/>
         </p:nvSpPr>
@@ -13834,7 +13240,7 @@
       </p:sp>
       <p:sp>
         <p:nvSpPr>
-          <p:cNvPr id="11" name="TextBox 10"/>
+          <p:cNvPr id="10" name="TextBox 9"/>
           <p:cNvSpPr txBox="1"/>
           <p:nvPr/>
         </p:nvSpPr>
@@ -13876,7 +13282,7 @@
       </p:sp>
       <p:sp>
         <p:nvSpPr>
-          <p:cNvPr id="12" name="Oval 11"/>
+          <p:cNvPr id="11" name="Oval 10"/>
           <p:cNvSpPr/>
           <p:nvPr/>
         </p:nvSpPr>
@@ -13925,7 +13331,7 @@
       </p:sp>
       <p:sp>
         <p:nvSpPr>
-          <p:cNvPr id="13" name="TextBox 12"/>
+          <p:cNvPr id="12" name="TextBox 11"/>
           <p:cNvSpPr txBox="1"/>
           <p:nvPr/>
         </p:nvSpPr>
@@ -13967,7 +13373,7 @@
       </p:sp>
       <p:sp>
         <p:nvSpPr>
-          <p:cNvPr id="14" name="TextBox 13"/>
+          <p:cNvPr id="13" name="TextBox 12"/>
           <p:cNvSpPr txBox="1"/>
           <p:nvPr/>
         </p:nvSpPr>
@@ -14009,7 +13415,7 @@
       </p:sp>
       <p:sp>
         <p:nvSpPr>
-          <p:cNvPr id="15" name="Rectangle 14"/>
+          <p:cNvPr id="14" name="Rectangle 13"/>
           <p:cNvSpPr/>
           <p:nvPr/>
         </p:nvSpPr>
@@ -14058,7 +13464,7 @@
       </p:sp>
       <p:sp>
         <p:nvSpPr>
-          <p:cNvPr id="16" name="Rectangle 15"/>
+          <p:cNvPr id="15" name="Rectangle 14"/>
           <p:cNvSpPr/>
           <p:nvPr/>
         </p:nvSpPr>
@@ -14107,7 +13513,7 @@
       </p:sp>
       <p:sp>
         <p:nvSpPr>
-          <p:cNvPr id="17" name="Oval 16"/>
+          <p:cNvPr id="16" name="Oval 15"/>
           <p:cNvSpPr/>
           <p:nvPr/>
         </p:nvSpPr>
@@ -14156,7 +13562,7 @@
       </p:sp>
       <p:sp>
         <p:nvSpPr>
-          <p:cNvPr id="18" name="Oval 17"/>
+          <p:cNvPr id="17" name="Oval 16"/>
           <p:cNvSpPr/>
           <p:nvPr/>
         </p:nvSpPr>
@@ -14205,7 +13611,7 @@
       </p:sp>
       <p:sp>
         <p:nvSpPr>
-          <p:cNvPr id="19" name="TextBox 18"/>
+          <p:cNvPr id="18" name="TextBox 17"/>
           <p:cNvSpPr txBox="1"/>
           <p:nvPr/>
         </p:nvSpPr>
@@ -14247,7 +13653,7 @@
       </p:sp>
       <p:sp>
         <p:nvSpPr>
-          <p:cNvPr id="20" name="TextBox 19"/>
+          <p:cNvPr id="19" name="TextBox 18"/>
           <p:cNvSpPr txBox="1"/>
           <p:nvPr/>
         </p:nvSpPr>
@@ -14289,7 +13695,7 @@
       </p:sp>
       <p:sp>
         <p:nvSpPr>
-          <p:cNvPr id="21" name="Rectangle 20"/>
+          <p:cNvPr id="20" name="Rectangle 19"/>
           <p:cNvSpPr/>
           <p:nvPr/>
         </p:nvSpPr>
@@ -14338,7 +13744,7 @@
       </p:sp>
       <p:sp>
         <p:nvSpPr>
-          <p:cNvPr id="22" name="Rectangle 21"/>
+          <p:cNvPr id="21" name="Rectangle 20"/>
           <p:cNvSpPr/>
           <p:nvPr/>
         </p:nvSpPr>
@@ -14387,7 +13793,7 @@
       </p:sp>
       <p:sp>
         <p:nvSpPr>
-          <p:cNvPr id="23" name="Oval 22"/>
+          <p:cNvPr id="22" name="Oval 21"/>
           <p:cNvSpPr/>
           <p:nvPr/>
         </p:nvSpPr>
@@ -14436,7 +13842,7 @@
       </p:sp>
       <p:sp>
         <p:nvSpPr>
-          <p:cNvPr id="24" name="Oval 23"/>
+          <p:cNvPr id="23" name="Oval 22"/>
           <p:cNvSpPr/>
           <p:nvPr/>
         </p:nvSpPr>
@@ -14485,7 +13891,7 @@
       </p:sp>
       <p:sp>
         <p:nvSpPr>
-          <p:cNvPr id="25" name="TextBox 24"/>
+          <p:cNvPr id="24" name="TextBox 23"/>
           <p:cNvSpPr txBox="1"/>
           <p:nvPr/>
         </p:nvSpPr>
@@ -14527,7 +13933,7 @@
       </p:sp>
       <p:sp>
         <p:nvSpPr>
-          <p:cNvPr id="26" name="TextBox 25"/>
+          <p:cNvPr id="25" name="TextBox 24"/>
           <p:cNvSpPr txBox="1"/>
           <p:nvPr/>
         </p:nvSpPr>
@@ -14569,7 +13975,7 @@
       </p:sp>
       <p:sp>
         <p:nvSpPr>
-          <p:cNvPr id="27" name="Rectangle 26"/>
+          <p:cNvPr id="26" name="Rectangle 25"/>
           <p:cNvSpPr/>
           <p:nvPr/>
         </p:nvSpPr>
@@ -14618,7 +14024,7 @@
       </p:sp>
       <p:sp>
         <p:nvSpPr>
-          <p:cNvPr id="28" name="Rectangle 27"/>
+          <p:cNvPr id="27" name="Rectangle 26"/>
           <p:cNvSpPr/>
           <p:nvPr/>
         </p:nvSpPr>
@@ -14667,7 +14073,7 @@
       </p:sp>
       <p:sp>
         <p:nvSpPr>
-          <p:cNvPr id="29" name="Oval 28"/>
+          <p:cNvPr id="28" name="Oval 27"/>
           <p:cNvSpPr/>
           <p:nvPr/>
         </p:nvSpPr>
@@ -14716,7 +14122,7 @@
       </p:sp>
       <p:sp>
         <p:nvSpPr>
-          <p:cNvPr id="30" name="Oval 29"/>
+          <p:cNvPr id="29" name="Oval 28"/>
           <p:cNvSpPr/>
           <p:nvPr/>
         </p:nvSpPr>
@@ -14765,7 +14171,7 @@
       </p:sp>
       <p:sp>
         <p:nvSpPr>
-          <p:cNvPr id="31" name="TextBox 30"/>
+          <p:cNvPr id="30" name="TextBox 29"/>
           <p:cNvSpPr txBox="1"/>
           <p:nvPr/>
         </p:nvSpPr>
@@ -14807,7 +14213,7 @@
       </p:sp>
       <p:sp>
         <p:nvSpPr>
-          <p:cNvPr id="32" name="TextBox 31"/>
+          <p:cNvPr id="31" name="TextBox 30"/>
           <p:cNvSpPr txBox="1"/>
           <p:nvPr/>
         </p:nvSpPr>
@@ -14849,7 +14255,7 @@
       </p:sp>
       <p:sp>
         <p:nvSpPr>
-          <p:cNvPr id="33" name="TextBox 32"/>
+          <p:cNvPr id="32" name="TextBox 31"/>
           <p:cNvSpPr txBox="1"/>
           <p:nvPr/>
         </p:nvSpPr>
@@ -14891,7 +14297,7 @@
       </p:sp>
       <p:sp>
         <p:nvSpPr>
-          <p:cNvPr id="34" name="Rectangle 33"/>
+          <p:cNvPr id="33" name="Rectangle 32"/>
           <p:cNvSpPr/>
           <p:nvPr/>
         </p:nvSpPr>
@@ -14940,7 +14346,7 @@
       </p:sp>
       <p:sp>
         <p:nvSpPr>
-          <p:cNvPr id="35" name="TextBox 34"/>
+          <p:cNvPr id="34" name="TextBox 33"/>
           <p:cNvSpPr txBox="1"/>
           <p:nvPr/>
         </p:nvSpPr>
@@ -14982,7 +14388,7 @@
       </p:sp>
       <p:sp>
         <p:nvSpPr>
-          <p:cNvPr id="36" name="TextBox 35"/>
+          <p:cNvPr id="35" name="TextBox 34"/>
           <p:cNvSpPr txBox="1"/>
           <p:nvPr/>
         </p:nvSpPr>
@@ -15024,7 +14430,7 @@
       </p:sp>
       <p:sp>
         <p:nvSpPr>
-          <p:cNvPr id="37" name="TextBox 36"/>
+          <p:cNvPr id="36" name="TextBox 35"/>
           <p:cNvSpPr txBox="1"/>
           <p:nvPr/>
         </p:nvSpPr>
@@ -15140,7 +14546,7 @@
         <p:spPr>
           <a:xfrm>
             <a:off x="640080" y="329184"/>
-            <a:ext cx="5303520" cy="182880"/>
+            <a:ext cx="9875520" cy="182880"/>
           </a:xfrm>
           <a:prstGeom prst="rect">
             <a:avLst/>
@@ -15181,48 +14587,6 @@
         </p:nvSpPr>
         <p:spPr>
           <a:xfrm>
-            <a:off x="5897880" y="310896"/>
-            <a:ext cx="4800600" cy="256032"/>
-          </a:xfrm>
-          <a:prstGeom prst="rect">
-            <a:avLst/>
-          </a:prstGeom>
-          <a:noFill/>
-        </p:spPr>
-        <p:txBody>
-          <a:bodyPr wrap="none" lIns="9144" rIns="9144" tIns="9144" bIns="9144" anchor="t">
-            <a:spAutoFit/>
-          </a:bodyPr>
-          <a:lstStyle/>
-          <a:p>
-            <a:pPr algn="r">
-              <a:spcAft>
-                <a:spcPts val="0"/>
-              </a:spcAft>
-              <a:defRPr sz="680" b="1">
-                <a:solidFill>
-                  <a:srgbClr val="4F6B00"/>
-                </a:solidFill>
-                <a:latin typeface="Inter"/>
-              </a:defRPr>
-            </a:pPr>
-            <a:r>
-              <a:rPr>
-                <a:latin typeface="Inter"/>
-              </a:rPr>
-              <a:t>Illustrative, Gradient Maintained — demo data, not the client's holdings or managers</a:t>
-            </a:r>
-          </a:p>
-        </p:txBody>
-      </p:sp>
-      <p:sp>
-        <p:nvSpPr>
-          <p:cNvPr id="5" name="TextBox 4"/>
-          <p:cNvSpPr txBox="1"/>
-          <p:nvPr/>
-        </p:nvSpPr>
-        <p:spPr>
-          <a:xfrm>
             <a:off x="640080" y="566928"/>
             <a:ext cx="10058400" cy="530352"/>
           </a:xfrm>
@@ -15259,7 +14623,7 @@
       </p:sp>
       <p:sp>
         <p:nvSpPr>
-          <p:cNvPr id="6" name="Rectangle 5"/>
+          <p:cNvPr id="5" name="Rectangle 4"/>
           <p:cNvSpPr/>
           <p:nvPr/>
         </p:nvSpPr>
@@ -15308,7 +14672,7 @@
       </p:sp>
       <p:sp>
         <p:nvSpPr>
-          <p:cNvPr id="7" name="Rectangle 6"/>
+          <p:cNvPr id="6" name="Rectangle 5"/>
           <p:cNvSpPr/>
           <p:nvPr/>
         </p:nvSpPr>
@@ -15357,7 +14721,7 @@
       </p:sp>
       <p:sp>
         <p:nvSpPr>
-          <p:cNvPr id="8" name="TextBox 7"/>
+          <p:cNvPr id="7" name="TextBox 6"/>
           <p:cNvSpPr txBox="1"/>
           <p:nvPr/>
         </p:nvSpPr>
@@ -15399,7 +14763,7 @@
       </p:sp>
       <p:sp>
         <p:nvSpPr>
-          <p:cNvPr id="9" name="Rectangle 8"/>
+          <p:cNvPr id="8" name="Rectangle 7"/>
           <p:cNvSpPr/>
           <p:nvPr/>
         </p:nvSpPr>
@@ -15448,7 +14812,7 @@
       </p:sp>
       <p:sp>
         <p:nvSpPr>
-          <p:cNvPr id="10" name="Rectangle 9"/>
+          <p:cNvPr id="9" name="Rectangle 8"/>
           <p:cNvSpPr/>
           <p:nvPr/>
         </p:nvSpPr>
@@ -15497,7 +14861,7 @@
       </p:sp>
       <p:sp>
         <p:nvSpPr>
-          <p:cNvPr id="11" name="TextBox 10"/>
+          <p:cNvPr id="10" name="TextBox 9"/>
           <p:cNvSpPr txBox="1"/>
           <p:nvPr/>
         </p:nvSpPr>
@@ -15539,7 +14903,7 @@
       </p:sp>
       <p:sp>
         <p:nvSpPr>
-          <p:cNvPr id="12" name="TextBox 11"/>
+          <p:cNvPr id="11" name="TextBox 10"/>
           <p:cNvSpPr txBox="1"/>
           <p:nvPr/>
         </p:nvSpPr>
@@ -15581,7 +14945,7 @@
       </p:sp>
       <p:sp>
         <p:nvSpPr>
-          <p:cNvPr id="13" name="Rectangle 12"/>
+          <p:cNvPr id="12" name="Rectangle 11"/>
           <p:cNvSpPr/>
           <p:nvPr/>
         </p:nvSpPr>
@@ -15630,7 +14994,7 @@
       </p:sp>
       <p:sp>
         <p:nvSpPr>
-          <p:cNvPr id="14" name="TextBox 13"/>
+          <p:cNvPr id="13" name="TextBox 12"/>
           <p:cNvSpPr txBox="1"/>
           <p:nvPr/>
         </p:nvSpPr>
@@ -15672,7 +15036,7 @@
       </p:sp>
       <p:sp>
         <p:nvSpPr>
-          <p:cNvPr id="15" name="TextBox 14"/>
+          <p:cNvPr id="14" name="TextBox 13"/>
           <p:cNvSpPr txBox="1"/>
           <p:nvPr/>
         </p:nvSpPr>
@@ -15714,7 +15078,7 @@
       </p:sp>
       <p:sp>
         <p:nvSpPr>
-          <p:cNvPr id="16" name="TextBox 15"/>
+          <p:cNvPr id="15" name="TextBox 14"/>
           <p:cNvSpPr txBox="1"/>
           <p:nvPr/>
         </p:nvSpPr>
@@ -15830,7 +15194,7 @@
         <p:spPr>
           <a:xfrm>
             <a:off x="640080" y="329184"/>
-            <a:ext cx="5303520" cy="182880"/>
+            <a:ext cx="9875520" cy="182880"/>
           </a:xfrm>
           <a:prstGeom prst="rect">
             <a:avLst/>
@@ -15871,48 +15235,6 @@
         </p:nvSpPr>
         <p:spPr>
           <a:xfrm>
-            <a:off x="5897880" y="310896"/>
-            <a:ext cx="4800600" cy="256032"/>
-          </a:xfrm>
-          <a:prstGeom prst="rect">
-            <a:avLst/>
-          </a:prstGeom>
-          <a:noFill/>
-        </p:spPr>
-        <p:txBody>
-          <a:bodyPr wrap="none" lIns="9144" rIns="9144" tIns="9144" bIns="9144" anchor="t">
-            <a:spAutoFit/>
-          </a:bodyPr>
-          <a:lstStyle/>
-          <a:p>
-            <a:pPr algn="r">
-              <a:spcAft>
-                <a:spcPts val="0"/>
-              </a:spcAft>
-              <a:defRPr sz="680" b="1">
-                <a:solidFill>
-                  <a:srgbClr val="4F6B00"/>
-                </a:solidFill>
-                <a:latin typeface="Inter"/>
-              </a:defRPr>
-            </a:pPr>
-            <a:r>
-              <a:rPr>
-                <a:latin typeface="Inter"/>
-              </a:rPr>
-              <a:t>Illustrative, Gradient Maintained — demo data, not the client's holdings or managers</a:t>
-            </a:r>
-          </a:p>
-        </p:txBody>
-      </p:sp>
-      <p:sp>
-        <p:nvSpPr>
-          <p:cNvPr id="5" name="TextBox 4"/>
-          <p:cNvSpPr txBox="1"/>
-          <p:nvPr/>
-        </p:nvSpPr>
-        <p:spPr>
-          <a:xfrm>
             <a:off x="640080" y="566928"/>
             <a:ext cx="10058400" cy="530352"/>
           </a:xfrm>
@@ -15949,7 +15271,7 @@
       </p:sp>
       <p:sp>
         <p:nvSpPr>
-          <p:cNvPr id="6" name="Rectangle 5"/>
+          <p:cNvPr id="5" name="Rectangle 4"/>
           <p:cNvSpPr/>
           <p:nvPr/>
         </p:nvSpPr>
@@ -15998,7 +15320,7 @@
       </p:sp>
       <p:sp>
         <p:nvSpPr>
-          <p:cNvPr id="7" name="Rectangle 6"/>
+          <p:cNvPr id="6" name="Rectangle 5"/>
           <p:cNvSpPr/>
           <p:nvPr/>
         </p:nvSpPr>
@@ -16047,7 +15369,7 @@
       </p:sp>
       <p:sp>
         <p:nvSpPr>
-          <p:cNvPr id="8" name="TextBox 7"/>
+          <p:cNvPr id="7" name="TextBox 6"/>
           <p:cNvSpPr txBox="1"/>
           <p:nvPr/>
         </p:nvSpPr>
@@ -16089,14 +15411,105 @@
       </p:sp>
       <p:sp>
         <p:nvSpPr>
-          <p:cNvPr id="9" name="Rectangle 8"/>
+          <p:cNvPr id="8" name="Rectangle 7"/>
           <p:cNvSpPr/>
           <p:nvPr/>
         </p:nvSpPr>
         <p:spPr>
           <a:xfrm>
-            <a:off x="640080" y="1325880"/>
-            <a:ext cx="10908792" cy="2611569"/>
+            <a:off x="640080" y="1399032"/>
+            <a:ext cx="73152" cy="905533"/>
+          </a:xfrm>
+          <a:prstGeom prst="rect">
+            <a:avLst/>
+          </a:prstGeom>
+          <a:solidFill>
+            <a:srgbClr val="C6F432"/>
+          </a:solidFill>
+          <a:ln>
+            <a:solidFill>
+              <a:srgbClr val="C6F432"/>
+            </a:solidFill>
+          </a:ln>
+        </p:spPr>
+        <p:style>
+          <a:lnRef idx="1">
+            <a:schemeClr val="accent1"/>
+          </a:lnRef>
+          <a:fillRef idx="3">
+            <a:schemeClr val="accent1"/>
+          </a:fillRef>
+          <a:effectRef idx="2">
+            <a:schemeClr val="accent1"/>
+          </a:effectRef>
+          <a:fontRef idx="minor">
+            <a:schemeClr val="lt1"/>
+          </a:fontRef>
+        </p:style>
+        <p:txBody>
+          <a:bodyPr rtlCol="0" anchor="ctr"/>
+          <a:lstStyle/>
+          <a:p>
+            <a:pPr algn="ctr">
+              <a:defRPr>
+                <a:latin typeface="Inter"/>
+              </a:defRPr>
+            </a:pPr>
+          </a:p>
+        </p:txBody>
+      </p:sp>
+      <p:sp>
+        <p:nvSpPr>
+          <p:cNvPr id="9" name="TextBox 8"/>
+          <p:cNvSpPr txBox="1"/>
+          <p:nvPr/>
+        </p:nvSpPr>
+        <p:spPr>
+          <a:xfrm>
+            <a:off x="896112" y="1371600"/>
+            <a:ext cx="10588752" cy="610065"/>
+          </a:xfrm>
+          <a:prstGeom prst="rect">
+            <a:avLst/>
+          </a:prstGeom>
+          <a:noFill/>
+        </p:spPr>
+        <p:txBody>
+          <a:bodyPr wrap="none" lIns="9144" rIns="9144" tIns="9144" bIns="9144" anchor="t">
+            <a:spAutoFit/>
+          </a:bodyPr>
+          <a:lstStyle/>
+          <a:p>
+            <a:pPr algn="l">
+              <a:spcAft>
+                <a:spcPts val="0"/>
+              </a:spcAft>
+              <a:defRPr sz="1800" b="1">
+                <a:solidFill>
+                  <a:srgbClr val="0D1117"/>
+                </a:solidFill>
+                <a:latin typeface="Inter"/>
+              </a:defRPr>
+            </a:pPr>
+            <a:r>
+              <a:rPr>
+                <a:latin typeface="Inter"/>
+              </a:rPr>
+              <a:t>Historical and forward views reconcile</a:t>
+            </a:r>
+          </a:p>
+        </p:txBody>
+      </p:sp>
+      <p:sp>
+        <p:nvSpPr>
+          <p:cNvPr id="10" name="Rectangle 9"/>
+          <p:cNvSpPr/>
+          <p:nvPr/>
+        </p:nvSpPr>
+        <p:spPr>
+          <a:xfrm>
+            <a:off x="640080" y="2487445"/>
+            <a:ext cx="10908792" cy="1977251"/>
           </a:xfrm>
           <a:prstGeom prst="rect">
             <a:avLst/>
@@ -16138,14 +15551,14 @@
       </p:sp>
       <p:sp>
         <p:nvSpPr>
-          <p:cNvPr id="10" name="Rectangle 9"/>
+          <p:cNvPr id="11" name="Rectangle 10"/>
           <p:cNvSpPr/>
           <p:nvPr/>
         </p:nvSpPr>
         <p:spPr>
           <a:xfrm>
-            <a:off x="640080" y="1325880"/>
-            <a:ext cx="54864" cy="2611569"/>
+            <a:off x="640080" y="2487445"/>
+            <a:ext cx="54864" cy="1977251"/>
           </a:xfrm>
           <a:prstGeom prst="rect">
             <a:avLst/>
@@ -16187,13 +15600,13 @@
       </p:sp>
       <p:sp>
         <p:nvSpPr>
-          <p:cNvPr id="11" name="TextBox 10"/>
+          <p:cNvPr id="12" name="TextBox 11"/>
           <p:cNvSpPr txBox="1"/>
           <p:nvPr/>
         </p:nvSpPr>
         <p:spPr>
           <a:xfrm>
-            <a:off x="804671" y="1435607"/>
+            <a:off x="804671" y="2597173"/>
             <a:ext cx="10616184" cy="228600"/>
           </a:xfrm>
           <a:prstGeom prst="rect">
@@ -16229,14 +15642,14 @@
       </p:sp>
       <p:sp>
         <p:nvSpPr>
-          <p:cNvPr id="12" name="TextBox 11"/>
+          <p:cNvPr id="13" name="TextBox 12"/>
           <p:cNvSpPr txBox="1"/>
           <p:nvPr/>
         </p:nvSpPr>
         <p:spPr>
           <a:xfrm>
-            <a:off x="804671" y="1719072"/>
-            <a:ext cx="10616184" cy="2126937"/>
+            <a:off x="804671" y="2880637"/>
+            <a:ext cx="10616184" cy="1492619"/>
           </a:xfrm>
           <a:prstGeom prst="rect">
             <a:avLst/>
@@ -16271,14 +15684,14 @@
       </p:sp>
       <p:sp>
         <p:nvSpPr>
-          <p:cNvPr id="13" name="Rectangle 12"/>
+          <p:cNvPr id="14" name="Rectangle 13"/>
           <p:cNvSpPr/>
           <p:nvPr/>
         </p:nvSpPr>
         <p:spPr>
           <a:xfrm>
-            <a:off x="640080" y="4047177"/>
-            <a:ext cx="2644902" cy="2170742"/>
+            <a:off x="640080" y="4574424"/>
+            <a:ext cx="2644902" cy="1643495"/>
           </a:xfrm>
           <a:prstGeom prst="rect">
             <a:avLst/>
@@ -16320,13 +15733,13 @@
       </p:sp>
       <p:sp>
         <p:nvSpPr>
-          <p:cNvPr id="14" name="Rectangle 13"/>
+          <p:cNvPr id="15" name="Rectangle 14"/>
           <p:cNvSpPr/>
           <p:nvPr/>
         </p:nvSpPr>
         <p:spPr>
           <a:xfrm>
-            <a:off x="640080" y="4047177"/>
+            <a:off x="640080" y="4574424"/>
             <a:ext cx="2644902" cy="45720"/>
           </a:xfrm>
           <a:prstGeom prst="rect">
@@ -16369,13 +15782,13 @@
       </p:sp>
       <p:sp>
         <p:nvSpPr>
-          <p:cNvPr id="15" name="TextBox 14"/>
+          <p:cNvPr id="16" name="TextBox 15"/>
           <p:cNvSpPr txBox="1"/>
           <p:nvPr/>
         </p:nvSpPr>
         <p:spPr>
           <a:xfrm>
-            <a:off x="749808" y="4175193"/>
+            <a:off x="749808" y="4702440"/>
             <a:ext cx="2425446" cy="201168"/>
           </a:xfrm>
           <a:prstGeom prst="rect">
@@ -16411,13 +15824,13 @@
       </p:sp>
       <p:sp>
         <p:nvSpPr>
-          <p:cNvPr id="16" name="TextBox 15"/>
+          <p:cNvPr id="17" name="TextBox 16"/>
           <p:cNvSpPr txBox="1"/>
           <p:nvPr/>
         </p:nvSpPr>
         <p:spPr>
           <a:xfrm>
-            <a:off x="749808" y="4431225"/>
+            <a:off x="749808" y="4958472"/>
             <a:ext cx="2425446" cy="475488"/>
           </a:xfrm>
           <a:prstGeom prst="rect">
@@ -16453,7 +15866,7 @@
       </p:sp>
       <p:sp>
         <p:nvSpPr>
-          <p:cNvPr id="17" name="TextBox 16"/>
+          <p:cNvPr id="18" name="TextBox 17"/>
           <p:cNvSpPr txBox="1"/>
           <p:nvPr/>
         </p:nvSpPr>
@@ -16495,14 +15908,14 @@
       </p:sp>
       <p:sp>
         <p:nvSpPr>
-          <p:cNvPr id="18" name="Rectangle 17"/>
+          <p:cNvPr id="19" name="Rectangle 18"/>
           <p:cNvSpPr/>
           <p:nvPr/>
         </p:nvSpPr>
         <p:spPr>
           <a:xfrm>
-            <a:off x="3394710" y="4047177"/>
-            <a:ext cx="2644902" cy="2170742"/>
+            <a:off x="3394710" y="4574424"/>
+            <a:ext cx="2644902" cy="1643495"/>
           </a:xfrm>
           <a:prstGeom prst="rect">
             <a:avLst/>
@@ -16544,13 +15957,13 @@
       </p:sp>
       <p:sp>
         <p:nvSpPr>
-          <p:cNvPr id="19" name="Rectangle 18"/>
+          <p:cNvPr id="20" name="Rectangle 19"/>
           <p:cNvSpPr/>
           <p:nvPr/>
         </p:nvSpPr>
         <p:spPr>
           <a:xfrm>
-            <a:off x="3394710" y="4047177"/>
+            <a:off x="3394710" y="4574424"/>
             <a:ext cx="2644902" cy="45720"/>
           </a:xfrm>
           <a:prstGeom prst="rect">
@@ -16593,13 +16006,13 @@
       </p:sp>
       <p:sp>
         <p:nvSpPr>
-          <p:cNvPr id="20" name="TextBox 19"/>
+          <p:cNvPr id="21" name="TextBox 20"/>
           <p:cNvSpPr txBox="1"/>
           <p:nvPr/>
         </p:nvSpPr>
         <p:spPr>
           <a:xfrm>
-            <a:off x="3504438" y="4175193"/>
+            <a:off x="3504438" y="4702440"/>
             <a:ext cx="2425446" cy="201168"/>
           </a:xfrm>
           <a:prstGeom prst="rect">
@@ -16635,13 +16048,13 @@
       </p:sp>
       <p:sp>
         <p:nvSpPr>
-          <p:cNvPr id="21" name="TextBox 20"/>
+          <p:cNvPr id="22" name="TextBox 21"/>
           <p:cNvSpPr txBox="1"/>
           <p:nvPr/>
         </p:nvSpPr>
         <p:spPr>
           <a:xfrm>
-            <a:off x="3504438" y="4431225"/>
+            <a:off x="3504438" y="4958472"/>
             <a:ext cx="2425446" cy="475488"/>
           </a:xfrm>
           <a:prstGeom prst="rect">
@@ -16677,7 +16090,7 @@
       </p:sp>
       <p:sp>
         <p:nvSpPr>
-          <p:cNvPr id="22" name="TextBox 21"/>
+          <p:cNvPr id="23" name="TextBox 22"/>
           <p:cNvSpPr txBox="1"/>
           <p:nvPr/>
         </p:nvSpPr>
@@ -16719,14 +16132,14 @@
       </p:sp>
       <p:sp>
         <p:nvSpPr>
-          <p:cNvPr id="23" name="Rectangle 22"/>
+          <p:cNvPr id="24" name="Rectangle 23"/>
           <p:cNvSpPr/>
           <p:nvPr/>
         </p:nvSpPr>
         <p:spPr>
           <a:xfrm>
-            <a:off x="6149340" y="4047177"/>
-            <a:ext cx="2644902" cy="2170742"/>
+            <a:off x="6149340" y="4574424"/>
+            <a:ext cx="2644902" cy="1643495"/>
           </a:xfrm>
           <a:prstGeom prst="rect">
             <a:avLst/>
@@ -16768,13 +16181,13 @@
       </p:sp>
       <p:sp>
         <p:nvSpPr>
-          <p:cNvPr id="24" name="Rectangle 23"/>
+          <p:cNvPr id="25" name="Rectangle 24"/>
           <p:cNvSpPr/>
           <p:nvPr/>
         </p:nvSpPr>
         <p:spPr>
           <a:xfrm>
-            <a:off x="6149340" y="4047177"/>
+            <a:off x="6149340" y="4574424"/>
             <a:ext cx="2644902" cy="45720"/>
           </a:xfrm>
           <a:prstGeom prst="rect">
@@ -16817,13 +16230,13 @@
       </p:sp>
       <p:sp>
         <p:nvSpPr>
-          <p:cNvPr id="25" name="TextBox 24"/>
+          <p:cNvPr id="26" name="TextBox 25"/>
           <p:cNvSpPr txBox="1"/>
           <p:nvPr/>
         </p:nvSpPr>
         <p:spPr>
           <a:xfrm>
-            <a:off x="6259068" y="4175193"/>
+            <a:off x="6259068" y="4702440"/>
             <a:ext cx="2425446" cy="201168"/>
           </a:xfrm>
           <a:prstGeom prst="rect">
@@ -16859,13 +16272,13 @@
       </p:sp>
       <p:sp>
         <p:nvSpPr>
-          <p:cNvPr id="26" name="TextBox 25"/>
+          <p:cNvPr id="27" name="TextBox 26"/>
           <p:cNvSpPr txBox="1"/>
           <p:nvPr/>
         </p:nvSpPr>
         <p:spPr>
           <a:xfrm>
-            <a:off x="6259068" y="4431225"/>
+            <a:off x="6259068" y="4958472"/>
             <a:ext cx="2425446" cy="475488"/>
           </a:xfrm>
           <a:prstGeom prst="rect">
@@ -16901,7 +16314,7 @@
       </p:sp>
       <p:sp>
         <p:nvSpPr>
-          <p:cNvPr id="27" name="TextBox 26"/>
+          <p:cNvPr id="28" name="TextBox 27"/>
           <p:cNvSpPr txBox="1"/>
           <p:nvPr/>
         </p:nvSpPr>
@@ -16943,14 +16356,14 @@
       </p:sp>
       <p:sp>
         <p:nvSpPr>
-          <p:cNvPr id="28" name="Rectangle 27"/>
+          <p:cNvPr id="29" name="Rectangle 28"/>
           <p:cNvSpPr/>
           <p:nvPr/>
         </p:nvSpPr>
         <p:spPr>
           <a:xfrm>
-            <a:off x="8903970" y="4047177"/>
-            <a:ext cx="2644902" cy="2170742"/>
+            <a:off x="8903970" y="4574424"/>
+            <a:ext cx="2644902" cy="1643495"/>
           </a:xfrm>
           <a:prstGeom prst="rect">
             <a:avLst/>
@@ -16992,13 +16405,13 @@
       </p:sp>
       <p:sp>
         <p:nvSpPr>
-          <p:cNvPr id="29" name="Rectangle 28"/>
+          <p:cNvPr id="30" name="Rectangle 29"/>
           <p:cNvSpPr/>
           <p:nvPr/>
         </p:nvSpPr>
         <p:spPr>
           <a:xfrm>
-            <a:off x="8903970" y="4047177"/>
+            <a:off x="8903970" y="4574424"/>
             <a:ext cx="2644902" cy="45720"/>
           </a:xfrm>
           <a:prstGeom prst="rect">
@@ -17041,13 +16454,13 @@
       </p:sp>
       <p:sp>
         <p:nvSpPr>
-          <p:cNvPr id="30" name="TextBox 29"/>
+          <p:cNvPr id="31" name="TextBox 30"/>
           <p:cNvSpPr txBox="1"/>
           <p:nvPr/>
         </p:nvSpPr>
         <p:spPr>
           <a:xfrm>
-            <a:off x="9013698" y="4175193"/>
+            <a:off x="9013698" y="4702440"/>
             <a:ext cx="2425446" cy="201168"/>
           </a:xfrm>
           <a:prstGeom prst="rect">
@@ -17083,13 +16496,13 @@
       </p:sp>
       <p:sp>
         <p:nvSpPr>
-          <p:cNvPr id="31" name="TextBox 30"/>
+          <p:cNvPr id="32" name="TextBox 31"/>
           <p:cNvSpPr txBox="1"/>
           <p:nvPr/>
         </p:nvSpPr>
         <p:spPr>
           <a:xfrm>
-            <a:off x="9013698" y="4431225"/>
+            <a:off x="9013698" y="4958472"/>
             <a:ext cx="2425446" cy="475488"/>
           </a:xfrm>
           <a:prstGeom prst="rect">
@@ -17125,7 +16538,7 @@
       </p:sp>
       <p:sp>
         <p:nvSpPr>
-          <p:cNvPr id="32" name="TextBox 31"/>
+          <p:cNvPr id="33" name="TextBox 32"/>
           <p:cNvSpPr txBox="1"/>
           <p:nvPr/>
         </p:nvSpPr>
@@ -17167,7 +16580,7 @@
       </p:sp>
       <p:sp>
         <p:nvSpPr>
-          <p:cNvPr id="33" name="Rectangle 32"/>
+          <p:cNvPr id="34" name="Rectangle 33"/>
           <p:cNvSpPr/>
           <p:nvPr/>
         </p:nvSpPr>
@@ -17216,7 +16629,7 @@
       </p:sp>
       <p:sp>
         <p:nvSpPr>
-          <p:cNvPr id="34" name="TextBox 33"/>
+          <p:cNvPr id="35" name="TextBox 34"/>
           <p:cNvSpPr txBox="1"/>
           <p:nvPr/>
         </p:nvSpPr>
@@ -17258,7 +16671,7 @@
       </p:sp>
       <p:sp>
         <p:nvSpPr>
-          <p:cNvPr id="35" name="TextBox 34"/>
+          <p:cNvPr id="36" name="TextBox 35"/>
           <p:cNvSpPr txBox="1"/>
           <p:nvPr/>
         </p:nvSpPr>
@@ -17300,7 +16713,7 @@
       </p:sp>
       <p:sp>
         <p:nvSpPr>
-          <p:cNvPr id="36" name="TextBox 35"/>
+          <p:cNvPr id="37" name="TextBox 36"/>
           <p:cNvSpPr txBox="1"/>
           <p:nvPr/>
         </p:nvSpPr>
@@ -17416,7 +16829,7 @@
         <p:spPr>
           <a:xfrm>
             <a:off x="640080" y="329184"/>
-            <a:ext cx="5303520" cy="182880"/>
+            <a:ext cx="9875520" cy="182880"/>
           </a:xfrm>
           <a:prstGeom prst="rect">
             <a:avLst/>
@@ -17457,48 +16870,6 @@
         </p:nvSpPr>
         <p:spPr>
           <a:xfrm>
-            <a:off x="5897880" y="310896"/>
-            <a:ext cx="4800600" cy="256032"/>
-          </a:xfrm>
-          <a:prstGeom prst="rect">
-            <a:avLst/>
-          </a:prstGeom>
-          <a:noFill/>
-        </p:spPr>
-        <p:txBody>
-          <a:bodyPr wrap="none" lIns="9144" rIns="9144" tIns="9144" bIns="9144" anchor="t">
-            <a:spAutoFit/>
-          </a:bodyPr>
-          <a:lstStyle/>
-          <a:p>
-            <a:pPr algn="r">
-              <a:spcAft>
-                <a:spcPts val="0"/>
-              </a:spcAft>
-              <a:defRPr sz="680" b="1">
-                <a:solidFill>
-                  <a:srgbClr val="4F6B00"/>
-                </a:solidFill>
-                <a:latin typeface="Inter"/>
-              </a:defRPr>
-            </a:pPr>
-            <a:r>
-              <a:rPr>
-                <a:latin typeface="Inter"/>
-              </a:rPr>
-              <a:t>Illustrative, Gradient Maintained — demo data, not the client's holdings or managers</a:t>
-            </a:r>
-          </a:p>
-        </p:txBody>
-      </p:sp>
-      <p:sp>
-        <p:nvSpPr>
-          <p:cNvPr id="5" name="TextBox 4"/>
-          <p:cNvSpPr txBox="1"/>
-          <p:nvPr/>
-        </p:nvSpPr>
-        <p:spPr>
-          <a:xfrm>
             <a:off x="640080" y="566928"/>
             <a:ext cx="10058400" cy="530352"/>
           </a:xfrm>
@@ -17535,7 +16906,7 @@
       </p:sp>
       <p:sp>
         <p:nvSpPr>
-          <p:cNvPr id="6" name="Rectangle 5"/>
+          <p:cNvPr id="5" name="Rectangle 4"/>
           <p:cNvSpPr/>
           <p:nvPr/>
         </p:nvSpPr>
@@ -17584,7 +16955,7 @@
       </p:sp>
       <p:sp>
         <p:nvSpPr>
-          <p:cNvPr id="7" name="Rectangle 6"/>
+          <p:cNvPr id="6" name="Rectangle 5"/>
           <p:cNvSpPr/>
           <p:nvPr/>
         </p:nvSpPr>
@@ -17633,7 +17004,7 @@
       </p:sp>
       <p:sp>
         <p:nvSpPr>
-          <p:cNvPr id="8" name="TextBox 7"/>
+          <p:cNvPr id="7" name="TextBox 6"/>
           <p:cNvSpPr txBox="1"/>
           <p:nvPr/>
         </p:nvSpPr>
@@ -17675,7 +17046,7 @@
       </p:sp>
       <p:sp>
         <p:nvSpPr>
-          <p:cNvPr id="9" name="TextBox 8"/>
+          <p:cNvPr id="8" name="TextBox 7"/>
           <p:cNvSpPr txBox="1"/>
           <p:nvPr/>
         </p:nvSpPr>
@@ -17717,7 +17088,7 @@
       </p:sp>
       <p:graphicFrame>
         <p:nvGraphicFramePr>
-          <p:cNvPr id="10" name="Table 9"/>
+          <p:cNvPr id="9" name="Table 8"/>
           <p:cNvGraphicFramePr>
             <a:graphicFrameLocks noGrp="1"/>
           </p:cNvGraphicFramePr>
@@ -18159,7 +17530,7 @@
       </p:graphicFrame>
       <p:sp>
         <p:nvSpPr>
-          <p:cNvPr id="11" name="Rectangle 10"/>
+          <p:cNvPr id="10" name="Rectangle 9"/>
           <p:cNvSpPr/>
           <p:nvPr/>
         </p:nvSpPr>
@@ -18208,7 +17579,7 @@
       </p:sp>
       <p:sp>
         <p:nvSpPr>
-          <p:cNvPr id="12" name="TextBox 11"/>
+          <p:cNvPr id="11" name="TextBox 10"/>
           <p:cNvSpPr txBox="1"/>
           <p:nvPr/>
         </p:nvSpPr>
@@ -18250,7 +17621,7 @@
       </p:sp>
       <p:graphicFrame>
         <p:nvGraphicFramePr>
-          <p:cNvPr id="13" name="Table 12"/>
+          <p:cNvPr id="12" name="Table 11"/>
           <p:cNvGraphicFramePr>
             <a:graphicFrameLocks noGrp="1"/>
           </p:cNvGraphicFramePr>
@@ -18668,7 +18039,7 @@
       </p:graphicFrame>
       <p:sp>
         <p:nvSpPr>
-          <p:cNvPr id="14" name="Rectangle 13"/>
+          <p:cNvPr id="13" name="Rectangle 12"/>
           <p:cNvSpPr/>
           <p:nvPr/>
         </p:nvSpPr>
@@ -18717,7 +18088,7 @@
       </p:sp>
       <p:sp>
         <p:nvSpPr>
-          <p:cNvPr id="15" name="TextBox 14"/>
+          <p:cNvPr id="14" name="TextBox 13"/>
           <p:cNvSpPr txBox="1"/>
           <p:nvPr/>
         </p:nvSpPr>
@@ -18759,7 +18130,7 @@
       </p:sp>
       <p:sp>
         <p:nvSpPr>
-          <p:cNvPr id="16" name="TextBox 15"/>
+          <p:cNvPr id="15" name="TextBox 14"/>
           <p:cNvSpPr txBox="1"/>
           <p:nvPr/>
         </p:nvSpPr>
@@ -18801,7 +18172,7 @@
       </p:sp>
       <p:sp>
         <p:nvSpPr>
-          <p:cNvPr id="17" name="TextBox 16"/>
+          <p:cNvPr id="16" name="TextBox 15"/>
           <p:cNvSpPr txBox="1"/>
           <p:nvPr/>
         </p:nvSpPr>
@@ -18917,7 +18288,7 @@
         <p:spPr>
           <a:xfrm>
             <a:off x="640080" y="329184"/>
-            <a:ext cx="5303520" cy="182880"/>
+            <a:ext cx="9875520" cy="182880"/>
           </a:xfrm>
           <a:prstGeom prst="rect">
             <a:avLst/>
@@ -18958,48 +18329,6 @@
         </p:nvSpPr>
         <p:spPr>
           <a:xfrm>
-            <a:off x="5897880" y="310896"/>
-            <a:ext cx="4800600" cy="256032"/>
-          </a:xfrm>
-          <a:prstGeom prst="rect">
-            <a:avLst/>
-          </a:prstGeom>
-          <a:noFill/>
-        </p:spPr>
-        <p:txBody>
-          <a:bodyPr wrap="none" lIns="9144" rIns="9144" tIns="9144" bIns="9144" anchor="t">
-            <a:spAutoFit/>
-          </a:bodyPr>
-          <a:lstStyle/>
-          <a:p>
-            <a:pPr algn="r">
-              <a:spcAft>
-                <a:spcPts val="0"/>
-              </a:spcAft>
-              <a:defRPr sz="680" b="1">
-                <a:solidFill>
-                  <a:srgbClr val="4F6B00"/>
-                </a:solidFill>
-                <a:latin typeface="Inter"/>
-              </a:defRPr>
-            </a:pPr>
-            <a:r>
-              <a:rPr>
-                <a:latin typeface="Inter"/>
-              </a:rPr>
-              <a:t>Illustrative, Gradient Maintained — demo data, not the client's holdings or managers</a:t>
-            </a:r>
-          </a:p>
-        </p:txBody>
-      </p:sp>
-      <p:sp>
-        <p:nvSpPr>
-          <p:cNvPr id="5" name="TextBox 4"/>
-          <p:cNvSpPr txBox="1"/>
-          <p:nvPr/>
-        </p:nvSpPr>
-        <p:spPr>
-          <a:xfrm>
             <a:off x="640080" y="566928"/>
             <a:ext cx="10058400" cy="530352"/>
           </a:xfrm>
@@ -19036,7 +18365,7 @@
       </p:sp>
       <p:sp>
         <p:nvSpPr>
-          <p:cNvPr id="6" name="Rectangle 5"/>
+          <p:cNvPr id="5" name="Rectangle 4"/>
           <p:cNvSpPr/>
           <p:nvPr/>
         </p:nvSpPr>
@@ -19085,7 +18414,7 @@
       </p:sp>
       <p:sp>
         <p:nvSpPr>
-          <p:cNvPr id="7" name="Rectangle 6"/>
+          <p:cNvPr id="6" name="Rectangle 5"/>
           <p:cNvSpPr/>
           <p:nvPr/>
         </p:nvSpPr>
@@ -19134,7 +18463,7 @@
       </p:sp>
       <p:sp>
         <p:nvSpPr>
-          <p:cNvPr id="8" name="TextBox 7"/>
+          <p:cNvPr id="7" name="TextBox 6"/>
           <p:cNvSpPr txBox="1"/>
           <p:nvPr/>
         </p:nvSpPr>
@@ -19176,7 +18505,7 @@
       </p:sp>
       <p:sp>
         <p:nvSpPr>
-          <p:cNvPr id="9" name="TextBox 8"/>
+          <p:cNvPr id="8" name="TextBox 7"/>
           <p:cNvSpPr txBox="1"/>
           <p:nvPr/>
         </p:nvSpPr>
@@ -19218,7 +18547,7 @@
       </p:sp>
       <p:graphicFrame>
         <p:nvGraphicFramePr>
-          <p:cNvPr id="10" name="Table 9"/>
+          <p:cNvPr id="9" name="Table 8"/>
           <p:cNvGraphicFramePr>
             <a:graphicFrameLocks noGrp="1"/>
           </p:cNvGraphicFramePr>
@@ -20231,7 +19560,7 @@
       </p:graphicFrame>
       <p:sp>
         <p:nvSpPr>
-          <p:cNvPr id="11" name="TextBox 10"/>
+          <p:cNvPr id="10" name="TextBox 9"/>
           <p:cNvSpPr txBox="1"/>
           <p:nvPr/>
         </p:nvSpPr>
@@ -20273,7 +19602,7 @@
       </p:sp>
       <p:sp>
         <p:nvSpPr>
-          <p:cNvPr id="12" name="Rectangle 11"/>
+          <p:cNvPr id="11" name="Rectangle 10"/>
           <p:cNvSpPr/>
           <p:nvPr/>
         </p:nvSpPr>
@@ -20322,7 +19651,7 @@
       </p:sp>
       <p:sp>
         <p:nvSpPr>
-          <p:cNvPr id="13" name="Rectangle 12"/>
+          <p:cNvPr id="12" name="Rectangle 11"/>
           <p:cNvSpPr/>
           <p:nvPr/>
         </p:nvSpPr>
@@ -20371,7 +19700,7 @@
       </p:sp>
       <p:sp>
         <p:nvSpPr>
-          <p:cNvPr id="14" name="TextBox 13"/>
+          <p:cNvPr id="13" name="TextBox 12"/>
           <p:cNvSpPr txBox="1"/>
           <p:nvPr/>
         </p:nvSpPr>
@@ -20413,7 +19742,7 @@
       </p:sp>
       <p:sp>
         <p:nvSpPr>
-          <p:cNvPr id="15" name="TextBox 14"/>
+          <p:cNvPr id="14" name="TextBox 13"/>
           <p:cNvSpPr txBox="1"/>
           <p:nvPr/>
         </p:nvSpPr>
@@ -20455,7 +19784,7 @@
       </p:sp>
       <p:sp>
         <p:nvSpPr>
-          <p:cNvPr id="16" name="Rectangle 15"/>
+          <p:cNvPr id="15" name="Rectangle 14"/>
           <p:cNvSpPr/>
           <p:nvPr/>
         </p:nvSpPr>
@@ -20504,7 +19833,7 @@
       </p:sp>
       <p:sp>
         <p:nvSpPr>
-          <p:cNvPr id="17" name="TextBox 16"/>
+          <p:cNvPr id="16" name="TextBox 15"/>
           <p:cNvSpPr txBox="1"/>
           <p:nvPr/>
         </p:nvSpPr>
@@ -20546,7 +19875,7 @@
       </p:sp>
       <p:sp>
         <p:nvSpPr>
-          <p:cNvPr id="18" name="TextBox 17"/>
+          <p:cNvPr id="17" name="TextBox 16"/>
           <p:cNvSpPr txBox="1"/>
           <p:nvPr/>
         </p:nvSpPr>
@@ -20588,7 +19917,7 @@
       </p:sp>
       <p:sp>
         <p:nvSpPr>
-          <p:cNvPr id="19" name="TextBox 18"/>
+          <p:cNvPr id="18" name="TextBox 17"/>
           <p:cNvSpPr txBox="1"/>
           <p:nvPr/>
         </p:nvSpPr>
@@ -20704,7 +20033,7 @@
         <p:spPr>
           <a:xfrm>
             <a:off x="640080" y="329184"/>
-            <a:ext cx="5303520" cy="182880"/>
+            <a:ext cx="9875520" cy="182880"/>
           </a:xfrm>
           <a:prstGeom prst="rect">
             <a:avLst/>
@@ -20745,48 +20074,6 @@
         </p:nvSpPr>
         <p:spPr>
           <a:xfrm>
-            <a:off x="5897880" y="310896"/>
-            <a:ext cx="4800600" cy="256032"/>
-          </a:xfrm>
-          <a:prstGeom prst="rect">
-            <a:avLst/>
-          </a:prstGeom>
-          <a:noFill/>
-        </p:spPr>
-        <p:txBody>
-          <a:bodyPr wrap="none" lIns="9144" rIns="9144" tIns="9144" bIns="9144" anchor="t">
-            <a:spAutoFit/>
-          </a:bodyPr>
-          <a:lstStyle/>
-          <a:p>
-            <a:pPr algn="r">
-              <a:spcAft>
-                <a:spcPts val="0"/>
-              </a:spcAft>
-              <a:defRPr sz="680" b="1">
-                <a:solidFill>
-                  <a:srgbClr val="4F6B00"/>
-                </a:solidFill>
-                <a:latin typeface="Inter"/>
-              </a:defRPr>
-            </a:pPr>
-            <a:r>
-              <a:rPr>
-                <a:latin typeface="Inter"/>
-              </a:rPr>
-              <a:t>Illustrative, Gradient Maintained — demo data, not the client's holdings or managers</a:t>
-            </a:r>
-          </a:p>
-        </p:txBody>
-      </p:sp>
-      <p:sp>
-        <p:nvSpPr>
-          <p:cNvPr id="5" name="TextBox 4"/>
-          <p:cNvSpPr txBox="1"/>
-          <p:nvPr/>
-        </p:nvSpPr>
-        <p:spPr>
-          <a:xfrm>
             <a:off x="640080" y="566928"/>
             <a:ext cx="10058400" cy="530352"/>
           </a:xfrm>
@@ -20823,7 +20110,7 @@
       </p:sp>
       <p:sp>
         <p:nvSpPr>
-          <p:cNvPr id="6" name="Rectangle 5"/>
+          <p:cNvPr id="5" name="Rectangle 4"/>
           <p:cNvSpPr/>
           <p:nvPr/>
         </p:nvSpPr>
@@ -20872,7 +20159,7 @@
       </p:sp>
       <p:sp>
         <p:nvSpPr>
-          <p:cNvPr id="7" name="Rectangle 6"/>
+          <p:cNvPr id="6" name="Rectangle 5"/>
           <p:cNvSpPr/>
           <p:nvPr/>
         </p:nvSpPr>
@@ -20921,7 +20208,7 @@
       </p:sp>
       <p:sp>
         <p:nvSpPr>
-          <p:cNvPr id="8" name="TextBox 7"/>
+          <p:cNvPr id="7" name="TextBox 6"/>
           <p:cNvSpPr txBox="1"/>
           <p:nvPr/>
         </p:nvSpPr>
@@ -20963,7 +20250,7 @@
       </p:sp>
       <p:sp>
         <p:nvSpPr>
-          <p:cNvPr id="9" name="Rectangle 8"/>
+          <p:cNvPr id="8" name="Rectangle 7"/>
           <p:cNvSpPr/>
           <p:nvPr/>
         </p:nvSpPr>
@@ -21012,7 +20299,7 @@
       </p:sp>
       <p:sp>
         <p:nvSpPr>
-          <p:cNvPr id="10" name="Rectangle 9"/>
+          <p:cNvPr id="9" name="Rectangle 8"/>
           <p:cNvSpPr/>
           <p:nvPr/>
         </p:nvSpPr>
@@ -21061,7 +20348,7 @@
       </p:sp>
       <p:sp>
         <p:nvSpPr>
-          <p:cNvPr id="11" name="TextBox 10"/>
+          <p:cNvPr id="10" name="TextBox 9"/>
           <p:cNvSpPr txBox="1"/>
           <p:nvPr/>
         </p:nvSpPr>
@@ -21103,7 +20390,7 @@
       </p:sp>
       <p:sp>
         <p:nvSpPr>
-          <p:cNvPr id="12" name="TextBox 11"/>
+          <p:cNvPr id="11" name="TextBox 10"/>
           <p:cNvSpPr txBox="1"/>
           <p:nvPr/>
         </p:nvSpPr>
@@ -21145,7 +20432,7 @@
       </p:sp>
       <p:sp>
         <p:nvSpPr>
-          <p:cNvPr id="13" name="Rectangle 12"/>
+          <p:cNvPr id="12" name="Rectangle 11"/>
           <p:cNvSpPr/>
           <p:nvPr/>
         </p:nvSpPr>
@@ -21194,7 +20481,7 @@
       </p:sp>
       <p:sp>
         <p:nvSpPr>
-          <p:cNvPr id="14" name="TextBox 13"/>
+          <p:cNvPr id="13" name="TextBox 12"/>
           <p:cNvSpPr txBox="1"/>
           <p:nvPr/>
         </p:nvSpPr>
@@ -21236,7 +20523,7 @@
       </p:sp>
       <p:sp>
         <p:nvSpPr>
-          <p:cNvPr id="15" name="TextBox 14"/>
+          <p:cNvPr id="14" name="TextBox 13"/>
           <p:cNvSpPr txBox="1"/>
           <p:nvPr/>
         </p:nvSpPr>
@@ -21278,7 +20565,7 @@
       </p:sp>
       <p:sp>
         <p:nvSpPr>
-          <p:cNvPr id="16" name="TextBox 15"/>
+          <p:cNvPr id="15" name="TextBox 14"/>
           <p:cNvSpPr txBox="1"/>
           <p:nvPr/>
         </p:nvSpPr>
@@ -21394,7 +20681,7 @@
         <p:spPr>
           <a:xfrm>
             <a:off x="640080" y="329184"/>
-            <a:ext cx="5303520" cy="182880"/>
+            <a:ext cx="9875520" cy="182880"/>
           </a:xfrm>
           <a:prstGeom prst="rect">
             <a:avLst/>
@@ -21435,48 +20722,6 @@
         </p:nvSpPr>
         <p:spPr>
           <a:xfrm>
-            <a:off x="5897880" y="310896"/>
-            <a:ext cx="4800600" cy="256032"/>
-          </a:xfrm>
-          <a:prstGeom prst="rect">
-            <a:avLst/>
-          </a:prstGeom>
-          <a:noFill/>
-        </p:spPr>
-        <p:txBody>
-          <a:bodyPr wrap="none" lIns="9144" rIns="9144" tIns="9144" bIns="9144" anchor="t">
-            <a:spAutoFit/>
-          </a:bodyPr>
-          <a:lstStyle/>
-          <a:p>
-            <a:pPr algn="r">
-              <a:spcAft>
-                <a:spcPts val="0"/>
-              </a:spcAft>
-              <a:defRPr sz="680" b="1">
-                <a:solidFill>
-                  <a:srgbClr val="4F6B00"/>
-                </a:solidFill>
-                <a:latin typeface="Inter"/>
-              </a:defRPr>
-            </a:pPr>
-            <a:r>
-              <a:rPr>
-                <a:latin typeface="Inter"/>
-              </a:rPr>
-              <a:t>Illustrative, Gradient Maintained — demo data, not the client's holdings or managers</a:t>
-            </a:r>
-          </a:p>
-        </p:txBody>
-      </p:sp>
-      <p:sp>
-        <p:nvSpPr>
-          <p:cNvPr id="5" name="TextBox 4"/>
-          <p:cNvSpPr txBox="1"/>
-          <p:nvPr/>
-        </p:nvSpPr>
-        <p:spPr>
-          <a:xfrm>
             <a:off x="640080" y="566928"/>
             <a:ext cx="10058400" cy="530352"/>
           </a:xfrm>
@@ -21513,7 +20758,7 @@
       </p:sp>
       <p:sp>
         <p:nvSpPr>
-          <p:cNvPr id="6" name="Rectangle 5"/>
+          <p:cNvPr id="5" name="Rectangle 4"/>
           <p:cNvSpPr/>
           <p:nvPr/>
         </p:nvSpPr>
@@ -21562,7 +20807,7 @@
       </p:sp>
       <p:sp>
         <p:nvSpPr>
-          <p:cNvPr id="7" name="Rectangle 6"/>
+          <p:cNvPr id="6" name="Rectangle 5"/>
           <p:cNvSpPr/>
           <p:nvPr/>
         </p:nvSpPr>
@@ -21611,7 +20856,7 @@
       </p:sp>
       <p:sp>
         <p:nvSpPr>
-          <p:cNvPr id="8" name="TextBox 7"/>
+          <p:cNvPr id="7" name="TextBox 6"/>
           <p:cNvSpPr txBox="1"/>
           <p:nvPr/>
         </p:nvSpPr>
@@ -21653,7 +20898,7 @@
       </p:sp>
       <p:sp>
         <p:nvSpPr>
-          <p:cNvPr id="9" name="TextBox 8"/>
+          <p:cNvPr id="8" name="TextBox 7"/>
           <p:cNvSpPr txBox="1"/>
           <p:nvPr/>
         </p:nvSpPr>
@@ -21695,7 +20940,7 @@
       </p:sp>
       <p:graphicFrame>
         <p:nvGraphicFramePr>
-          <p:cNvPr id="10" name="Chart 9"/>
+          <p:cNvPr id="9" name="Chart 8"/>
           <p:cNvGraphicFramePr>
             <a:graphicFrameLocks noGrp="1"/>
           </p:cNvGraphicFramePr>
@@ -21713,7 +20958,7 @@
       </p:graphicFrame>
       <p:sp>
         <p:nvSpPr>
-          <p:cNvPr id="11" name="Rectangle 10"/>
+          <p:cNvPr id="10" name="Rectangle 9"/>
           <p:cNvSpPr/>
           <p:nvPr/>
         </p:nvSpPr>
@@ -21762,7 +21007,7 @@
       </p:sp>
       <p:sp>
         <p:nvSpPr>
-          <p:cNvPr id="12" name="TextBox 11"/>
+          <p:cNvPr id="11" name="TextBox 10"/>
           <p:cNvSpPr txBox="1"/>
           <p:nvPr/>
         </p:nvSpPr>
@@ -21804,7 +21049,7 @@
       </p:sp>
       <p:sp>
         <p:nvSpPr>
-          <p:cNvPr id="13" name="TextBox 12"/>
+          <p:cNvPr id="12" name="TextBox 11"/>
           <p:cNvSpPr txBox="1"/>
           <p:nvPr/>
         </p:nvSpPr>
@@ -21846,7 +21091,7 @@
       </p:sp>
       <p:sp>
         <p:nvSpPr>
-          <p:cNvPr id="14" name="TextBox 13"/>
+          <p:cNvPr id="13" name="TextBox 12"/>
           <p:cNvSpPr txBox="1"/>
           <p:nvPr/>
         </p:nvSpPr>
@@ -21962,7 +21207,7 @@
         <p:spPr>
           <a:xfrm>
             <a:off x="640080" y="329184"/>
-            <a:ext cx="5303520" cy="182880"/>
+            <a:ext cx="9875520" cy="182880"/>
           </a:xfrm>
           <a:prstGeom prst="rect">
             <a:avLst/>
@@ -22003,48 +21248,6 @@
         </p:nvSpPr>
         <p:spPr>
           <a:xfrm>
-            <a:off x="5897880" y="310896"/>
-            <a:ext cx="4800600" cy="256032"/>
-          </a:xfrm>
-          <a:prstGeom prst="rect">
-            <a:avLst/>
-          </a:prstGeom>
-          <a:noFill/>
-        </p:spPr>
-        <p:txBody>
-          <a:bodyPr wrap="none" lIns="9144" rIns="9144" tIns="9144" bIns="9144" anchor="t">
-            <a:spAutoFit/>
-          </a:bodyPr>
-          <a:lstStyle/>
-          <a:p>
-            <a:pPr algn="r">
-              <a:spcAft>
-                <a:spcPts val="0"/>
-              </a:spcAft>
-              <a:defRPr sz="680" b="1">
-                <a:solidFill>
-                  <a:srgbClr val="4F6B00"/>
-                </a:solidFill>
-                <a:latin typeface="Inter"/>
-              </a:defRPr>
-            </a:pPr>
-            <a:r>
-              <a:rPr>
-                <a:latin typeface="Inter"/>
-              </a:rPr>
-              <a:t>Illustrative, Gradient Maintained — demo data, not the client's holdings or managers</a:t>
-            </a:r>
-          </a:p>
-        </p:txBody>
-      </p:sp>
-      <p:sp>
-        <p:nvSpPr>
-          <p:cNvPr id="5" name="TextBox 4"/>
-          <p:cNvSpPr txBox="1"/>
-          <p:nvPr/>
-        </p:nvSpPr>
-        <p:spPr>
-          <a:xfrm>
             <a:off x="640080" y="566928"/>
             <a:ext cx="10058400" cy="530352"/>
           </a:xfrm>
@@ -22081,7 +21284,7 @@
       </p:sp>
       <p:sp>
         <p:nvSpPr>
-          <p:cNvPr id="6" name="Rectangle 5"/>
+          <p:cNvPr id="5" name="Rectangle 4"/>
           <p:cNvSpPr/>
           <p:nvPr/>
         </p:nvSpPr>
@@ -22130,7 +21333,7 @@
       </p:sp>
       <p:sp>
         <p:nvSpPr>
-          <p:cNvPr id="7" name="Rectangle 6"/>
+          <p:cNvPr id="6" name="Rectangle 5"/>
           <p:cNvSpPr/>
           <p:nvPr/>
         </p:nvSpPr>
@@ -22179,7 +21382,7 @@
       </p:sp>
       <p:sp>
         <p:nvSpPr>
-          <p:cNvPr id="8" name="TextBox 7"/>
+          <p:cNvPr id="7" name="TextBox 6"/>
           <p:cNvSpPr txBox="1"/>
           <p:nvPr/>
         </p:nvSpPr>
@@ -22221,7 +21424,7 @@
       </p:sp>
       <p:sp>
         <p:nvSpPr>
-          <p:cNvPr id="9" name="TextBox 8"/>
+          <p:cNvPr id="8" name="TextBox 7"/>
           <p:cNvSpPr txBox="1"/>
           <p:nvPr/>
         </p:nvSpPr>
@@ -22263,7 +21466,7 @@
       </p:sp>
       <p:sp>
         <p:nvSpPr>
-          <p:cNvPr id="10" name="Rectangle 9"/>
+          <p:cNvPr id="9" name="Rectangle 8"/>
           <p:cNvSpPr/>
           <p:nvPr/>
         </p:nvSpPr>
@@ -22312,7 +21515,7 @@
       </p:sp>
       <p:sp>
         <p:nvSpPr>
-          <p:cNvPr id="11" name="Rectangle 10"/>
+          <p:cNvPr id="10" name="Rectangle 9"/>
           <p:cNvSpPr/>
           <p:nvPr/>
         </p:nvSpPr>
@@ -22361,7 +21564,7 @@
       </p:sp>
       <p:sp>
         <p:nvSpPr>
-          <p:cNvPr id="12" name="TextBox 11"/>
+          <p:cNvPr id="11" name="TextBox 10"/>
           <p:cNvSpPr txBox="1"/>
           <p:nvPr/>
         </p:nvSpPr>
@@ -22403,7 +21606,7 @@
       </p:sp>
       <p:sp>
         <p:nvSpPr>
-          <p:cNvPr id="13" name="TextBox 12"/>
+          <p:cNvPr id="12" name="TextBox 11"/>
           <p:cNvSpPr txBox="1"/>
           <p:nvPr/>
         </p:nvSpPr>
@@ -22445,7 +21648,7 @@
       </p:sp>
       <p:sp>
         <p:nvSpPr>
-          <p:cNvPr id="14" name="TextBox 13"/>
+          <p:cNvPr id="13" name="TextBox 12"/>
           <p:cNvSpPr txBox="1"/>
           <p:nvPr/>
         </p:nvSpPr>
@@ -22487,7 +21690,7 @@
       </p:sp>
       <p:sp>
         <p:nvSpPr>
-          <p:cNvPr id="15" name="Rectangle 14"/>
+          <p:cNvPr id="14" name="Rectangle 13"/>
           <p:cNvSpPr/>
           <p:nvPr/>
         </p:nvSpPr>
@@ -22536,7 +21739,7 @@
       </p:sp>
       <p:sp>
         <p:nvSpPr>
-          <p:cNvPr id="16" name="Rectangle 15"/>
+          <p:cNvPr id="15" name="Rectangle 14"/>
           <p:cNvSpPr/>
           <p:nvPr/>
         </p:nvSpPr>
@@ -22585,7 +21788,7 @@
       </p:sp>
       <p:sp>
         <p:nvSpPr>
-          <p:cNvPr id="17" name="TextBox 16"/>
+          <p:cNvPr id="16" name="TextBox 15"/>
           <p:cNvSpPr txBox="1"/>
           <p:nvPr/>
         </p:nvSpPr>
@@ -22627,7 +21830,7 @@
       </p:sp>
       <p:sp>
         <p:nvSpPr>
-          <p:cNvPr id="18" name="TextBox 17"/>
+          <p:cNvPr id="17" name="TextBox 16"/>
           <p:cNvSpPr txBox="1"/>
           <p:nvPr/>
         </p:nvSpPr>
@@ -22669,7 +21872,7 @@
       </p:sp>
       <p:sp>
         <p:nvSpPr>
-          <p:cNvPr id="19" name="TextBox 18"/>
+          <p:cNvPr id="18" name="TextBox 17"/>
           <p:cNvSpPr txBox="1"/>
           <p:nvPr/>
         </p:nvSpPr>
@@ -22711,7 +21914,7 @@
       </p:sp>
       <p:sp>
         <p:nvSpPr>
-          <p:cNvPr id="20" name="Rectangle 19"/>
+          <p:cNvPr id="19" name="Rectangle 18"/>
           <p:cNvSpPr/>
           <p:nvPr/>
         </p:nvSpPr>
@@ -22760,7 +21963,7 @@
       </p:sp>
       <p:sp>
         <p:nvSpPr>
-          <p:cNvPr id="21" name="Rectangle 20"/>
+          <p:cNvPr id="20" name="Rectangle 19"/>
           <p:cNvSpPr/>
           <p:nvPr/>
         </p:nvSpPr>
@@ -22809,7 +22012,7 @@
       </p:sp>
       <p:sp>
         <p:nvSpPr>
-          <p:cNvPr id="22" name="TextBox 21"/>
+          <p:cNvPr id="21" name="TextBox 20"/>
           <p:cNvSpPr txBox="1"/>
           <p:nvPr/>
         </p:nvSpPr>
@@ -22851,7 +22054,7 @@
       </p:sp>
       <p:sp>
         <p:nvSpPr>
-          <p:cNvPr id="23" name="TextBox 22"/>
+          <p:cNvPr id="22" name="TextBox 21"/>
           <p:cNvSpPr txBox="1"/>
           <p:nvPr/>
         </p:nvSpPr>
@@ -22893,7 +22096,7 @@
       </p:sp>
       <p:sp>
         <p:nvSpPr>
-          <p:cNvPr id="24" name="TextBox 23"/>
+          <p:cNvPr id="23" name="TextBox 22"/>
           <p:cNvSpPr txBox="1"/>
           <p:nvPr/>
         </p:nvSpPr>
@@ -22935,7 +22138,7 @@
       </p:sp>
       <p:sp>
         <p:nvSpPr>
-          <p:cNvPr id="25" name="TextBox 24"/>
+          <p:cNvPr id="24" name="TextBox 23"/>
           <p:cNvSpPr txBox="1"/>
           <p:nvPr/>
         </p:nvSpPr>
@@ -22977,7 +22180,7 @@
       </p:sp>
       <p:graphicFrame>
         <p:nvGraphicFramePr>
-          <p:cNvPr id="26" name="Table 25"/>
+          <p:cNvPr id="25" name="Table 24"/>
           <p:cNvGraphicFramePr>
             <a:graphicFrameLocks noGrp="1"/>
           </p:cNvGraphicFramePr>
@@ -23554,7 +22757,7 @@
       </p:graphicFrame>
       <p:sp>
         <p:nvSpPr>
-          <p:cNvPr id="27" name="Rectangle 26"/>
+          <p:cNvPr id="26" name="Rectangle 25"/>
           <p:cNvSpPr/>
           <p:nvPr/>
         </p:nvSpPr>
@@ -23603,7 +22806,7 @@
       </p:sp>
       <p:sp>
         <p:nvSpPr>
-          <p:cNvPr id="28" name="Rectangle 27"/>
+          <p:cNvPr id="27" name="Rectangle 26"/>
           <p:cNvSpPr/>
           <p:nvPr/>
         </p:nvSpPr>
@@ -23652,7 +22855,7 @@
       </p:sp>
       <p:sp>
         <p:nvSpPr>
-          <p:cNvPr id="29" name="TextBox 28"/>
+          <p:cNvPr id="28" name="TextBox 27"/>
           <p:cNvSpPr txBox="1"/>
           <p:nvPr/>
         </p:nvSpPr>
@@ -23694,7 +22897,7 @@
       </p:sp>
       <p:sp>
         <p:nvSpPr>
-          <p:cNvPr id="30" name="TextBox 29"/>
+          <p:cNvPr id="29" name="TextBox 28"/>
           <p:cNvSpPr txBox="1"/>
           <p:nvPr/>
         </p:nvSpPr>
@@ -23736,7 +22939,7 @@
       </p:sp>
       <p:sp>
         <p:nvSpPr>
-          <p:cNvPr id="31" name="Rectangle 30"/>
+          <p:cNvPr id="30" name="Rectangle 29"/>
           <p:cNvSpPr/>
           <p:nvPr/>
         </p:nvSpPr>
@@ -23785,7 +22988,7 @@
       </p:sp>
       <p:sp>
         <p:nvSpPr>
-          <p:cNvPr id="32" name="TextBox 31"/>
+          <p:cNvPr id="31" name="TextBox 30"/>
           <p:cNvSpPr txBox="1"/>
           <p:nvPr/>
         </p:nvSpPr>
@@ -23827,7 +23030,7 @@
       </p:sp>
       <p:sp>
         <p:nvSpPr>
-          <p:cNvPr id="33" name="TextBox 32"/>
+          <p:cNvPr id="32" name="TextBox 31"/>
           <p:cNvSpPr txBox="1"/>
           <p:nvPr/>
         </p:nvSpPr>
@@ -23869,7 +23072,7 @@
       </p:sp>
       <p:sp>
         <p:nvSpPr>
-          <p:cNvPr id="34" name="TextBox 33"/>
+          <p:cNvPr id="33" name="TextBox 32"/>
           <p:cNvSpPr txBox="1"/>
           <p:nvPr/>
         </p:nvSpPr>
@@ -23985,7 +23188,7 @@
         <p:spPr>
           <a:xfrm>
             <a:off x="640080" y="329184"/>
-            <a:ext cx="5303520" cy="182880"/>
+            <a:ext cx="9875520" cy="182880"/>
           </a:xfrm>
           <a:prstGeom prst="rect">
             <a:avLst/>
@@ -24026,48 +23229,6 @@
         </p:nvSpPr>
         <p:spPr>
           <a:xfrm>
-            <a:off x="5897880" y="310896"/>
-            <a:ext cx="4800600" cy="256032"/>
-          </a:xfrm>
-          <a:prstGeom prst="rect">
-            <a:avLst/>
-          </a:prstGeom>
-          <a:noFill/>
-        </p:spPr>
-        <p:txBody>
-          <a:bodyPr wrap="none" lIns="9144" rIns="9144" tIns="9144" bIns="9144" anchor="t">
-            <a:spAutoFit/>
-          </a:bodyPr>
-          <a:lstStyle/>
-          <a:p>
-            <a:pPr algn="r">
-              <a:spcAft>
-                <a:spcPts val="0"/>
-              </a:spcAft>
-              <a:defRPr sz="680" b="1">
-                <a:solidFill>
-                  <a:srgbClr val="4F6B00"/>
-                </a:solidFill>
-                <a:latin typeface="Inter"/>
-              </a:defRPr>
-            </a:pPr>
-            <a:r>
-              <a:rPr>
-                <a:latin typeface="Inter"/>
-              </a:rPr>
-              <a:t>Illustrative, Gradient Maintained — demo data, not the client's holdings or managers</a:t>
-            </a:r>
-          </a:p>
-        </p:txBody>
-      </p:sp>
-      <p:sp>
-        <p:nvSpPr>
-          <p:cNvPr id="5" name="TextBox 4"/>
-          <p:cNvSpPr txBox="1"/>
-          <p:nvPr/>
-        </p:nvSpPr>
-        <p:spPr>
-          <a:xfrm>
             <a:off x="640080" y="566928"/>
             <a:ext cx="10058400" cy="530352"/>
           </a:xfrm>
@@ -24104,7 +23265,7 @@
       </p:sp>
       <p:sp>
         <p:nvSpPr>
-          <p:cNvPr id="6" name="Rectangle 5"/>
+          <p:cNvPr id="5" name="Rectangle 4"/>
           <p:cNvSpPr/>
           <p:nvPr/>
         </p:nvSpPr>
@@ -24153,7 +23314,7 @@
       </p:sp>
       <p:sp>
         <p:nvSpPr>
-          <p:cNvPr id="7" name="Rectangle 6"/>
+          <p:cNvPr id="6" name="Rectangle 5"/>
           <p:cNvSpPr/>
           <p:nvPr/>
         </p:nvSpPr>
@@ -24202,7 +23363,7 @@
       </p:sp>
       <p:sp>
         <p:nvSpPr>
-          <p:cNvPr id="8" name="TextBox 7"/>
+          <p:cNvPr id="7" name="TextBox 6"/>
           <p:cNvSpPr txBox="1"/>
           <p:nvPr/>
         </p:nvSpPr>
@@ -24244,7 +23405,7 @@
       </p:sp>
       <p:sp>
         <p:nvSpPr>
-          <p:cNvPr id="9" name="TextBox 8"/>
+          <p:cNvPr id="8" name="TextBox 7"/>
           <p:cNvSpPr txBox="1"/>
           <p:nvPr/>
         </p:nvSpPr>
@@ -24286,7 +23447,7 @@
       </p:sp>
       <p:sp>
         <p:nvSpPr>
-          <p:cNvPr id="10" name="Rectangle 9"/>
+          <p:cNvPr id="9" name="Rectangle 8"/>
           <p:cNvSpPr/>
           <p:nvPr/>
         </p:nvSpPr>
@@ -24335,7 +23496,7 @@
       </p:sp>
       <p:sp>
         <p:nvSpPr>
-          <p:cNvPr id="11" name="Rectangle 10"/>
+          <p:cNvPr id="10" name="Rectangle 9"/>
           <p:cNvSpPr/>
           <p:nvPr/>
         </p:nvSpPr>
@@ -24384,7 +23545,7 @@
       </p:sp>
       <p:sp>
         <p:nvSpPr>
-          <p:cNvPr id="12" name="TextBox 11"/>
+          <p:cNvPr id="11" name="TextBox 10"/>
           <p:cNvSpPr txBox="1"/>
           <p:nvPr/>
         </p:nvSpPr>
@@ -24426,7 +23587,7 @@
       </p:sp>
       <p:sp>
         <p:nvSpPr>
-          <p:cNvPr id="13" name="TextBox 12"/>
+          <p:cNvPr id="12" name="TextBox 11"/>
           <p:cNvSpPr txBox="1"/>
           <p:nvPr/>
         </p:nvSpPr>
@@ -24468,7 +23629,7 @@
       </p:sp>
       <p:sp>
         <p:nvSpPr>
-          <p:cNvPr id="14" name="TextBox 13"/>
+          <p:cNvPr id="13" name="TextBox 12"/>
           <p:cNvSpPr txBox="1"/>
           <p:nvPr/>
         </p:nvSpPr>
@@ -24510,7 +23671,7 @@
       </p:sp>
       <p:sp>
         <p:nvSpPr>
-          <p:cNvPr id="15" name="Rectangle 14"/>
+          <p:cNvPr id="14" name="Rectangle 13"/>
           <p:cNvSpPr/>
           <p:nvPr/>
         </p:nvSpPr>
@@ -24559,7 +23720,7 @@
       </p:sp>
       <p:sp>
         <p:nvSpPr>
-          <p:cNvPr id="16" name="Rectangle 15"/>
+          <p:cNvPr id="15" name="Rectangle 14"/>
           <p:cNvSpPr/>
           <p:nvPr/>
         </p:nvSpPr>
@@ -24608,7 +23769,7 @@
       </p:sp>
       <p:sp>
         <p:nvSpPr>
-          <p:cNvPr id="17" name="TextBox 16"/>
+          <p:cNvPr id="16" name="TextBox 15"/>
           <p:cNvSpPr txBox="1"/>
           <p:nvPr/>
         </p:nvSpPr>
@@ -24650,7 +23811,7 @@
       </p:sp>
       <p:sp>
         <p:nvSpPr>
-          <p:cNvPr id="18" name="TextBox 17"/>
+          <p:cNvPr id="17" name="TextBox 16"/>
           <p:cNvSpPr txBox="1"/>
           <p:nvPr/>
         </p:nvSpPr>
@@ -24692,7 +23853,7 @@
       </p:sp>
       <p:sp>
         <p:nvSpPr>
-          <p:cNvPr id="19" name="TextBox 18"/>
+          <p:cNvPr id="18" name="TextBox 17"/>
           <p:cNvSpPr txBox="1"/>
           <p:nvPr/>
         </p:nvSpPr>
@@ -24734,7 +23895,7 @@
       </p:sp>
       <p:sp>
         <p:nvSpPr>
-          <p:cNvPr id="20" name="TextBox 19"/>
+          <p:cNvPr id="19" name="TextBox 18"/>
           <p:cNvSpPr txBox="1"/>
           <p:nvPr/>
         </p:nvSpPr>
@@ -24776,7 +23937,7 @@
       </p:sp>
       <p:graphicFrame>
         <p:nvGraphicFramePr>
-          <p:cNvPr id="21" name="Table 20"/>
+          <p:cNvPr id="20" name="Table 19"/>
           <p:cNvGraphicFramePr>
             <a:graphicFrameLocks noGrp="1"/>
           </p:cNvGraphicFramePr>
@@ -25298,7 +24459,7 @@
       </p:graphicFrame>
       <p:sp>
         <p:nvSpPr>
-          <p:cNvPr id="22" name="TextBox 21"/>
+          <p:cNvPr id="21" name="TextBox 20"/>
           <p:cNvSpPr txBox="1"/>
           <p:nvPr/>
         </p:nvSpPr>
@@ -25416,7 +24577,7 @@
       </p:sp>
       <p:sp>
         <p:nvSpPr>
-          <p:cNvPr id="23" name="Rectangle 22"/>
+          <p:cNvPr id="22" name="Rectangle 21"/>
           <p:cNvSpPr/>
           <p:nvPr/>
         </p:nvSpPr>
@@ -25465,7 +24626,7 @@
       </p:sp>
       <p:sp>
         <p:nvSpPr>
-          <p:cNvPr id="24" name="TextBox 23"/>
+          <p:cNvPr id="23" name="TextBox 22"/>
           <p:cNvSpPr txBox="1"/>
           <p:nvPr/>
         </p:nvSpPr>
@@ -25507,7 +24668,7 @@
       </p:sp>
       <p:sp>
         <p:nvSpPr>
-          <p:cNvPr id="25" name="TextBox 24"/>
+          <p:cNvPr id="24" name="TextBox 23"/>
           <p:cNvSpPr txBox="1"/>
           <p:nvPr/>
         </p:nvSpPr>
@@ -25549,7 +24710,7 @@
       </p:sp>
       <p:sp>
         <p:nvSpPr>
-          <p:cNvPr id="26" name="TextBox 25"/>
+          <p:cNvPr id="25" name="TextBox 24"/>
           <p:cNvSpPr txBox="1"/>
           <p:nvPr/>
         </p:nvSpPr>
@@ -25665,7 +24826,7 @@
         <p:spPr>
           <a:xfrm>
             <a:off x="640080" y="329184"/>
-            <a:ext cx="5303520" cy="182880"/>
+            <a:ext cx="9875520" cy="182880"/>
           </a:xfrm>
           <a:prstGeom prst="rect">
             <a:avLst/>
@@ -25706,48 +24867,6 @@
         </p:nvSpPr>
         <p:spPr>
           <a:xfrm>
-            <a:off x="5897880" y="310896"/>
-            <a:ext cx="4800600" cy="256032"/>
-          </a:xfrm>
-          <a:prstGeom prst="rect">
-            <a:avLst/>
-          </a:prstGeom>
-          <a:noFill/>
-        </p:spPr>
-        <p:txBody>
-          <a:bodyPr wrap="none" lIns="9144" rIns="9144" tIns="9144" bIns="9144" anchor="t">
-            <a:spAutoFit/>
-          </a:bodyPr>
-          <a:lstStyle/>
-          <a:p>
-            <a:pPr algn="r">
-              <a:spcAft>
-                <a:spcPts val="0"/>
-              </a:spcAft>
-              <a:defRPr sz="680" b="1">
-                <a:solidFill>
-                  <a:srgbClr val="4F6B00"/>
-                </a:solidFill>
-                <a:latin typeface="Inter"/>
-              </a:defRPr>
-            </a:pPr>
-            <a:r>
-              <a:rPr>
-                <a:latin typeface="Inter"/>
-              </a:rPr>
-              <a:t>Illustrative, Gradient Maintained — demo data, not the client's holdings or managers</a:t>
-            </a:r>
-          </a:p>
-        </p:txBody>
-      </p:sp>
-      <p:sp>
-        <p:nvSpPr>
-          <p:cNvPr id="5" name="TextBox 4"/>
-          <p:cNvSpPr txBox="1"/>
-          <p:nvPr/>
-        </p:nvSpPr>
-        <p:spPr>
-          <a:xfrm>
             <a:off x="640080" y="566928"/>
             <a:ext cx="10058400" cy="530352"/>
           </a:xfrm>
@@ -25784,7 +24903,7 @@
       </p:sp>
       <p:sp>
         <p:nvSpPr>
-          <p:cNvPr id="6" name="Rectangle 5"/>
+          <p:cNvPr id="5" name="Rectangle 4"/>
           <p:cNvSpPr/>
           <p:nvPr/>
         </p:nvSpPr>
@@ -25833,7 +24952,7 @@
       </p:sp>
       <p:sp>
         <p:nvSpPr>
-          <p:cNvPr id="7" name="Rectangle 6"/>
+          <p:cNvPr id="6" name="Rectangle 5"/>
           <p:cNvSpPr/>
           <p:nvPr/>
         </p:nvSpPr>
@@ -25882,7 +25001,7 @@
       </p:sp>
       <p:sp>
         <p:nvSpPr>
-          <p:cNvPr id="8" name="TextBox 7"/>
+          <p:cNvPr id="7" name="TextBox 6"/>
           <p:cNvSpPr txBox="1"/>
           <p:nvPr/>
         </p:nvSpPr>
@@ -25924,7 +25043,7 @@
       </p:sp>
       <p:graphicFrame>
         <p:nvGraphicFramePr>
-          <p:cNvPr id="9" name="Table 8"/>
+          <p:cNvPr id="8" name="Table 7"/>
           <p:cNvGraphicFramePr>
             <a:graphicFrameLocks noGrp="1"/>
           </p:cNvGraphicFramePr>
@@ -26073,7 +25192,7 @@
                         <a:rPr>
                           <a:latin typeface="Inter"/>
                         </a:rPr>
-                        <a:t>● available</a:t>
+                        <a:t>● Available</a:t>
                       </a:r>
                     </a:p>
                   </a:txBody>
@@ -26156,7 +25275,7 @@
                         <a:rPr>
                           <a:latin typeface="Inter"/>
                         </a:rPr>
-                        <a:t>● available</a:t>
+                        <a:t>● Available</a:t>
                       </a:r>
                     </a:p>
                   </a:txBody>
@@ -26239,7 +25358,7 @@
                         <a:rPr>
                           <a:latin typeface="Inter"/>
                         </a:rPr>
-                        <a:t>● available</a:t>
+                        <a:t>● Available</a:t>
                       </a:r>
                     </a:p>
                   </a:txBody>
@@ -26322,7 +25441,7 @@
                         <a:rPr>
                           <a:latin typeface="Inter"/>
                         </a:rPr>
-                        <a:t>● available</a:t>
+                        <a:t>● Available</a:t>
                       </a:r>
                     </a:p>
                   </a:txBody>
@@ -26405,7 +25524,7 @@
                         <a:rPr>
                           <a:latin typeface="Inter"/>
                         </a:rPr>
-                        <a:t>● available</a:t>
+                        <a:t>● Available</a:t>
                       </a:r>
                     </a:p>
                   </a:txBody>
@@ -26488,7 +25607,7 @@
                         <a:rPr>
                           <a:latin typeface="Inter"/>
                         </a:rPr>
-                        <a:t>● available</a:t>
+                        <a:t>● Available</a:t>
                       </a:r>
                     </a:p>
                   </a:txBody>
@@ -26571,7 +25690,7 @@
                         <a:rPr>
                           <a:latin typeface="Inter"/>
                         </a:rPr>
-                        <a:t>● available</a:t>
+                        <a:t>● Available</a:t>
                       </a:r>
                     </a:p>
                   </a:txBody>
@@ -26615,7 +25734,7 @@
       </p:graphicFrame>
       <p:sp>
         <p:nvSpPr>
-          <p:cNvPr id="10" name="Rectangle 9"/>
+          <p:cNvPr id="9" name="Rectangle 8"/>
           <p:cNvSpPr/>
           <p:nvPr/>
         </p:nvSpPr>
@@ -26664,7 +25783,7 @@
       </p:sp>
       <p:sp>
         <p:nvSpPr>
-          <p:cNvPr id="11" name="TextBox 10"/>
+          <p:cNvPr id="10" name="TextBox 9"/>
           <p:cNvSpPr txBox="1"/>
           <p:nvPr/>
         </p:nvSpPr>
@@ -26706,7 +25825,7 @@
       </p:sp>
       <p:sp>
         <p:nvSpPr>
-          <p:cNvPr id="12" name="TextBox 11"/>
+          <p:cNvPr id="11" name="TextBox 10"/>
           <p:cNvSpPr txBox="1"/>
           <p:nvPr/>
         </p:nvSpPr>
@@ -26748,7 +25867,7 @@
       </p:sp>
       <p:sp>
         <p:nvSpPr>
-          <p:cNvPr id="13" name="TextBox 12"/>
+          <p:cNvPr id="12" name="TextBox 11"/>
           <p:cNvSpPr txBox="1"/>
           <p:nvPr/>
         </p:nvSpPr>
@@ -26863,48 +25982,6 @@
         </p:nvSpPr>
         <p:spPr>
           <a:xfrm>
-            <a:off x="5897880" y="310896"/>
-            <a:ext cx="4800600" cy="256032"/>
-          </a:xfrm>
-          <a:prstGeom prst="rect">
-            <a:avLst/>
-          </a:prstGeom>
-          <a:noFill/>
-        </p:spPr>
-        <p:txBody>
-          <a:bodyPr wrap="none" lIns="9144" rIns="9144" tIns="9144" bIns="9144" anchor="t">
-            <a:spAutoFit/>
-          </a:bodyPr>
-          <a:lstStyle/>
-          <a:p>
-            <a:pPr algn="r">
-              <a:spcAft>
-                <a:spcPts val="0"/>
-              </a:spcAft>
-              <a:defRPr sz="680" b="1">
-                <a:solidFill>
-                  <a:srgbClr val="4F6B00"/>
-                </a:solidFill>
-                <a:latin typeface="Inter"/>
-              </a:defRPr>
-            </a:pPr>
-            <a:r>
-              <a:rPr>
-                <a:latin typeface="Inter"/>
-              </a:rPr>
-              <a:t>Illustrative, Gradient Maintained — demo data, not the client's holdings or managers</a:t>
-            </a:r>
-          </a:p>
-        </p:txBody>
-      </p:sp>
-      <p:sp>
-        <p:nvSpPr>
-          <p:cNvPr id="4" name="TextBox 3"/>
-          <p:cNvSpPr txBox="1"/>
-          <p:nvPr/>
-        </p:nvSpPr>
-        <p:spPr>
-          <a:xfrm>
             <a:off x="640080" y="566928"/>
             <a:ext cx="10058400" cy="530352"/>
           </a:xfrm>
@@ -26941,7 +26018,7 @@
       </p:sp>
       <p:sp>
         <p:nvSpPr>
-          <p:cNvPr id="5" name="Rectangle 4"/>
+          <p:cNvPr id="4" name="Rectangle 3"/>
           <p:cNvSpPr/>
           <p:nvPr/>
         </p:nvSpPr>
@@ -26990,7 +26067,7 @@
       </p:sp>
       <p:sp>
         <p:nvSpPr>
-          <p:cNvPr id="6" name="Rectangle 5"/>
+          <p:cNvPr id="5" name="Rectangle 4"/>
           <p:cNvSpPr/>
           <p:nvPr/>
         </p:nvSpPr>
@@ -27039,7 +26116,7 @@
       </p:sp>
       <p:sp>
         <p:nvSpPr>
-          <p:cNvPr id="7" name="TextBox 6"/>
+          <p:cNvPr id="6" name="TextBox 5"/>
           <p:cNvSpPr txBox="1"/>
           <p:nvPr/>
         </p:nvSpPr>
@@ -27081,7 +26158,7 @@
       </p:sp>
       <p:graphicFrame>
         <p:nvGraphicFramePr>
-          <p:cNvPr id="8" name="Table 7"/>
+          <p:cNvPr id="7" name="Table 6"/>
           <p:cNvGraphicFramePr>
             <a:graphicFrameLocks noGrp="1"/>
           </p:cNvGraphicFramePr>
@@ -27099,14 +26176,10 @@
               </a:tblPr>
               <a:tblGrid>
                 <a:gridCol w="2011680"/>
-                <a:gridCol w="1112139"/>
-                <a:gridCol w="1112139"/>
-                <a:gridCol w="1112139"/>
-                <a:gridCol w="1112139"/>
-                <a:gridCol w="1112139"/>
-                <a:gridCol w="1112139"/>
-                <a:gridCol w="1112139"/>
-                <a:gridCol w="1112139"/>
+                <a:gridCol w="2224278"/>
+                <a:gridCol w="2224278"/>
+                <a:gridCol w="2224278"/>
+                <a:gridCol w="2224278"/>
               </a:tblGrid>
               <a:tr h="586359">
                 <a:tc>
@@ -27180,7 +26253,7 @@
                         <a:rPr>
                           <a:latin typeface="Inter"/>
                         </a:rPr>
-                        <a:t>Basis</a:t>
+                        <a:t>Source</a:t>
                       </a:r>
                     </a:p>
                   </a:txBody>
@@ -27207,7 +26280,1557 @@
                         <a:rPr>
                           <a:latin typeface="Inter"/>
                         </a:rPr>
-                        <a:t>Tool / view</a:t>
+                        <a:t>As of</a:t>
+                      </a:r>
+                    </a:p>
+                  </a:txBody>
+                  <a:tcPr marL="54864" marR="54864" marT="27432" marB="27432" anchor="ctr">
+                    <a:solidFill>
+                      <a:srgbClr val="0D1117"/>
+                    </a:solidFill>
+                  </a:tcPr>
+                </a:tc>
+                <a:tc>
+                  <a:txBody>
+                    <a:bodyPr/>
+                    <a:lstStyle/>
+                    <a:p>
+                      <a:pPr>
+                        <a:defRPr sz="750" b="1">
+                          <a:solidFill>
+                            <a:srgbClr val="FFFFFF"/>
+                          </a:solidFill>
+                          <a:latin typeface="Inter"/>
+                        </a:defRPr>
+                      </a:pPr>
+                      <a:r>
+                        <a:rPr>
+                          <a:latin typeface="Inter"/>
+                        </a:rPr>
+                        <a:t>Check</a:t>
+                      </a:r>
+                    </a:p>
+                  </a:txBody>
+                  <a:tcPr marL="54864" marR="54864" marT="27432" marB="27432" anchor="ctr">
+                    <a:solidFill>
+                      <a:srgbClr val="0D1117"/>
+                    </a:solidFill>
+                  </a:tcPr>
+                </a:tc>
+              </a:tr>
+              <a:tr h="586359">
+                <a:tc>
+                  <a:txBody>
+                    <a:bodyPr/>
+                    <a:lstStyle/>
+                    <a:p>
+                      <a:pPr>
+                        <a:defRPr sz="720" b="1">
+                          <a:solidFill>
+                            <a:srgbClr val="0D1117"/>
+                          </a:solidFill>
+                          <a:latin typeface="Inter"/>
+                        </a:defRPr>
+                      </a:pPr>
+                      <a:r>
+                        <a:rPr>
+                          <a:latin typeface="Inter"/>
+                        </a:rPr>
+                        <a:t>S1</a:t>
+                      </a:r>
+                    </a:p>
+                  </a:txBody>
+                  <a:tcPr marL="54864" marR="54864" marT="27432" marB="27432" anchor="ctr">
+                    <a:solidFill>
+                      <a:srgbClr val="FFFFFF"/>
+                    </a:solidFill>
+                  </a:tcPr>
+                </a:tc>
+                <a:tc>
+                  <a:txBody>
+                    <a:bodyPr/>
+                    <a:lstStyle/>
+                    <a:p>
+                      <a:pPr>
+                        <a:defRPr sz="720" b="0">
+                          <a:solidFill>
+                            <a:srgbClr val="0D1117"/>
+                          </a:solidFill>
+                          <a:latin typeface="Inter"/>
+                        </a:defRPr>
+                      </a:pPr>
+                      <a:r>
+                        <a:rPr>
+                          <a:latin typeface="Inter"/>
+                        </a:rPr>
+                        <a:t>Capabilities</a:t>
+                      </a:r>
+                    </a:p>
+                  </a:txBody>
+                  <a:tcPr marL="54864" marR="54864" marT="27432" marB="27432" anchor="ctr">
+                    <a:solidFill>
+                      <a:srgbClr val="FFFFFF"/>
+                    </a:solidFill>
+                  </a:tcPr>
+                </a:tc>
+                <a:tc>
+                  <a:txBody>
+                    <a:bodyPr/>
+                    <a:lstStyle/>
+                    <a:p>
+                      <a:pPr>
+                        <a:defRPr sz="720" b="0">
+                          <a:solidFill>
+                            <a:srgbClr val="0D1117"/>
+                          </a:solidFill>
+                          <a:latin typeface="Inter"/>
+                        </a:defRPr>
+                      </a:pPr>
+                      <a:r>
+                        <a:rPr>
+                          <a:latin typeface="Inter"/>
+                        </a:rPr>
+                        <a:t>get_gradient_capabilities (tool metadata)</a:t>
+                      </a:r>
+                    </a:p>
+                  </a:txBody>
+                  <a:tcPr marL="54864" marR="54864" marT="27432" marB="27432" anchor="ctr">
+                    <a:solidFill>
+                      <a:srgbClr val="FFFFFF"/>
+                    </a:solidFill>
+                  </a:tcPr>
+                </a:tc>
+                <a:tc>
+                  <a:txBody>
+                    <a:bodyPr/>
+                    <a:lstStyle/>
+                    <a:p>
+                      <a:pPr>
+                        <a:defRPr sz="720" b="0">
+                          <a:solidFill>
+                            <a:srgbClr val="0D1117"/>
+                          </a:solidFill>
+                          <a:latin typeface="Inter"/>
+                        </a:defRPr>
+                      </a:pPr>
+                      <a:r>
+                        <a:rPr>
+                          <a:latin typeface="Inter"/>
+                        </a:rPr>
+                        <a:t>2026-10-08</a:t>
+                      </a:r>
+                    </a:p>
+                  </a:txBody>
+                  <a:tcPr marL="54864" marR="54864" marT="27432" marB="27432" anchor="ctr">
+                    <a:solidFill>
+                      <a:srgbClr val="FFFFFF"/>
+                    </a:solidFill>
+                  </a:tcPr>
+                </a:tc>
+                <a:tc>
+                  <a:txBody>
+                    <a:bodyPr/>
+                    <a:lstStyle/>
+                    <a:p>
+                      <a:pPr>
+                        <a:defRPr sz="720" b="1">
+                          <a:solidFill>
+                            <a:srgbClr val="C6F432"/>
+                          </a:solidFill>
+                          <a:latin typeface="Inter"/>
+                        </a:defRPr>
+                      </a:pPr>
+                      <a:r>
+                        <a:rPr>
+                          <a:latin typeface="Inter"/>
+                        </a:rPr>
+                        <a:t>● Passed</a:t>
+                      </a:r>
+                    </a:p>
+                  </a:txBody>
+                  <a:tcPr marL="54864" marR="54864" marT="27432" marB="27432" anchor="ctr">
+                    <a:solidFill>
+                      <a:srgbClr val="F5F7F9"/>
+                    </a:solidFill>
+                  </a:tcPr>
+                </a:tc>
+              </a:tr>
+              <a:tr h="586359">
+                <a:tc>
+                  <a:txBody>
+                    <a:bodyPr/>
+                    <a:lstStyle/>
+                    <a:p>
+                      <a:pPr>
+                        <a:defRPr sz="720" b="1">
+                          <a:solidFill>
+                            <a:srgbClr val="0D1117"/>
+                          </a:solidFill>
+                          <a:latin typeface="Inter"/>
+                        </a:defRPr>
+                      </a:pPr>
+                      <a:r>
+                        <a:rPr>
+                          <a:latin typeface="Inter"/>
+                        </a:rPr>
+                        <a:t>S2</a:t>
+                      </a:r>
+                    </a:p>
+                  </a:txBody>
+                  <a:tcPr marL="54864" marR="54864" marT="27432" marB="27432" anchor="ctr">
+                    <a:solidFill>
+                      <a:srgbClr val="F5F7F9"/>
+                    </a:solidFill>
+                  </a:tcPr>
+                </a:tc>
+                <a:tc>
+                  <a:txBody>
+                    <a:bodyPr/>
+                    <a:lstStyle/>
+                    <a:p>
+                      <a:pPr>
+                        <a:defRPr sz="720" b="0">
+                          <a:solidFill>
+                            <a:srgbClr val="0D1117"/>
+                          </a:solidFill>
+                          <a:latin typeface="Inter"/>
+                        </a:defRPr>
+                      </a:pPr>
+                      <a:r>
+                        <a:rPr>
+                          <a:latin typeface="Inter"/>
+                        </a:rPr>
+                        <a:t>Portfolio and root cohort</a:t>
+                      </a:r>
+                    </a:p>
+                  </a:txBody>
+                  <a:tcPr marL="54864" marR="54864" marT="27432" marB="27432" anchor="ctr">
+                    <a:solidFill>
+                      <a:srgbClr val="F5F7F9"/>
+                    </a:solidFill>
+                  </a:tcPr>
+                </a:tc>
+                <a:tc>
+                  <a:txBody>
+                    <a:bodyPr/>
+                    <a:lstStyle/>
+                    <a:p>
+                      <a:pPr>
+                        <a:defRPr sz="720" b="0">
+                          <a:solidFill>
+                            <a:srgbClr val="0D1117"/>
+                          </a:solidFill>
+                          <a:latin typeface="Inter"/>
+                        </a:defRPr>
+                      </a:pPr>
+                      <a:r>
+                        <a:rPr>
+                          <a:latin typeface="Inter"/>
+                        </a:rPr>
+                        <a:t>list_portfolios; get_portfolio_structure</a:t>
+                      </a:r>
+                    </a:p>
+                  </a:txBody>
+                  <a:tcPr marL="54864" marR="54864" marT="27432" marB="27432" anchor="ctr">
+                    <a:solidFill>
+                      <a:srgbClr val="F5F7F9"/>
+                    </a:solidFill>
+                  </a:tcPr>
+                </a:tc>
+                <a:tc>
+                  <a:txBody>
+                    <a:bodyPr/>
+                    <a:lstStyle/>
+                    <a:p>
+                      <a:pPr>
+                        <a:defRPr sz="720" b="0">
+                          <a:solidFill>
+                            <a:srgbClr val="0D1117"/>
+                          </a:solidFill>
+                          <a:latin typeface="Inter"/>
+                        </a:defRPr>
+                      </a:pPr>
+                      <a:r>
+                        <a:rPr>
+                          <a:latin typeface="Inter"/>
+                        </a:rPr>
+                        <a:t>2026-10-08</a:t>
+                      </a:r>
+                    </a:p>
+                  </a:txBody>
+                  <a:tcPr marL="54864" marR="54864" marT="27432" marB="27432" anchor="ctr">
+                    <a:solidFill>
+                      <a:srgbClr val="F5F7F9"/>
+                    </a:solidFill>
+                  </a:tcPr>
+                </a:tc>
+                <a:tc>
+                  <a:txBody>
+                    <a:bodyPr/>
+                    <a:lstStyle/>
+                    <a:p>
+                      <a:pPr>
+                        <a:defRPr sz="720" b="1">
+                          <a:solidFill>
+                            <a:srgbClr val="C6F432"/>
+                          </a:solidFill>
+                          <a:latin typeface="Inter"/>
+                        </a:defRPr>
+                      </a:pPr>
+                      <a:r>
+                        <a:rPr>
+                          <a:latin typeface="Inter"/>
+                        </a:rPr>
+                        <a:t>● Passed</a:t>
+                      </a:r>
+                    </a:p>
+                  </a:txBody>
+                  <a:tcPr marL="54864" marR="54864" marT="27432" marB="27432" anchor="ctr">
+                    <a:solidFill>
+                      <a:srgbClr val="F5F7F9"/>
+                    </a:solidFill>
+                  </a:tcPr>
+                </a:tc>
+              </a:tr>
+              <a:tr h="586359">
+                <a:tc>
+                  <a:txBody>
+                    <a:bodyPr/>
+                    <a:lstStyle/>
+                    <a:p>
+                      <a:pPr>
+                        <a:defRPr sz="720" b="1">
+                          <a:solidFill>
+                            <a:srgbClr val="0D1117"/>
+                          </a:solidFill>
+                          <a:latin typeface="Inter"/>
+                        </a:defRPr>
+                      </a:pPr>
+                      <a:r>
+                        <a:rPr>
+                          <a:latin typeface="Inter"/>
+                        </a:rPr>
+                        <a:t>S3</a:t>
+                      </a:r>
+                    </a:p>
+                  </a:txBody>
+                  <a:tcPr marL="54864" marR="54864" marT="27432" marB="27432" anchor="ctr">
+                    <a:solidFill>
+                      <a:srgbClr val="FFFFFF"/>
+                    </a:solidFill>
+                  </a:tcPr>
+                </a:tc>
+                <a:tc>
+                  <a:txBody>
+                    <a:bodyPr/>
+                    <a:lstStyle/>
+                    <a:p>
+                      <a:pPr>
+                        <a:defRPr sz="720" b="0">
+                          <a:solidFill>
+                            <a:srgbClr val="0D1117"/>
+                          </a:solidFill>
+                          <a:latin typeface="Inter"/>
+                        </a:defRPr>
+                      </a:pPr>
+                      <a:r>
+                        <a:rPr>
+                          <a:latin typeface="Inter"/>
+                        </a:rPr>
+                        <a:t>Historical returns context</a:t>
+                      </a:r>
+                    </a:p>
+                  </a:txBody>
+                  <a:tcPr marL="54864" marR="54864" marT="27432" marB="27432" anchor="ctr">
+                    <a:solidFill>
+                      <a:srgbClr val="FFFFFF"/>
+                    </a:solidFill>
+                  </a:tcPr>
+                </a:tc>
+                <a:tc>
+                  <a:txBody>
+                    <a:bodyPr/>
+                    <a:lstStyle/>
+                    <a:p>
+                      <a:pPr>
+                        <a:defRPr sz="720" b="0">
+                          <a:solidFill>
+                            <a:srgbClr val="0D1117"/>
+                          </a:solidFill>
+                          <a:latin typeface="Inter"/>
+                        </a:defRPr>
+                      </a:pPr>
+                      <a:r>
+                        <a:rPr>
+                          <a:latin typeface="Inter"/>
+                        </a:rPr>
+                        <a:t>get_portfolio_historical_returns</a:t>
+                      </a:r>
+                    </a:p>
+                  </a:txBody>
+                  <a:tcPr marL="54864" marR="54864" marT="27432" marB="27432" anchor="ctr">
+                    <a:solidFill>
+                      <a:srgbClr val="FFFFFF"/>
+                    </a:solidFill>
+                  </a:tcPr>
+                </a:tc>
+                <a:tc>
+                  <a:txBody>
+                    <a:bodyPr/>
+                    <a:lstStyle/>
+                    <a:p>
+                      <a:pPr>
+                        <a:defRPr sz="720" b="0">
+                          <a:solidFill>
+                            <a:srgbClr val="0D1117"/>
+                          </a:solidFill>
+                          <a:latin typeface="Inter"/>
+                        </a:defRPr>
+                      </a:pPr>
+                      <a:r>
+                        <a:rPr>
+                          <a:latin typeface="Inter"/>
+                        </a:rPr>
+                        <a:t>2026-06-30</a:t>
+                      </a:r>
+                    </a:p>
+                  </a:txBody>
+                  <a:tcPr marL="54864" marR="54864" marT="27432" marB="27432" anchor="ctr">
+                    <a:solidFill>
+                      <a:srgbClr val="FFFFFF"/>
+                    </a:solidFill>
+                  </a:tcPr>
+                </a:tc>
+                <a:tc>
+                  <a:txBody>
+                    <a:bodyPr/>
+                    <a:lstStyle/>
+                    <a:p>
+                      <a:pPr>
+                        <a:defRPr sz="720" b="1">
+                          <a:solidFill>
+                            <a:srgbClr val="C6F432"/>
+                          </a:solidFill>
+                          <a:latin typeface="Inter"/>
+                        </a:defRPr>
+                      </a:pPr>
+                      <a:r>
+                        <a:rPr>
+                          <a:latin typeface="Inter"/>
+                        </a:rPr>
+                        <a:t>● Passed</a:t>
+                      </a:r>
+                    </a:p>
+                  </a:txBody>
+                  <a:tcPr marL="54864" marR="54864" marT="27432" marB="27432" anchor="ctr">
+                    <a:solidFill>
+                      <a:srgbClr val="F5F7F9"/>
+                    </a:solidFill>
+                  </a:tcPr>
+                </a:tc>
+              </a:tr>
+              <a:tr h="586359">
+                <a:tc>
+                  <a:txBody>
+                    <a:bodyPr/>
+                    <a:lstStyle/>
+                    <a:p>
+                      <a:pPr>
+                        <a:defRPr sz="720" b="1">
+                          <a:solidFill>
+                            <a:srgbClr val="0D1117"/>
+                          </a:solidFill>
+                          <a:latin typeface="Inter"/>
+                        </a:defRPr>
+                      </a:pPr>
+                      <a:r>
+                        <a:rPr>
+                          <a:latin typeface="Inter"/>
+                        </a:rPr>
+                        <a:t>S4</a:t>
+                      </a:r>
+                    </a:p>
+                  </a:txBody>
+                  <a:tcPr marL="54864" marR="54864" marT="27432" marB="27432" anchor="ctr">
+                    <a:solidFill>
+                      <a:srgbClr val="F5F7F9"/>
+                    </a:solidFill>
+                  </a:tcPr>
+                </a:tc>
+                <a:tc>
+                  <a:txBody>
+                    <a:bodyPr/>
+                    <a:lstStyle/>
+                    <a:p>
+                      <a:pPr>
+                        <a:defRPr sz="720" b="0">
+                          <a:solidFill>
+                            <a:srgbClr val="0D1117"/>
+                          </a:solidFill>
+                          <a:latin typeface="Inter"/>
+                        </a:defRPr>
+                      </a:pPr>
+                      <a:r>
+                        <a:rPr>
+                          <a:latin typeface="Inter"/>
+                        </a:rPr>
+                        <a:t>Historical attribution</a:t>
+                      </a:r>
+                    </a:p>
+                  </a:txBody>
+                  <a:tcPr marL="54864" marR="54864" marT="27432" marB="27432" anchor="ctr">
+                    <a:solidFill>
+                      <a:srgbClr val="F5F7F9"/>
+                    </a:solidFill>
+                  </a:tcPr>
+                </a:tc>
+                <a:tc>
+                  <a:txBody>
+                    <a:bodyPr/>
+                    <a:lstStyle/>
+                    <a:p>
+                      <a:pPr>
+                        <a:defRPr sz="720" b="0">
+                          <a:solidFill>
+                            <a:srgbClr val="0D1117"/>
+                          </a:solidFill>
+                          <a:latin typeface="Inter"/>
+                        </a:defRPr>
+                      </a:pPr>
+                      <a:r>
+                        <a:rPr>
+                          <a:latin typeface="Inter"/>
+                        </a:rPr>
+                        <a:t>get_portfolio_attribution</a:t>
+                      </a:r>
+                    </a:p>
+                  </a:txBody>
+                  <a:tcPr marL="54864" marR="54864" marT="27432" marB="27432" anchor="ctr">
+                    <a:solidFill>
+                      <a:srgbClr val="F5F7F9"/>
+                    </a:solidFill>
+                  </a:tcPr>
+                </a:tc>
+                <a:tc>
+                  <a:txBody>
+                    <a:bodyPr/>
+                    <a:lstStyle/>
+                    <a:p>
+                      <a:pPr>
+                        <a:defRPr sz="720" b="0">
+                          <a:solidFill>
+                            <a:srgbClr val="0D1117"/>
+                          </a:solidFill>
+                          <a:latin typeface="Inter"/>
+                        </a:defRPr>
+                      </a:pPr>
+                      <a:r>
+                        <a:rPr>
+                          <a:latin typeface="Inter"/>
+                        </a:rPr>
+                        <a:t>2026-06-30</a:t>
+                      </a:r>
+                    </a:p>
+                  </a:txBody>
+                  <a:tcPr marL="54864" marR="54864" marT="27432" marB="27432" anchor="ctr">
+                    <a:solidFill>
+                      <a:srgbClr val="F5F7F9"/>
+                    </a:solidFill>
+                  </a:tcPr>
+                </a:tc>
+                <a:tc>
+                  <a:txBody>
+                    <a:bodyPr/>
+                    <a:lstStyle/>
+                    <a:p>
+                      <a:pPr>
+                        <a:defRPr sz="720" b="1">
+                          <a:solidFill>
+                            <a:srgbClr val="C6F432"/>
+                          </a:solidFill>
+                          <a:latin typeface="Inter"/>
+                        </a:defRPr>
+                      </a:pPr>
+                      <a:r>
+                        <a:rPr>
+                          <a:latin typeface="Inter"/>
+                        </a:rPr>
+                        <a:t>● Passed</a:t>
+                      </a:r>
+                    </a:p>
+                  </a:txBody>
+                  <a:tcPr marL="54864" marR="54864" marT="27432" marB="27432" anchor="ctr">
+                    <a:solidFill>
+                      <a:srgbClr val="F5F7F9"/>
+                    </a:solidFill>
+                  </a:tcPr>
+                </a:tc>
+              </a:tr>
+              <a:tr h="586359">
+                <a:tc>
+                  <a:txBody>
+                    <a:bodyPr/>
+                    <a:lstStyle/>
+                    <a:p>
+                      <a:pPr>
+                        <a:defRPr sz="720" b="1">
+                          <a:solidFill>
+                            <a:srgbClr val="0D1117"/>
+                          </a:solidFill>
+                          <a:latin typeface="Inter"/>
+                        </a:defRPr>
+                      </a:pPr>
+                      <a:r>
+                        <a:rPr>
+                          <a:latin typeface="Inter"/>
+                        </a:rPr>
+                        <a:t>S5</a:t>
+                      </a:r>
+                    </a:p>
+                  </a:txBody>
+                  <a:tcPr marL="54864" marR="54864" marT="27432" marB="27432" anchor="ctr">
+                    <a:solidFill>
+                      <a:srgbClr val="FFFFFF"/>
+                    </a:solidFill>
+                  </a:tcPr>
+                </a:tc>
+                <a:tc>
+                  <a:txBody>
+                    <a:bodyPr/>
+                    <a:lstStyle/>
+                    <a:p>
+                      <a:pPr>
+                        <a:defRPr sz="720" b="0">
+                          <a:solidFill>
+                            <a:srgbClr val="0D1117"/>
+                          </a:solidFill>
+                          <a:latin typeface="Inter"/>
+                        </a:defRPr>
+                      </a:pPr>
+                      <a:r>
+                        <a:rPr>
+                          <a:latin typeface="Inter"/>
+                        </a:rPr>
+                        <a:t>Governed ex ante attribution</a:t>
+                      </a:r>
+                    </a:p>
+                  </a:txBody>
+                  <a:tcPr marL="54864" marR="54864" marT="27432" marB="27432" anchor="ctr">
+                    <a:solidFill>
+                      <a:srgbClr val="FFFFFF"/>
+                    </a:solidFill>
+                  </a:tcPr>
+                </a:tc>
+                <a:tc>
+                  <a:txBody>
+                    <a:bodyPr/>
+                    <a:lstStyle/>
+                    <a:p>
+                      <a:pPr>
+                        <a:defRPr sz="720" b="0">
+                          <a:solidFill>
+                            <a:srgbClr val="0D1117"/>
+                          </a:solidFill>
+                          <a:latin typeface="Inter"/>
+                        </a:defRPr>
+                      </a:pPr>
+                      <a:r>
+                        <a:rPr>
+                          <a:latin typeface="Inter"/>
+                        </a:rPr>
+                        <a:t>get_portfolio_ex_ante_attribution</a:t>
+                      </a:r>
+                    </a:p>
+                  </a:txBody>
+                  <a:tcPr marL="54864" marR="54864" marT="27432" marB="27432" anchor="ctr">
+                    <a:solidFill>
+                      <a:srgbClr val="FFFFFF"/>
+                    </a:solidFill>
+                  </a:tcPr>
+                </a:tc>
+                <a:tc>
+                  <a:txBody>
+                    <a:bodyPr/>
+                    <a:lstStyle/>
+                    <a:p>
+                      <a:pPr>
+                        <a:defRPr sz="720" b="0">
+                          <a:solidFill>
+                            <a:srgbClr val="0D1117"/>
+                          </a:solidFill>
+                          <a:latin typeface="Inter"/>
+                        </a:defRPr>
+                      </a:pPr>
+                      <a:r>
+                        <a:rPr>
+                          <a:latin typeface="Inter"/>
+                        </a:rPr>
+                        <a:t>2026-10-08</a:t>
+                      </a:r>
+                    </a:p>
+                  </a:txBody>
+                  <a:tcPr marL="54864" marR="54864" marT="27432" marB="27432" anchor="ctr">
+                    <a:solidFill>
+                      <a:srgbClr val="FFFFFF"/>
+                    </a:solidFill>
+                  </a:tcPr>
+                </a:tc>
+                <a:tc>
+                  <a:txBody>
+                    <a:bodyPr/>
+                    <a:lstStyle/>
+                    <a:p>
+                      <a:pPr>
+                        <a:defRPr sz="720" b="1">
+                          <a:solidFill>
+                            <a:srgbClr val="C6F432"/>
+                          </a:solidFill>
+                          <a:latin typeface="Inter"/>
+                        </a:defRPr>
+                      </a:pPr>
+                      <a:r>
+                        <a:rPr>
+                          <a:latin typeface="Inter"/>
+                        </a:rPr>
+                        <a:t>● Passed</a:t>
+                      </a:r>
+                    </a:p>
+                  </a:txBody>
+                  <a:tcPr marL="54864" marR="54864" marT="27432" marB="27432" anchor="ctr">
+                    <a:solidFill>
+                      <a:srgbClr val="F5F7F9"/>
+                    </a:solidFill>
+                  </a:tcPr>
+                </a:tc>
+              </a:tr>
+              <a:tr h="586359">
+                <a:tc>
+                  <a:txBody>
+                    <a:bodyPr/>
+                    <a:lstStyle/>
+                    <a:p>
+                      <a:pPr>
+                        <a:defRPr sz="720" b="1">
+                          <a:solidFill>
+                            <a:srgbClr val="0D1117"/>
+                          </a:solidFill>
+                          <a:latin typeface="Inter"/>
+                        </a:defRPr>
+                      </a:pPr>
+                      <a:r>
+                        <a:rPr>
+                          <a:latin typeface="Inter"/>
+                        </a:rPr>
+                        <a:t>S6</a:t>
+                      </a:r>
+                    </a:p>
+                  </a:txBody>
+                  <a:tcPr marL="54864" marR="54864" marT="27432" marB="27432" anchor="ctr">
+                    <a:solidFill>
+                      <a:srgbClr val="F5F7F9"/>
+                    </a:solidFill>
+                  </a:tcPr>
+                </a:tc>
+                <a:tc>
+                  <a:txBody>
+                    <a:bodyPr/>
+                    <a:lstStyle/>
+                    <a:p>
+                      <a:pPr>
+                        <a:defRPr sz="720" b="0">
+                          <a:solidFill>
+                            <a:srgbClr val="0D1117"/>
+                          </a:solidFill>
+                          <a:latin typeface="Inter"/>
+                        </a:defRPr>
+                      </a:pPr>
+                      <a:r>
+                        <a:rPr>
+                          <a:latin typeface="Inter"/>
+                        </a:rPr>
+                        <a:t>Largest-detractor manager findings</a:t>
+                      </a:r>
+                    </a:p>
+                  </a:txBody>
+                  <a:tcPr marL="54864" marR="54864" marT="27432" marB="27432" anchor="ctr">
+                    <a:solidFill>
+                      <a:srgbClr val="F5F7F9"/>
+                    </a:solidFill>
+                  </a:tcPr>
+                </a:tc>
+                <a:tc>
+                  <a:txBody>
+                    <a:bodyPr/>
+                    <a:lstStyle/>
+                    <a:p>
+                      <a:pPr>
+                        <a:defRPr sz="720" b="0">
+                          <a:solidFill>
+                            <a:srgbClr val="0D1117"/>
+                          </a:solidFill>
+                          <a:latin typeface="Inter"/>
+                        </a:defRPr>
+                      </a:pPr>
+                      <a:r>
+                        <a:rPr>
+                          <a:latin typeface="Inter"/>
+                        </a:rPr>
+                        <a:t>get_manager_diligence_findings</a:t>
+                      </a:r>
+                    </a:p>
+                  </a:txBody>
+                  <a:tcPr marL="54864" marR="54864" marT="27432" marB="27432" anchor="ctr">
+                    <a:solidFill>
+                      <a:srgbClr val="F5F7F9"/>
+                    </a:solidFill>
+                  </a:tcPr>
+                </a:tc>
+                <a:tc>
+                  <a:txBody>
+                    <a:bodyPr/>
+                    <a:lstStyle/>
+                    <a:p>
+                      <a:pPr>
+                        <a:defRPr sz="720" b="0">
+                          <a:solidFill>
+                            <a:srgbClr val="0D1117"/>
+                          </a:solidFill>
+                          <a:latin typeface="Inter"/>
+                        </a:defRPr>
+                      </a:pPr>
+                      <a:r>
+                        <a:rPr>
+                          <a:latin typeface="Inter"/>
+                        </a:rPr>
+                        <a:t>2026-06-30</a:t>
+                      </a:r>
+                    </a:p>
+                  </a:txBody>
+                  <a:tcPr marL="54864" marR="54864" marT="27432" marB="27432" anchor="ctr">
+                    <a:solidFill>
+                      <a:srgbClr val="F5F7F9"/>
+                    </a:solidFill>
+                  </a:tcPr>
+                </a:tc>
+                <a:tc>
+                  <a:txBody>
+                    <a:bodyPr/>
+                    <a:lstStyle/>
+                    <a:p>
+                      <a:pPr>
+                        <a:defRPr sz="720" b="1">
+                          <a:solidFill>
+                            <a:srgbClr val="C6F432"/>
+                          </a:solidFill>
+                          <a:latin typeface="Inter"/>
+                        </a:defRPr>
+                      </a:pPr>
+                      <a:r>
+                        <a:rPr>
+                          <a:latin typeface="Inter"/>
+                        </a:rPr>
+                        <a:t>● Passed</a:t>
+                      </a:r>
+                    </a:p>
+                  </a:txBody>
+                  <a:tcPr marL="54864" marR="54864" marT="27432" marB="27432" anchor="ctr">
+                    <a:solidFill>
+                      <a:srgbClr val="F5F7F9"/>
+                    </a:solidFill>
+                  </a:tcPr>
+                </a:tc>
+              </a:tr>
+              <a:tr h="586359">
+                <a:tc>
+                  <a:txBody>
+                    <a:bodyPr/>
+                    <a:lstStyle/>
+                    <a:p>
+                      <a:pPr>
+                        <a:defRPr sz="720" b="1">
+                          <a:solidFill>
+                            <a:srgbClr val="0D1117"/>
+                          </a:solidFill>
+                          <a:latin typeface="Inter"/>
+                        </a:defRPr>
+                      </a:pPr>
+                      <a:r>
+                        <a:rPr>
+                          <a:latin typeface="Inter"/>
+                        </a:rPr>
+                        <a:t>S7</a:t>
+                      </a:r>
+                    </a:p>
+                  </a:txBody>
+                  <a:tcPr marL="54864" marR="54864" marT="27432" marB="27432" anchor="ctr">
+                    <a:solidFill>
+                      <a:srgbClr val="FFFFFF"/>
+                    </a:solidFill>
+                  </a:tcPr>
+                </a:tc>
+                <a:tc>
+                  <a:txBody>
+                    <a:bodyPr/>
+                    <a:lstStyle/>
+                    <a:p>
+                      <a:pPr>
+                        <a:defRPr sz="720" b="0">
+                          <a:solidFill>
+                            <a:srgbClr val="0D1117"/>
+                          </a:solidFill>
+                          <a:latin typeface="Inter"/>
+                        </a:defRPr>
+                      </a:pPr>
+                      <a:r>
+                        <a:rPr>
+                          <a:latin typeface="Inter"/>
+                        </a:rPr>
+                        <a:t>Macro regime</a:t>
+                      </a:r>
+                    </a:p>
+                  </a:txBody>
+                  <a:tcPr marL="54864" marR="54864" marT="27432" marB="27432" anchor="ctr">
+                    <a:solidFill>
+                      <a:srgbClr val="FFFFFF"/>
+                    </a:solidFill>
+                  </a:tcPr>
+                </a:tc>
+                <a:tc>
+                  <a:txBody>
+                    <a:bodyPr/>
+                    <a:lstStyle/>
+                    <a:p>
+                      <a:pPr>
+                        <a:defRPr sz="720" b="0">
+                          <a:solidFill>
+                            <a:srgbClr val="0D1117"/>
+                          </a:solidFill>
+                          <a:latin typeface="Inter"/>
+                        </a:defRPr>
+                      </a:pPr>
+                      <a:r>
+                        <a:rPr>
+                          <a:latin typeface="Inter"/>
+                        </a:rPr>
+                        <a:t>get_macro_signals</a:t>
+                      </a:r>
+                    </a:p>
+                  </a:txBody>
+                  <a:tcPr marL="54864" marR="54864" marT="27432" marB="27432" anchor="ctr">
+                    <a:solidFill>
+                      <a:srgbClr val="FFFFFF"/>
+                    </a:solidFill>
+                  </a:tcPr>
+                </a:tc>
+                <a:tc>
+                  <a:txBody>
+                    <a:bodyPr/>
+                    <a:lstStyle/>
+                    <a:p>
+                      <a:pPr>
+                        <a:defRPr sz="720" b="0">
+                          <a:solidFill>
+                            <a:srgbClr val="0D1117"/>
+                          </a:solidFill>
+                          <a:latin typeface="Inter"/>
+                        </a:defRPr>
+                      </a:pPr>
+                      <a:r>
+                        <a:rPr>
+                          <a:latin typeface="Inter"/>
+                        </a:rPr>
+                        <a:t>2026-06-30</a:t>
+                      </a:r>
+                    </a:p>
+                  </a:txBody>
+                  <a:tcPr marL="54864" marR="54864" marT="27432" marB="27432" anchor="ctr">
+                    <a:solidFill>
+                      <a:srgbClr val="FFFFFF"/>
+                    </a:solidFill>
+                  </a:tcPr>
+                </a:tc>
+                <a:tc>
+                  <a:txBody>
+                    <a:bodyPr/>
+                    <a:lstStyle/>
+                    <a:p>
+                      <a:pPr>
+                        <a:defRPr sz="720" b="1">
+                          <a:solidFill>
+                            <a:srgbClr val="C6F432"/>
+                          </a:solidFill>
+                          <a:latin typeface="Inter"/>
+                        </a:defRPr>
+                      </a:pPr>
+                      <a:r>
+                        <a:rPr>
+                          <a:latin typeface="Inter"/>
+                        </a:rPr>
+                        <a:t>● Passed</a:t>
+                      </a:r>
+                    </a:p>
+                  </a:txBody>
+                  <a:tcPr marL="54864" marR="54864" marT="27432" marB="27432" anchor="ctr">
+                    <a:solidFill>
+                      <a:srgbClr val="F5F7F9"/>
+                    </a:solidFill>
+                  </a:tcPr>
+                </a:tc>
+              </a:tr>
+            </a:tbl>
+          </a:graphicData>
+        </a:graphic>
+      </p:graphicFrame>
+      <p:sp>
+        <p:nvSpPr>
+          <p:cNvPr id="8" name="TextBox 7"/>
+          <p:cNvSpPr txBox="1"/>
+          <p:nvPr/>
+        </p:nvSpPr>
+        <p:spPr>
+          <a:xfrm>
+            <a:off x="640080" y="6035040"/>
+            <a:ext cx="10908792" cy="164592"/>
+          </a:xfrm>
+          <a:prstGeom prst="rect">
+            <a:avLst/>
+          </a:prstGeom>
+          <a:noFill/>
+        </p:spPr>
+        <p:txBody>
+          <a:bodyPr wrap="none" lIns="9144" rIns="9144" tIns="9144" bIns="9144" anchor="t">
+            <a:spAutoFit/>
+          </a:bodyPr>
+          <a:lstStyle/>
+          <a:p>
+            <a:pPr algn="l">
+              <a:spcAft>
+                <a:spcPts val="0"/>
+              </a:spcAft>
+              <a:defRPr sz="680" b="0">
+                <a:solidFill>
+                  <a:srgbClr val="8A94A1"/>
+                </a:solidFill>
+                <a:latin typeface="Inter"/>
+              </a:defRPr>
+            </a:pPr>
+            <a:r>
+              <a:rPr>
+                <a:latin typeface="Inter"/>
+              </a:rPr>
+              <a:t>Illustrative, Gradient Maintained — demo data, not the client's holdings or managers. All organizations, portfolios, managers and results in this public example are illustrative.</a:t>
+            </a:r>
+          </a:p>
+        </p:txBody>
+      </p:sp>
+      <p:sp>
+        <p:nvSpPr>
+          <p:cNvPr id="9" name="Rectangle 8"/>
+          <p:cNvSpPr/>
+          <p:nvPr/>
+        </p:nvSpPr>
+        <p:spPr>
+          <a:xfrm>
+            <a:off x="640080" y="6446520"/>
+            <a:ext cx="10908792" cy="9144"/>
+          </a:xfrm>
+          <a:prstGeom prst="rect">
+            <a:avLst/>
+          </a:prstGeom>
+          <a:solidFill>
+            <a:srgbClr val="E3E7EC"/>
+          </a:solidFill>
+          <a:ln>
+            <a:solidFill>
+              <a:srgbClr val="E3E7EC"/>
+            </a:solidFill>
+          </a:ln>
+        </p:spPr>
+        <p:style>
+          <a:lnRef idx="1">
+            <a:schemeClr val="accent1"/>
+          </a:lnRef>
+          <a:fillRef idx="3">
+            <a:schemeClr val="accent1"/>
+          </a:fillRef>
+          <a:effectRef idx="2">
+            <a:schemeClr val="accent1"/>
+          </a:effectRef>
+          <a:fontRef idx="minor">
+            <a:schemeClr val="lt1"/>
+          </a:fontRef>
+        </p:style>
+        <p:txBody>
+          <a:bodyPr rtlCol="0" anchor="ctr"/>
+          <a:lstStyle/>
+          <a:p>
+            <a:pPr algn="ctr">
+              <a:defRPr>
+                <a:latin typeface="Inter"/>
+              </a:defRPr>
+            </a:pPr>
+          </a:p>
+        </p:txBody>
+      </p:sp>
+      <p:sp>
+        <p:nvSpPr>
+          <p:cNvPr id="10" name="TextBox 9"/>
+          <p:cNvSpPr txBox="1"/>
+          <p:nvPr/>
+        </p:nvSpPr>
+        <p:spPr>
+          <a:xfrm>
+            <a:off x="640080" y="6501384"/>
+            <a:ext cx="4297680" cy="146304"/>
+          </a:xfrm>
+          <a:prstGeom prst="rect">
+            <a:avLst/>
+          </a:prstGeom>
+          <a:noFill/>
+        </p:spPr>
+        <p:txBody>
+          <a:bodyPr wrap="none" lIns="9144" rIns="9144" tIns="9144" bIns="9144" anchor="t">
+            <a:spAutoFit/>
+          </a:bodyPr>
+          <a:lstStyle/>
+          <a:p>
+            <a:pPr algn="l">
+              <a:spcAft>
+                <a:spcPts val="0"/>
+              </a:spcAft>
+              <a:defRPr sz="650" b="0">
+                <a:solidFill>
+                  <a:srgbClr val="8A94A1"/>
+                </a:solidFill>
+                <a:latin typeface="Inter"/>
+              </a:defRPr>
+            </a:pPr>
+            <a:r>
+              <a:rPr>
+                <a:latin typeface="Inter"/>
+              </a:rPr>
+              <a:t>Sources: S1 · S2 · S3 · S4 · S5 · S6 · S7</a:t>
+            </a:r>
+          </a:p>
+        </p:txBody>
+      </p:sp>
+      <p:sp>
+        <p:nvSpPr>
+          <p:cNvPr id="11" name="TextBox 10"/>
+          <p:cNvSpPr txBox="1"/>
+          <p:nvPr/>
+        </p:nvSpPr>
+        <p:spPr>
+          <a:xfrm>
+            <a:off x="4480560" y="6501384"/>
+            <a:ext cx="5303520" cy="146304"/>
+          </a:xfrm>
+          <a:prstGeom prst="rect">
+            <a:avLst/>
+          </a:prstGeom>
+          <a:noFill/>
+        </p:spPr>
+        <p:txBody>
+          <a:bodyPr wrap="none" lIns="9144" rIns="9144" tIns="9144" bIns="9144" anchor="t">
+            <a:spAutoFit/>
+          </a:bodyPr>
+          <a:lstStyle/>
+          <a:p>
+            <a:pPr algn="ctr">
+              <a:spcAft>
+                <a:spcPts val="0"/>
+              </a:spcAft>
+              <a:defRPr sz="650" b="0">
+                <a:solidFill>
+                  <a:srgbClr val="8A94A1"/>
+                </a:solidFill>
+                <a:latin typeface="Inter"/>
+              </a:defRPr>
+            </a:pPr>
+            <a:r>
+              <a:rPr>
+                <a:latin typeface="Inter"/>
+              </a:rPr>
+              <a:t>Confidential — Investment Committee · Data as of 2026-06-30 historical; 2026-10-08 ex ante</a:t>
+            </a:r>
+          </a:p>
+        </p:txBody>
+      </p:sp>
+      <p:sp>
+        <p:nvSpPr>
+          <p:cNvPr id="12" name="TextBox 11"/>
+          <p:cNvSpPr txBox="1"/>
+          <p:nvPr/>
+        </p:nvSpPr>
+        <p:spPr>
+          <a:xfrm>
+            <a:off x="10287000" y="6501384"/>
+            <a:ext cx="1261872" cy="146304"/>
+          </a:xfrm>
+          <a:prstGeom prst="rect">
+            <a:avLst/>
+          </a:prstGeom>
+          <a:noFill/>
+        </p:spPr>
+        <p:txBody>
+          <a:bodyPr wrap="none" lIns="9144" rIns="9144" tIns="9144" bIns="9144" anchor="t">
+            <a:spAutoFit/>
+          </a:bodyPr>
+          <a:lstStyle/>
+          <a:p>
+            <a:pPr algn="r">
+              <a:spcAft>
+                <a:spcPts val="0"/>
+              </a:spcAft>
+              <a:defRPr sz="650" b="0">
+                <a:solidFill>
+                  <a:srgbClr val="8A94A1"/>
+                </a:solidFill>
+                <a:latin typeface="Inter"/>
+              </a:defRPr>
+            </a:pPr>
+            <a:r>
+              <a:rPr>
+                <a:latin typeface="Inter"/>
+              </a:rPr>
+              <a:t>27</a:t>
+            </a:r>
+          </a:p>
+        </p:txBody>
+      </p:sp>
+    </p:spTree>
+  </p:cSld>
+  <p:clrMapOvr>
+    <a:masterClrMapping/>
+  </p:clrMapOvr>
+</p:sld>
+</file>
+
+<file path=ppt/slides/slide28.xml><?xml version="1.0" encoding="utf-8"?>
+<p:sld xmlns:a="http://schemas.openxmlformats.org/drawingml/2006/main" xmlns:p="http://schemas.openxmlformats.org/presentationml/2006/main" xmlns:r="http://schemas.openxmlformats.org/officeDocument/2006/relationships">
+  <p:cSld>
+    <p:spTree>
+      <p:nvGrpSpPr>
+        <p:cNvPr id="1" name=""/>
+        <p:cNvGrpSpPr/>
+        <p:nvPr/>
+      </p:nvGrpSpPr>
+      <p:grpSpPr/>
+      <p:sp>
+        <p:nvSpPr>
+          <p:cNvPr id="2" name="Rectangle 1"/>
+          <p:cNvSpPr/>
+          <p:nvPr/>
+        </p:nvSpPr>
+        <p:spPr>
+          <a:xfrm>
+            <a:off x="0" y="0"/>
+            <a:ext cx="12191695" cy="6858000"/>
+          </a:xfrm>
+          <a:prstGeom prst="rect">
+            <a:avLst/>
+          </a:prstGeom>
+          <a:solidFill>
+            <a:srgbClr val="FFFFFF"/>
+          </a:solidFill>
+          <a:ln>
+            <a:solidFill>
+              <a:srgbClr val="FFFFFF"/>
+            </a:solidFill>
+          </a:ln>
+        </p:spPr>
+        <p:style>
+          <a:lnRef idx="1">
+            <a:schemeClr val="accent1"/>
+          </a:lnRef>
+          <a:fillRef idx="3">
+            <a:schemeClr val="accent1"/>
+          </a:fillRef>
+          <a:effectRef idx="2">
+            <a:schemeClr val="accent1"/>
+          </a:effectRef>
+          <a:fontRef idx="minor">
+            <a:schemeClr val="lt1"/>
+          </a:fontRef>
+        </p:style>
+        <p:txBody>
+          <a:bodyPr rtlCol="0" anchor="ctr"/>
+          <a:lstStyle/>
+          <a:p>
+            <a:pPr algn="ctr">
+              <a:defRPr>
+                <a:latin typeface="Inter"/>
+              </a:defRPr>
+            </a:pPr>
+          </a:p>
+        </p:txBody>
+      </p:sp>
+      <p:sp>
+        <p:nvSpPr>
+          <p:cNvPr id="3" name="TextBox 2"/>
+          <p:cNvSpPr txBox="1"/>
+          <p:nvPr/>
+        </p:nvSpPr>
+        <p:spPr>
+          <a:xfrm>
+            <a:off x="640080" y="566928"/>
+            <a:ext cx="10058400" cy="530352"/>
+          </a:xfrm>
+          <a:prstGeom prst="rect">
+            <a:avLst/>
+          </a:prstGeom>
+          <a:noFill/>
+        </p:spPr>
+        <p:txBody>
+          <a:bodyPr wrap="none" lIns="9144" rIns="9144" tIns="9144" bIns="9144" anchor="t">
+            <a:spAutoFit/>
+          </a:bodyPr>
+          <a:lstStyle/>
+          <a:p>
+            <a:pPr algn="l">
+              <a:spcAft>
+                <a:spcPts val="0"/>
+              </a:spcAft>
+              <a:defRPr sz="2300" b="1">
+                <a:solidFill>
+                  <a:srgbClr val="0D1117"/>
+                </a:solidFill>
+                <a:latin typeface="Inter"/>
+              </a:defRPr>
+            </a:pPr>
+            <a:r>
+              <a:rPr>
+                <a:latin typeface="Inter"/>
+              </a:rPr>
+              <a:t>Appendix — Sources and methods — continued</a:t>
+            </a:r>
+          </a:p>
+        </p:txBody>
+      </p:sp>
+      <p:sp>
+        <p:nvSpPr>
+          <p:cNvPr id="4" name="Rectangle 3"/>
+          <p:cNvSpPr/>
+          <p:nvPr/>
+        </p:nvSpPr>
+        <p:spPr>
+          <a:xfrm>
+            <a:off x="640080" y="1115568"/>
+            <a:ext cx="10908792" cy="18288"/>
+          </a:xfrm>
+          <a:prstGeom prst="rect">
+            <a:avLst/>
+          </a:prstGeom>
+          <a:solidFill>
+            <a:srgbClr val="0D1117"/>
+          </a:solidFill>
+          <a:ln>
+            <a:solidFill>
+              <a:srgbClr val="0D1117"/>
+            </a:solidFill>
+          </a:ln>
+        </p:spPr>
+        <p:style>
+          <a:lnRef idx="1">
+            <a:schemeClr val="accent1"/>
+          </a:lnRef>
+          <a:fillRef idx="3">
+            <a:schemeClr val="accent1"/>
+          </a:fillRef>
+          <a:effectRef idx="2">
+            <a:schemeClr val="accent1"/>
+          </a:effectRef>
+          <a:fontRef idx="minor">
+            <a:schemeClr val="lt1"/>
+          </a:fontRef>
+        </p:style>
+        <p:txBody>
+          <a:bodyPr rtlCol="0" anchor="ctr"/>
+          <a:lstStyle/>
+          <a:p>
+            <a:pPr algn="ctr">
+              <a:defRPr>
+                <a:latin typeface="Inter"/>
+              </a:defRPr>
+            </a:pPr>
+          </a:p>
+        </p:txBody>
+      </p:sp>
+      <p:sp>
+        <p:nvSpPr>
+          <p:cNvPr id="5" name="Rectangle 4"/>
+          <p:cNvSpPr/>
+          <p:nvPr/>
+        </p:nvSpPr>
+        <p:spPr>
+          <a:xfrm>
+            <a:off x="11018520" y="502920"/>
+            <a:ext cx="530352" cy="393192"/>
+          </a:xfrm>
+          <a:prstGeom prst="rect">
+            <a:avLst/>
+          </a:prstGeom>
+          <a:solidFill>
+            <a:srgbClr val="9AA5B1"/>
+          </a:solidFill>
+          <a:ln>
+            <a:solidFill>
+              <a:srgbClr val="9AA5B1"/>
+            </a:solidFill>
+          </a:ln>
+        </p:spPr>
+        <p:style>
+          <a:lnRef idx="1">
+            <a:schemeClr val="accent1"/>
+          </a:lnRef>
+          <a:fillRef idx="3">
+            <a:schemeClr val="accent1"/>
+          </a:fillRef>
+          <a:effectRef idx="2">
+            <a:schemeClr val="accent1"/>
+          </a:effectRef>
+          <a:fontRef idx="minor">
+            <a:schemeClr val="lt1"/>
+          </a:fontRef>
+        </p:style>
+        <p:txBody>
+          <a:bodyPr rtlCol="0" anchor="ctr"/>
+          <a:lstStyle/>
+          <a:p>
+            <a:pPr algn="ctr">
+              <a:defRPr>
+                <a:latin typeface="Inter"/>
+              </a:defRPr>
+            </a:pPr>
+          </a:p>
+        </p:txBody>
+      </p:sp>
+      <p:sp>
+        <p:nvSpPr>
+          <p:cNvPr id="6" name="TextBox 5"/>
+          <p:cNvSpPr txBox="1"/>
+          <p:nvPr/>
+        </p:nvSpPr>
+        <p:spPr>
+          <a:xfrm>
+            <a:off x="11045952" y="557784"/>
+            <a:ext cx="475488" cy="182880"/>
+          </a:xfrm>
+          <a:prstGeom prst="rect">
+            <a:avLst/>
+          </a:prstGeom>
+          <a:noFill/>
+        </p:spPr>
+        <p:txBody>
+          <a:bodyPr wrap="none" lIns="9144" rIns="9144" tIns="9144" bIns="9144" anchor="t">
+            <a:spAutoFit/>
+          </a:bodyPr>
+          <a:lstStyle/>
+          <a:p>
+            <a:pPr algn="ctr">
+              <a:spcAft>
+                <a:spcPts val="0"/>
+              </a:spcAft>
+              <a:defRPr sz="1000" b="1">
+                <a:solidFill>
+                  <a:srgbClr val="0D1117"/>
+                </a:solidFill>
+                <a:latin typeface="Inter"/>
+              </a:defRPr>
+            </a:pPr>
+            <a:r>
+              <a:rPr>
+                <a:latin typeface="Inter"/>
+              </a:rPr>
+              <a:t>A</a:t>
+            </a:r>
+          </a:p>
+        </p:txBody>
+      </p:sp>
+      <p:sp>
+        <p:nvSpPr>
+          <p:cNvPr id="7" name="TextBox 6"/>
+          <p:cNvSpPr txBox="1"/>
+          <p:nvPr/>
+        </p:nvSpPr>
+        <p:spPr>
+          <a:xfrm>
+            <a:off x="640080" y="1325880"/>
+            <a:ext cx="10908792" cy="201168"/>
+          </a:xfrm>
+          <a:prstGeom prst="rect">
+            <a:avLst/>
+          </a:prstGeom>
+          <a:noFill/>
+        </p:spPr>
+        <p:txBody>
+          <a:bodyPr wrap="none" lIns="9144" rIns="9144" tIns="9144" bIns="9144" anchor="t">
+            <a:spAutoFit/>
+          </a:bodyPr>
+          <a:lstStyle/>
+          <a:p>
+            <a:pPr algn="l">
+              <a:spcAft>
+                <a:spcPts val="0"/>
+              </a:spcAft>
+              <a:defRPr sz="720" b="1">
+                <a:solidFill>
+                  <a:srgbClr val="4A5563"/>
+                </a:solidFill>
+                <a:latin typeface="Inter"/>
+              </a:defRPr>
+            </a:pPr>
+            <a:r>
+              <a:rPr>
+                <a:latin typeface="Inter"/>
+              </a:rPr>
+              <a:t>SOURCE AUDIT TRAIL</a:t>
+            </a:r>
+          </a:p>
+        </p:txBody>
+      </p:sp>
+      <p:graphicFrame>
+        <p:nvGraphicFramePr>
+          <p:cNvPr id="8" name="Table 7"/>
+          <p:cNvGraphicFramePr>
+            <a:graphicFrameLocks noGrp="1"/>
+          </p:cNvGraphicFramePr>
+          <p:nvPr/>
+        </p:nvGraphicFramePr>
+        <p:xfrm>
+          <a:off x="640080" y="1600200"/>
+          <a:ext cx="10908792" cy="4416552"/>
+        </p:xfrm>
+        <a:graphic>
+          <a:graphicData uri="http://schemas.openxmlformats.org/drawingml/2006/table">
+            <a:tbl>
+              <a:tblPr firstRow="1" bandRow="1">
+                <a:tableStyleId>{5C22544A-7EE6-4342-B048-85BDC9FD1C3A}</a:tableStyleId>
+              </a:tblPr>
+              <a:tblGrid>
+                <a:gridCol w="2011680"/>
+                <a:gridCol w="4448556"/>
+                <a:gridCol w="4448556"/>
+              </a:tblGrid>
+              <a:tr h="552069">
+                <a:tc>
+                  <a:txBody>
+                    <a:bodyPr/>
+                    <a:lstStyle/>
+                    <a:p>
+                      <a:pPr>
+                        <a:defRPr sz="750" b="1">
+                          <a:solidFill>
+                            <a:srgbClr val="FFFFFF"/>
+                          </a:solidFill>
+                          <a:latin typeface="Inter"/>
+                        </a:defRPr>
+                      </a:pPr>
+                      <a:r>
+                        <a:rPr>
+                          <a:latin typeface="Inter"/>
+                        </a:rPr>
+                        <a:t>Tag</a:t>
                       </a:r>
                     </a:p>
                   </a:txBody>
@@ -27261,87 +27884,6 @@
                         <a:rPr>
                           <a:latin typeface="Inter"/>
                         </a:rPr>
-                        <a:t>As of</a:t>
-                      </a:r>
-                    </a:p>
-                  </a:txBody>
-                  <a:tcPr marL="54864" marR="54864" marT="27432" marB="27432" anchor="ctr">
-                    <a:solidFill>
-                      <a:srgbClr val="0D1117"/>
-                    </a:solidFill>
-                  </a:tcPr>
-                </a:tc>
-                <a:tc>
-                  <a:txBody>
-                    <a:bodyPr/>
-                    <a:lstStyle/>
-                    <a:p>
-                      <a:pPr>
-                        <a:defRPr sz="750" b="1">
-                          <a:solidFill>
-                            <a:srgbClr val="FFFFFF"/>
-                          </a:solidFill>
-                          <a:latin typeface="Inter"/>
-                        </a:defRPr>
-                      </a:pPr>
-                      <a:r>
-                        <a:rPr>
-                          <a:latin typeface="Inter"/>
-                        </a:rPr>
-                        <a:t>Data scope</a:t>
-                      </a:r>
-                    </a:p>
-                  </a:txBody>
-                  <a:tcPr marL="54864" marR="54864" marT="27432" marB="27432" anchor="ctr">
-                    <a:solidFill>
-                      <a:srgbClr val="0D1117"/>
-                    </a:solidFill>
-                  </a:tcPr>
-                </a:tc>
-                <a:tc>
-                  <a:txBody>
-                    <a:bodyPr/>
-                    <a:lstStyle/>
-                    <a:p>
-                      <a:pPr>
-                        <a:defRPr sz="750" b="1">
-                          <a:solidFill>
-                            <a:srgbClr val="FFFFFF"/>
-                          </a:solidFill>
-                          <a:latin typeface="Inter"/>
-                        </a:defRPr>
-                      </a:pPr>
-                      <a:r>
-                        <a:rPr>
-                          <a:latin typeface="Inter"/>
-                        </a:rPr>
-                        <a:t>Validation</a:t>
-                      </a:r>
-                    </a:p>
-                  </a:txBody>
-                  <a:tcPr marL="54864" marR="54864" marT="27432" marB="27432" anchor="ctr">
-                    <a:solidFill>
-                      <a:srgbClr val="0D1117"/>
-                    </a:solidFill>
-                  </a:tcPr>
-                </a:tc>
-                <a:tc>
-                  <a:txBody>
-                    <a:bodyPr/>
-                    <a:lstStyle/>
-                    <a:p>
-                      <a:pPr>
-                        <a:defRPr sz="750" b="1">
-                          <a:solidFill>
-                            <a:srgbClr val="FFFFFF"/>
-                          </a:solidFill>
-                          <a:latin typeface="Inter"/>
-                        </a:defRPr>
-                      </a:pPr>
-                      <a:r>
-                        <a:rPr>
-                          <a:latin typeface="Inter"/>
-                        </a:rPr>
                         <a:t>Digest</a:t>
                       </a:r>
                     </a:p>
@@ -27353,14 +27895,14 @@
                   </a:tcPr>
                 </a:tc>
               </a:tr>
-              <a:tr h="586359">
+              <a:tr h="552069">
                 <a:tc>
                   <a:txBody>
                     <a:bodyPr/>
                     <a:lstStyle/>
                     <a:p>
                       <a:pPr>
-                        <a:defRPr sz="650" b="1">
+                        <a:defRPr sz="800" b="1">
                           <a:solidFill>
                             <a:srgbClr val="0D1117"/>
                           </a:solidFill>
@@ -27387,88 +27929,7 @@
                     <a:lstStyle/>
                     <a:p>
                       <a:pPr>
-                        <a:defRPr sz="650" b="0">
-                          <a:solidFill>
-                            <a:srgbClr val="0D1117"/>
-                          </a:solidFill>
-                          <a:latin typeface="Inter"/>
-                        </a:defRPr>
-                      </a:pPr>
-                      <a:r>
-                        <a:rPr>
-                          <a:latin typeface="Inter"/>
-                        </a:rPr>
-                        <a:t>Capabilities</a:t>
-                      </a:r>
-                    </a:p>
-                  </a:txBody>
-                  <a:tcPr marL="54864" marR="54864" marT="27432" marB="27432" anchor="ctr">
-                    <a:solidFill>
-                      <a:srgbClr val="FFFFFF"/>
-                    </a:solidFill>
-                  </a:tcPr>
-                </a:tc>
-                <a:tc>
-                  <a:txBody>
-                    <a:bodyPr/>
-                    <a:lstStyle/>
-                    <a:p>
-                      <a:pPr>
-                        <a:defRPr sz="650" b="0">
-                          <a:solidFill>
-                            <a:srgbClr val="0D1117"/>
-                          </a:solidFill>
-                          <a:latin typeface="Inter"/>
-                        </a:defRPr>
-                      </a:pPr>
-                      <a:r>
-                        <a:rPr>
-                          <a:latin typeface="Inter"/>
-                        </a:rPr>
-                        <a:t>gradient_tool_metadata</a:t>
-                      </a:r>
-                    </a:p>
-                  </a:txBody>
-                  <a:tcPr marL="54864" marR="54864" marT="27432" marB="27432" anchor="ctr">
-                    <a:solidFill>
-                      <a:srgbClr val="FFFFFF"/>
-                    </a:solidFill>
-                  </a:tcPr>
-                </a:tc>
-                <a:tc>
-                  <a:txBody>
-                    <a:bodyPr/>
-                    <a:lstStyle/>
-                    <a:p>
-                      <a:pPr>
-                        <a:defRPr sz="650" b="0">
-                          <a:solidFill>
-                            <a:srgbClr val="0D1117"/>
-                          </a:solidFill>
-                          <a:latin typeface="Inter"/>
-                        </a:defRPr>
-                      </a:pPr>
-                      <a:r>
-                        <a:rPr>
-                          <a:latin typeface="Inter"/>
-                        </a:rPr>
-                        <a:t>get_gradient_capabilities</a:t>
-                      </a:r>
-                    </a:p>
-                  </a:txBody>
-                  <a:tcPr marL="54864" marR="54864" marT="27432" marB="27432" anchor="ctr">
-                    <a:solidFill>
-                      <a:srgbClr val="FFFFFF"/>
-                    </a:solidFill>
-                  </a:tcPr>
-                </a:tc>
-                <a:tc>
-                  <a:txBody>
-                    <a:bodyPr/>
-                    <a:lstStyle/>
-                    <a:p>
-                      <a:pPr>
-                        <a:defRPr sz="650" b="0">
+                        <a:defRPr sz="800" b="0">
                           <a:solidFill>
                             <a:srgbClr val="0D1117"/>
                           </a:solidFill>
@@ -27495,7 +27956,7 @@
                     <a:lstStyle/>
                     <a:p>
                       <a:pPr>
-                        <a:defRPr sz="650" b="0">
+                        <a:defRPr sz="800" b="0">
                           <a:solidFill>
                             <a:srgbClr val="0D1117"/>
                           </a:solidFill>
@@ -27506,88 +27967,7 @@
                         <a:rPr>
                           <a:latin typeface="Inter"/>
                         </a:rPr>
-                        <a:t>2026-10-08</a:t>
-                      </a:r>
-                    </a:p>
-                  </a:txBody>
-                  <a:tcPr marL="54864" marR="54864" marT="27432" marB="27432" anchor="ctr">
-                    <a:solidFill>
-                      <a:srgbClr val="FFFFFF"/>
-                    </a:solidFill>
-                  </a:tcPr>
-                </a:tc>
-                <a:tc>
-                  <a:txBody>
-                    <a:bodyPr/>
-                    <a:lstStyle/>
-                    <a:p>
-                      <a:pPr>
-                        <a:defRPr sz="650" b="0">
-                          <a:solidFill>
-                            <a:srgbClr val="0D1117"/>
-                          </a:solidFill>
-                          <a:latin typeface="Inter"/>
-                        </a:defRPr>
-                      </a:pPr>
-                      <a:r>
-                        <a:rPr>
-                          <a:latin typeface="Inter"/>
-                        </a:rPr>
-                        <a:t>Illustrative sample data</a:t>
-                      </a:r>
-                    </a:p>
-                  </a:txBody>
-                  <a:tcPr marL="54864" marR="54864" marT="27432" marB="27432" anchor="ctr">
-                    <a:solidFill>
-                      <a:srgbClr val="FFFFFF"/>
-                    </a:solidFill>
-                  </a:tcPr>
-                </a:tc>
-                <a:tc>
-                  <a:txBody>
-                    <a:bodyPr/>
-                    <a:lstStyle/>
-                    <a:p>
-                      <a:pPr>
-                        <a:defRPr sz="650" b="1">
-                          <a:solidFill>
-                            <a:srgbClr val="C6F432"/>
-                          </a:solidFill>
-                          <a:latin typeface="Inter"/>
-                        </a:defRPr>
-                      </a:pPr>
-                      <a:r>
-                        <a:rPr>
-                          <a:latin typeface="Inter"/>
-                        </a:rPr>
-                        <a:t>● passed</a:t>
-                      </a:r>
-                    </a:p>
-                  </a:txBody>
-                  <a:tcPr marL="54864" marR="54864" marT="27432" marB="27432" anchor="ctr">
-                    <a:solidFill>
-                      <a:srgbClr val="F5F7F9"/>
-                    </a:solidFill>
-                  </a:tcPr>
-                </a:tc>
-                <a:tc>
-                  <a:txBody>
-                    <a:bodyPr/>
-                    <a:lstStyle/>
-                    <a:p>
-                      <a:pPr>
-                        <a:defRPr sz="650" b="0">
-                          <a:solidFill>
-                            <a:srgbClr val="0D1117"/>
-                          </a:solidFill>
-                          <a:latin typeface="Inter"/>
-                        </a:defRPr>
-                      </a:pPr>
-                      <a:r>
-                        <a:rPr>
-                          <a:latin typeface="Inter"/>
-                        </a:rPr>
-                        <a:t>not_applicable_metadata_response</a:t>
+                        <a:t>Not applicable — tool metadata</a:t>
                       </a:r>
                     </a:p>
                   </a:txBody>
@@ -27598,14 +27978,14 @@
                   </a:tcPr>
                 </a:tc>
               </a:tr>
-              <a:tr h="586359">
+              <a:tr h="552069">
                 <a:tc>
                   <a:txBody>
                     <a:bodyPr/>
                     <a:lstStyle/>
                     <a:p>
                       <a:pPr>
-                        <a:defRPr sz="650" b="1">
+                        <a:defRPr sz="800" b="1">
                           <a:solidFill>
                             <a:srgbClr val="0D1117"/>
                           </a:solidFill>
@@ -27632,88 +28012,7 @@
                     <a:lstStyle/>
                     <a:p>
                       <a:pPr>
-                        <a:defRPr sz="650" b="0">
-                          <a:solidFill>
-                            <a:srgbClr val="0D1117"/>
-                          </a:solidFill>
-                          <a:latin typeface="Inter"/>
-                        </a:defRPr>
-                      </a:pPr>
-                      <a:r>
-                        <a:rPr>
-                          <a:latin typeface="Inter"/>
-                        </a:rPr>
-                        <a:t>Portfolio and root cohort</a:t>
-                      </a:r>
-                    </a:p>
-                  </a:txBody>
-                  <a:tcPr marL="54864" marR="54864" marT="27432" marB="27432" anchor="ctr">
-                    <a:solidFill>
-                      <a:srgbClr val="F5F7F9"/>
-                    </a:solidFill>
-                  </a:tcPr>
-                </a:tc>
-                <a:tc>
-                  <a:txBody>
-                    <a:bodyPr/>
-                    <a:lstStyle/>
-                    <a:p>
-                      <a:pPr>
-                        <a:defRPr sz="650" b="0">
-                          <a:solidFill>
-                            <a:srgbClr val="0D1117"/>
-                          </a:solidFill>
-                          <a:latin typeface="Inter"/>
-                        </a:defRPr>
-                      </a:pPr>
-                      <a:r>
-                        <a:rPr>
-                          <a:latin typeface="Inter"/>
-                        </a:rPr>
-                        <a:t>gradient_tool</a:t>
-                      </a:r>
-                    </a:p>
-                  </a:txBody>
-                  <a:tcPr marL="54864" marR="54864" marT="27432" marB="27432" anchor="ctr">
-                    <a:solidFill>
-                      <a:srgbClr val="F5F7F9"/>
-                    </a:solidFill>
-                  </a:tcPr>
-                </a:tc>
-                <a:tc>
-                  <a:txBody>
-                    <a:bodyPr/>
-                    <a:lstStyle/>
-                    <a:p>
-                      <a:pPr>
-                        <a:defRPr sz="650" b="0">
-                          <a:solidFill>
-                            <a:srgbClr val="0D1117"/>
-                          </a:solidFill>
-                          <a:latin typeface="Inter"/>
-                        </a:defRPr>
-                      </a:pPr>
-                      <a:r>
-                        <a:rPr>
-                          <a:latin typeface="Inter"/>
-                        </a:rPr>
-                        <a:t>list_portfolios; get_portfolio_structure</a:t>
-                      </a:r>
-                    </a:p>
-                  </a:txBody>
-                  <a:tcPr marL="54864" marR="54864" marT="27432" marB="27432" anchor="ctr">
-                    <a:solidFill>
-                      <a:srgbClr val="F5F7F9"/>
-                    </a:solidFill>
-                  </a:tcPr>
-                </a:tc>
-                <a:tc>
-                  <a:txBody>
-                    <a:bodyPr/>
-                    <a:lstStyle/>
-                    <a:p>
-                      <a:pPr>
-                        <a:defRPr sz="650" b="0">
+                        <a:defRPr sz="800" b="0">
                           <a:solidFill>
                             <a:srgbClr val="0D1117"/>
                           </a:solidFill>
@@ -27740,88 +28039,7 @@
                     <a:lstStyle/>
                     <a:p>
                       <a:pPr>
-                        <a:defRPr sz="650" b="0">
-                          <a:solidFill>
-                            <a:srgbClr val="0D1117"/>
-                          </a:solidFill>
-                          <a:latin typeface="Inter"/>
-                        </a:defRPr>
-                      </a:pPr>
-                      <a:r>
-                        <a:rPr>
-                          <a:latin typeface="Inter"/>
-                        </a:rPr>
-                        <a:t>2026-10-08</a:t>
-                      </a:r>
-                    </a:p>
-                  </a:txBody>
-                  <a:tcPr marL="54864" marR="54864" marT="27432" marB="27432" anchor="ctr">
-                    <a:solidFill>
-                      <a:srgbClr val="F5F7F9"/>
-                    </a:solidFill>
-                  </a:tcPr>
-                </a:tc>
-                <a:tc>
-                  <a:txBody>
-                    <a:bodyPr/>
-                    <a:lstStyle/>
-                    <a:p>
-                      <a:pPr>
-                        <a:defRPr sz="650" b="0">
-                          <a:solidFill>
-                            <a:srgbClr val="0D1117"/>
-                          </a:solidFill>
-                          <a:latin typeface="Inter"/>
-                        </a:defRPr>
-                      </a:pPr>
-                      <a:r>
-                        <a:rPr>
-                          <a:latin typeface="Inter"/>
-                        </a:rPr>
-                        <a:t>Illustrative sample data</a:t>
-                      </a:r>
-                    </a:p>
-                  </a:txBody>
-                  <a:tcPr marL="54864" marR="54864" marT="27432" marB="27432" anchor="ctr">
-                    <a:solidFill>
-                      <a:srgbClr val="F5F7F9"/>
-                    </a:solidFill>
-                  </a:tcPr>
-                </a:tc>
-                <a:tc>
-                  <a:txBody>
-                    <a:bodyPr/>
-                    <a:lstStyle/>
-                    <a:p>
-                      <a:pPr>
-                        <a:defRPr sz="650" b="1">
-                          <a:solidFill>
-                            <a:srgbClr val="C6F432"/>
-                          </a:solidFill>
-                          <a:latin typeface="Inter"/>
-                        </a:defRPr>
-                      </a:pPr>
-                      <a:r>
-                        <a:rPr>
-                          <a:latin typeface="Inter"/>
-                        </a:rPr>
-                        <a:t>● passed</a:t>
-                      </a:r>
-                    </a:p>
-                  </a:txBody>
-                  <a:tcPr marL="54864" marR="54864" marT="27432" marB="27432" anchor="ctr">
-                    <a:solidFill>
-                      <a:srgbClr val="F5F7F9"/>
-                    </a:solidFill>
-                  </a:tcPr>
-                </a:tc>
-                <a:tc>
-                  <a:txBody>
-                    <a:bodyPr/>
-                    <a:lstStyle/>
-                    <a:p>
-                      <a:pPr>
-                        <a:defRPr sz="650" b="0">
+                        <a:defRPr sz="800" b="0">
                           <a:solidFill>
                             <a:srgbClr val="0D1117"/>
                           </a:solidFill>
@@ -27843,14 +28061,14 @@
                   </a:tcPr>
                 </a:tc>
               </a:tr>
-              <a:tr h="586359">
+              <a:tr h="552069">
                 <a:tc>
                   <a:txBody>
                     <a:bodyPr/>
                     <a:lstStyle/>
                     <a:p>
                       <a:pPr>
-                        <a:defRPr sz="650" b="1">
+                        <a:defRPr sz="800" b="1">
                           <a:solidFill>
                             <a:srgbClr val="0D1117"/>
                           </a:solidFill>
@@ -27877,88 +28095,7 @@
                     <a:lstStyle/>
                     <a:p>
                       <a:pPr>
-                        <a:defRPr sz="650" b="0">
-                          <a:solidFill>
-                            <a:srgbClr val="0D1117"/>
-                          </a:solidFill>
-                          <a:latin typeface="Inter"/>
-                        </a:defRPr>
-                      </a:pPr>
-                      <a:r>
-                        <a:rPr>
-                          <a:latin typeface="Inter"/>
-                        </a:rPr>
-                        <a:t>Historical returns context</a:t>
-                      </a:r>
-                    </a:p>
-                  </a:txBody>
-                  <a:tcPr marL="54864" marR="54864" marT="27432" marB="27432" anchor="ctr">
-                    <a:solidFill>
-                      <a:srgbClr val="FFFFFF"/>
-                    </a:solidFill>
-                  </a:tcPr>
-                </a:tc>
-                <a:tc>
-                  <a:txBody>
-                    <a:bodyPr/>
-                    <a:lstStyle/>
-                    <a:p>
-                      <a:pPr>
-                        <a:defRPr sz="650" b="0">
-                          <a:solidFill>
-                            <a:srgbClr val="0D1117"/>
-                          </a:solidFill>
-                          <a:latin typeface="Inter"/>
-                        </a:defRPr>
-                      </a:pPr>
-                      <a:r>
-                        <a:rPr>
-                          <a:latin typeface="Inter"/>
-                        </a:rPr>
-                        <a:t>gradient_tool</a:t>
-                      </a:r>
-                    </a:p>
-                  </a:txBody>
-                  <a:tcPr marL="54864" marR="54864" marT="27432" marB="27432" anchor="ctr">
-                    <a:solidFill>
-                      <a:srgbClr val="FFFFFF"/>
-                    </a:solidFill>
-                  </a:tcPr>
-                </a:tc>
-                <a:tc>
-                  <a:txBody>
-                    <a:bodyPr/>
-                    <a:lstStyle/>
-                    <a:p>
-                      <a:pPr>
-                        <a:defRPr sz="650" b="0">
-                          <a:solidFill>
-                            <a:srgbClr val="0D1117"/>
-                          </a:solidFill>
-                          <a:latin typeface="Inter"/>
-                        </a:defRPr>
-                      </a:pPr>
-                      <a:r>
-                        <a:rPr>
-                          <a:latin typeface="Inter"/>
-                        </a:rPr>
-                        <a:t>get_portfolio_historical_returns</a:t>
-                      </a:r>
-                    </a:p>
-                  </a:txBody>
-                  <a:tcPr marL="54864" marR="54864" marT="27432" marB="27432" anchor="ctr">
-                    <a:solidFill>
-                      <a:srgbClr val="FFFFFF"/>
-                    </a:solidFill>
-                  </a:tcPr>
-                </a:tc>
-                <a:tc>
-                  <a:txBody>
-                    <a:bodyPr/>
-                    <a:lstStyle/>
-                    <a:p>
-                      <a:pPr>
-                        <a:defRPr sz="650" b="0">
+                        <a:defRPr sz="800" b="0">
                           <a:solidFill>
                             <a:srgbClr val="0D1117"/>
                           </a:solidFill>
@@ -27985,88 +28122,7 @@
                     <a:lstStyle/>
                     <a:p>
                       <a:pPr>
-                        <a:defRPr sz="650" b="0">
-                          <a:solidFill>
-                            <a:srgbClr val="0D1117"/>
-                          </a:solidFill>
-                          <a:latin typeface="Inter"/>
-                        </a:defRPr>
-                      </a:pPr>
-                      <a:r>
-                        <a:rPr>
-                          <a:latin typeface="Inter"/>
-                        </a:rPr>
-                        <a:t>2026-06-30</a:t>
-                      </a:r>
-                    </a:p>
-                  </a:txBody>
-                  <a:tcPr marL="54864" marR="54864" marT="27432" marB="27432" anchor="ctr">
-                    <a:solidFill>
-                      <a:srgbClr val="FFFFFF"/>
-                    </a:solidFill>
-                  </a:tcPr>
-                </a:tc>
-                <a:tc>
-                  <a:txBody>
-                    <a:bodyPr/>
-                    <a:lstStyle/>
-                    <a:p>
-                      <a:pPr>
-                        <a:defRPr sz="650" b="0">
-                          <a:solidFill>
-                            <a:srgbClr val="0D1117"/>
-                          </a:solidFill>
-                          <a:latin typeface="Inter"/>
-                        </a:defRPr>
-                      </a:pPr>
-                      <a:r>
-                        <a:rPr>
-                          <a:latin typeface="Inter"/>
-                        </a:rPr>
-                        <a:t>Illustrative sample data</a:t>
-                      </a:r>
-                    </a:p>
-                  </a:txBody>
-                  <a:tcPr marL="54864" marR="54864" marT="27432" marB="27432" anchor="ctr">
-                    <a:solidFill>
-                      <a:srgbClr val="FFFFFF"/>
-                    </a:solidFill>
-                  </a:tcPr>
-                </a:tc>
-                <a:tc>
-                  <a:txBody>
-                    <a:bodyPr/>
-                    <a:lstStyle/>
-                    <a:p>
-                      <a:pPr>
-                        <a:defRPr sz="650" b="1">
-                          <a:solidFill>
-                            <a:srgbClr val="C6F432"/>
-                          </a:solidFill>
-                          <a:latin typeface="Inter"/>
-                        </a:defRPr>
-                      </a:pPr>
-                      <a:r>
-                        <a:rPr>
-                          <a:latin typeface="Inter"/>
-                        </a:rPr>
-                        <a:t>● passed</a:t>
-                      </a:r>
-                    </a:p>
-                  </a:txBody>
-                  <a:tcPr marL="54864" marR="54864" marT="27432" marB="27432" anchor="ctr">
-                    <a:solidFill>
-                      <a:srgbClr val="F5F7F9"/>
-                    </a:solidFill>
-                  </a:tcPr>
-                </a:tc>
-                <a:tc>
-                  <a:txBody>
-                    <a:bodyPr/>
-                    <a:lstStyle/>
-                    <a:p>
-                      <a:pPr>
-                        <a:defRPr sz="650" b="0">
+                        <a:defRPr sz="800" b="0">
                           <a:solidFill>
                             <a:srgbClr val="0D1117"/>
                           </a:solidFill>
@@ -28088,14 +28144,14 @@
                   </a:tcPr>
                 </a:tc>
               </a:tr>
-              <a:tr h="586359">
+              <a:tr h="552069">
                 <a:tc>
                   <a:txBody>
                     <a:bodyPr/>
                     <a:lstStyle/>
                     <a:p>
                       <a:pPr>
-                        <a:defRPr sz="650" b="1">
+                        <a:defRPr sz="800" b="1">
                           <a:solidFill>
                             <a:srgbClr val="0D1117"/>
                           </a:solidFill>
@@ -28122,88 +28178,7 @@
                     <a:lstStyle/>
                     <a:p>
                       <a:pPr>
-                        <a:defRPr sz="650" b="0">
-                          <a:solidFill>
-                            <a:srgbClr val="0D1117"/>
-                          </a:solidFill>
-                          <a:latin typeface="Inter"/>
-                        </a:defRPr>
-                      </a:pPr>
-                      <a:r>
-                        <a:rPr>
-                          <a:latin typeface="Inter"/>
-                        </a:rPr>
-                        <a:t>Historical attribution</a:t>
-                      </a:r>
-                    </a:p>
-                  </a:txBody>
-                  <a:tcPr marL="54864" marR="54864" marT="27432" marB="27432" anchor="ctr">
-                    <a:solidFill>
-                      <a:srgbClr val="F5F7F9"/>
-                    </a:solidFill>
-                  </a:tcPr>
-                </a:tc>
-                <a:tc>
-                  <a:txBody>
-                    <a:bodyPr/>
-                    <a:lstStyle/>
-                    <a:p>
-                      <a:pPr>
-                        <a:defRPr sz="650" b="0">
-                          <a:solidFill>
-                            <a:srgbClr val="0D1117"/>
-                          </a:solidFill>
-                          <a:latin typeface="Inter"/>
-                        </a:defRPr>
-                      </a:pPr>
-                      <a:r>
-                        <a:rPr>
-                          <a:latin typeface="Inter"/>
-                        </a:rPr>
-                        <a:t>gradient_tool</a:t>
-                      </a:r>
-                    </a:p>
-                  </a:txBody>
-                  <a:tcPr marL="54864" marR="54864" marT="27432" marB="27432" anchor="ctr">
-                    <a:solidFill>
-                      <a:srgbClr val="F5F7F9"/>
-                    </a:solidFill>
-                  </a:tcPr>
-                </a:tc>
-                <a:tc>
-                  <a:txBody>
-                    <a:bodyPr/>
-                    <a:lstStyle/>
-                    <a:p>
-                      <a:pPr>
-                        <a:defRPr sz="650" b="0">
-                          <a:solidFill>
-                            <a:srgbClr val="0D1117"/>
-                          </a:solidFill>
-                          <a:latin typeface="Inter"/>
-                        </a:defRPr>
-                      </a:pPr>
-                      <a:r>
-                        <a:rPr>
-                          <a:latin typeface="Inter"/>
-                        </a:rPr>
-                        <a:t>get_portfolio_attribution</a:t>
-                      </a:r>
-                    </a:p>
-                  </a:txBody>
-                  <a:tcPr marL="54864" marR="54864" marT="27432" marB="27432" anchor="ctr">
-                    <a:solidFill>
-                      <a:srgbClr val="F5F7F9"/>
-                    </a:solidFill>
-                  </a:tcPr>
-                </a:tc>
-                <a:tc>
-                  <a:txBody>
-                    <a:bodyPr/>
-                    <a:lstStyle/>
-                    <a:p>
-                      <a:pPr>
-                        <a:defRPr sz="650" b="0">
+                        <a:defRPr sz="800" b="0">
                           <a:solidFill>
                             <a:srgbClr val="0D1117"/>
                           </a:solidFill>
@@ -28230,88 +28205,7 @@
                     <a:lstStyle/>
                     <a:p>
                       <a:pPr>
-                        <a:defRPr sz="650" b="0">
-                          <a:solidFill>
-                            <a:srgbClr val="0D1117"/>
-                          </a:solidFill>
-                          <a:latin typeface="Inter"/>
-                        </a:defRPr>
-                      </a:pPr>
-                      <a:r>
-                        <a:rPr>
-                          <a:latin typeface="Inter"/>
-                        </a:rPr>
-                        <a:t>2026-06-30</a:t>
-                      </a:r>
-                    </a:p>
-                  </a:txBody>
-                  <a:tcPr marL="54864" marR="54864" marT="27432" marB="27432" anchor="ctr">
-                    <a:solidFill>
-                      <a:srgbClr val="F5F7F9"/>
-                    </a:solidFill>
-                  </a:tcPr>
-                </a:tc>
-                <a:tc>
-                  <a:txBody>
-                    <a:bodyPr/>
-                    <a:lstStyle/>
-                    <a:p>
-                      <a:pPr>
-                        <a:defRPr sz="650" b="0">
-                          <a:solidFill>
-                            <a:srgbClr val="0D1117"/>
-                          </a:solidFill>
-                          <a:latin typeface="Inter"/>
-                        </a:defRPr>
-                      </a:pPr>
-                      <a:r>
-                        <a:rPr>
-                          <a:latin typeface="Inter"/>
-                        </a:rPr>
-                        <a:t>Illustrative sample data</a:t>
-                      </a:r>
-                    </a:p>
-                  </a:txBody>
-                  <a:tcPr marL="54864" marR="54864" marT="27432" marB="27432" anchor="ctr">
-                    <a:solidFill>
-                      <a:srgbClr val="F5F7F9"/>
-                    </a:solidFill>
-                  </a:tcPr>
-                </a:tc>
-                <a:tc>
-                  <a:txBody>
-                    <a:bodyPr/>
-                    <a:lstStyle/>
-                    <a:p>
-                      <a:pPr>
-                        <a:defRPr sz="650" b="1">
-                          <a:solidFill>
-                            <a:srgbClr val="C6F432"/>
-                          </a:solidFill>
-                          <a:latin typeface="Inter"/>
-                        </a:defRPr>
-                      </a:pPr>
-                      <a:r>
-                        <a:rPr>
-                          <a:latin typeface="Inter"/>
-                        </a:rPr>
-                        <a:t>● passed</a:t>
-                      </a:r>
-                    </a:p>
-                  </a:txBody>
-                  <a:tcPr marL="54864" marR="54864" marT="27432" marB="27432" anchor="ctr">
-                    <a:solidFill>
-                      <a:srgbClr val="F5F7F9"/>
-                    </a:solidFill>
-                  </a:tcPr>
-                </a:tc>
-                <a:tc>
-                  <a:txBody>
-                    <a:bodyPr/>
-                    <a:lstStyle/>
-                    <a:p>
-                      <a:pPr>
-                        <a:defRPr sz="650" b="0">
+                        <a:defRPr sz="800" b="0">
                           <a:solidFill>
                             <a:srgbClr val="0D1117"/>
                           </a:solidFill>
@@ -28333,14 +28227,14 @@
                   </a:tcPr>
                 </a:tc>
               </a:tr>
-              <a:tr h="586359">
+              <a:tr h="552069">
                 <a:tc>
                   <a:txBody>
                     <a:bodyPr/>
                     <a:lstStyle/>
                     <a:p>
                       <a:pPr>
-                        <a:defRPr sz="650" b="1">
+                        <a:defRPr sz="800" b="1">
                           <a:solidFill>
                             <a:srgbClr val="0D1117"/>
                           </a:solidFill>
@@ -28367,88 +28261,7 @@
                     <a:lstStyle/>
                     <a:p>
                       <a:pPr>
-                        <a:defRPr sz="650" b="0">
-                          <a:solidFill>
-                            <a:srgbClr val="0D1117"/>
-                          </a:solidFill>
-                          <a:latin typeface="Inter"/>
-                        </a:defRPr>
-                      </a:pPr>
-                      <a:r>
-                        <a:rPr>
-                          <a:latin typeface="Inter"/>
-                        </a:rPr>
-                        <a:t>Governed ex ante attribution</a:t>
-                      </a:r>
-                    </a:p>
-                  </a:txBody>
-                  <a:tcPr marL="54864" marR="54864" marT="27432" marB="27432" anchor="ctr">
-                    <a:solidFill>
-                      <a:srgbClr val="FFFFFF"/>
-                    </a:solidFill>
-                  </a:tcPr>
-                </a:tc>
-                <a:tc>
-                  <a:txBody>
-                    <a:bodyPr/>
-                    <a:lstStyle/>
-                    <a:p>
-                      <a:pPr>
-                        <a:defRPr sz="650" b="0">
-                          <a:solidFill>
-                            <a:srgbClr val="0D1117"/>
-                          </a:solidFill>
-                          <a:latin typeface="Inter"/>
-                        </a:defRPr>
-                      </a:pPr>
-                      <a:r>
-                        <a:rPr>
-                          <a:latin typeface="Inter"/>
-                        </a:rPr>
-                        <a:t>gradient_tool</a:t>
-                      </a:r>
-                    </a:p>
-                  </a:txBody>
-                  <a:tcPr marL="54864" marR="54864" marT="27432" marB="27432" anchor="ctr">
-                    <a:solidFill>
-                      <a:srgbClr val="FFFFFF"/>
-                    </a:solidFill>
-                  </a:tcPr>
-                </a:tc>
-                <a:tc>
-                  <a:txBody>
-                    <a:bodyPr/>
-                    <a:lstStyle/>
-                    <a:p>
-                      <a:pPr>
-                        <a:defRPr sz="650" b="0">
-                          <a:solidFill>
-                            <a:srgbClr val="0D1117"/>
-                          </a:solidFill>
-                          <a:latin typeface="Inter"/>
-                        </a:defRPr>
-                      </a:pPr>
-                      <a:r>
-                        <a:rPr>
-                          <a:latin typeface="Inter"/>
-                        </a:rPr>
-                        <a:t>get_portfolio_ex_ante_attribution</a:t>
-                      </a:r>
-                    </a:p>
-                  </a:txBody>
-                  <a:tcPr marL="54864" marR="54864" marT="27432" marB="27432" anchor="ctr">
-                    <a:solidFill>
-                      <a:srgbClr val="FFFFFF"/>
-                    </a:solidFill>
-                  </a:tcPr>
-                </a:tc>
-                <a:tc>
-                  <a:txBody>
-                    <a:bodyPr/>
-                    <a:lstStyle/>
-                    <a:p>
-                      <a:pPr>
-                        <a:defRPr sz="650" b="0">
+                        <a:defRPr sz="800" b="0">
                           <a:solidFill>
                             <a:srgbClr val="0D1117"/>
                           </a:solidFill>
@@ -28475,88 +28288,7 @@
                     <a:lstStyle/>
                     <a:p>
                       <a:pPr>
-                        <a:defRPr sz="650" b="0">
-                          <a:solidFill>
-                            <a:srgbClr val="0D1117"/>
-                          </a:solidFill>
-                          <a:latin typeface="Inter"/>
-                        </a:defRPr>
-                      </a:pPr>
-                      <a:r>
-                        <a:rPr>
-                          <a:latin typeface="Inter"/>
-                        </a:rPr>
-                        <a:t>2026-10-08</a:t>
-                      </a:r>
-                    </a:p>
-                  </a:txBody>
-                  <a:tcPr marL="54864" marR="54864" marT="27432" marB="27432" anchor="ctr">
-                    <a:solidFill>
-                      <a:srgbClr val="FFFFFF"/>
-                    </a:solidFill>
-                  </a:tcPr>
-                </a:tc>
-                <a:tc>
-                  <a:txBody>
-                    <a:bodyPr/>
-                    <a:lstStyle/>
-                    <a:p>
-                      <a:pPr>
-                        <a:defRPr sz="650" b="0">
-                          <a:solidFill>
-                            <a:srgbClr val="0D1117"/>
-                          </a:solidFill>
-                          <a:latin typeface="Inter"/>
-                        </a:defRPr>
-                      </a:pPr>
-                      <a:r>
-                        <a:rPr>
-                          <a:latin typeface="Inter"/>
-                        </a:rPr>
-                        <a:t>Illustrative sample data</a:t>
-                      </a:r>
-                    </a:p>
-                  </a:txBody>
-                  <a:tcPr marL="54864" marR="54864" marT="27432" marB="27432" anchor="ctr">
-                    <a:solidFill>
-                      <a:srgbClr val="FFFFFF"/>
-                    </a:solidFill>
-                  </a:tcPr>
-                </a:tc>
-                <a:tc>
-                  <a:txBody>
-                    <a:bodyPr/>
-                    <a:lstStyle/>
-                    <a:p>
-                      <a:pPr>
-                        <a:defRPr sz="650" b="1">
-                          <a:solidFill>
-                            <a:srgbClr val="C6F432"/>
-                          </a:solidFill>
-                          <a:latin typeface="Inter"/>
-                        </a:defRPr>
-                      </a:pPr>
-                      <a:r>
-                        <a:rPr>
-                          <a:latin typeface="Inter"/>
-                        </a:rPr>
-                        <a:t>● passed</a:t>
-                      </a:r>
-                    </a:p>
-                  </a:txBody>
-                  <a:tcPr marL="54864" marR="54864" marT="27432" marB="27432" anchor="ctr">
-                    <a:solidFill>
-                      <a:srgbClr val="F5F7F9"/>
-                    </a:solidFill>
-                  </a:tcPr>
-                </a:tc>
-                <a:tc>
-                  <a:txBody>
-                    <a:bodyPr/>
-                    <a:lstStyle/>
-                    <a:p>
-                      <a:pPr>
-                        <a:defRPr sz="650" b="0">
+                        <a:defRPr sz="800" b="0">
                           <a:solidFill>
                             <a:srgbClr val="0D1117"/>
                           </a:solidFill>
@@ -28578,14 +28310,14 @@
                   </a:tcPr>
                 </a:tc>
               </a:tr>
-              <a:tr h="586359">
+              <a:tr h="552069">
                 <a:tc>
                   <a:txBody>
                     <a:bodyPr/>
                     <a:lstStyle/>
                     <a:p>
                       <a:pPr>
-                        <a:defRPr sz="650" b="1">
+                        <a:defRPr sz="800" b="1">
                           <a:solidFill>
                             <a:srgbClr val="0D1117"/>
                           </a:solidFill>
@@ -28612,88 +28344,7 @@
                     <a:lstStyle/>
                     <a:p>
                       <a:pPr>
-                        <a:defRPr sz="650" b="0">
-                          <a:solidFill>
-                            <a:srgbClr val="0D1117"/>
-                          </a:solidFill>
-                          <a:latin typeface="Inter"/>
-                        </a:defRPr>
-                      </a:pPr>
-                      <a:r>
-                        <a:rPr>
-                          <a:latin typeface="Inter"/>
-                        </a:rPr>
-                        <a:t>Largest-detractor manager findings</a:t>
-                      </a:r>
-                    </a:p>
-                  </a:txBody>
-                  <a:tcPr marL="54864" marR="54864" marT="27432" marB="27432" anchor="ctr">
-                    <a:solidFill>
-                      <a:srgbClr val="F5F7F9"/>
-                    </a:solidFill>
-                  </a:tcPr>
-                </a:tc>
-                <a:tc>
-                  <a:txBody>
-                    <a:bodyPr/>
-                    <a:lstStyle/>
-                    <a:p>
-                      <a:pPr>
-                        <a:defRPr sz="650" b="0">
-                          <a:solidFill>
-                            <a:srgbClr val="0D1117"/>
-                          </a:solidFill>
-                          <a:latin typeface="Inter"/>
-                        </a:defRPr>
-                      </a:pPr>
-                      <a:r>
-                        <a:rPr>
-                          <a:latin typeface="Inter"/>
-                        </a:rPr>
-                        <a:t>gradient_tool</a:t>
-                      </a:r>
-                    </a:p>
-                  </a:txBody>
-                  <a:tcPr marL="54864" marR="54864" marT="27432" marB="27432" anchor="ctr">
-                    <a:solidFill>
-                      <a:srgbClr val="F5F7F9"/>
-                    </a:solidFill>
-                  </a:tcPr>
-                </a:tc>
-                <a:tc>
-                  <a:txBody>
-                    <a:bodyPr/>
-                    <a:lstStyle/>
-                    <a:p>
-                      <a:pPr>
-                        <a:defRPr sz="650" b="0">
-                          <a:solidFill>
-                            <a:srgbClr val="0D1117"/>
-                          </a:solidFill>
-                          <a:latin typeface="Inter"/>
-                        </a:defRPr>
-                      </a:pPr>
-                      <a:r>
-                        <a:rPr>
-                          <a:latin typeface="Inter"/>
-                        </a:rPr>
-                        <a:t>get_manager_diligence_findings</a:t>
-                      </a:r>
-                    </a:p>
-                  </a:txBody>
-                  <a:tcPr marL="54864" marR="54864" marT="27432" marB="27432" anchor="ctr">
-                    <a:solidFill>
-                      <a:srgbClr val="F5F7F9"/>
-                    </a:solidFill>
-                  </a:tcPr>
-                </a:tc>
-                <a:tc>
-                  <a:txBody>
-                    <a:bodyPr/>
-                    <a:lstStyle/>
-                    <a:p>
-                      <a:pPr>
-                        <a:defRPr sz="650" b="0">
+                        <a:defRPr sz="800" b="0">
                           <a:solidFill>
                             <a:srgbClr val="0D1117"/>
                           </a:solidFill>
@@ -28720,88 +28371,7 @@
                     <a:lstStyle/>
                     <a:p>
                       <a:pPr>
-                        <a:defRPr sz="650" b="0">
-                          <a:solidFill>
-                            <a:srgbClr val="0D1117"/>
-                          </a:solidFill>
-                          <a:latin typeface="Inter"/>
-                        </a:defRPr>
-                      </a:pPr>
-                      <a:r>
-                        <a:rPr>
-                          <a:latin typeface="Inter"/>
-                        </a:rPr>
-                        <a:t>2026-06-30</a:t>
-                      </a:r>
-                    </a:p>
-                  </a:txBody>
-                  <a:tcPr marL="54864" marR="54864" marT="27432" marB="27432" anchor="ctr">
-                    <a:solidFill>
-                      <a:srgbClr val="F5F7F9"/>
-                    </a:solidFill>
-                  </a:tcPr>
-                </a:tc>
-                <a:tc>
-                  <a:txBody>
-                    <a:bodyPr/>
-                    <a:lstStyle/>
-                    <a:p>
-                      <a:pPr>
-                        <a:defRPr sz="650" b="0">
-                          <a:solidFill>
-                            <a:srgbClr val="0D1117"/>
-                          </a:solidFill>
-                          <a:latin typeface="Inter"/>
-                        </a:defRPr>
-                      </a:pPr>
-                      <a:r>
-                        <a:rPr>
-                          <a:latin typeface="Inter"/>
-                        </a:rPr>
-                        <a:t>Illustrative sample data</a:t>
-                      </a:r>
-                    </a:p>
-                  </a:txBody>
-                  <a:tcPr marL="54864" marR="54864" marT="27432" marB="27432" anchor="ctr">
-                    <a:solidFill>
-                      <a:srgbClr val="F5F7F9"/>
-                    </a:solidFill>
-                  </a:tcPr>
-                </a:tc>
-                <a:tc>
-                  <a:txBody>
-                    <a:bodyPr/>
-                    <a:lstStyle/>
-                    <a:p>
-                      <a:pPr>
-                        <a:defRPr sz="650" b="1">
-                          <a:solidFill>
-                            <a:srgbClr val="C6F432"/>
-                          </a:solidFill>
-                          <a:latin typeface="Inter"/>
-                        </a:defRPr>
-                      </a:pPr>
-                      <a:r>
-                        <a:rPr>
-                          <a:latin typeface="Inter"/>
-                        </a:rPr>
-                        <a:t>● passed</a:t>
-                      </a:r>
-                    </a:p>
-                  </a:txBody>
-                  <a:tcPr marL="54864" marR="54864" marT="27432" marB="27432" anchor="ctr">
-                    <a:solidFill>
-                      <a:srgbClr val="F5F7F9"/>
-                    </a:solidFill>
-                  </a:tcPr>
-                </a:tc>
-                <a:tc>
-                  <a:txBody>
-                    <a:bodyPr/>
-                    <a:lstStyle/>
-                    <a:p>
-                      <a:pPr>
-                        <a:defRPr sz="650" b="0">
+                        <a:defRPr sz="800" b="0">
                           <a:solidFill>
                             <a:srgbClr val="0D1117"/>
                           </a:solidFill>
@@ -28823,14 +28393,14 @@
                   </a:tcPr>
                 </a:tc>
               </a:tr>
-              <a:tr h="586359">
+              <a:tr h="552069">
                 <a:tc>
                   <a:txBody>
                     <a:bodyPr/>
                     <a:lstStyle/>
                     <a:p>
                       <a:pPr>
-                        <a:defRPr sz="650" b="1">
+                        <a:defRPr sz="800" b="1">
                           <a:solidFill>
                             <a:srgbClr val="0D1117"/>
                           </a:solidFill>
@@ -28857,88 +28427,7 @@
                     <a:lstStyle/>
                     <a:p>
                       <a:pPr>
-                        <a:defRPr sz="650" b="0">
-                          <a:solidFill>
-                            <a:srgbClr val="0D1117"/>
-                          </a:solidFill>
-                          <a:latin typeface="Inter"/>
-                        </a:defRPr>
-                      </a:pPr>
-                      <a:r>
-                        <a:rPr>
-                          <a:latin typeface="Inter"/>
-                        </a:rPr>
-                        <a:t>Macro regime</a:t>
-                      </a:r>
-                    </a:p>
-                  </a:txBody>
-                  <a:tcPr marL="54864" marR="54864" marT="27432" marB="27432" anchor="ctr">
-                    <a:solidFill>
-                      <a:srgbClr val="FFFFFF"/>
-                    </a:solidFill>
-                  </a:tcPr>
-                </a:tc>
-                <a:tc>
-                  <a:txBody>
-                    <a:bodyPr/>
-                    <a:lstStyle/>
-                    <a:p>
-                      <a:pPr>
-                        <a:defRPr sz="650" b="0">
-                          <a:solidFill>
-                            <a:srgbClr val="0D1117"/>
-                          </a:solidFill>
-                          <a:latin typeface="Inter"/>
-                        </a:defRPr>
-                      </a:pPr>
-                      <a:r>
-                        <a:rPr>
-                          <a:latin typeface="Inter"/>
-                        </a:rPr>
-                        <a:t>gradient_tool</a:t>
-                      </a:r>
-                    </a:p>
-                  </a:txBody>
-                  <a:tcPr marL="54864" marR="54864" marT="27432" marB="27432" anchor="ctr">
-                    <a:solidFill>
-                      <a:srgbClr val="FFFFFF"/>
-                    </a:solidFill>
-                  </a:tcPr>
-                </a:tc>
-                <a:tc>
-                  <a:txBody>
-                    <a:bodyPr/>
-                    <a:lstStyle/>
-                    <a:p>
-                      <a:pPr>
-                        <a:defRPr sz="650" b="0">
-                          <a:solidFill>
-                            <a:srgbClr val="0D1117"/>
-                          </a:solidFill>
-                          <a:latin typeface="Inter"/>
-                        </a:defRPr>
-                      </a:pPr>
-                      <a:r>
-                        <a:rPr>
-                          <a:latin typeface="Inter"/>
-                        </a:rPr>
-                        <a:t>get_macro_signals</a:t>
-                      </a:r>
-                    </a:p>
-                  </a:txBody>
-                  <a:tcPr marL="54864" marR="54864" marT="27432" marB="27432" anchor="ctr">
-                    <a:solidFill>
-                      <a:srgbClr val="FFFFFF"/>
-                    </a:solidFill>
-                  </a:tcPr>
-                </a:tc>
-                <a:tc>
-                  <a:txBody>
-                    <a:bodyPr/>
-                    <a:lstStyle/>
-                    <a:p>
-                      <a:pPr>
-                        <a:defRPr sz="650" b="0">
+                        <a:defRPr sz="800" b="0">
                           <a:solidFill>
                             <a:srgbClr val="0D1117"/>
                           </a:solidFill>
@@ -28965,88 +28454,7 @@
                     <a:lstStyle/>
                     <a:p>
                       <a:pPr>
-                        <a:defRPr sz="650" b="0">
-                          <a:solidFill>
-                            <a:srgbClr val="0D1117"/>
-                          </a:solidFill>
-                          <a:latin typeface="Inter"/>
-                        </a:defRPr>
-                      </a:pPr>
-                      <a:r>
-                        <a:rPr>
-                          <a:latin typeface="Inter"/>
-                        </a:rPr>
-                        <a:t>2026-06-30</a:t>
-                      </a:r>
-                    </a:p>
-                  </a:txBody>
-                  <a:tcPr marL="54864" marR="54864" marT="27432" marB="27432" anchor="ctr">
-                    <a:solidFill>
-                      <a:srgbClr val="FFFFFF"/>
-                    </a:solidFill>
-                  </a:tcPr>
-                </a:tc>
-                <a:tc>
-                  <a:txBody>
-                    <a:bodyPr/>
-                    <a:lstStyle/>
-                    <a:p>
-                      <a:pPr>
-                        <a:defRPr sz="650" b="0">
-                          <a:solidFill>
-                            <a:srgbClr val="0D1117"/>
-                          </a:solidFill>
-                          <a:latin typeface="Inter"/>
-                        </a:defRPr>
-                      </a:pPr>
-                      <a:r>
-                        <a:rPr>
-                          <a:latin typeface="Inter"/>
-                        </a:rPr>
-                        <a:t>Illustrative sample data</a:t>
-                      </a:r>
-                    </a:p>
-                  </a:txBody>
-                  <a:tcPr marL="54864" marR="54864" marT="27432" marB="27432" anchor="ctr">
-                    <a:solidFill>
-                      <a:srgbClr val="FFFFFF"/>
-                    </a:solidFill>
-                  </a:tcPr>
-                </a:tc>
-                <a:tc>
-                  <a:txBody>
-                    <a:bodyPr/>
-                    <a:lstStyle/>
-                    <a:p>
-                      <a:pPr>
-                        <a:defRPr sz="650" b="1">
-                          <a:solidFill>
-                            <a:srgbClr val="C6F432"/>
-                          </a:solidFill>
-                          <a:latin typeface="Inter"/>
-                        </a:defRPr>
-                      </a:pPr>
-                      <a:r>
-                        <a:rPr>
-                          <a:latin typeface="Inter"/>
-                        </a:rPr>
-                        <a:t>● passed</a:t>
-                      </a:r>
-                    </a:p>
-                  </a:txBody>
-                  <a:tcPr marL="54864" marR="54864" marT="27432" marB="27432" anchor="ctr">
-                    <a:solidFill>
-                      <a:srgbClr val="F5F7F9"/>
-                    </a:solidFill>
-                  </a:tcPr>
-                </a:tc>
-                <a:tc>
-                  <a:txBody>
-                    <a:bodyPr/>
-                    <a:lstStyle/>
-                    <a:p>
-                      <a:pPr>
-                        <a:defRPr sz="650" b="0">
+                        <a:defRPr sz="800" b="0">
                           <a:solidFill>
                             <a:srgbClr val="0D1117"/>
                           </a:solidFill>
@@ -29109,7 +28517,7 @@
               <a:rPr>
                 <a:latin typeface="Inter"/>
               </a:rPr>
-              <a:t>Illustrative, Gradient Maintained — demo data, not the client's holdings or managers. All organizations, portfolios, managers and results in this public example are illustrative.</a:t>
+              <a:t>Data scope for every source: Illustrative sample data. Each digest is the SHA-256 fingerprint of the exact data the report used.</a:t>
             </a:r>
           </a:p>
         </p:txBody>
@@ -29284,7 +28692,7 @@
               <a:rPr>
                 <a:latin typeface="Inter"/>
               </a:rPr>
-              <a:t>27</a:t>
+              <a:t>28</a:t>
             </a:r>
           </a:p>
         </p:txBody>
@@ -29297,7 +28705,7 @@
 </p:sld>
 </file>
 
-<file path=ppt/slides/slide28.xml><?xml version="1.0" encoding="utf-8"?>
+<file path=ppt/slides/slide29.xml><?xml version="1.0" encoding="utf-8"?>
 <p:sld xmlns:a="http://schemas.openxmlformats.org/drawingml/2006/main" xmlns:p="http://schemas.openxmlformats.org/presentationml/2006/main" xmlns:r="http://schemas.openxmlformats.org/officeDocument/2006/relationships">
   <p:cSld>
     <p:spTree>
@@ -29364,48 +28772,6 @@
         </p:nvSpPr>
         <p:spPr>
           <a:xfrm>
-            <a:off x="5897880" y="310896"/>
-            <a:ext cx="4800600" cy="256032"/>
-          </a:xfrm>
-          <a:prstGeom prst="rect">
-            <a:avLst/>
-          </a:prstGeom>
-          <a:noFill/>
-        </p:spPr>
-        <p:txBody>
-          <a:bodyPr wrap="none" lIns="9144" rIns="9144" tIns="9144" bIns="9144" anchor="t">
-            <a:spAutoFit/>
-          </a:bodyPr>
-          <a:lstStyle/>
-          <a:p>
-            <a:pPr algn="r">
-              <a:spcAft>
-                <a:spcPts val="0"/>
-              </a:spcAft>
-              <a:defRPr sz="680" b="1">
-                <a:solidFill>
-                  <a:srgbClr val="4F6B00"/>
-                </a:solidFill>
-                <a:latin typeface="Inter"/>
-              </a:defRPr>
-            </a:pPr>
-            <a:r>
-              <a:rPr>
-                <a:latin typeface="Inter"/>
-              </a:rPr>
-              <a:t>Illustrative, Gradient Maintained — demo data, not the client's holdings or managers</a:t>
-            </a:r>
-          </a:p>
-        </p:txBody>
-      </p:sp>
-      <p:sp>
-        <p:nvSpPr>
-          <p:cNvPr id="4" name="TextBox 3"/>
-          <p:cNvSpPr txBox="1"/>
-          <p:nvPr/>
-        </p:nvSpPr>
-        <p:spPr>
-          <a:xfrm>
             <a:off x="640080" y="566928"/>
             <a:ext cx="10058400" cy="530352"/>
           </a:xfrm>
@@ -29442,7 +28808,7 @@
       </p:sp>
       <p:sp>
         <p:nvSpPr>
-          <p:cNvPr id="5" name="Rectangle 4"/>
+          <p:cNvPr id="4" name="Rectangle 3"/>
           <p:cNvSpPr/>
           <p:nvPr/>
         </p:nvSpPr>
@@ -29491,7 +28857,7 @@
       </p:sp>
       <p:sp>
         <p:nvSpPr>
-          <p:cNvPr id="6" name="Rectangle 5"/>
+          <p:cNvPr id="5" name="Rectangle 4"/>
           <p:cNvSpPr/>
           <p:nvPr/>
         </p:nvSpPr>
@@ -29540,7 +28906,7 @@
       </p:sp>
       <p:sp>
         <p:nvSpPr>
-          <p:cNvPr id="7" name="TextBox 6"/>
+          <p:cNvPr id="6" name="TextBox 5"/>
           <p:cNvSpPr txBox="1"/>
           <p:nvPr/>
         </p:nvSpPr>
@@ -29582,7 +28948,7 @@
       </p:sp>
       <p:sp>
         <p:nvSpPr>
-          <p:cNvPr id="8" name="TextBox 7"/>
+          <p:cNvPr id="7" name="TextBox 6"/>
           <p:cNvSpPr txBox="1"/>
           <p:nvPr/>
         </p:nvSpPr>
@@ -29624,7 +28990,7 @@
       </p:sp>
       <p:graphicFrame>
         <p:nvGraphicFramePr>
-          <p:cNvPr id="9" name="Table 8"/>
+          <p:cNvPr id="8" name="Table 7"/>
           <p:cNvGraphicFramePr>
             <a:graphicFrameLocks noGrp="1"/>
           </p:cNvGraphicFramePr>
@@ -29856,7 +29222,7 @@
                         <a:rPr>
                           <a:latin typeface="Inter"/>
                         </a:rPr>
-                        <a:t>Realized Brinson-Fachler with symmetric Carino</a:t>
+                        <a:t>Realized Brinson-Fachler, Carino-linked</a:t>
                       </a:r>
                     </a:p>
                   </a:txBody>
@@ -29910,7 +29276,7 @@
                         <a:rPr>
                           <a:latin typeface="Inter"/>
                         </a:rPr>
-                        <a:t>Monthly total return; decimal fraction; 1e-10 [S4]</a:t>
+                        <a:t>Monthly; decimal; 1e-10 [S4]</a:t>
                       </a:r>
                     </a:p>
                   </a:txBody>
@@ -29993,7 +29359,7 @@
                         <a:rPr>
                           <a:latin typeface="Inter"/>
                         </a:rPr>
-                        <a:t>Single-period expected Brinson-Fachler</a:t>
+                        <a:t>Expected Brinson-Fachler, one period</a:t>
                       </a:r>
                     </a:p>
                   </a:txBody>
@@ -30047,7 +29413,7 @@
                         <a:rPr>
                           <a:latin typeface="Inter"/>
                         </a:rPr>
-                        <a:t>Annualized expected return; decimal fraction; 1e-10 [S5]</a:t>
+                        <a:t>Annualized; decimal; 1e-10 [S5]</a:t>
                       </a:r>
                     </a:p>
                   </a:txBody>
@@ -30130,7 +29496,7 @@
                         <a:rPr>
                           <a:latin typeface="Inter"/>
                         </a:rPr>
-                        <a:t>Server-returned indexed growth, rolling-window excess and peak-to-trough drawdown</a:t>
+                        <a:t>Indexed growth, rolling excess, peak-to-trough drawdown</a:t>
                       </a:r>
                     </a:p>
                   </a:txBody>
@@ -30184,7 +29550,7 @@
                         <a:rPr>
                           <a:latin typeface="Inter"/>
                         </a:rPr>
-                        <a:t>Monthly observations; index / percentage / percentage [S3]</a:t>
+                        <a:t>Monthly; index and percent [S3]</a:t>
                       </a:r>
                     </a:p>
                   </a:txBody>
@@ -30267,7 +29633,7 @@
                         <a:rPr>
                           <a:latin typeface="Inter"/>
                         </a:rPr>
-                        <a:t>Server-returned segment contribution to total active risk</a:t>
+                        <a:t>Segment share of total active risk</a:t>
                       </a:r>
                     </a:p>
                   </a:txBody>
@@ -30321,7 +29687,7 @@
                         <a:rPr>
                           <a:latin typeface="Inter"/>
                         </a:rPr>
-                        <a:t>Annualized tracking error; contribution share [S4]</a:t>
+                        <a:t>Annualized; share [S4]</a:t>
                       </a:r>
                     </a:p>
                   </a:txBody>
@@ -30377,7 +29743,7 @@
                         <a:rPr>
                           <a:latin typeface="Inter"/>
                         </a:rPr>
-                        <a:t>Cumulative and segment-month linked effects</a:t>
+                        <a:t>Linked monthly and cumulative effects</a:t>
                       </a:r>
                     </a:p>
                   </a:txBody>
@@ -30404,7 +29770,7 @@
                         <a:rPr>
                           <a:latin typeface="Inter"/>
                         </a:rPr>
-                        <a:t>Server-returned symmetric-Carino effects from periods and period segments</a:t>
+                        <a:t>Carino-linked period and segment effects</a:t>
                       </a:r>
                     </a:p>
                   </a:txBody>
@@ -30458,7 +29824,7 @@
                         <a:rPr>
                           <a:latin typeface="Inter"/>
                         </a:rPr>
-                        <a:t>Monthly and cumulative percentage-point effects [S4]</a:t>
+                        <a:t>Percentage points [S4]</a:t>
                       </a:r>
                     </a:p>
                   </a:txBody>
@@ -30514,7 +29880,7 @@
                         <a:rPr>
                           <a:latin typeface="Inter"/>
                         </a:rPr>
-                        <a:t>Largest sub-allocation cumulative selection</a:t>
+                        <a:t>Largest sub-allocation selection</a:t>
                       </a:r>
                     </a:p>
                   </a:txBody>
@@ -30541,7 +29907,7 @@
                         <a:rPr>
                           <a:latin typeface="Inter"/>
                         </a:rPr>
-                        <a:t>Server-returned depth-1 period selection effects without local reconstruction</a:t>
+                        <a:t>Depth-1 period selection effects, as returned</a:t>
                       </a:r>
                     </a:p>
                   </a:txBody>
@@ -30595,7 +29961,7 @@
                         <a:rPr>
                           <a:latin typeface="Inter"/>
                         </a:rPr>
-                        <a:t>Cumulative percentage-point selection effect [S4]</a:t>
+                        <a:t>Cumulative percentage points [S4]</a:t>
                       </a:r>
                     </a:p>
                   </a:txBody>
@@ -30651,7 +30017,7 @@
                         <a:rPr>
                           <a:latin typeface="Inter"/>
                         </a:rPr>
-                        <a:t>Portfolio and benchmark expected return by segment</a:t>
+                        <a:t>Expected return by segment</a:t>
                       </a:r>
                     </a:p>
                   </a:txBody>
@@ -30678,7 +30044,7 @@
                         <a:rPr>
                           <a:latin typeface="Inter"/>
                         </a:rPr>
-                        <a:t>Server-returned expected returns applied to actual and policy segment weights</a:t>
+                        <a:t>Expected returns on actual and policy weights</a:t>
                       </a:r>
                     </a:p>
                   </a:txBody>
@@ -30732,7 +30098,7 @@
                         <a:rPr>
                           <a:latin typeface="Inter"/>
                         </a:rPr>
-                        <a:t>Annualized expected return; percentage [S5]</a:t>
+                        <a:t>Annualized; percent [S5]</a:t>
                       </a:r>
                     </a:p>
                   </a:txBody>
@@ -30788,7 +30154,7 @@
                         <a:rPr>
                           <a:latin typeface="Inter"/>
                         </a:rPr>
-                        <a:t>Segment effect pairing and sign agreement</a:t>
+                        <a:t>Segment effects and sign agreement</a:t>
                       </a:r>
                     </a:p>
                   </a:txBody>
@@ -30815,7 +30181,7 @@
                         <a:rPr>
                           <a:latin typeface="Inter"/>
                         </a:rPr>
-                        <a:t>Direct presentation of server-returned historical and ex ante segment effects</a:t>
+                        <a:t>Historical and ex ante effects side by side</a:t>
                       </a:r>
                     </a:p>
                   </a:txBody>
@@ -30869,7 +30235,7 @@
                         <a:rPr>
                           <a:latin typeface="Inter"/>
                         </a:rPr>
-                        <a:t>Percentage-point effects; no cross-lane rebasing [S4][S5]</a:t>
+                        <a:t>Percentage points; not rebased [S4][S5]</a:t>
                       </a:r>
                     </a:p>
                   </a:txBody>
@@ -30886,7 +30252,7 @@
       </p:graphicFrame>
       <p:sp>
         <p:nvSpPr>
-          <p:cNvPr id="10" name="Rectangle 9"/>
+          <p:cNvPr id="9" name="Rectangle 8"/>
           <p:cNvSpPr/>
           <p:nvPr/>
         </p:nvSpPr>
@@ -30935,7 +30301,7 @@
       </p:sp>
       <p:sp>
         <p:nvSpPr>
-          <p:cNvPr id="11" name="TextBox 10"/>
+          <p:cNvPr id="10" name="TextBox 9"/>
           <p:cNvSpPr txBox="1"/>
           <p:nvPr/>
         </p:nvSpPr>
@@ -30971,590 +30337,6 @@
                 <a:latin typeface="Inter"/>
               </a:rPr>
               <a:t>Sources: S3 · S4 · S5</a:t>
-            </a:r>
-          </a:p>
-        </p:txBody>
-      </p:sp>
-      <p:sp>
-        <p:nvSpPr>
-          <p:cNvPr id="12" name="TextBox 11"/>
-          <p:cNvSpPr txBox="1"/>
-          <p:nvPr/>
-        </p:nvSpPr>
-        <p:spPr>
-          <a:xfrm>
-            <a:off x="4480560" y="6501384"/>
-            <a:ext cx="5303520" cy="146304"/>
-          </a:xfrm>
-          <a:prstGeom prst="rect">
-            <a:avLst/>
-          </a:prstGeom>
-          <a:noFill/>
-        </p:spPr>
-        <p:txBody>
-          <a:bodyPr wrap="none" lIns="9144" rIns="9144" tIns="9144" bIns="9144" anchor="t">
-            <a:spAutoFit/>
-          </a:bodyPr>
-          <a:lstStyle/>
-          <a:p>
-            <a:pPr algn="ctr">
-              <a:spcAft>
-                <a:spcPts val="0"/>
-              </a:spcAft>
-              <a:defRPr sz="650" b="0">
-                <a:solidFill>
-                  <a:srgbClr val="8A94A1"/>
-                </a:solidFill>
-                <a:latin typeface="Inter"/>
-              </a:defRPr>
-            </a:pPr>
-            <a:r>
-              <a:rPr>
-                <a:latin typeface="Inter"/>
-              </a:rPr>
-              <a:t>Confidential — Investment Committee · Data as of 2026-06-30 historical; 2026-10-08 ex ante</a:t>
-            </a:r>
-          </a:p>
-        </p:txBody>
-      </p:sp>
-      <p:sp>
-        <p:nvSpPr>
-          <p:cNvPr id="13" name="TextBox 12"/>
-          <p:cNvSpPr txBox="1"/>
-          <p:nvPr/>
-        </p:nvSpPr>
-        <p:spPr>
-          <a:xfrm>
-            <a:off x="10287000" y="6501384"/>
-            <a:ext cx="1261872" cy="146304"/>
-          </a:xfrm>
-          <a:prstGeom prst="rect">
-            <a:avLst/>
-          </a:prstGeom>
-          <a:noFill/>
-        </p:spPr>
-        <p:txBody>
-          <a:bodyPr wrap="none" lIns="9144" rIns="9144" tIns="9144" bIns="9144" anchor="t">
-            <a:spAutoFit/>
-          </a:bodyPr>
-          <a:lstStyle/>
-          <a:p>
-            <a:pPr algn="r">
-              <a:spcAft>
-                <a:spcPts val="0"/>
-              </a:spcAft>
-              <a:defRPr sz="650" b="0">
-                <a:solidFill>
-                  <a:srgbClr val="8A94A1"/>
-                </a:solidFill>
-                <a:latin typeface="Inter"/>
-              </a:defRPr>
-            </a:pPr>
-            <a:r>
-              <a:rPr>
-                <a:latin typeface="Inter"/>
-              </a:rPr>
-              <a:t>28</a:t>
-            </a:r>
-          </a:p>
-        </p:txBody>
-      </p:sp>
-    </p:spTree>
-  </p:cSld>
-  <p:clrMapOvr>
-    <a:masterClrMapping/>
-  </p:clrMapOvr>
-</p:sld>
-</file>
-
-<file path=ppt/slides/slide29.xml><?xml version="1.0" encoding="utf-8"?>
-<p:sld xmlns:a="http://schemas.openxmlformats.org/drawingml/2006/main" xmlns:p="http://schemas.openxmlformats.org/presentationml/2006/main" xmlns:r="http://schemas.openxmlformats.org/officeDocument/2006/relationships">
-  <p:cSld>
-    <p:spTree>
-      <p:nvGrpSpPr>
-        <p:cNvPr id="1" name=""/>
-        <p:cNvGrpSpPr/>
-        <p:nvPr/>
-      </p:nvGrpSpPr>
-      <p:grpSpPr/>
-      <p:sp>
-        <p:nvSpPr>
-          <p:cNvPr id="2" name="Rectangle 1"/>
-          <p:cNvSpPr/>
-          <p:nvPr/>
-        </p:nvSpPr>
-        <p:spPr>
-          <a:xfrm>
-            <a:off x="0" y="0"/>
-            <a:ext cx="12191695" cy="6858000"/>
-          </a:xfrm>
-          <a:prstGeom prst="rect">
-            <a:avLst/>
-          </a:prstGeom>
-          <a:solidFill>
-            <a:srgbClr val="FFFFFF"/>
-          </a:solidFill>
-          <a:ln>
-            <a:solidFill>
-              <a:srgbClr val="FFFFFF"/>
-            </a:solidFill>
-          </a:ln>
-        </p:spPr>
-        <p:style>
-          <a:lnRef idx="1">
-            <a:schemeClr val="accent1"/>
-          </a:lnRef>
-          <a:fillRef idx="3">
-            <a:schemeClr val="accent1"/>
-          </a:fillRef>
-          <a:effectRef idx="2">
-            <a:schemeClr val="accent1"/>
-          </a:effectRef>
-          <a:fontRef idx="minor">
-            <a:schemeClr val="lt1"/>
-          </a:fontRef>
-        </p:style>
-        <p:txBody>
-          <a:bodyPr rtlCol="0" anchor="ctr"/>
-          <a:lstStyle/>
-          <a:p>
-            <a:pPr algn="ctr">
-              <a:defRPr>
-                <a:latin typeface="Inter"/>
-              </a:defRPr>
-            </a:pPr>
-          </a:p>
-        </p:txBody>
-      </p:sp>
-      <p:sp>
-        <p:nvSpPr>
-          <p:cNvPr id="3" name="TextBox 2"/>
-          <p:cNvSpPr txBox="1"/>
-          <p:nvPr/>
-        </p:nvSpPr>
-        <p:spPr>
-          <a:xfrm>
-            <a:off x="5897880" y="310896"/>
-            <a:ext cx="4800600" cy="256032"/>
-          </a:xfrm>
-          <a:prstGeom prst="rect">
-            <a:avLst/>
-          </a:prstGeom>
-          <a:noFill/>
-        </p:spPr>
-        <p:txBody>
-          <a:bodyPr wrap="none" lIns="9144" rIns="9144" tIns="9144" bIns="9144" anchor="t">
-            <a:spAutoFit/>
-          </a:bodyPr>
-          <a:lstStyle/>
-          <a:p>
-            <a:pPr algn="r">
-              <a:spcAft>
-                <a:spcPts val="0"/>
-              </a:spcAft>
-              <a:defRPr sz="680" b="1">
-                <a:solidFill>
-                  <a:srgbClr val="4F6B00"/>
-                </a:solidFill>
-                <a:latin typeface="Inter"/>
-              </a:defRPr>
-            </a:pPr>
-            <a:r>
-              <a:rPr>
-                <a:latin typeface="Inter"/>
-              </a:rPr>
-              <a:t>Illustrative, Gradient Maintained — demo data, not the client's holdings or managers</a:t>
-            </a:r>
-          </a:p>
-        </p:txBody>
-      </p:sp>
-      <p:sp>
-        <p:nvSpPr>
-          <p:cNvPr id="4" name="TextBox 3"/>
-          <p:cNvSpPr txBox="1"/>
-          <p:nvPr/>
-        </p:nvSpPr>
-        <p:spPr>
-          <a:xfrm>
-            <a:off x="640080" y="566928"/>
-            <a:ext cx="10058400" cy="530352"/>
-          </a:xfrm>
-          <a:prstGeom prst="rect">
-            <a:avLst/>
-          </a:prstGeom>
-          <a:noFill/>
-        </p:spPr>
-        <p:txBody>
-          <a:bodyPr wrap="none" lIns="9144" rIns="9144" tIns="9144" bIns="9144" anchor="t">
-            <a:spAutoFit/>
-          </a:bodyPr>
-          <a:lstStyle/>
-          <a:p>
-            <a:pPr algn="l">
-              <a:spcAft>
-                <a:spcPts val="0"/>
-              </a:spcAft>
-              <a:defRPr sz="2300" b="1">
-                <a:solidFill>
-                  <a:srgbClr val="0D1117"/>
-                </a:solidFill>
-                <a:latin typeface="Inter"/>
-              </a:defRPr>
-            </a:pPr>
-            <a:r>
-              <a:rPr>
-                <a:latin typeface="Inter"/>
-              </a:rPr>
-              <a:t>Appendix — Server Metric Methods and Disclosures — continued</a:t>
-            </a:r>
-          </a:p>
-        </p:txBody>
-      </p:sp>
-      <p:sp>
-        <p:nvSpPr>
-          <p:cNvPr id="5" name="Rectangle 4"/>
-          <p:cNvSpPr/>
-          <p:nvPr/>
-        </p:nvSpPr>
-        <p:spPr>
-          <a:xfrm>
-            <a:off x="640080" y="1115568"/>
-            <a:ext cx="10908792" cy="18288"/>
-          </a:xfrm>
-          <a:prstGeom prst="rect">
-            <a:avLst/>
-          </a:prstGeom>
-          <a:solidFill>
-            <a:srgbClr val="0D1117"/>
-          </a:solidFill>
-          <a:ln>
-            <a:solidFill>
-              <a:srgbClr val="0D1117"/>
-            </a:solidFill>
-          </a:ln>
-        </p:spPr>
-        <p:style>
-          <a:lnRef idx="1">
-            <a:schemeClr val="accent1"/>
-          </a:lnRef>
-          <a:fillRef idx="3">
-            <a:schemeClr val="accent1"/>
-          </a:fillRef>
-          <a:effectRef idx="2">
-            <a:schemeClr val="accent1"/>
-          </a:effectRef>
-          <a:fontRef idx="minor">
-            <a:schemeClr val="lt1"/>
-          </a:fontRef>
-        </p:style>
-        <p:txBody>
-          <a:bodyPr rtlCol="0" anchor="ctr"/>
-          <a:lstStyle/>
-          <a:p>
-            <a:pPr algn="ctr">
-              <a:defRPr>
-                <a:latin typeface="Inter"/>
-              </a:defRPr>
-            </a:pPr>
-          </a:p>
-        </p:txBody>
-      </p:sp>
-      <p:sp>
-        <p:nvSpPr>
-          <p:cNvPr id="6" name="Rectangle 5"/>
-          <p:cNvSpPr/>
-          <p:nvPr/>
-        </p:nvSpPr>
-        <p:spPr>
-          <a:xfrm>
-            <a:off x="11018520" y="502920"/>
-            <a:ext cx="530352" cy="393192"/>
-          </a:xfrm>
-          <a:prstGeom prst="rect">
-            <a:avLst/>
-          </a:prstGeom>
-          <a:solidFill>
-            <a:srgbClr val="9AA5B1"/>
-          </a:solidFill>
-          <a:ln>
-            <a:solidFill>
-              <a:srgbClr val="9AA5B1"/>
-            </a:solidFill>
-          </a:ln>
-        </p:spPr>
-        <p:style>
-          <a:lnRef idx="1">
-            <a:schemeClr val="accent1"/>
-          </a:lnRef>
-          <a:fillRef idx="3">
-            <a:schemeClr val="accent1"/>
-          </a:fillRef>
-          <a:effectRef idx="2">
-            <a:schemeClr val="accent1"/>
-          </a:effectRef>
-          <a:fontRef idx="minor">
-            <a:schemeClr val="lt1"/>
-          </a:fontRef>
-        </p:style>
-        <p:txBody>
-          <a:bodyPr rtlCol="0" anchor="ctr"/>
-          <a:lstStyle/>
-          <a:p>
-            <a:pPr algn="ctr">
-              <a:defRPr>
-                <a:latin typeface="Inter"/>
-              </a:defRPr>
-            </a:pPr>
-          </a:p>
-        </p:txBody>
-      </p:sp>
-      <p:sp>
-        <p:nvSpPr>
-          <p:cNvPr id="7" name="TextBox 6"/>
-          <p:cNvSpPr txBox="1"/>
-          <p:nvPr/>
-        </p:nvSpPr>
-        <p:spPr>
-          <a:xfrm>
-            <a:off x="11045952" y="557784"/>
-            <a:ext cx="475488" cy="182880"/>
-          </a:xfrm>
-          <a:prstGeom prst="rect">
-            <a:avLst/>
-          </a:prstGeom>
-          <a:noFill/>
-        </p:spPr>
-        <p:txBody>
-          <a:bodyPr wrap="none" lIns="9144" rIns="9144" tIns="9144" bIns="9144" anchor="t">
-            <a:spAutoFit/>
-          </a:bodyPr>
-          <a:lstStyle/>
-          <a:p>
-            <a:pPr algn="ctr">
-              <a:spcAft>
-                <a:spcPts val="0"/>
-              </a:spcAft>
-              <a:defRPr sz="1000" b="1">
-                <a:solidFill>
-                  <a:srgbClr val="0D1117"/>
-                </a:solidFill>
-                <a:latin typeface="Inter"/>
-              </a:defRPr>
-            </a:pPr>
-            <a:r>
-              <a:rPr>
-                <a:latin typeface="Inter"/>
-              </a:rPr>
-              <a:t>B</a:t>
-            </a:r>
-          </a:p>
-        </p:txBody>
-      </p:sp>
-      <p:sp>
-        <p:nvSpPr>
-          <p:cNvPr id="8" name="TextBox 7"/>
-          <p:cNvSpPr txBox="1"/>
-          <p:nvPr/>
-        </p:nvSpPr>
-        <p:spPr>
-          <a:xfrm>
-            <a:off x="640080" y="1325880"/>
-            <a:ext cx="10908792" cy="4892040"/>
-          </a:xfrm>
-          <a:prstGeom prst="rect">
-            <a:avLst/>
-          </a:prstGeom>
-          <a:noFill/>
-        </p:spPr>
-        <p:txBody>
-          <a:bodyPr wrap="none" lIns="9144" rIns="9144" tIns="9144" bIns="9144" anchor="t">
-            <a:spAutoFit/>
-          </a:bodyPr>
-          <a:lstStyle/>
-          <a:p>
-            <a:pPr algn="l">
-              <a:spcAft>
-                <a:spcPts val="500"/>
-              </a:spcAft>
-              <a:defRPr sz="1050" b="0">
-                <a:solidFill>
-                  <a:srgbClr val="0D1117"/>
-                </a:solidFill>
-                <a:latin typeface="Inter"/>
-              </a:defRPr>
-            </a:pPr>
-            <a:r>
-              <a:rPr>
-                <a:latin typeface="Inter"/>
-              </a:rPr>
-              <a:t>•  Ex ante expected returns and effects are assumptions, not forecasts or guarantees.</a:t>
-            </a:r>
-          </a:p>
-          <a:p>
-            <a:pPr algn="l">
-              <a:spcAft>
-                <a:spcPts val="500"/>
-              </a:spcAft>
-              <a:defRPr sz="1050" b="0">
-                <a:solidFill>
-                  <a:srgbClr val="0D1117"/>
-                </a:solidFill>
-                <a:latin typeface="Inter"/>
-              </a:defRPr>
-            </a:pPr>
-            <a:r>
-              <a:rPr>
-                <a:latin typeface="Inter"/>
-              </a:rPr>
-              <a:t>•  Historical attribution is realized and linked as returned.</a:t>
-            </a:r>
-          </a:p>
-          <a:p>
-            <a:pPr algn="l">
-              <a:spcAft>
-                <a:spcPts val="500"/>
-              </a:spcAft>
-              <a:defRPr sz="1050" b="0">
-                <a:solidFill>
-                  <a:srgbClr val="0D1117"/>
-                </a:solidFill>
-                <a:latin typeface="Inter"/>
-              </a:defRPr>
-            </a:pPr>
-            <a:r>
-              <a:rPr>
-                <a:latin typeface="Inter"/>
-              </a:rPr>
-              <a:t>•  Historical and ex ante bases are not directly interchangeable.</a:t>
-            </a:r>
-          </a:p>
-          <a:p>
-            <a:pPr algn="l">
-              <a:spcAft>
-                <a:spcPts val="500"/>
-              </a:spcAft>
-              <a:defRPr sz="1050" b="0">
-                <a:solidFill>
-                  <a:srgbClr val="0D1117"/>
-                </a:solidFill>
-                <a:latin typeface="Inter"/>
-              </a:defRPr>
-            </a:pPr>
-            <a:r>
-              <a:rPr>
-                <a:latin typeface="Inter"/>
-              </a:rPr>
-              <a:t>•  Missing evidence is not zero.</a:t>
-            </a:r>
-          </a:p>
-          <a:p>
-            <a:pPr algn="l">
-              <a:spcAft>
-                <a:spcPts val="500"/>
-              </a:spcAft>
-              <a:defRPr sz="1050" b="0">
-                <a:solidFill>
-                  <a:srgbClr val="0D1117"/>
-                </a:solidFill>
-                <a:latin typeface="Inter"/>
-              </a:defRPr>
-            </a:pPr>
-            <a:r>
-              <a:rPr>
-                <a:latin typeface="Inter"/>
-              </a:rPr>
-              <a:t>•  AI-assisted monitoring analysis; not investment, legal or compliance advice.</a:t>
-            </a:r>
-          </a:p>
-        </p:txBody>
-      </p:sp>
-      <p:sp>
-        <p:nvSpPr>
-          <p:cNvPr id="9" name="Rectangle 8"/>
-          <p:cNvSpPr/>
-          <p:nvPr/>
-        </p:nvSpPr>
-        <p:spPr>
-          <a:xfrm>
-            <a:off x="640080" y="6446520"/>
-            <a:ext cx="10908792" cy="9144"/>
-          </a:xfrm>
-          <a:prstGeom prst="rect">
-            <a:avLst/>
-          </a:prstGeom>
-          <a:solidFill>
-            <a:srgbClr val="E3E7EC"/>
-          </a:solidFill>
-          <a:ln>
-            <a:solidFill>
-              <a:srgbClr val="E3E7EC"/>
-            </a:solidFill>
-          </a:ln>
-        </p:spPr>
-        <p:style>
-          <a:lnRef idx="1">
-            <a:schemeClr val="accent1"/>
-          </a:lnRef>
-          <a:fillRef idx="3">
-            <a:schemeClr val="accent1"/>
-          </a:fillRef>
-          <a:effectRef idx="2">
-            <a:schemeClr val="accent1"/>
-          </a:effectRef>
-          <a:fontRef idx="minor">
-            <a:schemeClr val="lt1"/>
-          </a:fontRef>
-        </p:style>
-        <p:txBody>
-          <a:bodyPr rtlCol="0" anchor="ctr"/>
-          <a:lstStyle/>
-          <a:p>
-            <a:pPr algn="ctr">
-              <a:defRPr>
-                <a:latin typeface="Inter"/>
-              </a:defRPr>
-            </a:pPr>
-          </a:p>
-        </p:txBody>
-      </p:sp>
-      <p:sp>
-        <p:nvSpPr>
-          <p:cNvPr id="10" name="TextBox 9"/>
-          <p:cNvSpPr txBox="1"/>
-          <p:nvPr/>
-        </p:nvSpPr>
-        <p:spPr>
-          <a:xfrm>
-            <a:off x="640080" y="6501384"/>
-            <a:ext cx="4297680" cy="146304"/>
-          </a:xfrm>
-          <a:prstGeom prst="rect">
-            <a:avLst/>
-          </a:prstGeom>
-          <a:noFill/>
-        </p:spPr>
-        <p:txBody>
-          <a:bodyPr wrap="none" lIns="9144" rIns="9144" tIns="9144" bIns="9144" anchor="t">
-            <a:spAutoFit/>
-          </a:bodyPr>
-          <a:lstStyle/>
-          <a:p>
-            <a:pPr algn="l">
-              <a:spcAft>
-                <a:spcPts val="0"/>
-              </a:spcAft>
-              <a:defRPr sz="650" b="0">
-                <a:solidFill>
-                  <a:srgbClr val="8A94A1"/>
-                </a:solidFill>
-                <a:latin typeface="Inter"/>
-              </a:defRPr>
-            </a:pPr>
-            <a:r>
-              <a:rPr>
-                <a:latin typeface="Inter"/>
-              </a:rPr>
-              <a:t>Sources: none cited</a:t>
             </a:r>
           </a:p>
         </p:txBody>
@@ -31719,7 +30501,7 @@
         <p:spPr>
           <a:xfrm>
             <a:off x="640080" y="329184"/>
-            <a:ext cx="5303520" cy="182880"/>
+            <a:ext cx="9875520" cy="182880"/>
           </a:xfrm>
           <a:prstGeom prst="rect">
             <a:avLst/>
@@ -31760,48 +30542,6 @@
         </p:nvSpPr>
         <p:spPr>
           <a:xfrm>
-            <a:off x="5897880" y="310896"/>
-            <a:ext cx="4800600" cy="256032"/>
-          </a:xfrm>
-          <a:prstGeom prst="rect">
-            <a:avLst/>
-          </a:prstGeom>
-          <a:noFill/>
-        </p:spPr>
-        <p:txBody>
-          <a:bodyPr wrap="none" lIns="9144" rIns="9144" tIns="9144" bIns="9144" anchor="t">
-            <a:spAutoFit/>
-          </a:bodyPr>
-          <a:lstStyle/>
-          <a:p>
-            <a:pPr algn="r">
-              <a:spcAft>
-                <a:spcPts val="0"/>
-              </a:spcAft>
-              <a:defRPr sz="680" b="1">
-                <a:solidFill>
-                  <a:srgbClr val="4F6B00"/>
-                </a:solidFill>
-                <a:latin typeface="Inter"/>
-              </a:defRPr>
-            </a:pPr>
-            <a:r>
-              <a:rPr>
-                <a:latin typeface="Inter"/>
-              </a:rPr>
-              <a:t>Illustrative, Gradient Maintained — demo data, not the client's holdings or managers</a:t>
-            </a:r>
-          </a:p>
-        </p:txBody>
-      </p:sp>
-      <p:sp>
-        <p:nvSpPr>
-          <p:cNvPr id="5" name="TextBox 4"/>
-          <p:cNvSpPr txBox="1"/>
-          <p:nvPr/>
-        </p:nvSpPr>
-        <p:spPr>
-          <a:xfrm>
             <a:off x="640080" y="566928"/>
             <a:ext cx="10058400" cy="530352"/>
           </a:xfrm>
@@ -31838,7 +30578,7 @@
       </p:sp>
       <p:sp>
         <p:nvSpPr>
-          <p:cNvPr id="6" name="Rectangle 5"/>
+          <p:cNvPr id="5" name="Rectangle 4"/>
           <p:cNvSpPr/>
           <p:nvPr/>
         </p:nvSpPr>
@@ -31887,7 +30627,7 @@
       </p:sp>
       <p:sp>
         <p:nvSpPr>
-          <p:cNvPr id="7" name="Rectangle 6"/>
+          <p:cNvPr id="6" name="Rectangle 5"/>
           <p:cNvSpPr/>
           <p:nvPr/>
         </p:nvSpPr>
@@ -31936,7 +30676,7 @@
       </p:sp>
       <p:sp>
         <p:nvSpPr>
-          <p:cNvPr id="8" name="TextBox 7"/>
+          <p:cNvPr id="7" name="TextBox 6"/>
           <p:cNvSpPr txBox="1"/>
           <p:nvPr/>
         </p:nvSpPr>
@@ -31978,7 +30718,7 @@
       </p:sp>
       <p:sp>
         <p:nvSpPr>
-          <p:cNvPr id="9" name="TextBox 8"/>
+          <p:cNvPr id="8" name="TextBox 7"/>
           <p:cNvSpPr txBox="1"/>
           <p:nvPr/>
         </p:nvSpPr>
@@ -32020,7 +30760,7 @@
       </p:sp>
       <p:graphicFrame>
         <p:nvGraphicFramePr>
-          <p:cNvPr id="10" name="Table 9"/>
+          <p:cNvPr id="9" name="Table 8"/>
           <p:cNvGraphicFramePr>
             <a:graphicFrameLocks noGrp="1"/>
           </p:cNvGraphicFramePr>
@@ -32028,7 +30768,7 @@
         </p:nvGraphicFramePr>
         <p:xfrm>
           <a:off x="640080" y="1600200"/>
-          <a:ext cx="10908792" cy="2059976"/>
+          <a:ext cx="10908792" cy="2190478"/>
         </p:xfrm>
         <a:graphic>
           <a:graphicData uri="http://schemas.openxmlformats.org/drawingml/2006/table">
@@ -32041,7 +30781,7 @@
                 <a:gridCol w="4448556"/>
                 <a:gridCol w="4448556"/>
               </a:tblGrid>
-              <a:tr h="343329">
+              <a:tr h="365079">
                 <a:tc>
                   <a:txBody>
                     <a:bodyPr/>
@@ -32124,7 +30864,7 @@
                   </a:tcPr>
                 </a:tc>
               </a:tr>
-              <a:tr h="343329">
+              <a:tr h="365079">
                 <a:tc>
                   <a:txBody>
                     <a:bodyPr/>
@@ -32207,7 +30947,7 @@
                   </a:tcPr>
                 </a:tc>
               </a:tr>
-              <a:tr h="343329">
+              <a:tr h="365079">
                 <a:tc>
                   <a:txBody>
                     <a:bodyPr/>
@@ -32290,7 +31030,7 @@
                   </a:tcPr>
                 </a:tc>
               </a:tr>
-              <a:tr h="343329">
+              <a:tr h="365079">
                 <a:tc>
                   <a:txBody>
                     <a:bodyPr/>
@@ -32373,7 +31113,7 @@
                   </a:tcPr>
                 </a:tc>
               </a:tr>
-              <a:tr h="343329">
+              <a:tr h="365079">
                 <a:tc>
                   <a:txBody>
                     <a:bodyPr/>
@@ -32456,7 +31196,7 @@
                   </a:tcPr>
                 </a:tc>
               </a:tr>
-              <a:tr h="343331">
+              <a:tr h="365083">
                 <a:tc>
                   <a:txBody>
                     <a:bodyPr/>
@@ -32545,14 +31285,14 @@
       </p:graphicFrame>
       <p:sp>
         <p:nvSpPr>
-          <p:cNvPr id="11" name="Rectangle 10"/>
+          <p:cNvPr id="10" name="Rectangle 9"/>
           <p:cNvSpPr/>
           <p:nvPr/>
         </p:nvSpPr>
         <p:spPr>
           <a:xfrm>
-            <a:off x="640080" y="3769904"/>
-            <a:ext cx="10908792" cy="829972"/>
+            <a:off x="640080" y="3900406"/>
+            <a:ext cx="10908792" cy="876372"/>
           </a:xfrm>
           <a:prstGeom prst="rect">
             <a:avLst/>
@@ -32594,14 +31334,14 @@
       </p:sp>
       <p:sp>
         <p:nvSpPr>
-          <p:cNvPr id="12" name="Rectangle 11"/>
+          <p:cNvPr id="11" name="Rectangle 10"/>
           <p:cNvSpPr/>
           <p:nvPr/>
         </p:nvSpPr>
         <p:spPr>
           <a:xfrm>
-            <a:off x="640080" y="3769904"/>
-            <a:ext cx="54864" cy="829972"/>
+            <a:off x="640080" y="3900406"/>
+            <a:ext cx="54864" cy="876372"/>
           </a:xfrm>
           <a:prstGeom prst="rect">
             <a:avLst/>
@@ -32643,13 +31383,13 @@
       </p:sp>
       <p:sp>
         <p:nvSpPr>
-          <p:cNvPr id="13" name="TextBox 12"/>
+          <p:cNvPr id="12" name="TextBox 11"/>
           <p:cNvSpPr txBox="1"/>
           <p:nvPr/>
         </p:nvSpPr>
         <p:spPr>
           <a:xfrm>
-            <a:off x="804671" y="3879632"/>
+            <a:off x="804671" y="4010134"/>
             <a:ext cx="10616184" cy="228600"/>
           </a:xfrm>
           <a:prstGeom prst="rect">
@@ -32685,14 +31425,14 @@
       </p:sp>
       <p:sp>
         <p:nvSpPr>
-          <p:cNvPr id="14" name="TextBox 13"/>
+          <p:cNvPr id="13" name="TextBox 12"/>
           <p:cNvSpPr txBox="1"/>
           <p:nvPr/>
         </p:nvSpPr>
         <p:spPr>
           <a:xfrm>
-            <a:off x="804671" y="4163096"/>
-            <a:ext cx="10616184" cy="345340"/>
+            <a:off x="804671" y="4293598"/>
+            <a:ext cx="10616184" cy="391740"/>
           </a:xfrm>
           <a:prstGeom prst="rect">
             <a:avLst/>
@@ -32727,14 +31467,14 @@
       </p:sp>
       <p:sp>
         <p:nvSpPr>
-          <p:cNvPr id="15" name="Rectangle 14"/>
+          <p:cNvPr id="14" name="Rectangle 13"/>
           <p:cNvSpPr/>
           <p:nvPr/>
         </p:nvSpPr>
         <p:spPr>
           <a:xfrm>
-            <a:off x="640080" y="4709605"/>
-            <a:ext cx="10908792" cy="1508314"/>
+            <a:off x="640080" y="4886507"/>
+            <a:ext cx="10908792" cy="1331412"/>
           </a:xfrm>
           <a:prstGeom prst="rect">
             <a:avLst/>
@@ -32776,14 +31516,14 @@
       </p:sp>
       <p:sp>
         <p:nvSpPr>
-          <p:cNvPr id="16" name="Rectangle 15"/>
+          <p:cNvPr id="15" name="Rectangle 14"/>
           <p:cNvSpPr/>
           <p:nvPr/>
         </p:nvSpPr>
         <p:spPr>
           <a:xfrm>
-            <a:off x="640080" y="4709605"/>
-            <a:ext cx="54864" cy="1508314"/>
+            <a:off x="640080" y="4886507"/>
+            <a:ext cx="54864" cy="1331412"/>
           </a:xfrm>
           <a:prstGeom prst="rect">
             <a:avLst/>
@@ -32825,13 +31565,13 @@
       </p:sp>
       <p:sp>
         <p:nvSpPr>
-          <p:cNvPr id="17" name="TextBox 16"/>
+          <p:cNvPr id="16" name="TextBox 15"/>
           <p:cNvSpPr txBox="1"/>
           <p:nvPr/>
         </p:nvSpPr>
         <p:spPr>
           <a:xfrm>
-            <a:off x="804671" y="4819333"/>
+            <a:off x="804671" y="4996235"/>
             <a:ext cx="10616184" cy="228600"/>
           </a:xfrm>
           <a:prstGeom prst="rect">
@@ -32860,21 +31600,21 @@
               <a:rPr>
                 <a:latin typeface="Inter"/>
               </a:rPr>
-              <a:t>Key judgment — headline signal</a:t>
+              <a:t>Key judgment — Reconciliation</a:t>
             </a:r>
           </a:p>
         </p:txBody>
       </p:sp>
       <p:sp>
         <p:nvSpPr>
-          <p:cNvPr id="18" name="TextBox 17"/>
+          <p:cNvPr id="17" name="TextBox 16"/>
           <p:cNvSpPr txBox="1"/>
           <p:nvPr/>
         </p:nvSpPr>
         <p:spPr>
           <a:xfrm>
-            <a:off x="804671" y="5102797"/>
-            <a:ext cx="10616184" cy="1023682"/>
+            <a:off x="804671" y="5279699"/>
+            <a:ext cx="10616184" cy="846780"/>
           </a:xfrm>
           <a:prstGeom prst="rect">
             <a:avLst/>
@@ -32902,14 +31642,14 @@
               <a:rPr>
                 <a:latin typeface="Inter"/>
               </a:rPr>
-              <a:t>Observation: The sample report carries a reconciled-lanes signal versus the prior unresolved status [S1]. Why it matters: This signal focuses oversight on the report's most decision-relevant condition. Uncertainty: Evidence coverage may exclude newer or more detailed observations. What would change the view: A governed refresh showing a different signal or breached threshold.</a:t>
+              <a:t>Observation: The two attribution lanes, historical and ex ante, both reconcile [S1]. Why it matters: Both lanes give one consistent explanation of active return. Uncertainty: Ex ante effects depend on capital market assumptions. What would change the view: A refreshed assumption set that moves either lane by 0.1pp.</a:t>
             </a:r>
           </a:p>
         </p:txBody>
       </p:sp>
       <p:sp>
         <p:nvSpPr>
-          <p:cNvPr id="19" name="Rectangle 18"/>
+          <p:cNvPr id="18" name="Rectangle 17"/>
           <p:cNvSpPr/>
           <p:nvPr/>
         </p:nvSpPr>
@@ -32958,7 +31698,7 @@
       </p:sp>
       <p:sp>
         <p:nvSpPr>
-          <p:cNvPr id="20" name="TextBox 19"/>
+          <p:cNvPr id="19" name="TextBox 18"/>
           <p:cNvSpPr txBox="1"/>
           <p:nvPr/>
         </p:nvSpPr>
@@ -33000,7 +31740,7 @@
       </p:sp>
       <p:sp>
         <p:nvSpPr>
-          <p:cNvPr id="21" name="TextBox 20"/>
+          <p:cNvPr id="20" name="TextBox 19"/>
           <p:cNvSpPr txBox="1"/>
           <p:nvPr/>
         </p:nvSpPr>
@@ -33042,7 +31782,7 @@
       </p:sp>
       <p:sp>
         <p:nvSpPr>
-          <p:cNvPr id="22" name="TextBox 21"/>
+          <p:cNvPr id="21" name="TextBox 20"/>
           <p:cNvSpPr txBox="1"/>
           <p:nvPr/>
         </p:nvSpPr>
@@ -33078,6 +31818,510 @@
                 <a:latin typeface="Inter"/>
               </a:rPr>
               <a:t>3</a:t>
+            </a:r>
+          </a:p>
+        </p:txBody>
+      </p:sp>
+    </p:spTree>
+  </p:cSld>
+  <p:clrMapOvr>
+    <a:masterClrMapping/>
+  </p:clrMapOvr>
+</p:sld>
+</file>
+
+<file path=ppt/slides/slide30.xml><?xml version="1.0" encoding="utf-8"?>
+<p:sld xmlns:a="http://schemas.openxmlformats.org/drawingml/2006/main" xmlns:p="http://schemas.openxmlformats.org/presentationml/2006/main" xmlns:r="http://schemas.openxmlformats.org/officeDocument/2006/relationships">
+  <p:cSld>
+    <p:spTree>
+      <p:nvGrpSpPr>
+        <p:cNvPr id="1" name=""/>
+        <p:cNvGrpSpPr/>
+        <p:nvPr/>
+      </p:nvGrpSpPr>
+      <p:grpSpPr/>
+      <p:sp>
+        <p:nvSpPr>
+          <p:cNvPr id="2" name="Rectangle 1"/>
+          <p:cNvSpPr/>
+          <p:nvPr/>
+        </p:nvSpPr>
+        <p:spPr>
+          <a:xfrm>
+            <a:off x="0" y="0"/>
+            <a:ext cx="12191695" cy="6858000"/>
+          </a:xfrm>
+          <a:prstGeom prst="rect">
+            <a:avLst/>
+          </a:prstGeom>
+          <a:solidFill>
+            <a:srgbClr val="FFFFFF"/>
+          </a:solidFill>
+          <a:ln>
+            <a:solidFill>
+              <a:srgbClr val="FFFFFF"/>
+            </a:solidFill>
+          </a:ln>
+        </p:spPr>
+        <p:style>
+          <a:lnRef idx="1">
+            <a:schemeClr val="accent1"/>
+          </a:lnRef>
+          <a:fillRef idx="3">
+            <a:schemeClr val="accent1"/>
+          </a:fillRef>
+          <a:effectRef idx="2">
+            <a:schemeClr val="accent1"/>
+          </a:effectRef>
+          <a:fontRef idx="minor">
+            <a:schemeClr val="lt1"/>
+          </a:fontRef>
+        </p:style>
+        <p:txBody>
+          <a:bodyPr rtlCol="0" anchor="ctr"/>
+          <a:lstStyle/>
+          <a:p>
+            <a:pPr algn="ctr">
+              <a:defRPr>
+                <a:latin typeface="Inter"/>
+              </a:defRPr>
+            </a:pPr>
+          </a:p>
+        </p:txBody>
+      </p:sp>
+      <p:sp>
+        <p:nvSpPr>
+          <p:cNvPr id="3" name="TextBox 2"/>
+          <p:cNvSpPr txBox="1"/>
+          <p:nvPr/>
+        </p:nvSpPr>
+        <p:spPr>
+          <a:xfrm>
+            <a:off x="640080" y="566928"/>
+            <a:ext cx="10058400" cy="530352"/>
+          </a:xfrm>
+          <a:prstGeom prst="rect">
+            <a:avLst/>
+          </a:prstGeom>
+          <a:noFill/>
+        </p:spPr>
+        <p:txBody>
+          <a:bodyPr wrap="none" lIns="9144" rIns="9144" tIns="9144" bIns="9144" anchor="t">
+            <a:spAutoFit/>
+          </a:bodyPr>
+          <a:lstStyle/>
+          <a:p>
+            <a:pPr algn="l">
+              <a:spcAft>
+                <a:spcPts val="0"/>
+              </a:spcAft>
+              <a:defRPr sz="2300" b="1">
+                <a:solidFill>
+                  <a:srgbClr val="0D1117"/>
+                </a:solidFill>
+                <a:latin typeface="Inter"/>
+              </a:defRPr>
+            </a:pPr>
+            <a:r>
+              <a:rPr>
+                <a:latin typeface="Inter"/>
+              </a:rPr>
+              <a:t>Appendix — Server Metric Methods and Disclosures — continued</a:t>
+            </a:r>
+          </a:p>
+        </p:txBody>
+      </p:sp>
+      <p:sp>
+        <p:nvSpPr>
+          <p:cNvPr id="4" name="Rectangle 3"/>
+          <p:cNvSpPr/>
+          <p:nvPr/>
+        </p:nvSpPr>
+        <p:spPr>
+          <a:xfrm>
+            <a:off x="640080" y="1115568"/>
+            <a:ext cx="10908792" cy="18288"/>
+          </a:xfrm>
+          <a:prstGeom prst="rect">
+            <a:avLst/>
+          </a:prstGeom>
+          <a:solidFill>
+            <a:srgbClr val="0D1117"/>
+          </a:solidFill>
+          <a:ln>
+            <a:solidFill>
+              <a:srgbClr val="0D1117"/>
+            </a:solidFill>
+          </a:ln>
+        </p:spPr>
+        <p:style>
+          <a:lnRef idx="1">
+            <a:schemeClr val="accent1"/>
+          </a:lnRef>
+          <a:fillRef idx="3">
+            <a:schemeClr val="accent1"/>
+          </a:fillRef>
+          <a:effectRef idx="2">
+            <a:schemeClr val="accent1"/>
+          </a:effectRef>
+          <a:fontRef idx="minor">
+            <a:schemeClr val="lt1"/>
+          </a:fontRef>
+        </p:style>
+        <p:txBody>
+          <a:bodyPr rtlCol="0" anchor="ctr"/>
+          <a:lstStyle/>
+          <a:p>
+            <a:pPr algn="ctr">
+              <a:defRPr>
+                <a:latin typeface="Inter"/>
+              </a:defRPr>
+            </a:pPr>
+          </a:p>
+        </p:txBody>
+      </p:sp>
+      <p:sp>
+        <p:nvSpPr>
+          <p:cNvPr id="5" name="Rectangle 4"/>
+          <p:cNvSpPr/>
+          <p:nvPr/>
+        </p:nvSpPr>
+        <p:spPr>
+          <a:xfrm>
+            <a:off x="11018520" y="502920"/>
+            <a:ext cx="530352" cy="393192"/>
+          </a:xfrm>
+          <a:prstGeom prst="rect">
+            <a:avLst/>
+          </a:prstGeom>
+          <a:solidFill>
+            <a:srgbClr val="9AA5B1"/>
+          </a:solidFill>
+          <a:ln>
+            <a:solidFill>
+              <a:srgbClr val="9AA5B1"/>
+            </a:solidFill>
+          </a:ln>
+        </p:spPr>
+        <p:style>
+          <a:lnRef idx="1">
+            <a:schemeClr val="accent1"/>
+          </a:lnRef>
+          <a:fillRef idx="3">
+            <a:schemeClr val="accent1"/>
+          </a:fillRef>
+          <a:effectRef idx="2">
+            <a:schemeClr val="accent1"/>
+          </a:effectRef>
+          <a:fontRef idx="minor">
+            <a:schemeClr val="lt1"/>
+          </a:fontRef>
+        </p:style>
+        <p:txBody>
+          <a:bodyPr rtlCol="0" anchor="ctr"/>
+          <a:lstStyle/>
+          <a:p>
+            <a:pPr algn="ctr">
+              <a:defRPr>
+                <a:latin typeface="Inter"/>
+              </a:defRPr>
+            </a:pPr>
+          </a:p>
+        </p:txBody>
+      </p:sp>
+      <p:sp>
+        <p:nvSpPr>
+          <p:cNvPr id="6" name="TextBox 5"/>
+          <p:cNvSpPr txBox="1"/>
+          <p:nvPr/>
+        </p:nvSpPr>
+        <p:spPr>
+          <a:xfrm>
+            <a:off x="11045952" y="557784"/>
+            <a:ext cx="475488" cy="182880"/>
+          </a:xfrm>
+          <a:prstGeom prst="rect">
+            <a:avLst/>
+          </a:prstGeom>
+          <a:noFill/>
+        </p:spPr>
+        <p:txBody>
+          <a:bodyPr wrap="none" lIns="9144" rIns="9144" tIns="9144" bIns="9144" anchor="t">
+            <a:spAutoFit/>
+          </a:bodyPr>
+          <a:lstStyle/>
+          <a:p>
+            <a:pPr algn="ctr">
+              <a:spcAft>
+                <a:spcPts val="0"/>
+              </a:spcAft>
+              <a:defRPr sz="1000" b="1">
+                <a:solidFill>
+                  <a:srgbClr val="0D1117"/>
+                </a:solidFill>
+                <a:latin typeface="Inter"/>
+              </a:defRPr>
+            </a:pPr>
+            <a:r>
+              <a:rPr>
+                <a:latin typeface="Inter"/>
+              </a:rPr>
+              <a:t>B</a:t>
+            </a:r>
+          </a:p>
+        </p:txBody>
+      </p:sp>
+      <p:sp>
+        <p:nvSpPr>
+          <p:cNvPr id="7" name="TextBox 6"/>
+          <p:cNvSpPr txBox="1"/>
+          <p:nvPr/>
+        </p:nvSpPr>
+        <p:spPr>
+          <a:xfrm>
+            <a:off x="640080" y="1325880"/>
+            <a:ext cx="10908792" cy="4892040"/>
+          </a:xfrm>
+          <a:prstGeom prst="rect">
+            <a:avLst/>
+          </a:prstGeom>
+          <a:noFill/>
+        </p:spPr>
+        <p:txBody>
+          <a:bodyPr wrap="none" lIns="9144" rIns="9144" tIns="9144" bIns="9144" anchor="t">
+            <a:spAutoFit/>
+          </a:bodyPr>
+          <a:lstStyle/>
+          <a:p>
+            <a:pPr algn="l">
+              <a:spcAft>
+                <a:spcPts val="500"/>
+              </a:spcAft>
+              <a:defRPr sz="1050" b="0">
+                <a:solidFill>
+                  <a:srgbClr val="0D1117"/>
+                </a:solidFill>
+                <a:latin typeface="Inter"/>
+              </a:defRPr>
+            </a:pPr>
+            <a:r>
+              <a:rPr>
+                <a:latin typeface="Inter"/>
+              </a:rPr>
+              <a:t>•  Ex ante returns and effects are assumptions, not forecasts or guarantees; historical attribution is realized, so the two bases are not interchangeable.</a:t>
+            </a:r>
+          </a:p>
+          <a:p>
+            <a:pPr algn="l">
+              <a:spcAft>
+                <a:spcPts val="500"/>
+              </a:spcAft>
+              <a:defRPr sz="1050" b="0">
+                <a:solidFill>
+                  <a:srgbClr val="0D1117"/>
+                </a:solidFill>
+                <a:latin typeface="Inter"/>
+              </a:defRPr>
+            </a:pPr>
+            <a:r>
+              <a:rPr>
+                <a:latin typeface="Inter"/>
+              </a:rPr>
+              <a:t>•  Missing evidence is not zero.</a:t>
+            </a:r>
+          </a:p>
+          <a:p>
+            <a:pPr algn="l">
+              <a:spcAft>
+                <a:spcPts val="500"/>
+              </a:spcAft>
+              <a:defRPr sz="1050" b="0">
+                <a:solidFill>
+                  <a:srgbClr val="0D1117"/>
+                </a:solidFill>
+                <a:latin typeface="Inter"/>
+              </a:defRPr>
+            </a:pPr>
+            <a:r>
+              <a:rPr>
+                <a:latin typeface="Inter"/>
+              </a:rPr>
+              <a:t>•  AI-assisted monitoring analysis; not investment, legal or compliance advice.</a:t>
+            </a:r>
+          </a:p>
+        </p:txBody>
+      </p:sp>
+      <p:sp>
+        <p:nvSpPr>
+          <p:cNvPr id="8" name="Rectangle 7"/>
+          <p:cNvSpPr/>
+          <p:nvPr/>
+        </p:nvSpPr>
+        <p:spPr>
+          <a:xfrm>
+            <a:off x="640080" y="6446520"/>
+            <a:ext cx="10908792" cy="9144"/>
+          </a:xfrm>
+          <a:prstGeom prst="rect">
+            <a:avLst/>
+          </a:prstGeom>
+          <a:solidFill>
+            <a:srgbClr val="E3E7EC"/>
+          </a:solidFill>
+          <a:ln>
+            <a:solidFill>
+              <a:srgbClr val="E3E7EC"/>
+            </a:solidFill>
+          </a:ln>
+        </p:spPr>
+        <p:style>
+          <a:lnRef idx="1">
+            <a:schemeClr val="accent1"/>
+          </a:lnRef>
+          <a:fillRef idx="3">
+            <a:schemeClr val="accent1"/>
+          </a:fillRef>
+          <a:effectRef idx="2">
+            <a:schemeClr val="accent1"/>
+          </a:effectRef>
+          <a:fontRef idx="minor">
+            <a:schemeClr val="lt1"/>
+          </a:fontRef>
+        </p:style>
+        <p:txBody>
+          <a:bodyPr rtlCol="0" anchor="ctr"/>
+          <a:lstStyle/>
+          <a:p>
+            <a:pPr algn="ctr">
+              <a:defRPr>
+                <a:latin typeface="Inter"/>
+              </a:defRPr>
+            </a:pPr>
+          </a:p>
+        </p:txBody>
+      </p:sp>
+      <p:sp>
+        <p:nvSpPr>
+          <p:cNvPr id="9" name="TextBox 8"/>
+          <p:cNvSpPr txBox="1"/>
+          <p:nvPr/>
+        </p:nvSpPr>
+        <p:spPr>
+          <a:xfrm>
+            <a:off x="640080" y="6501384"/>
+            <a:ext cx="4297680" cy="146304"/>
+          </a:xfrm>
+          <a:prstGeom prst="rect">
+            <a:avLst/>
+          </a:prstGeom>
+          <a:noFill/>
+        </p:spPr>
+        <p:txBody>
+          <a:bodyPr wrap="none" lIns="9144" rIns="9144" tIns="9144" bIns="9144" anchor="t">
+            <a:spAutoFit/>
+          </a:bodyPr>
+          <a:lstStyle/>
+          <a:p>
+            <a:pPr algn="l">
+              <a:spcAft>
+                <a:spcPts val="0"/>
+              </a:spcAft>
+              <a:defRPr sz="650" b="0">
+                <a:solidFill>
+                  <a:srgbClr val="8A94A1"/>
+                </a:solidFill>
+                <a:latin typeface="Inter"/>
+              </a:defRPr>
+            </a:pPr>
+            <a:r>
+              <a:rPr>
+                <a:latin typeface="Inter"/>
+              </a:rPr>
+              <a:t>Sources: none cited</a:t>
+            </a:r>
+          </a:p>
+        </p:txBody>
+      </p:sp>
+      <p:sp>
+        <p:nvSpPr>
+          <p:cNvPr id="10" name="TextBox 9"/>
+          <p:cNvSpPr txBox="1"/>
+          <p:nvPr/>
+        </p:nvSpPr>
+        <p:spPr>
+          <a:xfrm>
+            <a:off x="4480560" y="6501384"/>
+            <a:ext cx="5303520" cy="146304"/>
+          </a:xfrm>
+          <a:prstGeom prst="rect">
+            <a:avLst/>
+          </a:prstGeom>
+          <a:noFill/>
+        </p:spPr>
+        <p:txBody>
+          <a:bodyPr wrap="none" lIns="9144" rIns="9144" tIns="9144" bIns="9144" anchor="t">
+            <a:spAutoFit/>
+          </a:bodyPr>
+          <a:lstStyle/>
+          <a:p>
+            <a:pPr algn="ctr">
+              <a:spcAft>
+                <a:spcPts val="0"/>
+              </a:spcAft>
+              <a:defRPr sz="650" b="0">
+                <a:solidFill>
+                  <a:srgbClr val="8A94A1"/>
+                </a:solidFill>
+                <a:latin typeface="Inter"/>
+              </a:defRPr>
+            </a:pPr>
+            <a:r>
+              <a:rPr>
+                <a:latin typeface="Inter"/>
+              </a:rPr>
+              <a:t>Confidential — Investment Committee · Data as of 2026-06-30 historical; 2026-10-08 ex ante</a:t>
+            </a:r>
+          </a:p>
+        </p:txBody>
+      </p:sp>
+      <p:sp>
+        <p:nvSpPr>
+          <p:cNvPr id="11" name="TextBox 10"/>
+          <p:cNvSpPr txBox="1"/>
+          <p:nvPr/>
+        </p:nvSpPr>
+        <p:spPr>
+          <a:xfrm>
+            <a:off x="10287000" y="6501384"/>
+            <a:ext cx="1261872" cy="146304"/>
+          </a:xfrm>
+          <a:prstGeom prst="rect">
+            <a:avLst/>
+          </a:prstGeom>
+          <a:noFill/>
+        </p:spPr>
+        <p:txBody>
+          <a:bodyPr wrap="none" lIns="9144" rIns="9144" tIns="9144" bIns="9144" anchor="t">
+            <a:spAutoFit/>
+          </a:bodyPr>
+          <a:lstStyle/>
+          <a:p>
+            <a:pPr algn="r">
+              <a:spcAft>
+                <a:spcPts val="0"/>
+              </a:spcAft>
+              <a:defRPr sz="650" b="0">
+                <a:solidFill>
+                  <a:srgbClr val="8A94A1"/>
+                </a:solidFill>
+                <a:latin typeface="Inter"/>
+              </a:defRPr>
+            </a:pPr>
+            <a:r>
+              <a:rPr>
+                <a:latin typeface="Inter"/>
+              </a:rPr>
+              <a:t>30</a:t>
             </a:r>
           </a:p>
         </p:txBody>
@@ -33158,7 +32402,7 @@
         <p:spPr>
           <a:xfrm>
             <a:off x="640080" y="329184"/>
-            <a:ext cx="5303520" cy="182880"/>
+            <a:ext cx="9875520" cy="182880"/>
           </a:xfrm>
           <a:prstGeom prst="rect">
             <a:avLst/>
@@ -33199,48 +32443,6 @@
         </p:nvSpPr>
         <p:spPr>
           <a:xfrm>
-            <a:off x="5897880" y="310896"/>
-            <a:ext cx="4800600" cy="256032"/>
-          </a:xfrm>
-          <a:prstGeom prst="rect">
-            <a:avLst/>
-          </a:prstGeom>
-          <a:noFill/>
-        </p:spPr>
-        <p:txBody>
-          <a:bodyPr wrap="none" lIns="9144" rIns="9144" tIns="9144" bIns="9144" anchor="t">
-            <a:spAutoFit/>
-          </a:bodyPr>
-          <a:lstStyle/>
-          <a:p>
-            <a:pPr algn="r">
-              <a:spcAft>
-                <a:spcPts val="0"/>
-              </a:spcAft>
-              <a:defRPr sz="680" b="1">
-                <a:solidFill>
-                  <a:srgbClr val="4F6B00"/>
-                </a:solidFill>
-                <a:latin typeface="Inter"/>
-              </a:defRPr>
-            </a:pPr>
-            <a:r>
-              <a:rPr>
-                <a:latin typeface="Inter"/>
-              </a:rPr>
-              <a:t>Illustrative, Gradient Maintained — demo data, not the client's holdings or managers</a:t>
-            </a:r>
-          </a:p>
-        </p:txBody>
-      </p:sp>
-      <p:sp>
-        <p:nvSpPr>
-          <p:cNvPr id="5" name="TextBox 4"/>
-          <p:cNvSpPr txBox="1"/>
-          <p:nvPr/>
-        </p:nvSpPr>
-        <p:spPr>
-          <a:xfrm>
             <a:off x="640080" y="566928"/>
             <a:ext cx="10058400" cy="530352"/>
           </a:xfrm>
@@ -33277,7 +32479,7 @@
       </p:sp>
       <p:sp>
         <p:nvSpPr>
-          <p:cNvPr id="6" name="Rectangle 5"/>
+          <p:cNvPr id="5" name="Rectangle 4"/>
           <p:cNvSpPr/>
           <p:nvPr/>
         </p:nvSpPr>
@@ -33326,7 +32528,7 @@
       </p:sp>
       <p:sp>
         <p:nvSpPr>
-          <p:cNvPr id="7" name="Rectangle 6"/>
+          <p:cNvPr id="6" name="Rectangle 5"/>
           <p:cNvSpPr/>
           <p:nvPr/>
         </p:nvSpPr>
@@ -33375,7 +32577,7 @@
       </p:sp>
       <p:sp>
         <p:nvSpPr>
-          <p:cNvPr id="8" name="TextBox 7"/>
+          <p:cNvPr id="7" name="TextBox 6"/>
           <p:cNvSpPr txBox="1"/>
           <p:nvPr/>
         </p:nvSpPr>
@@ -33417,14 +32619,14 @@
       </p:sp>
       <p:sp>
         <p:nvSpPr>
-          <p:cNvPr id="9" name="Rectangle 8"/>
+          <p:cNvPr id="8" name="Rectangle 7"/>
           <p:cNvSpPr/>
           <p:nvPr/>
         </p:nvSpPr>
         <p:spPr>
           <a:xfrm>
             <a:off x="640080" y="1325880"/>
-            <a:ext cx="10908792" cy="2363189"/>
+            <a:ext cx="10908792" cy="2294071"/>
           </a:xfrm>
           <a:prstGeom prst="rect">
             <a:avLst/>
@@ -33466,14 +32668,14 @@
       </p:sp>
       <p:sp>
         <p:nvSpPr>
-          <p:cNvPr id="10" name="Rectangle 9"/>
+          <p:cNvPr id="9" name="Rectangle 8"/>
           <p:cNvSpPr/>
           <p:nvPr/>
         </p:nvSpPr>
         <p:spPr>
           <a:xfrm>
             <a:off x="640080" y="1325880"/>
-            <a:ext cx="54864" cy="2363189"/>
+            <a:ext cx="54864" cy="2294071"/>
           </a:xfrm>
           <a:prstGeom prst="rect">
             <a:avLst/>
@@ -33515,7 +32717,7 @@
       </p:sp>
       <p:sp>
         <p:nvSpPr>
-          <p:cNvPr id="11" name="TextBox 10"/>
+          <p:cNvPr id="10" name="TextBox 9"/>
           <p:cNvSpPr txBox="1"/>
           <p:nvPr/>
         </p:nvSpPr>
@@ -33550,21 +32752,21 @@
               <a:rPr>
                 <a:latin typeface="Inter"/>
               </a:rPr>
-              <a:t>Key judgment — primary measure</a:t>
+              <a:t>Key judgment — Active return</a:t>
             </a:r>
           </a:p>
         </p:txBody>
       </p:sp>
       <p:sp>
         <p:nvSpPr>
-          <p:cNvPr id="12" name="TextBox 11"/>
+          <p:cNvPr id="11" name="TextBox 10"/>
           <p:cNvSpPr txBox="1"/>
           <p:nvPr/>
         </p:nvSpPr>
         <p:spPr>
           <a:xfrm>
             <a:off x="804671" y="1719072"/>
-            <a:ext cx="10616184" cy="1878557"/>
+            <a:ext cx="10616184" cy="1809439"/>
           </a:xfrm>
           <a:prstGeom prst="rect">
             <a:avLst/>
@@ -33592,21 +32794,21 @@
               <a:rPr>
                 <a:latin typeface="Inter"/>
               </a:rPr>
-              <a:t>Observation: Historical active return is -0.6pp in the review evidence [S2]. Why it matters: This measure establishes the baseline for comparing later governed results. Uncertainty: The source basis may omit newer observations outside the reviewed evidence. What would change the view: A refreshed source report showing a change above 1%.</a:t>
+              <a:t>Observation: Historical active return was -0.6pp over the period [S2]. Why it matters: It is the shortfall that the attribution effects explain. Uncertainty: Benchmark returns use the policy weights in force each month. What would change the view: A restated benchmark history that moves active return by 0.1pp or more.</a:t>
             </a:r>
           </a:p>
         </p:txBody>
       </p:sp>
       <p:sp>
         <p:nvSpPr>
-          <p:cNvPr id="13" name="Rectangle 12"/>
+          <p:cNvPr id="12" name="Rectangle 11"/>
           <p:cNvSpPr/>
           <p:nvPr/>
         </p:nvSpPr>
         <p:spPr>
           <a:xfrm>
-            <a:off x="640080" y="3798797"/>
-            <a:ext cx="10908792" cy="2419122"/>
+            <a:off x="640080" y="3729679"/>
+            <a:ext cx="10908792" cy="2488240"/>
           </a:xfrm>
           <a:prstGeom prst="rect">
             <a:avLst/>
@@ -33648,14 +32850,14 @@
       </p:sp>
       <p:sp>
         <p:nvSpPr>
-          <p:cNvPr id="14" name="Rectangle 13"/>
+          <p:cNvPr id="13" name="Rectangle 12"/>
           <p:cNvSpPr/>
           <p:nvPr/>
         </p:nvSpPr>
         <p:spPr>
           <a:xfrm>
-            <a:off x="640080" y="3798797"/>
-            <a:ext cx="54864" cy="2419122"/>
+            <a:off x="640080" y="3729679"/>
+            <a:ext cx="54864" cy="2488240"/>
           </a:xfrm>
           <a:prstGeom prst="rect">
             <a:avLst/>
@@ -33697,13 +32899,13 @@
       </p:sp>
       <p:sp>
         <p:nvSpPr>
-          <p:cNvPr id="15" name="TextBox 14"/>
+          <p:cNvPr id="14" name="TextBox 13"/>
           <p:cNvSpPr txBox="1"/>
           <p:nvPr/>
         </p:nvSpPr>
         <p:spPr>
           <a:xfrm>
-            <a:off x="804671" y="3908525"/>
+            <a:off x="804671" y="3839407"/>
             <a:ext cx="10616184" cy="228600"/>
           </a:xfrm>
           <a:prstGeom prst="rect">
@@ -33739,14 +32941,14 @@
       </p:sp>
       <p:sp>
         <p:nvSpPr>
-          <p:cNvPr id="16" name="TextBox 15"/>
+          <p:cNvPr id="15" name="TextBox 14"/>
           <p:cNvSpPr txBox="1"/>
           <p:nvPr/>
         </p:nvSpPr>
         <p:spPr>
           <a:xfrm>
-            <a:off x="804671" y="4191989"/>
-            <a:ext cx="10616184" cy="1934490"/>
+            <a:off x="804671" y="4122871"/>
+            <a:ext cx="10616184" cy="2003608"/>
           </a:xfrm>
           <a:prstGeom prst="rect">
             <a:avLst/>
@@ -33781,7 +32983,7 @@
       </p:sp>
       <p:sp>
         <p:nvSpPr>
-          <p:cNvPr id="17" name="Rectangle 16"/>
+          <p:cNvPr id="16" name="Rectangle 15"/>
           <p:cNvSpPr/>
           <p:nvPr/>
         </p:nvSpPr>
@@ -33830,7 +33032,7 @@
       </p:sp>
       <p:sp>
         <p:nvSpPr>
-          <p:cNvPr id="18" name="TextBox 17"/>
+          <p:cNvPr id="17" name="TextBox 16"/>
           <p:cNvSpPr txBox="1"/>
           <p:nvPr/>
         </p:nvSpPr>
@@ -33872,7 +33074,7 @@
       </p:sp>
       <p:sp>
         <p:nvSpPr>
-          <p:cNvPr id="19" name="TextBox 18"/>
+          <p:cNvPr id="18" name="TextBox 17"/>
           <p:cNvSpPr txBox="1"/>
           <p:nvPr/>
         </p:nvSpPr>
@@ -33914,7 +33116,7 @@
       </p:sp>
       <p:sp>
         <p:nvSpPr>
-          <p:cNvPr id="20" name="TextBox 19"/>
+          <p:cNvPr id="19" name="TextBox 18"/>
           <p:cNvSpPr txBox="1"/>
           <p:nvPr/>
         </p:nvSpPr>
@@ -34030,7 +33232,7 @@
         <p:spPr>
           <a:xfrm>
             <a:off x="640080" y="329184"/>
-            <a:ext cx="5303520" cy="182880"/>
+            <a:ext cx="9875520" cy="182880"/>
           </a:xfrm>
           <a:prstGeom prst="rect">
             <a:avLst/>
@@ -34071,48 +33273,6 @@
         </p:nvSpPr>
         <p:spPr>
           <a:xfrm>
-            <a:off x="5897880" y="310896"/>
-            <a:ext cx="4800600" cy="256032"/>
-          </a:xfrm>
-          <a:prstGeom prst="rect">
-            <a:avLst/>
-          </a:prstGeom>
-          <a:noFill/>
-        </p:spPr>
-        <p:txBody>
-          <a:bodyPr wrap="none" lIns="9144" rIns="9144" tIns="9144" bIns="9144" anchor="t">
-            <a:spAutoFit/>
-          </a:bodyPr>
-          <a:lstStyle/>
-          <a:p>
-            <a:pPr algn="r">
-              <a:spcAft>
-                <a:spcPts val="0"/>
-              </a:spcAft>
-              <a:defRPr sz="680" b="1">
-                <a:solidFill>
-                  <a:srgbClr val="4F6B00"/>
-                </a:solidFill>
-                <a:latin typeface="Inter"/>
-              </a:defRPr>
-            </a:pPr>
-            <a:r>
-              <a:rPr>
-                <a:latin typeface="Inter"/>
-              </a:rPr>
-              <a:t>Illustrative, Gradient Maintained — demo data, not the client's holdings or managers</a:t>
-            </a:r>
-          </a:p>
-        </p:txBody>
-      </p:sp>
-      <p:sp>
-        <p:nvSpPr>
-          <p:cNvPr id="5" name="TextBox 4"/>
-          <p:cNvSpPr txBox="1"/>
-          <p:nvPr/>
-        </p:nvSpPr>
-        <p:spPr>
-          <a:xfrm>
             <a:off x="640080" y="566928"/>
             <a:ext cx="10058400" cy="530352"/>
           </a:xfrm>
@@ -34149,7 +33309,7 @@
       </p:sp>
       <p:sp>
         <p:nvSpPr>
-          <p:cNvPr id="6" name="Rectangle 5"/>
+          <p:cNvPr id="5" name="Rectangle 4"/>
           <p:cNvSpPr/>
           <p:nvPr/>
         </p:nvSpPr>
@@ -34198,7 +33358,7 @@
       </p:sp>
       <p:sp>
         <p:nvSpPr>
-          <p:cNvPr id="7" name="Rectangle 6"/>
+          <p:cNvPr id="6" name="Rectangle 5"/>
           <p:cNvSpPr/>
           <p:nvPr/>
         </p:nvSpPr>
@@ -34247,7 +33407,7 @@
       </p:sp>
       <p:sp>
         <p:nvSpPr>
-          <p:cNvPr id="8" name="TextBox 7"/>
+          <p:cNvPr id="7" name="TextBox 6"/>
           <p:cNvSpPr txBox="1"/>
           <p:nvPr/>
         </p:nvSpPr>
@@ -34289,7 +33449,7 @@
       </p:sp>
       <p:graphicFrame>
         <p:nvGraphicFramePr>
-          <p:cNvPr id="9" name="Table 8"/>
+          <p:cNvPr id="8" name="Table 7"/>
           <p:cNvGraphicFramePr>
             <a:graphicFrameLocks noGrp="1"/>
           </p:cNvGraphicFramePr>
@@ -34763,7 +33923,7 @@
       </p:graphicFrame>
       <p:sp>
         <p:nvSpPr>
-          <p:cNvPr id="10" name="TextBox 9"/>
+          <p:cNvPr id="9" name="TextBox 8"/>
           <p:cNvSpPr txBox="1"/>
           <p:nvPr/>
         </p:nvSpPr>
@@ -34805,7 +33965,7 @@
       </p:sp>
       <p:graphicFrame>
         <p:nvGraphicFramePr>
-          <p:cNvPr id="11" name="Table 10"/>
+          <p:cNvPr id="10" name="Table 9"/>
           <p:cNvGraphicFramePr>
             <a:graphicFrameLocks noGrp="1"/>
           </p:cNvGraphicFramePr>
@@ -35327,7 +34487,7 @@
       </p:graphicFrame>
       <p:sp>
         <p:nvSpPr>
-          <p:cNvPr id="12" name="Rectangle 11"/>
+          <p:cNvPr id="11" name="Rectangle 10"/>
           <p:cNvSpPr/>
           <p:nvPr/>
         </p:nvSpPr>
@@ -35376,7 +34536,7 @@
       </p:sp>
       <p:sp>
         <p:nvSpPr>
-          <p:cNvPr id="13" name="TextBox 12"/>
+          <p:cNvPr id="12" name="TextBox 11"/>
           <p:cNvSpPr txBox="1"/>
           <p:nvPr/>
         </p:nvSpPr>
@@ -35418,7 +34578,7 @@
       </p:sp>
       <p:sp>
         <p:nvSpPr>
-          <p:cNvPr id="14" name="TextBox 13"/>
+          <p:cNvPr id="13" name="TextBox 12"/>
           <p:cNvSpPr txBox="1"/>
           <p:nvPr/>
         </p:nvSpPr>
@@ -35460,7 +34620,7 @@
       </p:sp>
       <p:sp>
         <p:nvSpPr>
-          <p:cNvPr id="15" name="TextBox 14"/>
+          <p:cNvPr id="14" name="TextBox 13"/>
           <p:cNvSpPr txBox="1"/>
           <p:nvPr/>
         </p:nvSpPr>
@@ -35576,7 +34736,7 @@
         <p:spPr>
           <a:xfrm>
             <a:off x="640080" y="329184"/>
-            <a:ext cx="5303520" cy="182880"/>
+            <a:ext cx="9875520" cy="182880"/>
           </a:xfrm>
           <a:prstGeom prst="rect">
             <a:avLst/>
@@ -35617,48 +34777,6 @@
         </p:nvSpPr>
         <p:spPr>
           <a:xfrm>
-            <a:off x="5897880" y="310896"/>
-            <a:ext cx="4800600" cy="256032"/>
-          </a:xfrm>
-          <a:prstGeom prst="rect">
-            <a:avLst/>
-          </a:prstGeom>
-          <a:noFill/>
-        </p:spPr>
-        <p:txBody>
-          <a:bodyPr wrap="none" lIns="9144" rIns="9144" tIns="9144" bIns="9144" anchor="t">
-            <a:spAutoFit/>
-          </a:bodyPr>
-          <a:lstStyle/>
-          <a:p>
-            <a:pPr algn="r">
-              <a:spcAft>
-                <a:spcPts val="0"/>
-              </a:spcAft>
-              <a:defRPr sz="680" b="1">
-                <a:solidFill>
-                  <a:srgbClr val="4F6B00"/>
-                </a:solidFill>
-                <a:latin typeface="Inter"/>
-              </a:defRPr>
-            </a:pPr>
-            <a:r>
-              <a:rPr>
-                <a:latin typeface="Inter"/>
-              </a:rPr>
-              <a:t>Illustrative, Gradient Maintained — demo data, not the client's holdings or managers</a:t>
-            </a:r>
-          </a:p>
-        </p:txBody>
-      </p:sp>
-      <p:sp>
-        <p:nvSpPr>
-          <p:cNvPr id="5" name="TextBox 4"/>
-          <p:cNvSpPr txBox="1"/>
-          <p:nvPr/>
-        </p:nvSpPr>
-        <p:spPr>
-          <a:xfrm>
             <a:off x="640080" y="566928"/>
             <a:ext cx="10058400" cy="530352"/>
           </a:xfrm>
@@ -35695,7 +34813,7 @@
       </p:sp>
       <p:sp>
         <p:nvSpPr>
-          <p:cNvPr id="6" name="Rectangle 5"/>
+          <p:cNvPr id="5" name="Rectangle 4"/>
           <p:cNvSpPr/>
           <p:nvPr/>
         </p:nvSpPr>
@@ -35744,7 +34862,7 @@
       </p:sp>
       <p:sp>
         <p:nvSpPr>
-          <p:cNvPr id="7" name="Rectangle 6"/>
+          <p:cNvPr id="6" name="Rectangle 5"/>
           <p:cNvSpPr/>
           <p:nvPr/>
         </p:nvSpPr>
@@ -35793,7 +34911,7 @@
       </p:sp>
       <p:sp>
         <p:nvSpPr>
-          <p:cNvPr id="8" name="TextBox 7"/>
+          <p:cNvPr id="7" name="TextBox 6"/>
           <p:cNvSpPr txBox="1"/>
           <p:nvPr/>
         </p:nvSpPr>
@@ -35835,7 +34953,7 @@
       </p:sp>
       <p:sp>
         <p:nvSpPr>
-          <p:cNvPr id="9" name="TextBox 8"/>
+          <p:cNvPr id="8" name="TextBox 7"/>
           <p:cNvSpPr txBox="1"/>
           <p:nvPr/>
         </p:nvSpPr>
@@ -35877,7 +34995,7 @@
       </p:sp>
       <p:graphicFrame>
         <p:nvGraphicFramePr>
-          <p:cNvPr id="10" name="Chart 9"/>
+          <p:cNvPr id="9" name="Chart 8"/>
           <p:cNvGraphicFramePr>
             <a:graphicFrameLocks noGrp="1"/>
           </p:cNvGraphicFramePr>
@@ -35895,7 +35013,7 @@
       </p:graphicFrame>
       <p:sp>
         <p:nvSpPr>
-          <p:cNvPr id="11" name="Rectangle 10"/>
+          <p:cNvPr id="10" name="Rectangle 9"/>
           <p:cNvSpPr/>
           <p:nvPr/>
         </p:nvSpPr>
@@ -35944,7 +35062,7 @@
       </p:sp>
       <p:sp>
         <p:nvSpPr>
-          <p:cNvPr id="12" name="TextBox 11"/>
+          <p:cNvPr id="11" name="TextBox 10"/>
           <p:cNvSpPr txBox="1"/>
           <p:nvPr/>
         </p:nvSpPr>
@@ -35986,7 +35104,7 @@
       </p:sp>
       <p:sp>
         <p:nvSpPr>
-          <p:cNvPr id="13" name="TextBox 12"/>
+          <p:cNvPr id="12" name="TextBox 11"/>
           <p:cNvSpPr txBox="1"/>
           <p:nvPr/>
         </p:nvSpPr>
@@ -36028,7 +35146,7 @@
       </p:sp>
       <p:sp>
         <p:nvSpPr>
-          <p:cNvPr id="14" name="TextBox 13"/>
+          <p:cNvPr id="13" name="TextBox 12"/>
           <p:cNvSpPr txBox="1"/>
           <p:nvPr/>
         </p:nvSpPr>
@@ -36144,7 +35262,7 @@
         <p:spPr>
           <a:xfrm>
             <a:off x="640080" y="329184"/>
-            <a:ext cx="5303520" cy="182880"/>
+            <a:ext cx="9875520" cy="182880"/>
           </a:xfrm>
           <a:prstGeom prst="rect">
             <a:avLst/>
@@ -36185,48 +35303,6 @@
         </p:nvSpPr>
         <p:spPr>
           <a:xfrm>
-            <a:off x="5897880" y="310896"/>
-            <a:ext cx="4800600" cy="256032"/>
-          </a:xfrm>
-          <a:prstGeom prst="rect">
-            <a:avLst/>
-          </a:prstGeom>
-          <a:noFill/>
-        </p:spPr>
-        <p:txBody>
-          <a:bodyPr wrap="none" lIns="9144" rIns="9144" tIns="9144" bIns="9144" anchor="t">
-            <a:spAutoFit/>
-          </a:bodyPr>
-          <a:lstStyle/>
-          <a:p>
-            <a:pPr algn="r">
-              <a:spcAft>
-                <a:spcPts val="0"/>
-              </a:spcAft>
-              <a:defRPr sz="680" b="1">
-                <a:solidFill>
-                  <a:srgbClr val="4F6B00"/>
-                </a:solidFill>
-                <a:latin typeface="Inter"/>
-              </a:defRPr>
-            </a:pPr>
-            <a:r>
-              <a:rPr>
-                <a:latin typeface="Inter"/>
-              </a:rPr>
-              <a:t>Illustrative, Gradient Maintained — demo data, not the client's holdings or managers</a:t>
-            </a:r>
-          </a:p>
-        </p:txBody>
-      </p:sp>
-      <p:sp>
-        <p:nvSpPr>
-          <p:cNvPr id="5" name="TextBox 4"/>
-          <p:cNvSpPr txBox="1"/>
-          <p:nvPr/>
-        </p:nvSpPr>
-        <p:spPr>
-          <a:xfrm>
             <a:off x="640080" y="566928"/>
             <a:ext cx="10058400" cy="530352"/>
           </a:xfrm>
@@ -36263,7 +35339,7 @@
       </p:sp>
       <p:sp>
         <p:nvSpPr>
-          <p:cNvPr id="6" name="Rectangle 5"/>
+          <p:cNvPr id="5" name="Rectangle 4"/>
           <p:cNvSpPr/>
           <p:nvPr/>
         </p:nvSpPr>
@@ -36312,7 +35388,7 @@
       </p:sp>
       <p:sp>
         <p:nvSpPr>
-          <p:cNvPr id="7" name="Rectangle 6"/>
+          <p:cNvPr id="6" name="Rectangle 5"/>
           <p:cNvSpPr/>
           <p:nvPr/>
         </p:nvSpPr>
@@ -36361,7 +35437,7 @@
       </p:sp>
       <p:sp>
         <p:nvSpPr>
-          <p:cNvPr id="8" name="TextBox 7"/>
+          <p:cNvPr id="7" name="TextBox 6"/>
           <p:cNvSpPr txBox="1"/>
           <p:nvPr/>
         </p:nvSpPr>
@@ -36403,7 +35479,7 @@
       </p:sp>
       <p:sp>
         <p:nvSpPr>
-          <p:cNvPr id="9" name="TextBox 8"/>
+          <p:cNvPr id="8" name="TextBox 7"/>
           <p:cNvSpPr txBox="1"/>
           <p:nvPr/>
         </p:nvSpPr>
@@ -36445,7 +35521,7 @@
       </p:sp>
       <p:graphicFrame>
         <p:nvGraphicFramePr>
-          <p:cNvPr id="10" name="Chart 9"/>
+          <p:cNvPr id="9" name="Chart 8"/>
           <p:cNvGraphicFramePr>
             <a:graphicFrameLocks noGrp="1"/>
           </p:cNvGraphicFramePr>
@@ -36463,7 +35539,7 @@
       </p:graphicFrame>
       <p:sp>
         <p:nvSpPr>
-          <p:cNvPr id="11" name="Rectangle 10"/>
+          <p:cNvPr id="10" name="Rectangle 9"/>
           <p:cNvSpPr/>
           <p:nvPr/>
         </p:nvSpPr>
@@ -36512,7 +35588,7 @@
       </p:sp>
       <p:sp>
         <p:nvSpPr>
-          <p:cNvPr id="12" name="TextBox 11"/>
+          <p:cNvPr id="11" name="TextBox 10"/>
           <p:cNvSpPr txBox="1"/>
           <p:nvPr/>
         </p:nvSpPr>
@@ -36554,7 +35630,7 @@
       </p:sp>
       <p:sp>
         <p:nvSpPr>
-          <p:cNvPr id="13" name="TextBox 12"/>
+          <p:cNvPr id="12" name="TextBox 11"/>
           <p:cNvSpPr txBox="1"/>
           <p:nvPr/>
         </p:nvSpPr>
@@ -36596,7 +35672,7 @@
       </p:sp>
       <p:sp>
         <p:nvSpPr>
-          <p:cNvPr id="14" name="TextBox 13"/>
+          <p:cNvPr id="13" name="TextBox 12"/>
           <p:cNvSpPr txBox="1"/>
           <p:nvPr/>
         </p:nvSpPr>
@@ -36712,7 +35788,7 @@
         <p:spPr>
           <a:xfrm>
             <a:off x="640080" y="329184"/>
-            <a:ext cx="5303520" cy="182880"/>
+            <a:ext cx="9875520" cy="182880"/>
           </a:xfrm>
           <a:prstGeom prst="rect">
             <a:avLst/>
@@ -36753,48 +35829,6 @@
         </p:nvSpPr>
         <p:spPr>
           <a:xfrm>
-            <a:off x="5897880" y="310896"/>
-            <a:ext cx="4800600" cy="256032"/>
-          </a:xfrm>
-          <a:prstGeom prst="rect">
-            <a:avLst/>
-          </a:prstGeom>
-          <a:noFill/>
-        </p:spPr>
-        <p:txBody>
-          <a:bodyPr wrap="none" lIns="9144" rIns="9144" tIns="9144" bIns="9144" anchor="t">
-            <a:spAutoFit/>
-          </a:bodyPr>
-          <a:lstStyle/>
-          <a:p>
-            <a:pPr algn="r">
-              <a:spcAft>
-                <a:spcPts val="0"/>
-              </a:spcAft>
-              <a:defRPr sz="680" b="1">
-                <a:solidFill>
-                  <a:srgbClr val="4F6B00"/>
-                </a:solidFill>
-                <a:latin typeface="Inter"/>
-              </a:defRPr>
-            </a:pPr>
-            <a:r>
-              <a:rPr>
-                <a:latin typeface="Inter"/>
-              </a:rPr>
-              <a:t>Illustrative, Gradient Maintained — demo data, not the client's holdings or managers</a:t>
-            </a:r>
-          </a:p>
-        </p:txBody>
-      </p:sp>
-      <p:sp>
-        <p:nvSpPr>
-          <p:cNvPr id="5" name="TextBox 4"/>
-          <p:cNvSpPr txBox="1"/>
-          <p:nvPr/>
-        </p:nvSpPr>
-        <p:spPr>
-          <a:xfrm>
             <a:off x="640080" y="566928"/>
             <a:ext cx="10058400" cy="530352"/>
           </a:xfrm>
@@ -36831,7 +35865,7 @@
       </p:sp>
       <p:sp>
         <p:nvSpPr>
-          <p:cNvPr id="6" name="Rectangle 5"/>
+          <p:cNvPr id="5" name="Rectangle 4"/>
           <p:cNvSpPr/>
           <p:nvPr/>
         </p:nvSpPr>
@@ -36880,7 +35914,7 @@
       </p:sp>
       <p:sp>
         <p:nvSpPr>
-          <p:cNvPr id="7" name="Rectangle 6"/>
+          <p:cNvPr id="6" name="Rectangle 5"/>
           <p:cNvSpPr/>
           <p:nvPr/>
         </p:nvSpPr>
@@ -36929,7 +35963,7 @@
       </p:sp>
       <p:sp>
         <p:nvSpPr>
-          <p:cNvPr id="8" name="TextBox 7"/>
+          <p:cNvPr id="7" name="TextBox 6"/>
           <p:cNvSpPr txBox="1"/>
           <p:nvPr/>
         </p:nvSpPr>
@@ -36971,7 +36005,7 @@
       </p:sp>
       <p:sp>
         <p:nvSpPr>
-          <p:cNvPr id="9" name="TextBox 8"/>
+          <p:cNvPr id="8" name="TextBox 7"/>
           <p:cNvSpPr txBox="1"/>
           <p:nvPr/>
         </p:nvSpPr>
@@ -37013,7 +36047,7 @@
       </p:sp>
       <p:graphicFrame>
         <p:nvGraphicFramePr>
-          <p:cNvPr id="10" name="Chart 9"/>
+          <p:cNvPr id="9" name="Chart 8"/>
           <p:cNvGraphicFramePr>
             <a:graphicFrameLocks noGrp="1"/>
           </p:cNvGraphicFramePr>
@@ -37031,7 +36065,7 @@
       </p:graphicFrame>
       <p:sp>
         <p:nvSpPr>
-          <p:cNvPr id="11" name="Rectangle 10"/>
+          <p:cNvPr id="10" name="Rectangle 9"/>
           <p:cNvSpPr/>
           <p:nvPr/>
         </p:nvSpPr>
@@ -37080,7 +36114,7 @@
       </p:sp>
       <p:sp>
         <p:nvSpPr>
-          <p:cNvPr id="12" name="TextBox 11"/>
+          <p:cNvPr id="11" name="TextBox 10"/>
           <p:cNvSpPr txBox="1"/>
           <p:nvPr/>
         </p:nvSpPr>
@@ -37122,7 +36156,7 @@
       </p:sp>
       <p:sp>
         <p:nvSpPr>
-          <p:cNvPr id="13" name="TextBox 12"/>
+          <p:cNvPr id="12" name="TextBox 11"/>
           <p:cNvSpPr txBox="1"/>
           <p:nvPr/>
         </p:nvSpPr>
@@ -37164,7 +36198,7 @@
       </p:sp>
       <p:sp>
         <p:nvSpPr>
-          <p:cNvPr id="14" name="TextBox 13"/>
+          <p:cNvPr id="13" name="TextBox 12"/>
           <p:cNvSpPr txBox="1"/>
           <p:nvPr/>
         </p:nvSpPr>
@@ -37280,7 +36314,7 @@
         <p:spPr>
           <a:xfrm>
             <a:off x="640080" y="329184"/>
-            <a:ext cx="5303520" cy="182880"/>
+            <a:ext cx="9875520" cy="182880"/>
           </a:xfrm>
           <a:prstGeom prst="rect">
             <a:avLst/>
@@ -37321,48 +36355,6 @@
         </p:nvSpPr>
         <p:spPr>
           <a:xfrm>
-            <a:off x="5897880" y="310896"/>
-            <a:ext cx="4800600" cy="256032"/>
-          </a:xfrm>
-          <a:prstGeom prst="rect">
-            <a:avLst/>
-          </a:prstGeom>
-          <a:noFill/>
-        </p:spPr>
-        <p:txBody>
-          <a:bodyPr wrap="none" lIns="9144" rIns="9144" tIns="9144" bIns="9144" anchor="t">
-            <a:spAutoFit/>
-          </a:bodyPr>
-          <a:lstStyle/>
-          <a:p>
-            <a:pPr algn="r">
-              <a:spcAft>
-                <a:spcPts val="0"/>
-              </a:spcAft>
-              <a:defRPr sz="680" b="1">
-                <a:solidFill>
-                  <a:srgbClr val="4F6B00"/>
-                </a:solidFill>
-                <a:latin typeface="Inter"/>
-              </a:defRPr>
-            </a:pPr>
-            <a:r>
-              <a:rPr>
-                <a:latin typeface="Inter"/>
-              </a:rPr>
-              <a:t>Illustrative, Gradient Maintained — demo data, not the client's holdings or managers</a:t>
-            </a:r>
-          </a:p>
-        </p:txBody>
-      </p:sp>
-      <p:sp>
-        <p:nvSpPr>
-          <p:cNvPr id="5" name="TextBox 4"/>
-          <p:cNvSpPr txBox="1"/>
-          <p:nvPr/>
-        </p:nvSpPr>
-        <p:spPr>
-          <a:xfrm>
             <a:off x="640080" y="566928"/>
             <a:ext cx="10058400" cy="530352"/>
           </a:xfrm>
@@ -37399,7 +36391,7 @@
       </p:sp>
       <p:sp>
         <p:nvSpPr>
-          <p:cNvPr id="6" name="Rectangle 5"/>
+          <p:cNvPr id="5" name="Rectangle 4"/>
           <p:cNvSpPr/>
           <p:nvPr/>
         </p:nvSpPr>
@@ -37448,7 +36440,7 @@
       </p:sp>
       <p:sp>
         <p:nvSpPr>
-          <p:cNvPr id="7" name="Rectangle 6"/>
+          <p:cNvPr id="6" name="Rectangle 5"/>
           <p:cNvSpPr/>
           <p:nvPr/>
         </p:nvSpPr>
@@ -37497,7 +36489,7 @@
       </p:sp>
       <p:sp>
         <p:nvSpPr>
-          <p:cNvPr id="8" name="TextBox 7"/>
+          <p:cNvPr id="7" name="TextBox 6"/>
           <p:cNvSpPr txBox="1"/>
           <p:nvPr/>
         </p:nvSpPr>
@@ -37539,7 +36531,7 @@
       </p:sp>
       <p:sp>
         <p:nvSpPr>
-          <p:cNvPr id="9" name="TextBox 8"/>
+          <p:cNvPr id="8" name="TextBox 7"/>
           <p:cNvSpPr txBox="1"/>
           <p:nvPr/>
         </p:nvSpPr>
@@ -37581,7 +36573,7 @@
       </p:sp>
       <p:graphicFrame>
         <p:nvGraphicFramePr>
-          <p:cNvPr id="10" name="Table 9"/>
+          <p:cNvPr id="9" name="Table 8"/>
           <p:cNvGraphicFramePr>
             <a:graphicFrameLocks noGrp="1"/>
           </p:cNvGraphicFramePr>
@@ -38295,7 +37287,7 @@
       </p:graphicFrame>
       <p:sp>
         <p:nvSpPr>
-          <p:cNvPr id="11" name="TextBox 10"/>
+          <p:cNvPr id="10" name="TextBox 9"/>
           <p:cNvSpPr txBox="1"/>
           <p:nvPr/>
         </p:nvSpPr>
@@ -38337,7 +37329,7 @@
       </p:sp>
       <p:sp>
         <p:nvSpPr>
-          <p:cNvPr id="12" name="Rectangle 11"/>
+          <p:cNvPr id="11" name="Rectangle 10"/>
           <p:cNvSpPr/>
           <p:nvPr/>
         </p:nvSpPr>
@@ -38386,7 +37378,7 @@
       </p:sp>
       <p:sp>
         <p:nvSpPr>
-          <p:cNvPr id="13" name="Rectangle 12"/>
+          <p:cNvPr id="12" name="Rectangle 11"/>
           <p:cNvSpPr/>
           <p:nvPr/>
         </p:nvSpPr>
@@ -38435,7 +37427,7 @@
       </p:sp>
       <p:sp>
         <p:nvSpPr>
-          <p:cNvPr id="14" name="TextBox 13"/>
+          <p:cNvPr id="13" name="TextBox 12"/>
           <p:cNvSpPr txBox="1"/>
           <p:nvPr/>
         </p:nvSpPr>
@@ -38477,7 +37469,7 @@
       </p:sp>
       <p:sp>
         <p:nvSpPr>
-          <p:cNvPr id="15" name="TextBox 14"/>
+          <p:cNvPr id="14" name="TextBox 13"/>
           <p:cNvSpPr txBox="1"/>
           <p:nvPr/>
         </p:nvSpPr>
@@ -38519,7 +37511,7 @@
       </p:sp>
       <p:sp>
         <p:nvSpPr>
-          <p:cNvPr id="16" name="Rectangle 15"/>
+          <p:cNvPr id="15" name="Rectangle 14"/>
           <p:cNvSpPr/>
           <p:nvPr/>
         </p:nvSpPr>
@@ -38568,7 +37560,7 @@
       </p:sp>
       <p:sp>
         <p:nvSpPr>
-          <p:cNvPr id="17" name="TextBox 16"/>
+          <p:cNvPr id="16" name="TextBox 15"/>
           <p:cNvSpPr txBox="1"/>
           <p:nvPr/>
         </p:nvSpPr>
@@ -38610,7 +37602,7 @@
       </p:sp>
       <p:sp>
         <p:nvSpPr>
-          <p:cNvPr id="18" name="TextBox 17"/>
+          <p:cNvPr id="17" name="TextBox 16"/>
           <p:cNvSpPr txBox="1"/>
           <p:nvPr/>
         </p:nvSpPr>
@@ -38652,7 +37644,7 @@
       </p:sp>
       <p:sp>
         <p:nvSpPr>
-          <p:cNvPr id="19" name="TextBox 18"/>
+          <p:cNvPr id="18" name="TextBox 17"/>
           <p:cNvSpPr txBox="1"/>
           <p:nvPr/>
         </p:nvSpPr>

--- a/plugins/gradient-cio/assets/examples/gradient-portfolio-attribution.pptx
+++ b/plugins/gradient-cio/assets/examples/gradient-portfolio-attribution.pptx
@@ -31,6 +31,7 @@
     <ns0:sldId id="279" ns1:id="rId30"/>
     <ns0:sldId id="280" ns1:id="rId31"/>
     <ns0:sldId id="281" ns1:id="rId32"/>
+    <ns0:sldId id="282" ns1:id="rId33"/>
   </ns0:sldIdLst>
   <ns0:sldSz cx="12191695" cy="6858000" type="screen16x9"/>
   <ns0:notesSz cx="6858000" cy="9144000"/>
@@ -5810,7 +5811,7 @@
               <a:rPr>
                 <a:latin typeface="Inter"/>
               </a:rPr>
-              <a:t>Historical and governed ex ante attribution · prepared for the Investment Committee</a:t>
+              <a:t>Historical and forward-looking attribution · prepared for the Investment Committee</a:t>
             </a:r>
           </a:p>
         </p:txBody>
@@ -6202,224 +6203,7 @@
       </p:sp>
       <p:sp>
         <p:nvSpPr>
-          <p:cNvPr id="17" name="Rectangle 16"/>
-          <p:cNvSpPr/>
-          <p:nvPr/>
-        </p:nvSpPr>
-        <p:spPr>
-          <a:xfrm>
-            <a:off x="685800" y="5687568"/>
-            <a:ext cx="3337560" cy="530352"/>
-          </a:xfrm>
-          <a:prstGeom prst="rect">
-            <a:avLst/>
-          </a:prstGeom>
-          <a:solidFill>
-            <a:srgbClr val="C6F432"/>
-          </a:solidFill>
-          <a:ln>
-            <a:solidFill>
-              <a:srgbClr val="C6F432"/>
-            </a:solidFill>
-          </a:ln>
-        </p:spPr>
-        <p:style>
-          <a:lnRef idx="1">
-            <a:schemeClr val="accent1"/>
-          </a:lnRef>
-          <a:fillRef idx="3">
-            <a:schemeClr val="accent1"/>
-          </a:fillRef>
-          <a:effectRef idx="2">
-            <a:schemeClr val="accent1"/>
-          </a:effectRef>
-          <a:fontRef idx="minor">
-            <a:schemeClr val="lt1"/>
-          </a:fontRef>
-        </p:style>
-        <p:txBody>
-          <a:bodyPr rtlCol="0" anchor="ctr"/>
-          <a:lstStyle/>
-          <a:p>
-            <a:pPr algn="ctr">
-              <a:defRPr>
-                <a:latin typeface="Inter"/>
-              </a:defRPr>
-            </a:pPr>
-          </a:p>
-        </p:txBody>
-      </p:sp>
-      <p:sp>
-        <p:nvSpPr>
-          <p:cNvPr id="18" name="TextBox 17"/>
-          <p:cNvSpPr txBox="1"/>
-          <p:nvPr/>
-        </p:nvSpPr>
-        <p:spPr>
-          <a:xfrm>
-            <a:off x="822960" y="5760720"/>
-            <a:ext cx="3063240" cy="128016"/>
-          </a:xfrm>
-          <a:prstGeom prst="rect">
-            <a:avLst/>
-          </a:prstGeom>
-          <a:noFill/>
-        </p:spPr>
-        <p:txBody>
-          <a:bodyPr wrap="none" lIns="9144" rIns="9144" tIns="9144" bIns="9144" anchor="t">
-            <a:spAutoFit/>
-          </a:bodyPr>
-          <a:lstStyle/>
-          <a:p>
-            <a:pPr algn="l">
-              <a:spcAft>
-                <a:spcPts val="0"/>
-              </a:spcAft>
-              <a:defRPr sz="620" b="1">
-                <a:solidFill>
-                  <a:srgbClr val="0D1117"/>
-                </a:solidFill>
-                <a:latin typeface="Inter"/>
-              </a:defRPr>
-            </a:pPr>
-            <a:r>
-              <a:rPr>
-                <a:latin typeface="Inter"/>
-              </a:rPr>
-              <a:t>OVERALL VIEW</a:t>
-            </a:r>
-          </a:p>
-        </p:txBody>
-      </p:sp>
-      <p:sp>
-        <p:nvSpPr>
-          <p:cNvPr id="19" name="TextBox 18"/>
-          <p:cNvSpPr txBox="1"/>
-          <p:nvPr/>
-        </p:nvSpPr>
-        <p:spPr>
-          <a:xfrm>
-            <a:off x="822960" y="5916168"/>
-            <a:ext cx="3063240" cy="182880"/>
-          </a:xfrm>
-          <a:prstGeom prst="rect">
-            <a:avLst/>
-          </a:prstGeom>
-          <a:noFill/>
-        </p:spPr>
-        <p:txBody>
-          <a:bodyPr wrap="none" lIns="9144" rIns="9144" tIns="9144" bIns="9144" anchor="t">
-            <a:spAutoFit/>
-          </a:bodyPr>
-          <a:lstStyle/>
-          <a:p>
-            <a:pPr algn="l">
-              <a:spcAft>
-                <a:spcPts val="0"/>
-              </a:spcAft>
-              <a:defRPr sz="900" b="1">
-                <a:solidFill>
-                  <a:srgbClr val="0D1117"/>
-                </a:solidFill>
-                <a:latin typeface="Inter"/>
-              </a:defRPr>
-            </a:pPr>
-            <a:r>
-              <a:rPr>
-                <a:latin typeface="Inter"/>
-              </a:rPr>
-              <a:t>Both lanes reconcile</a:t>
-            </a:r>
-          </a:p>
-        </p:txBody>
-      </p:sp>
-      <p:sp>
-        <p:nvSpPr>
-          <p:cNvPr id="20" name="TextBox 19"/>
-          <p:cNvSpPr txBox="1"/>
-          <p:nvPr/>
-        </p:nvSpPr>
-        <p:spPr>
-          <a:xfrm>
-            <a:off x="4297680" y="5733288"/>
-            <a:ext cx="3108960" cy="164592"/>
-          </a:xfrm>
-          <a:prstGeom prst="rect">
-            <a:avLst/>
-          </a:prstGeom>
-          <a:noFill/>
-        </p:spPr>
-        <p:txBody>
-          <a:bodyPr wrap="none" lIns="9144" rIns="9144" tIns="9144" bIns="9144" anchor="t">
-            <a:spAutoFit/>
-          </a:bodyPr>
-          <a:lstStyle/>
-          <a:p>
-            <a:pPr algn="l">
-              <a:spcAft>
-                <a:spcPts val="0"/>
-              </a:spcAft>
-              <a:defRPr sz="650" b="1">
-                <a:solidFill>
-                  <a:srgbClr val="8A94A1"/>
-                </a:solidFill>
-                <a:latin typeface="Inter"/>
-              </a:defRPr>
-            </a:pPr>
-            <a:r>
-              <a:rPr>
-                <a:latin typeface="Inter"/>
-              </a:rPr>
-              <a:t>SCOPE REVIEWED</a:t>
-            </a:r>
-          </a:p>
-        </p:txBody>
-      </p:sp>
-      <p:sp>
-        <p:nvSpPr>
-          <p:cNvPr id="21" name="TextBox 20"/>
-          <p:cNvSpPr txBox="1"/>
-          <p:nvPr/>
-        </p:nvSpPr>
-        <p:spPr>
-          <a:xfrm>
-            <a:off x="4297680" y="5934456"/>
-            <a:ext cx="3108960" cy="201168"/>
-          </a:xfrm>
-          <a:prstGeom prst="rect">
-            <a:avLst/>
-          </a:prstGeom>
-          <a:noFill/>
-        </p:spPr>
-        <p:txBody>
-          <a:bodyPr wrap="none" lIns="9144" rIns="9144" tIns="9144" bIns="9144" anchor="t">
-            <a:spAutoFit/>
-          </a:bodyPr>
-          <a:lstStyle/>
-          <a:p>
-            <a:pPr algn="l">
-              <a:spcAft>
-                <a:spcPts val="0"/>
-              </a:spcAft>
-              <a:defRPr sz="800" b="1">
-                <a:solidFill>
-                  <a:srgbClr val="FFFFFF"/>
-                </a:solidFill>
-                <a:latin typeface="Inter"/>
-              </a:defRPr>
-            </a:pPr>
-            <a:r>
-              <a:rPr>
-                <a:latin typeface="Inter"/>
-              </a:rPr>
-              <a:t>5 of 5 · Complete</a:t>
-            </a:r>
-          </a:p>
-        </p:txBody>
-      </p:sp>
-      <p:sp>
-        <p:nvSpPr>
-          <p:cNvPr id="22" name="TextBox 21"/>
+          <p:cNvPr id="17" name="TextBox 16"/>
           <p:cNvSpPr txBox="1"/>
           <p:nvPr/>
         </p:nvSpPr>
@@ -6461,7 +6245,7 @@
       </p:sp>
       <p:sp>
         <p:nvSpPr>
-          <p:cNvPr id="23" name="TextBox 22"/>
+          <p:cNvPr id="18" name="TextBox 17"/>
           <p:cNvSpPr txBox="1"/>
           <p:nvPr/>
         </p:nvSpPr>
@@ -6503,7 +6287,7 @@
       </p:sp>
       <p:sp>
         <p:nvSpPr>
-          <p:cNvPr id="24" name="TextBox 23"/>
+          <p:cNvPr id="19" name="TextBox 18"/>
           <p:cNvSpPr txBox="1"/>
           <p:nvPr/>
         </p:nvSpPr>
@@ -6619,7 +6403,7 @@
         <p:spPr>
           <a:xfrm>
             <a:off x="640080" y="329184"/>
-            <a:ext cx="5303520" cy="182880"/>
+            <a:ext cx="9875520" cy="182880"/>
           </a:xfrm>
           <a:prstGeom prst="rect">
             <a:avLst/>
@@ -6660,48 +6444,6 @@
         </p:nvSpPr>
         <p:spPr>
           <a:xfrm>
-            <a:off x="5897880" y="310896"/>
-            <a:ext cx="4800600" cy="256032"/>
-          </a:xfrm>
-          <a:prstGeom prst="rect">
-            <a:avLst/>
-          </a:prstGeom>
-          <a:noFill/>
-        </p:spPr>
-        <p:txBody>
-          <a:bodyPr wrap="none" lIns="9144" rIns="9144" tIns="9144" bIns="9144" anchor="t">
-            <a:spAutoFit/>
-          </a:bodyPr>
-          <a:lstStyle/>
-          <a:p>
-            <a:pPr algn="r">
-              <a:spcAft>
-                <a:spcPts val="0"/>
-              </a:spcAft>
-              <a:defRPr sz="680" b="1">
-                <a:solidFill>
-                  <a:srgbClr val="4F6B00"/>
-                </a:solidFill>
-                <a:latin typeface="Inter"/>
-              </a:defRPr>
-            </a:pPr>
-            <a:r>
-              <a:rPr>
-                <a:latin typeface="Inter"/>
-              </a:rPr>
-              <a:t>Illustrative, Gradient Maintained — demo data, not the client's holdings or managers</a:t>
-            </a:r>
-          </a:p>
-        </p:txBody>
-      </p:sp>
-      <p:sp>
-        <p:nvSpPr>
-          <p:cNvPr id="5" name="TextBox 4"/>
-          <p:cNvSpPr txBox="1"/>
-          <p:nvPr/>
-        </p:nvSpPr>
-        <p:spPr>
-          <a:xfrm>
             <a:off x="640080" y="566928"/>
             <a:ext cx="10058400" cy="530352"/>
           </a:xfrm>
@@ -6738,7 +6480,7 @@
       </p:sp>
       <p:sp>
         <p:nvSpPr>
-          <p:cNvPr id="6" name="Rectangle 5"/>
+          <p:cNvPr id="5" name="Rectangle 4"/>
           <p:cNvSpPr/>
           <p:nvPr/>
         </p:nvSpPr>
@@ -6787,7 +6529,7 @@
       </p:sp>
       <p:sp>
         <p:nvSpPr>
-          <p:cNvPr id="7" name="Rectangle 6"/>
+          <p:cNvPr id="6" name="Rectangle 5"/>
           <p:cNvSpPr/>
           <p:nvPr/>
         </p:nvSpPr>
@@ -6836,7 +6578,7 @@
       </p:sp>
       <p:sp>
         <p:nvSpPr>
-          <p:cNvPr id="8" name="TextBox 7"/>
+          <p:cNvPr id="7" name="TextBox 6"/>
           <p:cNvSpPr txBox="1"/>
           <p:nvPr/>
         </p:nvSpPr>
@@ -6878,7 +6620,7 @@
       </p:sp>
       <p:sp>
         <p:nvSpPr>
-          <p:cNvPr id="9" name="TextBox 8"/>
+          <p:cNvPr id="8" name="TextBox 7"/>
           <p:cNvSpPr txBox="1"/>
           <p:nvPr/>
         </p:nvSpPr>
@@ -6920,7 +6662,7 @@
       </p:sp>
       <p:graphicFrame>
         <p:nvGraphicFramePr>
-          <p:cNvPr id="10" name="Chart 9"/>
+          <p:cNvPr id="9" name="Chart 8"/>
           <p:cNvGraphicFramePr>
             <a:graphicFrameLocks noGrp="1"/>
           </p:cNvGraphicFramePr>
@@ -6938,7 +6680,7 @@
       </p:graphicFrame>
       <p:sp>
         <p:nvSpPr>
-          <p:cNvPr id="11" name="Rectangle 10"/>
+          <p:cNvPr id="10" name="Rectangle 9"/>
           <p:cNvSpPr/>
           <p:nvPr/>
         </p:nvSpPr>
@@ -6987,7 +6729,7 @@
       </p:sp>
       <p:sp>
         <p:nvSpPr>
-          <p:cNvPr id="12" name="TextBox 11"/>
+          <p:cNvPr id="11" name="TextBox 10"/>
           <p:cNvSpPr txBox="1"/>
           <p:nvPr/>
         </p:nvSpPr>
@@ -7029,7 +6771,7 @@
       </p:sp>
       <p:sp>
         <p:nvSpPr>
-          <p:cNvPr id="13" name="TextBox 12"/>
+          <p:cNvPr id="12" name="TextBox 11"/>
           <p:cNvSpPr txBox="1"/>
           <p:nvPr/>
         </p:nvSpPr>
@@ -7071,7 +6813,7 @@
       </p:sp>
       <p:sp>
         <p:nvSpPr>
-          <p:cNvPr id="14" name="TextBox 13"/>
+          <p:cNvPr id="13" name="TextBox 12"/>
           <p:cNvSpPr txBox="1"/>
           <p:nvPr/>
         </p:nvSpPr>
@@ -7187,7 +6929,7 @@
         <p:spPr>
           <a:xfrm>
             <a:off x="640080" y="329184"/>
-            <a:ext cx="5303520" cy="182880"/>
+            <a:ext cx="9875520" cy="182880"/>
           </a:xfrm>
           <a:prstGeom prst="rect">
             <a:avLst/>
@@ -7228,48 +6970,6 @@
         </p:nvSpPr>
         <p:spPr>
           <a:xfrm>
-            <a:off x="5897880" y="310896"/>
-            <a:ext cx="4800600" cy="256032"/>
-          </a:xfrm>
-          <a:prstGeom prst="rect">
-            <a:avLst/>
-          </a:prstGeom>
-          <a:noFill/>
-        </p:spPr>
-        <p:txBody>
-          <a:bodyPr wrap="none" lIns="9144" rIns="9144" tIns="9144" bIns="9144" anchor="t">
-            <a:spAutoFit/>
-          </a:bodyPr>
-          <a:lstStyle/>
-          <a:p>
-            <a:pPr algn="r">
-              <a:spcAft>
-                <a:spcPts val="0"/>
-              </a:spcAft>
-              <a:defRPr sz="680" b="1">
-                <a:solidFill>
-                  <a:srgbClr val="4F6B00"/>
-                </a:solidFill>
-                <a:latin typeface="Inter"/>
-              </a:defRPr>
-            </a:pPr>
-            <a:r>
-              <a:rPr>
-                <a:latin typeface="Inter"/>
-              </a:rPr>
-              <a:t>Illustrative, Gradient Maintained — demo data, not the client's holdings or managers</a:t>
-            </a:r>
-          </a:p>
-        </p:txBody>
-      </p:sp>
-      <p:sp>
-        <p:nvSpPr>
-          <p:cNvPr id="5" name="TextBox 4"/>
-          <p:cNvSpPr txBox="1"/>
-          <p:nvPr/>
-        </p:nvSpPr>
-        <p:spPr>
-          <a:xfrm>
             <a:off x="640080" y="566928"/>
             <a:ext cx="10058400" cy="530352"/>
           </a:xfrm>
@@ -7306,7 +7006,7 @@
       </p:sp>
       <p:sp>
         <p:nvSpPr>
-          <p:cNvPr id="6" name="Rectangle 5"/>
+          <p:cNvPr id="5" name="Rectangle 4"/>
           <p:cNvSpPr/>
           <p:nvPr/>
         </p:nvSpPr>
@@ -7355,7 +7055,7 @@
       </p:sp>
       <p:sp>
         <p:nvSpPr>
-          <p:cNvPr id="7" name="Rectangle 6"/>
+          <p:cNvPr id="6" name="Rectangle 5"/>
           <p:cNvSpPr/>
           <p:nvPr/>
         </p:nvSpPr>
@@ -7404,7 +7104,7 @@
       </p:sp>
       <p:sp>
         <p:nvSpPr>
-          <p:cNvPr id="8" name="TextBox 7"/>
+          <p:cNvPr id="7" name="TextBox 6"/>
           <p:cNvSpPr txBox="1"/>
           <p:nvPr/>
         </p:nvSpPr>
@@ -7446,7 +7146,7 @@
       </p:sp>
       <p:sp>
         <p:nvSpPr>
-          <p:cNvPr id="9" name="TextBox 8"/>
+          <p:cNvPr id="8" name="TextBox 7"/>
           <p:cNvSpPr txBox="1"/>
           <p:nvPr/>
         </p:nvSpPr>
@@ -7488,7 +7188,7 @@
       </p:sp>
       <p:graphicFrame>
         <p:nvGraphicFramePr>
-          <p:cNvPr id="10" name="Chart 9"/>
+          <p:cNvPr id="9" name="Chart 8"/>
           <p:cNvGraphicFramePr>
             <a:graphicFrameLocks noGrp="1"/>
           </p:cNvGraphicFramePr>
@@ -7506,7 +7206,7 @@
       </p:graphicFrame>
       <p:sp>
         <p:nvSpPr>
-          <p:cNvPr id="11" name="Rectangle 10"/>
+          <p:cNvPr id="10" name="Rectangle 9"/>
           <p:cNvSpPr/>
           <p:nvPr/>
         </p:nvSpPr>
@@ -7555,7 +7255,7 @@
       </p:sp>
       <p:sp>
         <p:nvSpPr>
-          <p:cNvPr id="12" name="TextBox 11"/>
+          <p:cNvPr id="11" name="TextBox 10"/>
           <p:cNvSpPr txBox="1"/>
           <p:nvPr/>
         </p:nvSpPr>
@@ -7597,7 +7297,7 @@
       </p:sp>
       <p:sp>
         <p:nvSpPr>
-          <p:cNvPr id="13" name="TextBox 12"/>
+          <p:cNvPr id="12" name="TextBox 11"/>
           <p:cNvSpPr txBox="1"/>
           <p:nvPr/>
         </p:nvSpPr>
@@ -7639,7 +7339,7 @@
       </p:sp>
       <p:sp>
         <p:nvSpPr>
-          <p:cNvPr id="14" name="TextBox 13"/>
+          <p:cNvPr id="13" name="TextBox 12"/>
           <p:cNvSpPr txBox="1"/>
           <p:nvPr/>
         </p:nvSpPr>
@@ -7755,7 +7455,7 @@
         <p:spPr>
           <a:xfrm>
             <a:off x="640080" y="329184"/>
-            <a:ext cx="5303520" cy="182880"/>
+            <a:ext cx="9875520" cy="182880"/>
           </a:xfrm>
           <a:prstGeom prst="rect">
             <a:avLst/>
@@ -7796,48 +7496,6 @@
         </p:nvSpPr>
         <p:spPr>
           <a:xfrm>
-            <a:off x="5897880" y="310896"/>
-            <a:ext cx="4800600" cy="256032"/>
-          </a:xfrm>
-          <a:prstGeom prst="rect">
-            <a:avLst/>
-          </a:prstGeom>
-          <a:noFill/>
-        </p:spPr>
-        <p:txBody>
-          <a:bodyPr wrap="none" lIns="9144" rIns="9144" tIns="9144" bIns="9144" anchor="t">
-            <a:spAutoFit/>
-          </a:bodyPr>
-          <a:lstStyle/>
-          <a:p>
-            <a:pPr algn="r">
-              <a:spcAft>
-                <a:spcPts val="0"/>
-              </a:spcAft>
-              <a:defRPr sz="680" b="1">
-                <a:solidFill>
-                  <a:srgbClr val="4F6B00"/>
-                </a:solidFill>
-                <a:latin typeface="Inter"/>
-              </a:defRPr>
-            </a:pPr>
-            <a:r>
-              <a:rPr>
-                <a:latin typeface="Inter"/>
-              </a:rPr>
-              <a:t>Illustrative, Gradient Maintained — demo data, not the client's holdings or managers</a:t>
-            </a:r>
-          </a:p>
-        </p:txBody>
-      </p:sp>
-      <p:sp>
-        <p:nvSpPr>
-          <p:cNvPr id="5" name="TextBox 4"/>
-          <p:cNvSpPr txBox="1"/>
-          <p:nvPr/>
-        </p:nvSpPr>
-        <p:spPr>
-          <a:xfrm>
             <a:off x="640080" y="566928"/>
             <a:ext cx="10058400" cy="530352"/>
           </a:xfrm>
@@ -7874,7 +7532,7 @@
       </p:sp>
       <p:sp>
         <p:nvSpPr>
-          <p:cNvPr id="6" name="Rectangle 5"/>
+          <p:cNvPr id="5" name="Rectangle 4"/>
           <p:cNvSpPr/>
           <p:nvPr/>
         </p:nvSpPr>
@@ -7923,7 +7581,7 @@
       </p:sp>
       <p:sp>
         <p:nvSpPr>
-          <p:cNvPr id="7" name="Rectangle 6"/>
+          <p:cNvPr id="6" name="Rectangle 5"/>
           <p:cNvSpPr/>
           <p:nvPr/>
         </p:nvSpPr>
@@ -7972,7 +7630,7 @@
       </p:sp>
       <p:sp>
         <p:nvSpPr>
-          <p:cNvPr id="8" name="TextBox 7"/>
+          <p:cNvPr id="7" name="TextBox 6"/>
           <p:cNvSpPr txBox="1"/>
           <p:nvPr/>
         </p:nvSpPr>
@@ -8014,7 +7672,7 @@
       </p:sp>
       <p:sp>
         <p:nvSpPr>
-          <p:cNvPr id="9" name="TextBox 8"/>
+          <p:cNvPr id="8" name="TextBox 7"/>
           <p:cNvSpPr txBox="1"/>
           <p:nvPr/>
         </p:nvSpPr>
@@ -8056,7 +7714,7 @@
       </p:sp>
       <p:graphicFrame>
         <p:nvGraphicFramePr>
-          <p:cNvPr id="10" name="Table 9"/>
+          <p:cNvPr id="9" name="Table 8"/>
           <p:cNvGraphicFramePr>
             <a:graphicFrameLocks noGrp="1"/>
           </p:cNvGraphicFramePr>
@@ -8627,7 +8285,7 @@
       </p:graphicFrame>
       <p:sp>
         <p:nvSpPr>
-          <p:cNvPr id="11" name="Rectangle 10"/>
+          <p:cNvPr id="10" name="Rectangle 9"/>
           <p:cNvSpPr/>
           <p:nvPr/>
         </p:nvSpPr>
@@ -8676,7 +8334,7 @@
       </p:sp>
       <p:sp>
         <p:nvSpPr>
-          <p:cNvPr id="12" name="TextBox 11"/>
+          <p:cNvPr id="11" name="TextBox 10"/>
           <p:cNvSpPr txBox="1"/>
           <p:nvPr/>
         </p:nvSpPr>
@@ -8718,7 +8376,7 @@
       </p:sp>
       <p:sp>
         <p:nvSpPr>
-          <p:cNvPr id="13" name="TextBox 12"/>
+          <p:cNvPr id="12" name="TextBox 11"/>
           <p:cNvSpPr txBox="1"/>
           <p:nvPr/>
         </p:nvSpPr>
@@ -8760,7 +8418,7 @@
       </p:sp>
       <p:sp>
         <p:nvSpPr>
-          <p:cNvPr id="14" name="TextBox 13"/>
+          <p:cNvPr id="13" name="TextBox 12"/>
           <p:cNvSpPr txBox="1"/>
           <p:nvPr/>
         </p:nvSpPr>
@@ -8876,7 +8534,7 @@
         <p:spPr>
           <a:xfrm>
             <a:off x="640080" y="329184"/>
-            <a:ext cx="5303520" cy="182880"/>
+            <a:ext cx="9875520" cy="182880"/>
           </a:xfrm>
           <a:prstGeom prst="rect">
             <a:avLst/>
@@ -8917,48 +8575,6 @@
         </p:nvSpPr>
         <p:spPr>
           <a:xfrm>
-            <a:off x="5897880" y="310896"/>
-            <a:ext cx="4800600" cy="256032"/>
-          </a:xfrm>
-          <a:prstGeom prst="rect">
-            <a:avLst/>
-          </a:prstGeom>
-          <a:noFill/>
-        </p:spPr>
-        <p:txBody>
-          <a:bodyPr wrap="none" lIns="9144" rIns="9144" tIns="9144" bIns="9144" anchor="t">
-            <a:spAutoFit/>
-          </a:bodyPr>
-          <a:lstStyle/>
-          <a:p>
-            <a:pPr algn="r">
-              <a:spcAft>
-                <a:spcPts val="0"/>
-              </a:spcAft>
-              <a:defRPr sz="680" b="1">
-                <a:solidFill>
-                  <a:srgbClr val="4F6B00"/>
-                </a:solidFill>
-                <a:latin typeface="Inter"/>
-              </a:defRPr>
-            </a:pPr>
-            <a:r>
-              <a:rPr>
-                <a:latin typeface="Inter"/>
-              </a:rPr>
-              <a:t>Illustrative, Gradient Maintained — demo data, not the client's holdings or managers</a:t>
-            </a:r>
-          </a:p>
-        </p:txBody>
-      </p:sp>
-      <p:sp>
-        <p:nvSpPr>
-          <p:cNvPr id="5" name="TextBox 4"/>
-          <p:cNvSpPr txBox="1"/>
-          <p:nvPr/>
-        </p:nvSpPr>
-        <p:spPr>
-          <a:xfrm>
             <a:off x="640080" y="566928"/>
             <a:ext cx="10058400" cy="530352"/>
           </a:xfrm>
@@ -8995,7 +8611,7 @@
       </p:sp>
       <p:sp>
         <p:nvSpPr>
-          <p:cNvPr id="6" name="Rectangle 5"/>
+          <p:cNvPr id="5" name="Rectangle 4"/>
           <p:cNvSpPr/>
           <p:nvPr/>
         </p:nvSpPr>
@@ -9044,7 +8660,7 @@
       </p:sp>
       <p:sp>
         <p:nvSpPr>
-          <p:cNvPr id="7" name="Rectangle 6"/>
+          <p:cNvPr id="6" name="Rectangle 5"/>
           <p:cNvSpPr/>
           <p:nvPr/>
         </p:nvSpPr>
@@ -9093,7 +8709,7 @@
       </p:sp>
       <p:sp>
         <p:nvSpPr>
-          <p:cNvPr id="8" name="TextBox 7"/>
+          <p:cNvPr id="7" name="TextBox 6"/>
           <p:cNvSpPr txBox="1"/>
           <p:nvPr/>
         </p:nvSpPr>
@@ -9135,7 +8751,7 @@
       </p:sp>
       <p:sp>
         <p:nvSpPr>
-          <p:cNvPr id="9" name="TextBox 8"/>
+          <p:cNvPr id="8" name="TextBox 7"/>
           <p:cNvSpPr txBox="1"/>
           <p:nvPr/>
         </p:nvSpPr>
@@ -9177,7 +8793,7 @@
       </p:sp>
       <p:graphicFrame>
         <p:nvGraphicFramePr>
-          <p:cNvPr id="10" name="Chart 9"/>
+          <p:cNvPr id="9" name="Chart 8"/>
           <p:cNvGraphicFramePr>
             <a:graphicFrameLocks noGrp="1"/>
           </p:cNvGraphicFramePr>
@@ -9195,7 +8811,7 @@
       </p:graphicFrame>
       <p:sp>
         <p:nvSpPr>
-          <p:cNvPr id="11" name="Rectangle 10"/>
+          <p:cNvPr id="10" name="Rectangle 9"/>
           <p:cNvSpPr/>
           <p:nvPr/>
         </p:nvSpPr>
@@ -9244,7 +8860,7 @@
       </p:sp>
       <p:sp>
         <p:nvSpPr>
-          <p:cNvPr id="12" name="TextBox 11"/>
+          <p:cNvPr id="11" name="TextBox 10"/>
           <p:cNvSpPr txBox="1"/>
           <p:nvPr/>
         </p:nvSpPr>
@@ -9286,7 +8902,7 @@
       </p:sp>
       <p:graphicFrame>
         <p:nvGraphicFramePr>
-          <p:cNvPr id="13" name="Chart 12"/>
+          <p:cNvPr id="12" name="Chart 11"/>
           <p:cNvGraphicFramePr>
             <a:graphicFrameLocks noGrp="1"/>
           </p:cNvGraphicFramePr>
@@ -9304,7 +8920,7 @@
       </p:graphicFrame>
       <p:sp>
         <p:nvSpPr>
-          <p:cNvPr id="14" name="Rectangle 13"/>
+          <p:cNvPr id="13" name="Rectangle 12"/>
           <p:cNvSpPr/>
           <p:nvPr/>
         </p:nvSpPr>
@@ -9353,7 +8969,7 @@
       </p:sp>
       <p:sp>
         <p:nvSpPr>
-          <p:cNvPr id="15" name="TextBox 14"/>
+          <p:cNvPr id="14" name="TextBox 13"/>
           <p:cNvSpPr txBox="1"/>
           <p:nvPr/>
         </p:nvSpPr>
@@ -9395,7 +9011,7 @@
       </p:sp>
       <p:sp>
         <p:nvSpPr>
-          <p:cNvPr id="16" name="TextBox 15"/>
+          <p:cNvPr id="15" name="TextBox 14"/>
           <p:cNvSpPr txBox="1"/>
           <p:nvPr/>
         </p:nvSpPr>
@@ -9437,7 +9053,7 @@
       </p:sp>
       <p:sp>
         <p:nvSpPr>
-          <p:cNvPr id="17" name="TextBox 16"/>
+          <p:cNvPr id="16" name="TextBox 15"/>
           <p:cNvSpPr txBox="1"/>
           <p:nvPr/>
         </p:nvSpPr>
@@ -9553,7 +9169,7 @@
         <p:spPr>
           <a:xfrm>
             <a:off x="640080" y="329184"/>
-            <a:ext cx="5303520" cy="182880"/>
+            <a:ext cx="9875520" cy="182880"/>
           </a:xfrm>
           <a:prstGeom prst="rect">
             <a:avLst/>
@@ -9594,48 +9210,6 @@
         </p:nvSpPr>
         <p:spPr>
           <a:xfrm>
-            <a:off x="5897880" y="310896"/>
-            <a:ext cx="4800600" cy="256032"/>
-          </a:xfrm>
-          <a:prstGeom prst="rect">
-            <a:avLst/>
-          </a:prstGeom>
-          <a:noFill/>
-        </p:spPr>
-        <p:txBody>
-          <a:bodyPr wrap="none" lIns="9144" rIns="9144" tIns="9144" bIns="9144" anchor="t">
-            <a:spAutoFit/>
-          </a:bodyPr>
-          <a:lstStyle/>
-          <a:p>
-            <a:pPr algn="r">
-              <a:spcAft>
-                <a:spcPts val="0"/>
-              </a:spcAft>
-              <a:defRPr sz="680" b="1">
-                <a:solidFill>
-                  <a:srgbClr val="4F6B00"/>
-                </a:solidFill>
-                <a:latin typeface="Inter"/>
-              </a:defRPr>
-            </a:pPr>
-            <a:r>
-              <a:rPr>
-                <a:latin typeface="Inter"/>
-              </a:rPr>
-              <a:t>Illustrative, Gradient Maintained — demo data, not the client's holdings or managers</a:t>
-            </a:r>
-          </a:p>
-        </p:txBody>
-      </p:sp>
-      <p:sp>
-        <p:nvSpPr>
-          <p:cNvPr id="5" name="TextBox 4"/>
-          <p:cNvSpPr txBox="1"/>
-          <p:nvPr/>
-        </p:nvSpPr>
-        <p:spPr>
-          <a:xfrm>
             <a:off x="640080" y="566928"/>
             <a:ext cx="10058400" cy="530352"/>
           </a:xfrm>
@@ -9672,7 +9246,7 @@
       </p:sp>
       <p:sp>
         <p:nvSpPr>
-          <p:cNvPr id="6" name="Rectangle 5"/>
+          <p:cNvPr id="5" name="Rectangle 4"/>
           <p:cNvSpPr/>
           <p:nvPr/>
         </p:nvSpPr>
@@ -9721,7 +9295,7 @@
       </p:sp>
       <p:sp>
         <p:nvSpPr>
-          <p:cNvPr id="7" name="Rectangle 6"/>
+          <p:cNvPr id="6" name="Rectangle 5"/>
           <p:cNvSpPr/>
           <p:nvPr/>
         </p:nvSpPr>
@@ -9770,7 +9344,7 @@
       </p:sp>
       <p:sp>
         <p:nvSpPr>
-          <p:cNvPr id="8" name="TextBox 7"/>
+          <p:cNvPr id="7" name="TextBox 6"/>
           <p:cNvSpPr txBox="1"/>
           <p:nvPr/>
         </p:nvSpPr>
@@ -9812,7 +9386,7 @@
       </p:sp>
       <p:sp>
         <p:nvSpPr>
-          <p:cNvPr id="9" name="TextBox 8"/>
+          <p:cNvPr id="8" name="TextBox 7"/>
           <p:cNvSpPr txBox="1"/>
           <p:nvPr/>
         </p:nvSpPr>
@@ -9854,7 +9428,7 @@
       </p:sp>
       <p:graphicFrame>
         <p:nvGraphicFramePr>
-          <p:cNvPr id="10" name="Chart 9"/>
+          <p:cNvPr id="9" name="Chart 8"/>
           <p:cNvGraphicFramePr>
             <a:graphicFrameLocks noGrp="1"/>
           </p:cNvGraphicFramePr>
@@ -9872,7 +9446,7 @@
       </p:graphicFrame>
       <p:sp>
         <p:nvSpPr>
-          <p:cNvPr id="11" name="Rectangle 10"/>
+          <p:cNvPr id="10" name="Rectangle 9"/>
           <p:cNvSpPr/>
           <p:nvPr/>
         </p:nvSpPr>
@@ -9921,7 +9495,7 @@
       </p:sp>
       <p:sp>
         <p:nvSpPr>
-          <p:cNvPr id="12" name="TextBox 11"/>
+          <p:cNvPr id="11" name="TextBox 10"/>
           <p:cNvSpPr txBox="1"/>
           <p:nvPr/>
         </p:nvSpPr>
@@ -9963,7 +9537,7 @@
       </p:sp>
       <p:sp>
         <p:nvSpPr>
-          <p:cNvPr id="13" name="TextBox 12"/>
+          <p:cNvPr id="12" name="TextBox 11"/>
           <p:cNvSpPr txBox="1"/>
           <p:nvPr/>
         </p:nvSpPr>
@@ -10005,7 +9579,7 @@
       </p:sp>
       <p:sp>
         <p:nvSpPr>
-          <p:cNvPr id="14" name="TextBox 13"/>
+          <p:cNvPr id="13" name="TextBox 12"/>
           <p:cNvSpPr txBox="1"/>
           <p:nvPr/>
         </p:nvSpPr>
@@ -10121,7 +9695,7 @@
         <p:spPr>
           <a:xfrm>
             <a:off x="640080" y="329184"/>
-            <a:ext cx="5303520" cy="182880"/>
+            <a:ext cx="9875520" cy="182880"/>
           </a:xfrm>
           <a:prstGeom prst="rect">
             <a:avLst/>
@@ -10162,48 +9736,6 @@
         </p:nvSpPr>
         <p:spPr>
           <a:xfrm>
-            <a:off x="5897880" y="310896"/>
-            <a:ext cx="4800600" cy="256032"/>
-          </a:xfrm>
-          <a:prstGeom prst="rect">
-            <a:avLst/>
-          </a:prstGeom>
-          <a:noFill/>
-        </p:spPr>
-        <p:txBody>
-          <a:bodyPr wrap="none" lIns="9144" rIns="9144" tIns="9144" bIns="9144" anchor="t">
-            <a:spAutoFit/>
-          </a:bodyPr>
-          <a:lstStyle/>
-          <a:p>
-            <a:pPr algn="r">
-              <a:spcAft>
-                <a:spcPts val="0"/>
-              </a:spcAft>
-              <a:defRPr sz="680" b="1">
-                <a:solidFill>
-                  <a:srgbClr val="4F6B00"/>
-                </a:solidFill>
-                <a:latin typeface="Inter"/>
-              </a:defRPr>
-            </a:pPr>
-            <a:r>
-              <a:rPr>
-                <a:latin typeface="Inter"/>
-              </a:rPr>
-              <a:t>Illustrative, Gradient Maintained — demo data, not the client's holdings or managers</a:t>
-            </a:r>
-          </a:p>
-        </p:txBody>
-      </p:sp>
-      <p:sp>
-        <p:nvSpPr>
-          <p:cNvPr id="5" name="TextBox 4"/>
-          <p:cNvSpPr txBox="1"/>
-          <p:nvPr/>
-        </p:nvSpPr>
-        <p:spPr>
-          <a:xfrm>
             <a:off x="640080" y="566928"/>
             <a:ext cx="10058400" cy="530352"/>
           </a:xfrm>
@@ -10240,7 +9772,7 @@
       </p:sp>
       <p:sp>
         <p:nvSpPr>
-          <p:cNvPr id="6" name="Rectangle 5"/>
+          <p:cNvPr id="5" name="Rectangle 4"/>
           <p:cNvSpPr/>
           <p:nvPr/>
         </p:nvSpPr>
@@ -10289,7 +9821,7 @@
       </p:sp>
       <p:sp>
         <p:nvSpPr>
-          <p:cNvPr id="7" name="Rectangle 6"/>
+          <p:cNvPr id="6" name="Rectangle 5"/>
           <p:cNvSpPr/>
           <p:nvPr/>
         </p:nvSpPr>
@@ -10338,7 +9870,7 @@
       </p:sp>
       <p:sp>
         <p:nvSpPr>
-          <p:cNvPr id="8" name="TextBox 7"/>
+          <p:cNvPr id="7" name="TextBox 6"/>
           <p:cNvSpPr txBox="1"/>
           <p:nvPr/>
         </p:nvSpPr>
@@ -10380,7 +9912,7 @@
       </p:sp>
       <p:sp>
         <p:nvSpPr>
-          <p:cNvPr id="9" name="TextBox 8"/>
+          <p:cNvPr id="8" name="TextBox 7"/>
           <p:cNvSpPr txBox="1"/>
           <p:nvPr/>
         </p:nvSpPr>
@@ -10422,7 +9954,7 @@
       </p:sp>
       <p:graphicFrame>
         <p:nvGraphicFramePr>
-          <p:cNvPr id="10" name="Table 9"/>
+          <p:cNvPr id="9" name="Table 8"/>
           <p:cNvGraphicFramePr>
             <a:graphicFrameLocks noGrp="1"/>
           </p:cNvGraphicFramePr>
@@ -10864,7 +10396,7 @@
       </p:graphicFrame>
       <p:sp>
         <p:nvSpPr>
-          <p:cNvPr id="11" name="TextBox 10"/>
+          <p:cNvPr id="10" name="TextBox 9"/>
           <p:cNvSpPr txBox="1"/>
           <p:nvPr/>
         </p:nvSpPr>
@@ -10906,7 +10438,7 @@
       </p:sp>
       <p:graphicFrame>
         <p:nvGraphicFramePr>
-          <p:cNvPr id="12" name="Table 11"/>
+          <p:cNvPr id="11" name="Table 10"/>
           <p:cNvGraphicFramePr>
             <a:graphicFrameLocks noGrp="1"/>
           </p:cNvGraphicFramePr>
@@ -11483,7 +11015,7 @@
       </p:graphicFrame>
       <p:sp>
         <p:nvSpPr>
-          <p:cNvPr id="13" name="TextBox 12"/>
+          <p:cNvPr id="12" name="TextBox 11"/>
           <p:cNvSpPr txBox="1"/>
           <p:nvPr/>
         </p:nvSpPr>
@@ -11525,7 +11057,7 @@
       </p:sp>
       <p:sp>
         <p:nvSpPr>
-          <p:cNvPr id="14" name="Rectangle 13"/>
+          <p:cNvPr id="13" name="Rectangle 12"/>
           <p:cNvSpPr/>
           <p:nvPr/>
         </p:nvSpPr>
@@ -11574,7 +11106,7 @@
       </p:sp>
       <p:sp>
         <p:nvSpPr>
-          <p:cNvPr id="15" name="Rectangle 14"/>
+          <p:cNvPr id="14" name="Rectangle 13"/>
           <p:cNvSpPr/>
           <p:nvPr/>
         </p:nvSpPr>
@@ -11623,7 +11155,7 @@
       </p:sp>
       <p:sp>
         <p:nvSpPr>
-          <p:cNvPr id="16" name="TextBox 15"/>
+          <p:cNvPr id="15" name="TextBox 14"/>
           <p:cNvSpPr txBox="1"/>
           <p:nvPr/>
         </p:nvSpPr>
@@ -11665,7 +11197,7 @@
       </p:sp>
       <p:sp>
         <p:nvSpPr>
-          <p:cNvPr id="17" name="TextBox 16"/>
+          <p:cNvPr id="16" name="TextBox 15"/>
           <p:cNvSpPr txBox="1"/>
           <p:nvPr/>
         </p:nvSpPr>
@@ -11707,7 +11239,7 @@
       </p:sp>
       <p:sp>
         <p:nvSpPr>
-          <p:cNvPr id="18" name="Rectangle 17"/>
+          <p:cNvPr id="17" name="Rectangle 16"/>
           <p:cNvSpPr/>
           <p:nvPr/>
         </p:nvSpPr>
@@ -11756,7 +11288,7 @@
       </p:sp>
       <p:sp>
         <p:nvSpPr>
-          <p:cNvPr id="19" name="TextBox 18"/>
+          <p:cNvPr id="18" name="TextBox 17"/>
           <p:cNvSpPr txBox="1"/>
           <p:nvPr/>
         </p:nvSpPr>
@@ -11798,7 +11330,7 @@
       </p:sp>
       <p:sp>
         <p:nvSpPr>
-          <p:cNvPr id="20" name="TextBox 19"/>
+          <p:cNvPr id="19" name="TextBox 18"/>
           <p:cNvSpPr txBox="1"/>
           <p:nvPr/>
         </p:nvSpPr>
@@ -11840,7 +11372,7 @@
       </p:sp>
       <p:sp>
         <p:nvSpPr>
-          <p:cNvPr id="21" name="TextBox 20"/>
+          <p:cNvPr id="20" name="TextBox 19"/>
           <p:cNvSpPr txBox="1"/>
           <p:nvPr/>
         </p:nvSpPr>
@@ -11956,7 +11488,7 @@
         <p:spPr>
           <a:xfrm>
             <a:off x="640080" y="329184"/>
-            <a:ext cx="5303520" cy="182880"/>
+            <a:ext cx="9875520" cy="182880"/>
           </a:xfrm>
           <a:prstGeom prst="rect">
             <a:avLst/>
@@ -11997,48 +11529,6 @@
         </p:nvSpPr>
         <p:spPr>
           <a:xfrm>
-            <a:off x="5897880" y="310896"/>
-            <a:ext cx="4800600" cy="256032"/>
-          </a:xfrm>
-          <a:prstGeom prst="rect">
-            <a:avLst/>
-          </a:prstGeom>
-          <a:noFill/>
-        </p:spPr>
-        <p:txBody>
-          <a:bodyPr wrap="none" lIns="9144" rIns="9144" tIns="9144" bIns="9144" anchor="t">
-            <a:spAutoFit/>
-          </a:bodyPr>
-          <a:lstStyle/>
-          <a:p>
-            <a:pPr algn="r">
-              <a:spcAft>
-                <a:spcPts val="0"/>
-              </a:spcAft>
-              <a:defRPr sz="680" b="1">
-                <a:solidFill>
-                  <a:srgbClr val="4F6B00"/>
-                </a:solidFill>
-                <a:latin typeface="Inter"/>
-              </a:defRPr>
-            </a:pPr>
-            <a:r>
-              <a:rPr>
-                <a:latin typeface="Inter"/>
-              </a:rPr>
-              <a:t>Illustrative, Gradient Maintained — demo data, not the client's holdings or managers</a:t>
-            </a:r>
-          </a:p>
-        </p:txBody>
-      </p:sp>
-      <p:sp>
-        <p:nvSpPr>
-          <p:cNvPr id="5" name="TextBox 4"/>
-          <p:cNvSpPr txBox="1"/>
-          <p:nvPr/>
-        </p:nvSpPr>
-        <p:spPr>
-          <a:xfrm>
             <a:off x="640080" y="566928"/>
             <a:ext cx="10058400" cy="530352"/>
           </a:xfrm>
@@ -12075,7 +11565,7 @@
       </p:sp>
       <p:sp>
         <p:nvSpPr>
-          <p:cNvPr id="6" name="Rectangle 5"/>
+          <p:cNvPr id="5" name="Rectangle 4"/>
           <p:cNvSpPr/>
           <p:nvPr/>
         </p:nvSpPr>
@@ -12124,7 +11614,7 @@
       </p:sp>
       <p:sp>
         <p:nvSpPr>
-          <p:cNvPr id="7" name="Rectangle 6"/>
+          <p:cNvPr id="6" name="Rectangle 5"/>
           <p:cNvSpPr/>
           <p:nvPr/>
         </p:nvSpPr>
@@ -12173,7 +11663,7 @@
       </p:sp>
       <p:sp>
         <p:nvSpPr>
-          <p:cNvPr id="8" name="TextBox 7"/>
+          <p:cNvPr id="7" name="TextBox 6"/>
           <p:cNvSpPr txBox="1"/>
           <p:nvPr/>
         </p:nvSpPr>
@@ -12215,7 +11705,7 @@
       </p:sp>
       <p:sp>
         <p:nvSpPr>
-          <p:cNvPr id="9" name="TextBox 8"/>
+          <p:cNvPr id="8" name="TextBox 7"/>
           <p:cNvSpPr txBox="1"/>
           <p:nvPr/>
         </p:nvSpPr>
@@ -12257,7 +11747,7 @@
       </p:sp>
       <p:graphicFrame>
         <p:nvGraphicFramePr>
-          <p:cNvPr id="10" name="Chart 9"/>
+          <p:cNvPr id="9" name="Chart 8"/>
           <p:cNvGraphicFramePr>
             <a:graphicFrameLocks noGrp="1"/>
           </p:cNvGraphicFramePr>
@@ -12275,7 +11765,7 @@
       </p:graphicFrame>
       <p:sp>
         <p:nvSpPr>
-          <p:cNvPr id="11" name="Rectangle 10"/>
+          <p:cNvPr id="10" name="Rectangle 9"/>
           <p:cNvSpPr/>
           <p:nvPr/>
         </p:nvSpPr>
@@ -12324,7 +11814,7 @@
       </p:sp>
       <p:sp>
         <p:nvSpPr>
-          <p:cNvPr id="12" name="TextBox 11"/>
+          <p:cNvPr id="11" name="TextBox 10"/>
           <p:cNvSpPr txBox="1"/>
           <p:nvPr/>
         </p:nvSpPr>
@@ -12366,7 +11856,7 @@
       </p:sp>
       <p:sp>
         <p:nvSpPr>
-          <p:cNvPr id="13" name="TextBox 12"/>
+          <p:cNvPr id="12" name="TextBox 11"/>
           <p:cNvSpPr txBox="1"/>
           <p:nvPr/>
         </p:nvSpPr>
@@ -12408,7 +11898,7 @@
       </p:sp>
       <p:sp>
         <p:nvSpPr>
-          <p:cNvPr id="14" name="TextBox 13"/>
+          <p:cNvPr id="13" name="TextBox 12"/>
           <p:cNvSpPr txBox="1"/>
           <p:nvPr/>
         </p:nvSpPr>
@@ -12524,7 +12014,7 @@
         <p:spPr>
           <a:xfrm>
             <a:off x="640080" y="329184"/>
-            <a:ext cx="5303520" cy="182880"/>
+            <a:ext cx="9875520" cy="182880"/>
           </a:xfrm>
           <a:prstGeom prst="rect">
             <a:avLst/>
@@ -12565,48 +12055,6 @@
         </p:nvSpPr>
         <p:spPr>
           <a:xfrm>
-            <a:off x="5897880" y="310896"/>
-            <a:ext cx="4800600" cy="256032"/>
-          </a:xfrm>
-          <a:prstGeom prst="rect">
-            <a:avLst/>
-          </a:prstGeom>
-          <a:noFill/>
-        </p:spPr>
-        <p:txBody>
-          <a:bodyPr wrap="none" lIns="9144" rIns="9144" tIns="9144" bIns="9144" anchor="t">
-            <a:spAutoFit/>
-          </a:bodyPr>
-          <a:lstStyle/>
-          <a:p>
-            <a:pPr algn="r">
-              <a:spcAft>
-                <a:spcPts val="0"/>
-              </a:spcAft>
-              <a:defRPr sz="680" b="1">
-                <a:solidFill>
-                  <a:srgbClr val="4F6B00"/>
-                </a:solidFill>
-                <a:latin typeface="Inter"/>
-              </a:defRPr>
-            </a:pPr>
-            <a:r>
-              <a:rPr>
-                <a:latin typeface="Inter"/>
-              </a:rPr>
-              <a:t>Illustrative, Gradient Maintained — demo data, not the client's holdings or managers</a:t>
-            </a:r>
-          </a:p>
-        </p:txBody>
-      </p:sp>
-      <p:sp>
-        <p:nvSpPr>
-          <p:cNvPr id="5" name="TextBox 4"/>
-          <p:cNvSpPr txBox="1"/>
-          <p:nvPr/>
-        </p:nvSpPr>
-        <p:spPr>
-          <a:xfrm>
             <a:off x="640080" y="566928"/>
             <a:ext cx="10058400" cy="530352"/>
           </a:xfrm>
@@ -12643,7 +12091,7 @@
       </p:sp>
       <p:sp>
         <p:nvSpPr>
-          <p:cNvPr id="6" name="Rectangle 5"/>
+          <p:cNvPr id="5" name="Rectangle 4"/>
           <p:cNvSpPr/>
           <p:nvPr/>
         </p:nvSpPr>
@@ -12692,7 +12140,7 @@
       </p:sp>
       <p:sp>
         <p:nvSpPr>
-          <p:cNvPr id="7" name="Rectangle 6"/>
+          <p:cNvPr id="6" name="Rectangle 5"/>
           <p:cNvSpPr/>
           <p:nvPr/>
         </p:nvSpPr>
@@ -12741,7 +12189,7 @@
       </p:sp>
       <p:sp>
         <p:nvSpPr>
-          <p:cNvPr id="8" name="TextBox 7"/>
+          <p:cNvPr id="7" name="TextBox 6"/>
           <p:cNvSpPr txBox="1"/>
           <p:nvPr/>
         </p:nvSpPr>
@@ -12783,7 +12231,7 @@
       </p:sp>
       <p:sp>
         <p:nvSpPr>
-          <p:cNvPr id="9" name="TextBox 8"/>
+          <p:cNvPr id="8" name="TextBox 7"/>
           <p:cNvSpPr txBox="1"/>
           <p:nvPr/>
         </p:nvSpPr>
@@ -12825,7 +12273,7 @@
       </p:sp>
       <p:sp>
         <p:nvSpPr>
-          <p:cNvPr id="10" name="Oval 9"/>
+          <p:cNvPr id="9" name="Oval 8"/>
           <p:cNvSpPr/>
           <p:nvPr/>
         </p:nvSpPr>
@@ -12874,7 +12322,7 @@
       </p:sp>
       <p:sp>
         <p:nvSpPr>
-          <p:cNvPr id="11" name="TextBox 10"/>
+          <p:cNvPr id="10" name="TextBox 9"/>
           <p:cNvSpPr txBox="1"/>
           <p:nvPr/>
         </p:nvSpPr>
@@ -12916,7 +12364,7 @@
       </p:sp>
       <p:sp>
         <p:nvSpPr>
-          <p:cNvPr id="12" name="Oval 11"/>
+          <p:cNvPr id="11" name="Oval 10"/>
           <p:cNvSpPr/>
           <p:nvPr/>
         </p:nvSpPr>
@@ -12965,7 +12413,7 @@
       </p:sp>
       <p:sp>
         <p:nvSpPr>
-          <p:cNvPr id="13" name="TextBox 12"/>
+          <p:cNvPr id="12" name="TextBox 11"/>
           <p:cNvSpPr txBox="1"/>
           <p:nvPr/>
         </p:nvSpPr>
@@ -13007,7 +12455,7 @@
       </p:sp>
       <p:sp>
         <p:nvSpPr>
-          <p:cNvPr id="14" name="TextBox 13"/>
+          <p:cNvPr id="13" name="TextBox 12"/>
           <p:cNvSpPr txBox="1"/>
           <p:nvPr/>
         </p:nvSpPr>
@@ -13049,7 +12497,7 @@
       </p:sp>
       <p:sp>
         <p:nvSpPr>
-          <p:cNvPr id="15" name="Rectangle 14"/>
+          <p:cNvPr id="14" name="Rectangle 13"/>
           <p:cNvSpPr/>
           <p:nvPr/>
         </p:nvSpPr>
@@ -13098,7 +12546,7 @@
       </p:sp>
       <p:sp>
         <p:nvSpPr>
-          <p:cNvPr id="16" name="Rectangle 15"/>
+          <p:cNvPr id="15" name="Rectangle 14"/>
           <p:cNvSpPr/>
           <p:nvPr/>
         </p:nvSpPr>
@@ -13147,7 +12595,7 @@
       </p:sp>
       <p:sp>
         <p:nvSpPr>
-          <p:cNvPr id="17" name="Oval 16"/>
+          <p:cNvPr id="16" name="Oval 15"/>
           <p:cNvSpPr/>
           <p:nvPr/>
         </p:nvSpPr>
@@ -13196,7 +12644,7 @@
       </p:sp>
       <p:sp>
         <p:nvSpPr>
-          <p:cNvPr id="18" name="Oval 17"/>
+          <p:cNvPr id="17" name="Oval 16"/>
           <p:cNvSpPr/>
           <p:nvPr/>
         </p:nvSpPr>
@@ -13245,7 +12693,7 @@
       </p:sp>
       <p:sp>
         <p:nvSpPr>
-          <p:cNvPr id="19" name="TextBox 18"/>
+          <p:cNvPr id="18" name="TextBox 17"/>
           <p:cNvSpPr txBox="1"/>
           <p:nvPr/>
         </p:nvSpPr>
@@ -13287,7 +12735,7 @@
       </p:sp>
       <p:sp>
         <p:nvSpPr>
-          <p:cNvPr id="20" name="TextBox 19"/>
+          <p:cNvPr id="19" name="TextBox 18"/>
           <p:cNvSpPr txBox="1"/>
           <p:nvPr/>
         </p:nvSpPr>
@@ -13329,7 +12777,7 @@
       </p:sp>
       <p:sp>
         <p:nvSpPr>
-          <p:cNvPr id="21" name="Rectangle 20"/>
+          <p:cNvPr id="20" name="Rectangle 19"/>
           <p:cNvSpPr/>
           <p:nvPr/>
         </p:nvSpPr>
@@ -13378,7 +12826,7 @@
       </p:sp>
       <p:sp>
         <p:nvSpPr>
-          <p:cNvPr id="22" name="Rectangle 21"/>
+          <p:cNvPr id="21" name="Rectangle 20"/>
           <p:cNvSpPr/>
           <p:nvPr/>
         </p:nvSpPr>
@@ -13427,7 +12875,7 @@
       </p:sp>
       <p:sp>
         <p:nvSpPr>
-          <p:cNvPr id="23" name="Oval 22"/>
+          <p:cNvPr id="22" name="Oval 21"/>
           <p:cNvSpPr/>
           <p:nvPr/>
         </p:nvSpPr>
@@ -13476,7 +12924,7 @@
       </p:sp>
       <p:sp>
         <p:nvSpPr>
-          <p:cNvPr id="24" name="Oval 23"/>
+          <p:cNvPr id="23" name="Oval 22"/>
           <p:cNvSpPr/>
           <p:nvPr/>
         </p:nvSpPr>
@@ -13525,7 +12973,7 @@
       </p:sp>
       <p:sp>
         <p:nvSpPr>
-          <p:cNvPr id="25" name="TextBox 24"/>
+          <p:cNvPr id="24" name="TextBox 23"/>
           <p:cNvSpPr txBox="1"/>
           <p:nvPr/>
         </p:nvSpPr>
@@ -13567,7 +13015,7 @@
       </p:sp>
       <p:sp>
         <p:nvSpPr>
-          <p:cNvPr id="26" name="TextBox 25"/>
+          <p:cNvPr id="25" name="TextBox 24"/>
           <p:cNvSpPr txBox="1"/>
           <p:nvPr/>
         </p:nvSpPr>
@@ -13609,7 +13057,7 @@
       </p:sp>
       <p:sp>
         <p:nvSpPr>
-          <p:cNvPr id="27" name="Rectangle 26"/>
+          <p:cNvPr id="26" name="Rectangle 25"/>
           <p:cNvSpPr/>
           <p:nvPr/>
         </p:nvSpPr>
@@ -13658,7 +13106,7 @@
       </p:sp>
       <p:sp>
         <p:nvSpPr>
-          <p:cNvPr id="28" name="Rectangle 27"/>
+          <p:cNvPr id="27" name="Rectangle 26"/>
           <p:cNvSpPr/>
           <p:nvPr/>
         </p:nvSpPr>
@@ -13707,7 +13155,7 @@
       </p:sp>
       <p:sp>
         <p:nvSpPr>
-          <p:cNvPr id="29" name="Oval 28"/>
+          <p:cNvPr id="28" name="Oval 27"/>
           <p:cNvSpPr/>
           <p:nvPr/>
         </p:nvSpPr>
@@ -13756,7 +13204,7 @@
       </p:sp>
       <p:sp>
         <p:nvSpPr>
-          <p:cNvPr id="30" name="Oval 29"/>
+          <p:cNvPr id="29" name="Oval 28"/>
           <p:cNvSpPr/>
           <p:nvPr/>
         </p:nvSpPr>
@@ -13805,7 +13253,7 @@
       </p:sp>
       <p:sp>
         <p:nvSpPr>
-          <p:cNvPr id="31" name="TextBox 30"/>
+          <p:cNvPr id="30" name="TextBox 29"/>
           <p:cNvSpPr txBox="1"/>
           <p:nvPr/>
         </p:nvSpPr>
@@ -13847,7 +13295,7 @@
       </p:sp>
       <p:sp>
         <p:nvSpPr>
-          <p:cNvPr id="32" name="TextBox 31"/>
+          <p:cNvPr id="31" name="TextBox 30"/>
           <p:cNvSpPr txBox="1"/>
           <p:nvPr/>
         </p:nvSpPr>
@@ -13889,7 +13337,7 @@
       </p:sp>
       <p:sp>
         <p:nvSpPr>
-          <p:cNvPr id="33" name="TextBox 32"/>
+          <p:cNvPr id="32" name="TextBox 31"/>
           <p:cNvSpPr txBox="1"/>
           <p:nvPr/>
         </p:nvSpPr>
@@ -13931,7 +13379,7 @@
       </p:sp>
       <p:sp>
         <p:nvSpPr>
-          <p:cNvPr id="34" name="Rectangle 33"/>
+          <p:cNvPr id="33" name="Rectangle 32"/>
           <p:cNvSpPr/>
           <p:nvPr/>
         </p:nvSpPr>
@@ -13980,7 +13428,7 @@
       </p:sp>
       <p:sp>
         <p:nvSpPr>
-          <p:cNvPr id="35" name="Rectangle 34"/>
+          <p:cNvPr id="34" name="Rectangle 33"/>
           <p:cNvSpPr/>
           <p:nvPr/>
         </p:nvSpPr>
@@ -14029,7 +13477,7 @@
       </p:sp>
       <p:sp>
         <p:nvSpPr>
-          <p:cNvPr id="36" name="TextBox 35"/>
+          <p:cNvPr id="35" name="TextBox 34"/>
           <p:cNvSpPr txBox="1"/>
           <p:nvPr/>
         </p:nvSpPr>
@@ -14071,7 +13519,7 @@
       </p:sp>
       <p:sp>
         <p:nvSpPr>
-          <p:cNvPr id="37" name="TextBox 36"/>
+          <p:cNvPr id="36" name="TextBox 35"/>
           <p:cNvSpPr txBox="1"/>
           <p:nvPr/>
         </p:nvSpPr>
@@ -14113,7 +13561,7 @@
       </p:sp>
       <p:sp>
         <p:nvSpPr>
-          <p:cNvPr id="38" name="Rectangle 37"/>
+          <p:cNvPr id="37" name="Rectangle 36"/>
           <p:cNvSpPr/>
           <p:nvPr/>
         </p:nvSpPr>
@@ -14162,7 +13610,7 @@
       </p:sp>
       <p:sp>
         <p:nvSpPr>
-          <p:cNvPr id="39" name="TextBox 38"/>
+          <p:cNvPr id="38" name="TextBox 37"/>
           <p:cNvSpPr txBox="1"/>
           <p:nvPr/>
         </p:nvSpPr>
@@ -14204,7 +13652,7 @@
       </p:sp>
       <p:sp>
         <p:nvSpPr>
-          <p:cNvPr id="40" name="TextBox 39"/>
+          <p:cNvPr id="39" name="TextBox 38"/>
           <p:cNvSpPr txBox="1"/>
           <p:nvPr/>
         </p:nvSpPr>
@@ -14246,7 +13694,7 @@
       </p:sp>
       <p:sp>
         <p:nvSpPr>
-          <p:cNvPr id="41" name="TextBox 40"/>
+          <p:cNvPr id="40" name="TextBox 39"/>
           <p:cNvSpPr txBox="1"/>
           <p:nvPr/>
         </p:nvSpPr>
@@ -14362,7 +13810,7 @@
         <p:spPr>
           <a:xfrm>
             <a:off x="640080" y="329184"/>
-            <a:ext cx="5303520" cy="182880"/>
+            <a:ext cx="9875520" cy="182880"/>
           </a:xfrm>
           <a:prstGeom prst="rect">
             <a:avLst/>
@@ -14403,48 +13851,6 @@
         </p:nvSpPr>
         <p:spPr>
           <a:xfrm>
-            <a:off x="5897880" y="310896"/>
-            <a:ext cx="4800600" cy="256032"/>
-          </a:xfrm>
-          <a:prstGeom prst="rect">
-            <a:avLst/>
-          </a:prstGeom>
-          <a:noFill/>
-        </p:spPr>
-        <p:txBody>
-          <a:bodyPr wrap="none" lIns="9144" rIns="9144" tIns="9144" bIns="9144" anchor="t">
-            <a:spAutoFit/>
-          </a:bodyPr>
-          <a:lstStyle/>
-          <a:p>
-            <a:pPr algn="r">
-              <a:spcAft>
-                <a:spcPts val="0"/>
-              </a:spcAft>
-              <a:defRPr sz="680" b="1">
-                <a:solidFill>
-                  <a:srgbClr val="4F6B00"/>
-                </a:solidFill>
-                <a:latin typeface="Inter"/>
-              </a:defRPr>
-            </a:pPr>
-            <a:r>
-              <a:rPr>
-                <a:latin typeface="Inter"/>
-              </a:rPr>
-              <a:t>Illustrative, Gradient Maintained — demo data, not the client's holdings or managers</a:t>
-            </a:r>
-          </a:p>
-        </p:txBody>
-      </p:sp>
-      <p:sp>
-        <p:nvSpPr>
-          <p:cNvPr id="5" name="TextBox 4"/>
-          <p:cNvSpPr txBox="1"/>
-          <p:nvPr/>
-        </p:nvSpPr>
-        <p:spPr>
-          <a:xfrm>
             <a:off x="640080" y="566928"/>
             <a:ext cx="10058400" cy="530352"/>
           </a:xfrm>
@@ -14481,7 +13887,7 @@
       </p:sp>
       <p:sp>
         <p:nvSpPr>
-          <p:cNvPr id="6" name="Rectangle 5"/>
+          <p:cNvPr id="5" name="Rectangle 4"/>
           <p:cNvSpPr/>
           <p:nvPr/>
         </p:nvSpPr>
@@ -14530,7 +13936,7 @@
       </p:sp>
       <p:sp>
         <p:nvSpPr>
-          <p:cNvPr id="7" name="Rectangle 6"/>
+          <p:cNvPr id="6" name="Rectangle 5"/>
           <p:cNvSpPr/>
           <p:nvPr/>
         </p:nvSpPr>
@@ -14579,7 +13985,7 @@
       </p:sp>
       <p:sp>
         <p:nvSpPr>
-          <p:cNvPr id="8" name="TextBox 7"/>
+          <p:cNvPr id="7" name="TextBox 6"/>
           <p:cNvSpPr txBox="1"/>
           <p:nvPr/>
         </p:nvSpPr>
@@ -14621,7 +14027,7 @@
       </p:sp>
       <p:sp>
         <p:nvSpPr>
-          <p:cNvPr id="9" name="TextBox 8"/>
+          <p:cNvPr id="8" name="TextBox 7"/>
           <p:cNvSpPr txBox="1"/>
           <p:nvPr/>
         </p:nvSpPr>
@@ -14663,7 +14069,7 @@
       </p:sp>
       <p:graphicFrame>
         <p:nvGraphicFramePr>
-          <p:cNvPr id="10" name="Table 9"/>
+          <p:cNvPr id="9" name="Table 8"/>
           <p:cNvGraphicFramePr>
             <a:graphicFrameLocks noGrp="1"/>
           </p:cNvGraphicFramePr>
@@ -15105,7 +14511,7 @@
       </p:graphicFrame>
       <p:sp>
         <p:nvSpPr>
-          <p:cNvPr id="11" name="Rectangle 10"/>
+          <p:cNvPr id="10" name="Rectangle 9"/>
           <p:cNvSpPr/>
           <p:nvPr/>
         </p:nvSpPr>
@@ -15154,7 +14560,7 @@
       </p:sp>
       <p:sp>
         <p:nvSpPr>
-          <p:cNvPr id="12" name="TextBox 11"/>
+          <p:cNvPr id="11" name="TextBox 10"/>
           <p:cNvSpPr txBox="1"/>
           <p:nvPr/>
         </p:nvSpPr>
@@ -15196,7 +14602,7 @@
       </p:sp>
       <p:graphicFrame>
         <p:nvGraphicFramePr>
-          <p:cNvPr id="13" name="Table 12"/>
+          <p:cNvPr id="12" name="Table 11"/>
           <p:cNvGraphicFramePr>
             <a:graphicFrameLocks noGrp="1"/>
           </p:cNvGraphicFramePr>
@@ -15614,7 +15020,7 @@
       </p:graphicFrame>
       <p:sp>
         <p:nvSpPr>
-          <p:cNvPr id="14" name="Rectangle 13"/>
+          <p:cNvPr id="13" name="Rectangle 12"/>
           <p:cNvSpPr/>
           <p:nvPr/>
         </p:nvSpPr>
@@ -15663,7 +15069,7 @@
       </p:sp>
       <p:sp>
         <p:nvSpPr>
-          <p:cNvPr id="15" name="TextBox 14"/>
+          <p:cNvPr id="14" name="TextBox 13"/>
           <p:cNvSpPr txBox="1"/>
           <p:nvPr/>
         </p:nvSpPr>
@@ -15705,7 +15111,7 @@
       </p:sp>
       <p:sp>
         <p:nvSpPr>
-          <p:cNvPr id="16" name="TextBox 15"/>
+          <p:cNvPr id="15" name="TextBox 14"/>
           <p:cNvSpPr txBox="1"/>
           <p:nvPr/>
         </p:nvSpPr>
@@ -15747,7 +15153,7 @@
       </p:sp>
       <p:sp>
         <p:nvSpPr>
-          <p:cNvPr id="17" name="TextBox 16"/>
+          <p:cNvPr id="16" name="TextBox 15"/>
           <p:cNvSpPr txBox="1"/>
           <p:nvPr/>
         </p:nvSpPr>
@@ -15863,7 +15269,7 @@
         <p:spPr>
           <a:xfrm>
             <a:off x="640080" y="329184"/>
-            <a:ext cx="5303520" cy="182880"/>
+            <a:ext cx="9875520" cy="182880"/>
           </a:xfrm>
           <a:prstGeom prst="rect">
             <a:avLst/>
@@ -15904,48 +15310,6 @@
         </p:nvSpPr>
         <p:spPr>
           <a:xfrm>
-            <a:off x="5897880" y="310896"/>
-            <a:ext cx="4800600" cy="256032"/>
-          </a:xfrm>
-          <a:prstGeom prst="rect">
-            <a:avLst/>
-          </a:prstGeom>
-          <a:noFill/>
-        </p:spPr>
-        <p:txBody>
-          <a:bodyPr wrap="none" lIns="9144" rIns="9144" tIns="9144" bIns="9144" anchor="t">
-            <a:spAutoFit/>
-          </a:bodyPr>
-          <a:lstStyle/>
-          <a:p>
-            <a:pPr algn="r">
-              <a:spcAft>
-                <a:spcPts val="0"/>
-              </a:spcAft>
-              <a:defRPr sz="680" b="1">
-                <a:solidFill>
-                  <a:srgbClr val="4F6B00"/>
-                </a:solidFill>
-                <a:latin typeface="Inter"/>
-              </a:defRPr>
-            </a:pPr>
-            <a:r>
-              <a:rPr>
-                <a:latin typeface="Inter"/>
-              </a:rPr>
-              <a:t>Illustrative, Gradient Maintained — demo data, not the client's holdings or managers</a:t>
-            </a:r>
-          </a:p>
-        </p:txBody>
-      </p:sp>
-      <p:sp>
-        <p:nvSpPr>
-          <p:cNvPr id="5" name="TextBox 4"/>
-          <p:cNvSpPr txBox="1"/>
-          <p:nvPr/>
-        </p:nvSpPr>
-        <p:spPr>
-          <a:xfrm>
             <a:off x="640080" y="566928"/>
             <a:ext cx="10058400" cy="530352"/>
           </a:xfrm>
@@ -15982,7 +15346,7 @@
       </p:sp>
       <p:sp>
         <p:nvSpPr>
-          <p:cNvPr id="6" name="Rectangle 5"/>
+          <p:cNvPr id="5" name="Rectangle 4"/>
           <p:cNvSpPr/>
           <p:nvPr/>
         </p:nvSpPr>
@@ -16031,7 +15395,7 @@
       </p:sp>
       <p:sp>
         <p:nvSpPr>
-          <p:cNvPr id="7" name="Rectangle 6"/>
+          <p:cNvPr id="6" name="Rectangle 5"/>
           <p:cNvSpPr/>
           <p:nvPr/>
         </p:nvSpPr>
@@ -16080,7 +15444,7 @@
       </p:sp>
       <p:sp>
         <p:nvSpPr>
-          <p:cNvPr id="8" name="TextBox 7"/>
+          <p:cNvPr id="7" name="TextBox 6"/>
           <p:cNvSpPr txBox="1"/>
           <p:nvPr/>
         </p:nvSpPr>
@@ -16122,7 +15486,7 @@
       </p:sp>
       <p:sp>
         <p:nvSpPr>
-          <p:cNvPr id="9" name="TextBox 8"/>
+          <p:cNvPr id="8" name="TextBox 7"/>
           <p:cNvSpPr txBox="1"/>
           <p:nvPr/>
         </p:nvSpPr>
@@ -16164,7 +15528,7 @@
       </p:sp>
       <p:graphicFrame>
         <p:nvGraphicFramePr>
-          <p:cNvPr id="10" name="Table 9"/>
+          <p:cNvPr id="9" name="Table 8"/>
           <p:cNvGraphicFramePr>
             <a:graphicFrameLocks noGrp="1"/>
           </p:cNvGraphicFramePr>
@@ -17177,7 +16541,7 @@
       </p:graphicFrame>
       <p:sp>
         <p:nvSpPr>
-          <p:cNvPr id="11" name="TextBox 10"/>
+          <p:cNvPr id="10" name="TextBox 9"/>
           <p:cNvSpPr txBox="1"/>
           <p:nvPr/>
         </p:nvSpPr>
@@ -17219,7 +16583,7 @@
       </p:sp>
       <p:sp>
         <p:nvSpPr>
-          <p:cNvPr id="12" name="Rectangle 11"/>
+          <p:cNvPr id="11" name="Rectangle 10"/>
           <p:cNvSpPr/>
           <p:nvPr/>
         </p:nvSpPr>
@@ -17268,7 +16632,7 @@
       </p:sp>
       <p:sp>
         <p:nvSpPr>
-          <p:cNvPr id="13" name="Rectangle 12"/>
+          <p:cNvPr id="12" name="Rectangle 11"/>
           <p:cNvSpPr/>
           <p:nvPr/>
         </p:nvSpPr>
@@ -17317,7 +16681,7 @@
       </p:sp>
       <p:sp>
         <p:nvSpPr>
-          <p:cNvPr id="14" name="TextBox 13"/>
+          <p:cNvPr id="13" name="TextBox 12"/>
           <p:cNvSpPr txBox="1"/>
           <p:nvPr/>
         </p:nvSpPr>
@@ -17359,7 +16723,7 @@
       </p:sp>
       <p:sp>
         <p:nvSpPr>
-          <p:cNvPr id="15" name="TextBox 14"/>
+          <p:cNvPr id="14" name="TextBox 13"/>
           <p:cNvSpPr txBox="1"/>
           <p:nvPr/>
         </p:nvSpPr>
@@ -17401,7 +16765,7 @@
       </p:sp>
       <p:sp>
         <p:nvSpPr>
-          <p:cNvPr id="16" name="Rectangle 15"/>
+          <p:cNvPr id="15" name="Rectangle 14"/>
           <p:cNvSpPr/>
           <p:nvPr/>
         </p:nvSpPr>
@@ -17450,7 +16814,7 @@
       </p:sp>
       <p:sp>
         <p:nvSpPr>
-          <p:cNvPr id="17" name="TextBox 16"/>
+          <p:cNvPr id="16" name="TextBox 15"/>
           <p:cNvSpPr txBox="1"/>
           <p:nvPr/>
         </p:nvSpPr>
@@ -17492,7 +16856,7 @@
       </p:sp>
       <p:sp>
         <p:nvSpPr>
-          <p:cNvPr id="18" name="TextBox 17"/>
+          <p:cNvPr id="17" name="TextBox 16"/>
           <p:cNvSpPr txBox="1"/>
           <p:nvPr/>
         </p:nvSpPr>
@@ -17534,7 +16898,7 @@
       </p:sp>
       <p:sp>
         <p:nvSpPr>
-          <p:cNvPr id="19" name="TextBox 18"/>
+          <p:cNvPr id="18" name="TextBox 17"/>
           <p:cNvSpPr txBox="1"/>
           <p:nvPr/>
         </p:nvSpPr>
@@ -17650,7 +17014,7 @@
         <p:spPr>
           <a:xfrm>
             <a:off x="640080" y="329184"/>
-            <a:ext cx="5303520" cy="182880"/>
+            <a:ext cx="9875520" cy="182880"/>
           </a:xfrm>
           <a:prstGeom prst="rect">
             <a:avLst/>
@@ -17691,48 +17055,6 @@
         </p:nvSpPr>
         <p:spPr>
           <a:xfrm>
-            <a:off x="5897880" y="310896"/>
-            <a:ext cx="4800600" cy="256032"/>
-          </a:xfrm>
-          <a:prstGeom prst="rect">
-            <a:avLst/>
-          </a:prstGeom>
-          <a:noFill/>
-        </p:spPr>
-        <p:txBody>
-          <a:bodyPr wrap="none" lIns="9144" rIns="9144" tIns="9144" bIns="9144" anchor="t">
-            <a:spAutoFit/>
-          </a:bodyPr>
-          <a:lstStyle/>
-          <a:p>
-            <a:pPr algn="r">
-              <a:spcAft>
-                <a:spcPts val="0"/>
-              </a:spcAft>
-              <a:defRPr sz="680" b="1">
-                <a:solidFill>
-                  <a:srgbClr val="4F6B00"/>
-                </a:solidFill>
-                <a:latin typeface="Inter"/>
-              </a:defRPr>
-            </a:pPr>
-            <a:r>
-              <a:rPr>
-                <a:latin typeface="Inter"/>
-              </a:rPr>
-              <a:t>Illustrative, Gradient Maintained — demo data, not the client's holdings or managers</a:t>
-            </a:r>
-          </a:p>
-        </p:txBody>
-      </p:sp>
-      <p:sp>
-        <p:nvSpPr>
-          <p:cNvPr id="5" name="TextBox 4"/>
-          <p:cNvSpPr txBox="1"/>
-          <p:nvPr/>
-        </p:nvSpPr>
-        <p:spPr>
-          <a:xfrm>
             <a:off x="640080" y="566928"/>
             <a:ext cx="10058400" cy="530352"/>
           </a:xfrm>
@@ -17769,7 +17091,7 @@
       </p:sp>
       <p:sp>
         <p:nvSpPr>
-          <p:cNvPr id="6" name="Rectangle 5"/>
+          <p:cNvPr id="5" name="Rectangle 4"/>
           <p:cNvSpPr/>
           <p:nvPr/>
         </p:nvSpPr>
@@ -17818,7 +17140,7 @@
       </p:sp>
       <p:sp>
         <p:nvSpPr>
-          <p:cNvPr id="7" name="Rectangle 6"/>
+          <p:cNvPr id="6" name="Rectangle 5"/>
           <p:cNvSpPr/>
           <p:nvPr/>
         </p:nvSpPr>
@@ -17867,7 +17189,7 @@
       </p:sp>
       <p:sp>
         <p:nvSpPr>
-          <p:cNvPr id="8" name="TextBox 7"/>
+          <p:cNvPr id="7" name="TextBox 6"/>
           <p:cNvSpPr txBox="1"/>
           <p:nvPr/>
         </p:nvSpPr>
@@ -17909,14 +17231,105 @@
       </p:sp>
       <p:sp>
         <p:nvSpPr>
-          <p:cNvPr id="9" name="Rectangle 8"/>
+          <p:cNvPr id="8" name="Rectangle 7"/>
           <p:cNvSpPr/>
           <p:nvPr/>
         </p:nvSpPr>
         <p:spPr>
           <a:xfrm>
-            <a:off x="640080" y="1325880"/>
-            <a:ext cx="10908792" cy="2263980"/>
+            <a:off x="640080" y="1399032"/>
+            <a:ext cx="73152" cy="1031503"/>
+          </a:xfrm>
+          <a:prstGeom prst="rect">
+            <a:avLst/>
+          </a:prstGeom>
+          <a:solidFill>
+            <a:srgbClr val="C6F432"/>
+          </a:solidFill>
+          <a:ln>
+            <a:solidFill>
+              <a:srgbClr val="C6F432"/>
+            </a:solidFill>
+          </a:ln>
+        </p:spPr>
+        <p:style>
+          <a:lnRef idx="1">
+            <a:schemeClr val="accent1"/>
+          </a:lnRef>
+          <a:fillRef idx="3">
+            <a:schemeClr val="accent1"/>
+          </a:fillRef>
+          <a:effectRef idx="2">
+            <a:schemeClr val="accent1"/>
+          </a:effectRef>
+          <a:fontRef idx="minor">
+            <a:schemeClr val="lt1"/>
+          </a:fontRef>
+        </p:style>
+        <p:txBody>
+          <a:bodyPr rtlCol="0" anchor="ctr"/>
+          <a:lstStyle/>
+          <a:p>
+            <a:pPr algn="ctr">
+              <a:defRPr>
+                <a:latin typeface="Inter"/>
+              </a:defRPr>
+            </a:pPr>
+          </a:p>
+        </p:txBody>
+      </p:sp>
+      <p:sp>
+        <p:nvSpPr>
+          <p:cNvPr id="9" name="TextBox 8"/>
+          <p:cNvSpPr txBox="1"/>
+          <p:nvPr/>
+        </p:nvSpPr>
+        <p:spPr>
+          <a:xfrm>
+            <a:off x="896112" y="1371600"/>
+            <a:ext cx="10588752" cy="683128"/>
+          </a:xfrm>
+          <a:prstGeom prst="rect">
+            <a:avLst/>
+          </a:prstGeom>
+          <a:noFill/>
+        </p:spPr>
+        <p:txBody>
+          <a:bodyPr wrap="none" lIns="9144" rIns="9144" tIns="9144" bIns="9144" anchor="t">
+            <a:spAutoFit/>
+          </a:bodyPr>
+          <a:lstStyle/>
+          <a:p>
+            <a:pPr algn="l">
+              <a:spcAft>
+                <a:spcPts val="0"/>
+              </a:spcAft>
+              <a:defRPr sz="1800" b="1">
+                <a:solidFill>
+                  <a:srgbClr val="0D1117"/>
+                </a:solidFill>
+                <a:latin typeface="Inter"/>
+              </a:defRPr>
+            </a:pPr>
+            <a:r>
+              <a:rPr>
+                <a:latin typeface="Inter"/>
+              </a:rPr>
+              <a:t>Historical and forward views reconcile</a:t>
+            </a:r>
+          </a:p>
+        </p:txBody>
+      </p:sp>
+      <p:sp>
+        <p:nvSpPr>
+          <p:cNvPr id="10" name="Rectangle 9"/>
+          <p:cNvSpPr/>
+          <p:nvPr/>
+        </p:nvSpPr>
+        <p:spPr>
+          <a:xfrm>
+            <a:off x="640080" y="2613415"/>
+            <a:ext cx="10908792" cy="1654451"/>
           </a:xfrm>
           <a:prstGeom prst="rect">
             <a:avLst/>
@@ -17958,14 +17371,14 @@
       </p:sp>
       <p:sp>
         <p:nvSpPr>
-          <p:cNvPr id="10" name="Rectangle 9"/>
+          <p:cNvPr id="11" name="Rectangle 10"/>
           <p:cNvSpPr/>
           <p:nvPr/>
         </p:nvSpPr>
         <p:spPr>
           <a:xfrm>
-            <a:off x="640080" y="1325880"/>
-            <a:ext cx="54864" cy="2263980"/>
+            <a:off x="640080" y="2613415"/>
+            <a:ext cx="54864" cy="1654451"/>
           </a:xfrm>
           <a:prstGeom prst="rect">
             <a:avLst/>
@@ -18007,13 +17420,13 @@
       </p:sp>
       <p:sp>
         <p:nvSpPr>
-          <p:cNvPr id="11" name="TextBox 10"/>
+          <p:cNvPr id="12" name="TextBox 11"/>
           <p:cNvSpPr txBox="1"/>
           <p:nvPr/>
         </p:nvSpPr>
         <p:spPr>
           <a:xfrm>
-            <a:off x="804671" y="1435607"/>
+            <a:off x="804671" y="2723143"/>
             <a:ext cx="10616184" cy="228600"/>
           </a:xfrm>
           <a:prstGeom prst="rect">
@@ -18049,14 +17462,14 @@
       </p:sp>
       <p:sp>
         <p:nvSpPr>
-          <p:cNvPr id="12" name="TextBox 11"/>
+          <p:cNvPr id="13" name="TextBox 12"/>
           <p:cNvSpPr txBox="1"/>
           <p:nvPr/>
         </p:nvSpPr>
         <p:spPr>
           <a:xfrm>
-            <a:off x="804671" y="1719072"/>
-            <a:ext cx="10616184" cy="1779348"/>
+            <a:off x="804671" y="3006607"/>
+            <a:ext cx="10616184" cy="1169819"/>
           </a:xfrm>
           <a:prstGeom prst="rect">
             <a:avLst/>
@@ -18091,14 +17504,14 @@
       </p:sp>
       <p:sp>
         <p:nvSpPr>
-          <p:cNvPr id="13" name="Rectangle 12"/>
+          <p:cNvPr id="14" name="Rectangle 13"/>
           <p:cNvSpPr/>
           <p:nvPr/>
         </p:nvSpPr>
         <p:spPr>
           <a:xfrm>
-            <a:off x="640080" y="3699588"/>
-            <a:ext cx="2644902" cy="2518331"/>
+            <a:off x="640080" y="4377595"/>
+            <a:ext cx="2644902" cy="1840324"/>
           </a:xfrm>
           <a:prstGeom prst="rect">
             <a:avLst/>
@@ -18140,13 +17553,13 @@
       </p:sp>
       <p:sp>
         <p:nvSpPr>
-          <p:cNvPr id="14" name="Rectangle 13"/>
+          <p:cNvPr id="15" name="Rectangle 14"/>
           <p:cNvSpPr/>
           <p:nvPr/>
         </p:nvSpPr>
         <p:spPr>
           <a:xfrm>
-            <a:off x="640080" y="3699588"/>
+            <a:off x="640080" y="4377595"/>
             <a:ext cx="2644902" cy="45720"/>
           </a:xfrm>
           <a:prstGeom prst="rect">
@@ -18189,13 +17602,13 @@
       </p:sp>
       <p:sp>
         <p:nvSpPr>
-          <p:cNvPr id="15" name="TextBox 14"/>
+          <p:cNvPr id="16" name="TextBox 15"/>
           <p:cNvSpPr txBox="1"/>
           <p:nvPr/>
         </p:nvSpPr>
         <p:spPr>
           <a:xfrm>
-            <a:off x="749808" y="3827604"/>
+            <a:off x="749808" y="4505611"/>
             <a:ext cx="2425446" cy="201168"/>
           </a:xfrm>
           <a:prstGeom prst="rect">
@@ -18231,13 +17644,13 @@
       </p:sp>
       <p:sp>
         <p:nvSpPr>
-          <p:cNvPr id="16" name="TextBox 15"/>
+          <p:cNvPr id="17" name="TextBox 16"/>
           <p:cNvSpPr txBox="1"/>
           <p:nvPr/>
         </p:nvSpPr>
         <p:spPr>
           <a:xfrm>
-            <a:off x="749808" y="4083636"/>
+            <a:off x="749808" y="4761643"/>
             <a:ext cx="2425446" cy="475488"/>
           </a:xfrm>
           <a:prstGeom prst="rect">
@@ -18273,13 +17686,13 @@
       </p:sp>
       <p:sp>
         <p:nvSpPr>
-          <p:cNvPr id="17" name="TextBox 16"/>
+          <p:cNvPr id="18" name="TextBox 17"/>
           <p:cNvSpPr txBox="1"/>
           <p:nvPr/>
         </p:nvSpPr>
         <p:spPr>
           <a:xfrm>
-            <a:off x="749808" y="5888736"/>
+            <a:off x="749808" y="5888735"/>
             <a:ext cx="2425446" cy="228600"/>
           </a:xfrm>
           <a:prstGeom prst="rect">
@@ -18315,14 +17728,14 @@
       </p:sp>
       <p:sp>
         <p:nvSpPr>
-          <p:cNvPr id="18" name="Rectangle 17"/>
+          <p:cNvPr id="19" name="Rectangle 18"/>
           <p:cNvSpPr/>
           <p:nvPr/>
         </p:nvSpPr>
         <p:spPr>
           <a:xfrm>
-            <a:off x="3394710" y="3699588"/>
-            <a:ext cx="2644902" cy="2518331"/>
+            <a:off x="3394710" y="4377595"/>
+            <a:ext cx="2644902" cy="1840324"/>
           </a:xfrm>
           <a:prstGeom prst="rect">
             <a:avLst/>
@@ -18364,13 +17777,13 @@
       </p:sp>
       <p:sp>
         <p:nvSpPr>
-          <p:cNvPr id="19" name="Rectangle 18"/>
+          <p:cNvPr id="20" name="Rectangle 19"/>
           <p:cNvSpPr/>
           <p:nvPr/>
         </p:nvSpPr>
         <p:spPr>
           <a:xfrm>
-            <a:off x="3394710" y="3699588"/>
+            <a:off x="3394710" y="4377595"/>
             <a:ext cx="2644902" cy="45720"/>
           </a:xfrm>
           <a:prstGeom prst="rect">
@@ -18413,13 +17826,13 @@
       </p:sp>
       <p:sp>
         <p:nvSpPr>
-          <p:cNvPr id="20" name="TextBox 19"/>
+          <p:cNvPr id="21" name="TextBox 20"/>
           <p:cNvSpPr txBox="1"/>
           <p:nvPr/>
         </p:nvSpPr>
         <p:spPr>
           <a:xfrm>
-            <a:off x="3504438" y="3827604"/>
+            <a:off x="3504438" y="4505611"/>
             <a:ext cx="2425446" cy="201168"/>
           </a:xfrm>
           <a:prstGeom prst="rect">
@@ -18455,13 +17868,13 @@
       </p:sp>
       <p:sp>
         <p:nvSpPr>
-          <p:cNvPr id="21" name="TextBox 20"/>
+          <p:cNvPr id="22" name="TextBox 21"/>
           <p:cNvSpPr txBox="1"/>
           <p:nvPr/>
         </p:nvSpPr>
         <p:spPr>
           <a:xfrm>
-            <a:off x="3504438" y="4083636"/>
+            <a:off x="3504438" y="4761643"/>
             <a:ext cx="2425446" cy="475488"/>
           </a:xfrm>
           <a:prstGeom prst="rect">
@@ -18497,13 +17910,13 @@
       </p:sp>
       <p:sp>
         <p:nvSpPr>
-          <p:cNvPr id="22" name="TextBox 21"/>
+          <p:cNvPr id="23" name="TextBox 22"/>
           <p:cNvSpPr txBox="1"/>
           <p:nvPr/>
         </p:nvSpPr>
         <p:spPr>
           <a:xfrm>
-            <a:off x="3504438" y="5888736"/>
+            <a:off x="3504438" y="5888735"/>
             <a:ext cx="2425446" cy="228600"/>
           </a:xfrm>
           <a:prstGeom prst="rect">
@@ -18539,14 +17952,14 @@
       </p:sp>
       <p:sp>
         <p:nvSpPr>
-          <p:cNvPr id="23" name="Rectangle 22"/>
+          <p:cNvPr id="24" name="Rectangle 23"/>
           <p:cNvSpPr/>
           <p:nvPr/>
         </p:nvSpPr>
         <p:spPr>
           <a:xfrm>
-            <a:off x="6149340" y="3699588"/>
-            <a:ext cx="2644902" cy="2518331"/>
+            <a:off x="6149340" y="4377595"/>
+            <a:ext cx="2644902" cy="1840324"/>
           </a:xfrm>
           <a:prstGeom prst="rect">
             <a:avLst/>
@@ -18588,13 +18001,13 @@
       </p:sp>
       <p:sp>
         <p:nvSpPr>
-          <p:cNvPr id="24" name="Rectangle 23"/>
+          <p:cNvPr id="25" name="Rectangle 24"/>
           <p:cNvSpPr/>
           <p:nvPr/>
         </p:nvSpPr>
         <p:spPr>
           <a:xfrm>
-            <a:off x="6149340" y="3699588"/>
+            <a:off x="6149340" y="4377595"/>
             <a:ext cx="2644902" cy="45720"/>
           </a:xfrm>
           <a:prstGeom prst="rect">
@@ -18637,13 +18050,13 @@
       </p:sp>
       <p:sp>
         <p:nvSpPr>
-          <p:cNvPr id="25" name="TextBox 24"/>
+          <p:cNvPr id="26" name="TextBox 25"/>
           <p:cNvSpPr txBox="1"/>
           <p:nvPr/>
         </p:nvSpPr>
         <p:spPr>
           <a:xfrm>
-            <a:off x="6259068" y="3827604"/>
+            <a:off x="6259068" y="4505611"/>
             <a:ext cx="2425446" cy="201168"/>
           </a:xfrm>
           <a:prstGeom prst="rect">
@@ -18679,13 +18092,13 @@
       </p:sp>
       <p:sp>
         <p:nvSpPr>
-          <p:cNvPr id="26" name="TextBox 25"/>
+          <p:cNvPr id="27" name="TextBox 26"/>
           <p:cNvSpPr txBox="1"/>
           <p:nvPr/>
         </p:nvSpPr>
         <p:spPr>
           <a:xfrm>
-            <a:off x="6259068" y="4083636"/>
+            <a:off x="6259068" y="4761643"/>
             <a:ext cx="2425446" cy="475488"/>
           </a:xfrm>
           <a:prstGeom prst="rect">
@@ -18721,13 +18134,13 @@
       </p:sp>
       <p:sp>
         <p:nvSpPr>
-          <p:cNvPr id="27" name="TextBox 26"/>
+          <p:cNvPr id="28" name="TextBox 27"/>
           <p:cNvSpPr txBox="1"/>
           <p:nvPr/>
         </p:nvSpPr>
         <p:spPr>
           <a:xfrm>
-            <a:off x="6259068" y="5888736"/>
+            <a:off x="6259068" y="5888735"/>
             <a:ext cx="2425446" cy="228600"/>
           </a:xfrm>
           <a:prstGeom prst="rect">
@@ -18763,14 +18176,14 @@
       </p:sp>
       <p:sp>
         <p:nvSpPr>
-          <p:cNvPr id="28" name="Rectangle 27"/>
+          <p:cNvPr id="29" name="Rectangle 28"/>
           <p:cNvSpPr/>
           <p:nvPr/>
         </p:nvSpPr>
         <p:spPr>
           <a:xfrm>
-            <a:off x="8903970" y="3699588"/>
-            <a:ext cx="2644902" cy="2518331"/>
+            <a:off x="8903970" y="4377595"/>
+            <a:ext cx="2644902" cy="1840324"/>
           </a:xfrm>
           <a:prstGeom prst="rect">
             <a:avLst/>
@@ -18812,13 +18225,13 @@
       </p:sp>
       <p:sp>
         <p:nvSpPr>
-          <p:cNvPr id="29" name="Rectangle 28"/>
+          <p:cNvPr id="30" name="Rectangle 29"/>
           <p:cNvSpPr/>
           <p:nvPr/>
         </p:nvSpPr>
         <p:spPr>
           <a:xfrm>
-            <a:off x="8903970" y="3699588"/>
+            <a:off x="8903970" y="4377595"/>
             <a:ext cx="2644902" cy="45720"/>
           </a:xfrm>
           <a:prstGeom prst="rect">
@@ -18861,13 +18274,13 @@
       </p:sp>
       <p:sp>
         <p:nvSpPr>
-          <p:cNvPr id="30" name="TextBox 29"/>
+          <p:cNvPr id="31" name="TextBox 30"/>
           <p:cNvSpPr txBox="1"/>
           <p:nvPr/>
         </p:nvSpPr>
         <p:spPr>
           <a:xfrm>
-            <a:off x="9013698" y="3827604"/>
+            <a:off x="9013698" y="4505611"/>
             <a:ext cx="2425446" cy="201168"/>
           </a:xfrm>
           <a:prstGeom prst="rect">
@@ -18903,13 +18316,13 @@
       </p:sp>
       <p:sp>
         <p:nvSpPr>
-          <p:cNvPr id="31" name="TextBox 30"/>
+          <p:cNvPr id="32" name="TextBox 31"/>
           <p:cNvSpPr txBox="1"/>
           <p:nvPr/>
         </p:nvSpPr>
         <p:spPr>
           <a:xfrm>
-            <a:off x="9013698" y="4083636"/>
+            <a:off x="9013698" y="4761643"/>
             <a:ext cx="2425446" cy="475488"/>
           </a:xfrm>
           <a:prstGeom prst="rect">
@@ -18945,13 +18358,13 @@
       </p:sp>
       <p:sp>
         <p:nvSpPr>
-          <p:cNvPr id="32" name="TextBox 31"/>
+          <p:cNvPr id="33" name="TextBox 32"/>
           <p:cNvSpPr txBox="1"/>
           <p:nvPr/>
         </p:nvSpPr>
         <p:spPr>
           <a:xfrm>
-            <a:off x="9013698" y="5888736"/>
+            <a:off x="9013698" y="5888735"/>
             <a:ext cx="2425446" cy="228600"/>
           </a:xfrm>
           <a:prstGeom prst="rect">
@@ -18987,7 +18400,7 @@
       </p:sp>
       <p:sp>
         <p:nvSpPr>
-          <p:cNvPr id="33" name="Rectangle 32"/>
+          <p:cNvPr id="34" name="Rectangle 33"/>
           <p:cNvSpPr/>
           <p:nvPr/>
         </p:nvSpPr>
@@ -19036,7 +18449,7 @@
       </p:sp>
       <p:sp>
         <p:nvSpPr>
-          <p:cNvPr id="34" name="TextBox 33"/>
+          <p:cNvPr id="35" name="TextBox 34"/>
           <p:cNvSpPr txBox="1"/>
           <p:nvPr/>
         </p:nvSpPr>
@@ -19078,7 +18491,7 @@
       </p:sp>
       <p:sp>
         <p:nvSpPr>
-          <p:cNvPr id="35" name="TextBox 34"/>
+          <p:cNvPr id="36" name="TextBox 35"/>
           <p:cNvSpPr txBox="1"/>
           <p:nvPr/>
         </p:nvSpPr>
@@ -19120,7 +18533,7 @@
       </p:sp>
       <p:sp>
         <p:nvSpPr>
-          <p:cNvPr id="36" name="TextBox 35"/>
+          <p:cNvPr id="37" name="TextBox 36"/>
           <p:cNvSpPr txBox="1"/>
           <p:nvPr/>
         </p:nvSpPr>
@@ -19236,7 +18649,7 @@
         <p:spPr>
           <a:xfrm>
             <a:off x="640080" y="329184"/>
-            <a:ext cx="5303520" cy="182880"/>
+            <a:ext cx="9875520" cy="182880"/>
           </a:xfrm>
           <a:prstGeom prst="rect">
             <a:avLst/>
@@ -19277,48 +18690,6 @@
         </p:nvSpPr>
         <p:spPr>
           <a:xfrm>
-            <a:off x="5897880" y="310896"/>
-            <a:ext cx="4800600" cy="256032"/>
-          </a:xfrm>
-          <a:prstGeom prst="rect">
-            <a:avLst/>
-          </a:prstGeom>
-          <a:noFill/>
-        </p:spPr>
-        <p:txBody>
-          <a:bodyPr wrap="none" lIns="9144" rIns="9144" tIns="9144" bIns="9144" anchor="t">
-            <a:spAutoFit/>
-          </a:bodyPr>
-          <a:lstStyle/>
-          <a:p>
-            <a:pPr algn="r">
-              <a:spcAft>
-                <a:spcPts val="0"/>
-              </a:spcAft>
-              <a:defRPr sz="680" b="1">
-                <a:solidFill>
-                  <a:srgbClr val="4F6B00"/>
-                </a:solidFill>
-                <a:latin typeface="Inter"/>
-              </a:defRPr>
-            </a:pPr>
-            <a:r>
-              <a:rPr>
-                <a:latin typeface="Inter"/>
-              </a:rPr>
-              <a:t>Illustrative, Gradient Maintained — demo data, not the client's holdings or managers</a:t>
-            </a:r>
-          </a:p>
-        </p:txBody>
-      </p:sp>
-      <p:sp>
-        <p:nvSpPr>
-          <p:cNvPr id="5" name="TextBox 4"/>
-          <p:cNvSpPr txBox="1"/>
-          <p:nvPr/>
-        </p:nvSpPr>
-        <p:spPr>
-          <a:xfrm>
             <a:off x="640080" y="566928"/>
             <a:ext cx="10058400" cy="530352"/>
           </a:xfrm>
@@ -19355,7 +18726,7 @@
       </p:sp>
       <p:sp>
         <p:nvSpPr>
-          <p:cNvPr id="6" name="Rectangle 5"/>
+          <p:cNvPr id="5" name="Rectangle 4"/>
           <p:cNvSpPr/>
           <p:nvPr/>
         </p:nvSpPr>
@@ -19404,7 +18775,7 @@
       </p:sp>
       <p:sp>
         <p:nvSpPr>
-          <p:cNvPr id="7" name="Rectangle 6"/>
+          <p:cNvPr id="6" name="Rectangle 5"/>
           <p:cNvSpPr/>
           <p:nvPr/>
         </p:nvSpPr>
@@ -19453,7 +18824,7 @@
       </p:sp>
       <p:sp>
         <p:nvSpPr>
-          <p:cNvPr id="8" name="TextBox 7"/>
+          <p:cNvPr id="7" name="TextBox 6"/>
           <p:cNvSpPr txBox="1"/>
           <p:nvPr/>
         </p:nvSpPr>
@@ -19495,7 +18866,7 @@
       </p:sp>
       <p:sp>
         <p:nvSpPr>
-          <p:cNvPr id="9" name="Rectangle 8"/>
+          <p:cNvPr id="8" name="Rectangle 7"/>
           <p:cNvSpPr/>
           <p:nvPr/>
         </p:nvSpPr>
@@ -19544,7 +18915,7 @@
       </p:sp>
       <p:sp>
         <p:nvSpPr>
-          <p:cNvPr id="10" name="Rectangle 9"/>
+          <p:cNvPr id="9" name="Rectangle 8"/>
           <p:cNvSpPr/>
           <p:nvPr/>
         </p:nvSpPr>
@@ -19593,7 +18964,7 @@
       </p:sp>
       <p:sp>
         <p:nvSpPr>
-          <p:cNvPr id="11" name="TextBox 10"/>
+          <p:cNvPr id="10" name="TextBox 9"/>
           <p:cNvSpPr txBox="1"/>
           <p:nvPr/>
         </p:nvSpPr>
@@ -19635,7 +19006,7 @@
       </p:sp>
       <p:sp>
         <p:nvSpPr>
-          <p:cNvPr id="12" name="TextBox 11"/>
+          <p:cNvPr id="11" name="TextBox 10"/>
           <p:cNvSpPr txBox="1"/>
           <p:nvPr/>
         </p:nvSpPr>
@@ -19677,7 +19048,7 @@
       </p:sp>
       <p:sp>
         <p:nvSpPr>
-          <p:cNvPr id="13" name="TextBox 12"/>
+          <p:cNvPr id="12" name="TextBox 11"/>
           <p:cNvSpPr txBox="1"/>
           <p:nvPr/>
         </p:nvSpPr>
@@ -19719,7 +19090,7 @@
       </p:sp>
       <p:graphicFrame>
         <p:nvGraphicFramePr>
-          <p:cNvPr id="14" name="Chart 13"/>
+          <p:cNvPr id="13" name="Chart 12"/>
           <p:cNvGraphicFramePr>
             <a:graphicFrameLocks noGrp="1"/>
           </p:cNvGraphicFramePr>
@@ -19737,7 +19108,7 @@
       </p:graphicFrame>
       <p:sp>
         <p:nvSpPr>
-          <p:cNvPr id="15" name="Rectangle 14"/>
+          <p:cNvPr id="14" name="Rectangle 13"/>
           <p:cNvSpPr/>
           <p:nvPr/>
         </p:nvSpPr>
@@ -19786,7 +19157,7 @@
       </p:sp>
       <p:sp>
         <p:nvSpPr>
-          <p:cNvPr id="16" name="TextBox 15"/>
+          <p:cNvPr id="15" name="TextBox 14"/>
           <p:cNvSpPr txBox="1"/>
           <p:nvPr/>
         </p:nvSpPr>
@@ -19828,7 +19199,7 @@
       </p:sp>
       <p:sp>
         <p:nvSpPr>
-          <p:cNvPr id="17" name="TextBox 16"/>
+          <p:cNvPr id="16" name="TextBox 15"/>
           <p:cNvSpPr txBox="1"/>
           <p:nvPr/>
         </p:nvSpPr>
@@ -19870,7 +19241,7 @@
       </p:sp>
       <p:sp>
         <p:nvSpPr>
-          <p:cNvPr id="18" name="TextBox 17"/>
+          <p:cNvPr id="17" name="TextBox 16"/>
           <p:cNvSpPr txBox="1"/>
           <p:nvPr/>
         </p:nvSpPr>
@@ -19986,7 +19357,7 @@
         <p:spPr>
           <a:xfrm>
             <a:off x="640080" y="329184"/>
-            <a:ext cx="5303520" cy="182880"/>
+            <a:ext cx="9875520" cy="182880"/>
           </a:xfrm>
           <a:prstGeom prst="rect">
             <a:avLst/>
@@ -20027,48 +19398,6 @@
         </p:nvSpPr>
         <p:spPr>
           <a:xfrm>
-            <a:off x="5897880" y="310896"/>
-            <a:ext cx="4800600" cy="256032"/>
-          </a:xfrm>
-          <a:prstGeom prst="rect">
-            <a:avLst/>
-          </a:prstGeom>
-          <a:noFill/>
-        </p:spPr>
-        <p:txBody>
-          <a:bodyPr wrap="none" lIns="9144" rIns="9144" tIns="9144" bIns="9144" anchor="t">
-            <a:spAutoFit/>
-          </a:bodyPr>
-          <a:lstStyle/>
-          <a:p>
-            <a:pPr algn="r">
-              <a:spcAft>
-                <a:spcPts val="0"/>
-              </a:spcAft>
-              <a:defRPr sz="680" b="1">
-                <a:solidFill>
-                  <a:srgbClr val="4F6B00"/>
-                </a:solidFill>
-                <a:latin typeface="Inter"/>
-              </a:defRPr>
-            </a:pPr>
-            <a:r>
-              <a:rPr>
-                <a:latin typeface="Inter"/>
-              </a:rPr>
-              <a:t>Illustrative, Gradient Maintained — demo data, not the client's holdings or managers</a:t>
-            </a:r>
-          </a:p>
-        </p:txBody>
-      </p:sp>
-      <p:sp>
-        <p:nvSpPr>
-          <p:cNvPr id="5" name="TextBox 4"/>
-          <p:cNvSpPr txBox="1"/>
-          <p:nvPr/>
-        </p:nvSpPr>
-        <p:spPr>
-          <a:xfrm>
             <a:off x="640080" y="566928"/>
             <a:ext cx="10058400" cy="530352"/>
           </a:xfrm>
@@ -20105,7 +19434,7 @@
       </p:sp>
       <p:sp>
         <p:nvSpPr>
-          <p:cNvPr id="6" name="Rectangle 5"/>
+          <p:cNvPr id="5" name="Rectangle 4"/>
           <p:cNvSpPr/>
           <p:nvPr/>
         </p:nvSpPr>
@@ -20154,7 +19483,7 @@
       </p:sp>
       <p:sp>
         <p:nvSpPr>
-          <p:cNvPr id="7" name="Rectangle 6"/>
+          <p:cNvPr id="6" name="Rectangle 5"/>
           <p:cNvSpPr/>
           <p:nvPr/>
         </p:nvSpPr>
@@ -20203,7 +19532,7 @@
       </p:sp>
       <p:sp>
         <p:nvSpPr>
-          <p:cNvPr id="8" name="TextBox 7"/>
+          <p:cNvPr id="7" name="TextBox 6"/>
           <p:cNvSpPr txBox="1"/>
           <p:nvPr/>
         </p:nvSpPr>
@@ -20245,7 +19574,7 @@
       </p:sp>
       <p:sp>
         <p:nvSpPr>
-          <p:cNvPr id="9" name="TextBox 8"/>
+          <p:cNvPr id="8" name="TextBox 7"/>
           <p:cNvSpPr txBox="1"/>
           <p:nvPr/>
         </p:nvSpPr>
@@ -20287,7 +19616,7 @@
       </p:sp>
       <p:sp>
         <p:nvSpPr>
-          <p:cNvPr id="10" name="Rectangle 9"/>
+          <p:cNvPr id="9" name="Rectangle 8"/>
           <p:cNvSpPr/>
           <p:nvPr/>
         </p:nvSpPr>
@@ -20336,7 +19665,7 @@
       </p:sp>
       <p:sp>
         <p:nvSpPr>
-          <p:cNvPr id="11" name="Rectangle 10"/>
+          <p:cNvPr id="10" name="Rectangle 9"/>
           <p:cNvSpPr/>
           <p:nvPr/>
         </p:nvSpPr>
@@ -20385,7 +19714,7 @@
       </p:sp>
       <p:sp>
         <p:nvSpPr>
-          <p:cNvPr id="12" name="TextBox 11"/>
+          <p:cNvPr id="11" name="TextBox 10"/>
           <p:cNvSpPr txBox="1"/>
           <p:nvPr/>
         </p:nvSpPr>
@@ -20427,7 +19756,7 @@
       </p:sp>
       <p:sp>
         <p:nvSpPr>
-          <p:cNvPr id="13" name="TextBox 12"/>
+          <p:cNvPr id="12" name="TextBox 11"/>
           <p:cNvSpPr txBox="1"/>
           <p:nvPr/>
         </p:nvSpPr>
@@ -20469,7 +19798,7 @@
       </p:sp>
       <p:sp>
         <p:nvSpPr>
-          <p:cNvPr id="14" name="TextBox 13"/>
+          <p:cNvPr id="13" name="TextBox 12"/>
           <p:cNvSpPr txBox="1"/>
           <p:nvPr/>
         </p:nvSpPr>
@@ -20511,7 +19840,7 @@
       </p:sp>
       <p:sp>
         <p:nvSpPr>
-          <p:cNvPr id="15" name="Rectangle 14"/>
+          <p:cNvPr id="14" name="Rectangle 13"/>
           <p:cNvSpPr/>
           <p:nvPr/>
         </p:nvSpPr>
@@ -20560,7 +19889,7 @@
       </p:sp>
       <p:sp>
         <p:nvSpPr>
-          <p:cNvPr id="16" name="Rectangle 15"/>
+          <p:cNvPr id="15" name="Rectangle 14"/>
           <p:cNvSpPr/>
           <p:nvPr/>
         </p:nvSpPr>
@@ -20609,7 +19938,7 @@
       </p:sp>
       <p:sp>
         <p:nvSpPr>
-          <p:cNvPr id="17" name="TextBox 16"/>
+          <p:cNvPr id="16" name="TextBox 15"/>
           <p:cNvSpPr txBox="1"/>
           <p:nvPr/>
         </p:nvSpPr>
@@ -20651,7 +19980,7 @@
       </p:sp>
       <p:sp>
         <p:nvSpPr>
-          <p:cNvPr id="18" name="TextBox 17"/>
+          <p:cNvPr id="17" name="TextBox 16"/>
           <p:cNvSpPr txBox="1"/>
           <p:nvPr/>
         </p:nvSpPr>
@@ -20693,7 +20022,7 @@
       </p:sp>
       <p:sp>
         <p:nvSpPr>
-          <p:cNvPr id="19" name="TextBox 18"/>
+          <p:cNvPr id="18" name="TextBox 17"/>
           <p:cNvSpPr txBox="1"/>
           <p:nvPr/>
         </p:nvSpPr>
@@ -20735,7 +20064,7 @@
       </p:sp>
       <p:sp>
         <p:nvSpPr>
-          <p:cNvPr id="20" name="Rectangle 19"/>
+          <p:cNvPr id="19" name="Rectangle 18"/>
           <p:cNvSpPr/>
           <p:nvPr/>
         </p:nvSpPr>
@@ -20784,7 +20113,7 @@
       </p:sp>
       <p:sp>
         <p:nvSpPr>
-          <p:cNvPr id="21" name="Rectangle 20"/>
+          <p:cNvPr id="20" name="Rectangle 19"/>
           <p:cNvSpPr/>
           <p:nvPr/>
         </p:nvSpPr>
@@ -20833,7 +20162,7 @@
       </p:sp>
       <p:sp>
         <p:nvSpPr>
-          <p:cNvPr id="22" name="TextBox 21"/>
+          <p:cNvPr id="21" name="TextBox 20"/>
           <p:cNvSpPr txBox="1"/>
           <p:nvPr/>
         </p:nvSpPr>
@@ -20875,7 +20204,7 @@
       </p:sp>
       <p:sp>
         <p:nvSpPr>
-          <p:cNvPr id="23" name="TextBox 22"/>
+          <p:cNvPr id="22" name="TextBox 21"/>
           <p:cNvSpPr txBox="1"/>
           <p:nvPr/>
         </p:nvSpPr>
@@ -20917,7 +20246,7 @@
       </p:sp>
       <p:sp>
         <p:nvSpPr>
-          <p:cNvPr id="24" name="TextBox 23"/>
+          <p:cNvPr id="23" name="TextBox 22"/>
           <p:cNvSpPr txBox="1"/>
           <p:nvPr/>
         </p:nvSpPr>
@@ -20959,7 +20288,7 @@
       </p:sp>
       <p:sp>
         <p:nvSpPr>
-          <p:cNvPr id="25" name="TextBox 24"/>
+          <p:cNvPr id="24" name="TextBox 23"/>
           <p:cNvSpPr txBox="1"/>
           <p:nvPr/>
         </p:nvSpPr>
@@ -21001,7 +20330,7 @@
       </p:sp>
       <p:graphicFrame>
         <p:nvGraphicFramePr>
-          <p:cNvPr id="26" name="Table 25"/>
+          <p:cNvPr id="25" name="Table 24"/>
           <p:cNvGraphicFramePr>
             <a:graphicFrameLocks noGrp="1"/>
           </p:cNvGraphicFramePr>
@@ -21578,7 +20907,7 @@
       </p:graphicFrame>
       <p:sp>
         <p:nvSpPr>
-          <p:cNvPr id="27" name="Rectangle 26"/>
+          <p:cNvPr id="26" name="Rectangle 25"/>
           <p:cNvSpPr/>
           <p:nvPr/>
         </p:nvSpPr>
@@ -21627,7 +20956,7 @@
       </p:sp>
       <p:sp>
         <p:nvSpPr>
-          <p:cNvPr id="28" name="Rectangle 27"/>
+          <p:cNvPr id="27" name="Rectangle 26"/>
           <p:cNvSpPr/>
           <p:nvPr/>
         </p:nvSpPr>
@@ -21676,7 +21005,7 @@
       </p:sp>
       <p:sp>
         <p:nvSpPr>
-          <p:cNvPr id="29" name="TextBox 28"/>
+          <p:cNvPr id="28" name="TextBox 27"/>
           <p:cNvSpPr txBox="1"/>
           <p:nvPr/>
         </p:nvSpPr>
@@ -21718,7 +21047,7 @@
       </p:sp>
       <p:sp>
         <p:nvSpPr>
-          <p:cNvPr id="30" name="TextBox 29"/>
+          <p:cNvPr id="29" name="TextBox 28"/>
           <p:cNvSpPr txBox="1"/>
           <p:nvPr/>
         </p:nvSpPr>
@@ -21760,7 +21089,7 @@
       </p:sp>
       <p:sp>
         <p:nvSpPr>
-          <p:cNvPr id="31" name="Rectangle 30"/>
+          <p:cNvPr id="30" name="Rectangle 29"/>
           <p:cNvSpPr/>
           <p:nvPr/>
         </p:nvSpPr>
@@ -21809,7 +21138,7 @@
       </p:sp>
       <p:sp>
         <p:nvSpPr>
-          <p:cNvPr id="32" name="TextBox 31"/>
+          <p:cNvPr id="31" name="TextBox 30"/>
           <p:cNvSpPr txBox="1"/>
           <p:nvPr/>
         </p:nvSpPr>
@@ -21851,7 +21180,7 @@
       </p:sp>
       <p:sp>
         <p:nvSpPr>
-          <p:cNvPr id="33" name="TextBox 32"/>
+          <p:cNvPr id="32" name="TextBox 31"/>
           <p:cNvSpPr txBox="1"/>
           <p:nvPr/>
         </p:nvSpPr>
@@ -21893,7 +21222,7 @@
       </p:sp>
       <p:sp>
         <p:nvSpPr>
-          <p:cNvPr id="34" name="TextBox 33"/>
+          <p:cNvPr id="33" name="TextBox 32"/>
           <p:cNvSpPr txBox="1"/>
           <p:nvPr/>
         </p:nvSpPr>
@@ -22009,7 +21338,7 @@
         <p:spPr>
           <a:xfrm>
             <a:off x="640080" y="329184"/>
-            <a:ext cx="5303520" cy="182880"/>
+            <a:ext cx="9875520" cy="182880"/>
           </a:xfrm>
           <a:prstGeom prst="rect">
             <a:avLst/>
@@ -22050,48 +21379,6 @@
         </p:nvSpPr>
         <p:spPr>
           <a:xfrm>
-            <a:off x="5897880" y="310896"/>
-            <a:ext cx="4800600" cy="256032"/>
-          </a:xfrm>
-          <a:prstGeom prst="rect">
-            <a:avLst/>
-          </a:prstGeom>
-          <a:noFill/>
-        </p:spPr>
-        <p:txBody>
-          <a:bodyPr wrap="none" lIns="9144" rIns="9144" tIns="9144" bIns="9144" anchor="t">
-            <a:spAutoFit/>
-          </a:bodyPr>
-          <a:lstStyle/>
-          <a:p>
-            <a:pPr algn="r">
-              <a:spcAft>
-                <a:spcPts val="0"/>
-              </a:spcAft>
-              <a:defRPr sz="680" b="1">
-                <a:solidFill>
-                  <a:srgbClr val="4F6B00"/>
-                </a:solidFill>
-                <a:latin typeface="Inter"/>
-              </a:defRPr>
-            </a:pPr>
-            <a:r>
-              <a:rPr>
-                <a:latin typeface="Inter"/>
-              </a:rPr>
-              <a:t>Illustrative, Gradient Maintained — demo data, not the client's holdings or managers</a:t>
-            </a:r>
-          </a:p>
-        </p:txBody>
-      </p:sp>
-      <p:sp>
-        <p:nvSpPr>
-          <p:cNvPr id="5" name="TextBox 4"/>
-          <p:cNvSpPr txBox="1"/>
-          <p:nvPr/>
-        </p:nvSpPr>
-        <p:spPr>
-          <a:xfrm>
             <a:off x="640080" y="566928"/>
             <a:ext cx="10058400" cy="530352"/>
           </a:xfrm>
@@ -22128,7 +21415,7 @@
       </p:sp>
       <p:sp>
         <p:nvSpPr>
-          <p:cNvPr id="6" name="Rectangle 5"/>
+          <p:cNvPr id="5" name="Rectangle 4"/>
           <p:cNvSpPr/>
           <p:nvPr/>
         </p:nvSpPr>
@@ -22177,7 +21464,7 @@
       </p:sp>
       <p:sp>
         <p:nvSpPr>
-          <p:cNvPr id="7" name="Rectangle 6"/>
+          <p:cNvPr id="6" name="Rectangle 5"/>
           <p:cNvSpPr/>
           <p:nvPr/>
         </p:nvSpPr>
@@ -22226,7 +21513,7 @@
       </p:sp>
       <p:sp>
         <p:nvSpPr>
-          <p:cNvPr id="8" name="TextBox 7"/>
+          <p:cNvPr id="7" name="TextBox 6"/>
           <p:cNvSpPr txBox="1"/>
           <p:nvPr/>
         </p:nvSpPr>
@@ -22268,7 +21555,7 @@
       </p:sp>
       <p:sp>
         <p:nvSpPr>
-          <p:cNvPr id="9" name="TextBox 8"/>
+          <p:cNvPr id="8" name="TextBox 7"/>
           <p:cNvSpPr txBox="1"/>
           <p:nvPr/>
         </p:nvSpPr>
@@ -22310,7 +21597,7 @@
       </p:sp>
       <p:sp>
         <p:nvSpPr>
-          <p:cNvPr id="10" name="Rectangle 9"/>
+          <p:cNvPr id="9" name="Rectangle 8"/>
           <p:cNvSpPr/>
           <p:nvPr/>
         </p:nvSpPr>
@@ -22359,7 +21646,7 @@
       </p:sp>
       <p:sp>
         <p:nvSpPr>
-          <p:cNvPr id="11" name="Rectangle 10"/>
+          <p:cNvPr id="10" name="Rectangle 9"/>
           <p:cNvSpPr/>
           <p:nvPr/>
         </p:nvSpPr>
@@ -22408,7 +21695,7 @@
       </p:sp>
       <p:sp>
         <p:nvSpPr>
-          <p:cNvPr id="12" name="TextBox 11"/>
+          <p:cNvPr id="11" name="TextBox 10"/>
           <p:cNvSpPr txBox="1"/>
           <p:nvPr/>
         </p:nvSpPr>
@@ -22450,7 +21737,7 @@
       </p:sp>
       <p:sp>
         <p:nvSpPr>
-          <p:cNvPr id="13" name="TextBox 12"/>
+          <p:cNvPr id="12" name="TextBox 11"/>
           <p:cNvSpPr txBox="1"/>
           <p:nvPr/>
         </p:nvSpPr>
@@ -22492,7 +21779,7 @@
       </p:sp>
       <p:sp>
         <p:nvSpPr>
-          <p:cNvPr id="14" name="TextBox 13"/>
+          <p:cNvPr id="13" name="TextBox 12"/>
           <p:cNvSpPr txBox="1"/>
           <p:nvPr/>
         </p:nvSpPr>
@@ -22534,7 +21821,7 @@
       </p:sp>
       <p:sp>
         <p:nvSpPr>
-          <p:cNvPr id="15" name="Rectangle 14"/>
+          <p:cNvPr id="14" name="Rectangle 13"/>
           <p:cNvSpPr/>
           <p:nvPr/>
         </p:nvSpPr>
@@ -22583,7 +21870,7 @@
       </p:sp>
       <p:sp>
         <p:nvSpPr>
-          <p:cNvPr id="16" name="Rectangle 15"/>
+          <p:cNvPr id="15" name="Rectangle 14"/>
           <p:cNvSpPr/>
           <p:nvPr/>
         </p:nvSpPr>
@@ -22632,7 +21919,7 @@
       </p:sp>
       <p:sp>
         <p:nvSpPr>
-          <p:cNvPr id="17" name="TextBox 16"/>
+          <p:cNvPr id="16" name="TextBox 15"/>
           <p:cNvSpPr txBox="1"/>
           <p:nvPr/>
         </p:nvSpPr>
@@ -22674,7 +21961,7 @@
       </p:sp>
       <p:sp>
         <p:nvSpPr>
-          <p:cNvPr id="18" name="TextBox 17"/>
+          <p:cNvPr id="17" name="TextBox 16"/>
           <p:cNvSpPr txBox="1"/>
           <p:nvPr/>
         </p:nvSpPr>
@@ -22716,7 +22003,7 @@
       </p:sp>
       <p:sp>
         <p:nvSpPr>
-          <p:cNvPr id="19" name="TextBox 18"/>
+          <p:cNvPr id="18" name="TextBox 17"/>
           <p:cNvSpPr txBox="1"/>
           <p:nvPr/>
         </p:nvSpPr>
@@ -22758,7 +22045,7 @@
       </p:sp>
       <p:sp>
         <p:nvSpPr>
-          <p:cNvPr id="20" name="TextBox 19"/>
+          <p:cNvPr id="19" name="TextBox 18"/>
           <p:cNvSpPr txBox="1"/>
           <p:nvPr/>
         </p:nvSpPr>
@@ -22800,7 +22087,7 @@
       </p:sp>
       <p:graphicFrame>
         <p:nvGraphicFramePr>
-          <p:cNvPr id="21" name="Table 20"/>
+          <p:cNvPr id="20" name="Table 19"/>
           <p:cNvGraphicFramePr>
             <a:graphicFrameLocks noGrp="1"/>
           </p:cNvGraphicFramePr>
@@ -23322,7 +22609,7 @@
       </p:graphicFrame>
       <p:sp>
         <p:nvSpPr>
-          <p:cNvPr id="22" name="TextBox 21"/>
+          <p:cNvPr id="21" name="TextBox 20"/>
           <p:cNvSpPr txBox="1"/>
           <p:nvPr/>
         </p:nvSpPr>
@@ -23440,7 +22727,7 @@
       </p:sp>
       <p:sp>
         <p:nvSpPr>
-          <p:cNvPr id="23" name="Rectangle 22"/>
+          <p:cNvPr id="22" name="Rectangle 21"/>
           <p:cNvSpPr/>
           <p:nvPr/>
         </p:nvSpPr>
@@ -23489,7 +22776,7 @@
       </p:sp>
       <p:sp>
         <p:nvSpPr>
-          <p:cNvPr id="24" name="TextBox 23"/>
+          <p:cNvPr id="23" name="TextBox 22"/>
           <p:cNvSpPr txBox="1"/>
           <p:nvPr/>
         </p:nvSpPr>
@@ -23531,7 +22818,7 @@
       </p:sp>
       <p:sp>
         <p:nvSpPr>
-          <p:cNvPr id="25" name="TextBox 24"/>
+          <p:cNvPr id="24" name="TextBox 23"/>
           <p:cNvSpPr txBox="1"/>
           <p:nvPr/>
         </p:nvSpPr>
@@ -23573,7 +22860,7 @@
       </p:sp>
       <p:sp>
         <p:nvSpPr>
-          <p:cNvPr id="26" name="TextBox 25"/>
+          <p:cNvPr id="25" name="TextBox 24"/>
           <p:cNvSpPr txBox="1"/>
           <p:nvPr/>
         </p:nvSpPr>
@@ -23689,7 +22976,7 @@
         <p:spPr>
           <a:xfrm>
             <a:off x="640080" y="329184"/>
-            <a:ext cx="5303520" cy="182880"/>
+            <a:ext cx="9875520" cy="182880"/>
           </a:xfrm>
           <a:prstGeom prst="rect">
             <a:avLst/>
@@ -23730,48 +23017,6 @@
         </p:nvSpPr>
         <p:spPr>
           <a:xfrm>
-            <a:off x="5897880" y="310896"/>
-            <a:ext cx="4800600" cy="256032"/>
-          </a:xfrm>
-          <a:prstGeom prst="rect">
-            <a:avLst/>
-          </a:prstGeom>
-          <a:noFill/>
-        </p:spPr>
-        <p:txBody>
-          <a:bodyPr wrap="none" lIns="9144" rIns="9144" tIns="9144" bIns="9144" anchor="t">
-            <a:spAutoFit/>
-          </a:bodyPr>
-          <a:lstStyle/>
-          <a:p>
-            <a:pPr algn="r">
-              <a:spcAft>
-                <a:spcPts val="0"/>
-              </a:spcAft>
-              <a:defRPr sz="680" b="1">
-                <a:solidFill>
-                  <a:srgbClr val="4F6B00"/>
-                </a:solidFill>
-                <a:latin typeface="Inter"/>
-              </a:defRPr>
-            </a:pPr>
-            <a:r>
-              <a:rPr>
-                <a:latin typeface="Inter"/>
-              </a:rPr>
-              <a:t>Illustrative, Gradient Maintained — demo data, not the client's holdings or managers</a:t>
-            </a:r>
-          </a:p>
-        </p:txBody>
-      </p:sp>
-      <p:sp>
-        <p:nvSpPr>
-          <p:cNvPr id="5" name="TextBox 4"/>
-          <p:cNvSpPr txBox="1"/>
-          <p:nvPr/>
-        </p:nvSpPr>
-        <p:spPr>
-          <a:xfrm>
             <a:off x="640080" y="566928"/>
             <a:ext cx="10058400" cy="530352"/>
           </a:xfrm>
@@ -23808,7 +23053,7 @@
       </p:sp>
       <p:sp>
         <p:nvSpPr>
-          <p:cNvPr id="6" name="Rectangle 5"/>
+          <p:cNvPr id="5" name="Rectangle 4"/>
           <p:cNvSpPr/>
           <p:nvPr/>
         </p:nvSpPr>
@@ -23857,7 +23102,7 @@
       </p:sp>
       <p:sp>
         <p:nvSpPr>
-          <p:cNvPr id="7" name="Rectangle 6"/>
+          <p:cNvPr id="6" name="Rectangle 5"/>
           <p:cNvSpPr/>
           <p:nvPr/>
         </p:nvSpPr>
@@ -23906,7 +23151,7 @@
       </p:sp>
       <p:sp>
         <p:nvSpPr>
-          <p:cNvPr id="8" name="TextBox 7"/>
+          <p:cNvPr id="7" name="TextBox 6"/>
           <p:cNvSpPr txBox="1"/>
           <p:nvPr/>
         </p:nvSpPr>
@@ -23948,7 +23193,7 @@
       </p:sp>
       <p:graphicFrame>
         <p:nvGraphicFramePr>
-          <p:cNvPr id="9" name="Table 8"/>
+          <p:cNvPr id="8" name="Table 7"/>
           <p:cNvGraphicFramePr>
             <a:graphicFrameLocks noGrp="1"/>
           </p:cNvGraphicFramePr>
@@ -24097,7 +23342,7 @@
                         <a:rPr>
                           <a:latin typeface="Inter"/>
                         </a:rPr>
-                        <a:t>● available</a:t>
+                        <a:t>● Available</a:t>
                       </a:r>
                     </a:p>
                   </a:txBody>
@@ -24180,7 +23425,7 @@
                         <a:rPr>
                           <a:latin typeface="Inter"/>
                         </a:rPr>
-                        <a:t>● available</a:t>
+                        <a:t>● Available</a:t>
                       </a:r>
                     </a:p>
                   </a:txBody>
@@ -24263,7 +23508,7 @@
                         <a:rPr>
                           <a:latin typeface="Inter"/>
                         </a:rPr>
-                        <a:t>● available</a:t>
+                        <a:t>● Available</a:t>
                       </a:r>
                     </a:p>
                   </a:txBody>
@@ -24346,7 +23591,7 @@
                         <a:rPr>
                           <a:latin typeface="Inter"/>
                         </a:rPr>
-                        <a:t>● available</a:t>
+                        <a:t>● Available</a:t>
                       </a:r>
                     </a:p>
                   </a:txBody>
@@ -24429,7 +23674,7 @@
                         <a:rPr>
                           <a:latin typeface="Inter"/>
                         </a:rPr>
-                        <a:t>● available</a:t>
+                        <a:t>● Available</a:t>
                       </a:r>
                     </a:p>
                   </a:txBody>
@@ -24512,7 +23757,7 @@
                         <a:rPr>
                           <a:latin typeface="Inter"/>
                         </a:rPr>
-                        <a:t>● available</a:t>
+                        <a:t>● Available</a:t>
                       </a:r>
                     </a:p>
                   </a:txBody>
@@ -24595,7 +23840,7 @@
                         <a:rPr>
                           <a:latin typeface="Inter"/>
                         </a:rPr>
-                        <a:t>● available</a:t>
+                        <a:t>● Available</a:t>
                       </a:r>
                     </a:p>
                   </a:txBody>
@@ -24639,7 +23884,7 @@
       </p:graphicFrame>
       <p:sp>
         <p:nvSpPr>
-          <p:cNvPr id="10" name="Rectangle 9"/>
+          <p:cNvPr id="9" name="Rectangle 8"/>
           <p:cNvSpPr/>
           <p:nvPr/>
         </p:nvSpPr>
@@ -24688,7 +23933,7 @@
       </p:sp>
       <p:sp>
         <p:nvSpPr>
-          <p:cNvPr id="11" name="TextBox 10"/>
+          <p:cNvPr id="10" name="TextBox 9"/>
           <p:cNvSpPr txBox="1"/>
           <p:nvPr/>
         </p:nvSpPr>
@@ -24730,7 +23975,7 @@
       </p:sp>
       <p:sp>
         <p:nvSpPr>
-          <p:cNvPr id="12" name="TextBox 11"/>
+          <p:cNvPr id="11" name="TextBox 10"/>
           <p:cNvSpPr txBox="1"/>
           <p:nvPr/>
         </p:nvSpPr>
@@ -24772,7 +24017,7 @@
       </p:sp>
       <p:sp>
         <p:nvSpPr>
-          <p:cNvPr id="13" name="TextBox 12"/>
+          <p:cNvPr id="12" name="TextBox 11"/>
           <p:cNvSpPr txBox="1"/>
           <p:nvPr/>
         </p:nvSpPr>
@@ -24887,48 +24132,6 @@
         </p:nvSpPr>
         <p:spPr>
           <a:xfrm>
-            <a:off x="5897880" y="310896"/>
-            <a:ext cx="4800600" cy="256032"/>
-          </a:xfrm>
-          <a:prstGeom prst="rect">
-            <a:avLst/>
-          </a:prstGeom>
-          <a:noFill/>
-        </p:spPr>
-        <p:txBody>
-          <a:bodyPr wrap="none" lIns="9144" rIns="9144" tIns="9144" bIns="9144" anchor="t">
-            <a:spAutoFit/>
-          </a:bodyPr>
-          <a:lstStyle/>
-          <a:p>
-            <a:pPr algn="r">
-              <a:spcAft>
-                <a:spcPts val="0"/>
-              </a:spcAft>
-              <a:defRPr sz="680" b="1">
-                <a:solidFill>
-                  <a:srgbClr val="4F6B00"/>
-                </a:solidFill>
-                <a:latin typeface="Inter"/>
-              </a:defRPr>
-            </a:pPr>
-            <a:r>
-              <a:rPr>
-                <a:latin typeface="Inter"/>
-              </a:rPr>
-              <a:t>Illustrative, Gradient Maintained — demo data, not the client's holdings or managers</a:t>
-            </a:r>
-          </a:p>
-        </p:txBody>
-      </p:sp>
-      <p:sp>
-        <p:nvSpPr>
-          <p:cNvPr id="4" name="TextBox 3"/>
-          <p:cNvSpPr txBox="1"/>
-          <p:nvPr/>
-        </p:nvSpPr>
-        <p:spPr>
-          <a:xfrm>
             <a:off x="640080" y="566928"/>
             <a:ext cx="10058400" cy="530352"/>
           </a:xfrm>
@@ -24965,7 +24168,7 @@
       </p:sp>
       <p:sp>
         <p:nvSpPr>
-          <p:cNvPr id="5" name="Rectangle 4"/>
+          <p:cNvPr id="4" name="Rectangle 3"/>
           <p:cNvSpPr/>
           <p:nvPr/>
         </p:nvSpPr>
@@ -25014,7 +24217,7 @@
       </p:sp>
       <p:sp>
         <p:nvSpPr>
-          <p:cNvPr id="6" name="Rectangle 5"/>
+          <p:cNvPr id="5" name="Rectangle 4"/>
           <p:cNvSpPr/>
           <p:nvPr/>
         </p:nvSpPr>
@@ -25063,7 +24266,7 @@
       </p:sp>
       <p:sp>
         <p:nvSpPr>
-          <p:cNvPr id="7" name="TextBox 6"/>
+          <p:cNvPr id="6" name="TextBox 5"/>
           <p:cNvSpPr txBox="1"/>
           <p:nvPr/>
         </p:nvSpPr>
@@ -25105,7 +24308,7 @@
       </p:sp>
       <p:graphicFrame>
         <p:nvGraphicFramePr>
-          <p:cNvPr id="8" name="Table 7"/>
+          <p:cNvPr id="7" name="Table 6"/>
           <p:cNvGraphicFramePr>
             <a:graphicFrameLocks noGrp="1"/>
           </p:cNvGraphicFramePr>
@@ -25123,14 +24326,10 @@
               </a:tblPr>
               <a:tblGrid>
                 <a:gridCol w="2011680"/>
-                <a:gridCol w="1112139"/>
-                <a:gridCol w="1112139"/>
-                <a:gridCol w="1112139"/>
-                <a:gridCol w="1112139"/>
-                <a:gridCol w="1112139"/>
-                <a:gridCol w="1112139"/>
-                <a:gridCol w="1112139"/>
-                <a:gridCol w="1112139"/>
+                <a:gridCol w="2224278"/>
+                <a:gridCol w="2224278"/>
+                <a:gridCol w="2224278"/>
+                <a:gridCol w="2224278"/>
               </a:tblGrid>
               <a:tr h="586359">
                 <a:tc>
@@ -25204,7 +24403,7 @@
                         <a:rPr>
                           <a:latin typeface="Inter"/>
                         </a:rPr>
-                        <a:t>Basis</a:t>
+                        <a:t>Source</a:t>
                       </a:r>
                     </a:p>
                   </a:txBody>
@@ -25231,7 +24430,7 @@
                         <a:rPr>
                           <a:latin typeface="Inter"/>
                         </a:rPr>
-                        <a:t>Tool / view</a:t>
+                        <a:t>As of</a:t>
                       </a:r>
                     </a:p>
                   </a:txBody>
@@ -25258,115 +24457,7 @@
                         <a:rPr>
                           <a:latin typeface="Inter"/>
                         </a:rPr>
-                        <a:t>Key parameters</a:t>
-                      </a:r>
-                    </a:p>
-                  </a:txBody>
-                  <a:tcPr marL="54864" marR="54864" marT="27432" marB="27432" anchor="ctr">
-                    <a:solidFill>
-                      <a:srgbClr val="0D1117"/>
-                    </a:solidFill>
-                  </a:tcPr>
-                </a:tc>
-                <a:tc>
-                  <a:txBody>
-                    <a:bodyPr/>
-                    <a:lstStyle/>
-                    <a:p>
-                      <a:pPr>
-                        <a:defRPr sz="750" b="1">
-                          <a:solidFill>
-                            <a:srgbClr val="FFFFFF"/>
-                          </a:solidFill>
-                          <a:latin typeface="Inter"/>
-                        </a:defRPr>
-                      </a:pPr>
-                      <a:r>
-                        <a:rPr>
-                          <a:latin typeface="Inter"/>
-                        </a:rPr>
-                        <a:t>As of</a:t>
-                      </a:r>
-                    </a:p>
-                  </a:txBody>
-                  <a:tcPr marL="54864" marR="54864" marT="27432" marB="27432" anchor="ctr">
-                    <a:solidFill>
-                      <a:srgbClr val="0D1117"/>
-                    </a:solidFill>
-                  </a:tcPr>
-                </a:tc>
-                <a:tc>
-                  <a:txBody>
-                    <a:bodyPr/>
-                    <a:lstStyle/>
-                    <a:p>
-                      <a:pPr>
-                        <a:defRPr sz="750" b="1">
-                          <a:solidFill>
-                            <a:srgbClr val="FFFFFF"/>
-                          </a:solidFill>
-                          <a:latin typeface="Inter"/>
-                        </a:defRPr>
-                      </a:pPr>
-                      <a:r>
-                        <a:rPr>
-                          <a:latin typeface="Inter"/>
-                        </a:rPr>
-                        <a:t>Data scope</a:t>
-                      </a:r>
-                    </a:p>
-                  </a:txBody>
-                  <a:tcPr marL="54864" marR="54864" marT="27432" marB="27432" anchor="ctr">
-                    <a:solidFill>
-                      <a:srgbClr val="0D1117"/>
-                    </a:solidFill>
-                  </a:tcPr>
-                </a:tc>
-                <a:tc>
-                  <a:txBody>
-                    <a:bodyPr/>
-                    <a:lstStyle/>
-                    <a:p>
-                      <a:pPr>
-                        <a:defRPr sz="750" b="1">
-                          <a:solidFill>
-                            <a:srgbClr val="FFFFFF"/>
-                          </a:solidFill>
-                          <a:latin typeface="Inter"/>
-                        </a:defRPr>
-                      </a:pPr>
-                      <a:r>
-                        <a:rPr>
-                          <a:latin typeface="Inter"/>
-                        </a:rPr>
-                        <a:t>Validation</a:t>
-                      </a:r>
-                    </a:p>
-                  </a:txBody>
-                  <a:tcPr marL="54864" marR="54864" marT="27432" marB="27432" anchor="ctr">
-                    <a:solidFill>
-                      <a:srgbClr val="0D1117"/>
-                    </a:solidFill>
-                  </a:tcPr>
-                </a:tc>
-                <a:tc>
-                  <a:txBody>
-                    <a:bodyPr/>
-                    <a:lstStyle/>
-                    <a:p>
-                      <a:pPr>
-                        <a:defRPr sz="750" b="1">
-                          <a:solidFill>
-                            <a:srgbClr val="FFFFFF"/>
-                          </a:solidFill>
-                          <a:latin typeface="Inter"/>
-                        </a:defRPr>
-                      </a:pPr>
-                      <a:r>
-                        <a:rPr>
-                          <a:latin typeface="Inter"/>
-                        </a:rPr>
-                        <a:t>Digest</a:t>
+                        <a:t>Check</a:t>
                       </a:r>
                     </a:p>
                   </a:txBody>
@@ -25384,7 +24475,7 @@
                     <a:lstStyle/>
                     <a:p>
                       <a:pPr>
-                        <a:defRPr sz="650" b="1">
+                        <a:defRPr sz="720" b="1">
                           <a:solidFill>
                             <a:srgbClr val="0D1117"/>
                           </a:solidFill>
@@ -25411,7 +24502,7 @@
                     <a:lstStyle/>
                     <a:p>
                       <a:pPr>
-                        <a:defRPr sz="650" b="0">
+                        <a:defRPr sz="720" b="0">
                           <a:solidFill>
                             <a:srgbClr val="0D1117"/>
                           </a:solidFill>
@@ -25438,7 +24529,7 @@
                     <a:lstStyle/>
                     <a:p>
                       <a:pPr>
-                        <a:defRPr sz="650" b="0">
+                        <a:defRPr sz="720" b="0">
                           <a:solidFill>
                             <a:srgbClr val="0D1117"/>
                           </a:solidFill>
@@ -25449,7 +24540,7 @@
                         <a:rPr>
                           <a:latin typeface="Inter"/>
                         </a:rPr>
-                        <a:t>gradient_tool_metadata</a:t>
+                        <a:t>get_gradient_capabilities (tool metadata)</a:t>
                       </a:r>
                     </a:p>
                   </a:txBody>
@@ -25465,7 +24556,7 @@
                     <a:lstStyle/>
                     <a:p>
                       <a:pPr>
-                        <a:defRPr sz="650" b="0">
+                        <a:defRPr sz="720" b="0">
                           <a:solidFill>
                             <a:srgbClr val="0D1117"/>
                           </a:solidFill>
@@ -25476,7 +24567,7 @@
                         <a:rPr>
                           <a:latin typeface="Inter"/>
                         </a:rPr>
-                        <a:t>get_gradient_capabilities</a:t>
+                        <a:t>2026-10-08</a:t>
                       </a:r>
                     </a:p>
                   </a:txBody>
@@ -25492,88 +24583,7 @@
                     <a:lstStyle/>
                     <a:p>
                       <a:pPr>
-                        <a:defRPr sz="650" b="0">
-                          <a:solidFill>
-                            <a:srgbClr val="0D1117"/>
-                          </a:solidFill>
-                          <a:latin typeface="Inter"/>
-                        </a:defRPr>
-                      </a:pPr>
-                      <a:r>
-                        <a:rPr>
-                          <a:latin typeface="Inter"/>
-                        </a:rPr>
-                        <a:t>detail=full</a:t>
-                      </a:r>
-                    </a:p>
-                  </a:txBody>
-                  <a:tcPr marL="54864" marR="54864" marT="27432" marB="27432" anchor="ctr">
-                    <a:solidFill>
-                      <a:srgbClr val="FFFFFF"/>
-                    </a:solidFill>
-                  </a:tcPr>
-                </a:tc>
-                <a:tc>
-                  <a:txBody>
-                    <a:bodyPr/>
-                    <a:lstStyle/>
-                    <a:p>
-                      <a:pPr>
-                        <a:defRPr sz="650" b="0">
-                          <a:solidFill>
-                            <a:srgbClr val="0D1117"/>
-                          </a:solidFill>
-                          <a:latin typeface="Inter"/>
-                        </a:defRPr>
-                      </a:pPr>
-                      <a:r>
-                        <a:rPr>
-                          <a:latin typeface="Inter"/>
-                        </a:rPr>
-                        <a:t>2026-10-08</a:t>
-                      </a:r>
-                    </a:p>
-                  </a:txBody>
-                  <a:tcPr marL="54864" marR="54864" marT="27432" marB="27432" anchor="ctr">
-                    <a:solidFill>
-                      <a:srgbClr val="FFFFFF"/>
-                    </a:solidFill>
-                  </a:tcPr>
-                </a:tc>
-                <a:tc>
-                  <a:txBody>
-                    <a:bodyPr/>
-                    <a:lstStyle/>
-                    <a:p>
-                      <a:pPr>
-                        <a:defRPr sz="650" b="0">
-                          <a:solidFill>
-                            <a:srgbClr val="0D1117"/>
-                          </a:solidFill>
-                          <a:latin typeface="Inter"/>
-                        </a:defRPr>
-                      </a:pPr>
-                      <a:r>
-                        <a:rPr>
-                          <a:latin typeface="Inter"/>
-                        </a:rPr>
-                        <a:t>Illustrative sample data</a:t>
-                      </a:r>
-                    </a:p>
-                  </a:txBody>
-                  <a:tcPr marL="54864" marR="54864" marT="27432" marB="27432" anchor="ctr">
-                    <a:solidFill>
-                      <a:srgbClr val="FFFFFF"/>
-                    </a:solidFill>
-                  </a:tcPr>
-                </a:tc>
-                <a:tc>
-                  <a:txBody>
-                    <a:bodyPr/>
-                    <a:lstStyle/>
-                    <a:p>
-                      <a:pPr>
-                        <a:defRPr sz="650" b="1">
+                        <a:defRPr sz="720" b="1">
                           <a:solidFill>
                             <a:srgbClr val="C6F432"/>
                           </a:solidFill>
@@ -25584,40 +24594,13 @@
                         <a:rPr>
                           <a:latin typeface="Inter"/>
                         </a:rPr>
-                        <a:t>● passed</a:t>
+                        <a:t>● Passed</a:t>
                       </a:r>
                     </a:p>
                   </a:txBody>
                   <a:tcPr marL="54864" marR="54864" marT="27432" marB="27432" anchor="ctr">
                     <a:solidFill>
                       <a:srgbClr val="F5F7F9"/>
-                    </a:solidFill>
-                  </a:tcPr>
-                </a:tc>
-                <a:tc>
-                  <a:txBody>
-                    <a:bodyPr/>
-                    <a:lstStyle/>
-                    <a:p>
-                      <a:pPr>
-                        <a:defRPr sz="650" b="0">
-                          <a:solidFill>
-                            <a:srgbClr val="0D1117"/>
-                          </a:solidFill>
-                          <a:latin typeface="Inter"/>
-                        </a:defRPr>
-                      </a:pPr>
-                      <a:r>
-                        <a:rPr>
-                          <a:latin typeface="Inter"/>
-                        </a:rPr>
-                        <a:t>not_applicable_metadata_response</a:t>
-                      </a:r>
-                    </a:p>
-                  </a:txBody>
-                  <a:tcPr marL="54864" marR="54864" marT="27432" marB="27432" anchor="ctr">
-                    <a:solidFill>
-                      <a:srgbClr val="FFFFFF"/>
                     </a:solidFill>
                   </a:tcPr>
                 </a:tc>
@@ -25629,7 +24612,7 @@
                     <a:lstStyle/>
                     <a:p>
                       <a:pPr>
-                        <a:defRPr sz="650" b="1">
+                        <a:defRPr sz="720" b="1">
                           <a:solidFill>
                             <a:srgbClr val="0D1117"/>
                           </a:solidFill>
@@ -25656,7 +24639,7 @@
                     <a:lstStyle/>
                     <a:p>
                       <a:pPr>
-                        <a:defRPr sz="650" b="0">
+                        <a:defRPr sz="720" b="0">
                           <a:solidFill>
                             <a:srgbClr val="0D1117"/>
                           </a:solidFill>
@@ -25683,7 +24666,7 @@
                     <a:lstStyle/>
                     <a:p>
                       <a:pPr>
-                        <a:defRPr sz="650" b="0">
+                        <a:defRPr sz="720" b="0">
                           <a:solidFill>
                             <a:srgbClr val="0D1117"/>
                           </a:solidFill>
@@ -25694,7 +24677,7 @@
                         <a:rPr>
                           <a:latin typeface="Inter"/>
                         </a:rPr>
-                        <a:t>gradient_tool</a:t>
+                        <a:t>list_portfolios; get_portfolio_structure</a:t>
                       </a:r>
                     </a:p>
                   </a:txBody>
@@ -25710,7 +24693,7 @@
                     <a:lstStyle/>
                     <a:p>
                       <a:pPr>
-                        <a:defRPr sz="650" b="0">
+                        <a:defRPr sz="720" b="0">
                           <a:solidFill>
                             <a:srgbClr val="0D1117"/>
                           </a:solidFill>
@@ -25721,7 +24704,7 @@
                         <a:rPr>
                           <a:latin typeface="Inter"/>
                         </a:rPr>
-                        <a:t>list_portfolios; get_portfolio_structure</a:t>
+                        <a:t>2026-10-08</a:t>
                       </a:r>
                     </a:p>
                   </a:txBody>
@@ -25737,88 +24720,7 @@
                     <a:lstStyle/>
                     <a:p>
                       <a:pPr>
-                        <a:defRPr sz="650" b="0">
-                          <a:solidFill>
-                            <a:srgbClr val="0D1117"/>
-                          </a:solidFill>
-                          <a:latin typeface="Inter"/>
-                        </a:defRPr>
-                      </a:pPr>
-                      <a:r>
-                        <a:rPr>
-                          <a:latin typeface="Inter"/>
-                        </a:rPr>
-                        <a:t>view=allocation_tree</a:t>
-                      </a:r>
-                    </a:p>
-                  </a:txBody>
-                  <a:tcPr marL="54864" marR="54864" marT="27432" marB="27432" anchor="ctr">
-                    <a:solidFill>
-                      <a:srgbClr val="F5F7F9"/>
-                    </a:solidFill>
-                  </a:tcPr>
-                </a:tc>
-                <a:tc>
-                  <a:txBody>
-                    <a:bodyPr/>
-                    <a:lstStyle/>
-                    <a:p>
-                      <a:pPr>
-                        <a:defRPr sz="650" b="0">
-                          <a:solidFill>
-                            <a:srgbClr val="0D1117"/>
-                          </a:solidFill>
-                          <a:latin typeface="Inter"/>
-                        </a:defRPr>
-                      </a:pPr>
-                      <a:r>
-                        <a:rPr>
-                          <a:latin typeface="Inter"/>
-                        </a:rPr>
-                        <a:t>2026-10-08</a:t>
-                      </a:r>
-                    </a:p>
-                  </a:txBody>
-                  <a:tcPr marL="54864" marR="54864" marT="27432" marB="27432" anchor="ctr">
-                    <a:solidFill>
-                      <a:srgbClr val="F5F7F9"/>
-                    </a:solidFill>
-                  </a:tcPr>
-                </a:tc>
-                <a:tc>
-                  <a:txBody>
-                    <a:bodyPr/>
-                    <a:lstStyle/>
-                    <a:p>
-                      <a:pPr>
-                        <a:defRPr sz="650" b="0">
-                          <a:solidFill>
-                            <a:srgbClr val="0D1117"/>
-                          </a:solidFill>
-                          <a:latin typeface="Inter"/>
-                        </a:defRPr>
-                      </a:pPr>
-                      <a:r>
-                        <a:rPr>
-                          <a:latin typeface="Inter"/>
-                        </a:rPr>
-                        <a:t>Illustrative sample data</a:t>
-                      </a:r>
-                    </a:p>
-                  </a:txBody>
-                  <a:tcPr marL="54864" marR="54864" marT="27432" marB="27432" anchor="ctr">
-                    <a:solidFill>
-                      <a:srgbClr val="F5F7F9"/>
-                    </a:solidFill>
-                  </a:tcPr>
-                </a:tc>
-                <a:tc>
-                  <a:txBody>
-                    <a:bodyPr/>
-                    <a:lstStyle/>
-                    <a:p>
-                      <a:pPr>
-                        <a:defRPr sz="650" b="1">
+                        <a:defRPr sz="720" b="1">
                           <a:solidFill>
                             <a:srgbClr val="C6F432"/>
                           </a:solidFill>
@@ -25829,34 +24731,7 @@
                         <a:rPr>
                           <a:latin typeface="Inter"/>
                         </a:rPr>
-                        <a:t>● passed</a:t>
-                      </a:r>
-                    </a:p>
-                  </a:txBody>
-                  <a:tcPr marL="54864" marR="54864" marT="27432" marB="27432" anchor="ctr">
-                    <a:solidFill>
-                      <a:srgbClr val="F5F7F9"/>
-                    </a:solidFill>
-                  </a:tcPr>
-                </a:tc>
-                <a:tc>
-                  <a:txBody>
-                    <a:bodyPr/>
-                    <a:lstStyle/>
-                    <a:p>
-                      <a:pPr>
-                        <a:defRPr sz="650" b="0">
-                          <a:solidFill>
-                            <a:srgbClr val="0D1117"/>
-                          </a:solidFill>
-                          <a:latin typeface="Inter"/>
-                        </a:defRPr>
-                      </a:pPr>
-                      <a:r>
-                        <a:rPr>
-                          <a:latin typeface="Inter"/>
-                        </a:rPr>
-                        <a:t>sha256:2222222222222222222222222222222222222222222222222222222222222222</a:t>
+                        <a:t>● Passed</a:t>
                       </a:r>
                     </a:p>
                   </a:txBody>
@@ -25874,7 +24749,7 @@
                     <a:lstStyle/>
                     <a:p>
                       <a:pPr>
-                        <a:defRPr sz="650" b="1">
+                        <a:defRPr sz="720" b="1">
                           <a:solidFill>
                             <a:srgbClr val="0D1117"/>
                           </a:solidFill>
@@ -25901,7 +24776,7 @@
                     <a:lstStyle/>
                     <a:p>
                       <a:pPr>
-                        <a:defRPr sz="650" b="0">
+                        <a:defRPr sz="720" b="0">
                           <a:solidFill>
                             <a:srgbClr val="0D1117"/>
                           </a:solidFill>
@@ -25928,7 +24803,7 @@
                     <a:lstStyle/>
                     <a:p>
                       <a:pPr>
-                        <a:defRPr sz="650" b="0">
+                        <a:defRPr sz="720" b="0">
                           <a:solidFill>
                             <a:srgbClr val="0D1117"/>
                           </a:solidFill>
@@ -25939,7 +24814,7 @@
                         <a:rPr>
                           <a:latin typeface="Inter"/>
                         </a:rPr>
-                        <a:t>gradient_tool</a:t>
+                        <a:t>get_portfolio_historical_returns</a:t>
                       </a:r>
                     </a:p>
                   </a:txBody>
@@ -25955,7 +24830,7 @@
                     <a:lstStyle/>
                     <a:p>
                       <a:pPr>
-                        <a:defRPr sz="650" b="0">
+                        <a:defRPr sz="720" b="0">
                           <a:solidFill>
                             <a:srgbClr val="0D1117"/>
                           </a:solidFill>
@@ -25966,7 +24841,7 @@
                         <a:rPr>
                           <a:latin typeface="Inter"/>
                         </a:rPr>
-                        <a:t>get_portfolio_historical_returns</a:t>
+                        <a:t>2026-06-30</a:t>
                       </a:r>
                     </a:p>
                   </a:txBody>
@@ -25982,88 +24857,7 @@
                     <a:lstStyle/>
                     <a:p>
                       <a:pPr>
-                        <a:defRPr sz="650" b="0">
-                          <a:solidFill>
-                            <a:srgbClr val="0D1117"/>
-                          </a:solidFill>
-                          <a:latin typeface="Inter"/>
-                        </a:defRPr>
-                      </a:pPr>
-                      <a:r>
-                        <a:rPr>
-                          <a:latin typeface="Inter"/>
-                        </a:rPr>
-                        <a:t>five sections</a:t>
-                      </a:r>
-                    </a:p>
-                  </a:txBody>
-                  <a:tcPr marL="54864" marR="54864" marT="27432" marB="27432" anchor="ctr">
-                    <a:solidFill>
-                      <a:srgbClr val="FFFFFF"/>
-                    </a:solidFill>
-                  </a:tcPr>
-                </a:tc>
-                <a:tc>
-                  <a:txBody>
-                    <a:bodyPr/>
-                    <a:lstStyle/>
-                    <a:p>
-                      <a:pPr>
-                        <a:defRPr sz="650" b="0">
-                          <a:solidFill>
-                            <a:srgbClr val="0D1117"/>
-                          </a:solidFill>
-                          <a:latin typeface="Inter"/>
-                        </a:defRPr>
-                      </a:pPr>
-                      <a:r>
-                        <a:rPr>
-                          <a:latin typeface="Inter"/>
-                        </a:rPr>
-                        <a:t>2026-06-30</a:t>
-                      </a:r>
-                    </a:p>
-                  </a:txBody>
-                  <a:tcPr marL="54864" marR="54864" marT="27432" marB="27432" anchor="ctr">
-                    <a:solidFill>
-                      <a:srgbClr val="FFFFFF"/>
-                    </a:solidFill>
-                  </a:tcPr>
-                </a:tc>
-                <a:tc>
-                  <a:txBody>
-                    <a:bodyPr/>
-                    <a:lstStyle/>
-                    <a:p>
-                      <a:pPr>
-                        <a:defRPr sz="650" b="0">
-                          <a:solidFill>
-                            <a:srgbClr val="0D1117"/>
-                          </a:solidFill>
-                          <a:latin typeface="Inter"/>
-                        </a:defRPr>
-                      </a:pPr>
-                      <a:r>
-                        <a:rPr>
-                          <a:latin typeface="Inter"/>
-                        </a:rPr>
-                        <a:t>Illustrative sample data</a:t>
-                      </a:r>
-                    </a:p>
-                  </a:txBody>
-                  <a:tcPr marL="54864" marR="54864" marT="27432" marB="27432" anchor="ctr">
-                    <a:solidFill>
-                      <a:srgbClr val="FFFFFF"/>
-                    </a:solidFill>
-                  </a:tcPr>
-                </a:tc>
-                <a:tc>
-                  <a:txBody>
-                    <a:bodyPr/>
-                    <a:lstStyle/>
-                    <a:p>
-                      <a:pPr>
-                        <a:defRPr sz="650" b="1">
+                        <a:defRPr sz="720" b="1">
                           <a:solidFill>
                             <a:srgbClr val="C6F432"/>
                           </a:solidFill>
@@ -26074,40 +24868,13 @@
                         <a:rPr>
                           <a:latin typeface="Inter"/>
                         </a:rPr>
-                        <a:t>● passed</a:t>
+                        <a:t>● Passed</a:t>
                       </a:r>
                     </a:p>
                   </a:txBody>
                   <a:tcPr marL="54864" marR="54864" marT="27432" marB="27432" anchor="ctr">
                     <a:solidFill>
                       <a:srgbClr val="F5F7F9"/>
-                    </a:solidFill>
-                  </a:tcPr>
-                </a:tc>
-                <a:tc>
-                  <a:txBody>
-                    <a:bodyPr/>
-                    <a:lstStyle/>
-                    <a:p>
-                      <a:pPr>
-                        <a:defRPr sz="650" b="0">
-                          <a:solidFill>
-                            <a:srgbClr val="0D1117"/>
-                          </a:solidFill>
-                          <a:latin typeface="Inter"/>
-                        </a:defRPr>
-                      </a:pPr>
-                      <a:r>
-                        <a:rPr>
-                          <a:latin typeface="Inter"/>
-                        </a:rPr>
-                        <a:t>sha256:3333333333333333333333333333333333333333333333333333333333333333</a:t>
-                      </a:r>
-                    </a:p>
-                  </a:txBody>
-                  <a:tcPr marL="54864" marR="54864" marT="27432" marB="27432" anchor="ctr">
-                    <a:solidFill>
-                      <a:srgbClr val="FFFFFF"/>
                     </a:solidFill>
                   </a:tcPr>
                 </a:tc>
@@ -26119,7 +24886,7 @@
                     <a:lstStyle/>
                     <a:p>
                       <a:pPr>
-                        <a:defRPr sz="650" b="1">
+                        <a:defRPr sz="720" b="1">
                           <a:solidFill>
                             <a:srgbClr val="0D1117"/>
                           </a:solidFill>
@@ -26146,7 +24913,7 @@
                     <a:lstStyle/>
                     <a:p>
                       <a:pPr>
-                        <a:defRPr sz="650" b="0">
+                        <a:defRPr sz="720" b="0">
                           <a:solidFill>
                             <a:srgbClr val="0D1117"/>
                           </a:solidFill>
@@ -26173,7 +24940,7 @@
                     <a:lstStyle/>
                     <a:p>
                       <a:pPr>
-                        <a:defRPr sz="650" b="0">
+                        <a:defRPr sz="720" b="0">
                           <a:solidFill>
                             <a:srgbClr val="0D1117"/>
                           </a:solidFill>
@@ -26184,7 +24951,7 @@
                         <a:rPr>
                           <a:latin typeface="Inter"/>
                         </a:rPr>
-                        <a:t>gradient_tool</a:t>
+                        <a:t>get_portfolio_attribution</a:t>
                       </a:r>
                     </a:p>
                   </a:txBody>
@@ -26200,7 +24967,7 @@
                     <a:lstStyle/>
                     <a:p>
                       <a:pPr>
-                        <a:defRPr sz="650" b="0">
+                        <a:defRPr sz="720" b="0">
                           <a:solidFill>
                             <a:srgbClr val="0D1117"/>
                           </a:solidFill>
@@ -26211,7 +24978,7 @@
                         <a:rPr>
                           <a:latin typeface="Inter"/>
                         </a:rPr>
-                        <a:t>get_portfolio_attribution</a:t>
+                        <a:t>2026-06-30</a:t>
                       </a:r>
                     </a:p>
                   </a:txBody>
@@ -26227,88 +24994,7 @@
                     <a:lstStyle/>
                     <a:p>
                       <a:pPr>
-                        <a:defRPr sz="650" b="0">
-                          <a:solidFill>
-                            <a:srgbClr val="0D1117"/>
-                          </a:solidFill>
-                          <a:latin typeface="Inter"/>
-                        </a:defRPr>
-                      </a:pPr>
-                      <a:r>
-                        <a:rPr>
-                          <a:latin typeface="Inter"/>
-                        </a:rPr>
-                        <a:t>policy; root; all sections</a:t>
-                      </a:r>
-                    </a:p>
-                  </a:txBody>
-                  <a:tcPr marL="54864" marR="54864" marT="27432" marB="27432" anchor="ctr">
-                    <a:solidFill>
-                      <a:srgbClr val="F5F7F9"/>
-                    </a:solidFill>
-                  </a:tcPr>
-                </a:tc>
-                <a:tc>
-                  <a:txBody>
-                    <a:bodyPr/>
-                    <a:lstStyle/>
-                    <a:p>
-                      <a:pPr>
-                        <a:defRPr sz="650" b="0">
-                          <a:solidFill>
-                            <a:srgbClr val="0D1117"/>
-                          </a:solidFill>
-                          <a:latin typeface="Inter"/>
-                        </a:defRPr>
-                      </a:pPr>
-                      <a:r>
-                        <a:rPr>
-                          <a:latin typeface="Inter"/>
-                        </a:rPr>
-                        <a:t>2026-06-30</a:t>
-                      </a:r>
-                    </a:p>
-                  </a:txBody>
-                  <a:tcPr marL="54864" marR="54864" marT="27432" marB="27432" anchor="ctr">
-                    <a:solidFill>
-                      <a:srgbClr val="F5F7F9"/>
-                    </a:solidFill>
-                  </a:tcPr>
-                </a:tc>
-                <a:tc>
-                  <a:txBody>
-                    <a:bodyPr/>
-                    <a:lstStyle/>
-                    <a:p>
-                      <a:pPr>
-                        <a:defRPr sz="650" b="0">
-                          <a:solidFill>
-                            <a:srgbClr val="0D1117"/>
-                          </a:solidFill>
-                          <a:latin typeface="Inter"/>
-                        </a:defRPr>
-                      </a:pPr>
-                      <a:r>
-                        <a:rPr>
-                          <a:latin typeface="Inter"/>
-                        </a:rPr>
-                        <a:t>Illustrative sample data</a:t>
-                      </a:r>
-                    </a:p>
-                  </a:txBody>
-                  <a:tcPr marL="54864" marR="54864" marT="27432" marB="27432" anchor="ctr">
-                    <a:solidFill>
-                      <a:srgbClr val="F5F7F9"/>
-                    </a:solidFill>
-                  </a:tcPr>
-                </a:tc>
-                <a:tc>
-                  <a:txBody>
-                    <a:bodyPr/>
-                    <a:lstStyle/>
-                    <a:p>
-                      <a:pPr>
-                        <a:defRPr sz="650" b="1">
+                        <a:defRPr sz="720" b="1">
                           <a:solidFill>
                             <a:srgbClr val="C6F432"/>
                           </a:solidFill>
@@ -26319,34 +25005,7 @@
                         <a:rPr>
                           <a:latin typeface="Inter"/>
                         </a:rPr>
-                        <a:t>● passed</a:t>
-                      </a:r>
-                    </a:p>
-                  </a:txBody>
-                  <a:tcPr marL="54864" marR="54864" marT="27432" marB="27432" anchor="ctr">
-                    <a:solidFill>
-                      <a:srgbClr val="F5F7F9"/>
-                    </a:solidFill>
-                  </a:tcPr>
-                </a:tc>
-                <a:tc>
-                  <a:txBody>
-                    <a:bodyPr/>
-                    <a:lstStyle/>
-                    <a:p>
-                      <a:pPr>
-                        <a:defRPr sz="650" b="0">
-                          <a:solidFill>
-                            <a:srgbClr val="0D1117"/>
-                          </a:solidFill>
-                          <a:latin typeface="Inter"/>
-                        </a:defRPr>
-                      </a:pPr>
-                      <a:r>
-                        <a:rPr>
-                          <a:latin typeface="Inter"/>
-                        </a:rPr>
-                        <a:t>sha256:4444444444444444444444444444444444444444444444444444444444444444</a:t>
+                        <a:t>● Passed</a:t>
                       </a:r>
                     </a:p>
                   </a:txBody>
@@ -26364,7 +25023,7 @@
                     <a:lstStyle/>
                     <a:p>
                       <a:pPr>
-                        <a:defRPr sz="650" b="1">
+                        <a:defRPr sz="720" b="1">
                           <a:solidFill>
                             <a:srgbClr val="0D1117"/>
                           </a:solidFill>
@@ -26391,7 +25050,7 @@
                     <a:lstStyle/>
                     <a:p>
                       <a:pPr>
-                        <a:defRPr sz="650" b="0">
+                        <a:defRPr sz="720" b="0">
                           <a:solidFill>
                             <a:srgbClr val="0D1117"/>
                           </a:solidFill>
@@ -26418,7 +25077,7 @@
                     <a:lstStyle/>
                     <a:p>
                       <a:pPr>
-                        <a:defRPr sz="650" b="0">
+                        <a:defRPr sz="720" b="0">
                           <a:solidFill>
                             <a:srgbClr val="0D1117"/>
                           </a:solidFill>
@@ -26429,7 +25088,7 @@
                         <a:rPr>
                           <a:latin typeface="Inter"/>
                         </a:rPr>
-                        <a:t>gradient_tool</a:t>
+                        <a:t>get_portfolio_ex_ante_attribution</a:t>
                       </a:r>
                     </a:p>
                   </a:txBody>
@@ -26445,7 +25104,7 @@
                     <a:lstStyle/>
                     <a:p>
                       <a:pPr>
-                        <a:defRPr sz="650" b="0">
+                        <a:defRPr sz="720" b="0">
                           <a:solidFill>
                             <a:srgbClr val="0D1117"/>
                           </a:solidFill>
@@ -26456,7 +25115,7 @@
                         <a:rPr>
                           <a:latin typeface="Inter"/>
                         </a:rPr>
-                        <a:t>get_portfolio_ex_ante_attribution</a:t>
+                        <a:t>2026-10-08</a:t>
                       </a:r>
                     </a:p>
                   </a:txBody>
@@ -26472,88 +25131,7 @@
                     <a:lstStyle/>
                     <a:p>
                       <a:pPr>
-                        <a:defRPr sz="650" b="0">
-                          <a:solidFill>
-                            <a:srgbClr val="0D1117"/>
-                          </a:solidFill>
-                          <a:latin typeface="Inter"/>
-                        </a:defRPr>
-                      </a:pPr>
-                      <a:r>
-                        <a:rPr>
-                          <a:latin typeface="Inter"/>
-                        </a:rPr>
-                        <a:t>policy; root; all sections</a:t>
-                      </a:r>
-                    </a:p>
-                  </a:txBody>
-                  <a:tcPr marL="54864" marR="54864" marT="27432" marB="27432" anchor="ctr">
-                    <a:solidFill>
-                      <a:srgbClr val="FFFFFF"/>
-                    </a:solidFill>
-                  </a:tcPr>
-                </a:tc>
-                <a:tc>
-                  <a:txBody>
-                    <a:bodyPr/>
-                    <a:lstStyle/>
-                    <a:p>
-                      <a:pPr>
-                        <a:defRPr sz="650" b="0">
-                          <a:solidFill>
-                            <a:srgbClr val="0D1117"/>
-                          </a:solidFill>
-                          <a:latin typeface="Inter"/>
-                        </a:defRPr>
-                      </a:pPr>
-                      <a:r>
-                        <a:rPr>
-                          <a:latin typeface="Inter"/>
-                        </a:rPr>
-                        <a:t>2026-10-08</a:t>
-                      </a:r>
-                    </a:p>
-                  </a:txBody>
-                  <a:tcPr marL="54864" marR="54864" marT="27432" marB="27432" anchor="ctr">
-                    <a:solidFill>
-                      <a:srgbClr val="FFFFFF"/>
-                    </a:solidFill>
-                  </a:tcPr>
-                </a:tc>
-                <a:tc>
-                  <a:txBody>
-                    <a:bodyPr/>
-                    <a:lstStyle/>
-                    <a:p>
-                      <a:pPr>
-                        <a:defRPr sz="650" b="0">
-                          <a:solidFill>
-                            <a:srgbClr val="0D1117"/>
-                          </a:solidFill>
-                          <a:latin typeface="Inter"/>
-                        </a:defRPr>
-                      </a:pPr>
-                      <a:r>
-                        <a:rPr>
-                          <a:latin typeface="Inter"/>
-                        </a:rPr>
-                        <a:t>Illustrative sample data</a:t>
-                      </a:r>
-                    </a:p>
-                  </a:txBody>
-                  <a:tcPr marL="54864" marR="54864" marT="27432" marB="27432" anchor="ctr">
-                    <a:solidFill>
-                      <a:srgbClr val="FFFFFF"/>
-                    </a:solidFill>
-                  </a:tcPr>
-                </a:tc>
-                <a:tc>
-                  <a:txBody>
-                    <a:bodyPr/>
-                    <a:lstStyle/>
-                    <a:p>
-                      <a:pPr>
-                        <a:defRPr sz="650" b="1">
+                        <a:defRPr sz="720" b="1">
                           <a:solidFill>
                             <a:srgbClr val="C6F432"/>
                           </a:solidFill>
@@ -26564,40 +25142,13 @@
                         <a:rPr>
                           <a:latin typeface="Inter"/>
                         </a:rPr>
-                        <a:t>● passed</a:t>
+                        <a:t>● Passed</a:t>
                       </a:r>
                     </a:p>
                   </a:txBody>
                   <a:tcPr marL="54864" marR="54864" marT="27432" marB="27432" anchor="ctr">
                     <a:solidFill>
                       <a:srgbClr val="F5F7F9"/>
-                    </a:solidFill>
-                  </a:tcPr>
-                </a:tc>
-                <a:tc>
-                  <a:txBody>
-                    <a:bodyPr/>
-                    <a:lstStyle/>
-                    <a:p>
-                      <a:pPr>
-                        <a:defRPr sz="650" b="0">
-                          <a:solidFill>
-                            <a:srgbClr val="0D1117"/>
-                          </a:solidFill>
-                          <a:latin typeface="Inter"/>
-                        </a:defRPr>
-                      </a:pPr>
-                      <a:r>
-                        <a:rPr>
-                          <a:latin typeface="Inter"/>
-                        </a:rPr>
-                        <a:t>sha256:5555555555555555555555555555555555555555555555555555555555555555</a:t>
-                      </a:r>
-                    </a:p>
-                  </a:txBody>
-                  <a:tcPr marL="54864" marR="54864" marT="27432" marB="27432" anchor="ctr">
-                    <a:solidFill>
-                      <a:srgbClr val="FFFFFF"/>
                     </a:solidFill>
                   </a:tcPr>
                 </a:tc>
@@ -26609,7 +25160,7 @@
                     <a:lstStyle/>
                     <a:p>
                       <a:pPr>
-                        <a:defRPr sz="650" b="1">
+                        <a:defRPr sz="720" b="1">
                           <a:solidFill>
                             <a:srgbClr val="0D1117"/>
                           </a:solidFill>
@@ -26636,7 +25187,7 @@
                     <a:lstStyle/>
                     <a:p>
                       <a:pPr>
-                        <a:defRPr sz="650" b="0">
+                        <a:defRPr sz="720" b="0">
                           <a:solidFill>
                             <a:srgbClr val="0D1117"/>
                           </a:solidFill>
@@ -26663,7 +25214,7 @@
                     <a:lstStyle/>
                     <a:p>
                       <a:pPr>
-                        <a:defRPr sz="650" b="0">
+                        <a:defRPr sz="720" b="0">
                           <a:solidFill>
                             <a:srgbClr val="0D1117"/>
                           </a:solidFill>
@@ -26674,7 +25225,7 @@
                         <a:rPr>
                           <a:latin typeface="Inter"/>
                         </a:rPr>
-                        <a:t>gradient_tool</a:t>
+                        <a:t>get_manager_diligence_findings</a:t>
                       </a:r>
                     </a:p>
                   </a:txBody>
@@ -26690,7 +25241,7 @@
                     <a:lstStyle/>
                     <a:p>
                       <a:pPr>
-                        <a:defRPr sz="650" b="0">
+                        <a:defRPr sz="720" b="0">
                           <a:solidFill>
                             <a:srgbClr val="0D1117"/>
                           </a:solidFill>
@@ -26701,7 +25252,7 @@
                         <a:rPr>
                           <a:latin typeface="Inter"/>
                         </a:rPr>
-                        <a:t>get_manager_diligence_findings</a:t>
+                        <a:t>2026-06-30</a:t>
                       </a:r>
                     </a:p>
                   </a:txBody>
@@ -26717,88 +25268,7 @@
                     <a:lstStyle/>
                     <a:p>
                       <a:pPr>
-                        <a:defRPr sz="650" b="0">
-                          <a:solidFill>
-                            <a:srgbClr val="0D1117"/>
-                          </a:solidFill>
-                          <a:latin typeface="Inter"/>
-                        </a:defRPr>
-                      </a:pPr>
-                      <a:r>
-                        <a:rPr>
-                          <a:latin typeface="Inter"/>
-                        </a:rPr>
-                        <a:t>view=open; public-equity managers</a:t>
-                      </a:r>
-                    </a:p>
-                  </a:txBody>
-                  <a:tcPr marL="54864" marR="54864" marT="27432" marB="27432" anchor="ctr">
-                    <a:solidFill>
-                      <a:srgbClr val="F5F7F9"/>
-                    </a:solidFill>
-                  </a:tcPr>
-                </a:tc>
-                <a:tc>
-                  <a:txBody>
-                    <a:bodyPr/>
-                    <a:lstStyle/>
-                    <a:p>
-                      <a:pPr>
-                        <a:defRPr sz="650" b="0">
-                          <a:solidFill>
-                            <a:srgbClr val="0D1117"/>
-                          </a:solidFill>
-                          <a:latin typeface="Inter"/>
-                        </a:defRPr>
-                      </a:pPr>
-                      <a:r>
-                        <a:rPr>
-                          <a:latin typeface="Inter"/>
-                        </a:rPr>
-                        <a:t>2026-06-30</a:t>
-                      </a:r>
-                    </a:p>
-                  </a:txBody>
-                  <a:tcPr marL="54864" marR="54864" marT="27432" marB="27432" anchor="ctr">
-                    <a:solidFill>
-                      <a:srgbClr val="F5F7F9"/>
-                    </a:solidFill>
-                  </a:tcPr>
-                </a:tc>
-                <a:tc>
-                  <a:txBody>
-                    <a:bodyPr/>
-                    <a:lstStyle/>
-                    <a:p>
-                      <a:pPr>
-                        <a:defRPr sz="650" b="0">
-                          <a:solidFill>
-                            <a:srgbClr val="0D1117"/>
-                          </a:solidFill>
-                          <a:latin typeface="Inter"/>
-                        </a:defRPr>
-                      </a:pPr>
-                      <a:r>
-                        <a:rPr>
-                          <a:latin typeface="Inter"/>
-                        </a:rPr>
-                        <a:t>Illustrative sample data</a:t>
-                      </a:r>
-                    </a:p>
-                  </a:txBody>
-                  <a:tcPr marL="54864" marR="54864" marT="27432" marB="27432" anchor="ctr">
-                    <a:solidFill>
-                      <a:srgbClr val="F5F7F9"/>
-                    </a:solidFill>
-                  </a:tcPr>
-                </a:tc>
-                <a:tc>
-                  <a:txBody>
-                    <a:bodyPr/>
-                    <a:lstStyle/>
-                    <a:p>
-                      <a:pPr>
-                        <a:defRPr sz="650" b="1">
+                        <a:defRPr sz="720" b="1">
                           <a:solidFill>
                             <a:srgbClr val="C6F432"/>
                           </a:solidFill>
@@ -26809,34 +25279,7 @@
                         <a:rPr>
                           <a:latin typeface="Inter"/>
                         </a:rPr>
-                        <a:t>● passed</a:t>
-                      </a:r>
-                    </a:p>
-                  </a:txBody>
-                  <a:tcPr marL="54864" marR="54864" marT="27432" marB="27432" anchor="ctr">
-                    <a:solidFill>
-                      <a:srgbClr val="F5F7F9"/>
-                    </a:solidFill>
-                  </a:tcPr>
-                </a:tc>
-                <a:tc>
-                  <a:txBody>
-                    <a:bodyPr/>
-                    <a:lstStyle/>
-                    <a:p>
-                      <a:pPr>
-                        <a:defRPr sz="650" b="0">
-                          <a:solidFill>
-                            <a:srgbClr val="0D1117"/>
-                          </a:solidFill>
-                          <a:latin typeface="Inter"/>
-                        </a:defRPr>
-                      </a:pPr>
-                      <a:r>
-                        <a:rPr>
-                          <a:latin typeface="Inter"/>
-                        </a:rPr>
-                        <a:t>sha256:6666666666666666666666666666666666666666666666666666666666666666</a:t>
+                        <a:t>● Passed</a:t>
                       </a:r>
                     </a:p>
                   </a:txBody>
@@ -26854,7 +25297,7 @@
                     <a:lstStyle/>
                     <a:p>
                       <a:pPr>
-                        <a:defRPr sz="650" b="1">
+                        <a:defRPr sz="720" b="1">
                           <a:solidFill>
                             <a:srgbClr val="0D1117"/>
                           </a:solidFill>
@@ -26881,7 +25324,7 @@
                     <a:lstStyle/>
                     <a:p>
                       <a:pPr>
-                        <a:defRPr sz="650" b="0">
+                        <a:defRPr sz="720" b="0">
                           <a:solidFill>
                             <a:srgbClr val="0D1117"/>
                           </a:solidFill>
@@ -26908,7 +25351,7 @@
                     <a:lstStyle/>
                     <a:p>
                       <a:pPr>
-                        <a:defRPr sz="650" b="0">
+                        <a:defRPr sz="720" b="0">
                           <a:solidFill>
                             <a:srgbClr val="0D1117"/>
                           </a:solidFill>
@@ -26919,7 +25362,7 @@
                         <a:rPr>
                           <a:latin typeface="Inter"/>
                         </a:rPr>
-                        <a:t>gradient_tool</a:t>
+                        <a:t>get_macro_signals</a:t>
                       </a:r>
                     </a:p>
                   </a:txBody>
@@ -26935,7 +25378,7 @@
                     <a:lstStyle/>
                     <a:p>
                       <a:pPr>
-                        <a:defRPr sz="650" b="0">
+                        <a:defRPr sz="720" b="0">
                           <a:solidFill>
                             <a:srgbClr val="0D1117"/>
                           </a:solidFill>
@@ -26946,7 +25389,7 @@
                         <a:rPr>
                           <a:latin typeface="Inter"/>
                         </a:rPr>
-                        <a:t>get_macro_signals</a:t>
+                        <a:t>2026-06-30</a:t>
                       </a:r>
                     </a:p>
                   </a:txBody>
@@ -26962,88 +25405,7 @@
                     <a:lstStyle/>
                     <a:p>
                       <a:pPr>
-                        <a:defRPr sz="650" b="0">
-                          <a:solidFill>
-                            <a:srgbClr val="0D1117"/>
-                          </a:solidFill>
-                          <a:latin typeface="Inter"/>
-                        </a:defRPr>
-                      </a:pPr>
-                      <a:r>
-                        <a:rPr>
-                          <a:latin typeface="Inter"/>
-                        </a:rPr>
-                        <a:t>view=gradient_signal; regime_state</a:t>
-                      </a:r>
-                    </a:p>
-                  </a:txBody>
-                  <a:tcPr marL="54864" marR="54864" marT="27432" marB="27432" anchor="ctr">
-                    <a:solidFill>
-                      <a:srgbClr val="FFFFFF"/>
-                    </a:solidFill>
-                  </a:tcPr>
-                </a:tc>
-                <a:tc>
-                  <a:txBody>
-                    <a:bodyPr/>
-                    <a:lstStyle/>
-                    <a:p>
-                      <a:pPr>
-                        <a:defRPr sz="650" b="0">
-                          <a:solidFill>
-                            <a:srgbClr val="0D1117"/>
-                          </a:solidFill>
-                          <a:latin typeface="Inter"/>
-                        </a:defRPr>
-                      </a:pPr>
-                      <a:r>
-                        <a:rPr>
-                          <a:latin typeface="Inter"/>
-                        </a:rPr>
-                        <a:t>2026-06-30</a:t>
-                      </a:r>
-                    </a:p>
-                  </a:txBody>
-                  <a:tcPr marL="54864" marR="54864" marT="27432" marB="27432" anchor="ctr">
-                    <a:solidFill>
-                      <a:srgbClr val="FFFFFF"/>
-                    </a:solidFill>
-                  </a:tcPr>
-                </a:tc>
-                <a:tc>
-                  <a:txBody>
-                    <a:bodyPr/>
-                    <a:lstStyle/>
-                    <a:p>
-                      <a:pPr>
-                        <a:defRPr sz="650" b="0">
-                          <a:solidFill>
-                            <a:srgbClr val="0D1117"/>
-                          </a:solidFill>
-                          <a:latin typeface="Inter"/>
-                        </a:defRPr>
-                      </a:pPr>
-                      <a:r>
-                        <a:rPr>
-                          <a:latin typeface="Inter"/>
-                        </a:rPr>
-                        <a:t>Illustrative sample data</a:t>
-                      </a:r>
-                    </a:p>
-                  </a:txBody>
-                  <a:tcPr marL="54864" marR="54864" marT="27432" marB="27432" anchor="ctr">
-                    <a:solidFill>
-                      <a:srgbClr val="FFFFFF"/>
-                    </a:solidFill>
-                  </a:tcPr>
-                </a:tc>
-                <a:tc>
-                  <a:txBody>
-                    <a:bodyPr/>
-                    <a:lstStyle/>
-                    <a:p>
-                      <a:pPr>
-                        <a:defRPr sz="650" b="1">
+                        <a:defRPr sz="720" b="1">
                           <a:solidFill>
                             <a:srgbClr val="C6F432"/>
                           </a:solidFill>
@@ -27054,40 +25416,13 @@
                         <a:rPr>
                           <a:latin typeface="Inter"/>
                         </a:rPr>
-                        <a:t>● passed</a:t>
+                        <a:t>● Passed</a:t>
                       </a:r>
                     </a:p>
                   </a:txBody>
                   <a:tcPr marL="54864" marR="54864" marT="27432" marB="27432" anchor="ctr">
                     <a:solidFill>
                       <a:srgbClr val="F5F7F9"/>
-                    </a:solidFill>
-                  </a:tcPr>
-                </a:tc>
-                <a:tc>
-                  <a:txBody>
-                    <a:bodyPr/>
-                    <a:lstStyle/>
-                    <a:p>
-                      <a:pPr>
-                        <a:defRPr sz="650" b="0">
-                          <a:solidFill>
-                            <a:srgbClr val="0D1117"/>
-                          </a:solidFill>
-                          <a:latin typeface="Inter"/>
-                        </a:defRPr>
-                      </a:pPr>
-                      <a:r>
-                        <a:rPr>
-                          <a:latin typeface="Inter"/>
-                        </a:rPr>
-                        <a:t>sha256:7777777777777777777777777777777777777777777777777777777777777777</a:t>
-                      </a:r>
-                    </a:p>
-                  </a:txBody>
-                  <a:tcPr marL="54864" marR="54864" marT="27432" marB="27432" anchor="ctr">
-                    <a:solidFill>
-                      <a:srgbClr val="FFFFFF"/>
                     </a:solidFill>
                   </a:tcPr>
                 </a:tc>
@@ -27098,7 +25433,7 @@
       </p:graphicFrame>
       <p:sp>
         <p:nvSpPr>
-          <p:cNvPr id="9" name="TextBox 8"/>
+          <p:cNvPr id="8" name="TextBox 7"/>
           <p:cNvSpPr txBox="1"/>
           <p:nvPr/>
         </p:nvSpPr>
@@ -27140,7 +25475,7 @@
       </p:sp>
       <p:sp>
         <p:nvSpPr>
-          <p:cNvPr id="10" name="Rectangle 9"/>
+          <p:cNvPr id="9" name="Rectangle 8"/>
           <p:cNvSpPr/>
           <p:nvPr/>
         </p:nvSpPr>
@@ -27189,7 +25524,7 @@
       </p:sp>
       <p:sp>
         <p:nvSpPr>
-          <p:cNvPr id="11" name="TextBox 10"/>
+          <p:cNvPr id="10" name="TextBox 9"/>
           <p:cNvSpPr txBox="1"/>
           <p:nvPr/>
         </p:nvSpPr>
@@ -27231,7 +25566,7 @@
       </p:sp>
       <p:sp>
         <p:nvSpPr>
-          <p:cNvPr id="12" name="TextBox 11"/>
+          <p:cNvPr id="11" name="TextBox 10"/>
           <p:cNvSpPr txBox="1"/>
           <p:nvPr/>
         </p:nvSpPr>
@@ -27273,7 +25608,7 @@
       </p:sp>
       <p:sp>
         <p:nvSpPr>
-          <p:cNvPr id="13" name="TextBox 12"/>
+          <p:cNvPr id="12" name="TextBox 11"/>
           <p:cNvSpPr txBox="1"/>
           <p:nvPr/>
         </p:nvSpPr>
@@ -27388,48 +25723,6 @@
         </p:nvSpPr>
         <p:spPr>
           <a:xfrm>
-            <a:off x="5897880" y="310896"/>
-            <a:ext cx="4800600" cy="256032"/>
-          </a:xfrm>
-          <a:prstGeom prst="rect">
-            <a:avLst/>
-          </a:prstGeom>
-          <a:noFill/>
-        </p:spPr>
-        <p:txBody>
-          <a:bodyPr wrap="none" lIns="9144" rIns="9144" tIns="9144" bIns="9144" anchor="t">
-            <a:spAutoFit/>
-          </a:bodyPr>
-          <a:lstStyle/>
-          <a:p>
-            <a:pPr algn="r">
-              <a:spcAft>
-                <a:spcPts val="0"/>
-              </a:spcAft>
-              <a:defRPr sz="680" b="1">
-                <a:solidFill>
-                  <a:srgbClr val="4F6B00"/>
-                </a:solidFill>
-                <a:latin typeface="Inter"/>
-              </a:defRPr>
-            </a:pPr>
-            <a:r>
-              <a:rPr>
-                <a:latin typeface="Inter"/>
-              </a:rPr>
-              <a:t>Illustrative, Gradient Maintained — demo data, not the client's holdings or managers</a:t>
-            </a:r>
-          </a:p>
-        </p:txBody>
-      </p:sp>
-      <p:sp>
-        <p:nvSpPr>
-          <p:cNvPr id="4" name="TextBox 3"/>
-          <p:cNvSpPr txBox="1"/>
-          <p:nvPr/>
-        </p:nvSpPr>
-        <p:spPr>
-          <a:xfrm>
             <a:off x="640080" y="566928"/>
             <a:ext cx="10058400" cy="530352"/>
           </a:xfrm>
@@ -27459,14 +25752,14 @@
               <a:rPr>
                 <a:latin typeface="Inter"/>
               </a:rPr>
-              <a:t>Appendix — Server Metric Methods and Disclosures</a:t>
+              <a:t>Appendix — Sources and methods — continued</a:t>
             </a:r>
           </a:p>
         </p:txBody>
       </p:sp>
       <p:sp>
         <p:nvSpPr>
-          <p:cNvPr id="5" name="Rectangle 4"/>
+          <p:cNvPr id="4" name="Rectangle 3"/>
           <p:cNvSpPr/>
           <p:nvPr/>
         </p:nvSpPr>
@@ -27515,7 +25808,7 @@
       </p:sp>
       <p:sp>
         <p:nvSpPr>
-          <p:cNvPr id="6" name="Rectangle 5"/>
+          <p:cNvPr id="5" name="Rectangle 4"/>
           <p:cNvSpPr/>
           <p:nvPr/>
         </p:nvSpPr>
@@ -27564,7 +25857,7 @@
       </p:sp>
       <p:sp>
         <p:nvSpPr>
-          <p:cNvPr id="7" name="TextBox 6"/>
+          <p:cNvPr id="6" name="TextBox 5"/>
           <p:cNvSpPr txBox="1"/>
           <p:nvPr/>
         </p:nvSpPr>
@@ -27599,14 +25892,14 @@
               <a:rPr>
                 <a:latin typeface="Inter"/>
               </a:rPr>
-              <a:t>B</a:t>
+              <a:t>A</a:t>
             </a:r>
           </a:p>
         </p:txBody>
       </p:sp>
       <p:sp>
         <p:nvSpPr>
-          <p:cNvPr id="8" name="TextBox 7"/>
+          <p:cNvPr id="7" name="TextBox 6"/>
           <p:cNvSpPr txBox="1"/>
           <p:nvPr/>
         </p:nvSpPr>
@@ -27641,6 +25934,1205 @@
               <a:rPr>
                 <a:latin typeface="Inter"/>
               </a:rPr>
+              <a:t>SOURCE AUDIT TRAIL</a:t>
+            </a:r>
+          </a:p>
+        </p:txBody>
+      </p:sp>
+      <p:graphicFrame>
+        <p:nvGraphicFramePr>
+          <p:cNvPr id="8" name="Table 7"/>
+          <p:cNvGraphicFramePr>
+            <a:graphicFrameLocks noGrp="1"/>
+          </p:cNvGraphicFramePr>
+          <p:nvPr/>
+        </p:nvGraphicFramePr>
+        <p:xfrm>
+          <a:off x="640080" y="1600200"/>
+          <a:ext cx="10908792" cy="4416552"/>
+        </p:xfrm>
+        <a:graphic>
+          <a:graphicData uri="http://schemas.openxmlformats.org/drawingml/2006/table">
+            <a:tbl>
+              <a:tblPr firstRow="1" bandRow="1">
+                <a:tableStyleId>{5C22544A-7EE6-4342-B048-85BDC9FD1C3A}</a:tableStyleId>
+              </a:tblPr>
+              <a:tblGrid>
+                <a:gridCol w="2011680"/>
+                <a:gridCol w="4448556"/>
+                <a:gridCol w="4448556"/>
+              </a:tblGrid>
+              <a:tr h="552069">
+                <a:tc>
+                  <a:txBody>
+                    <a:bodyPr/>
+                    <a:lstStyle/>
+                    <a:p>
+                      <a:pPr>
+                        <a:defRPr sz="750" b="1">
+                          <a:solidFill>
+                            <a:srgbClr val="FFFFFF"/>
+                          </a:solidFill>
+                          <a:latin typeface="Inter"/>
+                        </a:defRPr>
+                      </a:pPr>
+                      <a:r>
+                        <a:rPr>
+                          <a:latin typeface="Inter"/>
+                        </a:rPr>
+                        <a:t>Tag</a:t>
+                      </a:r>
+                    </a:p>
+                  </a:txBody>
+                  <a:tcPr marL="54864" marR="54864" marT="27432" marB="27432" anchor="ctr">
+                    <a:solidFill>
+                      <a:srgbClr val="0D1117"/>
+                    </a:solidFill>
+                  </a:tcPr>
+                </a:tc>
+                <a:tc>
+                  <a:txBody>
+                    <a:bodyPr/>
+                    <a:lstStyle/>
+                    <a:p>
+                      <a:pPr>
+                        <a:defRPr sz="750" b="1">
+                          <a:solidFill>
+                            <a:srgbClr val="FFFFFF"/>
+                          </a:solidFill>
+                          <a:latin typeface="Inter"/>
+                        </a:defRPr>
+                      </a:pPr>
+                      <a:r>
+                        <a:rPr>
+                          <a:latin typeface="Inter"/>
+                        </a:rPr>
+                        <a:t>Key parameters</a:t>
+                      </a:r>
+                    </a:p>
+                  </a:txBody>
+                  <a:tcPr marL="54864" marR="54864" marT="27432" marB="27432" anchor="ctr">
+                    <a:solidFill>
+                      <a:srgbClr val="0D1117"/>
+                    </a:solidFill>
+                  </a:tcPr>
+                </a:tc>
+                <a:tc>
+                  <a:txBody>
+                    <a:bodyPr/>
+                    <a:lstStyle/>
+                    <a:p>
+                      <a:pPr>
+                        <a:defRPr sz="750" b="1">
+                          <a:solidFill>
+                            <a:srgbClr val="FFFFFF"/>
+                          </a:solidFill>
+                          <a:latin typeface="Inter"/>
+                        </a:defRPr>
+                      </a:pPr>
+                      <a:r>
+                        <a:rPr>
+                          <a:latin typeface="Inter"/>
+                        </a:rPr>
+                        <a:t>Digest</a:t>
+                      </a:r>
+                    </a:p>
+                  </a:txBody>
+                  <a:tcPr marL="54864" marR="54864" marT="27432" marB="27432" anchor="ctr">
+                    <a:solidFill>
+                      <a:srgbClr val="0D1117"/>
+                    </a:solidFill>
+                  </a:tcPr>
+                </a:tc>
+              </a:tr>
+              <a:tr h="552069">
+                <a:tc>
+                  <a:txBody>
+                    <a:bodyPr/>
+                    <a:lstStyle/>
+                    <a:p>
+                      <a:pPr>
+                        <a:defRPr sz="800" b="1">
+                          <a:solidFill>
+                            <a:srgbClr val="0D1117"/>
+                          </a:solidFill>
+                          <a:latin typeface="Inter"/>
+                        </a:defRPr>
+                      </a:pPr>
+                      <a:r>
+                        <a:rPr>
+                          <a:latin typeface="Inter"/>
+                        </a:rPr>
+                        <a:t>S1</a:t>
+                      </a:r>
+                    </a:p>
+                  </a:txBody>
+                  <a:tcPr marL="54864" marR="54864" marT="27432" marB="27432" anchor="ctr">
+                    <a:solidFill>
+                      <a:srgbClr val="FFFFFF"/>
+                    </a:solidFill>
+                  </a:tcPr>
+                </a:tc>
+                <a:tc>
+                  <a:txBody>
+                    <a:bodyPr/>
+                    <a:lstStyle/>
+                    <a:p>
+                      <a:pPr>
+                        <a:defRPr sz="800" b="0">
+                          <a:solidFill>
+                            <a:srgbClr val="0D1117"/>
+                          </a:solidFill>
+                          <a:latin typeface="Inter"/>
+                        </a:defRPr>
+                      </a:pPr>
+                      <a:r>
+                        <a:rPr>
+                          <a:latin typeface="Inter"/>
+                        </a:rPr>
+                        <a:t>detail=full</a:t>
+                      </a:r>
+                    </a:p>
+                  </a:txBody>
+                  <a:tcPr marL="54864" marR="54864" marT="27432" marB="27432" anchor="ctr">
+                    <a:solidFill>
+                      <a:srgbClr val="FFFFFF"/>
+                    </a:solidFill>
+                  </a:tcPr>
+                </a:tc>
+                <a:tc>
+                  <a:txBody>
+                    <a:bodyPr/>
+                    <a:lstStyle/>
+                    <a:p>
+                      <a:pPr>
+                        <a:defRPr sz="800" b="0">
+                          <a:solidFill>
+                            <a:srgbClr val="0D1117"/>
+                          </a:solidFill>
+                          <a:latin typeface="Inter"/>
+                        </a:defRPr>
+                      </a:pPr>
+                      <a:r>
+                        <a:rPr>
+                          <a:latin typeface="Inter"/>
+                        </a:rPr>
+                        <a:t>Not applicable — tool metadata</a:t>
+                      </a:r>
+                    </a:p>
+                  </a:txBody>
+                  <a:tcPr marL="54864" marR="54864" marT="27432" marB="27432" anchor="ctr">
+                    <a:solidFill>
+                      <a:srgbClr val="FFFFFF"/>
+                    </a:solidFill>
+                  </a:tcPr>
+                </a:tc>
+              </a:tr>
+              <a:tr h="552069">
+                <a:tc>
+                  <a:txBody>
+                    <a:bodyPr/>
+                    <a:lstStyle/>
+                    <a:p>
+                      <a:pPr>
+                        <a:defRPr sz="800" b="1">
+                          <a:solidFill>
+                            <a:srgbClr val="0D1117"/>
+                          </a:solidFill>
+                          <a:latin typeface="Inter"/>
+                        </a:defRPr>
+                      </a:pPr>
+                      <a:r>
+                        <a:rPr>
+                          <a:latin typeface="Inter"/>
+                        </a:rPr>
+                        <a:t>S2</a:t>
+                      </a:r>
+                    </a:p>
+                  </a:txBody>
+                  <a:tcPr marL="54864" marR="54864" marT="27432" marB="27432" anchor="ctr">
+                    <a:solidFill>
+                      <a:srgbClr val="F5F7F9"/>
+                    </a:solidFill>
+                  </a:tcPr>
+                </a:tc>
+                <a:tc>
+                  <a:txBody>
+                    <a:bodyPr/>
+                    <a:lstStyle/>
+                    <a:p>
+                      <a:pPr>
+                        <a:defRPr sz="800" b="0">
+                          <a:solidFill>
+                            <a:srgbClr val="0D1117"/>
+                          </a:solidFill>
+                          <a:latin typeface="Inter"/>
+                        </a:defRPr>
+                      </a:pPr>
+                      <a:r>
+                        <a:rPr>
+                          <a:latin typeface="Inter"/>
+                        </a:rPr>
+                        <a:t>view=allocation_tree</a:t>
+                      </a:r>
+                    </a:p>
+                  </a:txBody>
+                  <a:tcPr marL="54864" marR="54864" marT="27432" marB="27432" anchor="ctr">
+                    <a:solidFill>
+                      <a:srgbClr val="F5F7F9"/>
+                    </a:solidFill>
+                  </a:tcPr>
+                </a:tc>
+                <a:tc>
+                  <a:txBody>
+                    <a:bodyPr/>
+                    <a:lstStyle/>
+                    <a:p>
+                      <a:pPr>
+                        <a:defRPr sz="800" b="0">
+                          <a:solidFill>
+                            <a:srgbClr val="0D1117"/>
+                          </a:solidFill>
+                          <a:latin typeface="Inter"/>
+                        </a:defRPr>
+                      </a:pPr>
+                      <a:r>
+                        <a:rPr>
+                          <a:latin typeface="Inter"/>
+                        </a:rPr>
+                        <a:t>sha256:2222222222222222222222222222222222222222222222222222222222222222</a:t>
+                      </a:r>
+                    </a:p>
+                  </a:txBody>
+                  <a:tcPr marL="54864" marR="54864" marT="27432" marB="27432" anchor="ctr">
+                    <a:solidFill>
+                      <a:srgbClr val="F5F7F9"/>
+                    </a:solidFill>
+                  </a:tcPr>
+                </a:tc>
+              </a:tr>
+              <a:tr h="552069">
+                <a:tc>
+                  <a:txBody>
+                    <a:bodyPr/>
+                    <a:lstStyle/>
+                    <a:p>
+                      <a:pPr>
+                        <a:defRPr sz="800" b="1">
+                          <a:solidFill>
+                            <a:srgbClr val="0D1117"/>
+                          </a:solidFill>
+                          <a:latin typeface="Inter"/>
+                        </a:defRPr>
+                      </a:pPr>
+                      <a:r>
+                        <a:rPr>
+                          <a:latin typeface="Inter"/>
+                        </a:rPr>
+                        <a:t>S3</a:t>
+                      </a:r>
+                    </a:p>
+                  </a:txBody>
+                  <a:tcPr marL="54864" marR="54864" marT="27432" marB="27432" anchor="ctr">
+                    <a:solidFill>
+                      <a:srgbClr val="FFFFFF"/>
+                    </a:solidFill>
+                  </a:tcPr>
+                </a:tc>
+                <a:tc>
+                  <a:txBody>
+                    <a:bodyPr/>
+                    <a:lstStyle/>
+                    <a:p>
+                      <a:pPr>
+                        <a:defRPr sz="800" b="0">
+                          <a:solidFill>
+                            <a:srgbClr val="0D1117"/>
+                          </a:solidFill>
+                          <a:latin typeface="Inter"/>
+                        </a:defRPr>
+                      </a:pPr>
+                      <a:r>
+                        <a:rPr>
+                          <a:latin typeface="Inter"/>
+                        </a:rPr>
+                        <a:t>five sections</a:t>
+                      </a:r>
+                    </a:p>
+                  </a:txBody>
+                  <a:tcPr marL="54864" marR="54864" marT="27432" marB="27432" anchor="ctr">
+                    <a:solidFill>
+                      <a:srgbClr val="FFFFFF"/>
+                    </a:solidFill>
+                  </a:tcPr>
+                </a:tc>
+                <a:tc>
+                  <a:txBody>
+                    <a:bodyPr/>
+                    <a:lstStyle/>
+                    <a:p>
+                      <a:pPr>
+                        <a:defRPr sz="800" b="0">
+                          <a:solidFill>
+                            <a:srgbClr val="0D1117"/>
+                          </a:solidFill>
+                          <a:latin typeface="Inter"/>
+                        </a:defRPr>
+                      </a:pPr>
+                      <a:r>
+                        <a:rPr>
+                          <a:latin typeface="Inter"/>
+                        </a:rPr>
+                        <a:t>sha256:3333333333333333333333333333333333333333333333333333333333333333</a:t>
+                      </a:r>
+                    </a:p>
+                  </a:txBody>
+                  <a:tcPr marL="54864" marR="54864" marT="27432" marB="27432" anchor="ctr">
+                    <a:solidFill>
+                      <a:srgbClr val="FFFFFF"/>
+                    </a:solidFill>
+                  </a:tcPr>
+                </a:tc>
+              </a:tr>
+              <a:tr h="552069">
+                <a:tc>
+                  <a:txBody>
+                    <a:bodyPr/>
+                    <a:lstStyle/>
+                    <a:p>
+                      <a:pPr>
+                        <a:defRPr sz="800" b="1">
+                          <a:solidFill>
+                            <a:srgbClr val="0D1117"/>
+                          </a:solidFill>
+                          <a:latin typeface="Inter"/>
+                        </a:defRPr>
+                      </a:pPr>
+                      <a:r>
+                        <a:rPr>
+                          <a:latin typeface="Inter"/>
+                        </a:rPr>
+                        <a:t>S4</a:t>
+                      </a:r>
+                    </a:p>
+                  </a:txBody>
+                  <a:tcPr marL="54864" marR="54864" marT="27432" marB="27432" anchor="ctr">
+                    <a:solidFill>
+                      <a:srgbClr val="F5F7F9"/>
+                    </a:solidFill>
+                  </a:tcPr>
+                </a:tc>
+                <a:tc>
+                  <a:txBody>
+                    <a:bodyPr/>
+                    <a:lstStyle/>
+                    <a:p>
+                      <a:pPr>
+                        <a:defRPr sz="800" b="0">
+                          <a:solidFill>
+                            <a:srgbClr val="0D1117"/>
+                          </a:solidFill>
+                          <a:latin typeface="Inter"/>
+                        </a:defRPr>
+                      </a:pPr>
+                      <a:r>
+                        <a:rPr>
+                          <a:latin typeface="Inter"/>
+                        </a:rPr>
+                        <a:t>policy; root; all sections</a:t>
+                      </a:r>
+                    </a:p>
+                  </a:txBody>
+                  <a:tcPr marL="54864" marR="54864" marT="27432" marB="27432" anchor="ctr">
+                    <a:solidFill>
+                      <a:srgbClr val="F5F7F9"/>
+                    </a:solidFill>
+                  </a:tcPr>
+                </a:tc>
+                <a:tc>
+                  <a:txBody>
+                    <a:bodyPr/>
+                    <a:lstStyle/>
+                    <a:p>
+                      <a:pPr>
+                        <a:defRPr sz="800" b="0">
+                          <a:solidFill>
+                            <a:srgbClr val="0D1117"/>
+                          </a:solidFill>
+                          <a:latin typeface="Inter"/>
+                        </a:defRPr>
+                      </a:pPr>
+                      <a:r>
+                        <a:rPr>
+                          <a:latin typeface="Inter"/>
+                        </a:rPr>
+                        <a:t>sha256:4444444444444444444444444444444444444444444444444444444444444444</a:t>
+                      </a:r>
+                    </a:p>
+                  </a:txBody>
+                  <a:tcPr marL="54864" marR="54864" marT="27432" marB="27432" anchor="ctr">
+                    <a:solidFill>
+                      <a:srgbClr val="F5F7F9"/>
+                    </a:solidFill>
+                  </a:tcPr>
+                </a:tc>
+              </a:tr>
+              <a:tr h="552069">
+                <a:tc>
+                  <a:txBody>
+                    <a:bodyPr/>
+                    <a:lstStyle/>
+                    <a:p>
+                      <a:pPr>
+                        <a:defRPr sz="800" b="1">
+                          <a:solidFill>
+                            <a:srgbClr val="0D1117"/>
+                          </a:solidFill>
+                          <a:latin typeface="Inter"/>
+                        </a:defRPr>
+                      </a:pPr>
+                      <a:r>
+                        <a:rPr>
+                          <a:latin typeface="Inter"/>
+                        </a:rPr>
+                        <a:t>S5</a:t>
+                      </a:r>
+                    </a:p>
+                  </a:txBody>
+                  <a:tcPr marL="54864" marR="54864" marT="27432" marB="27432" anchor="ctr">
+                    <a:solidFill>
+                      <a:srgbClr val="FFFFFF"/>
+                    </a:solidFill>
+                  </a:tcPr>
+                </a:tc>
+                <a:tc>
+                  <a:txBody>
+                    <a:bodyPr/>
+                    <a:lstStyle/>
+                    <a:p>
+                      <a:pPr>
+                        <a:defRPr sz="800" b="0">
+                          <a:solidFill>
+                            <a:srgbClr val="0D1117"/>
+                          </a:solidFill>
+                          <a:latin typeface="Inter"/>
+                        </a:defRPr>
+                      </a:pPr>
+                      <a:r>
+                        <a:rPr>
+                          <a:latin typeface="Inter"/>
+                        </a:rPr>
+                        <a:t>policy; root; all sections</a:t>
+                      </a:r>
+                    </a:p>
+                  </a:txBody>
+                  <a:tcPr marL="54864" marR="54864" marT="27432" marB="27432" anchor="ctr">
+                    <a:solidFill>
+                      <a:srgbClr val="FFFFFF"/>
+                    </a:solidFill>
+                  </a:tcPr>
+                </a:tc>
+                <a:tc>
+                  <a:txBody>
+                    <a:bodyPr/>
+                    <a:lstStyle/>
+                    <a:p>
+                      <a:pPr>
+                        <a:defRPr sz="800" b="0">
+                          <a:solidFill>
+                            <a:srgbClr val="0D1117"/>
+                          </a:solidFill>
+                          <a:latin typeface="Inter"/>
+                        </a:defRPr>
+                      </a:pPr>
+                      <a:r>
+                        <a:rPr>
+                          <a:latin typeface="Inter"/>
+                        </a:rPr>
+                        <a:t>sha256:5555555555555555555555555555555555555555555555555555555555555555</a:t>
+                      </a:r>
+                    </a:p>
+                  </a:txBody>
+                  <a:tcPr marL="54864" marR="54864" marT="27432" marB="27432" anchor="ctr">
+                    <a:solidFill>
+                      <a:srgbClr val="FFFFFF"/>
+                    </a:solidFill>
+                  </a:tcPr>
+                </a:tc>
+              </a:tr>
+              <a:tr h="552069">
+                <a:tc>
+                  <a:txBody>
+                    <a:bodyPr/>
+                    <a:lstStyle/>
+                    <a:p>
+                      <a:pPr>
+                        <a:defRPr sz="800" b="1">
+                          <a:solidFill>
+                            <a:srgbClr val="0D1117"/>
+                          </a:solidFill>
+                          <a:latin typeface="Inter"/>
+                        </a:defRPr>
+                      </a:pPr>
+                      <a:r>
+                        <a:rPr>
+                          <a:latin typeface="Inter"/>
+                        </a:rPr>
+                        <a:t>S6</a:t>
+                      </a:r>
+                    </a:p>
+                  </a:txBody>
+                  <a:tcPr marL="54864" marR="54864" marT="27432" marB="27432" anchor="ctr">
+                    <a:solidFill>
+                      <a:srgbClr val="F5F7F9"/>
+                    </a:solidFill>
+                  </a:tcPr>
+                </a:tc>
+                <a:tc>
+                  <a:txBody>
+                    <a:bodyPr/>
+                    <a:lstStyle/>
+                    <a:p>
+                      <a:pPr>
+                        <a:defRPr sz="800" b="0">
+                          <a:solidFill>
+                            <a:srgbClr val="0D1117"/>
+                          </a:solidFill>
+                          <a:latin typeface="Inter"/>
+                        </a:defRPr>
+                      </a:pPr>
+                      <a:r>
+                        <a:rPr>
+                          <a:latin typeface="Inter"/>
+                        </a:rPr>
+                        <a:t>view=open; public-equity managers</a:t>
+                      </a:r>
+                    </a:p>
+                  </a:txBody>
+                  <a:tcPr marL="54864" marR="54864" marT="27432" marB="27432" anchor="ctr">
+                    <a:solidFill>
+                      <a:srgbClr val="F5F7F9"/>
+                    </a:solidFill>
+                  </a:tcPr>
+                </a:tc>
+                <a:tc>
+                  <a:txBody>
+                    <a:bodyPr/>
+                    <a:lstStyle/>
+                    <a:p>
+                      <a:pPr>
+                        <a:defRPr sz="800" b="0">
+                          <a:solidFill>
+                            <a:srgbClr val="0D1117"/>
+                          </a:solidFill>
+                          <a:latin typeface="Inter"/>
+                        </a:defRPr>
+                      </a:pPr>
+                      <a:r>
+                        <a:rPr>
+                          <a:latin typeface="Inter"/>
+                        </a:rPr>
+                        <a:t>sha256:6666666666666666666666666666666666666666666666666666666666666666</a:t>
+                      </a:r>
+                    </a:p>
+                  </a:txBody>
+                  <a:tcPr marL="54864" marR="54864" marT="27432" marB="27432" anchor="ctr">
+                    <a:solidFill>
+                      <a:srgbClr val="F5F7F9"/>
+                    </a:solidFill>
+                  </a:tcPr>
+                </a:tc>
+              </a:tr>
+              <a:tr h="552069">
+                <a:tc>
+                  <a:txBody>
+                    <a:bodyPr/>
+                    <a:lstStyle/>
+                    <a:p>
+                      <a:pPr>
+                        <a:defRPr sz="800" b="1">
+                          <a:solidFill>
+                            <a:srgbClr val="0D1117"/>
+                          </a:solidFill>
+                          <a:latin typeface="Inter"/>
+                        </a:defRPr>
+                      </a:pPr>
+                      <a:r>
+                        <a:rPr>
+                          <a:latin typeface="Inter"/>
+                        </a:rPr>
+                        <a:t>S7</a:t>
+                      </a:r>
+                    </a:p>
+                  </a:txBody>
+                  <a:tcPr marL="54864" marR="54864" marT="27432" marB="27432" anchor="ctr">
+                    <a:solidFill>
+                      <a:srgbClr val="FFFFFF"/>
+                    </a:solidFill>
+                  </a:tcPr>
+                </a:tc>
+                <a:tc>
+                  <a:txBody>
+                    <a:bodyPr/>
+                    <a:lstStyle/>
+                    <a:p>
+                      <a:pPr>
+                        <a:defRPr sz="800" b="0">
+                          <a:solidFill>
+                            <a:srgbClr val="0D1117"/>
+                          </a:solidFill>
+                          <a:latin typeface="Inter"/>
+                        </a:defRPr>
+                      </a:pPr>
+                      <a:r>
+                        <a:rPr>
+                          <a:latin typeface="Inter"/>
+                        </a:rPr>
+                        <a:t>view=gradient_signal; regime_state</a:t>
+                      </a:r>
+                    </a:p>
+                  </a:txBody>
+                  <a:tcPr marL="54864" marR="54864" marT="27432" marB="27432" anchor="ctr">
+                    <a:solidFill>
+                      <a:srgbClr val="FFFFFF"/>
+                    </a:solidFill>
+                  </a:tcPr>
+                </a:tc>
+                <a:tc>
+                  <a:txBody>
+                    <a:bodyPr/>
+                    <a:lstStyle/>
+                    <a:p>
+                      <a:pPr>
+                        <a:defRPr sz="800" b="0">
+                          <a:solidFill>
+                            <a:srgbClr val="0D1117"/>
+                          </a:solidFill>
+                          <a:latin typeface="Inter"/>
+                        </a:defRPr>
+                      </a:pPr>
+                      <a:r>
+                        <a:rPr>
+                          <a:latin typeface="Inter"/>
+                        </a:rPr>
+                        <a:t>sha256:7777777777777777777777777777777777777777777777777777777777777777</a:t>
+                      </a:r>
+                    </a:p>
+                  </a:txBody>
+                  <a:tcPr marL="54864" marR="54864" marT="27432" marB="27432" anchor="ctr">
+                    <a:solidFill>
+                      <a:srgbClr val="FFFFFF"/>
+                    </a:solidFill>
+                  </a:tcPr>
+                </a:tc>
+              </a:tr>
+            </a:tbl>
+          </a:graphicData>
+        </a:graphic>
+      </p:graphicFrame>
+      <p:sp>
+        <p:nvSpPr>
+          <p:cNvPr id="9" name="TextBox 8"/>
+          <p:cNvSpPr txBox="1"/>
+          <p:nvPr/>
+        </p:nvSpPr>
+        <p:spPr>
+          <a:xfrm>
+            <a:off x="640080" y="6035040"/>
+            <a:ext cx="10908792" cy="164592"/>
+          </a:xfrm>
+          <a:prstGeom prst="rect">
+            <a:avLst/>
+          </a:prstGeom>
+          <a:noFill/>
+        </p:spPr>
+        <p:txBody>
+          <a:bodyPr wrap="none" lIns="9144" rIns="9144" tIns="9144" bIns="9144" anchor="t">
+            <a:spAutoFit/>
+          </a:bodyPr>
+          <a:lstStyle/>
+          <a:p>
+            <a:pPr algn="l">
+              <a:spcAft>
+                <a:spcPts val="0"/>
+              </a:spcAft>
+              <a:defRPr sz="680" b="0">
+                <a:solidFill>
+                  <a:srgbClr val="8A94A1"/>
+                </a:solidFill>
+                <a:latin typeface="Inter"/>
+              </a:defRPr>
+            </a:pPr>
+            <a:r>
+              <a:rPr>
+                <a:latin typeface="Inter"/>
+              </a:rPr>
+              <a:t>Data scope for every source: Illustrative sample data. Each digest is the SHA-256 fingerprint of the exact data the report used.</a:t>
+            </a:r>
+          </a:p>
+        </p:txBody>
+      </p:sp>
+      <p:sp>
+        <p:nvSpPr>
+          <p:cNvPr id="10" name="Rectangle 9"/>
+          <p:cNvSpPr/>
+          <p:nvPr/>
+        </p:nvSpPr>
+        <p:spPr>
+          <a:xfrm>
+            <a:off x="640080" y="6446520"/>
+            <a:ext cx="10908792" cy="9144"/>
+          </a:xfrm>
+          <a:prstGeom prst="rect">
+            <a:avLst/>
+          </a:prstGeom>
+          <a:solidFill>
+            <a:srgbClr val="E3E7EC"/>
+          </a:solidFill>
+          <a:ln>
+            <a:solidFill>
+              <a:srgbClr val="E3E7EC"/>
+            </a:solidFill>
+          </a:ln>
+        </p:spPr>
+        <p:style>
+          <a:lnRef idx="1">
+            <a:schemeClr val="accent1"/>
+          </a:lnRef>
+          <a:fillRef idx="3">
+            <a:schemeClr val="accent1"/>
+          </a:fillRef>
+          <a:effectRef idx="2">
+            <a:schemeClr val="accent1"/>
+          </a:effectRef>
+          <a:fontRef idx="minor">
+            <a:schemeClr val="lt1"/>
+          </a:fontRef>
+        </p:style>
+        <p:txBody>
+          <a:bodyPr rtlCol="0" anchor="ctr"/>
+          <a:lstStyle/>
+          <a:p>
+            <a:pPr algn="ctr">
+              <a:defRPr>
+                <a:latin typeface="Inter"/>
+              </a:defRPr>
+            </a:pPr>
+          </a:p>
+        </p:txBody>
+      </p:sp>
+      <p:sp>
+        <p:nvSpPr>
+          <p:cNvPr id="11" name="TextBox 10"/>
+          <p:cNvSpPr txBox="1"/>
+          <p:nvPr/>
+        </p:nvSpPr>
+        <p:spPr>
+          <a:xfrm>
+            <a:off x="640080" y="6501384"/>
+            <a:ext cx="4297680" cy="146304"/>
+          </a:xfrm>
+          <a:prstGeom prst="rect">
+            <a:avLst/>
+          </a:prstGeom>
+          <a:noFill/>
+        </p:spPr>
+        <p:txBody>
+          <a:bodyPr wrap="none" lIns="9144" rIns="9144" tIns="9144" bIns="9144" anchor="t">
+            <a:spAutoFit/>
+          </a:bodyPr>
+          <a:lstStyle/>
+          <a:p>
+            <a:pPr algn="l">
+              <a:spcAft>
+                <a:spcPts val="0"/>
+              </a:spcAft>
+              <a:defRPr sz="650" b="0">
+                <a:solidFill>
+                  <a:srgbClr val="8A94A1"/>
+                </a:solidFill>
+                <a:latin typeface="Inter"/>
+              </a:defRPr>
+            </a:pPr>
+            <a:r>
+              <a:rPr>
+                <a:latin typeface="Inter"/>
+              </a:rPr>
+              <a:t>Sources: S1 · S2 · S3 · S4 · S5 · S6 · S7</a:t>
+            </a:r>
+          </a:p>
+        </p:txBody>
+      </p:sp>
+      <p:sp>
+        <p:nvSpPr>
+          <p:cNvPr id="12" name="TextBox 11"/>
+          <p:cNvSpPr txBox="1"/>
+          <p:nvPr/>
+        </p:nvSpPr>
+        <p:spPr>
+          <a:xfrm>
+            <a:off x="4480560" y="6501384"/>
+            <a:ext cx="5303520" cy="146304"/>
+          </a:xfrm>
+          <a:prstGeom prst="rect">
+            <a:avLst/>
+          </a:prstGeom>
+          <a:noFill/>
+        </p:spPr>
+        <p:txBody>
+          <a:bodyPr wrap="none" lIns="9144" rIns="9144" tIns="9144" bIns="9144" anchor="t">
+            <a:spAutoFit/>
+          </a:bodyPr>
+          <a:lstStyle/>
+          <a:p>
+            <a:pPr algn="ctr">
+              <a:spcAft>
+                <a:spcPts val="0"/>
+              </a:spcAft>
+              <a:defRPr sz="650" b="0">
+                <a:solidFill>
+                  <a:srgbClr val="8A94A1"/>
+                </a:solidFill>
+                <a:latin typeface="Inter"/>
+              </a:defRPr>
+            </a:pPr>
+            <a:r>
+              <a:rPr>
+                <a:latin typeface="Inter"/>
+              </a:rPr>
+              <a:t>Confidential — Investment Committee · Data as of 2026-06-30 historical; 2026-10-08 ex ante</a:t>
+            </a:r>
+          </a:p>
+        </p:txBody>
+      </p:sp>
+      <p:sp>
+        <p:nvSpPr>
+          <p:cNvPr id="13" name="TextBox 12"/>
+          <p:cNvSpPr txBox="1"/>
+          <p:nvPr/>
+        </p:nvSpPr>
+        <p:spPr>
+          <a:xfrm>
+            <a:off x="10287000" y="6501384"/>
+            <a:ext cx="1261872" cy="146304"/>
+          </a:xfrm>
+          <a:prstGeom prst="rect">
+            <a:avLst/>
+          </a:prstGeom>
+          <a:noFill/>
+        </p:spPr>
+        <p:txBody>
+          <a:bodyPr wrap="none" lIns="9144" rIns="9144" tIns="9144" bIns="9144" anchor="t">
+            <a:spAutoFit/>
+          </a:bodyPr>
+          <a:lstStyle/>
+          <a:p>
+            <a:pPr algn="r">
+              <a:spcAft>
+                <a:spcPts val="0"/>
+              </a:spcAft>
+              <a:defRPr sz="650" b="0">
+                <a:solidFill>
+                  <a:srgbClr val="8A94A1"/>
+                </a:solidFill>
+                <a:latin typeface="Inter"/>
+              </a:defRPr>
+            </a:pPr>
+            <a:r>
+              <a:rPr>
+                <a:latin typeface="Inter"/>
+              </a:rPr>
+              <a:t>25</a:t>
+            </a:r>
+          </a:p>
+        </p:txBody>
+      </p:sp>
+    </p:spTree>
+  </p:cSld>
+  <p:clrMapOvr>
+    <a:masterClrMapping/>
+  </p:clrMapOvr>
+</p:sld>
+</file>
+
+<file path=ppt/slides/slide26.xml><?xml version="1.0" encoding="utf-8"?>
+<p:sld xmlns:a="http://schemas.openxmlformats.org/drawingml/2006/main" xmlns:p="http://schemas.openxmlformats.org/presentationml/2006/main" xmlns:r="http://schemas.openxmlformats.org/officeDocument/2006/relationships">
+  <p:cSld>
+    <p:spTree>
+      <p:nvGrpSpPr>
+        <p:cNvPr id="1" name=""/>
+        <p:cNvGrpSpPr/>
+        <p:nvPr/>
+      </p:nvGrpSpPr>
+      <p:grpSpPr/>
+      <p:sp>
+        <p:nvSpPr>
+          <p:cNvPr id="2" name="Rectangle 1"/>
+          <p:cNvSpPr/>
+          <p:nvPr/>
+        </p:nvSpPr>
+        <p:spPr>
+          <a:xfrm>
+            <a:off x="0" y="0"/>
+            <a:ext cx="12191695" cy="6858000"/>
+          </a:xfrm>
+          <a:prstGeom prst="rect">
+            <a:avLst/>
+          </a:prstGeom>
+          <a:solidFill>
+            <a:srgbClr val="FFFFFF"/>
+          </a:solidFill>
+          <a:ln>
+            <a:solidFill>
+              <a:srgbClr val="FFFFFF"/>
+            </a:solidFill>
+          </a:ln>
+        </p:spPr>
+        <p:style>
+          <a:lnRef idx="1">
+            <a:schemeClr val="accent1"/>
+          </a:lnRef>
+          <a:fillRef idx="3">
+            <a:schemeClr val="accent1"/>
+          </a:fillRef>
+          <a:effectRef idx="2">
+            <a:schemeClr val="accent1"/>
+          </a:effectRef>
+          <a:fontRef idx="minor">
+            <a:schemeClr val="lt1"/>
+          </a:fontRef>
+        </p:style>
+        <p:txBody>
+          <a:bodyPr rtlCol="0" anchor="ctr"/>
+          <a:lstStyle/>
+          <a:p>
+            <a:pPr algn="ctr">
+              <a:defRPr>
+                <a:latin typeface="Inter"/>
+              </a:defRPr>
+            </a:pPr>
+          </a:p>
+        </p:txBody>
+      </p:sp>
+      <p:sp>
+        <p:nvSpPr>
+          <p:cNvPr id="3" name="TextBox 2"/>
+          <p:cNvSpPr txBox="1"/>
+          <p:nvPr/>
+        </p:nvSpPr>
+        <p:spPr>
+          <a:xfrm>
+            <a:off x="640080" y="566928"/>
+            <a:ext cx="10058400" cy="530352"/>
+          </a:xfrm>
+          <a:prstGeom prst="rect">
+            <a:avLst/>
+          </a:prstGeom>
+          <a:noFill/>
+        </p:spPr>
+        <p:txBody>
+          <a:bodyPr wrap="none" lIns="9144" rIns="9144" tIns="9144" bIns="9144" anchor="t">
+            <a:spAutoFit/>
+          </a:bodyPr>
+          <a:lstStyle/>
+          <a:p>
+            <a:pPr algn="l">
+              <a:spcAft>
+                <a:spcPts val="0"/>
+              </a:spcAft>
+              <a:defRPr sz="2300" b="1">
+                <a:solidFill>
+                  <a:srgbClr val="0D1117"/>
+                </a:solidFill>
+                <a:latin typeface="Inter"/>
+              </a:defRPr>
+            </a:pPr>
+            <a:r>
+              <a:rPr>
+                <a:latin typeface="Inter"/>
+              </a:rPr>
+              <a:t>Appendix — Server Metric Methods and Disclosures</a:t>
+            </a:r>
+          </a:p>
+        </p:txBody>
+      </p:sp>
+      <p:sp>
+        <p:nvSpPr>
+          <p:cNvPr id="4" name="Rectangle 3"/>
+          <p:cNvSpPr/>
+          <p:nvPr/>
+        </p:nvSpPr>
+        <p:spPr>
+          <a:xfrm>
+            <a:off x="640080" y="1115568"/>
+            <a:ext cx="10908792" cy="18288"/>
+          </a:xfrm>
+          <a:prstGeom prst="rect">
+            <a:avLst/>
+          </a:prstGeom>
+          <a:solidFill>
+            <a:srgbClr val="0D1117"/>
+          </a:solidFill>
+          <a:ln>
+            <a:solidFill>
+              <a:srgbClr val="0D1117"/>
+            </a:solidFill>
+          </a:ln>
+        </p:spPr>
+        <p:style>
+          <a:lnRef idx="1">
+            <a:schemeClr val="accent1"/>
+          </a:lnRef>
+          <a:fillRef idx="3">
+            <a:schemeClr val="accent1"/>
+          </a:fillRef>
+          <a:effectRef idx="2">
+            <a:schemeClr val="accent1"/>
+          </a:effectRef>
+          <a:fontRef idx="minor">
+            <a:schemeClr val="lt1"/>
+          </a:fontRef>
+        </p:style>
+        <p:txBody>
+          <a:bodyPr rtlCol="0" anchor="ctr"/>
+          <a:lstStyle/>
+          <a:p>
+            <a:pPr algn="ctr">
+              <a:defRPr>
+                <a:latin typeface="Inter"/>
+              </a:defRPr>
+            </a:pPr>
+          </a:p>
+        </p:txBody>
+      </p:sp>
+      <p:sp>
+        <p:nvSpPr>
+          <p:cNvPr id="5" name="Rectangle 4"/>
+          <p:cNvSpPr/>
+          <p:nvPr/>
+        </p:nvSpPr>
+        <p:spPr>
+          <a:xfrm>
+            <a:off x="11018520" y="502920"/>
+            <a:ext cx="530352" cy="393192"/>
+          </a:xfrm>
+          <a:prstGeom prst="rect">
+            <a:avLst/>
+          </a:prstGeom>
+          <a:solidFill>
+            <a:srgbClr val="9AA5B1"/>
+          </a:solidFill>
+          <a:ln>
+            <a:solidFill>
+              <a:srgbClr val="9AA5B1"/>
+            </a:solidFill>
+          </a:ln>
+        </p:spPr>
+        <p:style>
+          <a:lnRef idx="1">
+            <a:schemeClr val="accent1"/>
+          </a:lnRef>
+          <a:fillRef idx="3">
+            <a:schemeClr val="accent1"/>
+          </a:fillRef>
+          <a:effectRef idx="2">
+            <a:schemeClr val="accent1"/>
+          </a:effectRef>
+          <a:fontRef idx="minor">
+            <a:schemeClr val="lt1"/>
+          </a:fontRef>
+        </p:style>
+        <p:txBody>
+          <a:bodyPr rtlCol="0" anchor="ctr"/>
+          <a:lstStyle/>
+          <a:p>
+            <a:pPr algn="ctr">
+              <a:defRPr>
+                <a:latin typeface="Inter"/>
+              </a:defRPr>
+            </a:pPr>
+          </a:p>
+        </p:txBody>
+      </p:sp>
+      <p:sp>
+        <p:nvSpPr>
+          <p:cNvPr id="6" name="TextBox 5"/>
+          <p:cNvSpPr txBox="1"/>
+          <p:nvPr/>
+        </p:nvSpPr>
+        <p:spPr>
+          <a:xfrm>
+            <a:off x="11045952" y="557784"/>
+            <a:ext cx="475488" cy="182880"/>
+          </a:xfrm>
+          <a:prstGeom prst="rect">
+            <a:avLst/>
+          </a:prstGeom>
+          <a:noFill/>
+        </p:spPr>
+        <p:txBody>
+          <a:bodyPr wrap="none" lIns="9144" rIns="9144" tIns="9144" bIns="9144" anchor="t">
+            <a:spAutoFit/>
+          </a:bodyPr>
+          <a:lstStyle/>
+          <a:p>
+            <a:pPr algn="ctr">
+              <a:spcAft>
+                <a:spcPts val="0"/>
+              </a:spcAft>
+              <a:defRPr sz="1000" b="1">
+                <a:solidFill>
+                  <a:srgbClr val="0D1117"/>
+                </a:solidFill>
+                <a:latin typeface="Inter"/>
+              </a:defRPr>
+            </a:pPr>
+            <a:r>
+              <a:rPr>
+                <a:latin typeface="Inter"/>
+              </a:rPr>
+              <a:t>B</a:t>
+            </a:r>
+          </a:p>
+        </p:txBody>
+      </p:sp>
+      <p:sp>
+        <p:nvSpPr>
+          <p:cNvPr id="7" name="TextBox 6"/>
+          <p:cNvSpPr txBox="1"/>
+          <p:nvPr/>
+        </p:nvSpPr>
+        <p:spPr>
+          <a:xfrm>
+            <a:off x="640080" y="1325880"/>
+            <a:ext cx="10908792" cy="201168"/>
+          </a:xfrm>
+          <a:prstGeom prst="rect">
+            <a:avLst/>
+          </a:prstGeom>
+          <a:noFill/>
+        </p:spPr>
+        <p:txBody>
+          <a:bodyPr wrap="none" lIns="9144" rIns="9144" tIns="9144" bIns="9144" anchor="t">
+            <a:spAutoFit/>
+          </a:bodyPr>
+          <a:lstStyle/>
+          <a:p>
+            <a:pPr algn="l">
+              <a:spcAft>
+                <a:spcPts val="0"/>
+              </a:spcAft>
+              <a:defRPr sz="720" b="1">
+                <a:solidFill>
+                  <a:srgbClr val="4A5563"/>
+                </a:solidFill>
+                <a:latin typeface="Inter"/>
+              </a:defRPr>
+            </a:pPr>
+            <a:r>
+              <a:rPr>
+                <a:latin typeface="Inter"/>
+              </a:rPr>
               <a:t>SERVER METRIC METHODS</a:t>
             </a:r>
           </a:p>
@@ -27648,7 +27140,7 @@
       </p:sp>
       <p:graphicFrame>
         <p:nvGraphicFramePr>
-          <p:cNvPr id="9" name="Table 8"/>
+          <p:cNvPr id="8" name="Table 7"/>
           <p:cNvGraphicFramePr>
             <a:graphicFrameLocks noGrp="1"/>
           </p:cNvGraphicFramePr>
@@ -27880,7 +27372,7 @@
                         <a:rPr>
                           <a:latin typeface="Inter"/>
                         </a:rPr>
-                        <a:t>Realized Brinson-Fachler with symmetric Carino</a:t>
+                        <a:t>Realized Brinson-Fachler, Carino-linked</a:t>
                       </a:r>
                     </a:p>
                   </a:txBody>
@@ -27934,7 +27426,7 @@
                         <a:rPr>
                           <a:latin typeface="Inter"/>
                         </a:rPr>
-                        <a:t>Monthly total return; decimal fraction; 1e-10 [S4]</a:t>
+                        <a:t>Monthly; decimal; 1e-10 [S4]</a:t>
                       </a:r>
                     </a:p>
                   </a:txBody>
@@ -28017,7 +27509,7 @@
                         <a:rPr>
                           <a:latin typeface="Inter"/>
                         </a:rPr>
-                        <a:t>Single-period expected Brinson-Fachler</a:t>
+                        <a:t>Expected Brinson-Fachler, one period</a:t>
                       </a:r>
                     </a:p>
                   </a:txBody>
@@ -28071,7 +27563,7 @@
                         <a:rPr>
                           <a:latin typeface="Inter"/>
                         </a:rPr>
-                        <a:t>Annualized expected return; decimal fraction; 1e-10 [S5]</a:t>
+                        <a:t>Annualized; decimal; 1e-10 [S5]</a:t>
                       </a:r>
                     </a:p>
                   </a:txBody>
@@ -28154,7 +27646,7 @@
                         <a:rPr>
                           <a:latin typeface="Inter"/>
                         </a:rPr>
-                        <a:t>Server-returned indexed growth, rolling-window excess and peak-to-trough drawdown</a:t>
+                        <a:t>Indexed growth, rolling excess, peak-to-trough drawdown</a:t>
                       </a:r>
                     </a:p>
                   </a:txBody>
@@ -28208,7 +27700,7 @@
                         <a:rPr>
                           <a:latin typeface="Inter"/>
                         </a:rPr>
-                        <a:t>Monthly observations; index / percentage / percentage [S3]</a:t>
+                        <a:t>Monthly; index and percent [S3]</a:t>
                       </a:r>
                     </a:p>
                   </a:txBody>
@@ -28291,7 +27783,7 @@
                         <a:rPr>
                           <a:latin typeface="Inter"/>
                         </a:rPr>
-                        <a:t>Server-returned segment contribution to total active risk</a:t>
+                        <a:t>Segment share of total active risk</a:t>
                       </a:r>
                     </a:p>
                   </a:txBody>
@@ -28345,7 +27837,7 @@
                         <a:rPr>
                           <a:latin typeface="Inter"/>
                         </a:rPr>
-                        <a:t>Annualized tracking error; contribution share [S4]</a:t>
+                        <a:t>Annualized; share [S4]</a:t>
                       </a:r>
                     </a:p>
                   </a:txBody>
@@ -28401,7 +27893,7 @@
                         <a:rPr>
                           <a:latin typeface="Inter"/>
                         </a:rPr>
-                        <a:t>Cumulative and segment-month linked effects</a:t>
+                        <a:t>Linked monthly and cumulative effects</a:t>
                       </a:r>
                     </a:p>
                   </a:txBody>
@@ -28428,7 +27920,7 @@
                         <a:rPr>
                           <a:latin typeface="Inter"/>
                         </a:rPr>
-                        <a:t>Server-returned symmetric-Carino effects from periods and period segments</a:t>
+                        <a:t>Carino-linked period and segment effects</a:t>
                       </a:r>
                     </a:p>
                   </a:txBody>
@@ -28482,7 +27974,7 @@
                         <a:rPr>
                           <a:latin typeface="Inter"/>
                         </a:rPr>
-                        <a:t>Monthly and cumulative percentage-point effects [S4]</a:t>
+                        <a:t>Percentage points [S4]</a:t>
                       </a:r>
                     </a:p>
                   </a:txBody>
@@ -28538,7 +28030,7 @@
                         <a:rPr>
                           <a:latin typeface="Inter"/>
                         </a:rPr>
-                        <a:t>Largest sub-allocation cumulative selection</a:t>
+                        <a:t>Largest sub-allocation selection</a:t>
                       </a:r>
                     </a:p>
                   </a:txBody>
@@ -28565,7 +28057,7 @@
                         <a:rPr>
                           <a:latin typeface="Inter"/>
                         </a:rPr>
-                        <a:t>Server-returned depth-1 period selection effects without local reconstruction</a:t>
+                        <a:t>Depth-1 period selection effects, as returned</a:t>
                       </a:r>
                     </a:p>
                   </a:txBody>
@@ -28619,7 +28111,7 @@
                         <a:rPr>
                           <a:latin typeface="Inter"/>
                         </a:rPr>
-                        <a:t>Cumulative percentage-point selection effect [S4]</a:t>
+                        <a:t>Cumulative percentage points [S4]</a:t>
                       </a:r>
                     </a:p>
                   </a:txBody>
@@ -28675,7 +28167,7 @@
                         <a:rPr>
                           <a:latin typeface="Inter"/>
                         </a:rPr>
-                        <a:t>Portfolio and benchmark expected return by segment</a:t>
+                        <a:t>Expected return by segment</a:t>
                       </a:r>
                     </a:p>
                   </a:txBody>
@@ -28702,7 +28194,7 @@
                         <a:rPr>
                           <a:latin typeface="Inter"/>
                         </a:rPr>
-                        <a:t>Server-returned expected returns applied to actual and policy segment weights</a:t>
+                        <a:t>Expected returns on actual and policy weights</a:t>
                       </a:r>
                     </a:p>
                   </a:txBody>
@@ -28756,7 +28248,7 @@
                         <a:rPr>
                           <a:latin typeface="Inter"/>
                         </a:rPr>
-                        <a:t>Annualized expected return; percentage [S5]</a:t>
+                        <a:t>Annualized; percent [S5]</a:t>
                       </a:r>
                     </a:p>
                   </a:txBody>
@@ -28812,7 +28304,7 @@
                         <a:rPr>
                           <a:latin typeface="Inter"/>
                         </a:rPr>
-                        <a:t>Segment effect pairing and sign agreement</a:t>
+                        <a:t>Segment effects and sign agreement</a:t>
                       </a:r>
                     </a:p>
                   </a:txBody>
@@ -28839,7 +28331,7 @@
                         <a:rPr>
                           <a:latin typeface="Inter"/>
                         </a:rPr>
-                        <a:t>Direct presentation of server-returned historical and ex ante segment effects</a:t>
+                        <a:t>Historical and ex ante effects side by side</a:t>
                       </a:r>
                     </a:p>
                   </a:txBody>
@@ -28893,7 +28385,7 @@
                         <a:rPr>
                           <a:latin typeface="Inter"/>
                         </a:rPr>
-                        <a:t>Percentage-point effects; no cross-lane rebasing [S4][S5]</a:t>
+                        <a:t>Percentage points; not rebased [S4][S5]</a:t>
                       </a:r>
                     </a:p>
                   </a:txBody>
@@ -28910,7 +28402,7 @@
       </p:graphicFrame>
       <p:sp>
         <p:nvSpPr>
-          <p:cNvPr id="10" name="Rectangle 9"/>
+          <p:cNvPr id="9" name="Rectangle 8"/>
           <p:cNvSpPr/>
           <p:nvPr/>
         </p:nvSpPr>
@@ -28959,7 +28451,7 @@
       </p:sp>
       <p:sp>
         <p:nvSpPr>
-          <p:cNvPr id="11" name="TextBox 10"/>
+          <p:cNvPr id="10" name="TextBox 9"/>
           <p:cNvSpPr txBox="1"/>
           <p:nvPr/>
         </p:nvSpPr>
@@ -29001,7 +28493,7 @@
       </p:sp>
       <p:sp>
         <p:nvSpPr>
-          <p:cNvPr id="12" name="TextBox 11"/>
+          <p:cNvPr id="11" name="TextBox 10"/>
           <p:cNvSpPr txBox="1"/>
           <p:nvPr/>
         </p:nvSpPr>
@@ -29043,7 +28535,7 @@
       </p:sp>
       <p:sp>
         <p:nvSpPr>
-          <p:cNvPr id="13" name="TextBox 12"/>
+          <p:cNvPr id="12" name="TextBox 11"/>
           <p:cNvSpPr txBox="1"/>
           <p:nvPr/>
         </p:nvSpPr>
@@ -29078,7 +28570,7 @@
               <a:rPr>
                 <a:latin typeface="Inter"/>
               </a:rPr>
-              <a:t>25</a:t>
+              <a:t>26</a:t>
             </a:r>
           </a:p>
         </p:txBody>
@@ -29091,7 +28583,7 @@
 </p:sld>
 </file>
 
-<file path=ppt/slides/slide26.xml><?xml version="1.0" encoding="utf-8"?>
+<file path=ppt/slides/slide27.xml><?xml version="1.0" encoding="utf-8"?>
 <p:sld xmlns:a="http://schemas.openxmlformats.org/drawingml/2006/main" xmlns:p="http://schemas.openxmlformats.org/presentationml/2006/main" xmlns:r="http://schemas.openxmlformats.org/officeDocument/2006/relationships">
   <p:cSld>
     <p:spTree>
@@ -29158,48 +28650,6 @@
         </p:nvSpPr>
         <p:spPr>
           <a:xfrm>
-            <a:off x="5897880" y="310896"/>
-            <a:ext cx="4800600" cy="256032"/>
-          </a:xfrm>
-          <a:prstGeom prst="rect">
-            <a:avLst/>
-          </a:prstGeom>
-          <a:noFill/>
-        </p:spPr>
-        <p:txBody>
-          <a:bodyPr wrap="none" lIns="9144" rIns="9144" tIns="9144" bIns="9144" anchor="t">
-            <a:spAutoFit/>
-          </a:bodyPr>
-          <a:lstStyle/>
-          <a:p>
-            <a:pPr algn="r">
-              <a:spcAft>
-                <a:spcPts val="0"/>
-              </a:spcAft>
-              <a:defRPr sz="680" b="1">
-                <a:solidFill>
-                  <a:srgbClr val="4F6B00"/>
-                </a:solidFill>
-                <a:latin typeface="Inter"/>
-              </a:defRPr>
-            </a:pPr>
-            <a:r>
-              <a:rPr>
-                <a:latin typeface="Inter"/>
-              </a:rPr>
-              <a:t>Illustrative, Gradient Maintained — demo data, not the client's holdings or managers</a:t>
-            </a:r>
-          </a:p>
-        </p:txBody>
-      </p:sp>
-      <p:sp>
-        <p:nvSpPr>
-          <p:cNvPr id="4" name="TextBox 3"/>
-          <p:cNvSpPr txBox="1"/>
-          <p:nvPr/>
-        </p:nvSpPr>
-        <p:spPr>
-          <a:xfrm>
             <a:off x="640080" y="566928"/>
             <a:ext cx="10058400" cy="530352"/>
           </a:xfrm>
@@ -29236,7 +28686,7 @@
       </p:sp>
       <p:sp>
         <p:nvSpPr>
-          <p:cNvPr id="5" name="Rectangle 4"/>
+          <p:cNvPr id="4" name="Rectangle 3"/>
           <p:cNvSpPr/>
           <p:nvPr/>
         </p:nvSpPr>
@@ -29285,7 +28735,7 @@
       </p:sp>
       <p:sp>
         <p:nvSpPr>
-          <p:cNvPr id="6" name="Rectangle 5"/>
+          <p:cNvPr id="5" name="Rectangle 4"/>
           <p:cNvSpPr/>
           <p:nvPr/>
         </p:nvSpPr>
@@ -29334,7 +28784,7 @@
       </p:sp>
       <p:sp>
         <p:nvSpPr>
-          <p:cNvPr id="7" name="TextBox 6"/>
+          <p:cNvPr id="6" name="TextBox 5"/>
           <p:cNvSpPr txBox="1"/>
           <p:nvPr/>
         </p:nvSpPr>
@@ -29376,7 +28826,7 @@
       </p:sp>
       <p:sp>
         <p:nvSpPr>
-          <p:cNvPr id="8" name="TextBox 7"/>
+          <p:cNvPr id="7" name="TextBox 6"/>
           <p:cNvSpPr txBox="1"/>
           <p:nvPr/>
         </p:nvSpPr>
@@ -29411,7 +28861,7 @@
               <a:rPr>
                 <a:latin typeface="Inter"/>
               </a:rPr>
-              <a:t>•  Ex ante expected returns and effects are assumptions, not forecasts or guarantees.</a:t>
+              <a:t>•  Ex ante returns and effects are assumptions, not forecasts or guarantees; historical attribution is realized, so the two bases are not interchangeable.</a:t>
             </a:r>
           </a:p>
           <a:p>
@@ -29430,7 +28880,7 @@
               <a:rPr>
                 <a:latin typeface="Inter"/>
               </a:rPr>
-              <a:t>•  Historical attribution is realized and linked as returned.</a:t>
+              <a:t>•  Missing evidence is not zero.</a:t>
             </a:r>
           </a:p>
           <a:p>
@@ -29449,44 +28899,6 @@
               <a:rPr>
                 <a:latin typeface="Inter"/>
               </a:rPr>
-              <a:t>•  Historical and ex ante bases are not directly interchangeable.</a:t>
-            </a:r>
-          </a:p>
-          <a:p>
-            <a:pPr algn="l">
-              <a:spcAft>
-                <a:spcPts val="500"/>
-              </a:spcAft>
-              <a:defRPr sz="1050" b="0">
-                <a:solidFill>
-                  <a:srgbClr val="0D1117"/>
-                </a:solidFill>
-                <a:latin typeface="Inter"/>
-              </a:defRPr>
-            </a:pPr>
-            <a:r>
-              <a:rPr>
-                <a:latin typeface="Inter"/>
-              </a:rPr>
-              <a:t>•  Missing evidence is not zero.</a:t>
-            </a:r>
-          </a:p>
-          <a:p>
-            <a:pPr algn="l">
-              <a:spcAft>
-                <a:spcPts val="500"/>
-              </a:spcAft>
-              <a:defRPr sz="1050" b="0">
-                <a:solidFill>
-                  <a:srgbClr val="0D1117"/>
-                </a:solidFill>
-                <a:latin typeface="Inter"/>
-              </a:defRPr>
-            </a:pPr>
-            <a:r>
-              <a:rPr>
-                <a:latin typeface="Inter"/>
-              </a:rPr>
               <a:t>•  AI-assisted monitoring analysis; not investment, legal or compliance advice.</a:t>
             </a:r>
           </a:p>
@@ -29494,7 +28906,7 @@
       </p:sp>
       <p:sp>
         <p:nvSpPr>
-          <p:cNvPr id="9" name="Rectangle 8"/>
+          <p:cNvPr id="8" name="Rectangle 7"/>
           <p:cNvSpPr/>
           <p:nvPr/>
         </p:nvSpPr>
@@ -29543,7 +28955,7 @@
       </p:sp>
       <p:sp>
         <p:nvSpPr>
-          <p:cNvPr id="10" name="TextBox 9"/>
+          <p:cNvPr id="9" name="TextBox 8"/>
           <p:cNvSpPr txBox="1"/>
           <p:nvPr/>
         </p:nvSpPr>
@@ -29585,7 +28997,7 @@
       </p:sp>
       <p:sp>
         <p:nvSpPr>
-          <p:cNvPr id="11" name="TextBox 10"/>
+          <p:cNvPr id="10" name="TextBox 9"/>
           <p:cNvSpPr txBox="1"/>
           <p:nvPr/>
         </p:nvSpPr>
@@ -29627,7 +29039,7 @@
       </p:sp>
       <p:sp>
         <p:nvSpPr>
-          <p:cNvPr id="12" name="TextBox 11"/>
+          <p:cNvPr id="11" name="TextBox 10"/>
           <p:cNvSpPr txBox="1"/>
           <p:nvPr/>
         </p:nvSpPr>
@@ -29662,7 +29074,7 @@
               <a:rPr>
                 <a:latin typeface="Inter"/>
               </a:rPr>
-              <a:t>26</a:t>
+              <a:t>27</a:t>
             </a:r>
           </a:p>
         </p:txBody>
@@ -29743,7 +29155,7 @@
         <p:spPr>
           <a:xfrm>
             <a:off x="640080" y="329184"/>
-            <a:ext cx="5303520" cy="182880"/>
+            <a:ext cx="9875520" cy="182880"/>
           </a:xfrm>
           <a:prstGeom prst="rect">
             <a:avLst/>
@@ -29784,48 +29196,6 @@
         </p:nvSpPr>
         <p:spPr>
           <a:xfrm>
-            <a:off x="5897880" y="310896"/>
-            <a:ext cx="4800600" cy="256032"/>
-          </a:xfrm>
-          <a:prstGeom prst="rect">
-            <a:avLst/>
-          </a:prstGeom>
-          <a:noFill/>
-        </p:spPr>
-        <p:txBody>
-          <a:bodyPr wrap="none" lIns="9144" rIns="9144" tIns="9144" bIns="9144" anchor="t">
-            <a:spAutoFit/>
-          </a:bodyPr>
-          <a:lstStyle/>
-          <a:p>
-            <a:pPr algn="r">
-              <a:spcAft>
-                <a:spcPts val="0"/>
-              </a:spcAft>
-              <a:defRPr sz="680" b="1">
-                <a:solidFill>
-                  <a:srgbClr val="4F6B00"/>
-                </a:solidFill>
-                <a:latin typeface="Inter"/>
-              </a:defRPr>
-            </a:pPr>
-            <a:r>
-              <a:rPr>
-                <a:latin typeface="Inter"/>
-              </a:rPr>
-              <a:t>Illustrative, Gradient Maintained — demo data, not the client's holdings or managers</a:t>
-            </a:r>
-          </a:p>
-        </p:txBody>
-      </p:sp>
-      <p:sp>
-        <p:nvSpPr>
-          <p:cNvPr id="5" name="TextBox 4"/>
-          <p:cNvSpPr txBox="1"/>
-          <p:nvPr/>
-        </p:nvSpPr>
-        <p:spPr>
-          <a:xfrm>
             <a:off x="640080" y="566928"/>
             <a:ext cx="10058400" cy="530352"/>
           </a:xfrm>
@@ -29862,7 +29232,7 @@
       </p:sp>
       <p:sp>
         <p:nvSpPr>
-          <p:cNvPr id="6" name="Rectangle 5"/>
+          <p:cNvPr id="5" name="Rectangle 4"/>
           <p:cNvSpPr/>
           <p:nvPr/>
         </p:nvSpPr>
@@ -29911,7 +29281,7 @@
       </p:sp>
       <p:sp>
         <p:nvSpPr>
-          <p:cNvPr id="7" name="Rectangle 6"/>
+          <p:cNvPr id="6" name="Rectangle 5"/>
           <p:cNvSpPr/>
           <p:nvPr/>
         </p:nvSpPr>
@@ -29960,7 +29330,7 @@
       </p:sp>
       <p:sp>
         <p:nvSpPr>
-          <p:cNvPr id="8" name="TextBox 7"/>
+          <p:cNvPr id="7" name="TextBox 6"/>
           <p:cNvSpPr txBox="1"/>
           <p:nvPr/>
         </p:nvSpPr>
@@ -30002,7 +29372,7 @@
       </p:sp>
       <p:sp>
         <p:nvSpPr>
-          <p:cNvPr id="9" name="TextBox 8"/>
+          <p:cNvPr id="8" name="TextBox 7"/>
           <p:cNvSpPr txBox="1"/>
           <p:nvPr/>
         </p:nvSpPr>
@@ -30044,7 +29414,7 @@
       </p:sp>
       <p:graphicFrame>
         <p:nvGraphicFramePr>
-          <p:cNvPr id="10" name="Table 9"/>
+          <p:cNvPr id="9" name="Table 8"/>
           <p:cNvGraphicFramePr>
             <a:graphicFrameLocks noGrp="1"/>
           </p:cNvGraphicFramePr>
@@ -30052,7 +29422,7 @@
         </p:nvGraphicFramePr>
         <p:xfrm>
           <a:off x="640080" y="1600200"/>
-          <a:ext cx="10908792" cy="1758803"/>
+          <a:ext cx="10908792" cy="1841741"/>
         </p:xfrm>
         <a:graphic>
           <a:graphicData uri="http://schemas.openxmlformats.org/drawingml/2006/table">
@@ -30065,7 +29435,7 @@
                 <a:gridCol w="4448556"/>
                 <a:gridCol w="4448556"/>
               </a:tblGrid>
-              <a:tr h="293133">
+              <a:tr h="306956">
                 <a:tc>
                   <a:txBody>
                     <a:bodyPr/>
@@ -30148,7 +29518,7 @@
                   </a:tcPr>
                 </a:tc>
               </a:tr>
-              <a:tr h="293133">
+              <a:tr h="306956">
                 <a:tc>
                   <a:txBody>
                     <a:bodyPr/>
@@ -30231,7 +29601,7 @@
                   </a:tcPr>
                 </a:tc>
               </a:tr>
-              <a:tr h="293133">
+              <a:tr h="306956">
                 <a:tc>
                   <a:txBody>
                     <a:bodyPr/>
@@ -30314,7 +29684,7 @@
                   </a:tcPr>
                 </a:tc>
               </a:tr>
-              <a:tr h="293133">
+              <a:tr h="306956">
                 <a:tc>
                   <a:txBody>
                     <a:bodyPr/>
@@ -30397,7 +29767,7 @@
                   </a:tcPr>
                 </a:tc>
               </a:tr>
-              <a:tr h="293133">
+              <a:tr h="306956">
                 <a:tc>
                   <a:txBody>
                     <a:bodyPr/>
@@ -30480,7 +29850,7 @@
                   </a:tcPr>
                 </a:tc>
               </a:tr>
-              <a:tr h="293138">
+              <a:tr h="306961">
                 <a:tc>
                   <a:txBody>
                     <a:bodyPr/>
@@ -30569,14 +29939,14 @@
       </p:graphicFrame>
       <p:sp>
         <p:nvSpPr>
-          <p:cNvPr id="11" name="Rectangle 10"/>
+          <p:cNvPr id="10" name="Rectangle 9"/>
           <p:cNvSpPr/>
           <p:nvPr/>
         </p:nvSpPr>
         <p:spPr>
           <a:xfrm>
-            <a:off x="640080" y="3468731"/>
-            <a:ext cx="10908792" cy="677707"/>
+            <a:off x="640080" y="3551669"/>
+            <a:ext cx="10908792" cy="705353"/>
           </a:xfrm>
           <a:prstGeom prst="rect">
             <a:avLst/>
@@ -30618,14 +29988,14 @@
       </p:sp>
       <p:sp>
         <p:nvSpPr>
-          <p:cNvPr id="12" name="Rectangle 11"/>
+          <p:cNvPr id="11" name="Rectangle 10"/>
           <p:cNvSpPr/>
           <p:nvPr/>
         </p:nvSpPr>
         <p:spPr>
           <a:xfrm>
-            <a:off x="640080" y="3468731"/>
-            <a:ext cx="54864" cy="677707"/>
+            <a:off x="640080" y="3551669"/>
+            <a:ext cx="54864" cy="705353"/>
           </a:xfrm>
           <a:prstGeom prst="rect">
             <a:avLst/>
@@ -30667,13 +30037,13 @@
       </p:sp>
       <p:sp>
         <p:nvSpPr>
-          <p:cNvPr id="13" name="TextBox 12"/>
+          <p:cNvPr id="12" name="TextBox 11"/>
           <p:cNvSpPr txBox="1"/>
           <p:nvPr/>
         </p:nvSpPr>
         <p:spPr>
           <a:xfrm>
-            <a:off x="804671" y="3578459"/>
+            <a:off x="804671" y="3661397"/>
             <a:ext cx="10616184" cy="228600"/>
           </a:xfrm>
           <a:prstGeom prst="rect">
@@ -30709,13 +30079,13 @@
       </p:sp>
       <p:sp>
         <p:nvSpPr>
-          <p:cNvPr id="14" name="TextBox 13"/>
+          <p:cNvPr id="13" name="TextBox 12"/>
           <p:cNvSpPr txBox="1"/>
           <p:nvPr/>
         </p:nvSpPr>
         <p:spPr>
           <a:xfrm>
-            <a:off x="804671" y="3861923"/>
+            <a:off x="804671" y="3944861"/>
             <a:ext cx="10616184" cy="228600"/>
           </a:xfrm>
           <a:prstGeom prst="rect">
@@ -30751,14 +30121,14 @@
       </p:sp>
       <p:sp>
         <p:nvSpPr>
-          <p:cNvPr id="15" name="Rectangle 14"/>
+          <p:cNvPr id="14" name="Rectangle 13"/>
           <p:cNvSpPr/>
           <p:nvPr/>
         </p:nvSpPr>
         <p:spPr>
           <a:xfrm>
-            <a:off x="640080" y="4256167"/>
-            <a:ext cx="10908792" cy="1015432"/>
+            <a:off x="640080" y="4366751"/>
+            <a:ext cx="10908792" cy="870720"/>
           </a:xfrm>
           <a:prstGeom prst="rect">
             <a:avLst/>
@@ -30800,14 +30170,14 @@
       </p:sp>
       <p:sp>
         <p:nvSpPr>
-          <p:cNvPr id="16" name="Rectangle 15"/>
+          <p:cNvPr id="15" name="Rectangle 14"/>
           <p:cNvSpPr/>
           <p:nvPr/>
         </p:nvSpPr>
         <p:spPr>
           <a:xfrm>
-            <a:off x="640080" y="4256167"/>
-            <a:ext cx="54864" cy="1015432"/>
+            <a:off x="640080" y="4366751"/>
+            <a:ext cx="54864" cy="870720"/>
           </a:xfrm>
           <a:prstGeom prst="rect">
             <a:avLst/>
@@ -30849,13 +30219,13 @@
       </p:sp>
       <p:sp>
         <p:nvSpPr>
-          <p:cNvPr id="17" name="TextBox 16"/>
+          <p:cNvPr id="16" name="TextBox 15"/>
           <p:cNvSpPr txBox="1"/>
           <p:nvPr/>
         </p:nvSpPr>
         <p:spPr>
           <a:xfrm>
-            <a:off x="804671" y="4365895"/>
+            <a:off x="804671" y="4476479"/>
             <a:ext cx="10616184" cy="228600"/>
           </a:xfrm>
           <a:prstGeom prst="rect">
@@ -30884,21 +30254,21 @@
               <a:rPr>
                 <a:latin typeface="Inter"/>
               </a:rPr>
-              <a:t>Key judgment — headline signal</a:t>
+              <a:t>Key judgment — Reconciliation</a:t>
             </a:r>
           </a:p>
         </p:txBody>
       </p:sp>
       <p:sp>
         <p:nvSpPr>
-          <p:cNvPr id="18" name="TextBox 17"/>
+          <p:cNvPr id="17" name="TextBox 16"/>
           <p:cNvSpPr txBox="1"/>
           <p:nvPr/>
         </p:nvSpPr>
         <p:spPr>
           <a:xfrm>
-            <a:off x="804671" y="4649359"/>
-            <a:ext cx="10616184" cy="530800"/>
+            <a:off x="804671" y="4759943"/>
+            <a:ext cx="10616184" cy="386088"/>
           </a:xfrm>
           <a:prstGeom prst="rect">
             <a:avLst/>
@@ -30926,21 +30296,21 @@
               <a:rPr>
                 <a:latin typeface="Inter"/>
               </a:rPr>
-              <a:t>Observation: The sample report carries a reconciled-lanes signal versus the prior unresolved status [S1]. Why it matters: This signal focuses oversight on the report's most decision-relevant condition. Uncertainty: Evidence coverage may exclude newer or more detailed observations. What would change the view: A governed refresh showing a different signal or breached threshold.</a:t>
+              <a:t>Observation: The two attribution lanes, historical and ex ante, both reconcile [S1]. Why it matters: Both lanes give one consistent explanation of active return. Uncertainty: Ex ante effects depend on capital market assumptions. What would change the view: A refreshed assumption set that moves either lane by 0.1pp.</a:t>
             </a:r>
           </a:p>
         </p:txBody>
       </p:sp>
       <p:sp>
         <p:nvSpPr>
-          <p:cNvPr id="19" name="Rectangle 18"/>
+          <p:cNvPr id="18" name="Rectangle 17"/>
           <p:cNvSpPr/>
           <p:nvPr/>
         </p:nvSpPr>
         <p:spPr>
           <a:xfrm>
-            <a:off x="640080" y="5381327"/>
-            <a:ext cx="10908792" cy="836592"/>
+            <a:off x="640080" y="5347199"/>
+            <a:ext cx="10908792" cy="870720"/>
           </a:xfrm>
           <a:prstGeom prst="rect">
             <a:avLst/>
@@ -30982,14 +30352,14 @@
       </p:sp>
       <p:sp>
         <p:nvSpPr>
-          <p:cNvPr id="20" name="Rectangle 19"/>
+          <p:cNvPr id="19" name="Rectangle 18"/>
           <p:cNvSpPr/>
           <p:nvPr/>
         </p:nvSpPr>
         <p:spPr>
           <a:xfrm>
-            <a:off x="640080" y="5381327"/>
-            <a:ext cx="54864" cy="836592"/>
+            <a:off x="640080" y="5347199"/>
+            <a:ext cx="54864" cy="870720"/>
           </a:xfrm>
           <a:prstGeom prst="rect">
             <a:avLst/>
@@ -31031,13 +30401,13 @@
       </p:sp>
       <p:sp>
         <p:nvSpPr>
-          <p:cNvPr id="21" name="TextBox 20"/>
+          <p:cNvPr id="20" name="TextBox 19"/>
           <p:cNvSpPr txBox="1"/>
           <p:nvPr/>
         </p:nvSpPr>
         <p:spPr>
           <a:xfrm>
-            <a:off x="804671" y="5491055"/>
+            <a:off x="804671" y="5456927"/>
             <a:ext cx="10616184" cy="228600"/>
           </a:xfrm>
           <a:prstGeom prst="rect">
@@ -31066,21 +30436,21 @@
               <a:rPr>
                 <a:latin typeface="Inter"/>
               </a:rPr>
-              <a:t>Key judgment — primary measure</a:t>
+              <a:t>Key judgment — Active return</a:t>
             </a:r>
           </a:p>
         </p:txBody>
       </p:sp>
       <p:sp>
         <p:nvSpPr>
-          <p:cNvPr id="22" name="TextBox 21"/>
+          <p:cNvPr id="21" name="TextBox 20"/>
           <p:cNvSpPr txBox="1"/>
           <p:nvPr/>
         </p:nvSpPr>
         <p:spPr>
           <a:xfrm>
-            <a:off x="804671" y="5774519"/>
-            <a:ext cx="10616184" cy="351960"/>
+            <a:off x="804671" y="5740391"/>
+            <a:ext cx="10616184" cy="386088"/>
           </a:xfrm>
           <a:prstGeom prst="rect">
             <a:avLst/>
@@ -31108,14 +30478,14 @@
               <a:rPr>
                 <a:latin typeface="Inter"/>
               </a:rPr>
-              <a:t>Observation: Historical active return is -0.6pp in the review evidence [S2]. Why it matters: This measure establishes the baseline for comparing later governed results. Uncertainty: The source basis may omit newer observations outside the reviewed evidence. What would change the view: A refreshed source report showing a change above 1%.</a:t>
+              <a:t>Observation: Historical active return was -0.6pp over the period [S2]. Why it matters: It is the shortfall that the attribution effects explain. Uncertainty: Benchmark returns use the policy weights in force each month. What would change the view: A restated benchmark history that moves active return by 0.1pp or more.</a:t>
             </a:r>
           </a:p>
         </p:txBody>
       </p:sp>
       <p:sp>
         <p:nvSpPr>
-          <p:cNvPr id="23" name="Rectangle 22"/>
+          <p:cNvPr id="22" name="Rectangle 21"/>
           <p:cNvSpPr/>
           <p:nvPr/>
         </p:nvSpPr>
@@ -31164,7 +30534,7 @@
       </p:sp>
       <p:sp>
         <p:nvSpPr>
-          <p:cNvPr id="24" name="TextBox 23"/>
+          <p:cNvPr id="23" name="TextBox 22"/>
           <p:cNvSpPr txBox="1"/>
           <p:nvPr/>
         </p:nvSpPr>
@@ -31206,7 +30576,7 @@
       </p:sp>
       <p:sp>
         <p:nvSpPr>
-          <p:cNvPr id="25" name="TextBox 24"/>
+          <p:cNvPr id="24" name="TextBox 23"/>
           <p:cNvSpPr txBox="1"/>
           <p:nvPr/>
         </p:nvSpPr>
@@ -31248,7 +30618,7 @@
       </p:sp>
       <p:sp>
         <p:nvSpPr>
-          <p:cNvPr id="26" name="TextBox 25"/>
+          <p:cNvPr id="25" name="TextBox 24"/>
           <p:cNvSpPr txBox="1"/>
           <p:nvPr/>
         </p:nvSpPr>
@@ -31364,7 +30734,7 @@
         <p:spPr>
           <a:xfrm>
             <a:off x="640080" y="329184"/>
-            <a:ext cx="5303520" cy="182880"/>
+            <a:ext cx="9875520" cy="182880"/>
           </a:xfrm>
           <a:prstGeom prst="rect">
             <a:avLst/>
@@ -31405,48 +30775,6 @@
         </p:nvSpPr>
         <p:spPr>
           <a:xfrm>
-            <a:off x="5897880" y="310896"/>
-            <a:ext cx="4800600" cy="256032"/>
-          </a:xfrm>
-          <a:prstGeom prst="rect">
-            <a:avLst/>
-          </a:prstGeom>
-          <a:noFill/>
-        </p:spPr>
-        <p:txBody>
-          <a:bodyPr wrap="none" lIns="9144" rIns="9144" tIns="9144" bIns="9144" anchor="t">
-            <a:spAutoFit/>
-          </a:bodyPr>
-          <a:lstStyle/>
-          <a:p>
-            <a:pPr algn="r">
-              <a:spcAft>
-                <a:spcPts val="0"/>
-              </a:spcAft>
-              <a:defRPr sz="680" b="1">
-                <a:solidFill>
-                  <a:srgbClr val="4F6B00"/>
-                </a:solidFill>
-                <a:latin typeface="Inter"/>
-              </a:defRPr>
-            </a:pPr>
-            <a:r>
-              <a:rPr>
-                <a:latin typeface="Inter"/>
-              </a:rPr>
-              <a:t>Illustrative, Gradient Maintained — demo data, not the client's holdings or managers</a:t>
-            </a:r>
-          </a:p>
-        </p:txBody>
-      </p:sp>
-      <p:sp>
-        <p:nvSpPr>
-          <p:cNvPr id="5" name="TextBox 4"/>
-          <p:cNvSpPr txBox="1"/>
-          <p:nvPr/>
-        </p:nvSpPr>
-        <p:spPr>
-          <a:xfrm>
             <a:off x="640080" y="566928"/>
             <a:ext cx="10058400" cy="530352"/>
           </a:xfrm>
@@ -31483,7 +30811,7 @@
       </p:sp>
       <p:sp>
         <p:nvSpPr>
-          <p:cNvPr id="6" name="Rectangle 5"/>
+          <p:cNvPr id="5" name="Rectangle 4"/>
           <p:cNvSpPr/>
           <p:nvPr/>
         </p:nvSpPr>
@@ -31532,7 +30860,7 @@
       </p:sp>
       <p:sp>
         <p:nvSpPr>
-          <p:cNvPr id="7" name="Rectangle 6"/>
+          <p:cNvPr id="6" name="Rectangle 5"/>
           <p:cNvSpPr/>
           <p:nvPr/>
         </p:nvSpPr>
@@ -31581,7 +30909,7 @@
       </p:sp>
       <p:sp>
         <p:nvSpPr>
-          <p:cNvPr id="8" name="TextBox 7"/>
+          <p:cNvPr id="7" name="TextBox 6"/>
           <p:cNvSpPr txBox="1"/>
           <p:nvPr/>
         </p:nvSpPr>
@@ -31623,7 +30951,7 @@
       </p:sp>
       <p:sp>
         <p:nvSpPr>
-          <p:cNvPr id="9" name="Rectangle 8"/>
+          <p:cNvPr id="8" name="Rectangle 7"/>
           <p:cNvSpPr/>
           <p:nvPr/>
         </p:nvSpPr>
@@ -31672,7 +31000,7 @@
       </p:sp>
       <p:sp>
         <p:nvSpPr>
-          <p:cNvPr id="10" name="Rectangle 9"/>
+          <p:cNvPr id="9" name="Rectangle 8"/>
           <p:cNvSpPr/>
           <p:nvPr/>
         </p:nvSpPr>
@@ -31721,7 +31049,7 @@
       </p:sp>
       <p:sp>
         <p:nvSpPr>
-          <p:cNvPr id="11" name="TextBox 10"/>
+          <p:cNvPr id="10" name="TextBox 9"/>
           <p:cNvSpPr txBox="1"/>
           <p:nvPr/>
         </p:nvSpPr>
@@ -31763,7 +31091,7 @@
       </p:sp>
       <p:sp>
         <p:nvSpPr>
-          <p:cNvPr id="12" name="TextBox 11"/>
+          <p:cNvPr id="11" name="TextBox 10"/>
           <p:cNvSpPr txBox="1"/>
           <p:nvPr/>
         </p:nvSpPr>
@@ -31805,7 +31133,7 @@
       </p:sp>
       <p:sp>
         <p:nvSpPr>
-          <p:cNvPr id="13" name="Rectangle 12"/>
+          <p:cNvPr id="12" name="Rectangle 11"/>
           <p:cNvSpPr/>
           <p:nvPr/>
         </p:nvSpPr>
@@ -31854,7 +31182,7 @@
       </p:sp>
       <p:sp>
         <p:nvSpPr>
-          <p:cNvPr id="14" name="TextBox 13"/>
+          <p:cNvPr id="13" name="TextBox 12"/>
           <p:cNvSpPr txBox="1"/>
           <p:nvPr/>
         </p:nvSpPr>
@@ -31896,7 +31224,7 @@
       </p:sp>
       <p:sp>
         <p:nvSpPr>
-          <p:cNvPr id="15" name="TextBox 14"/>
+          <p:cNvPr id="14" name="TextBox 13"/>
           <p:cNvSpPr txBox="1"/>
           <p:nvPr/>
         </p:nvSpPr>
@@ -31938,7 +31266,7 @@
       </p:sp>
       <p:sp>
         <p:nvSpPr>
-          <p:cNvPr id="16" name="TextBox 15"/>
+          <p:cNvPr id="15" name="TextBox 14"/>
           <p:cNvSpPr txBox="1"/>
           <p:nvPr/>
         </p:nvSpPr>
@@ -32054,7 +31382,7 @@
         <p:spPr>
           <a:xfrm>
             <a:off x="640080" y="329184"/>
-            <a:ext cx="5303520" cy="182880"/>
+            <a:ext cx="9875520" cy="182880"/>
           </a:xfrm>
           <a:prstGeom prst="rect">
             <a:avLst/>
@@ -32095,48 +31423,6 @@
         </p:nvSpPr>
         <p:spPr>
           <a:xfrm>
-            <a:off x="5897880" y="310896"/>
-            <a:ext cx="4800600" cy="256032"/>
-          </a:xfrm>
-          <a:prstGeom prst="rect">
-            <a:avLst/>
-          </a:prstGeom>
-          <a:noFill/>
-        </p:spPr>
-        <p:txBody>
-          <a:bodyPr wrap="none" lIns="9144" rIns="9144" tIns="9144" bIns="9144" anchor="t">
-            <a:spAutoFit/>
-          </a:bodyPr>
-          <a:lstStyle/>
-          <a:p>
-            <a:pPr algn="r">
-              <a:spcAft>
-                <a:spcPts val="0"/>
-              </a:spcAft>
-              <a:defRPr sz="680" b="1">
-                <a:solidFill>
-                  <a:srgbClr val="4F6B00"/>
-                </a:solidFill>
-                <a:latin typeface="Inter"/>
-              </a:defRPr>
-            </a:pPr>
-            <a:r>
-              <a:rPr>
-                <a:latin typeface="Inter"/>
-              </a:rPr>
-              <a:t>Illustrative, Gradient Maintained — demo data, not the client's holdings or managers</a:t>
-            </a:r>
-          </a:p>
-        </p:txBody>
-      </p:sp>
-      <p:sp>
-        <p:nvSpPr>
-          <p:cNvPr id="5" name="TextBox 4"/>
-          <p:cNvSpPr txBox="1"/>
-          <p:nvPr/>
-        </p:nvSpPr>
-        <p:spPr>
-          <a:xfrm>
             <a:off x="640080" y="566928"/>
             <a:ext cx="10058400" cy="530352"/>
           </a:xfrm>
@@ -32173,7 +31459,7 @@
       </p:sp>
       <p:sp>
         <p:nvSpPr>
-          <p:cNvPr id="6" name="Rectangle 5"/>
+          <p:cNvPr id="5" name="Rectangle 4"/>
           <p:cNvSpPr/>
           <p:nvPr/>
         </p:nvSpPr>
@@ -32222,7 +31508,7 @@
       </p:sp>
       <p:sp>
         <p:nvSpPr>
-          <p:cNvPr id="7" name="Rectangle 6"/>
+          <p:cNvPr id="6" name="Rectangle 5"/>
           <p:cNvSpPr/>
           <p:nvPr/>
         </p:nvSpPr>
@@ -32271,7 +31557,7 @@
       </p:sp>
       <p:sp>
         <p:nvSpPr>
-          <p:cNvPr id="8" name="TextBox 7"/>
+          <p:cNvPr id="7" name="TextBox 6"/>
           <p:cNvSpPr txBox="1"/>
           <p:nvPr/>
         </p:nvSpPr>
@@ -32313,7 +31599,7 @@
       </p:sp>
       <p:graphicFrame>
         <p:nvGraphicFramePr>
-          <p:cNvPr id="9" name="Table 8"/>
+          <p:cNvPr id="8" name="Table 7"/>
           <p:cNvGraphicFramePr>
             <a:graphicFrameLocks noGrp="1"/>
           </p:cNvGraphicFramePr>
@@ -32787,7 +32073,7 @@
       </p:graphicFrame>
       <p:sp>
         <p:nvSpPr>
-          <p:cNvPr id="10" name="TextBox 9"/>
+          <p:cNvPr id="9" name="TextBox 8"/>
           <p:cNvSpPr txBox="1"/>
           <p:nvPr/>
         </p:nvSpPr>
@@ -32829,7 +32115,7 @@
       </p:sp>
       <p:graphicFrame>
         <p:nvGraphicFramePr>
-          <p:cNvPr id="11" name="Table 10"/>
+          <p:cNvPr id="10" name="Table 9"/>
           <p:cNvGraphicFramePr>
             <a:graphicFrameLocks noGrp="1"/>
           </p:cNvGraphicFramePr>
@@ -33351,7 +32637,7 @@
       </p:graphicFrame>
       <p:sp>
         <p:nvSpPr>
-          <p:cNvPr id="12" name="Rectangle 11"/>
+          <p:cNvPr id="11" name="Rectangle 10"/>
           <p:cNvSpPr/>
           <p:nvPr/>
         </p:nvSpPr>
@@ -33400,7 +32686,7 @@
       </p:sp>
       <p:sp>
         <p:nvSpPr>
-          <p:cNvPr id="13" name="TextBox 12"/>
+          <p:cNvPr id="12" name="TextBox 11"/>
           <p:cNvSpPr txBox="1"/>
           <p:nvPr/>
         </p:nvSpPr>
@@ -33442,7 +32728,7 @@
       </p:sp>
       <p:sp>
         <p:nvSpPr>
-          <p:cNvPr id="14" name="TextBox 13"/>
+          <p:cNvPr id="13" name="TextBox 12"/>
           <p:cNvSpPr txBox="1"/>
           <p:nvPr/>
         </p:nvSpPr>
@@ -33484,7 +32770,7 @@
       </p:sp>
       <p:sp>
         <p:nvSpPr>
-          <p:cNvPr id="15" name="TextBox 14"/>
+          <p:cNvPr id="14" name="TextBox 13"/>
           <p:cNvSpPr txBox="1"/>
           <p:nvPr/>
         </p:nvSpPr>
@@ -33600,7 +32886,7 @@
         <p:spPr>
           <a:xfrm>
             <a:off x="640080" y="329184"/>
-            <a:ext cx="5303520" cy="182880"/>
+            <a:ext cx="9875520" cy="182880"/>
           </a:xfrm>
           <a:prstGeom prst="rect">
             <a:avLst/>
@@ -33641,48 +32927,6 @@
         </p:nvSpPr>
         <p:spPr>
           <a:xfrm>
-            <a:off x="5897880" y="310896"/>
-            <a:ext cx="4800600" cy="256032"/>
-          </a:xfrm>
-          <a:prstGeom prst="rect">
-            <a:avLst/>
-          </a:prstGeom>
-          <a:noFill/>
-        </p:spPr>
-        <p:txBody>
-          <a:bodyPr wrap="none" lIns="9144" rIns="9144" tIns="9144" bIns="9144" anchor="t">
-            <a:spAutoFit/>
-          </a:bodyPr>
-          <a:lstStyle/>
-          <a:p>
-            <a:pPr algn="r">
-              <a:spcAft>
-                <a:spcPts val="0"/>
-              </a:spcAft>
-              <a:defRPr sz="680" b="1">
-                <a:solidFill>
-                  <a:srgbClr val="4F6B00"/>
-                </a:solidFill>
-                <a:latin typeface="Inter"/>
-              </a:defRPr>
-            </a:pPr>
-            <a:r>
-              <a:rPr>
-                <a:latin typeface="Inter"/>
-              </a:rPr>
-              <a:t>Illustrative, Gradient Maintained — demo data, not the client's holdings or managers</a:t>
-            </a:r>
-          </a:p>
-        </p:txBody>
-      </p:sp>
-      <p:sp>
-        <p:nvSpPr>
-          <p:cNvPr id="5" name="TextBox 4"/>
-          <p:cNvSpPr txBox="1"/>
-          <p:nvPr/>
-        </p:nvSpPr>
-        <p:spPr>
-          <a:xfrm>
             <a:off x="640080" y="566928"/>
             <a:ext cx="10058400" cy="530352"/>
           </a:xfrm>
@@ -33719,7 +32963,7 @@
       </p:sp>
       <p:sp>
         <p:nvSpPr>
-          <p:cNvPr id="6" name="Rectangle 5"/>
+          <p:cNvPr id="5" name="Rectangle 4"/>
           <p:cNvSpPr/>
           <p:nvPr/>
         </p:nvSpPr>
@@ -33768,7 +33012,7 @@
       </p:sp>
       <p:sp>
         <p:nvSpPr>
-          <p:cNvPr id="7" name="Rectangle 6"/>
+          <p:cNvPr id="6" name="Rectangle 5"/>
           <p:cNvSpPr/>
           <p:nvPr/>
         </p:nvSpPr>
@@ -33817,7 +33061,7 @@
       </p:sp>
       <p:sp>
         <p:nvSpPr>
-          <p:cNvPr id="8" name="TextBox 7"/>
+          <p:cNvPr id="7" name="TextBox 6"/>
           <p:cNvSpPr txBox="1"/>
           <p:nvPr/>
         </p:nvSpPr>
@@ -33859,7 +33103,7 @@
       </p:sp>
       <p:sp>
         <p:nvSpPr>
-          <p:cNvPr id="9" name="TextBox 8"/>
+          <p:cNvPr id="8" name="TextBox 7"/>
           <p:cNvSpPr txBox="1"/>
           <p:nvPr/>
         </p:nvSpPr>
@@ -33901,7 +33145,7 @@
       </p:sp>
       <p:graphicFrame>
         <p:nvGraphicFramePr>
-          <p:cNvPr id="10" name="Chart 9"/>
+          <p:cNvPr id="9" name="Chart 8"/>
           <p:cNvGraphicFramePr>
             <a:graphicFrameLocks noGrp="1"/>
           </p:cNvGraphicFramePr>
@@ -33919,7 +33163,7 @@
       </p:graphicFrame>
       <p:sp>
         <p:nvSpPr>
-          <p:cNvPr id="11" name="Rectangle 10"/>
+          <p:cNvPr id="10" name="Rectangle 9"/>
           <p:cNvSpPr/>
           <p:nvPr/>
         </p:nvSpPr>
@@ -33968,7 +33212,7 @@
       </p:sp>
       <p:sp>
         <p:nvSpPr>
-          <p:cNvPr id="12" name="TextBox 11"/>
+          <p:cNvPr id="11" name="TextBox 10"/>
           <p:cNvSpPr txBox="1"/>
           <p:nvPr/>
         </p:nvSpPr>
@@ -34010,7 +33254,7 @@
       </p:sp>
       <p:graphicFrame>
         <p:nvGraphicFramePr>
-          <p:cNvPr id="13" name="Chart 12"/>
+          <p:cNvPr id="12" name="Chart 11"/>
           <p:cNvGraphicFramePr>
             <a:graphicFrameLocks noGrp="1"/>
           </p:cNvGraphicFramePr>
@@ -34028,7 +33272,7 @@
       </p:graphicFrame>
       <p:sp>
         <p:nvSpPr>
-          <p:cNvPr id="14" name="Rectangle 13"/>
+          <p:cNvPr id="13" name="Rectangle 12"/>
           <p:cNvSpPr/>
           <p:nvPr/>
         </p:nvSpPr>
@@ -34077,7 +33321,7 @@
       </p:sp>
       <p:sp>
         <p:nvSpPr>
-          <p:cNvPr id="15" name="TextBox 14"/>
+          <p:cNvPr id="14" name="TextBox 13"/>
           <p:cNvSpPr txBox="1"/>
           <p:nvPr/>
         </p:nvSpPr>
@@ -34119,7 +33363,7 @@
       </p:sp>
       <p:sp>
         <p:nvSpPr>
-          <p:cNvPr id="16" name="TextBox 15"/>
+          <p:cNvPr id="15" name="TextBox 14"/>
           <p:cNvSpPr txBox="1"/>
           <p:nvPr/>
         </p:nvSpPr>
@@ -34161,7 +33405,7 @@
       </p:sp>
       <p:sp>
         <p:nvSpPr>
-          <p:cNvPr id="17" name="TextBox 16"/>
+          <p:cNvPr id="16" name="TextBox 15"/>
           <p:cNvSpPr txBox="1"/>
           <p:nvPr/>
         </p:nvSpPr>
@@ -34277,7 +33521,7 @@
         <p:spPr>
           <a:xfrm>
             <a:off x="640080" y="329184"/>
-            <a:ext cx="5303520" cy="182880"/>
+            <a:ext cx="9875520" cy="182880"/>
           </a:xfrm>
           <a:prstGeom prst="rect">
             <a:avLst/>
@@ -34318,48 +33562,6 @@
         </p:nvSpPr>
         <p:spPr>
           <a:xfrm>
-            <a:off x="5897880" y="310896"/>
-            <a:ext cx="4800600" cy="256032"/>
-          </a:xfrm>
-          <a:prstGeom prst="rect">
-            <a:avLst/>
-          </a:prstGeom>
-          <a:noFill/>
-        </p:spPr>
-        <p:txBody>
-          <a:bodyPr wrap="none" lIns="9144" rIns="9144" tIns="9144" bIns="9144" anchor="t">
-            <a:spAutoFit/>
-          </a:bodyPr>
-          <a:lstStyle/>
-          <a:p>
-            <a:pPr algn="r">
-              <a:spcAft>
-                <a:spcPts val="0"/>
-              </a:spcAft>
-              <a:defRPr sz="680" b="1">
-                <a:solidFill>
-                  <a:srgbClr val="4F6B00"/>
-                </a:solidFill>
-                <a:latin typeface="Inter"/>
-              </a:defRPr>
-            </a:pPr>
-            <a:r>
-              <a:rPr>
-                <a:latin typeface="Inter"/>
-              </a:rPr>
-              <a:t>Illustrative, Gradient Maintained — demo data, not the client's holdings or managers</a:t>
-            </a:r>
-          </a:p>
-        </p:txBody>
-      </p:sp>
-      <p:sp>
-        <p:nvSpPr>
-          <p:cNvPr id="5" name="TextBox 4"/>
-          <p:cNvSpPr txBox="1"/>
-          <p:nvPr/>
-        </p:nvSpPr>
-        <p:spPr>
-          <a:xfrm>
             <a:off x="640080" y="566928"/>
             <a:ext cx="10058400" cy="530352"/>
           </a:xfrm>
@@ -34396,7 +33598,7 @@
       </p:sp>
       <p:sp>
         <p:nvSpPr>
-          <p:cNvPr id="6" name="Rectangle 5"/>
+          <p:cNvPr id="5" name="Rectangle 4"/>
           <p:cNvSpPr/>
           <p:nvPr/>
         </p:nvSpPr>
@@ -34445,7 +33647,7 @@
       </p:sp>
       <p:sp>
         <p:nvSpPr>
-          <p:cNvPr id="7" name="Rectangle 6"/>
+          <p:cNvPr id="6" name="Rectangle 5"/>
           <p:cNvSpPr/>
           <p:nvPr/>
         </p:nvSpPr>
@@ -34494,7 +33696,7 @@
       </p:sp>
       <p:sp>
         <p:nvSpPr>
-          <p:cNvPr id="8" name="TextBox 7"/>
+          <p:cNvPr id="7" name="TextBox 6"/>
           <p:cNvSpPr txBox="1"/>
           <p:nvPr/>
         </p:nvSpPr>
@@ -34536,7 +33738,7 @@
       </p:sp>
       <p:sp>
         <p:nvSpPr>
-          <p:cNvPr id="9" name="TextBox 8"/>
+          <p:cNvPr id="8" name="TextBox 7"/>
           <p:cNvSpPr txBox="1"/>
           <p:nvPr/>
         </p:nvSpPr>
@@ -34578,7 +33780,7 @@
       </p:sp>
       <p:graphicFrame>
         <p:nvGraphicFramePr>
-          <p:cNvPr id="10" name="Chart 9"/>
+          <p:cNvPr id="9" name="Chart 8"/>
           <p:cNvGraphicFramePr>
             <a:graphicFrameLocks noGrp="1"/>
           </p:cNvGraphicFramePr>
@@ -34596,7 +33798,7 @@
       </p:graphicFrame>
       <p:sp>
         <p:nvSpPr>
-          <p:cNvPr id="11" name="Rectangle 10"/>
+          <p:cNvPr id="10" name="Rectangle 9"/>
           <p:cNvSpPr/>
           <p:nvPr/>
         </p:nvSpPr>
@@ -34645,7 +33847,7 @@
       </p:sp>
       <p:sp>
         <p:nvSpPr>
-          <p:cNvPr id="12" name="TextBox 11"/>
+          <p:cNvPr id="11" name="TextBox 10"/>
           <p:cNvSpPr txBox="1"/>
           <p:nvPr/>
         </p:nvSpPr>
@@ -34687,7 +33889,7 @@
       </p:sp>
       <p:sp>
         <p:nvSpPr>
-          <p:cNvPr id="13" name="TextBox 12"/>
+          <p:cNvPr id="12" name="TextBox 11"/>
           <p:cNvSpPr txBox="1"/>
           <p:nvPr/>
         </p:nvSpPr>
@@ -34729,7 +33931,7 @@
       </p:sp>
       <p:sp>
         <p:nvSpPr>
-          <p:cNvPr id="14" name="TextBox 13"/>
+          <p:cNvPr id="13" name="TextBox 12"/>
           <p:cNvSpPr txBox="1"/>
           <p:nvPr/>
         </p:nvSpPr>
@@ -34845,7 +34047,7 @@
         <p:spPr>
           <a:xfrm>
             <a:off x="640080" y="329184"/>
-            <a:ext cx="5303520" cy="182880"/>
+            <a:ext cx="9875520" cy="182880"/>
           </a:xfrm>
           <a:prstGeom prst="rect">
             <a:avLst/>
@@ -34886,48 +34088,6 @@
         </p:nvSpPr>
         <p:spPr>
           <a:xfrm>
-            <a:off x="5897880" y="310896"/>
-            <a:ext cx="4800600" cy="256032"/>
-          </a:xfrm>
-          <a:prstGeom prst="rect">
-            <a:avLst/>
-          </a:prstGeom>
-          <a:noFill/>
-        </p:spPr>
-        <p:txBody>
-          <a:bodyPr wrap="none" lIns="9144" rIns="9144" tIns="9144" bIns="9144" anchor="t">
-            <a:spAutoFit/>
-          </a:bodyPr>
-          <a:lstStyle/>
-          <a:p>
-            <a:pPr algn="r">
-              <a:spcAft>
-                <a:spcPts val="0"/>
-              </a:spcAft>
-              <a:defRPr sz="680" b="1">
-                <a:solidFill>
-                  <a:srgbClr val="4F6B00"/>
-                </a:solidFill>
-                <a:latin typeface="Inter"/>
-              </a:defRPr>
-            </a:pPr>
-            <a:r>
-              <a:rPr>
-                <a:latin typeface="Inter"/>
-              </a:rPr>
-              <a:t>Illustrative, Gradient Maintained — demo data, not the client's holdings or managers</a:t>
-            </a:r>
-          </a:p>
-        </p:txBody>
-      </p:sp>
-      <p:sp>
-        <p:nvSpPr>
-          <p:cNvPr id="5" name="TextBox 4"/>
-          <p:cNvSpPr txBox="1"/>
-          <p:nvPr/>
-        </p:nvSpPr>
-        <p:spPr>
-          <a:xfrm>
             <a:off x="640080" y="566928"/>
             <a:ext cx="10058400" cy="530352"/>
           </a:xfrm>
@@ -34964,7 +34124,7 @@
       </p:sp>
       <p:sp>
         <p:nvSpPr>
-          <p:cNvPr id="6" name="Rectangle 5"/>
+          <p:cNvPr id="5" name="Rectangle 4"/>
           <p:cNvSpPr/>
           <p:nvPr/>
         </p:nvSpPr>
@@ -35013,7 +34173,7 @@
       </p:sp>
       <p:sp>
         <p:nvSpPr>
-          <p:cNvPr id="7" name="Rectangle 6"/>
+          <p:cNvPr id="6" name="Rectangle 5"/>
           <p:cNvSpPr/>
           <p:nvPr/>
         </p:nvSpPr>
@@ -35062,7 +34222,7 @@
       </p:sp>
       <p:sp>
         <p:nvSpPr>
-          <p:cNvPr id="8" name="TextBox 7"/>
+          <p:cNvPr id="7" name="TextBox 6"/>
           <p:cNvSpPr txBox="1"/>
           <p:nvPr/>
         </p:nvSpPr>
@@ -35104,7 +34264,7 @@
       </p:sp>
       <p:sp>
         <p:nvSpPr>
-          <p:cNvPr id="9" name="TextBox 8"/>
+          <p:cNvPr id="8" name="TextBox 7"/>
           <p:cNvSpPr txBox="1"/>
           <p:nvPr/>
         </p:nvSpPr>
@@ -35146,7 +34306,7 @@
       </p:sp>
       <p:graphicFrame>
         <p:nvGraphicFramePr>
-          <p:cNvPr id="10" name="Table 9"/>
+          <p:cNvPr id="9" name="Table 8"/>
           <p:cNvGraphicFramePr>
             <a:graphicFrameLocks noGrp="1"/>
           </p:cNvGraphicFramePr>
@@ -35860,7 +35020,7 @@
       </p:graphicFrame>
       <p:sp>
         <p:nvSpPr>
-          <p:cNvPr id="11" name="TextBox 10"/>
+          <p:cNvPr id="10" name="TextBox 9"/>
           <p:cNvSpPr txBox="1"/>
           <p:nvPr/>
         </p:nvSpPr>
@@ -35902,7 +35062,7 @@
       </p:sp>
       <p:sp>
         <p:nvSpPr>
-          <p:cNvPr id="12" name="Rectangle 11"/>
+          <p:cNvPr id="11" name="Rectangle 10"/>
           <p:cNvSpPr/>
           <p:nvPr/>
         </p:nvSpPr>
@@ -35951,7 +35111,7 @@
       </p:sp>
       <p:sp>
         <p:nvSpPr>
-          <p:cNvPr id="13" name="Rectangle 12"/>
+          <p:cNvPr id="12" name="Rectangle 11"/>
           <p:cNvSpPr/>
           <p:nvPr/>
         </p:nvSpPr>
@@ -36000,7 +35160,7 @@
       </p:sp>
       <p:sp>
         <p:nvSpPr>
-          <p:cNvPr id="14" name="TextBox 13"/>
+          <p:cNvPr id="13" name="TextBox 12"/>
           <p:cNvSpPr txBox="1"/>
           <p:nvPr/>
         </p:nvSpPr>
@@ -36042,7 +35202,7 @@
       </p:sp>
       <p:sp>
         <p:nvSpPr>
-          <p:cNvPr id="15" name="TextBox 14"/>
+          <p:cNvPr id="14" name="TextBox 13"/>
           <p:cNvSpPr txBox="1"/>
           <p:nvPr/>
         </p:nvSpPr>
@@ -36084,7 +35244,7 @@
       </p:sp>
       <p:sp>
         <p:nvSpPr>
-          <p:cNvPr id="16" name="Rectangle 15"/>
+          <p:cNvPr id="15" name="Rectangle 14"/>
           <p:cNvSpPr/>
           <p:nvPr/>
         </p:nvSpPr>
@@ -36133,7 +35293,7 @@
       </p:sp>
       <p:sp>
         <p:nvSpPr>
-          <p:cNvPr id="17" name="TextBox 16"/>
+          <p:cNvPr id="16" name="TextBox 15"/>
           <p:cNvSpPr txBox="1"/>
           <p:nvPr/>
         </p:nvSpPr>
@@ -36175,7 +35335,7 @@
       </p:sp>
       <p:sp>
         <p:nvSpPr>
-          <p:cNvPr id="18" name="TextBox 17"/>
+          <p:cNvPr id="17" name="TextBox 16"/>
           <p:cNvSpPr txBox="1"/>
           <p:nvPr/>
         </p:nvSpPr>
@@ -36217,7 +35377,7 @@
       </p:sp>
       <p:sp>
         <p:nvSpPr>
-          <p:cNvPr id="19" name="TextBox 18"/>
+          <p:cNvPr id="18" name="TextBox 17"/>
           <p:cNvSpPr txBox="1"/>
           <p:nvPr/>
         </p:nvSpPr>
@@ -36333,7 +35493,7 @@
         <p:spPr>
           <a:xfrm>
             <a:off x="640080" y="329184"/>
-            <a:ext cx="5303520" cy="182880"/>
+            <a:ext cx="9875520" cy="182880"/>
           </a:xfrm>
           <a:prstGeom prst="rect">
             <a:avLst/>
@@ -36374,48 +35534,6 @@
         </p:nvSpPr>
         <p:spPr>
           <a:xfrm>
-            <a:off x="5897880" y="310896"/>
-            <a:ext cx="4800600" cy="256032"/>
-          </a:xfrm>
-          <a:prstGeom prst="rect">
-            <a:avLst/>
-          </a:prstGeom>
-          <a:noFill/>
-        </p:spPr>
-        <p:txBody>
-          <a:bodyPr wrap="none" lIns="9144" rIns="9144" tIns="9144" bIns="9144" anchor="t">
-            <a:spAutoFit/>
-          </a:bodyPr>
-          <a:lstStyle/>
-          <a:p>
-            <a:pPr algn="r">
-              <a:spcAft>
-                <a:spcPts val="0"/>
-              </a:spcAft>
-              <a:defRPr sz="680" b="1">
-                <a:solidFill>
-                  <a:srgbClr val="4F6B00"/>
-                </a:solidFill>
-                <a:latin typeface="Inter"/>
-              </a:defRPr>
-            </a:pPr>
-            <a:r>
-              <a:rPr>
-                <a:latin typeface="Inter"/>
-              </a:rPr>
-              <a:t>Illustrative, Gradient Maintained — demo data, not the client's holdings or managers</a:t>
-            </a:r>
-          </a:p>
-        </p:txBody>
-      </p:sp>
-      <p:sp>
-        <p:nvSpPr>
-          <p:cNvPr id="5" name="TextBox 4"/>
-          <p:cNvSpPr txBox="1"/>
-          <p:nvPr/>
-        </p:nvSpPr>
-        <p:spPr>
-          <a:xfrm>
             <a:off x="640080" y="566928"/>
             <a:ext cx="10058400" cy="530352"/>
           </a:xfrm>
@@ -36452,7 +35570,7 @@
       </p:sp>
       <p:sp>
         <p:nvSpPr>
-          <p:cNvPr id="6" name="Rectangle 5"/>
+          <p:cNvPr id="5" name="Rectangle 4"/>
           <p:cNvSpPr/>
           <p:nvPr/>
         </p:nvSpPr>
@@ -36501,7 +35619,7 @@
       </p:sp>
       <p:sp>
         <p:nvSpPr>
-          <p:cNvPr id="7" name="Rectangle 6"/>
+          <p:cNvPr id="6" name="Rectangle 5"/>
           <p:cNvSpPr/>
           <p:nvPr/>
         </p:nvSpPr>
@@ -36550,7 +35668,7 @@
       </p:sp>
       <p:sp>
         <p:nvSpPr>
-          <p:cNvPr id="8" name="TextBox 7"/>
+          <p:cNvPr id="7" name="TextBox 6"/>
           <p:cNvSpPr txBox="1"/>
           <p:nvPr/>
         </p:nvSpPr>
@@ -36592,7 +35710,7 @@
       </p:sp>
       <p:sp>
         <p:nvSpPr>
-          <p:cNvPr id="9" name="TextBox 8"/>
+          <p:cNvPr id="8" name="TextBox 7"/>
           <p:cNvSpPr txBox="1"/>
           <p:nvPr/>
         </p:nvSpPr>
@@ -36634,7 +35752,7 @@
       </p:sp>
       <p:graphicFrame>
         <p:nvGraphicFramePr>
-          <p:cNvPr id="10" name="Chart 9"/>
+          <p:cNvPr id="9" name="Chart 8"/>
           <p:cNvGraphicFramePr>
             <a:graphicFrameLocks noGrp="1"/>
           </p:cNvGraphicFramePr>
@@ -36652,7 +35770,7 @@
       </p:graphicFrame>
       <p:sp>
         <p:nvSpPr>
-          <p:cNvPr id="11" name="Rectangle 10"/>
+          <p:cNvPr id="10" name="Rectangle 9"/>
           <p:cNvSpPr/>
           <p:nvPr/>
         </p:nvSpPr>
@@ -36701,7 +35819,7 @@
       </p:sp>
       <p:sp>
         <p:nvSpPr>
-          <p:cNvPr id="12" name="TextBox 11"/>
+          <p:cNvPr id="11" name="TextBox 10"/>
           <p:cNvSpPr txBox="1"/>
           <p:nvPr/>
         </p:nvSpPr>
@@ -36743,7 +35861,7 @@
       </p:sp>
       <p:graphicFrame>
         <p:nvGraphicFramePr>
-          <p:cNvPr id="13" name="Table 12"/>
+          <p:cNvPr id="12" name="Table 11"/>
           <p:cNvGraphicFramePr>
             <a:graphicFrameLocks noGrp="1"/>
           </p:cNvGraphicFramePr>
@@ -37049,7 +36167,7 @@
       </p:graphicFrame>
       <p:sp>
         <p:nvSpPr>
-          <p:cNvPr id="14" name="Rectangle 13"/>
+          <p:cNvPr id="13" name="Rectangle 12"/>
           <p:cNvSpPr/>
           <p:nvPr/>
         </p:nvSpPr>
@@ -37098,7 +36216,7 @@
       </p:sp>
       <p:sp>
         <p:nvSpPr>
-          <p:cNvPr id="15" name="TextBox 14"/>
+          <p:cNvPr id="14" name="TextBox 13"/>
           <p:cNvSpPr txBox="1"/>
           <p:nvPr/>
         </p:nvSpPr>
@@ -37140,7 +36258,7 @@
       </p:sp>
       <p:sp>
         <p:nvSpPr>
-          <p:cNvPr id="16" name="TextBox 15"/>
+          <p:cNvPr id="15" name="TextBox 14"/>
           <p:cNvSpPr txBox="1"/>
           <p:nvPr/>
         </p:nvSpPr>
@@ -37182,7 +36300,7 @@
       </p:sp>
       <p:sp>
         <p:nvSpPr>
-          <p:cNvPr id="17" name="TextBox 16"/>
+          <p:cNvPr id="16" name="TextBox 15"/>
           <p:cNvSpPr txBox="1"/>
           <p:nvPr/>
         </p:nvSpPr>
